--- a/PRESENTATION.pptx
+++ b/PRESENTATION.pptx
@@ -19,9 +19,12 @@
     <p:sldId id="267" r:id="rId13"/>
     <p:sldId id="268" r:id="rId14"/>
     <p:sldId id="269" r:id="rId15"/>
+    <p:sldId id="270" r:id="rId16"/>
+    <p:sldId id="271" r:id="rId17"/>
+    <p:sldId id="272" r:id="rId18"/>
   </p:sldIdLst>
   <p:notesMasterIdLst>
-    <p:notesMasterId r:id="rId16"/>
+    <p:notesMasterId r:id="rId19"/>
   </p:notesMasterIdLst>
   <p:sldSz cx="12191695" cy="6858000"/>
   <p:notesSz cx="6858000" cy="12191695"/>
@@ -603,7 +606,7 @@
           <a:p>
             <a:r>
               <a:rPr lang="en-US" dirty="0"/>
-              <a:t>Reliability &amp; trust (2 min — pre-empts the 'is it safe?' question). 'For a retailer, an agent that touches orders has to be trustworthy. GOOPHER never substitutes, always confirms before charging, can't loop by construction, keeps durable shared state, self-heals, and is fully observable. These aren't promises — most are visible live in the /dev portal.'</a:t>
+              <a:t>Challenges (2–3 min — shows hands-on depth, which the panel scores). 'Building this surfaced real problems. ADK let the model skip sub-agents and a SequentialAgent can't be an AgentTool — so I moved pre-processing to deterministic code and used agent-as-tool. Gemini 2.5's thinking starved the answer on vision and the ReAct advisor — fixed with thinking_budget=0 plus a grounded synthesis fallback. The ADK path isn't testable in CI, so a cloud-only bug could hide — I added a CI-simulation that blocks the google packages and runs everything through the fallback. I kept the LLM from substituting or auto-charging with a deterministic confirm-before-charge gate. Context across channels/languages lives in one Firestore session store. And I learned the SDK/quota gotchas: google.genai for Vertex, and pin the right model. Each of these is documented in LEARNINGS.md.'</a:t>
             </a:r>
             <a:endParaRPr lang="en-US" dirty="0"/>
           </a:p>
@@ -691,7 +694,7 @@
           <a:p>
             <a:r>
               <a:rPr lang="en-US" dirty="0"/>
-              <a:t>Business value (2–3 min — speak to the VP of Strategy). 'Translate the tech into outcomes: 24/7 self-service across every channel and language; deflection of routine contacts (industry sees 60–80%); near-zero idle cost because it scales to zero; and one agent replacing three hand-offs. The growth levers: higher conversion &amp; basket size from natural discovery and see-it-shop-it; instant global reach without rebuilding per market; lower cost to serve; and brand-safe automation. I'm flagging the numbers as illustrative benchmarks — in a pilot we'd instrument the real deflection, conversion and CSAT.'</a:t>
+              <a:t>Wow factor (90s — the memorable beat). 'If you remember six things: you can SHOW a product to a camera and it orders it; you can BREAK a dependency on stage and watch it self-heal; you can SEE the agent pipeline for every turn; it runs TWO agent styles on one model; the AI never touches payment; and it's production-shaped — tested, CI/CD, self-healing — on Google Cloud. Most demos show one of these; GOOPHER shows all six, live.'</a:t>
             </a:r>
             <a:endParaRPr lang="en-US" dirty="0"/>
           </a:p>
@@ -779,7 +782,7 @@
           <a:p>
             <a:r>
               <a:rPr lang="en-US" dirty="0"/>
-              <a:t>Why Google Cloud (90s — the CE angle). 'Every block of this design is a Google Cloud strength: Gemini on Vertex gives us one multimodal model under managed security and quota; ADK gives first-class multi-agent orchestration and tracing; Cloud Run is serverless and scales to zero; Firestore gives durable shared state; Cloud Trace makes it debuggable; and there's a clean path to CCAI and Vertex Translation. The prototype isn't bolted onto the cloud — it's native to it.'</a:t>
+              <a:t>Reliability &amp; trust (2 min — pre-empts the 'is it safe?' question). 'For a retailer, an agent that touches orders has to be trustworthy. GOOPHER never substitutes, always confirms before charging, can't loop by construction, keeps durable shared state, self-heals, and is fully observable. These aren't promises — most are visible live in the /dev portal.'</a:t>
             </a:r>
             <a:endParaRPr lang="en-US" dirty="0"/>
           </a:p>
@@ -867,7 +870,7 @@
           <a:p>
             <a:r>
               <a:rPr lang="en-US" dirty="0"/>
-              <a:t>Roadmap (90s). 'The prototype already solves the hard parts — the safety gate, shared context, and multimodal. So production is a low-risk ramp: Pilot adds real auth, Secret Manager, hardening, and instrumentation. Integrate connects live OMS/payments and CCAI telephony plus Vertex Translation. Scale is multi-region, evals in CI, and more sub-agents. Each phase is integration and hardening — not re-architecture.'</a:t>
+              <a:t>Business value (2–3 min — speak to the VP of Strategy). 'Translate the tech into outcomes: 24/7 self-service across every channel and language; deflection of routine contacts (industry sees 60–80%); near-zero idle cost because it scales to zero; and one agent replacing three hand-offs. The growth levers: higher conversion &amp; basket size from natural discovery and see-it-shop-it; instant global reach without rebuilding per market; lower cost to serve; and brand-safe automation. I'm flagging the numbers as illustrative benchmarks — in a pilot we'd instrument the real deflection, conversion and CSAT.'</a:t>
             </a:r>
             <a:endParaRPr lang="en-US" dirty="0"/>
           </a:p>
@@ -955,7 +958,7 @@
           <a:p>
             <a:r>
               <a:rPr lang="en-US" dirty="0"/>
-              <a:t>Close + Q&amp;A (30s, then open the floor). 'To recap: one agent across every channel, language and modality; safe to transact because deterministic code does the transacting; and it heals itself. It directly unblocks the engagement and it's native to Google Cloud. I'd love your questions — and I can pull up the live extension or the /dev portal to answer any of them.' Keep QUESTION-ANSWER.md open for crisp answers + where-to-point.</a:t>
+              <a:t>Why Google Cloud (90s — the CE angle). 'Every block of this design is a Google Cloud strength: Gemini on Vertex gives us one multimodal model under managed security and quota; ADK gives first-class multi-agent orchestration and tracing; Cloud Run is serverless and scales to zero; Firestore gives durable shared state; Cloud Trace makes it debuggable; and there's a clean path to CCAI and Vertex Translation. The prototype isn't bolted onto the cloud — it's native to it.'</a:t>
             </a:r>
             <a:endParaRPr lang="en-US" dirty="0"/>
           </a:p>
@@ -979,6 +982,270 @@
             <a:fld id="{F7021451-1387-4CA6-816F-3879F97B5CBC}" type="slidenum">
               <a:rPr lang="en-US"/>
               <a:t>14</a:t>
+            </a:fld>
+            <a:endParaRPr lang="en-US"/>
+          </a:p>
+        </p:txBody>
+      </p:sp>
+    </p:spTree>
+    <p:extLst>
+      <p:ext uri="{BB962C8B-B14F-4D97-AF65-F5344CB8AC3E}">
+        <p14:creationId xmlns:p14="http://schemas.microsoft.com/office/powerpoint/2010/main" val="1024086991"/>
+      </p:ext>
+    </p:extLst>
+  </p:cSld>
+  <p:clrMapOvr>
+    <a:masterClrMapping/>
+  </p:clrMapOvr>
+</p:notes>
+</file>
+
+<file path=ppt/notesSlides/notesSlide15.xml><?xml version="1.0" encoding="utf-8"?>
+<p:notes xmlns:a="http://schemas.openxmlformats.org/drawingml/2006/main" xmlns:r="http://schemas.openxmlformats.org/officeDocument/2006/relationships" xmlns:p="http://schemas.openxmlformats.org/presentationml/2006/main">
+  <p:cSld>
+    <p:spTree>
+      <p:nvGrpSpPr>
+        <p:cNvPr id="1" name=""/>
+        <p:cNvGrpSpPr/>
+        <p:nvPr/>
+      </p:nvGrpSpPr>
+      <p:grpSpPr>
+        <a:xfrm>
+          <a:off x="0" y="0"/>
+          <a:ext cx="0" cy="0"/>
+          <a:chOff x="0" y="0"/>
+          <a:chExt cx="0" cy="0"/>
+        </a:xfrm>
+      </p:grpSpPr>
+      <p:sp>
+        <p:nvSpPr>
+          <p:cNvPr id="2" name="Slide Image Placeholder 1"/>
+          <p:cNvSpPr>
+            <a:spLocks noGrp="1" noRot="1" noChangeAspect="1"/>
+          </p:cNvSpPr>
+          <p:nvPr>
+            <p:ph type="sldImg"/>
+          </p:nvPr>
+        </p:nvSpPr>
+        <p:spPr/>
+      </p:sp>
+      <p:sp>
+        <p:nvSpPr>
+          <p:cNvPr id="3" name="Notes Placeholder 2"/>
+          <p:cNvSpPr>
+            <a:spLocks noGrp="1"/>
+          </p:cNvSpPr>
+          <p:nvPr>
+            <p:ph type="body" idx="1"/>
+          </p:nvPr>
+        </p:nvSpPr>
+        <p:spPr/>
+        <p:txBody>
+          <a:bodyPr/>
+          <a:lstStyle/>
+          <a:p>
+            <a:r>
+              <a:rPr lang="en-US" dirty="0"/>
+              <a:t>Learnings (90s — shows reflection / seniority). 'Six takeaways I'd carry forward: ReAct is a paradigm, not a class — native function-calling is ReAct done better. Keep money off the model — LLM orchestrates, code transacts. Loop safety comes from the graph shape, not prompt wording. A model quirk that bites once will bite again, so encode the fix. Test the path production actually runs — a CI-sim of the ADK fallback caught what local tests couldn't. And centralize state by session_id while keeping agents stateless where you can. All of these are written up in LEARNINGS.md with the war stories behind them.'</a:t>
+            </a:r>
+            <a:endParaRPr lang="en-US" dirty="0"/>
+          </a:p>
+        </p:txBody>
+      </p:sp>
+      <p:sp>
+        <p:nvSpPr>
+          <p:cNvPr id="4" name="Slide Number Placeholder 3"/>
+          <p:cNvSpPr>
+            <a:spLocks noGrp="1"/>
+          </p:cNvSpPr>
+          <p:nvPr>
+            <p:ph type="sldNum" sz="quarter" idx="10"/>
+          </p:nvPr>
+        </p:nvSpPr>
+        <p:spPr/>
+        <p:txBody>
+          <a:bodyPr/>
+          <a:lstStyle/>
+          <a:p>
+            <a:fld id="{F7021451-1387-4CA6-816F-3879F97B5CBC}" type="slidenum">
+              <a:rPr lang="en-US"/>
+              <a:t>15</a:t>
+            </a:fld>
+            <a:endParaRPr lang="en-US"/>
+          </a:p>
+        </p:txBody>
+      </p:sp>
+    </p:spTree>
+    <p:extLst>
+      <p:ext uri="{BB962C8B-B14F-4D97-AF65-F5344CB8AC3E}">
+        <p14:creationId xmlns:p14="http://schemas.microsoft.com/office/powerpoint/2010/main" val="1024086991"/>
+      </p:ext>
+    </p:extLst>
+  </p:cSld>
+  <p:clrMapOvr>
+    <a:masterClrMapping/>
+  </p:clrMapOvr>
+</p:notes>
+</file>
+
+<file path=ppt/notesSlides/notesSlide16.xml><?xml version="1.0" encoding="utf-8"?>
+<p:notes xmlns:a="http://schemas.openxmlformats.org/drawingml/2006/main" xmlns:r="http://schemas.openxmlformats.org/officeDocument/2006/relationships" xmlns:p="http://schemas.openxmlformats.org/presentationml/2006/main">
+  <p:cSld>
+    <p:spTree>
+      <p:nvGrpSpPr>
+        <p:cNvPr id="1" name=""/>
+        <p:cNvGrpSpPr/>
+        <p:nvPr/>
+      </p:nvGrpSpPr>
+      <p:grpSpPr>
+        <a:xfrm>
+          <a:off x="0" y="0"/>
+          <a:ext cx="0" cy="0"/>
+          <a:chOff x="0" y="0"/>
+          <a:chExt cx="0" cy="0"/>
+        </a:xfrm>
+      </p:grpSpPr>
+      <p:sp>
+        <p:nvSpPr>
+          <p:cNvPr id="2" name="Slide Image Placeholder 1"/>
+          <p:cNvSpPr>
+            <a:spLocks noGrp="1" noRot="1" noChangeAspect="1"/>
+          </p:cNvSpPr>
+          <p:nvPr>
+            <p:ph type="sldImg"/>
+          </p:nvPr>
+        </p:nvSpPr>
+        <p:spPr/>
+      </p:sp>
+      <p:sp>
+        <p:nvSpPr>
+          <p:cNvPr id="3" name="Notes Placeholder 2"/>
+          <p:cNvSpPr>
+            <a:spLocks noGrp="1"/>
+          </p:cNvSpPr>
+          <p:nvPr>
+            <p:ph type="body" idx="1"/>
+          </p:nvPr>
+        </p:nvSpPr>
+        <p:spPr/>
+        <p:txBody>
+          <a:bodyPr/>
+          <a:lstStyle/>
+          <a:p>
+            <a:r>
+              <a:rPr lang="en-US" dirty="0"/>
+              <a:t>Roadmap (90s). 'The prototype already solves the hard parts — the safety gate, shared context, and multimodal. So production is a low-risk ramp: Pilot adds real auth, Secret Manager, hardening, and instrumentation. Integrate connects live OMS/payments and CCAI telephony plus Vertex Translation. Scale is multi-region, evals in CI, and more sub-agents. Each phase is integration and hardening — not re-architecture.'</a:t>
+            </a:r>
+            <a:endParaRPr lang="en-US" dirty="0"/>
+          </a:p>
+        </p:txBody>
+      </p:sp>
+      <p:sp>
+        <p:nvSpPr>
+          <p:cNvPr id="4" name="Slide Number Placeholder 3"/>
+          <p:cNvSpPr>
+            <a:spLocks noGrp="1"/>
+          </p:cNvSpPr>
+          <p:nvPr>
+            <p:ph type="sldNum" sz="quarter" idx="10"/>
+          </p:nvPr>
+        </p:nvSpPr>
+        <p:spPr/>
+        <p:txBody>
+          <a:bodyPr/>
+          <a:lstStyle/>
+          <a:p>
+            <a:fld id="{F7021451-1387-4CA6-816F-3879F97B5CBC}" type="slidenum">
+              <a:rPr lang="en-US"/>
+              <a:t>16</a:t>
+            </a:fld>
+            <a:endParaRPr lang="en-US"/>
+          </a:p>
+        </p:txBody>
+      </p:sp>
+    </p:spTree>
+    <p:extLst>
+      <p:ext uri="{BB962C8B-B14F-4D97-AF65-F5344CB8AC3E}">
+        <p14:creationId xmlns:p14="http://schemas.microsoft.com/office/powerpoint/2010/main" val="1024086991"/>
+      </p:ext>
+    </p:extLst>
+  </p:cSld>
+  <p:clrMapOvr>
+    <a:masterClrMapping/>
+  </p:clrMapOvr>
+</p:notes>
+</file>
+
+<file path=ppt/notesSlides/notesSlide17.xml><?xml version="1.0" encoding="utf-8"?>
+<p:notes xmlns:a="http://schemas.openxmlformats.org/drawingml/2006/main" xmlns:r="http://schemas.openxmlformats.org/officeDocument/2006/relationships" xmlns:p="http://schemas.openxmlformats.org/presentationml/2006/main">
+  <p:cSld>
+    <p:spTree>
+      <p:nvGrpSpPr>
+        <p:cNvPr id="1" name=""/>
+        <p:cNvGrpSpPr/>
+        <p:nvPr/>
+      </p:nvGrpSpPr>
+      <p:grpSpPr>
+        <a:xfrm>
+          <a:off x="0" y="0"/>
+          <a:ext cx="0" cy="0"/>
+          <a:chOff x="0" y="0"/>
+          <a:chExt cx="0" cy="0"/>
+        </a:xfrm>
+      </p:grpSpPr>
+      <p:sp>
+        <p:nvSpPr>
+          <p:cNvPr id="2" name="Slide Image Placeholder 1"/>
+          <p:cNvSpPr>
+            <a:spLocks noGrp="1" noRot="1" noChangeAspect="1"/>
+          </p:cNvSpPr>
+          <p:nvPr>
+            <p:ph type="sldImg"/>
+          </p:nvPr>
+        </p:nvSpPr>
+        <p:spPr/>
+      </p:sp>
+      <p:sp>
+        <p:nvSpPr>
+          <p:cNvPr id="3" name="Notes Placeholder 2"/>
+          <p:cNvSpPr>
+            <a:spLocks noGrp="1"/>
+          </p:cNvSpPr>
+          <p:nvPr>
+            <p:ph type="body" idx="1"/>
+          </p:nvPr>
+        </p:nvSpPr>
+        <p:spPr/>
+        <p:txBody>
+          <a:bodyPr/>
+          <a:lstStyle/>
+          <a:p>
+            <a:r>
+              <a:rPr lang="en-US" dirty="0"/>
+              <a:t>Close + Q&amp;A (30s, then open the floor). 'To recap: one agent across every channel, language and modality; safe to transact because deterministic code does the transacting; and it heals itself. It directly unblocks the engagement and it's native to Google Cloud. I'd love your questions — and I can pull up the live extension or the /dev portal to answer any of them.' Keep QUESTION-ANSWER.md open for crisp answers + where-to-point.</a:t>
+            </a:r>
+            <a:endParaRPr lang="en-US" dirty="0"/>
+          </a:p>
+        </p:txBody>
+      </p:sp>
+      <p:sp>
+        <p:nvSpPr>
+          <p:cNvPr id="4" name="Slide Number Placeholder 3"/>
+          <p:cNvSpPr>
+            <a:spLocks noGrp="1"/>
+          </p:cNvSpPr>
+          <p:nvPr>
+            <p:ph type="sldNum" sz="quarter" idx="10"/>
+          </p:nvPr>
+        </p:nvSpPr>
+        <p:spPr/>
+        <p:txBody>
+          <a:bodyPr/>
+          <a:lstStyle/>
+          <a:p>
+            <a:fld id="{F7021451-1387-4CA6-816F-3879F97B5CBC}" type="slidenum">
+              <a:rPr lang="en-US"/>
+              <a:t>17</a:t>
             </a:fld>
             <a:endParaRPr lang="en-US"/>
           </a:p>
@@ -2602,6 +2869,9 @@
   <p:clrMapOvr>
     <a:masterClrMapping/>
   </p:clrMapOvr>
+  <p:transition spd="med">
+    <p:fade/>
+  </p:transition>
 </p:sld>
 </file>
 
@@ -2656,13 +2926,13 @@
             <a:r>
               <a:rPr lang="en-US" sz="1200" b="1" spc="300" kern="0" dirty="0">
                 <a:solidFill>
-                  <a:srgbClr val="7C3AED"/>
-                </a:solidFill>
-                <a:latin typeface="Calibri" pitchFamily="34" charset="0"/>
-                <a:ea typeface="Calibri" pitchFamily="34" charset="-122"/>
-                <a:cs typeface="Calibri" pitchFamily="34" charset="-120"/>
-              </a:rPr>
-              <a:t>RELIABILITY, SAFETY &amp; TRUST</a:t>
+                  <a:srgbClr val="E11D48"/>
+                </a:solidFill>
+                <a:latin typeface="Calibri" pitchFamily="34" charset="0"/>
+                <a:ea typeface="Calibri" pitchFamily="34" charset="-122"/>
+                <a:cs typeface="Calibri" pitchFamily="34" charset="-120"/>
+              </a:rPr>
+              <a:t>HANDS-ON · THE HARD PARTS</a:t>
             </a:r>
             <a:endParaRPr lang="en-US" sz="1200" dirty="0"/>
           </a:p>
@@ -2701,7 +2971,7 @@
                 <a:ea typeface="Georgia" pitchFamily="34" charset="-122"/>
                 <a:cs typeface="Georgia" pitchFamily="34" charset="-120"/>
               </a:rPr>
-              <a:t>Production-grade trust — by design, not by hope</a:t>
+              <a:t>Engineering challenges — and how we unblocked them</a:t>
             </a:r>
             <a:endParaRPr lang="en-US" sz="2800" dirty="0"/>
           </a:p>
@@ -2715,12 +2985,12 @@
         </p:nvSpPr>
         <p:spPr>
           <a:xfrm>
-            <a:off x="502920" y="1783080"/>
-            <a:ext cx="3545738" cy="1783080"/>
+            <a:off x="502920" y="1737360"/>
+            <a:ext cx="5364328" cy="1298448"/>
           </a:xfrm>
           <a:prstGeom prst="roundRect">
             <a:avLst>
-              <a:gd name="adj" fmla="val 4615"/>
+              <a:gd name="adj" fmla="val 5634"/>
             </a:avLst>
           </a:prstGeom>
           <a:solidFill>
@@ -2749,12 +3019,12 @@
         </p:nvSpPr>
         <p:spPr>
           <a:xfrm>
-            <a:off x="740664" y="2002536"/>
-            <a:ext cx="566928" cy="566928"/>
+            <a:off x="685800" y="1938528"/>
+            <a:ext cx="457200" cy="457200"/>
           </a:xfrm>
           <a:prstGeom prst="roundRect">
             <a:avLst>
-              <a:gd name="adj" fmla="val 19355"/>
+              <a:gd name="adj" fmla="val 20000"/>
             </a:avLst>
           </a:prstGeom>
           <a:solidFill>
@@ -2765,7 +3035,7 @@
       </p:sp>
       <p:pic>
         <p:nvPicPr>
-          <p:cNvPr id="6" name="Image 0" descr="icons/ban.png">    </p:cNvPr>
+          <p:cNvPr id="6" name="Image 0" descr="icons/sitemap.png">    </p:cNvPr>
           <p:cNvPicPr>
             <a:picLocks noChangeAspect="1"/>
           </p:cNvPicPr>
@@ -2779,8 +3049,8 @@
         </p:blipFill>
         <p:spPr>
           <a:xfrm>
-            <a:off x="877824" y="2139696"/>
-            <a:ext cx="292608" cy="292608"/>
+            <a:off x="795528" y="2048256"/>
+            <a:ext cx="237744" cy="237744"/>
           </a:xfrm>
           <a:prstGeom prst="rect">
             <a:avLst/>
@@ -2795,8 +3065,8 @@
         </p:nvSpPr>
         <p:spPr>
           <a:xfrm>
-            <a:off x="1490472" y="1984248"/>
-            <a:ext cx="2357018" cy="603504"/>
+            <a:off x="1252728" y="1883664"/>
+            <a:ext cx="4449928" cy="292608"/>
           </a:xfrm>
           <a:prstGeom prst="rect">
             <a:avLst/>
@@ -2812,7 +3082,21 @@
               <a:buNone/>
             </a:pPr>
             <a:r>
-              <a:rPr lang="en-US" sz="1400" b="1" dirty="0">
+              <a:rPr lang="en-US" sz="1250" b="1" dirty="0">
+                <a:solidFill>
+                  <a:srgbClr val="E11D48"/>
+                </a:solidFill>
+                <a:latin typeface="Calibri" pitchFamily="34" charset="0"/>
+                <a:ea typeface="Calibri" pitchFamily="34" charset="-122"/>
+                <a:cs typeface="Calibri" pitchFamily="34" charset="-120"/>
+              </a:rPr>
+              <a:t>⚠  </a:t>
+            </a:r>
+            <a:pPr indent="0" marL="0">
+              <a:buNone/>
+            </a:pPr>
+            <a:r>
+              <a:rPr lang="en-US" sz="1250" b="1" dirty="0">
                 <a:solidFill>
                   <a:srgbClr val="0F172A"/>
                 </a:solidFill>
@@ -2820,9 +3104,9 @@
                 <a:ea typeface="Calibri" pitchFamily="34" charset="-122"/>
                 <a:cs typeface="Calibri" pitchFamily="34" charset="-120"/>
               </a:rPr>
-              <a:t>Never substitutes</a:t>
-            </a:r>
-            <a:endParaRPr lang="en-US" sz="1400" dirty="0"/>
+              <a:t>Sub-agents skipped / ran out of order</a:t>
+            </a:r>
+            <a:endParaRPr lang="en-US" sz="1250" dirty="0"/>
           </a:p>
         </p:txBody>
       </p:sp>
@@ -2834,8 +3118,8 @@
         </p:nvSpPr>
         <p:spPr>
           <a:xfrm>
-            <a:off x="758952" y="2679192"/>
-            <a:ext cx="3088538" cy="740664"/>
+            <a:off x="1252728" y="2194560"/>
+            <a:ext cx="4431640" cy="292608"/>
           </a:xfrm>
           <a:prstGeom prst="rect">
             <a:avLst/>
@@ -2847,15 +3131,64 @@
           <a:bodyPr wrap="square" lIns="0" tIns="0" rIns="0" bIns="0" rtlCol="0" anchor="t"/>
           <a:lstStyle/>
           <a:p>
-            <a:pPr marL="152400" indent="-152400">
-              <a:spcAft>
-                <a:spcPts val="500"/>
-              </a:spcAft>
-              <a:buSzPct val="100000"/>
-              <a:buChar char="•"/>
-            </a:pPr>
-            <a:r>
-              <a:rPr lang="en-US" sz="1200" dirty="0">
+            <a:pPr indent="0" marL="0">
+              <a:buNone/>
+            </a:pPr>
+            <a:r>
+              <a:rPr lang="en-US" sz="1050" i="1" dirty="0">
+                <a:solidFill>
+                  <a:srgbClr val="8A94A6"/>
+                </a:solidFill>
+                <a:latin typeface="Calibri" pitchFamily="34" charset="0"/>
+                <a:ea typeface="Calibri" pitchFamily="34" charset="-122"/>
+                <a:cs typeface="Calibri" pitchFamily="34" charset="-120"/>
+              </a:rPr>
+              <a:t>ADK let the LLM skip sub-agents; a SequentialAgent can't be an AgentTool.</a:t>
+            </a:r>
+            <a:endParaRPr lang="en-US" sz="1050" dirty="0"/>
+          </a:p>
+        </p:txBody>
+      </p:sp>
+      <p:sp>
+        <p:nvSpPr>
+          <p:cNvPr id="9" name="Text 6"/>
+          <p:cNvSpPr/>
+          <p:nvPr/>
+        </p:nvSpPr>
+        <p:spPr>
+          <a:xfrm>
+            <a:off x="704088" y="2523744"/>
+            <a:ext cx="4980280" cy="457200"/>
+          </a:xfrm>
+          <a:prstGeom prst="rect">
+            <a:avLst/>
+          </a:prstGeom>
+          <a:noFill/>
+          <a:ln/>
+        </p:spPr>
+        <p:txBody>
+          <a:bodyPr wrap="square" lIns="0" tIns="0" rIns="0" bIns="0" rtlCol="0" anchor="t"/>
+          <a:lstStyle/>
+          <a:p>
+            <a:pPr indent="0" marL="0">
+              <a:buNone/>
+            </a:pPr>
+            <a:r>
+              <a:rPr lang="en-US" sz="1100" b="1" dirty="0">
+                <a:solidFill>
+                  <a:srgbClr val="0D9488"/>
+                </a:solidFill>
+                <a:latin typeface="Calibri" pitchFamily="34" charset="0"/>
+                <a:ea typeface="Calibri" pitchFamily="34" charset="-122"/>
+                <a:cs typeface="Calibri" pitchFamily="34" charset="-120"/>
+              </a:rPr>
+              <a:t>✓  </a:t>
+            </a:r>
+            <a:pPr indent="0" marL="0">
+              <a:buNone/>
+            </a:pPr>
+            <a:r>
+              <a:rPr lang="en-US" sz="1100" dirty="0">
                 <a:solidFill>
                   <a:srgbClr val="5B6577"/>
                 </a:solidFill>
@@ -2863,26 +3196,26 @@
                 <a:ea typeface="Calibri" pitchFamily="34" charset="-122"/>
                 <a:cs typeface="Calibri" pitchFamily="34" charset="-120"/>
               </a:rPr>
-              <a:t>If the exact item isn't found, it says so — it won't swap in a different product.</a:t>
-            </a:r>
-            <a:endParaRPr lang="en-US" sz="1200" dirty="0"/>
-          </a:p>
-        </p:txBody>
-      </p:sp>
-      <p:sp>
-        <p:nvSpPr>
-          <p:cNvPr id="9" name="Shape 6"/>
-          <p:cNvSpPr/>
-          <p:nvPr/>
-        </p:nvSpPr>
-        <p:spPr>
-          <a:xfrm>
-            <a:off x="4322978" y="1783080"/>
-            <a:ext cx="3545738" cy="1783080"/>
+              <a:t>Agent-as-tool composition + deterministic pre-processing (modality/lang/channel as plain code).</a:t>
+            </a:r>
+            <a:endParaRPr lang="en-US" sz="1100" dirty="0"/>
+          </a:p>
+        </p:txBody>
+      </p:sp>
+      <p:sp>
+        <p:nvSpPr>
+          <p:cNvPr id="10" name="Shape 7"/>
+          <p:cNvSpPr/>
+          <p:nvPr/>
+        </p:nvSpPr>
+        <p:spPr>
+          <a:xfrm>
+            <a:off x="6324448" y="1737360"/>
+            <a:ext cx="5364328" cy="1298448"/>
           </a:xfrm>
           <a:prstGeom prst="roundRect">
             <a:avLst>
-              <a:gd name="adj" fmla="val 4615"/>
+              <a:gd name="adj" fmla="val 5634"/>
             </a:avLst>
           </a:prstGeom>
           <a:solidFill>
@@ -2905,29 +3238,29 @@
       </p:sp>
       <p:sp>
         <p:nvSpPr>
-          <p:cNvPr id="10" name="Shape 7"/>
-          <p:cNvSpPr/>
-          <p:nvPr/>
-        </p:nvSpPr>
-        <p:spPr>
-          <a:xfrm>
-            <a:off x="4560722" y="2002536"/>
-            <a:ext cx="566928" cy="566928"/>
+          <p:cNvPr id="11" name="Shape 8"/>
+          <p:cNvSpPr/>
+          <p:nvPr/>
+        </p:nvSpPr>
+        <p:spPr>
+          <a:xfrm>
+            <a:off x="6507328" y="1938528"/>
+            <a:ext cx="457200" cy="457200"/>
           </a:xfrm>
           <a:prstGeom prst="roundRect">
             <a:avLst>
-              <a:gd name="adj" fmla="val 19355"/>
+              <a:gd name="adj" fmla="val 20000"/>
             </a:avLst>
           </a:prstGeom>
           <a:solidFill>
-            <a:srgbClr val="0D9488"/>
+            <a:srgbClr val="E11D48"/>
           </a:solidFill>
           <a:ln/>
         </p:spPr>
       </p:sp>
       <p:pic>
         <p:nvPicPr>
-          <p:cNvPr id="11" name="Image 1" descr="icons/check.png">    </p:cNvPr>
+          <p:cNvPr id="12" name="Image 1" descr="icons/brain.png">    </p:cNvPr>
           <p:cNvPicPr>
             <a:picLocks noChangeAspect="1"/>
           </p:cNvPicPr>
@@ -2941,8 +3274,8 @@
         </p:blipFill>
         <p:spPr>
           <a:xfrm>
-            <a:off x="4697882" y="2139696"/>
-            <a:ext cx="292608" cy="292608"/>
+            <a:off x="6617056" y="2048256"/>
+            <a:ext cx="237744" cy="237744"/>
           </a:xfrm>
           <a:prstGeom prst="rect">
             <a:avLst/>
@@ -2951,14 +3284,14 @@
       </p:pic>
       <p:sp>
         <p:nvSpPr>
-          <p:cNvPr id="12" name="Text 8"/>
-          <p:cNvSpPr/>
-          <p:nvPr/>
-        </p:nvSpPr>
-        <p:spPr>
-          <a:xfrm>
-            <a:off x="5310530" y="1984248"/>
-            <a:ext cx="2357018" cy="603504"/>
+          <p:cNvPr id="13" name="Text 9"/>
+          <p:cNvSpPr/>
+          <p:nvPr/>
+        </p:nvSpPr>
+        <p:spPr>
+          <a:xfrm>
+            <a:off x="7074256" y="1883664"/>
+            <a:ext cx="4449928" cy="292608"/>
           </a:xfrm>
           <a:prstGeom prst="rect">
             <a:avLst/>
@@ -2974,7 +3307,21 @@
               <a:buNone/>
             </a:pPr>
             <a:r>
-              <a:rPr lang="en-US" sz="1400" b="1" dirty="0">
+              <a:rPr lang="en-US" sz="1250" b="1" dirty="0">
+                <a:solidFill>
+                  <a:srgbClr val="E11D48"/>
+                </a:solidFill>
+                <a:latin typeface="Calibri" pitchFamily="34" charset="0"/>
+                <a:ea typeface="Calibri" pitchFamily="34" charset="-122"/>
+                <a:cs typeface="Calibri" pitchFamily="34" charset="-120"/>
+              </a:rPr>
+              <a:t>⚠  </a:t>
+            </a:r>
+            <a:pPr indent="0" marL="0">
+              <a:buNone/>
+            </a:pPr>
+            <a:r>
+              <a:rPr lang="en-US" sz="1250" b="1" dirty="0">
                 <a:solidFill>
                   <a:srgbClr val="0F172A"/>
                 </a:solidFill>
@@ -2982,22 +3329,22 @@
                 <a:ea typeface="Calibri" pitchFamily="34" charset="-122"/>
                 <a:cs typeface="Calibri" pitchFamily="34" charset="-120"/>
               </a:rPr>
-              <a:t>Confirm before charge</a:t>
-            </a:r>
-            <a:endParaRPr lang="en-US" sz="1400" dirty="0"/>
-          </a:p>
-        </p:txBody>
-      </p:sp>
-      <p:sp>
-        <p:nvSpPr>
-          <p:cNvPr id="13" name="Text 9"/>
-          <p:cNvSpPr/>
-          <p:nvPr/>
-        </p:nvSpPr>
-        <p:spPr>
-          <a:xfrm>
-            <a:off x="4579010" y="2679192"/>
-            <a:ext cx="3088538" cy="740664"/>
+              <a:t>Gemini 2.5 “thinking” ate the answer</a:t>
+            </a:r>
+            <a:endParaRPr lang="en-US" sz="1250" dirty="0"/>
+          </a:p>
+        </p:txBody>
+      </p:sp>
+      <p:sp>
+        <p:nvSpPr>
+          <p:cNvPr id="14" name="Text 10"/>
+          <p:cNvSpPr/>
+          <p:nvPr/>
+        </p:nvSpPr>
+        <p:spPr>
+          <a:xfrm>
+            <a:off x="7074256" y="2194560"/>
+            <a:ext cx="4431640" cy="292608"/>
           </a:xfrm>
           <a:prstGeom prst="rect">
             <a:avLst/>
@@ -3009,15 +3356,64 @@
           <a:bodyPr wrap="square" lIns="0" tIns="0" rIns="0" bIns="0" rtlCol="0" anchor="t"/>
           <a:lstStyle/>
           <a:p>
-            <a:pPr marL="152400" indent="-152400">
-              <a:spcAft>
-                <a:spcPts val="500"/>
-              </a:spcAft>
-              <a:buSzPct val="100000"/>
-              <a:buChar char="•"/>
-            </a:pPr>
-            <a:r>
-              <a:rPr lang="en-US" sz="1200" dirty="0">
+            <a:pPr indent="0" marL="0">
+              <a:buNone/>
+            </a:pPr>
+            <a:r>
+              <a:rPr lang="en-US" sz="1050" i="1" dirty="0">
+                <a:solidFill>
+                  <a:srgbClr val="8A94A6"/>
+                </a:solidFill>
+                <a:latin typeface="Calibri" pitchFamily="34" charset="0"/>
+                <a:ea typeface="Calibri" pitchFamily="34" charset="-122"/>
+                <a:cs typeface="Calibri" pitchFamily="34" charset="-120"/>
+              </a:rPr>
+              <a:t>Vision + the ReAct advisor returned a plan but no final text (thinking spent the budget).</a:t>
+            </a:r>
+            <a:endParaRPr lang="en-US" sz="1050" dirty="0"/>
+          </a:p>
+        </p:txBody>
+      </p:sp>
+      <p:sp>
+        <p:nvSpPr>
+          <p:cNvPr id="15" name="Text 11"/>
+          <p:cNvSpPr/>
+          <p:nvPr/>
+        </p:nvSpPr>
+        <p:spPr>
+          <a:xfrm>
+            <a:off x="6525616" y="2523744"/>
+            <a:ext cx="4980280" cy="457200"/>
+          </a:xfrm>
+          <a:prstGeom prst="rect">
+            <a:avLst/>
+          </a:prstGeom>
+          <a:noFill/>
+          <a:ln/>
+        </p:spPr>
+        <p:txBody>
+          <a:bodyPr wrap="square" lIns="0" tIns="0" rIns="0" bIns="0" rtlCol="0" anchor="t"/>
+          <a:lstStyle/>
+          <a:p>
+            <a:pPr indent="0" marL="0">
+              <a:buNone/>
+            </a:pPr>
+            <a:r>
+              <a:rPr lang="en-US" sz="1100" b="1" dirty="0">
+                <a:solidFill>
+                  <a:srgbClr val="0D9488"/>
+                </a:solidFill>
+                <a:latin typeface="Calibri" pitchFamily="34" charset="0"/>
+                <a:ea typeface="Calibri" pitchFamily="34" charset="-122"/>
+                <a:cs typeface="Calibri" pitchFamily="34" charset="-120"/>
+              </a:rPr>
+              <a:t>✓  </a:t>
+            </a:r>
+            <a:pPr indent="0" marL="0">
+              <a:buNone/>
+            </a:pPr>
+            <a:r>
+              <a:rPr lang="en-US" sz="1100" dirty="0">
                 <a:solidFill>
                   <a:srgbClr val="5B6577"/>
                 </a:solidFill>
@@ -3025,26 +3421,26 @@
                 <a:ea typeface="Calibri" pitchFamily="34" charset="-122"/>
                 <a:cs typeface="Calibri" pitchFamily="34" charset="-120"/>
               </a:rPr>
-              <a:t>Cart preview + “please confirm” on every path — text, voice, and camera alike.</a:t>
-            </a:r>
-            <a:endParaRPr lang="en-US" sz="1200" dirty="0"/>
-          </a:p>
-        </p:txBody>
-      </p:sp>
-      <p:sp>
-        <p:nvSpPr>
-          <p:cNvPr id="14" name="Shape 10"/>
-          <p:cNvSpPr/>
-          <p:nvPr/>
-        </p:nvSpPr>
-        <p:spPr>
-          <a:xfrm>
-            <a:off x="8143037" y="1783080"/>
-            <a:ext cx="3545738" cy="1783080"/>
+              <a:t>thinking_budget=0 + token cap; a grounded synthesis fallback guarantees an answer.</a:t>
+            </a:r>
+            <a:endParaRPr lang="en-US" sz="1100" dirty="0"/>
+          </a:p>
+        </p:txBody>
+      </p:sp>
+      <p:sp>
+        <p:nvSpPr>
+          <p:cNvPr id="16" name="Shape 12"/>
+          <p:cNvSpPr/>
+          <p:nvPr/>
+        </p:nvSpPr>
+        <p:spPr>
+          <a:xfrm>
+            <a:off x="502920" y="3200400"/>
+            <a:ext cx="5364328" cy="1298448"/>
           </a:xfrm>
           <a:prstGeom prst="roundRect">
             <a:avLst>
-              <a:gd name="adj" fmla="val 4615"/>
+              <a:gd name="adj" fmla="val 5634"/>
             </a:avLst>
           </a:prstGeom>
           <a:solidFill>
@@ -3067,29 +3463,29 @@
       </p:sp>
       <p:sp>
         <p:nvSpPr>
-          <p:cNvPr id="15" name="Shape 11"/>
-          <p:cNvSpPr/>
-          <p:nvPr/>
-        </p:nvSpPr>
-        <p:spPr>
-          <a:xfrm>
-            <a:off x="8380781" y="2002536"/>
-            <a:ext cx="566928" cy="566928"/>
+          <p:cNvPr id="17" name="Shape 13"/>
+          <p:cNvSpPr/>
+          <p:nvPr/>
+        </p:nvSpPr>
+        <p:spPr>
+          <a:xfrm>
+            <a:off x="685800" y="3401568"/>
+            <a:ext cx="457200" cy="457200"/>
           </a:xfrm>
           <a:prstGeom prst="roundRect">
             <a:avLst>
-              <a:gd name="adj" fmla="val 19355"/>
+              <a:gd name="adj" fmla="val 20000"/>
             </a:avLst>
           </a:prstGeom>
           <a:solidFill>
-            <a:srgbClr val="7C3AED"/>
+            <a:srgbClr val="E11D48"/>
           </a:solidFill>
           <a:ln/>
         </p:spPr>
       </p:sp>
       <p:pic>
         <p:nvPicPr>
-          <p:cNvPr id="16" name="Image 2" descr="icons/sync.png">    </p:cNvPr>
+          <p:cNvPr id="18" name="Image 2" descr="icons/check.png">    </p:cNvPr>
           <p:cNvPicPr>
             <a:picLocks noChangeAspect="1"/>
           </p:cNvPicPr>
@@ -3103,8 +3499,8 @@
         </p:blipFill>
         <p:spPr>
           <a:xfrm>
-            <a:off x="8517941" y="2139696"/>
-            <a:ext cx="292608" cy="292608"/>
+            <a:off x="795528" y="3511296"/>
+            <a:ext cx="237744" cy="237744"/>
           </a:xfrm>
           <a:prstGeom prst="rect">
             <a:avLst/>
@@ -3113,14 +3509,14 @@
       </p:pic>
       <p:sp>
         <p:nvSpPr>
-          <p:cNvPr id="17" name="Text 12"/>
-          <p:cNvSpPr/>
-          <p:nvPr/>
-        </p:nvSpPr>
-        <p:spPr>
-          <a:xfrm>
-            <a:off x="9130589" y="1984248"/>
-            <a:ext cx="2357018" cy="603504"/>
+          <p:cNvPr id="19" name="Text 14"/>
+          <p:cNvSpPr/>
+          <p:nvPr/>
+        </p:nvSpPr>
+        <p:spPr>
+          <a:xfrm>
+            <a:off x="1252728" y="3346704"/>
+            <a:ext cx="4449928" cy="292608"/>
           </a:xfrm>
           <a:prstGeom prst="rect">
             <a:avLst/>
@@ -3136,7 +3532,21 @@
               <a:buNone/>
             </a:pPr>
             <a:r>
-              <a:rPr lang="en-US" sz="1400" b="1" dirty="0">
+              <a:rPr lang="en-US" sz="1250" b="1" dirty="0">
+                <a:solidFill>
+                  <a:srgbClr val="E11D48"/>
+                </a:solidFill>
+                <a:latin typeface="Calibri" pitchFamily="34" charset="0"/>
+                <a:ea typeface="Calibri" pitchFamily="34" charset="-122"/>
+                <a:cs typeface="Calibri" pitchFamily="34" charset="-120"/>
+              </a:rPr>
+              <a:t>⚠  </a:t>
+            </a:r>
+            <a:pPr indent="0" marL="0">
+              <a:buNone/>
+            </a:pPr>
+            <a:r>
+              <a:rPr lang="en-US" sz="1250" b="1" dirty="0">
                 <a:solidFill>
                   <a:srgbClr val="0F172A"/>
                 </a:solidFill>
@@ -3144,22 +3554,22 @@
                 <a:ea typeface="Calibri" pitchFamily="34" charset="-122"/>
                 <a:cs typeface="Calibri" pitchFamily="34" charset="-120"/>
               </a:rPr>
-              <a:t>Self-healing Guardian</a:t>
-            </a:r>
-            <a:endParaRPr lang="en-US" sz="1400" dirty="0"/>
-          </a:p>
-        </p:txBody>
-      </p:sp>
-      <p:sp>
-        <p:nvSpPr>
-          <p:cNvPr id="18" name="Text 13"/>
-          <p:cNvSpPr/>
-          <p:nvPr/>
-        </p:nvSpPr>
-        <p:spPr>
-          <a:xfrm>
-            <a:off x="8399069" y="2679192"/>
-            <a:ext cx="3088538" cy="740664"/>
+              <a:t>A cloud-only bug hid behind green local tests</a:t>
+            </a:r>
+            <a:endParaRPr lang="en-US" sz="1250" dirty="0"/>
+          </a:p>
+        </p:txBody>
+      </p:sp>
+      <p:sp>
+        <p:nvSpPr>
+          <p:cNvPr id="20" name="Text 15"/>
+          <p:cNvSpPr/>
+          <p:nvPr/>
+        </p:nvSpPr>
+        <p:spPr>
+          <a:xfrm>
+            <a:off x="1252728" y="3657600"/>
+            <a:ext cx="4431640" cy="292608"/>
           </a:xfrm>
           <a:prstGeom prst="rect">
             <a:avLst/>
@@ -3171,15 +3581,64 @@
           <a:bodyPr wrap="square" lIns="0" tIns="0" rIns="0" bIns="0" rtlCol="0" anchor="t"/>
           <a:lstStyle/>
           <a:p>
-            <a:pPr marL="152400" indent="-152400">
-              <a:spcAft>
-                <a:spcPts val="500"/>
-              </a:spcAft>
-              <a:buSzPct val="100000"/>
-              <a:buChar char="•"/>
-            </a:pPr>
-            <a:r>
-              <a:rPr lang="en-US" sz="1200" dirty="0">
+            <a:pPr indent="0" marL="0">
+              <a:buNone/>
+            </a:pPr>
+            <a:r>
+              <a:rPr lang="en-US" sz="1050" i="1" dirty="0">
+                <a:solidFill>
+                  <a:srgbClr val="8A94A6"/>
+                </a:solidFill>
+                <a:latin typeface="Calibri" pitchFamily="34" charset="0"/>
+                <a:ea typeface="Calibri" pitchFamily="34" charset="-122"/>
+                <a:cs typeface="Calibri" pitchFamily="34" charset="-120"/>
+              </a:rPr>
+              <a:t>The ADK path isn't exercised in CI (no creds), so a prod regression could slip through.</a:t>
+            </a:r>
+            <a:endParaRPr lang="en-US" sz="1050" dirty="0"/>
+          </a:p>
+        </p:txBody>
+      </p:sp>
+      <p:sp>
+        <p:nvSpPr>
+          <p:cNvPr id="21" name="Text 16"/>
+          <p:cNvSpPr/>
+          <p:nvPr/>
+        </p:nvSpPr>
+        <p:spPr>
+          <a:xfrm>
+            <a:off x="704088" y="3986784"/>
+            <a:ext cx="4980280" cy="457200"/>
+          </a:xfrm>
+          <a:prstGeom prst="rect">
+            <a:avLst/>
+          </a:prstGeom>
+          <a:noFill/>
+          <a:ln/>
+        </p:spPr>
+        <p:txBody>
+          <a:bodyPr wrap="square" lIns="0" tIns="0" rIns="0" bIns="0" rtlCol="0" anchor="t"/>
+          <a:lstStyle/>
+          <a:p>
+            <a:pPr indent="0" marL="0">
+              <a:buNone/>
+            </a:pPr>
+            <a:r>
+              <a:rPr lang="en-US" sz="1100" b="1" dirty="0">
+                <a:solidFill>
+                  <a:srgbClr val="0D9488"/>
+                </a:solidFill>
+                <a:latin typeface="Calibri" pitchFamily="34" charset="0"/>
+                <a:ea typeface="Calibri" pitchFamily="34" charset="-122"/>
+                <a:cs typeface="Calibri" pitchFamily="34" charset="-120"/>
+              </a:rPr>
+              <a:t>✓  </a:t>
+            </a:r>
+            <a:pPr indent="0" marL="0">
+              <a:buNone/>
+            </a:pPr>
+            <a:r>
+              <a:rPr lang="en-US" sz="1100" dirty="0">
                 <a:solidFill>
                   <a:srgbClr val="5B6577"/>
                 </a:solidFill>
@@ -3187,26 +3646,26 @@
                 <a:ea typeface="Calibri" pitchFamily="34" charset="-122"/>
                 <a:cs typeface="Calibri" pitchFamily="34" charset="-120"/>
               </a:rPr>
-              <a:t>Circuit breaker · retry · failover · heal-forward; chaos buttons prove it live.</a:t>
-            </a:r>
-            <a:endParaRPr lang="en-US" sz="1200" dirty="0"/>
-          </a:p>
-        </p:txBody>
-      </p:sp>
-      <p:sp>
-        <p:nvSpPr>
-          <p:cNvPr id="19" name="Shape 14"/>
-          <p:cNvSpPr/>
-          <p:nvPr/>
-        </p:nvSpPr>
-        <p:spPr>
-          <a:xfrm>
-            <a:off x="502920" y="3794760"/>
-            <a:ext cx="3545738" cy="1783080"/>
+              <a:t>CI-sim: block google.* and run the whole suite via the deterministic fallback path.</a:t>
+            </a:r>
+            <a:endParaRPr lang="en-US" sz="1100" dirty="0"/>
+          </a:p>
+        </p:txBody>
+      </p:sp>
+      <p:sp>
+        <p:nvSpPr>
+          <p:cNvPr id="22" name="Shape 17"/>
+          <p:cNvSpPr/>
+          <p:nvPr/>
+        </p:nvSpPr>
+        <p:spPr>
+          <a:xfrm>
+            <a:off x="6324448" y="3200400"/>
+            <a:ext cx="5364328" cy="1298448"/>
           </a:xfrm>
           <a:prstGeom prst="roundRect">
             <a:avLst>
-              <a:gd name="adj" fmla="val 4615"/>
+              <a:gd name="adj" fmla="val 5634"/>
             </a:avLst>
           </a:prstGeom>
           <a:solidFill>
@@ -3229,29 +3688,29 @@
       </p:sp>
       <p:sp>
         <p:nvSpPr>
-          <p:cNvPr id="20" name="Shape 15"/>
-          <p:cNvSpPr/>
-          <p:nvPr/>
-        </p:nvSpPr>
-        <p:spPr>
-          <a:xfrm>
-            <a:off x="740664" y="4014216"/>
-            <a:ext cx="566928" cy="566928"/>
+          <p:cNvPr id="23" name="Shape 18"/>
+          <p:cNvSpPr/>
+          <p:nvPr/>
+        </p:nvSpPr>
+        <p:spPr>
+          <a:xfrm>
+            <a:off x="6507328" y="3401568"/>
+            <a:ext cx="457200" cy="457200"/>
           </a:xfrm>
           <a:prstGeom prst="roundRect">
             <a:avLst>
-              <a:gd name="adj" fmla="val 19355"/>
+              <a:gd name="adj" fmla="val 20000"/>
             </a:avLst>
           </a:prstGeom>
           <a:solidFill>
-            <a:srgbClr val="2563EB"/>
+            <a:srgbClr val="E11D48"/>
           </a:solidFill>
           <a:ln/>
         </p:spPr>
       </p:sp>
       <p:pic>
         <p:nvPicPr>
-          <p:cNvPr id="21" name="Image 3" descr="icons/sitemap.png">    </p:cNvPr>
+          <p:cNvPr id="24" name="Image 3" descr="icons/lock.png">    </p:cNvPr>
           <p:cNvPicPr>
             <a:picLocks noChangeAspect="1"/>
           </p:cNvPicPr>
@@ -3265,8 +3724,8 @@
         </p:blipFill>
         <p:spPr>
           <a:xfrm>
-            <a:off x="877824" y="4151376"/>
-            <a:ext cx="292608" cy="292608"/>
+            <a:off x="6617056" y="3511296"/>
+            <a:ext cx="237744" cy="237744"/>
           </a:xfrm>
           <a:prstGeom prst="rect">
             <a:avLst/>
@@ -3275,14 +3734,14 @@
       </p:pic>
       <p:sp>
         <p:nvSpPr>
-          <p:cNvPr id="22" name="Text 16"/>
-          <p:cNvSpPr/>
-          <p:nvPr/>
-        </p:nvSpPr>
-        <p:spPr>
-          <a:xfrm>
-            <a:off x="1490472" y="3995928"/>
-            <a:ext cx="2357018" cy="603504"/>
+          <p:cNvPr id="25" name="Text 19"/>
+          <p:cNvSpPr/>
+          <p:nvPr/>
+        </p:nvSpPr>
+        <p:spPr>
+          <a:xfrm>
+            <a:off x="7074256" y="3346704"/>
+            <a:ext cx="4449928" cy="292608"/>
           </a:xfrm>
           <a:prstGeom prst="rect">
             <a:avLst/>
@@ -3298,7 +3757,21 @@
               <a:buNone/>
             </a:pPr>
             <a:r>
-              <a:rPr lang="en-US" sz="1400" b="1" dirty="0">
+              <a:rPr lang="en-US" sz="1250" b="1" dirty="0">
+                <a:solidFill>
+                  <a:srgbClr val="E11D48"/>
+                </a:solidFill>
+                <a:latin typeface="Calibri" pitchFamily="34" charset="0"/>
+                <a:ea typeface="Calibri" pitchFamily="34" charset="-122"/>
+                <a:cs typeface="Calibri" pitchFamily="34" charset="-120"/>
+              </a:rPr>
+              <a:t>⚠  </a:t>
+            </a:r>
+            <a:pPr indent="0" marL="0">
+              <a:buNone/>
+            </a:pPr>
+            <a:r>
+              <a:rPr lang="en-US" sz="1250" b="1" dirty="0">
                 <a:solidFill>
                   <a:srgbClr val="0F172A"/>
                 </a:solidFill>
@@ -3306,22 +3779,22 @@
                 <a:ea typeface="Calibri" pitchFamily="34" charset="-122"/>
                 <a:cs typeface="Calibri" pitchFamily="34" charset="-120"/>
               </a:rPr>
-              <a:t>No agent loops</a:t>
-            </a:r>
-            <a:endParaRPr lang="en-US" sz="1400" dirty="0"/>
-          </a:p>
-        </p:txBody>
-      </p:sp>
-      <p:sp>
-        <p:nvSpPr>
-          <p:cNvPr id="23" name="Text 17"/>
-          <p:cNvSpPr/>
-          <p:nvPr/>
-        </p:nvSpPr>
-        <p:spPr>
-          <a:xfrm>
-            <a:off x="758952" y="4690872"/>
-            <a:ext cx="3088538" cy="740664"/>
+              <a:t>LLM could substitute or auto-charge</a:t>
+            </a:r>
+            <a:endParaRPr lang="en-US" sz="1250" dirty="0"/>
+          </a:p>
+        </p:txBody>
+      </p:sp>
+      <p:sp>
+        <p:nvSpPr>
+          <p:cNvPr id="26" name="Text 20"/>
+          <p:cNvSpPr/>
+          <p:nvPr/>
+        </p:nvSpPr>
+        <p:spPr>
+          <a:xfrm>
+            <a:off x="7074256" y="3657600"/>
+            <a:ext cx="4431640" cy="292608"/>
           </a:xfrm>
           <a:prstGeom prst="rect">
             <a:avLst/>
@@ -3333,15 +3806,64 @@
           <a:bodyPr wrap="square" lIns="0" tIns="0" rIns="0" bIns="0" rtlCol="0" anchor="t"/>
           <a:lstStyle/>
           <a:p>
-            <a:pPr marL="152400" indent="-152400">
-              <a:spcAft>
-                <a:spcPts val="500"/>
-              </a:spcAft>
-              <a:buSzPct val="100000"/>
-              <a:buChar char="•"/>
-            </a:pPr>
-            <a:r>
-              <a:rPr lang="en-US" sz="1200" dirty="0">
+            <a:pPr indent="0" marL="0">
+              <a:buNone/>
+            </a:pPr>
+            <a:r>
+              <a:rPr lang="en-US" sz="1050" i="1" dirty="0">
+                <a:solidFill>
+                  <a:srgbClr val="8A94A6"/>
+                </a:solidFill>
+                <a:latin typeface="Calibri" pitchFamily="34" charset="0"/>
+                <a:ea typeface="Calibri" pitchFamily="34" charset="-122"/>
+                <a:cs typeface="Calibri" pitchFamily="34" charset="-120"/>
+              </a:rPr>
+              <a:t>A free-form LLM placing orders risks wrong items and unconfirmed charges.</a:t>
+            </a:r>
+            <a:endParaRPr lang="en-US" sz="1050" dirty="0"/>
+          </a:p>
+        </p:txBody>
+      </p:sp>
+      <p:sp>
+        <p:nvSpPr>
+          <p:cNvPr id="27" name="Text 21"/>
+          <p:cNvSpPr/>
+          <p:nvPr/>
+        </p:nvSpPr>
+        <p:spPr>
+          <a:xfrm>
+            <a:off x="6525616" y="3986784"/>
+            <a:ext cx="4980280" cy="457200"/>
+          </a:xfrm>
+          <a:prstGeom prst="rect">
+            <a:avLst/>
+          </a:prstGeom>
+          <a:noFill/>
+          <a:ln/>
+        </p:spPr>
+        <p:txBody>
+          <a:bodyPr wrap="square" lIns="0" tIns="0" rIns="0" bIns="0" rtlCol="0" anchor="t"/>
+          <a:lstStyle/>
+          <a:p>
+            <a:pPr indent="0" marL="0">
+              <a:buNone/>
+            </a:pPr>
+            <a:r>
+              <a:rPr lang="en-US" sz="1100" b="1" dirty="0">
+                <a:solidFill>
+                  <a:srgbClr val="0D9488"/>
+                </a:solidFill>
+                <a:latin typeface="Calibri" pitchFamily="34" charset="0"/>
+                <a:ea typeface="Calibri" pitchFamily="34" charset="-122"/>
+                <a:cs typeface="Calibri" pitchFamily="34" charset="-120"/>
+              </a:rPr>
+              <a:t>✓  </a:t>
+            </a:r>
+            <a:pPr indent="0" marL="0">
+              <a:buNone/>
+            </a:pPr>
+            <a:r>
+              <a:rPr lang="en-US" sz="1100" dirty="0">
                 <a:solidFill>
                   <a:srgbClr val="5B6577"/>
                 </a:solidFill>
@@ -3349,26 +3871,26 @@
                 <a:ea typeface="Calibri" pitchFamily="34" charset="-122"/>
                 <a:cs typeface="Calibri" pitchFamily="34" charset="-120"/>
               </a:rPr>
-              <a:t>Agent-as-tool, no nested agents, single-pass turns, bounded retries, degrade-once.</a:t>
-            </a:r>
-            <a:endParaRPr lang="en-US" sz="1200" dirty="0"/>
-          </a:p>
-        </p:txBody>
-      </p:sp>
-      <p:sp>
-        <p:nvSpPr>
-          <p:cNvPr id="24" name="Shape 18"/>
-          <p:cNvSpPr/>
-          <p:nvPr/>
-        </p:nvSpPr>
-        <p:spPr>
-          <a:xfrm>
-            <a:off x="4322978" y="3794760"/>
-            <a:ext cx="3545738" cy="1783080"/>
+              <a:t>No-substitution + a deterministic confirm-before-charge gate on EVERY modality.</a:t>
+            </a:r>
+            <a:endParaRPr lang="en-US" sz="1100" dirty="0"/>
+          </a:p>
+        </p:txBody>
+      </p:sp>
+      <p:sp>
+        <p:nvSpPr>
+          <p:cNvPr id="28" name="Shape 22"/>
+          <p:cNvSpPr/>
+          <p:nvPr/>
+        </p:nvSpPr>
+        <p:spPr>
+          <a:xfrm>
+            <a:off x="502920" y="4663440"/>
+            <a:ext cx="5364328" cy="1298448"/>
           </a:xfrm>
           <a:prstGeom prst="roundRect">
             <a:avLst>
-              <a:gd name="adj" fmla="val 4615"/>
+              <a:gd name="adj" fmla="val 5634"/>
             </a:avLst>
           </a:prstGeom>
           <a:solidFill>
@@ -3391,29 +3913,29 @@
       </p:sp>
       <p:sp>
         <p:nvSpPr>
-          <p:cNvPr id="25" name="Shape 19"/>
-          <p:cNvSpPr/>
-          <p:nvPr/>
-        </p:nvSpPr>
-        <p:spPr>
-          <a:xfrm>
-            <a:off x="4560722" y="4014216"/>
-            <a:ext cx="566928" cy="566928"/>
+          <p:cNvPr id="29" name="Shape 23"/>
+          <p:cNvSpPr/>
+          <p:nvPr/>
+        </p:nvSpPr>
+        <p:spPr>
+          <a:xfrm>
+            <a:off x="685800" y="4864608"/>
+            <a:ext cx="457200" cy="457200"/>
           </a:xfrm>
           <a:prstGeom prst="roundRect">
             <a:avLst>
-              <a:gd name="adj" fmla="val 19355"/>
+              <a:gd name="adj" fmla="val 20000"/>
             </a:avLst>
           </a:prstGeom>
           <a:solidFill>
-            <a:srgbClr val="0D9488"/>
+            <a:srgbClr val="E11D48"/>
           </a:solidFill>
           <a:ln/>
         </p:spPr>
       </p:sp>
       <p:pic>
         <p:nvPicPr>
-          <p:cNvPr id="26" name="Image 4" descr="icons/db.png">    </p:cNvPr>
+          <p:cNvPr id="30" name="Image 4" descr="icons/db.png">    </p:cNvPr>
           <p:cNvPicPr>
             <a:picLocks noChangeAspect="1"/>
           </p:cNvPicPr>
@@ -3427,8 +3949,8 @@
         </p:blipFill>
         <p:spPr>
           <a:xfrm>
-            <a:off x="4697882" y="4151376"/>
-            <a:ext cx="292608" cy="292608"/>
+            <a:off x="795528" y="4974336"/>
+            <a:ext cx="237744" cy="237744"/>
           </a:xfrm>
           <a:prstGeom prst="rect">
             <a:avLst/>
@@ -3437,14 +3959,14 @@
       </p:pic>
       <p:sp>
         <p:nvSpPr>
-          <p:cNvPr id="27" name="Text 20"/>
-          <p:cNvSpPr/>
-          <p:nvPr/>
-        </p:nvSpPr>
-        <p:spPr>
-          <a:xfrm>
-            <a:off x="5310530" y="3995928"/>
-            <a:ext cx="2357018" cy="603504"/>
+          <p:cNvPr id="31" name="Text 24"/>
+          <p:cNvSpPr/>
+          <p:nvPr/>
+        </p:nvSpPr>
+        <p:spPr>
+          <a:xfrm>
+            <a:off x="1252728" y="4809744"/>
+            <a:ext cx="4449928" cy="292608"/>
           </a:xfrm>
           <a:prstGeom prst="rect">
             <a:avLst/>
@@ -3460,7 +3982,21 @@
               <a:buNone/>
             </a:pPr>
             <a:r>
-              <a:rPr lang="en-US" sz="1400" b="1" dirty="0">
+              <a:rPr lang="en-US" sz="1250" b="1" dirty="0">
+                <a:solidFill>
+                  <a:srgbClr val="E11D48"/>
+                </a:solidFill>
+                <a:latin typeface="Calibri" pitchFamily="34" charset="0"/>
+                <a:ea typeface="Calibri" pitchFamily="34" charset="-122"/>
+                <a:cs typeface="Calibri" pitchFamily="34" charset="-120"/>
+              </a:rPr>
+              <a:t>⚠  </a:t>
+            </a:r>
+            <a:pPr indent="0" marL="0">
+              <a:buNone/>
+            </a:pPr>
+            <a:r>
+              <a:rPr lang="en-US" sz="1250" b="1" dirty="0">
                 <a:solidFill>
                   <a:srgbClr val="0F172A"/>
                 </a:solidFill>
@@ -3468,22 +4004,22 @@
                 <a:ea typeface="Calibri" pitchFamily="34" charset="-122"/>
                 <a:cs typeface="Calibri" pitchFamily="34" charset="-120"/>
               </a:rPr>
-              <a:t>Durable shared state</a:t>
-            </a:r>
-            <a:endParaRPr lang="en-US" sz="1400" dirty="0"/>
-          </a:p>
-        </p:txBody>
-      </p:sp>
-      <p:sp>
-        <p:nvSpPr>
-          <p:cNvPr id="28" name="Text 21"/>
-          <p:cNvSpPr/>
-          <p:nvPr/>
-        </p:nvSpPr>
-        <p:spPr>
-          <a:xfrm>
-            <a:off x="4579010" y="4690872"/>
-            <a:ext cx="3088538" cy="740664"/>
+              <a:t>Context lost on channel / language switch</a:t>
+            </a:r>
+            <a:endParaRPr lang="en-US" sz="1250" dirty="0"/>
+          </a:p>
+        </p:txBody>
+      </p:sp>
+      <p:sp>
+        <p:nvSpPr>
+          <p:cNvPr id="32" name="Text 25"/>
+          <p:cNvSpPr/>
+          <p:nvPr/>
+        </p:nvSpPr>
+        <p:spPr>
+          <a:xfrm>
+            <a:off x="1252728" y="5120640"/>
+            <a:ext cx="4431640" cy="292608"/>
           </a:xfrm>
           <a:prstGeom prst="rect">
             <a:avLst/>
@@ -3495,15 +4031,64 @@
           <a:bodyPr wrap="square" lIns="0" tIns="0" rIns="0" bIns="0" rtlCol="0" anchor="t"/>
           <a:lstStyle/>
           <a:p>
-            <a:pPr marL="152400" indent="-152400">
-              <a:spcAft>
-                <a:spcPts val="500"/>
-              </a:spcAft>
-              <a:buSzPct val="100000"/>
-              <a:buChar char="•"/>
-            </a:pPr>
-            <a:r>
-              <a:rPr lang="en-US" sz="1200" dirty="0">
+            <a:pPr indent="0" marL="0">
+              <a:buNone/>
+            </a:pPr>
+            <a:r>
+              <a:rPr lang="en-US" sz="1050" i="1" dirty="0">
+                <a:solidFill>
+                  <a:srgbClr val="8A94A6"/>
+                </a:solidFill>
+                <a:latin typeface="Calibri" pitchFamily="34" charset="0"/>
+                <a:ea typeface="Calibri" pitchFamily="34" charset="-122"/>
+                <a:cs typeface="Calibri" pitchFamily="34" charset="-120"/>
+              </a:rPr>
+              <a:t>Per-instance memory drops context across Web↔Phone, EN↔ES, and scale-to-zero.</a:t>
+            </a:r>
+            <a:endParaRPr lang="en-US" sz="1050" dirty="0"/>
+          </a:p>
+        </p:txBody>
+      </p:sp>
+      <p:sp>
+        <p:nvSpPr>
+          <p:cNvPr id="33" name="Text 26"/>
+          <p:cNvSpPr/>
+          <p:nvPr/>
+        </p:nvSpPr>
+        <p:spPr>
+          <a:xfrm>
+            <a:off x="704088" y="5449824"/>
+            <a:ext cx="4980280" cy="457200"/>
+          </a:xfrm>
+          <a:prstGeom prst="rect">
+            <a:avLst/>
+          </a:prstGeom>
+          <a:noFill/>
+          <a:ln/>
+        </p:spPr>
+        <p:txBody>
+          <a:bodyPr wrap="square" lIns="0" tIns="0" rIns="0" bIns="0" rtlCol="0" anchor="t"/>
+          <a:lstStyle/>
+          <a:p>
+            <a:pPr indent="0" marL="0">
+              <a:buNone/>
+            </a:pPr>
+            <a:r>
+              <a:rPr lang="en-US" sz="1100" b="1" dirty="0">
+                <a:solidFill>
+                  <a:srgbClr val="0D9488"/>
+                </a:solidFill>
+                <a:latin typeface="Calibri" pitchFamily="34" charset="0"/>
+                <a:ea typeface="Calibri" pitchFamily="34" charset="-122"/>
+                <a:cs typeface="Calibri" pitchFamily="34" charset="-120"/>
+              </a:rPr>
+              <a:t>✓  </a:t>
+            </a:r>
+            <a:pPr indent="0" marL="0">
+              <a:buNone/>
+            </a:pPr>
+            <a:r>
+              <a:rPr lang="en-US" sz="1100" dirty="0">
                 <a:solidFill>
                   <a:srgbClr val="5B6577"/>
                 </a:solidFill>
@@ -3511,26 +4096,26 @@
                 <a:ea typeface="Calibri" pitchFamily="34" charset="-122"/>
                 <a:cs typeface="Calibri" pitchFamily="34" charset="-120"/>
               </a:rPr>
-              <a:t>One session store on Firestore — context survives scale-to-zero &amp; autoscaling.</a:t>
-            </a:r>
-            <a:endParaRPr lang="en-US" sz="1200" dirty="0"/>
-          </a:p>
-        </p:txBody>
-      </p:sp>
-      <p:sp>
-        <p:nvSpPr>
-          <p:cNvPr id="29" name="Shape 22"/>
-          <p:cNvSpPr/>
-          <p:nvPr/>
-        </p:nvSpPr>
-        <p:spPr>
-          <a:xfrm>
-            <a:off x="8143037" y="3794760"/>
-            <a:ext cx="3545738" cy="1783080"/>
+              <a:t>One session store keyed by session_id, durable in Firestore, shared by all agents.</a:t>
+            </a:r>
+            <a:endParaRPr lang="en-US" sz="1100" dirty="0"/>
+          </a:p>
+        </p:txBody>
+      </p:sp>
+      <p:sp>
+        <p:nvSpPr>
+          <p:cNvPr id="34" name="Shape 27"/>
+          <p:cNvSpPr/>
+          <p:nvPr/>
+        </p:nvSpPr>
+        <p:spPr>
+          <a:xfrm>
+            <a:off x="6324448" y="4663440"/>
+            <a:ext cx="5364328" cy="1298448"/>
           </a:xfrm>
           <a:prstGeom prst="roundRect">
             <a:avLst>
-              <a:gd name="adj" fmla="val 4615"/>
+              <a:gd name="adj" fmla="val 5634"/>
             </a:avLst>
           </a:prstGeom>
           <a:solidFill>
@@ -3553,29 +4138,29 @@
       </p:sp>
       <p:sp>
         <p:nvSpPr>
-          <p:cNvPr id="30" name="Shape 23"/>
-          <p:cNvSpPr/>
-          <p:nvPr/>
-        </p:nvSpPr>
-        <p:spPr>
-          <a:xfrm>
-            <a:off x="8380781" y="4014216"/>
-            <a:ext cx="566928" cy="566928"/>
+          <p:cNvPr id="35" name="Shape 28"/>
+          <p:cNvSpPr/>
+          <p:nvPr/>
+        </p:nvSpPr>
+        <p:spPr>
+          <a:xfrm>
+            <a:off x="6507328" y="4864608"/>
+            <a:ext cx="457200" cy="457200"/>
           </a:xfrm>
           <a:prstGeom prst="roundRect">
             <a:avLst>
-              <a:gd name="adj" fmla="val 19355"/>
+              <a:gd name="adj" fmla="val 20000"/>
             </a:avLst>
           </a:prstGeom>
           <a:solidFill>
-            <a:srgbClr val="F59E0B"/>
+            <a:srgbClr val="E11D48"/>
           </a:solidFill>
           <a:ln/>
         </p:spPr>
       </p:sp>
       <p:pic>
         <p:nvPicPr>
-          <p:cNvPr id="31" name="Image 5" descr="icons/eye.png">    </p:cNvPr>
+          <p:cNvPr id="36" name="Image 5" descr="icons/cloud.png">    </p:cNvPr>
           <p:cNvPicPr>
             <a:picLocks noChangeAspect="1"/>
           </p:cNvPicPr>
@@ -3589,8 +4174,8 @@
         </p:blipFill>
         <p:spPr>
           <a:xfrm>
-            <a:off x="8517941" y="4151376"/>
-            <a:ext cx="292608" cy="292608"/>
+            <a:off x="6617056" y="4974336"/>
+            <a:ext cx="237744" cy="237744"/>
           </a:xfrm>
           <a:prstGeom prst="rect">
             <a:avLst/>
@@ -3599,14 +4184,14 @@
       </p:pic>
       <p:sp>
         <p:nvSpPr>
-          <p:cNvPr id="32" name="Text 24"/>
-          <p:cNvSpPr/>
-          <p:nvPr/>
-        </p:nvSpPr>
-        <p:spPr>
-          <a:xfrm>
-            <a:off x="9130589" y="3995928"/>
-            <a:ext cx="2357018" cy="603504"/>
+          <p:cNvPr id="37" name="Text 29"/>
+          <p:cNvSpPr/>
+          <p:nvPr/>
+        </p:nvSpPr>
+        <p:spPr>
+          <a:xfrm>
+            <a:off x="7074256" y="4809744"/>
+            <a:ext cx="4449928" cy="292608"/>
           </a:xfrm>
           <a:prstGeom prst="rect">
             <a:avLst/>
@@ -3622,7 +4207,21 @@
               <a:buNone/>
             </a:pPr>
             <a:r>
-              <a:rPr lang="en-US" sz="1400" b="1" dirty="0">
+              <a:rPr lang="en-US" sz="1250" b="1" dirty="0">
+                <a:solidFill>
+                  <a:srgbClr val="E11D48"/>
+                </a:solidFill>
+                <a:latin typeface="Calibri" pitchFamily="34" charset="0"/>
+                <a:ea typeface="Calibri" pitchFamily="34" charset="-122"/>
+                <a:cs typeface="Calibri" pitchFamily="34" charset="-120"/>
+              </a:rPr>
+              <a:t>⚠  </a:t>
+            </a:r>
+            <a:pPr indent="0" marL="0">
+              <a:buNone/>
+            </a:pPr>
+            <a:r>
+              <a:rPr lang="en-US" sz="1250" b="1" dirty="0">
                 <a:solidFill>
                   <a:srgbClr val="0F172A"/>
                 </a:solidFill>
@@ -3630,22 +4229,22 @@
                 <a:ea typeface="Calibri" pitchFamily="34" charset="-122"/>
                 <a:cs typeface="Calibri" pitchFamily="34" charset="-120"/>
               </a:rPr>
-              <a:t>Full observability</a:t>
-            </a:r>
-            <a:endParaRPr lang="en-US" sz="1400" dirty="0"/>
-          </a:p>
-        </p:txBody>
-      </p:sp>
-      <p:sp>
-        <p:nvSpPr>
-          <p:cNvPr id="33" name="Text 25"/>
-          <p:cNvSpPr/>
-          <p:nvPr/>
-        </p:nvSpPr>
-        <p:spPr>
-          <a:xfrm>
-            <a:off x="8399069" y="4690872"/>
-            <a:ext cx="3088538" cy="740664"/>
+              <a:t>Vertex vs AI Studio SDK; quota “limit:0” lies</a:t>
+            </a:r>
+            <a:endParaRPr lang="en-US" sz="1250" dirty="0"/>
+          </a:p>
+        </p:txBody>
+      </p:sp>
+      <p:sp>
+        <p:nvSpPr>
+          <p:cNvPr id="38" name="Text 30"/>
+          <p:cNvSpPr/>
+          <p:nvPr/>
+        </p:nvSpPr>
+        <p:spPr>
+          <a:xfrm>
+            <a:off x="7074256" y="5120640"/>
+            <a:ext cx="4431640" cy="292608"/>
           </a:xfrm>
           <a:prstGeom prst="rect">
             <a:avLst/>
@@ -3657,15 +4256,64 @@
           <a:bodyPr wrap="square" lIns="0" tIns="0" rIns="0" bIns="0" rtlCol="0" anchor="t"/>
           <a:lstStyle/>
           <a:p>
-            <a:pPr marL="152400" indent="-152400">
-              <a:spcAft>
-                <a:spcPts val="500"/>
-              </a:spcAft>
-              <a:buSzPct val="100000"/>
-              <a:buChar char="•"/>
-            </a:pPr>
-            <a:r>
-              <a:rPr lang="en-US" sz="1200" dirty="0">
+            <a:pPr indent="0" marL="0">
+              <a:buNone/>
+            </a:pPr>
+            <a:r>
+              <a:rPr lang="en-US" sz="1050" i="1" dirty="0">
+                <a:solidFill>
+                  <a:srgbClr val="8A94A6"/>
+                </a:solidFill>
+                <a:latin typeface="Calibri" pitchFamily="34" charset="0"/>
+                <a:ea typeface="Calibri" pitchFamily="34" charset="-122"/>
+                <a:cs typeface="Calibri" pitchFamily="34" charset="-120"/>
+              </a:rPr>
+              <a:t>google.generativeai can't reach Vertex; a wrong model reads as a zero quota.</a:t>
+            </a:r>
+            <a:endParaRPr lang="en-US" sz="1050" dirty="0"/>
+          </a:p>
+        </p:txBody>
+      </p:sp>
+      <p:sp>
+        <p:nvSpPr>
+          <p:cNvPr id="39" name="Text 31"/>
+          <p:cNvSpPr/>
+          <p:nvPr/>
+        </p:nvSpPr>
+        <p:spPr>
+          <a:xfrm>
+            <a:off x="6525616" y="5449824"/>
+            <a:ext cx="4980280" cy="457200"/>
+          </a:xfrm>
+          <a:prstGeom prst="rect">
+            <a:avLst/>
+          </a:prstGeom>
+          <a:noFill/>
+          <a:ln/>
+        </p:spPr>
+        <p:txBody>
+          <a:bodyPr wrap="square" lIns="0" tIns="0" rIns="0" bIns="0" rtlCol="0" anchor="t"/>
+          <a:lstStyle/>
+          <a:p>
+            <a:pPr indent="0" marL="0">
+              <a:buNone/>
+            </a:pPr>
+            <a:r>
+              <a:rPr lang="en-US" sz="1100" b="1" dirty="0">
+                <a:solidFill>
+                  <a:srgbClr val="0D9488"/>
+                </a:solidFill>
+                <a:latin typeface="Calibri" pitchFamily="34" charset="0"/>
+                <a:ea typeface="Calibri" pitchFamily="34" charset="-122"/>
+                <a:cs typeface="Calibri" pitchFamily="34" charset="-120"/>
+              </a:rPr>
+              <a:t>✓  </a:t>
+            </a:r>
+            <a:pPr indent="0" marL="0">
+              <a:buNone/>
+            </a:pPr>
+            <a:r>
+              <a:rPr lang="en-US" sz="1100" dirty="0">
                 <a:solidFill>
                   <a:srgbClr val="5B6577"/>
                 </a:solidFill>
@@ -3673,15 +4321,15 @@
                 <a:ea typeface="Calibri" pitchFamily="34" charset="-122"/>
                 <a:cs typeface="Calibri" pitchFamily="34" charset="-120"/>
               </a:rPr>
-              <a:t>Live /dev pipeline, Cloud Trace spans, /metrics, /version — debug any turn.</a:t>
-            </a:r>
-            <a:endParaRPr lang="en-US" sz="1200" dirty="0"/>
-          </a:p>
-        </p:txBody>
-      </p:sp>
-      <p:sp>
-        <p:nvSpPr>
-          <p:cNvPr id="34" name="Text 26"/>
+              <a:t>Unified google.genai (vertexai=True) + pin gemini-2.5-flash (verified quota).</a:t>
+            </a:r>
+            <a:endParaRPr lang="en-US" sz="1100" dirty="0"/>
+          </a:p>
+        </p:txBody>
+      </p:sp>
+      <p:sp>
+        <p:nvSpPr>
+          <p:cNvPr id="40" name="Text 32"/>
           <p:cNvSpPr/>
           <p:nvPr/>
         </p:nvSpPr>
@@ -3720,7 +4368,7 @@
       </p:sp>
       <p:sp>
         <p:nvSpPr>
-          <p:cNvPr id="35" name="Text 27"/>
+          <p:cNvPr id="41" name="Text 33"/>
           <p:cNvSpPr/>
           <p:nvPr/>
         </p:nvSpPr>
@@ -3762,6 +4410,9 @@
   <p:clrMapOvr>
     <a:masterClrMapping/>
   </p:clrMapOvr>
+  <p:transition spd="med">
+    <p:fade/>
+  </p:transition>
 </p:sld>
 </file>
 
@@ -3770,9 +4421,16 @@
   <p:cSld name="Slide 11">
     <p:bg>
       <p:bgPr>
-        <a:solidFill>
-          <a:srgbClr val="FFFFFF"/>
-        </a:solidFill>
+        <a:blipFill dpi="0" rotWithShape="1">
+          <a:blip r:embed="rId1">
+            <a:lum/>
+          </a:blip>
+          <a:srcRect/>
+          <a:stretch>
+            <a:fillRect/>
+          </a:stretch>
+        </a:blipFill>
+        <a:effectLst/>
       </p:bgPr>
     </p:bg>
     <p:spTree>
@@ -3816,13 +4474,13 @@
             <a:r>
               <a:rPr lang="en-US" sz="1200" b="1" spc="300" kern="0" dirty="0">
                 <a:solidFill>
-                  <a:srgbClr val="E11D48"/>
-                </a:solidFill>
-                <a:latin typeface="Calibri" pitchFamily="34" charset="0"/>
-                <a:ea typeface="Calibri" pitchFamily="34" charset="-122"/>
-                <a:cs typeface="Calibri" pitchFamily="34" charset="-120"/>
-              </a:rPr>
-              <a:t>BUSINESS &amp; STRATEGIC VALUE — FOR THE VP OF STRATEGY</a:t>
+                  <a:srgbClr val="FCA5C0"/>
+                </a:solidFill>
+                <a:latin typeface="Calibri" pitchFamily="34" charset="0"/>
+                <a:ea typeface="Calibri" pitchFamily="34" charset="-122"/>
+                <a:cs typeface="Calibri" pitchFamily="34" charset="-120"/>
+              </a:rPr>
+              <a:t>THE DIFFERENTIATORS</a:t>
             </a:r>
             <a:endParaRPr lang="en-US" sz="1200" dirty="0"/>
           </a:p>
@@ -3836,34 +4494,34 @@
         </p:nvSpPr>
         <p:spPr>
           <a:xfrm>
-            <a:off x="502920" y="749808"/>
-            <a:ext cx="11185855" cy="914400"/>
-          </a:xfrm>
-          <a:prstGeom prst="rect">
-            <a:avLst/>
-          </a:prstGeom>
-          <a:noFill/>
-          <a:ln/>
-        </p:spPr>
-        <p:txBody>
-          <a:bodyPr wrap="square" lIns="0" tIns="0" rIns="0" bIns="0" rtlCol="0" anchor="t"/>
-          <a:lstStyle/>
-          <a:p>
-            <a:pPr indent="0" marL="0">
-              <a:buNone/>
-            </a:pPr>
-            <a:r>
-              <a:rPr lang="en-US" sz="2800" b="1" dirty="0">
-                <a:solidFill>
-                  <a:srgbClr val="0F172A"/>
+            <a:off x="502920" y="713232"/>
+            <a:ext cx="11185855" cy="822960"/>
+          </a:xfrm>
+          <a:prstGeom prst="rect">
+            <a:avLst/>
+          </a:prstGeom>
+          <a:noFill/>
+          <a:ln/>
+        </p:spPr>
+        <p:txBody>
+          <a:bodyPr wrap="square" lIns="0" tIns="0" rIns="0" bIns="0" rtlCol="0" anchor="ctr"/>
+          <a:lstStyle/>
+          <a:p>
+            <a:pPr indent="0" marL="0">
+              <a:buNone/>
+            </a:pPr>
+            <a:r>
+              <a:rPr lang="en-US" sz="3000" b="1" dirty="0">
+                <a:solidFill>
+                  <a:srgbClr val="FFFFFF"/>
                 </a:solidFill>
                 <a:latin typeface="Georgia" pitchFamily="34" charset="0"/>
                 <a:ea typeface="Georgia" pitchFamily="34" charset="-122"/>
                 <a:cs typeface="Georgia" pitchFamily="34" charset="-120"/>
               </a:rPr>
-              <a:t>From technical win to measurable business value</a:t>
-            </a:r>
-            <a:endParaRPr lang="en-US" sz="2800" dirty="0"/>
+              <a:t>What makes them lean in</a:t>
+            </a:r>
+            <a:endParaRPr lang="en-US" sz="3000" dirty="0"/>
           </a:p>
         </p:txBody>
       </p:sp>
@@ -3875,487 +4533,41 @@
         </p:nvSpPr>
         <p:spPr>
           <a:xfrm>
-            <a:off x="502920" y="1783080"/>
-            <a:ext cx="2615184" cy="1554480"/>
+            <a:off x="502920" y="1874520"/>
+            <a:ext cx="3545738" cy="1874520"/>
           </a:xfrm>
           <a:prstGeom prst="roundRect">
             <a:avLst>
-              <a:gd name="adj" fmla="val 5294"/>
+              <a:gd name="adj" fmla="val 4878"/>
             </a:avLst>
           </a:prstGeom>
           <a:solidFill>
-            <a:srgbClr val="FFFFFF"/>
+            <a:srgbClr val="FFFFFF">
+              <a:alpha val="10000"/>
+            </a:srgbClr>
           </a:solidFill>
           <a:ln w="12700">
             <a:solidFill>
-              <a:srgbClr val="E6E8F0"/>
+              <a:srgbClr val="FFFFFF"/>
             </a:solidFill>
             <a:prstDash val="solid"/>
           </a:ln>
-          <a:effectLst>
-            <a:outerShdw sx="100000" sy="100000" kx="0" ky="0" algn="bl" rotWithShape="0" blurRad="114300" dist="38100" dir="8100000">
-              <a:srgbClr val="0F172A">
-                <a:alpha val="16000"/>
-              </a:srgbClr>
-            </a:outerShdw>
-          </a:effectLst>
-        </p:spPr>
-      </p:sp>
-      <p:sp>
-        <p:nvSpPr>
-          <p:cNvPr id="5" name="Text 3"/>
-          <p:cNvSpPr/>
-          <p:nvPr/>
-        </p:nvSpPr>
-        <p:spPr>
-          <a:xfrm>
-            <a:off x="594360" y="1965960"/>
-            <a:ext cx="2432304" cy="777240"/>
-          </a:xfrm>
-          <a:prstGeom prst="rect">
-            <a:avLst/>
-          </a:prstGeom>
-          <a:noFill/>
-          <a:ln/>
-        </p:spPr>
-        <p:txBody>
-          <a:bodyPr wrap="square" lIns="0" tIns="0" rIns="0" bIns="0" rtlCol="0" anchor="ctr"/>
-          <a:lstStyle/>
-          <a:p>
-            <a:pPr algn="ctr" indent="0" marL="0">
-              <a:buNone/>
-            </a:pPr>
-            <a:r>
-              <a:rPr lang="en-US" sz="4000" b="1" dirty="0">
-                <a:solidFill>
-                  <a:srgbClr val="7C3AED"/>
-                </a:solidFill>
-                <a:latin typeface="Georgia" pitchFamily="34" charset="0"/>
-                <a:ea typeface="Georgia" pitchFamily="34" charset="-122"/>
-                <a:cs typeface="Georgia" pitchFamily="34" charset="-120"/>
-              </a:rPr>
-              <a:t>24/7</a:t>
-            </a:r>
-            <a:endParaRPr lang="en-US" sz="4000" dirty="0"/>
-          </a:p>
-        </p:txBody>
-      </p:sp>
-      <p:sp>
-        <p:nvSpPr>
-          <p:cNvPr id="6" name="Text 4"/>
-          <p:cNvSpPr/>
-          <p:nvPr/>
-        </p:nvSpPr>
-        <p:spPr>
-          <a:xfrm>
-            <a:off x="667512" y="2734056"/>
-            <a:ext cx="2286000" cy="548640"/>
-          </a:xfrm>
-          <a:prstGeom prst="rect">
-            <a:avLst/>
-          </a:prstGeom>
-          <a:noFill/>
-          <a:ln/>
-        </p:spPr>
-        <p:txBody>
-          <a:bodyPr wrap="square" lIns="0" tIns="0" rIns="0" bIns="0" rtlCol="0" anchor="t"/>
-          <a:lstStyle/>
-          <a:p>
-            <a:pPr algn="ctr" indent="0" marL="0">
-              <a:buNone/>
-            </a:pPr>
-            <a:r>
-              <a:rPr lang="en-US" sz="1150" dirty="0">
-                <a:solidFill>
-                  <a:srgbClr val="5B6577"/>
-                </a:solidFill>
-                <a:latin typeface="Calibri" pitchFamily="34" charset="0"/>
-                <a:ea typeface="Calibri" pitchFamily="34" charset="-122"/>
-                <a:cs typeface="Calibri" pitchFamily="34" charset="-120"/>
-              </a:rPr>
-              <a:t>Self-service order mgmt &amp; support — every channel, every language</a:t>
-            </a:r>
-            <a:endParaRPr lang="en-US" sz="1150" dirty="0"/>
-          </a:p>
-        </p:txBody>
-      </p:sp>
-      <p:sp>
-        <p:nvSpPr>
-          <p:cNvPr id="7" name="Shape 5"/>
-          <p:cNvSpPr/>
-          <p:nvPr/>
-        </p:nvSpPr>
-        <p:spPr>
-          <a:xfrm>
-            <a:off x="3300984" y="1783080"/>
-            <a:ext cx="2615184" cy="1554480"/>
+        </p:spPr>
+      </p:sp>
+      <p:sp>
+        <p:nvSpPr>
+          <p:cNvPr id="5" name="Shape 3"/>
+          <p:cNvSpPr/>
+          <p:nvPr/>
+        </p:nvSpPr>
+        <p:spPr>
+          <a:xfrm>
+            <a:off x="740664" y="2112264"/>
+            <a:ext cx="585216" cy="585216"/>
           </a:xfrm>
           <a:prstGeom prst="roundRect">
             <a:avLst>
-              <a:gd name="adj" fmla="val 5294"/>
-            </a:avLst>
-          </a:prstGeom>
-          <a:solidFill>
-            <a:srgbClr val="FFFFFF"/>
-          </a:solidFill>
-          <a:ln w="12700">
-            <a:solidFill>
-              <a:srgbClr val="E6E8F0"/>
-            </a:solidFill>
-            <a:prstDash val="solid"/>
-          </a:ln>
-          <a:effectLst>
-            <a:outerShdw sx="100000" sy="100000" kx="0" ky="0" algn="bl" rotWithShape="0" blurRad="114300" dist="38100" dir="8100000">
-              <a:srgbClr val="0F172A">
-                <a:alpha val="16000"/>
-              </a:srgbClr>
-            </a:outerShdw>
-          </a:effectLst>
-        </p:spPr>
-      </p:sp>
-      <p:sp>
-        <p:nvSpPr>
-          <p:cNvPr id="8" name="Text 6"/>
-          <p:cNvSpPr/>
-          <p:nvPr/>
-        </p:nvSpPr>
-        <p:spPr>
-          <a:xfrm>
-            <a:off x="3392424" y="1965960"/>
-            <a:ext cx="2432304" cy="777240"/>
-          </a:xfrm>
-          <a:prstGeom prst="rect">
-            <a:avLst/>
-          </a:prstGeom>
-          <a:noFill/>
-          <a:ln/>
-        </p:spPr>
-        <p:txBody>
-          <a:bodyPr wrap="square" lIns="0" tIns="0" rIns="0" bIns="0" rtlCol="0" anchor="ctr"/>
-          <a:lstStyle/>
-          <a:p>
-            <a:pPr algn="ctr" indent="0" marL="0">
-              <a:buNone/>
-            </a:pPr>
-            <a:r>
-              <a:rPr lang="en-US" sz="4000" b="1" dirty="0">
-                <a:solidFill>
-                  <a:srgbClr val="0D9488"/>
-                </a:solidFill>
-                <a:latin typeface="Georgia" pitchFamily="34" charset="0"/>
-                <a:ea typeface="Georgia" pitchFamily="34" charset="-122"/>
-                <a:cs typeface="Georgia" pitchFamily="34" charset="-120"/>
-              </a:rPr>
-              <a:t>60–80%</a:t>
-            </a:r>
-            <a:endParaRPr lang="en-US" sz="4000" dirty="0"/>
-          </a:p>
-        </p:txBody>
-      </p:sp>
-      <p:sp>
-        <p:nvSpPr>
-          <p:cNvPr id="9" name="Text 7"/>
-          <p:cNvSpPr/>
-          <p:nvPr/>
-        </p:nvSpPr>
-        <p:spPr>
-          <a:xfrm>
-            <a:off x="3465576" y="2734056"/>
-            <a:ext cx="2286000" cy="548640"/>
-          </a:xfrm>
-          <a:prstGeom prst="rect">
-            <a:avLst/>
-          </a:prstGeom>
-          <a:noFill/>
-          <a:ln/>
-        </p:spPr>
-        <p:txBody>
-          <a:bodyPr wrap="square" lIns="0" tIns="0" rIns="0" bIns="0" rtlCol="0" anchor="t"/>
-          <a:lstStyle/>
-          <a:p>
-            <a:pPr algn="ctr" indent="0" marL="0">
-              <a:buNone/>
-            </a:pPr>
-            <a:r>
-              <a:rPr lang="en-US" sz="1150" dirty="0">
-                <a:solidFill>
-                  <a:srgbClr val="5B6577"/>
-                </a:solidFill>
-                <a:latin typeface="Calibri" pitchFamily="34" charset="0"/>
-                <a:ea typeface="Calibri" pitchFamily="34" charset="-122"/>
-                <a:cs typeface="Calibri" pitchFamily="34" charset="-120"/>
-              </a:rPr>
-              <a:t>Typical self-service deflection of routine contacts (industry benchmark)</a:t>
-            </a:r>
-            <a:endParaRPr lang="en-US" sz="1150" dirty="0"/>
-          </a:p>
-        </p:txBody>
-      </p:sp>
-      <p:sp>
-        <p:nvSpPr>
-          <p:cNvPr id="10" name="Shape 8"/>
-          <p:cNvSpPr/>
-          <p:nvPr/>
-        </p:nvSpPr>
-        <p:spPr>
-          <a:xfrm>
-            <a:off x="6099048" y="1783080"/>
-            <a:ext cx="2615184" cy="1554480"/>
-          </a:xfrm>
-          <a:prstGeom prst="roundRect">
-            <a:avLst>
-              <a:gd name="adj" fmla="val 5294"/>
-            </a:avLst>
-          </a:prstGeom>
-          <a:solidFill>
-            <a:srgbClr val="FFFFFF"/>
-          </a:solidFill>
-          <a:ln w="12700">
-            <a:solidFill>
-              <a:srgbClr val="E6E8F0"/>
-            </a:solidFill>
-            <a:prstDash val="solid"/>
-          </a:ln>
-          <a:effectLst>
-            <a:outerShdw sx="100000" sy="100000" kx="0" ky="0" algn="bl" rotWithShape="0" blurRad="114300" dist="38100" dir="8100000">
-              <a:srgbClr val="0F172A">
-                <a:alpha val="16000"/>
-              </a:srgbClr>
-            </a:outerShdw>
-          </a:effectLst>
-        </p:spPr>
-      </p:sp>
-      <p:sp>
-        <p:nvSpPr>
-          <p:cNvPr id="11" name="Text 9"/>
-          <p:cNvSpPr/>
-          <p:nvPr/>
-        </p:nvSpPr>
-        <p:spPr>
-          <a:xfrm>
-            <a:off x="6190488" y="1965960"/>
-            <a:ext cx="2432304" cy="777240"/>
-          </a:xfrm>
-          <a:prstGeom prst="rect">
-            <a:avLst/>
-          </a:prstGeom>
-          <a:noFill/>
-          <a:ln/>
-        </p:spPr>
-        <p:txBody>
-          <a:bodyPr wrap="square" lIns="0" tIns="0" rIns="0" bIns="0" rtlCol="0" anchor="ctr"/>
-          <a:lstStyle/>
-          <a:p>
-            <a:pPr algn="ctr" indent="0" marL="0">
-              <a:buNone/>
-            </a:pPr>
-            <a:r>
-              <a:rPr lang="en-US" sz="4000" b="1" dirty="0">
-                <a:solidFill>
-                  <a:srgbClr val="F59E0B"/>
-                </a:solidFill>
-                <a:latin typeface="Georgia" pitchFamily="34" charset="0"/>
-                <a:ea typeface="Georgia" pitchFamily="34" charset="-122"/>
-                <a:cs typeface="Georgia" pitchFamily="34" charset="-120"/>
-              </a:rPr>
-              <a:t>~$0</a:t>
-            </a:r>
-            <a:endParaRPr lang="en-US" sz="4000" dirty="0"/>
-          </a:p>
-        </p:txBody>
-      </p:sp>
-      <p:sp>
-        <p:nvSpPr>
-          <p:cNvPr id="12" name="Text 10"/>
-          <p:cNvSpPr/>
-          <p:nvPr/>
-        </p:nvSpPr>
-        <p:spPr>
-          <a:xfrm>
-            <a:off x="6263640" y="2734056"/>
-            <a:ext cx="2286000" cy="548640"/>
-          </a:xfrm>
-          <a:prstGeom prst="rect">
-            <a:avLst/>
-          </a:prstGeom>
-          <a:noFill/>
-          <a:ln/>
-        </p:spPr>
-        <p:txBody>
-          <a:bodyPr wrap="square" lIns="0" tIns="0" rIns="0" bIns="0" rtlCol="0" anchor="t"/>
-          <a:lstStyle/>
-          <a:p>
-            <a:pPr algn="ctr" indent="0" marL="0">
-              <a:buNone/>
-            </a:pPr>
-            <a:r>
-              <a:rPr lang="en-US" sz="1150" dirty="0">
-                <a:solidFill>
-                  <a:srgbClr val="5B6577"/>
-                </a:solidFill>
-                <a:latin typeface="Calibri" pitchFamily="34" charset="0"/>
-                <a:ea typeface="Calibri" pitchFamily="34" charset="-122"/>
-                <a:cs typeface="Calibri" pitchFamily="34" charset="-120"/>
-              </a:rPr>
-              <a:t>Idle cost — Cloud Run scales to zero between conversations</a:t>
-            </a:r>
-            <a:endParaRPr lang="en-US" sz="1150" dirty="0"/>
-          </a:p>
-        </p:txBody>
-      </p:sp>
-      <p:sp>
-        <p:nvSpPr>
-          <p:cNvPr id="13" name="Shape 11"/>
-          <p:cNvSpPr/>
-          <p:nvPr/>
-        </p:nvSpPr>
-        <p:spPr>
-          <a:xfrm>
-            <a:off x="8897112" y="1783080"/>
-            <a:ext cx="2791663" cy="1554480"/>
-          </a:xfrm>
-          <a:prstGeom prst="roundRect">
-            <a:avLst>
-              <a:gd name="adj" fmla="val 5294"/>
-            </a:avLst>
-          </a:prstGeom>
-          <a:solidFill>
-            <a:srgbClr val="FFFFFF"/>
-          </a:solidFill>
-          <a:ln w="12700">
-            <a:solidFill>
-              <a:srgbClr val="E6E8F0"/>
-            </a:solidFill>
-            <a:prstDash val="solid"/>
-          </a:ln>
-          <a:effectLst>
-            <a:outerShdw sx="100000" sy="100000" kx="0" ky="0" algn="bl" rotWithShape="0" blurRad="114300" dist="38100" dir="8100000">
-              <a:srgbClr val="0F172A">
-                <a:alpha val="16000"/>
-              </a:srgbClr>
-            </a:outerShdw>
-          </a:effectLst>
-        </p:spPr>
-      </p:sp>
-      <p:sp>
-        <p:nvSpPr>
-          <p:cNvPr id="14" name="Text 12"/>
-          <p:cNvSpPr/>
-          <p:nvPr/>
-        </p:nvSpPr>
-        <p:spPr>
-          <a:xfrm>
-            <a:off x="8988552" y="1965960"/>
-            <a:ext cx="2608783" cy="777240"/>
-          </a:xfrm>
-          <a:prstGeom prst="rect">
-            <a:avLst/>
-          </a:prstGeom>
-          <a:noFill/>
-          <a:ln/>
-        </p:spPr>
-        <p:txBody>
-          <a:bodyPr wrap="square" lIns="0" tIns="0" rIns="0" bIns="0" rtlCol="0" anchor="ctr"/>
-          <a:lstStyle/>
-          <a:p>
-            <a:pPr algn="ctr" indent="0" marL="0">
-              <a:buNone/>
-            </a:pPr>
-            <a:r>
-              <a:rPr lang="en-US" sz="4000" b="1" dirty="0">
-                <a:solidFill>
-                  <a:srgbClr val="E11D48"/>
-                </a:solidFill>
-                <a:latin typeface="Georgia" pitchFamily="34" charset="0"/>
-                <a:ea typeface="Georgia" pitchFamily="34" charset="-122"/>
-                <a:cs typeface="Georgia" pitchFamily="34" charset="-120"/>
-              </a:rPr>
-              <a:t>1 agent</a:t>
-            </a:r>
-            <a:endParaRPr lang="en-US" sz="4000" dirty="0"/>
-          </a:p>
-        </p:txBody>
-      </p:sp>
-      <p:sp>
-        <p:nvSpPr>
-          <p:cNvPr id="15" name="Text 13"/>
-          <p:cNvSpPr/>
-          <p:nvPr/>
-        </p:nvSpPr>
-        <p:spPr>
-          <a:xfrm>
-            <a:off x="9061704" y="2734056"/>
-            <a:ext cx="2462479" cy="548640"/>
-          </a:xfrm>
-          <a:prstGeom prst="rect">
-            <a:avLst/>
-          </a:prstGeom>
-          <a:noFill/>
-          <a:ln/>
-        </p:spPr>
-        <p:txBody>
-          <a:bodyPr wrap="square" lIns="0" tIns="0" rIns="0" bIns="0" rtlCol="0" anchor="t"/>
-          <a:lstStyle/>
-          <a:p>
-            <a:pPr algn="ctr" indent="0" marL="0">
-              <a:buNone/>
-            </a:pPr>
-            <a:r>
-              <a:rPr lang="en-US" sz="1150" dirty="0">
-                <a:solidFill>
-                  <a:srgbClr val="5B6577"/>
-                </a:solidFill>
-                <a:latin typeface="Calibri" pitchFamily="34" charset="0"/>
-                <a:ea typeface="Calibri" pitchFamily="34" charset="-122"/>
-                <a:cs typeface="Calibri" pitchFamily="34" charset="-120"/>
-              </a:rPr>
-              <a:t>Replaces search + support + checkout hand-offs</a:t>
-            </a:r>
-            <a:endParaRPr lang="en-US" sz="1150" dirty="0"/>
-          </a:p>
-        </p:txBody>
-      </p:sp>
-      <p:sp>
-        <p:nvSpPr>
-          <p:cNvPr id="16" name="Shape 14"/>
-          <p:cNvSpPr/>
-          <p:nvPr/>
-        </p:nvSpPr>
-        <p:spPr>
-          <a:xfrm>
-            <a:off x="502920" y="3657600"/>
-            <a:ext cx="5318608" cy="1234440"/>
-          </a:xfrm>
-          <a:prstGeom prst="roundRect">
-            <a:avLst>
-              <a:gd name="adj" fmla="val 5926"/>
-            </a:avLst>
-          </a:prstGeom>
-          <a:solidFill>
-            <a:srgbClr val="F5F6FB"/>
-          </a:solidFill>
-          <a:ln w="12700">
-            <a:solidFill>
-              <a:srgbClr val="E6E8F0"/>
-            </a:solidFill>
-            <a:prstDash val="solid"/>
-          </a:ln>
-        </p:spPr>
-      </p:sp>
-      <p:sp>
-        <p:nvSpPr>
-          <p:cNvPr id="17" name="Shape 15"/>
-          <p:cNvSpPr/>
-          <p:nvPr/>
-        </p:nvSpPr>
-        <p:spPr>
-          <a:xfrm>
-            <a:off x="704088" y="3986784"/>
-            <a:ext cx="548640" cy="548640"/>
-          </a:xfrm>
-          <a:prstGeom prst="roundRect">
-            <a:avLst>
-              <a:gd name="adj" fmla="val 20000"/>
+              <a:gd name="adj" fmla="val 20313"/>
             </a:avLst>
           </a:prstGeom>
           <a:solidFill>
@@ -4366,158 +4578,7 @@
       </p:sp>
       <p:pic>
         <p:nvPicPr>
-          <p:cNvPr id="18" name="Image 0" descr="icons/chart.png">    </p:cNvPr>
-          <p:cNvPicPr>
-            <a:picLocks noChangeAspect="1"/>
-          </p:cNvPicPr>
-          <p:nvPr/>
-        </p:nvPicPr>
-        <p:blipFill>
-          <a:blip r:embed="rId1"/>
-          <a:stretch>
-            <a:fillRect/>
-          </a:stretch>
-        </p:blipFill>
-        <p:spPr>
-          <a:xfrm>
-            <a:off x="841248" y="4123944"/>
-            <a:ext cx="274320" cy="274320"/>
-          </a:xfrm>
-          <a:prstGeom prst="rect">
-            <a:avLst/>
-          </a:prstGeom>
-        </p:spPr>
-      </p:pic>
-      <p:sp>
-        <p:nvSpPr>
-          <p:cNvPr id="19" name="Text 16"/>
-          <p:cNvSpPr/>
-          <p:nvPr/>
-        </p:nvSpPr>
-        <p:spPr>
-          <a:xfrm>
-            <a:off x="1417320" y="3840480"/>
-            <a:ext cx="4221328" cy="365760"/>
-          </a:xfrm>
-          <a:prstGeom prst="rect">
-            <a:avLst/>
-          </a:prstGeom>
-          <a:noFill/>
-          <a:ln/>
-        </p:spPr>
-        <p:txBody>
-          <a:bodyPr wrap="square" lIns="0" tIns="0" rIns="0" bIns="0" rtlCol="0" anchor="ctr"/>
-          <a:lstStyle/>
-          <a:p>
-            <a:pPr indent="0" marL="0">
-              <a:buNone/>
-            </a:pPr>
-            <a:r>
-              <a:rPr lang="en-US" sz="1450" b="1" dirty="0">
-                <a:solidFill>
-                  <a:srgbClr val="0F172A"/>
-                </a:solidFill>
-                <a:latin typeface="Calibri" pitchFamily="34" charset="0"/>
-                <a:ea typeface="Calibri" pitchFamily="34" charset="-122"/>
-                <a:cs typeface="Calibri" pitchFamily="34" charset="-120"/>
-              </a:rPr>
-              <a:t>Higher conversion &amp; AOV</a:t>
-            </a:r>
-            <a:endParaRPr lang="en-US" sz="1450" dirty="0"/>
-          </a:p>
-        </p:txBody>
-      </p:sp>
-      <p:sp>
-        <p:nvSpPr>
-          <p:cNvPr id="20" name="Text 17"/>
-          <p:cNvSpPr/>
-          <p:nvPr/>
-        </p:nvSpPr>
-        <p:spPr>
-          <a:xfrm>
-            <a:off x="1417320" y="4206240"/>
-            <a:ext cx="4221328" cy="603504"/>
-          </a:xfrm>
-          <a:prstGeom prst="rect">
-            <a:avLst/>
-          </a:prstGeom>
-          <a:noFill/>
-          <a:ln/>
-        </p:spPr>
-        <p:txBody>
-          <a:bodyPr wrap="square" lIns="0" tIns="0" rIns="0" bIns="0" rtlCol="0" anchor="t"/>
-          <a:lstStyle/>
-          <a:p>
-            <a:pPr indent="0" marL="0">
-              <a:buNone/>
-            </a:pPr>
-            <a:r>
-              <a:rPr lang="en-US" sz="1200" dirty="0">
-                <a:solidFill>
-                  <a:srgbClr val="5B6577"/>
-                </a:solidFill>
-                <a:latin typeface="Calibri" pitchFamily="34" charset="0"/>
-                <a:ea typeface="Calibri" pitchFamily="34" charset="-122"/>
-                <a:cs typeface="Calibri" pitchFamily="34" charset="-120"/>
-              </a:rPr>
-              <a:t>Natural discovery + “see-it-shop-it” + recommendations turn questions into orders.</a:t>
-            </a:r>
-            <a:endParaRPr lang="en-US" sz="1200" dirty="0"/>
-          </a:p>
-        </p:txBody>
-      </p:sp>
-      <p:sp>
-        <p:nvSpPr>
-          <p:cNvPr id="21" name="Shape 18"/>
-          <p:cNvSpPr/>
-          <p:nvPr/>
-        </p:nvSpPr>
-        <p:spPr>
-          <a:xfrm>
-            <a:off x="6370168" y="3657600"/>
-            <a:ext cx="5318608" cy="1234440"/>
-          </a:xfrm>
-          <a:prstGeom prst="roundRect">
-            <a:avLst>
-              <a:gd name="adj" fmla="val 5926"/>
-            </a:avLst>
-          </a:prstGeom>
-          <a:solidFill>
-            <a:srgbClr val="F5F6FB"/>
-          </a:solidFill>
-          <a:ln w="12700">
-            <a:solidFill>
-              <a:srgbClr val="E6E8F0"/>
-            </a:solidFill>
-            <a:prstDash val="solid"/>
-          </a:ln>
-        </p:spPr>
-      </p:sp>
-      <p:sp>
-        <p:nvSpPr>
-          <p:cNvPr id="22" name="Shape 19"/>
-          <p:cNvSpPr/>
-          <p:nvPr/>
-        </p:nvSpPr>
-        <p:spPr>
-          <a:xfrm>
-            <a:off x="6571336" y="3986784"/>
-            <a:ext cx="548640" cy="548640"/>
-          </a:xfrm>
-          <a:prstGeom prst="roundRect">
-            <a:avLst>
-              <a:gd name="adj" fmla="val 20000"/>
-            </a:avLst>
-          </a:prstGeom>
-          <a:solidFill>
-            <a:srgbClr val="E11D48"/>
-          </a:solidFill>
-          <a:ln/>
-        </p:spPr>
-      </p:sp>
-      <p:pic>
-        <p:nvPicPr>
-          <p:cNvPr id="23" name="Image 1" descr="icons/globe.png">    </p:cNvPr>
+          <p:cNvPr id="6" name="Image 0" descr="icons/camera.png">    </p:cNvPr>
           <p:cNvPicPr>
             <a:picLocks noChangeAspect="1"/>
           </p:cNvPicPr>
@@ -4531,7 +4592,7 @@
         </p:blipFill>
         <p:spPr>
           <a:xfrm>
-            <a:off x="6708496" y="4123944"/>
+            <a:off x="896112" y="2267712"/>
             <a:ext cx="274320" cy="274320"/>
           </a:xfrm>
           <a:prstGeom prst="rect">
@@ -4541,14 +4602,14 @@
       </p:pic>
       <p:sp>
         <p:nvSpPr>
-          <p:cNvPr id="24" name="Text 20"/>
-          <p:cNvSpPr/>
-          <p:nvPr/>
-        </p:nvSpPr>
-        <p:spPr>
-          <a:xfrm>
-            <a:off x="7284568" y="3840480"/>
-            <a:ext cx="4221328" cy="365760"/>
+          <p:cNvPr id="7" name="Text 4"/>
+          <p:cNvSpPr/>
+          <p:nvPr/>
+        </p:nvSpPr>
+        <p:spPr>
+          <a:xfrm>
+            <a:off x="1453896" y="2130552"/>
+            <a:ext cx="2448458" cy="548640"/>
           </a:xfrm>
           <a:prstGeom prst="rect">
             <a:avLst/>
@@ -4564,30 +4625,30 @@
               <a:buNone/>
             </a:pPr>
             <a:r>
-              <a:rPr lang="en-US" sz="1450" b="1" dirty="0">
-                <a:solidFill>
-                  <a:srgbClr val="0F172A"/>
-                </a:solidFill>
-                <a:latin typeface="Calibri" pitchFamily="34" charset="0"/>
-                <a:ea typeface="Calibri" pitchFamily="34" charset="-122"/>
-                <a:cs typeface="Calibri" pitchFamily="34" charset="-120"/>
-              </a:rPr>
-              <a:t>Instant global reach</a:t>
-            </a:r>
-            <a:endParaRPr lang="en-US" sz="1450" dirty="0"/>
-          </a:p>
-        </p:txBody>
-      </p:sp>
-      <p:sp>
-        <p:nvSpPr>
-          <p:cNvPr id="25" name="Text 21"/>
-          <p:cNvSpPr/>
-          <p:nvPr/>
-        </p:nvSpPr>
-        <p:spPr>
-          <a:xfrm>
-            <a:off x="7284568" y="4206240"/>
-            <a:ext cx="4221328" cy="603504"/>
+              <a:rPr lang="en-US" sz="1550" b="1" dirty="0">
+                <a:solidFill>
+                  <a:srgbClr val="FFFFFF"/>
+                </a:solidFill>
+                <a:latin typeface="Calibri" pitchFamily="34" charset="0"/>
+                <a:ea typeface="Calibri" pitchFamily="34" charset="-122"/>
+                <a:cs typeface="Calibri" pitchFamily="34" charset="-120"/>
+              </a:rPr>
+              <a:t>See-it, shop-it</a:t>
+            </a:r>
+            <a:endParaRPr lang="en-US" sz="1550" dirty="0"/>
+          </a:p>
+        </p:txBody>
+      </p:sp>
+      <p:sp>
+        <p:nvSpPr>
+          <p:cNvPr id="8" name="Text 5"/>
+          <p:cNvSpPr/>
+          <p:nvPr/>
+        </p:nvSpPr>
+        <p:spPr>
+          <a:xfrm>
+            <a:off x="758952" y="2825496"/>
+            <a:ext cx="3051962" cy="777240"/>
           </a:xfrm>
           <a:prstGeom prst="rect">
             <a:avLst/>
@@ -4605,13 +4666,13 @@
             <a:r>
               <a:rPr lang="en-US" sz="1200" dirty="0">
                 <a:solidFill>
-                  <a:srgbClr val="5B6577"/>
-                </a:solidFill>
-                <a:latin typeface="Calibri" pitchFamily="34" charset="0"/>
-                <a:ea typeface="Calibri" pitchFamily="34" charset="-122"/>
-                <a:cs typeface="Calibri" pitchFamily="34" charset="-120"/>
-              </a:rPr>
-              <a:t>One agent serves every language &amp; channel — no per-market chatbot rebuilds.</a:t>
+                  <a:srgbClr val="D7D3EC"/>
+                </a:solidFill>
+                <a:latin typeface="Calibri" pitchFamily="34" charset="0"/>
+                <a:ea typeface="Calibri" pitchFamily="34" charset="-122"/>
+                <a:cs typeface="Calibri" pitchFamily="34" charset="-120"/>
+              </a:rPr>
+              <a:t>Show a real object to the camera — Gemini Vision prices it and orders it.</a:t>
             </a:r>
             <a:endParaRPr lang="en-US" sz="1200" dirty="0"/>
           </a:p>
@@ -4619,26 +4680,28 @@
       </p:sp>
       <p:sp>
         <p:nvSpPr>
-          <p:cNvPr id="26" name="Shape 22"/>
-          <p:cNvSpPr/>
-          <p:nvPr/>
-        </p:nvSpPr>
-        <p:spPr>
-          <a:xfrm>
-            <a:off x="502920" y="5093208"/>
-            <a:ext cx="5318608" cy="1234440"/>
+          <p:cNvPr id="9" name="Shape 6"/>
+          <p:cNvSpPr/>
+          <p:nvPr/>
+        </p:nvSpPr>
+        <p:spPr>
+          <a:xfrm>
+            <a:off x="4322978" y="1874520"/>
+            <a:ext cx="3545738" cy="1874520"/>
           </a:xfrm>
           <a:prstGeom prst="roundRect">
             <a:avLst>
-              <a:gd name="adj" fmla="val 5926"/>
+              <a:gd name="adj" fmla="val 4878"/>
             </a:avLst>
           </a:prstGeom>
           <a:solidFill>
-            <a:srgbClr val="F5F6FB"/>
+            <a:srgbClr val="FFFFFF">
+              <a:alpha val="10000"/>
+            </a:srgbClr>
           </a:solidFill>
           <a:ln w="12700">
             <a:solidFill>
-              <a:srgbClr val="E6E8F0"/>
+              <a:srgbClr val="FFFFFF"/>
             </a:solidFill>
             <a:prstDash val="solid"/>
           </a:ln>
@@ -4646,18 +4709,18 @@
       </p:sp>
       <p:sp>
         <p:nvSpPr>
-          <p:cNvPr id="27" name="Shape 23"/>
-          <p:cNvSpPr/>
-          <p:nvPr/>
-        </p:nvSpPr>
-        <p:spPr>
-          <a:xfrm>
-            <a:off x="704088" y="5422392"/>
-            <a:ext cx="548640" cy="548640"/>
+          <p:cNvPr id="10" name="Shape 7"/>
+          <p:cNvSpPr/>
+          <p:nvPr/>
+        </p:nvSpPr>
+        <p:spPr>
+          <a:xfrm>
+            <a:off x="4560722" y="2112264"/>
+            <a:ext cx="585216" cy="585216"/>
           </a:xfrm>
           <a:prstGeom prst="roundRect">
             <a:avLst>
-              <a:gd name="adj" fmla="val 20000"/>
+              <a:gd name="adj" fmla="val 20313"/>
             </a:avLst>
           </a:prstGeom>
           <a:solidFill>
@@ -4668,7 +4731,7 @@
       </p:sp>
       <p:pic>
         <p:nvPicPr>
-          <p:cNvPr id="28" name="Image 2" descr="icons/bolt.png">    </p:cNvPr>
+          <p:cNvPr id="11" name="Image 1" descr="icons/sync.png">    </p:cNvPr>
           <p:cNvPicPr>
             <a:picLocks noChangeAspect="1"/>
           </p:cNvPicPr>
@@ -4682,7 +4745,7 @@
         </p:blipFill>
         <p:spPr>
           <a:xfrm>
-            <a:off x="841248" y="5559552"/>
+            <a:off x="4716170" y="2267712"/>
             <a:ext cx="274320" cy="274320"/>
           </a:xfrm>
           <a:prstGeom prst="rect">
@@ -4692,14 +4755,14 @@
       </p:pic>
       <p:sp>
         <p:nvSpPr>
-          <p:cNvPr id="29" name="Text 24"/>
-          <p:cNvSpPr/>
-          <p:nvPr/>
-        </p:nvSpPr>
-        <p:spPr>
-          <a:xfrm>
-            <a:off x="1417320" y="5276088"/>
-            <a:ext cx="4221328" cy="365760"/>
+          <p:cNvPr id="12" name="Text 8"/>
+          <p:cNvSpPr/>
+          <p:nvPr/>
+        </p:nvSpPr>
+        <p:spPr>
+          <a:xfrm>
+            <a:off x="5273954" y="2130552"/>
+            <a:ext cx="2448458" cy="548640"/>
           </a:xfrm>
           <a:prstGeom prst="rect">
             <a:avLst/>
@@ -4715,30 +4778,30 @@
               <a:buNone/>
             </a:pPr>
             <a:r>
-              <a:rPr lang="en-US" sz="1450" b="1" dirty="0">
-                <a:solidFill>
-                  <a:srgbClr val="0F172A"/>
-                </a:solidFill>
-                <a:latin typeface="Calibri" pitchFamily="34" charset="0"/>
-                <a:ea typeface="Calibri" pitchFamily="34" charset="-122"/>
-                <a:cs typeface="Calibri" pitchFamily="34" charset="-120"/>
-              </a:rPr>
-              <a:t>Lower cost to serve</a:t>
-            </a:r>
-            <a:endParaRPr lang="en-US" sz="1450" dirty="0"/>
-          </a:p>
-        </p:txBody>
-      </p:sp>
-      <p:sp>
-        <p:nvSpPr>
-          <p:cNvPr id="30" name="Text 25"/>
-          <p:cNvSpPr/>
-          <p:nvPr/>
-        </p:nvSpPr>
-        <p:spPr>
-          <a:xfrm>
-            <a:off x="1417320" y="5641848"/>
-            <a:ext cx="4221328" cy="603504"/>
+              <a:rPr lang="en-US" sz="1550" b="1" dirty="0">
+                <a:solidFill>
+                  <a:srgbClr val="FFFFFF"/>
+                </a:solidFill>
+                <a:latin typeface="Calibri" pitchFamily="34" charset="0"/>
+                <a:ea typeface="Calibri" pitchFamily="34" charset="-122"/>
+                <a:cs typeface="Calibri" pitchFamily="34" charset="-120"/>
+              </a:rPr>
+              <a:t>Self-healing, live on stage</a:t>
+            </a:r>
+            <a:endParaRPr lang="en-US" sz="1550" dirty="0"/>
+          </a:p>
+        </p:txBody>
+      </p:sp>
+      <p:sp>
+        <p:nvSpPr>
+          <p:cNvPr id="13" name="Text 9"/>
+          <p:cNvSpPr/>
+          <p:nvPr/>
+        </p:nvSpPr>
+        <p:spPr>
+          <a:xfrm>
+            <a:off x="4579010" y="2825496"/>
+            <a:ext cx="3051962" cy="777240"/>
           </a:xfrm>
           <a:prstGeom prst="rect">
             <a:avLst/>
@@ -4756,13 +4819,13 @@
             <a:r>
               <a:rPr lang="en-US" sz="1200" dirty="0">
                 <a:solidFill>
-                  <a:srgbClr val="5B6577"/>
-                </a:solidFill>
-                <a:latin typeface="Calibri" pitchFamily="34" charset="0"/>
-                <a:ea typeface="Calibri" pitchFamily="34" charset="-122"/>
-                <a:cs typeface="Calibri" pitchFamily="34" charset="-120"/>
-              </a:rPr>
-              <a:t>Deflect routine contacts; serverless + free-tier-first keeps run-cost low.</a:t>
+                  <a:srgbClr val="D7D3EC"/>
+                </a:solidFill>
+                <a:latin typeface="Calibri" pitchFamily="34" charset="0"/>
+                <a:ea typeface="Calibri" pitchFamily="34" charset="-122"/>
+                <a:cs typeface="Calibri" pitchFamily="34" charset="-120"/>
+              </a:rPr>
+              <a:t>Kill a dependency with a button; watch DETECT→DIAGNOSE→REMEDIATE→VERIFY recover it.</a:t>
             </a:r>
             <a:endParaRPr lang="en-US" sz="1200" dirty="0"/>
           </a:p>
@@ -4770,26 +4833,28 @@
       </p:sp>
       <p:sp>
         <p:nvSpPr>
-          <p:cNvPr id="31" name="Shape 26"/>
-          <p:cNvSpPr/>
-          <p:nvPr/>
-        </p:nvSpPr>
-        <p:spPr>
-          <a:xfrm>
-            <a:off x="6370168" y="5093208"/>
-            <a:ext cx="5318608" cy="1234440"/>
+          <p:cNvPr id="14" name="Shape 10"/>
+          <p:cNvSpPr/>
+          <p:nvPr/>
+        </p:nvSpPr>
+        <p:spPr>
+          <a:xfrm>
+            <a:off x="8143037" y="1874520"/>
+            <a:ext cx="3545738" cy="1874520"/>
           </a:xfrm>
           <a:prstGeom prst="roundRect">
             <a:avLst>
-              <a:gd name="adj" fmla="val 5926"/>
+              <a:gd name="adj" fmla="val 4878"/>
             </a:avLst>
           </a:prstGeom>
           <a:solidFill>
-            <a:srgbClr val="F5F6FB"/>
+            <a:srgbClr val="FFFFFF">
+              <a:alpha val="10000"/>
+            </a:srgbClr>
           </a:solidFill>
           <a:ln w="12700">
             <a:solidFill>
-              <a:srgbClr val="E6E8F0"/>
+              <a:srgbClr val="FFFFFF"/>
             </a:solidFill>
             <a:prstDash val="solid"/>
           </a:ln>
@@ -4797,18 +4862,18 @@
       </p:sp>
       <p:sp>
         <p:nvSpPr>
-          <p:cNvPr id="32" name="Shape 27"/>
-          <p:cNvSpPr/>
-          <p:nvPr/>
-        </p:nvSpPr>
-        <p:spPr>
-          <a:xfrm>
-            <a:off x="6571336" y="5422392"/>
-            <a:ext cx="548640" cy="548640"/>
+          <p:cNvPr id="15" name="Shape 11"/>
+          <p:cNvSpPr/>
+          <p:nvPr/>
+        </p:nvSpPr>
+        <p:spPr>
+          <a:xfrm>
+            <a:off x="8380781" y="2112264"/>
+            <a:ext cx="585216" cy="585216"/>
           </a:xfrm>
           <a:prstGeom prst="roundRect">
             <a:avLst>
-              <a:gd name="adj" fmla="val 20000"/>
+              <a:gd name="adj" fmla="val 20313"/>
             </a:avLst>
           </a:prstGeom>
           <a:solidFill>
@@ -4819,7 +4884,7 @@
       </p:sp>
       <p:pic>
         <p:nvPicPr>
-          <p:cNvPr id="33" name="Image 3" descr="icons/shield.png">    </p:cNvPr>
+          <p:cNvPr id="16" name="Image 2" descr="icons/eye.png">    </p:cNvPr>
           <p:cNvPicPr>
             <a:picLocks noChangeAspect="1"/>
           </p:cNvPicPr>
@@ -4833,7 +4898,7 @@
         </p:blipFill>
         <p:spPr>
           <a:xfrm>
-            <a:off x="6708496" y="5559552"/>
+            <a:off x="8536229" y="2267712"/>
             <a:ext cx="274320" cy="274320"/>
           </a:xfrm>
           <a:prstGeom prst="rect">
@@ -4843,14 +4908,14 @@
       </p:pic>
       <p:sp>
         <p:nvSpPr>
-          <p:cNvPr id="34" name="Text 28"/>
-          <p:cNvSpPr/>
-          <p:nvPr/>
-        </p:nvSpPr>
-        <p:spPr>
-          <a:xfrm>
-            <a:off x="7284568" y="5276088"/>
-            <a:ext cx="4221328" cy="365760"/>
+          <p:cNvPr id="17" name="Text 12"/>
+          <p:cNvSpPr/>
+          <p:nvPr/>
+        </p:nvSpPr>
+        <p:spPr>
+          <a:xfrm>
+            <a:off x="9094013" y="2130552"/>
+            <a:ext cx="2448458" cy="548640"/>
           </a:xfrm>
           <a:prstGeom prst="rect">
             <a:avLst/>
@@ -4866,30 +4931,30 @@
               <a:buNone/>
             </a:pPr>
             <a:r>
-              <a:rPr lang="en-US" sz="1450" b="1" dirty="0">
-                <a:solidFill>
-                  <a:srgbClr val="0F172A"/>
-                </a:solidFill>
-                <a:latin typeface="Calibri" pitchFamily="34" charset="0"/>
-                <a:ea typeface="Calibri" pitchFamily="34" charset="-122"/>
-                <a:cs typeface="Calibri" pitchFamily="34" charset="-120"/>
-              </a:rPr>
-              <a:t>Brand-safe automation</a:t>
-            </a:r>
-            <a:endParaRPr lang="en-US" sz="1450" dirty="0"/>
-          </a:p>
-        </p:txBody>
-      </p:sp>
-      <p:sp>
-        <p:nvSpPr>
-          <p:cNvPr id="35" name="Text 29"/>
-          <p:cNvSpPr/>
-          <p:nvPr/>
-        </p:nvSpPr>
-        <p:spPr>
-          <a:xfrm>
-            <a:off x="7284568" y="5641848"/>
-            <a:ext cx="4221328" cy="603504"/>
+              <a:rPr lang="en-US" sz="1550" b="1" dirty="0">
+                <a:solidFill>
+                  <a:srgbClr val="FFFFFF"/>
+                </a:solidFill>
+                <a:latin typeface="Calibri" pitchFamily="34" charset="0"/>
+                <a:ea typeface="Calibri" pitchFamily="34" charset="-122"/>
+                <a:cs typeface="Calibri" pitchFamily="34" charset="-120"/>
+              </a:rPr>
+              <a:t>Radical transparency</a:t>
+            </a:r>
+            <a:endParaRPr lang="en-US" sz="1550" dirty="0"/>
+          </a:p>
+        </p:txBody>
+      </p:sp>
+      <p:sp>
+        <p:nvSpPr>
+          <p:cNvPr id="18" name="Text 13"/>
+          <p:cNvSpPr/>
+          <p:nvPr/>
+        </p:nvSpPr>
+        <p:spPr>
+          <a:xfrm>
+            <a:off x="8399069" y="2825496"/>
+            <a:ext cx="3051962" cy="777240"/>
           </a:xfrm>
           <a:prstGeom prst="rect">
             <a:avLst/>
@@ -4907,13 +4972,13 @@
             <a:r>
               <a:rPr lang="en-US" sz="1200" dirty="0">
                 <a:solidFill>
-                  <a:srgbClr val="5B6577"/>
-                </a:solidFill>
-                <a:latin typeface="Calibri" pitchFamily="34" charset="0"/>
-                <a:ea typeface="Calibri" pitchFamily="34" charset="-122"/>
-                <a:cs typeface="Calibri" pitchFamily="34" charset="-120"/>
-              </a:rPr>
-              <a:t>No substitutions, confirm-before-charge, self-healing — automation you can trust on revenue.</a:t>
+                  <a:srgbClr val="D7D3EC"/>
+                </a:solidFill>
+                <a:latin typeface="Calibri" pitchFamily="34" charset="0"/>
+                <a:ea typeface="Calibri" pitchFamily="34" charset="-122"/>
+                <a:cs typeface="Calibri" pitchFamily="34" charset="-120"/>
+              </a:rPr>
+              <a:t>The live agent pipeline — agent → skill → tool → memory — for every single turn.</a:t>
             </a:r>
             <a:endParaRPr lang="en-US" sz="1200" dirty="0"/>
           </a:p>
@@ -4921,14 +4986,89 @@
       </p:sp>
       <p:sp>
         <p:nvSpPr>
-          <p:cNvPr id="36" name="Text 30"/>
-          <p:cNvSpPr/>
-          <p:nvPr/>
-        </p:nvSpPr>
-        <p:spPr>
-          <a:xfrm>
-            <a:off x="502920" y="6272784"/>
-            <a:ext cx="11185855" cy="228600"/>
+          <p:cNvPr id="19" name="Shape 14"/>
+          <p:cNvSpPr/>
+          <p:nvPr/>
+        </p:nvSpPr>
+        <p:spPr>
+          <a:xfrm>
+            <a:off x="502920" y="4023360"/>
+            <a:ext cx="3545738" cy="1874520"/>
+          </a:xfrm>
+          <a:prstGeom prst="roundRect">
+            <a:avLst>
+              <a:gd name="adj" fmla="val 4878"/>
+            </a:avLst>
+          </a:prstGeom>
+          <a:solidFill>
+            <a:srgbClr val="FFFFFF">
+              <a:alpha val="10000"/>
+            </a:srgbClr>
+          </a:solidFill>
+          <a:ln w="12700">
+            <a:solidFill>
+              <a:srgbClr val="FFFFFF"/>
+            </a:solidFill>
+            <a:prstDash val="solid"/>
+          </a:ln>
+        </p:spPr>
+      </p:sp>
+      <p:sp>
+        <p:nvSpPr>
+          <p:cNvPr id="20" name="Shape 15"/>
+          <p:cNvSpPr/>
+          <p:nvPr/>
+        </p:nvSpPr>
+        <p:spPr>
+          <a:xfrm>
+            <a:off x="740664" y="4261104"/>
+            <a:ext cx="585216" cy="585216"/>
+          </a:xfrm>
+          <a:prstGeom prst="roundRect">
+            <a:avLst>
+              <a:gd name="adj" fmla="val 20313"/>
+            </a:avLst>
+          </a:prstGeom>
+          <a:solidFill>
+            <a:srgbClr val="E11D48"/>
+          </a:solidFill>
+          <a:ln/>
+        </p:spPr>
+      </p:sp>
+      <p:pic>
+        <p:nvPicPr>
+          <p:cNvPr id="21" name="Image 3" descr="icons/brain.png">    </p:cNvPr>
+          <p:cNvPicPr>
+            <a:picLocks noChangeAspect="1"/>
+          </p:cNvPicPr>
+          <p:nvPr/>
+        </p:nvPicPr>
+        <p:blipFill>
+          <a:blip r:embed="rId5"/>
+          <a:stretch>
+            <a:fillRect/>
+          </a:stretch>
+        </p:blipFill>
+        <p:spPr>
+          <a:xfrm>
+            <a:off x="896112" y="4416552"/>
+            <a:ext cx="274320" cy="274320"/>
+          </a:xfrm>
+          <a:prstGeom prst="rect">
+            <a:avLst/>
+          </a:prstGeom>
+        </p:spPr>
+      </p:pic>
+      <p:sp>
+        <p:nvSpPr>
+          <p:cNvPr id="22" name="Text 16"/>
+          <p:cNvSpPr/>
+          <p:nvPr/>
+        </p:nvSpPr>
+        <p:spPr>
+          <a:xfrm>
+            <a:off x="1453896" y="4279392"/>
+            <a:ext cx="2448458" cy="548640"/>
           </a:xfrm>
           <a:prstGeom prst="rect">
             <a:avLst/>
@@ -4944,30 +5084,144 @@
               <a:buNone/>
             </a:pPr>
             <a:r>
-              <a:rPr lang="en-US" sz="900" i="1" dirty="0">
-                <a:solidFill>
-                  <a:srgbClr val="8A94A6"/>
-                </a:solidFill>
-                <a:latin typeface="Calibri" pitchFamily="34" charset="0"/>
-                <a:ea typeface="Calibri" pitchFamily="34" charset="-122"/>
-                <a:cs typeface="Calibri" pitchFamily="34" charset="-120"/>
-              </a:rPr>
-              <a:t>Benchmarks are illustrative industry ranges, not client results.</a:t>
-            </a:r>
-            <a:endParaRPr lang="en-US" sz="900" dirty="0"/>
-          </a:p>
-        </p:txBody>
-      </p:sp>
-      <p:sp>
-        <p:nvSpPr>
-          <p:cNvPr id="37" name="Text 31"/>
-          <p:cNvSpPr/>
-          <p:nvPr/>
-        </p:nvSpPr>
-        <p:spPr>
-          <a:xfrm>
-            <a:off x="502920" y="6455664"/>
-            <a:ext cx="8229600" cy="274320"/>
+              <a:rPr lang="en-US" sz="1550" b="1" dirty="0">
+                <a:solidFill>
+                  <a:srgbClr val="FFFFFF"/>
+                </a:solidFill>
+                <a:latin typeface="Calibri" pitchFamily="34" charset="0"/>
+                <a:ea typeface="Calibri" pitchFamily="34" charset="-122"/>
+                <a:cs typeface="Calibri" pitchFamily="34" charset="-120"/>
+              </a:rPr>
+              <a:t>Two agent styles, one model</a:t>
+            </a:r>
+            <a:endParaRPr lang="en-US" sz="1550" dirty="0"/>
+          </a:p>
+        </p:txBody>
+      </p:sp>
+      <p:sp>
+        <p:nvSpPr>
+          <p:cNvPr id="23" name="Text 17"/>
+          <p:cNvSpPr/>
+          <p:nvPr/>
+        </p:nvSpPr>
+        <p:spPr>
+          <a:xfrm>
+            <a:off x="758952" y="4974336"/>
+            <a:ext cx="3051962" cy="777240"/>
+          </a:xfrm>
+          <a:prstGeom prst="rect">
+            <a:avLst/>
+          </a:prstGeom>
+          <a:noFill/>
+          <a:ln/>
+        </p:spPr>
+        <p:txBody>
+          <a:bodyPr wrap="square" lIns="0" tIns="0" rIns="0" bIns="0" rtlCol="0" anchor="t"/>
+          <a:lstStyle/>
+          <a:p>
+            <a:pPr indent="0" marL="0">
+              <a:buNone/>
+            </a:pPr>
+            <a:r>
+              <a:rPr lang="en-US" sz="1200" dirty="0">
+                <a:solidFill>
+                  <a:srgbClr val="D7D3EC"/>
+                </a:solidFill>
+                <a:latin typeface="Calibri" pitchFamily="34" charset="0"/>
+                <a:ea typeface="Calibri" pitchFamily="34" charset="-122"/>
+                <a:cs typeface="Calibri" pitchFamily="34" charset="-120"/>
+              </a:rPr>
+              <a:t>Native function-calling for transactions; visible ReAct (you watch it plan) for advice.</a:t>
+            </a:r>
+            <a:endParaRPr lang="en-US" sz="1200" dirty="0"/>
+          </a:p>
+        </p:txBody>
+      </p:sp>
+      <p:sp>
+        <p:nvSpPr>
+          <p:cNvPr id="24" name="Shape 18"/>
+          <p:cNvSpPr/>
+          <p:nvPr/>
+        </p:nvSpPr>
+        <p:spPr>
+          <a:xfrm>
+            <a:off x="4322978" y="4023360"/>
+            <a:ext cx="3545738" cy="1874520"/>
+          </a:xfrm>
+          <a:prstGeom prst="roundRect">
+            <a:avLst>
+              <a:gd name="adj" fmla="val 4878"/>
+            </a:avLst>
+          </a:prstGeom>
+          <a:solidFill>
+            <a:srgbClr val="FFFFFF">
+              <a:alpha val="10000"/>
+            </a:srgbClr>
+          </a:solidFill>
+          <a:ln w="12700">
+            <a:solidFill>
+              <a:srgbClr val="FFFFFF"/>
+            </a:solidFill>
+            <a:prstDash val="solid"/>
+          </a:ln>
+        </p:spPr>
+      </p:sp>
+      <p:sp>
+        <p:nvSpPr>
+          <p:cNvPr id="25" name="Shape 19"/>
+          <p:cNvSpPr/>
+          <p:nvPr/>
+        </p:nvSpPr>
+        <p:spPr>
+          <a:xfrm>
+            <a:off x="4560722" y="4261104"/>
+            <a:ext cx="585216" cy="585216"/>
+          </a:xfrm>
+          <a:prstGeom prst="roundRect">
+            <a:avLst>
+              <a:gd name="adj" fmla="val 20313"/>
+            </a:avLst>
+          </a:prstGeom>
+          <a:solidFill>
+            <a:srgbClr val="E11D48"/>
+          </a:solidFill>
+          <a:ln/>
+        </p:spPr>
+      </p:sp>
+      <p:pic>
+        <p:nvPicPr>
+          <p:cNvPr id="26" name="Image 4" descr="icons/lock.png">    </p:cNvPr>
+          <p:cNvPicPr>
+            <a:picLocks noChangeAspect="1"/>
+          </p:cNvPicPr>
+          <p:nvPr/>
+        </p:nvPicPr>
+        <p:blipFill>
+          <a:blip r:embed="rId6"/>
+          <a:stretch>
+            <a:fillRect/>
+          </a:stretch>
+        </p:blipFill>
+        <p:spPr>
+          <a:xfrm>
+            <a:off x="4716170" y="4416552"/>
+            <a:ext cx="274320" cy="274320"/>
+          </a:xfrm>
+          <a:prstGeom prst="rect">
+            <a:avLst/>
+          </a:prstGeom>
+        </p:spPr>
+      </p:pic>
+      <p:sp>
+        <p:nvSpPr>
+          <p:cNvPr id="27" name="Text 20"/>
+          <p:cNvSpPr/>
+          <p:nvPr/>
+        </p:nvSpPr>
+        <p:spPr>
+          <a:xfrm>
+            <a:off x="5273954" y="4279392"/>
+            <a:ext cx="2448458" cy="548640"/>
           </a:xfrm>
           <a:prstGeom prst="rect">
             <a:avLst/>
@@ -4983,30 +5237,144 @@
               <a:buNone/>
             </a:pPr>
             <a:r>
-              <a:rPr lang="en-US" sz="900" dirty="0">
-                <a:solidFill>
-                  <a:srgbClr val="8A94A6"/>
-                </a:solidFill>
-                <a:latin typeface="Calibri" pitchFamily="34" charset="0"/>
-                <a:ea typeface="Calibri" pitchFamily="34" charset="-122"/>
-                <a:cs typeface="Calibri" pitchFamily="34" charset="-120"/>
-              </a:rPr>
-              <a:t>GOOPHER · Unified Conversational Retail Agent on Google Cloud</a:t>
-            </a:r>
-            <a:endParaRPr lang="en-US" sz="900" dirty="0"/>
-          </a:p>
-        </p:txBody>
-      </p:sp>
-      <p:sp>
-        <p:nvSpPr>
-          <p:cNvPr id="38" name="Text 32"/>
-          <p:cNvSpPr/>
-          <p:nvPr/>
-        </p:nvSpPr>
-        <p:spPr>
-          <a:xfrm>
-            <a:off x="11277295" y="6455664"/>
-            <a:ext cx="411480" cy="274320"/>
+              <a:rPr lang="en-US" sz="1550" b="1" dirty="0">
+                <a:solidFill>
+                  <a:srgbClr val="FFFFFF"/>
+                </a:solidFill>
+                <a:latin typeface="Calibri" pitchFamily="34" charset="0"/>
+                <a:ea typeface="Calibri" pitchFamily="34" charset="-122"/>
+                <a:cs typeface="Calibri" pitchFamily="34" charset="-120"/>
+              </a:rPr>
+              <a:t>Safe by design</a:t>
+            </a:r>
+            <a:endParaRPr lang="en-US" sz="1550" dirty="0"/>
+          </a:p>
+        </p:txBody>
+      </p:sp>
+      <p:sp>
+        <p:nvSpPr>
+          <p:cNvPr id="28" name="Text 21"/>
+          <p:cNvSpPr/>
+          <p:nvPr/>
+        </p:nvSpPr>
+        <p:spPr>
+          <a:xfrm>
+            <a:off x="4579010" y="4974336"/>
+            <a:ext cx="3051962" cy="777240"/>
+          </a:xfrm>
+          <a:prstGeom prst="rect">
+            <a:avLst/>
+          </a:prstGeom>
+          <a:noFill/>
+          <a:ln/>
+        </p:spPr>
+        <p:txBody>
+          <a:bodyPr wrap="square" lIns="0" tIns="0" rIns="0" bIns="0" rtlCol="0" anchor="t"/>
+          <a:lstStyle/>
+          <a:p>
+            <a:pPr indent="0" marL="0">
+              <a:buNone/>
+            </a:pPr>
+            <a:r>
+              <a:rPr lang="en-US" sz="1200" dirty="0">
+                <a:solidFill>
+                  <a:srgbClr val="D7D3EC"/>
+                </a:solidFill>
+                <a:latin typeface="Calibri" pitchFamily="34" charset="0"/>
+                <a:ea typeface="Calibri" pitchFamily="34" charset="-122"/>
+                <a:cs typeface="Calibri" pitchFamily="34" charset="-120"/>
+              </a:rPr>
+              <a:t>The AI never executes payment — a deterministic, auditable gate does; confirm-before-charge.</a:t>
+            </a:r>
+            <a:endParaRPr lang="en-US" sz="1200" dirty="0"/>
+          </a:p>
+        </p:txBody>
+      </p:sp>
+      <p:sp>
+        <p:nvSpPr>
+          <p:cNvPr id="29" name="Shape 22"/>
+          <p:cNvSpPr/>
+          <p:nvPr/>
+        </p:nvSpPr>
+        <p:spPr>
+          <a:xfrm>
+            <a:off x="8143037" y="4023360"/>
+            <a:ext cx="3545738" cy="1874520"/>
+          </a:xfrm>
+          <a:prstGeom prst="roundRect">
+            <a:avLst>
+              <a:gd name="adj" fmla="val 4878"/>
+            </a:avLst>
+          </a:prstGeom>
+          <a:solidFill>
+            <a:srgbClr val="FFFFFF">
+              <a:alpha val="10000"/>
+            </a:srgbClr>
+          </a:solidFill>
+          <a:ln w="12700">
+            <a:solidFill>
+              <a:srgbClr val="FFFFFF"/>
+            </a:solidFill>
+            <a:prstDash val="solid"/>
+          </a:ln>
+        </p:spPr>
+      </p:sp>
+      <p:sp>
+        <p:nvSpPr>
+          <p:cNvPr id="30" name="Shape 23"/>
+          <p:cNvSpPr/>
+          <p:nvPr/>
+        </p:nvSpPr>
+        <p:spPr>
+          <a:xfrm>
+            <a:off x="8380781" y="4261104"/>
+            <a:ext cx="585216" cy="585216"/>
+          </a:xfrm>
+          <a:prstGeom prst="roundRect">
+            <a:avLst>
+              <a:gd name="adj" fmla="val 20313"/>
+            </a:avLst>
+          </a:prstGeom>
+          <a:solidFill>
+            <a:srgbClr val="E11D48"/>
+          </a:solidFill>
+          <a:ln/>
+        </p:spPr>
+      </p:sp>
+      <p:pic>
+        <p:nvPicPr>
+          <p:cNvPr id="31" name="Image 5" descr="icons/bolt.png">    </p:cNvPr>
+          <p:cNvPicPr>
+            <a:picLocks noChangeAspect="1"/>
+          </p:cNvPicPr>
+          <p:nvPr/>
+        </p:nvPicPr>
+        <p:blipFill>
+          <a:blip r:embed="rId7"/>
+          <a:stretch>
+            <a:fillRect/>
+          </a:stretch>
+        </p:blipFill>
+        <p:spPr>
+          <a:xfrm>
+            <a:off x="8536229" y="4416552"/>
+            <a:ext cx="274320" cy="274320"/>
+          </a:xfrm>
+          <a:prstGeom prst="rect">
+            <a:avLst/>
+          </a:prstGeom>
+        </p:spPr>
+      </p:pic>
+      <p:sp>
+        <p:nvSpPr>
+          <p:cNvPr id="32" name="Text 24"/>
+          <p:cNvSpPr/>
+          <p:nvPr/>
+        </p:nvSpPr>
+        <p:spPr>
+          <a:xfrm>
+            <a:off x="9094013" y="4279392"/>
+            <a:ext cx="2448458" cy="548640"/>
           </a:xfrm>
           <a:prstGeom prst="rect">
             <a:avLst/>
@@ -5018,21 +5386,60 @@
           <a:bodyPr wrap="square" lIns="0" tIns="0" rIns="0" bIns="0" rtlCol="0" anchor="ctr"/>
           <a:lstStyle/>
           <a:p>
-            <a:pPr algn="r" indent="0" marL="0">
-              <a:buNone/>
-            </a:pPr>
-            <a:r>
-              <a:rPr lang="en-US" sz="900" dirty="0">
-                <a:solidFill>
-                  <a:srgbClr val="8A94A6"/>
-                </a:solidFill>
-                <a:latin typeface="Calibri" pitchFamily="34" charset="0"/>
-                <a:ea typeface="Calibri" pitchFamily="34" charset="-122"/>
-                <a:cs typeface="Calibri" pitchFamily="34" charset="-120"/>
-              </a:rPr>
-              <a:t>11</a:t>
-            </a:r>
-            <a:endParaRPr lang="en-US" sz="900" dirty="0"/>
+            <a:pPr indent="0" marL="0">
+              <a:buNone/>
+            </a:pPr>
+            <a:r>
+              <a:rPr lang="en-US" sz="1550" b="1" dirty="0">
+                <a:solidFill>
+                  <a:srgbClr val="FFFFFF"/>
+                </a:solidFill>
+                <a:latin typeface="Calibri" pitchFamily="34" charset="0"/>
+                <a:ea typeface="Calibri" pitchFamily="34" charset="-122"/>
+                <a:cs typeface="Calibri" pitchFamily="34" charset="-120"/>
+              </a:rPr>
+              <a:t>Production-shaped</a:t>
+            </a:r>
+            <a:endParaRPr lang="en-US" sz="1550" dirty="0"/>
+          </a:p>
+        </p:txBody>
+      </p:sp>
+      <p:sp>
+        <p:nvSpPr>
+          <p:cNvPr id="33" name="Text 25"/>
+          <p:cNvSpPr/>
+          <p:nvPr/>
+        </p:nvSpPr>
+        <p:spPr>
+          <a:xfrm>
+            <a:off x="8399069" y="4974336"/>
+            <a:ext cx="3051962" cy="777240"/>
+          </a:xfrm>
+          <a:prstGeom prst="rect">
+            <a:avLst/>
+          </a:prstGeom>
+          <a:noFill/>
+          <a:ln/>
+        </p:spPr>
+        <p:txBody>
+          <a:bodyPr wrap="square" lIns="0" tIns="0" rIns="0" bIns="0" rtlCol="0" anchor="t"/>
+          <a:lstStyle/>
+          <a:p>
+            <a:pPr indent="0" marL="0">
+              <a:buNone/>
+            </a:pPr>
+            <a:r>
+              <a:rPr lang="en-US" sz="1200" dirty="0">
+                <a:solidFill>
+                  <a:srgbClr val="D7D3EC"/>
+                </a:solidFill>
+                <a:latin typeface="Calibri" pitchFamily="34" charset="0"/>
+                <a:ea typeface="Calibri" pitchFamily="34" charset="-122"/>
+                <a:cs typeface="Calibri" pitchFamily="34" charset="-120"/>
+              </a:rPr>
+              <a:t>117 tests · CI/CD · self-healing · observable — on Google Cloud, free-tier-first.</a:t>
+            </a:r>
+            <a:endParaRPr lang="en-US" sz="1200" dirty="0"/>
           </a:p>
         </p:txBody>
       </p:sp>
@@ -5041,6 +5448,9 @@
   <p:clrMapOvr>
     <a:masterClrMapping/>
   </p:clrMapOvr>
+  <p:transition spd="med">
+    <p:fade/>
+  </p:transition>
 </p:sld>
 </file>
 
@@ -5095,13 +5505,13 @@
             <a:r>
               <a:rPr lang="en-US" sz="1200" b="1" spc="300" kern="0" dirty="0">
                 <a:solidFill>
-                  <a:srgbClr val="2563EB"/>
-                </a:solidFill>
-                <a:latin typeface="Calibri" pitchFamily="34" charset="0"/>
-                <a:ea typeface="Calibri" pitchFamily="34" charset="-122"/>
-                <a:cs typeface="Calibri" pitchFamily="34" charset="-120"/>
-              </a:rPr>
-              <a:t>WHY GOOGLE CLOUD IS THE RIGHT PLATFORM</a:t>
+                  <a:srgbClr val="7C3AED"/>
+                </a:solidFill>
+                <a:latin typeface="Calibri" pitchFamily="34" charset="0"/>
+                <a:ea typeface="Calibri" pitchFamily="34" charset="-122"/>
+                <a:cs typeface="Calibri" pitchFamily="34" charset="-120"/>
+              </a:rPr>
+              <a:t>RELIABILITY, SAFETY &amp; TRUST</a:t>
             </a:r>
             <a:endParaRPr lang="en-US" sz="1200" dirty="0"/>
           </a:p>
@@ -5140,7 +5550,7 @@
                 <a:ea typeface="Georgia" pitchFamily="34" charset="-122"/>
                 <a:cs typeface="Georgia" pitchFamily="34" charset="-120"/>
               </a:rPr>
-              <a:t>The architecture maps cleanly to Google Cloud strengths</a:t>
+              <a:t>Production-grade trust — by design, not by hope</a:t>
             </a:r>
             <a:endParaRPr lang="en-US" sz="2800" dirty="0"/>
           </a:p>
@@ -5197,14 +5607,14 @@
             </a:avLst>
           </a:prstGeom>
           <a:solidFill>
-            <a:srgbClr val="7C3AED"/>
+            <a:srgbClr val="E11D48"/>
           </a:solidFill>
           <a:ln/>
         </p:spPr>
       </p:sp>
       <p:pic>
         <p:nvPicPr>
-          <p:cNvPr id="6" name="Image 0" descr="icons/robot.png">    </p:cNvPr>
+          <p:cNvPr id="6" name="Image 0" descr="icons/ban.png">    </p:cNvPr>
           <p:cNvPicPr>
             <a:picLocks noChangeAspect="1"/>
           </p:cNvPicPr>
@@ -5251,7 +5661,7 @@
               <a:buNone/>
             </a:pPr>
             <a:r>
-              <a:rPr lang="en-US" sz="1350" b="1" dirty="0">
+              <a:rPr lang="en-US" sz="1400" b="1" dirty="0">
                 <a:solidFill>
                   <a:srgbClr val="0F172A"/>
                 </a:solidFill>
@@ -5259,9 +5669,9 @@
                 <a:ea typeface="Calibri" pitchFamily="34" charset="-122"/>
                 <a:cs typeface="Calibri" pitchFamily="34" charset="-120"/>
               </a:rPr>
-              <a:t>Vertex AI · Gemini 2.5 Flash</a:t>
-            </a:r>
-            <a:endParaRPr lang="en-US" sz="1350" dirty="0"/>
+              <a:t>Never substitutes</a:t>
+            </a:r>
+            <a:endParaRPr lang="en-US" sz="1400" dirty="0"/>
           </a:p>
         </p:txBody>
       </p:sp>
@@ -5302,7 +5712,7 @@
                 <a:ea typeface="Calibri" pitchFamily="34" charset="-122"/>
                 <a:cs typeface="Calibri" pitchFamily="34" charset="-120"/>
               </a:rPr>
-              <a:t>One natively-multimodal model — text, reasoning &amp; vision in a managed, secure, high-quota service.</a:t>
+              <a:t>If the exact item isn't found, it says so — it won't swap in a different product.</a:t>
             </a:r>
             <a:endParaRPr lang="en-US" sz="1200" dirty="0"/>
           </a:p>
@@ -5359,14 +5769,14 @@
             </a:avLst>
           </a:prstGeom>
           <a:solidFill>
-            <a:srgbClr val="2563EB"/>
+            <a:srgbClr val="0D9488"/>
           </a:solidFill>
           <a:ln/>
         </p:spPr>
       </p:sp>
       <p:pic>
         <p:nvPicPr>
-          <p:cNvPr id="11" name="Image 1" descr="icons/sitemap.png">    </p:cNvPr>
+          <p:cNvPr id="11" name="Image 1" descr="icons/check.png">    </p:cNvPr>
           <p:cNvPicPr>
             <a:picLocks noChangeAspect="1"/>
           </p:cNvPicPr>
@@ -5413,7 +5823,7 @@
               <a:buNone/>
             </a:pPr>
             <a:r>
-              <a:rPr lang="en-US" sz="1350" b="1" dirty="0">
+              <a:rPr lang="en-US" sz="1400" b="1" dirty="0">
                 <a:solidFill>
                   <a:srgbClr val="0F172A"/>
                 </a:solidFill>
@@ -5421,9 +5831,9 @@
                 <a:ea typeface="Calibri" pitchFamily="34" charset="-122"/>
                 <a:cs typeface="Calibri" pitchFamily="34" charset="-120"/>
               </a:rPr>
-              <a:t>Agent Development Kit (ADK)</a:t>
-            </a:r>
-            <a:endParaRPr lang="en-US" sz="1350" dirty="0"/>
+              <a:t>Confirm before charge</a:t>
+            </a:r>
+            <a:endParaRPr lang="en-US" sz="1400" dirty="0"/>
           </a:p>
         </p:txBody>
       </p:sp>
@@ -5464,7 +5874,7 @@
                 <a:ea typeface="Calibri" pitchFamily="34" charset="-122"/>
                 <a:cs typeface="Calibri" pitchFamily="34" charset="-120"/>
               </a:rPr>
-              <a:t>First-class multi-agent orchestration, tools &amp; tracing — less glue code, more capability.</a:t>
+              <a:t>Cart preview + “please confirm” on every path — text, voice, and camera alike.</a:t>
             </a:r>
             <a:endParaRPr lang="en-US" sz="1200" dirty="0"/>
           </a:p>
@@ -5521,14 +5931,14 @@
             </a:avLst>
           </a:prstGeom>
           <a:solidFill>
-            <a:srgbClr val="F59E0B"/>
+            <a:srgbClr val="7C3AED"/>
           </a:solidFill>
           <a:ln/>
         </p:spPr>
       </p:sp>
       <p:pic>
         <p:nvPicPr>
-          <p:cNvPr id="16" name="Image 2" descr="icons/bolt.png">    </p:cNvPr>
+          <p:cNvPr id="16" name="Image 2" descr="icons/sync.png">    </p:cNvPr>
           <p:cNvPicPr>
             <a:picLocks noChangeAspect="1"/>
           </p:cNvPicPr>
@@ -5575,7 +5985,7 @@
               <a:buNone/>
             </a:pPr>
             <a:r>
-              <a:rPr lang="en-US" sz="1350" b="1" dirty="0">
+              <a:rPr lang="en-US" sz="1400" b="1" dirty="0">
                 <a:solidFill>
                   <a:srgbClr val="0F172A"/>
                 </a:solidFill>
@@ -5583,9 +5993,9 @@
                 <a:ea typeface="Calibri" pitchFamily="34" charset="-122"/>
                 <a:cs typeface="Calibri" pitchFamily="34" charset="-120"/>
               </a:rPr>
-              <a:t>Cloud Run</a:t>
-            </a:r>
-            <a:endParaRPr lang="en-US" sz="1350" dirty="0"/>
+              <a:t>Self-healing Guardian</a:t>
+            </a:r>
+            <a:endParaRPr lang="en-US" sz="1400" dirty="0"/>
           </a:p>
         </p:txBody>
       </p:sp>
@@ -5626,7 +6036,7 @@
                 <a:ea typeface="Calibri" pitchFamily="34" charset="-122"/>
                 <a:cs typeface="Calibri" pitchFamily="34" charset="-120"/>
               </a:rPr>
-              <a:t>Serverless, scales to zero, container-native — pay only for live conversations.</a:t>
+              <a:t>Circuit breaker · retry · failover · heal-forward; chaos buttons prove it live.</a:t>
             </a:r>
             <a:endParaRPr lang="en-US" sz="1200" dirty="0"/>
           </a:p>
@@ -5683,14 +6093,14 @@
             </a:avLst>
           </a:prstGeom>
           <a:solidFill>
-            <a:srgbClr val="0D9488"/>
+            <a:srgbClr val="2563EB"/>
           </a:solidFill>
           <a:ln/>
         </p:spPr>
       </p:sp>
       <p:pic>
         <p:nvPicPr>
-          <p:cNvPr id="21" name="Image 3" descr="icons/db.png">    </p:cNvPr>
+          <p:cNvPr id="21" name="Image 3" descr="icons/sitemap.png">    </p:cNvPr>
           <p:cNvPicPr>
             <a:picLocks noChangeAspect="1"/>
           </p:cNvPicPr>
@@ -5737,7 +6147,7 @@
               <a:buNone/>
             </a:pPr>
             <a:r>
-              <a:rPr lang="en-US" sz="1350" b="1" dirty="0">
+              <a:rPr lang="en-US" sz="1400" b="1" dirty="0">
                 <a:solidFill>
                   <a:srgbClr val="0F172A"/>
                 </a:solidFill>
@@ -5745,9 +6155,9 @@
                 <a:ea typeface="Calibri" pitchFamily="34" charset="-122"/>
                 <a:cs typeface="Calibri" pitchFamily="34" charset="-120"/>
               </a:rPr>
-              <a:t>Firestore</a:t>
-            </a:r>
-            <a:endParaRPr lang="en-US" sz="1350" dirty="0"/>
+              <a:t>No agent loops</a:t>
+            </a:r>
+            <a:endParaRPr lang="en-US" sz="1400" dirty="0"/>
           </a:p>
         </p:txBody>
       </p:sp>
@@ -5788,7 +6198,7 @@
                 <a:ea typeface="Calibri" pitchFamily="34" charset="-122"/>
                 <a:cs typeface="Calibri" pitchFamily="34" charset="-120"/>
               </a:rPr>
-              <a:t>Durable, shared session state across instances — context survives autoscaling.</a:t>
+              <a:t>Agent-as-tool, no nested agents, single-pass turns, bounded retries, degrade-once.</a:t>
             </a:r>
             <a:endParaRPr lang="en-US" sz="1200" dirty="0"/>
           </a:p>
@@ -5845,14 +6255,14 @@
             </a:avLst>
           </a:prstGeom>
           <a:solidFill>
-            <a:srgbClr val="E11D48"/>
+            <a:srgbClr val="0D9488"/>
           </a:solidFill>
           <a:ln/>
         </p:spPr>
       </p:sp>
       <p:pic>
         <p:nvPicPr>
-          <p:cNvPr id="26" name="Image 4" descr="icons/eye.png">    </p:cNvPr>
+          <p:cNvPr id="26" name="Image 4" descr="icons/db.png">    </p:cNvPr>
           <p:cNvPicPr>
             <a:picLocks noChangeAspect="1"/>
           </p:cNvPicPr>
@@ -5899,7 +6309,7 @@
               <a:buNone/>
             </a:pPr>
             <a:r>
-              <a:rPr lang="en-US" sz="1350" b="1" dirty="0">
+              <a:rPr lang="en-US" sz="1400" b="1" dirty="0">
                 <a:solidFill>
                   <a:srgbClr val="0F172A"/>
                 </a:solidFill>
@@ -5907,9 +6317,9 @@
                 <a:ea typeface="Calibri" pitchFamily="34" charset="-122"/>
                 <a:cs typeface="Calibri" pitchFamily="34" charset="-120"/>
               </a:rPr>
-              <a:t>Cloud Trace &amp; Logging</a:t>
-            </a:r>
-            <a:endParaRPr lang="en-US" sz="1350" dirty="0"/>
+              <a:t>Durable shared state</a:t>
+            </a:r>
+            <a:endParaRPr lang="en-US" sz="1400" dirty="0"/>
           </a:p>
         </p:txBody>
       </p:sp>
@@ -5950,7 +6360,7 @@
                 <a:ea typeface="Calibri" pitchFamily="34" charset="-122"/>
                 <a:cs typeface="Calibri" pitchFamily="34" charset="-120"/>
               </a:rPr>
-              <a:t>Every agent/tool is a span — pinpoint the failing node in a multi-agent turn.</a:t>
+              <a:t>One session store on Firestore — context survives scale-to-zero &amp; autoscaling.</a:t>
             </a:r>
             <a:endParaRPr lang="en-US" sz="1200" dirty="0"/>
           </a:p>
@@ -6007,14 +6417,14 @@
             </a:avLst>
           </a:prstGeom>
           <a:solidFill>
-            <a:srgbClr val="0D9488"/>
+            <a:srgbClr val="F59E0B"/>
           </a:solidFill>
           <a:ln/>
         </p:spPr>
       </p:sp>
       <p:pic>
         <p:nvPicPr>
-          <p:cNvPr id="31" name="Image 5" descr="icons/plug.png">    </p:cNvPr>
+          <p:cNvPr id="31" name="Image 5" descr="icons/eye.png">    </p:cNvPr>
           <p:cNvPicPr>
             <a:picLocks noChangeAspect="1"/>
           </p:cNvPicPr>
@@ -6061,7 +6471,7 @@
               <a:buNone/>
             </a:pPr>
             <a:r>
-              <a:rPr lang="en-US" sz="1350" b="1" dirty="0">
+              <a:rPr lang="en-US" sz="1400" b="1" dirty="0">
                 <a:solidFill>
                   <a:srgbClr val="0F172A"/>
                 </a:solidFill>
@@ -6069,9 +6479,9 @@
                 <a:ea typeface="Calibri" pitchFamily="34" charset="-122"/>
                 <a:cs typeface="Calibri" pitchFamily="34" charset="-120"/>
               </a:rPr>
-              <a:t>Extensible to CCAI / Translation</a:t>
-            </a:r>
-            <a:endParaRPr lang="en-US" sz="1350" dirty="0"/>
+              <a:t>Full observability</a:t>
+            </a:r>
+            <a:endParaRPr lang="en-US" sz="1400" dirty="0"/>
           </a:p>
         </p:txBody>
       </p:sp>
@@ -6112,7 +6522,7 @@
                 <a:ea typeface="Calibri" pitchFamily="34" charset="-122"/>
                 <a:cs typeface="Calibri" pitchFamily="34" charset="-120"/>
               </a:rPr>
-              <a:t>Clear path to true telephony, agent-assist, and long-tail languages.</a:t>
+              <a:t>Live /dev pipeline, Cloud Trace spans, /metrics, /version — debug any turn.</a:t>
             </a:r>
             <a:endParaRPr lang="en-US" sz="1200" dirty="0"/>
           </a:p>
@@ -6201,6 +6611,9 @@
   <p:clrMapOvr>
     <a:masterClrMapping/>
   </p:clrMapOvr>
+  <p:transition spd="med">
+    <p:fade/>
+  </p:transition>
 </p:sld>
 </file>
 
@@ -6255,13 +6668,13 @@
             <a:r>
               <a:rPr lang="en-US" sz="1200" b="1" spc="300" kern="0" dirty="0">
                 <a:solidFill>
-                  <a:srgbClr val="0D9488"/>
-                </a:solidFill>
-                <a:latin typeface="Calibri" pitchFamily="34" charset="0"/>
-                <a:ea typeface="Calibri" pitchFamily="34" charset="-122"/>
-                <a:cs typeface="Calibri" pitchFamily="34" charset="-120"/>
-              </a:rPr>
-              <a:t>IMPLEMENTATION &amp; NEXT STEPS</a:t>
+                  <a:srgbClr val="E11D48"/>
+                </a:solidFill>
+                <a:latin typeface="Calibri" pitchFamily="34" charset="0"/>
+                <a:ea typeface="Calibri" pitchFamily="34" charset="-122"/>
+                <a:cs typeface="Calibri" pitchFamily="34" charset="-120"/>
+              </a:rPr>
+              <a:t>BUSINESS &amp; STRATEGIC VALUE — FOR THE VP OF STRATEGY</a:t>
             </a:r>
             <a:endParaRPr lang="en-US" sz="1200" dirty="0"/>
           </a:p>
@@ -6300,7 +6713,7 @@
                 <a:ea typeface="Georgia" pitchFamily="34" charset="-122"/>
                 <a:cs typeface="Georgia" pitchFamily="34" charset="-120"/>
               </a:rPr>
-              <a:t>From working prototype to production ramp</a:t>
+              <a:t>From technical win to measurable business value</a:t>
             </a:r>
             <a:endParaRPr lang="en-US" sz="2800" dirty="0"/>
           </a:p>
@@ -6314,12 +6727,12 @@
         </p:nvSpPr>
         <p:spPr>
           <a:xfrm>
-            <a:off x="502920" y="1920240"/>
-            <a:ext cx="2590724" cy="3383280"/>
+            <a:off x="502920" y="1783080"/>
+            <a:ext cx="2615184" cy="1554480"/>
           </a:xfrm>
           <a:prstGeom prst="roundRect">
             <a:avLst>
-              <a:gd name="adj" fmla="val 3177"/>
+              <a:gd name="adj" fmla="val 5294"/>
             </a:avLst>
           </a:prstGeom>
           <a:solidFill>
@@ -6342,232 +6755,96 @@
       </p:sp>
       <p:sp>
         <p:nvSpPr>
-          <p:cNvPr id="5" name="Shape 3"/>
-          <p:cNvSpPr/>
-          <p:nvPr/>
-        </p:nvSpPr>
-        <p:spPr>
-          <a:xfrm>
-            <a:off x="502920" y="1920240"/>
-            <a:ext cx="2590724" cy="109728"/>
-          </a:xfrm>
-          <a:prstGeom prst="rect">
-            <a:avLst/>
-          </a:prstGeom>
-          <a:solidFill>
-            <a:srgbClr val="16A34A"/>
-          </a:solidFill>
-          <a:ln/>
-        </p:spPr>
-      </p:sp>
-      <p:sp>
-        <p:nvSpPr>
-          <p:cNvPr id="6" name="Shape 4"/>
-          <p:cNvSpPr/>
-          <p:nvPr/>
-        </p:nvSpPr>
-        <p:spPr>
-          <a:xfrm>
-            <a:off x="722376" y="2231136"/>
-            <a:ext cx="603504" cy="603504"/>
+          <p:cNvPr id="5" name="Text 3"/>
+          <p:cNvSpPr/>
+          <p:nvPr/>
+        </p:nvSpPr>
+        <p:spPr>
+          <a:xfrm>
+            <a:off x="594360" y="1965960"/>
+            <a:ext cx="2432304" cy="777240"/>
+          </a:xfrm>
+          <a:prstGeom prst="rect">
+            <a:avLst/>
+          </a:prstGeom>
+          <a:noFill/>
+          <a:ln/>
+        </p:spPr>
+        <p:txBody>
+          <a:bodyPr wrap="square" lIns="0" tIns="0" rIns="0" bIns="0" rtlCol="0" anchor="ctr"/>
+          <a:lstStyle/>
+          <a:p>
+            <a:pPr algn="ctr" indent="0" marL="0">
+              <a:buNone/>
+            </a:pPr>
+            <a:r>
+              <a:rPr lang="en-US" sz="4000" b="1" dirty="0">
+                <a:solidFill>
+                  <a:srgbClr val="7C3AED"/>
+                </a:solidFill>
+                <a:latin typeface="Georgia" pitchFamily="34" charset="0"/>
+                <a:ea typeface="Georgia" pitchFamily="34" charset="-122"/>
+                <a:cs typeface="Georgia" pitchFamily="34" charset="-120"/>
+              </a:rPr>
+              <a:t>24/7</a:t>
+            </a:r>
+            <a:endParaRPr lang="en-US" sz="4000" dirty="0"/>
+          </a:p>
+        </p:txBody>
+      </p:sp>
+      <p:sp>
+        <p:nvSpPr>
+          <p:cNvPr id="6" name="Text 4"/>
+          <p:cNvSpPr/>
+          <p:nvPr/>
+        </p:nvSpPr>
+        <p:spPr>
+          <a:xfrm>
+            <a:off x="667512" y="2734056"/>
+            <a:ext cx="2286000" cy="548640"/>
+          </a:xfrm>
+          <a:prstGeom prst="rect">
+            <a:avLst/>
+          </a:prstGeom>
+          <a:noFill/>
+          <a:ln/>
+        </p:spPr>
+        <p:txBody>
+          <a:bodyPr wrap="square" lIns="0" tIns="0" rIns="0" bIns="0" rtlCol="0" anchor="t"/>
+          <a:lstStyle/>
+          <a:p>
+            <a:pPr algn="ctr" indent="0" marL="0">
+              <a:buNone/>
+            </a:pPr>
+            <a:r>
+              <a:rPr lang="en-US" sz="1150" dirty="0">
+                <a:solidFill>
+                  <a:srgbClr val="5B6577"/>
+                </a:solidFill>
+                <a:latin typeface="Calibri" pitchFamily="34" charset="0"/>
+                <a:ea typeface="Calibri" pitchFamily="34" charset="-122"/>
+                <a:cs typeface="Calibri" pitchFamily="34" charset="-120"/>
+              </a:rPr>
+              <a:t>Self-service order mgmt &amp; support — every channel, every language</a:t>
+            </a:r>
+            <a:endParaRPr lang="en-US" sz="1150" dirty="0"/>
+          </a:p>
+        </p:txBody>
+      </p:sp>
+      <p:sp>
+        <p:nvSpPr>
+          <p:cNvPr id="7" name="Shape 5"/>
+          <p:cNvSpPr/>
+          <p:nvPr/>
+        </p:nvSpPr>
+        <p:spPr>
+          <a:xfrm>
+            <a:off x="3300984" y="1783080"/>
+            <a:ext cx="2615184" cy="1554480"/>
           </a:xfrm>
           <a:prstGeom prst="roundRect">
             <a:avLst>
-              <a:gd name="adj" fmla="val 19697"/>
-            </a:avLst>
-          </a:prstGeom>
-          <a:solidFill>
-            <a:srgbClr val="16A34A"/>
-          </a:solidFill>
-          <a:ln/>
-        </p:spPr>
-      </p:sp>
-      <p:pic>
-        <p:nvPicPr>
-          <p:cNvPr id="7" name="Image 0" descr="icons/check.png">    </p:cNvPr>
-          <p:cNvPicPr>
-            <a:picLocks noChangeAspect="1"/>
-          </p:cNvPicPr>
-          <p:nvPr/>
-        </p:nvPicPr>
-        <p:blipFill>
-          <a:blip r:embed="rId1"/>
-          <a:stretch>
-            <a:fillRect/>
-          </a:stretch>
-        </p:blipFill>
-        <p:spPr>
-          <a:xfrm>
-            <a:off x="877824" y="2386584"/>
-            <a:ext cx="292608" cy="292608"/>
-          </a:xfrm>
-          <a:prstGeom prst="rect">
-            <a:avLst/>
-          </a:prstGeom>
-        </p:spPr>
-      </p:pic>
-      <p:sp>
-        <p:nvSpPr>
-          <p:cNvPr id="8" name="Text 5"/>
-          <p:cNvSpPr/>
-          <p:nvPr/>
-        </p:nvSpPr>
-        <p:spPr>
-          <a:xfrm>
-            <a:off x="704088" y="2944368"/>
-            <a:ext cx="2188388" cy="548640"/>
-          </a:xfrm>
-          <a:prstGeom prst="rect">
-            <a:avLst/>
-          </a:prstGeom>
-          <a:noFill/>
-          <a:ln/>
-        </p:spPr>
-        <p:txBody>
-          <a:bodyPr wrap="square" lIns="0" tIns="0" rIns="0" bIns="0" rtlCol="0" anchor="t"/>
-          <a:lstStyle/>
-          <a:p>
-            <a:pPr indent="0" marL="0">
-              <a:buNone/>
-            </a:pPr>
-            <a:r>
-              <a:rPr lang="en-US" sz="1400" b="1" dirty="0">
-                <a:solidFill>
-                  <a:srgbClr val="0F172A"/>
-                </a:solidFill>
-                <a:latin typeface="Calibri" pitchFamily="34" charset="0"/>
-                <a:ea typeface="Calibri" pitchFamily="34" charset="-122"/>
-                <a:cs typeface="Calibri" pitchFamily="34" charset="-120"/>
-              </a:rPr>
-              <a:t>Now — Prototype (done)</a:t>
-            </a:r>
-            <a:endParaRPr lang="en-US" sz="1400" dirty="0"/>
-          </a:p>
-        </p:txBody>
-      </p:sp>
-      <p:sp>
-        <p:nvSpPr>
-          <p:cNvPr id="9" name="Text 6"/>
-          <p:cNvSpPr/>
-          <p:nvPr/>
-        </p:nvSpPr>
-        <p:spPr>
-          <a:xfrm>
-            <a:off x="722376" y="3493008"/>
-            <a:ext cx="2170100" cy="1691640"/>
-          </a:xfrm>
-          <a:prstGeom prst="rect">
-            <a:avLst/>
-          </a:prstGeom>
-          <a:noFill/>
-          <a:ln/>
-        </p:spPr>
-        <p:txBody>
-          <a:bodyPr wrap="square" lIns="0" tIns="0" rIns="0" bIns="0" rtlCol="0" anchor="t"/>
-          <a:lstStyle/>
-          <a:p>
-            <a:pPr marL="152400" indent="-152400">
-              <a:spcAft>
-                <a:spcPts val="700"/>
-              </a:spcAft>
-              <a:buSzPct val="100000"/>
-              <a:buChar char="•"/>
-            </a:pPr>
-            <a:r>
-              <a:rPr lang="en-US" sz="1150" dirty="0">
-                <a:solidFill>
-                  <a:srgbClr val="5B6577"/>
-                </a:solidFill>
-                <a:latin typeface="Calibri" pitchFamily="34" charset="0"/>
-                <a:ea typeface="Calibri" pitchFamily="34" charset="-122"/>
-                <a:cs typeface="Calibri" pitchFamily="34" charset="-120"/>
-              </a:rPr>
-              <a:t>Live on Cloud Run + Firestore</a:t>
-            </a:r>
-            <a:endParaRPr lang="en-US" sz="1150" dirty="0"/>
-          </a:p>
-          <a:p>
-            <a:pPr marL="152400" indent="-152400">
-              <a:spcAft>
-                <a:spcPts val="700"/>
-              </a:spcAft>
-              <a:buSzPct val="100000"/>
-              <a:buChar char="•"/>
-            </a:pPr>
-            <a:r>
-              <a:rPr lang="en-US" sz="1150" dirty="0">
-                <a:solidFill>
-                  <a:srgbClr val="5B6577"/>
-                </a:solidFill>
-                <a:latin typeface="Calibri" pitchFamily="34" charset="0"/>
-                <a:ea typeface="Calibri" pitchFamily="34" charset="-122"/>
-                <a:cs typeface="Calibri" pitchFamily="34" charset="-120"/>
-              </a:rPr>
-              <a:t>All 4 requirements + safe checkout</a:t>
-            </a:r>
-            <a:endParaRPr lang="en-US" sz="1150" dirty="0"/>
-          </a:p>
-          <a:p>
-            <a:pPr marL="152400" indent="-152400">
-              <a:spcAft>
-                <a:spcPts val="700"/>
-              </a:spcAft>
-              <a:buSzPct val="100000"/>
-              <a:buChar char="•"/>
-            </a:pPr>
-            <a:r>
-              <a:rPr lang="en-US" sz="1150" dirty="0">
-                <a:solidFill>
-                  <a:srgbClr val="5B6577"/>
-                </a:solidFill>
-                <a:latin typeface="Calibri" pitchFamily="34" charset="0"/>
-                <a:ea typeface="Calibri" pitchFamily="34" charset="-122"/>
-                <a:cs typeface="Calibri" pitchFamily="34" charset="-120"/>
-              </a:rPr>
-              <a:t>117 tests · CI/CD · /dev portal</a:t>
-            </a:r>
-            <a:endParaRPr lang="en-US" sz="1150" dirty="0"/>
-          </a:p>
-        </p:txBody>
-      </p:sp>
-      <p:pic>
-        <p:nvPicPr>
-          <p:cNvPr id="10" name="Image 1" descr="icons/arrow.png">    </p:cNvPr>
-          <p:cNvPicPr>
-            <a:picLocks noChangeAspect="1"/>
-          </p:cNvPicPr>
-          <p:nvPr/>
-        </p:nvPicPr>
-        <p:blipFill>
-          <a:blip r:embed="rId2"/>
-          <a:stretch>
-            <a:fillRect/>
-          </a:stretch>
-        </p:blipFill>
-        <p:spPr>
-          <a:xfrm>
-            <a:off x="3093644" y="3474720"/>
-            <a:ext cx="256032" cy="256032"/>
-          </a:xfrm>
-          <a:prstGeom prst="rect">
-            <a:avLst/>
-          </a:prstGeom>
-        </p:spPr>
-      </p:pic>
-      <p:sp>
-        <p:nvSpPr>
-          <p:cNvPr id="11" name="Shape 7"/>
-          <p:cNvSpPr/>
-          <p:nvPr/>
-        </p:nvSpPr>
-        <p:spPr>
-          <a:xfrm>
-            <a:off x="3367964" y="1920240"/>
-            <a:ext cx="2590724" cy="3383280"/>
-          </a:xfrm>
-          <a:prstGeom prst="roundRect">
-            <a:avLst>
-              <a:gd name="adj" fmla="val 3177"/>
+              <a:gd name="adj" fmla="val 5294"/>
             </a:avLst>
           </a:prstGeom>
           <a:solidFill>
@@ -6590,232 +6867,96 @@
       </p:sp>
       <p:sp>
         <p:nvSpPr>
-          <p:cNvPr id="12" name="Shape 8"/>
-          <p:cNvSpPr/>
-          <p:nvPr/>
-        </p:nvSpPr>
-        <p:spPr>
-          <a:xfrm>
-            <a:off x="3367964" y="1920240"/>
-            <a:ext cx="2590724" cy="109728"/>
-          </a:xfrm>
-          <a:prstGeom prst="rect">
-            <a:avLst/>
-          </a:prstGeom>
-          <a:solidFill>
-            <a:srgbClr val="2563EB"/>
-          </a:solidFill>
-          <a:ln/>
-        </p:spPr>
-      </p:sp>
-      <p:sp>
-        <p:nvSpPr>
-          <p:cNvPr id="13" name="Shape 9"/>
-          <p:cNvSpPr/>
-          <p:nvPr/>
-        </p:nvSpPr>
-        <p:spPr>
-          <a:xfrm>
-            <a:off x="3587420" y="2231136"/>
-            <a:ext cx="603504" cy="603504"/>
+          <p:cNvPr id="8" name="Text 6"/>
+          <p:cNvSpPr/>
+          <p:nvPr/>
+        </p:nvSpPr>
+        <p:spPr>
+          <a:xfrm>
+            <a:off x="3392424" y="1965960"/>
+            <a:ext cx="2432304" cy="777240"/>
+          </a:xfrm>
+          <a:prstGeom prst="rect">
+            <a:avLst/>
+          </a:prstGeom>
+          <a:noFill/>
+          <a:ln/>
+        </p:spPr>
+        <p:txBody>
+          <a:bodyPr wrap="square" lIns="0" tIns="0" rIns="0" bIns="0" rtlCol="0" anchor="ctr"/>
+          <a:lstStyle/>
+          <a:p>
+            <a:pPr algn="ctr" indent="0" marL="0">
+              <a:buNone/>
+            </a:pPr>
+            <a:r>
+              <a:rPr lang="en-US" sz="4000" b="1" dirty="0">
+                <a:solidFill>
+                  <a:srgbClr val="0D9488"/>
+                </a:solidFill>
+                <a:latin typeface="Georgia" pitchFamily="34" charset="0"/>
+                <a:ea typeface="Georgia" pitchFamily="34" charset="-122"/>
+                <a:cs typeface="Georgia" pitchFamily="34" charset="-120"/>
+              </a:rPr>
+              <a:t>60–80%</a:t>
+            </a:r>
+            <a:endParaRPr lang="en-US" sz="4000" dirty="0"/>
+          </a:p>
+        </p:txBody>
+      </p:sp>
+      <p:sp>
+        <p:nvSpPr>
+          <p:cNvPr id="9" name="Text 7"/>
+          <p:cNvSpPr/>
+          <p:nvPr/>
+        </p:nvSpPr>
+        <p:spPr>
+          <a:xfrm>
+            <a:off x="3465576" y="2734056"/>
+            <a:ext cx="2286000" cy="548640"/>
+          </a:xfrm>
+          <a:prstGeom prst="rect">
+            <a:avLst/>
+          </a:prstGeom>
+          <a:noFill/>
+          <a:ln/>
+        </p:spPr>
+        <p:txBody>
+          <a:bodyPr wrap="square" lIns="0" tIns="0" rIns="0" bIns="0" rtlCol="0" anchor="t"/>
+          <a:lstStyle/>
+          <a:p>
+            <a:pPr algn="ctr" indent="0" marL="0">
+              <a:buNone/>
+            </a:pPr>
+            <a:r>
+              <a:rPr lang="en-US" sz="1150" dirty="0">
+                <a:solidFill>
+                  <a:srgbClr val="5B6577"/>
+                </a:solidFill>
+                <a:latin typeface="Calibri" pitchFamily="34" charset="0"/>
+                <a:ea typeface="Calibri" pitchFamily="34" charset="-122"/>
+                <a:cs typeface="Calibri" pitchFamily="34" charset="-120"/>
+              </a:rPr>
+              <a:t>Typical self-service deflection of routine contacts (industry benchmark)</a:t>
+            </a:r>
+            <a:endParaRPr lang="en-US" sz="1150" dirty="0"/>
+          </a:p>
+        </p:txBody>
+      </p:sp>
+      <p:sp>
+        <p:nvSpPr>
+          <p:cNvPr id="10" name="Shape 8"/>
+          <p:cNvSpPr/>
+          <p:nvPr/>
+        </p:nvSpPr>
+        <p:spPr>
+          <a:xfrm>
+            <a:off x="6099048" y="1783080"/>
+            <a:ext cx="2615184" cy="1554480"/>
           </a:xfrm>
           <a:prstGeom prst="roundRect">
             <a:avLst>
-              <a:gd name="adj" fmla="val 19697"/>
-            </a:avLst>
-          </a:prstGeom>
-          <a:solidFill>
-            <a:srgbClr val="2563EB"/>
-          </a:solidFill>
-          <a:ln/>
-        </p:spPr>
-      </p:sp>
-      <p:pic>
-        <p:nvPicPr>
-          <p:cNvPr id="14" name="Image 2" descr="icons/users.png">    </p:cNvPr>
-          <p:cNvPicPr>
-            <a:picLocks noChangeAspect="1"/>
-          </p:cNvPicPr>
-          <p:nvPr/>
-        </p:nvPicPr>
-        <p:blipFill>
-          <a:blip r:embed="rId3"/>
-          <a:stretch>
-            <a:fillRect/>
-          </a:stretch>
-        </p:blipFill>
-        <p:spPr>
-          <a:xfrm>
-            <a:off x="3742868" y="2386584"/>
-            <a:ext cx="292608" cy="292608"/>
-          </a:xfrm>
-          <a:prstGeom prst="rect">
-            <a:avLst/>
-          </a:prstGeom>
-        </p:spPr>
-      </p:pic>
-      <p:sp>
-        <p:nvSpPr>
-          <p:cNvPr id="15" name="Text 10"/>
-          <p:cNvSpPr/>
-          <p:nvPr/>
-        </p:nvSpPr>
-        <p:spPr>
-          <a:xfrm>
-            <a:off x="3569132" y="2944368"/>
-            <a:ext cx="2188388" cy="548640"/>
-          </a:xfrm>
-          <a:prstGeom prst="rect">
-            <a:avLst/>
-          </a:prstGeom>
-          <a:noFill/>
-          <a:ln/>
-        </p:spPr>
-        <p:txBody>
-          <a:bodyPr wrap="square" lIns="0" tIns="0" rIns="0" bIns="0" rtlCol="0" anchor="t"/>
-          <a:lstStyle/>
-          <a:p>
-            <a:pPr indent="0" marL="0">
-              <a:buNone/>
-            </a:pPr>
-            <a:r>
-              <a:rPr lang="en-US" sz="1400" b="1" dirty="0">
-                <a:solidFill>
-                  <a:srgbClr val="0F172A"/>
-                </a:solidFill>
-                <a:latin typeface="Calibri" pitchFamily="34" charset="0"/>
-                <a:ea typeface="Calibri" pitchFamily="34" charset="-122"/>
-                <a:cs typeface="Calibri" pitchFamily="34" charset="-120"/>
-              </a:rPr>
-              <a:t>Pilot — 4–6 wks</a:t>
-            </a:r>
-            <a:endParaRPr lang="en-US" sz="1400" dirty="0"/>
-          </a:p>
-        </p:txBody>
-      </p:sp>
-      <p:sp>
-        <p:nvSpPr>
-          <p:cNvPr id="16" name="Text 11"/>
-          <p:cNvSpPr/>
-          <p:nvPr/>
-        </p:nvSpPr>
-        <p:spPr>
-          <a:xfrm>
-            <a:off x="3587420" y="3493008"/>
-            <a:ext cx="2170100" cy="1691640"/>
-          </a:xfrm>
-          <a:prstGeom prst="rect">
-            <a:avLst/>
-          </a:prstGeom>
-          <a:noFill/>
-          <a:ln/>
-        </p:spPr>
-        <p:txBody>
-          <a:bodyPr wrap="square" lIns="0" tIns="0" rIns="0" bIns="0" rtlCol="0" anchor="t"/>
-          <a:lstStyle/>
-          <a:p>
-            <a:pPr marL="152400" indent="-152400">
-              <a:spcAft>
-                <a:spcPts val="700"/>
-              </a:spcAft>
-              <a:buSzPct val="100000"/>
-              <a:buChar char="•"/>
-            </a:pPr>
-            <a:r>
-              <a:rPr lang="en-US" sz="1150" dirty="0">
-                <a:solidFill>
-                  <a:srgbClr val="5B6577"/>
-                </a:solidFill>
-                <a:latin typeface="Calibri" pitchFamily="34" charset="0"/>
-                <a:ea typeface="Calibri" pitchFamily="34" charset="-122"/>
-                <a:cs typeface="Calibri" pitchFamily="34" charset="-120"/>
-              </a:rPr>
-              <a:t>Multi-user + real SSO (Firebase/IdP)</a:t>
-            </a:r>
-            <a:endParaRPr lang="en-US" sz="1150" dirty="0"/>
-          </a:p>
-          <a:p>
-            <a:pPr marL="152400" indent="-152400">
-              <a:spcAft>
-                <a:spcPts val="700"/>
-              </a:spcAft>
-              <a:buSzPct val="100000"/>
-              <a:buChar char="•"/>
-            </a:pPr>
-            <a:r>
-              <a:rPr lang="en-US" sz="1150" dirty="0">
-                <a:solidFill>
-                  <a:srgbClr val="5B6577"/>
-                </a:solidFill>
-                <a:latin typeface="Calibri" pitchFamily="34" charset="0"/>
-                <a:ea typeface="Calibri" pitchFamily="34" charset="-122"/>
-                <a:cs typeface="Calibri" pitchFamily="34" charset="-120"/>
-              </a:rPr>
-              <a:t>Secret Manager · CORS/IAM hardening</a:t>
-            </a:r>
-            <a:endParaRPr lang="en-US" sz="1150" dirty="0"/>
-          </a:p>
-          <a:p>
-            <a:pPr marL="152400" indent="-152400">
-              <a:spcAft>
-                <a:spcPts val="700"/>
-              </a:spcAft>
-              <a:buSzPct val="100000"/>
-              <a:buChar char="•"/>
-            </a:pPr>
-            <a:r>
-              <a:rPr lang="en-US" sz="1150" dirty="0">
-                <a:solidFill>
-                  <a:srgbClr val="5B6577"/>
-                </a:solidFill>
-                <a:latin typeface="Calibri" pitchFamily="34" charset="0"/>
-                <a:ea typeface="Calibri" pitchFamily="34" charset="-122"/>
-                <a:cs typeface="Calibri" pitchFamily="34" charset="-120"/>
-              </a:rPr>
-              <a:t>Instrument deflection / conversion / CSAT</a:t>
-            </a:r>
-            <a:endParaRPr lang="en-US" sz="1150" dirty="0"/>
-          </a:p>
-        </p:txBody>
-      </p:sp>
-      <p:pic>
-        <p:nvPicPr>
-          <p:cNvPr id="17" name="Image 3" descr="icons/arrow.png">    </p:cNvPr>
-          <p:cNvPicPr>
-            <a:picLocks noChangeAspect="1"/>
-          </p:cNvPicPr>
-          <p:nvPr/>
-        </p:nvPicPr>
-        <p:blipFill>
-          <a:blip r:embed="rId4"/>
-          <a:stretch>
-            <a:fillRect/>
-          </a:stretch>
-        </p:blipFill>
-        <p:spPr>
-          <a:xfrm>
-            <a:off x="5958688" y="3474720"/>
-            <a:ext cx="256032" cy="256032"/>
-          </a:xfrm>
-          <a:prstGeom prst="rect">
-            <a:avLst/>
-          </a:prstGeom>
-        </p:spPr>
-      </p:pic>
-      <p:sp>
-        <p:nvSpPr>
-          <p:cNvPr id="18" name="Shape 12"/>
-          <p:cNvSpPr/>
-          <p:nvPr/>
-        </p:nvSpPr>
-        <p:spPr>
-          <a:xfrm>
-            <a:off x="6233008" y="1920240"/>
-            <a:ext cx="2590724" cy="3383280"/>
-          </a:xfrm>
-          <a:prstGeom prst="roundRect">
-            <a:avLst>
-              <a:gd name="adj" fmla="val 3177"/>
+              <a:gd name="adj" fmla="val 5294"/>
             </a:avLst>
           </a:prstGeom>
           <a:solidFill>
@@ -6838,232 +6979,96 @@
       </p:sp>
       <p:sp>
         <p:nvSpPr>
-          <p:cNvPr id="19" name="Shape 13"/>
-          <p:cNvSpPr/>
-          <p:nvPr/>
-        </p:nvSpPr>
-        <p:spPr>
-          <a:xfrm>
-            <a:off x="6233008" y="1920240"/>
-            <a:ext cx="2590724" cy="109728"/>
-          </a:xfrm>
-          <a:prstGeom prst="rect">
-            <a:avLst/>
-          </a:prstGeom>
-          <a:solidFill>
-            <a:srgbClr val="7C3AED"/>
-          </a:solidFill>
-          <a:ln/>
-        </p:spPr>
-      </p:sp>
-      <p:sp>
-        <p:nvSpPr>
-          <p:cNvPr id="20" name="Shape 14"/>
-          <p:cNvSpPr/>
-          <p:nvPr/>
-        </p:nvSpPr>
-        <p:spPr>
-          <a:xfrm>
-            <a:off x="6452464" y="2231136"/>
-            <a:ext cx="603504" cy="603504"/>
+          <p:cNvPr id="11" name="Text 9"/>
+          <p:cNvSpPr/>
+          <p:nvPr/>
+        </p:nvSpPr>
+        <p:spPr>
+          <a:xfrm>
+            <a:off x="6190488" y="1965960"/>
+            <a:ext cx="2432304" cy="777240"/>
+          </a:xfrm>
+          <a:prstGeom prst="rect">
+            <a:avLst/>
+          </a:prstGeom>
+          <a:noFill/>
+          <a:ln/>
+        </p:spPr>
+        <p:txBody>
+          <a:bodyPr wrap="square" lIns="0" tIns="0" rIns="0" bIns="0" rtlCol="0" anchor="ctr"/>
+          <a:lstStyle/>
+          <a:p>
+            <a:pPr algn="ctr" indent="0" marL="0">
+              <a:buNone/>
+            </a:pPr>
+            <a:r>
+              <a:rPr lang="en-US" sz="4000" b="1" dirty="0">
+                <a:solidFill>
+                  <a:srgbClr val="F59E0B"/>
+                </a:solidFill>
+                <a:latin typeface="Georgia" pitchFamily="34" charset="0"/>
+                <a:ea typeface="Georgia" pitchFamily="34" charset="-122"/>
+                <a:cs typeface="Georgia" pitchFamily="34" charset="-120"/>
+              </a:rPr>
+              <a:t>~$0</a:t>
+            </a:r>
+            <a:endParaRPr lang="en-US" sz="4000" dirty="0"/>
+          </a:p>
+        </p:txBody>
+      </p:sp>
+      <p:sp>
+        <p:nvSpPr>
+          <p:cNvPr id="12" name="Text 10"/>
+          <p:cNvSpPr/>
+          <p:nvPr/>
+        </p:nvSpPr>
+        <p:spPr>
+          <a:xfrm>
+            <a:off x="6263640" y="2734056"/>
+            <a:ext cx="2286000" cy="548640"/>
+          </a:xfrm>
+          <a:prstGeom prst="rect">
+            <a:avLst/>
+          </a:prstGeom>
+          <a:noFill/>
+          <a:ln/>
+        </p:spPr>
+        <p:txBody>
+          <a:bodyPr wrap="square" lIns="0" tIns="0" rIns="0" bIns="0" rtlCol="0" anchor="t"/>
+          <a:lstStyle/>
+          <a:p>
+            <a:pPr algn="ctr" indent="0" marL="0">
+              <a:buNone/>
+            </a:pPr>
+            <a:r>
+              <a:rPr lang="en-US" sz="1150" dirty="0">
+                <a:solidFill>
+                  <a:srgbClr val="5B6577"/>
+                </a:solidFill>
+                <a:latin typeface="Calibri" pitchFamily="34" charset="0"/>
+                <a:ea typeface="Calibri" pitchFamily="34" charset="-122"/>
+                <a:cs typeface="Calibri" pitchFamily="34" charset="-120"/>
+              </a:rPr>
+              <a:t>Idle cost — Cloud Run scales to zero between conversations</a:t>
+            </a:r>
+            <a:endParaRPr lang="en-US" sz="1150" dirty="0"/>
+          </a:p>
+        </p:txBody>
+      </p:sp>
+      <p:sp>
+        <p:nvSpPr>
+          <p:cNvPr id="13" name="Shape 11"/>
+          <p:cNvSpPr/>
+          <p:nvPr/>
+        </p:nvSpPr>
+        <p:spPr>
+          <a:xfrm>
+            <a:off x="8897112" y="1783080"/>
+            <a:ext cx="2791663" cy="1554480"/>
           </a:xfrm>
           <a:prstGeom prst="roundRect">
             <a:avLst>
-              <a:gd name="adj" fmla="val 19697"/>
-            </a:avLst>
-          </a:prstGeom>
-          <a:solidFill>
-            <a:srgbClr val="7C3AED"/>
-          </a:solidFill>
-          <a:ln/>
-        </p:spPr>
-      </p:sp>
-      <p:pic>
-        <p:nvPicPr>
-          <p:cNvPr id="21" name="Image 4" descr="icons/plug.png">    </p:cNvPr>
-          <p:cNvPicPr>
-            <a:picLocks noChangeAspect="1"/>
-          </p:cNvPicPr>
-          <p:nvPr/>
-        </p:nvPicPr>
-        <p:blipFill>
-          <a:blip r:embed="rId5"/>
-          <a:stretch>
-            <a:fillRect/>
-          </a:stretch>
-        </p:blipFill>
-        <p:spPr>
-          <a:xfrm>
-            <a:off x="6607912" y="2386584"/>
-            <a:ext cx="292608" cy="292608"/>
-          </a:xfrm>
-          <a:prstGeom prst="rect">
-            <a:avLst/>
-          </a:prstGeom>
-        </p:spPr>
-      </p:pic>
-      <p:sp>
-        <p:nvSpPr>
-          <p:cNvPr id="22" name="Text 15"/>
-          <p:cNvSpPr/>
-          <p:nvPr/>
-        </p:nvSpPr>
-        <p:spPr>
-          <a:xfrm>
-            <a:off x="6434176" y="2944368"/>
-            <a:ext cx="2188388" cy="548640"/>
-          </a:xfrm>
-          <a:prstGeom prst="rect">
-            <a:avLst/>
-          </a:prstGeom>
-          <a:noFill/>
-          <a:ln/>
-        </p:spPr>
-        <p:txBody>
-          <a:bodyPr wrap="square" lIns="0" tIns="0" rIns="0" bIns="0" rtlCol="0" anchor="t"/>
-          <a:lstStyle/>
-          <a:p>
-            <a:pPr indent="0" marL="0">
-              <a:buNone/>
-            </a:pPr>
-            <a:r>
-              <a:rPr lang="en-US" sz="1400" b="1" dirty="0">
-                <a:solidFill>
-                  <a:srgbClr val="0F172A"/>
-                </a:solidFill>
-                <a:latin typeface="Calibri" pitchFamily="34" charset="0"/>
-                <a:ea typeface="Calibri" pitchFamily="34" charset="-122"/>
-                <a:cs typeface="Calibri" pitchFamily="34" charset="-120"/>
-              </a:rPr>
-              <a:t>Integrate — 6–10 wks</a:t>
-            </a:r>
-            <a:endParaRPr lang="en-US" sz="1400" dirty="0"/>
-          </a:p>
-        </p:txBody>
-      </p:sp>
-      <p:sp>
-        <p:nvSpPr>
-          <p:cNvPr id="23" name="Text 16"/>
-          <p:cNvSpPr/>
-          <p:nvPr/>
-        </p:nvSpPr>
-        <p:spPr>
-          <a:xfrm>
-            <a:off x="6452464" y="3493008"/>
-            <a:ext cx="2170100" cy="1691640"/>
-          </a:xfrm>
-          <a:prstGeom prst="rect">
-            <a:avLst/>
-          </a:prstGeom>
-          <a:noFill/>
-          <a:ln/>
-        </p:spPr>
-        <p:txBody>
-          <a:bodyPr wrap="square" lIns="0" tIns="0" rIns="0" bIns="0" rtlCol="0" anchor="t"/>
-          <a:lstStyle/>
-          <a:p>
-            <a:pPr marL="152400" indent="-152400">
-              <a:spcAft>
-                <a:spcPts val="700"/>
-              </a:spcAft>
-              <a:buSzPct val="100000"/>
-              <a:buChar char="•"/>
-            </a:pPr>
-            <a:r>
-              <a:rPr lang="en-US" sz="1150" dirty="0">
-                <a:solidFill>
-                  <a:srgbClr val="5B6577"/>
-                </a:solidFill>
-                <a:latin typeface="Calibri" pitchFamily="34" charset="0"/>
-                <a:ea typeface="Calibri" pitchFamily="34" charset="-122"/>
-                <a:cs typeface="Calibri" pitchFamily="34" charset="-120"/>
-              </a:rPr>
-              <a:t>Live inventory/OMS + payment provider</a:t>
-            </a:r>
-            <a:endParaRPr lang="en-US" sz="1150" dirty="0"/>
-          </a:p>
-          <a:p>
-            <a:pPr marL="152400" indent="-152400">
-              <a:spcAft>
-                <a:spcPts val="700"/>
-              </a:spcAft>
-              <a:buSzPct val="100000"/>
-              <a:buChar char="•"/>
-            </a:pPr>
-            <a:r>
-              <a:rPr lang="en-US" sz="1150" dirty="0">
-                <a:solidFill>
-                  <a:srgbClr val="5B6577"/>
-                </a:solidFill>
-                <a:latin typeface="Calibri" pitchFamily="34" charset="0"/>
-                <a:ea typeface="Calibri" pitchFamily="34" charset="-122"/>
-                <a:cs typeface="Calibri" pitchFamily="34" charset="-120"/>
-              </a:rPr>
-              <a:t>CCAI telephony + agent-assist</a:t>
-            </a:r>
-            <a:endParaRPr lang="en-US" sz="1150" dirty="0"/>
-          </a:p>
-          <a:p>
-            <a:pPr marL="152400" indent="-152400">
-              <a:spcAft>
-                <a:spcPts val="700"/>
-              </a:spcAft>
-              <a:buSzPct val="100000"/>
-              <a:buChar char="•"/>
-            </a:pPr>
-            <a:r>
-              <a:rPr lang="en-US" sz="1150" dirty="0">
-                <a:solidFill>
-                  <a:srgbClr val="5B6577"/>
-                </a:solidFill>
-                <a:latin typeface="Calibri" pitchFamily="34" charset="0"/>
-                <a:ea typeface="Calibri" pitchFamily="34" charset="-122"/>
-                <a:cs typeface="Calibri" pitchFamily="34" charset="-120"/>
-              </a:rPr>
-              <a:t>Vertex Translation for long-tail locales</a:t>
-            </a:r>
-            <a:endParaRPr lang="en-US" sz="1150" dirty="0"/>
-          </a:p>
-        </p:txBody>
-      </p:sp>
-      <p:pic>
-        <p:nvPicPr>
-          <p:cNvPr id="24" name="Image 5" descr="icons/arrow.png">    </p:cNvPr>
-          <p:cNvPicPr>
-            <a:picLocks noChangeAspect="1"/>
-          </p:cNvPicPr>
-          <p:nvPr/>
-        </p:nvPicPr>
-        <p:blipFill>
-          <a:blip r:embed="rId6"/>
-          <a:stretch>
-            <a:fillRect/>
-          </a:stretch>
-        </p:blipFill>
-        <p:spPr>
-          <a:xfrm>
-            <a:off x="8823731" y="3474720"/>
-            <a:ext cx="256032" cy="256032"/>
-          </a:xfrm>
-          <a:prstGeom prst="rect">
-            <a:avLst/>
-          </a:prstGeom>
-        </p:spPr>
-      </p:pic>
-      <p:sp>
-        <p:nvSpPr>
-          <p:cNvPr id="25" name="Shape 17"/>
-          <p:cNvSpPr/>
-          <p:nvPr/>
-        </p:nvSpPr>
-        <p:spPr>
-          <a:xfrm>
-            <a:off x="9098051" y="1920240"/>
-            <a:ext cx="2590724" cy="3383280"/>
-          </a:xfrm>
-          <a:prstGeom prst="roundRect">
-            <a:avLst>
-              <a:gd name="adj" fmla="val 3177"/>
+              <a:gd name="adj" fmla="val 5294"/>
             </a:avLst>
           </a:prstGeom>
           <a:solidFill>
@@ -7086,6 +7091,4022 @@
       </p:sp>
       <p:sp>
         <p:nvSpPr>
+          <p:cNvPr id="14" name="Text 12"/>
+          <p:cNvSpPr/>
+          <p:nvPr/>
+        </p:nvSpPr>
+        <p:spPr>
+          <a:xfrm>
+            <a:off x="8988552" y="1965960"/>
+            <a:ext cx="2608783" cy="777240"/>
+          </a:xfrm>
+          <a:prstGeom prst="rect">
+            <a:avLst/>
+          </a:prstGeom>
+          <a:noFill/>
+          <a:ln/>
+        </p:spPr>
+        <p:txBody>
+          <a:bodyPr wrap="square" lIns="0" tIns="0" rIns="0" bIns="0" rtlCol="0" anchor="ctr"/>
+          <a:lstStyle/>
+          <a:p>
+            <a:pPr algn="ctr" indent="0" marL="0">
+              <a:buNone/>
+            </a:pPr>
+            <a:r>
+              <a:rPr lang="en-US" sz="4000" b="1" dirty="0">
+                <a:solidFill>
+                  <a:srgbClr val="E11D48"/>
+                </a:solidFill>
+                <a:latin typeface="Georgia" pitchFamily="34" charset="0"/>
+                <a:ea typeface="Georgia" pitchFamily="34" charset="-122"/>
+                <a:cs typeface="Georgia" pitchFamily="34" charset="-120"/>
+              </a:rPr>
+              <a:t>1 agent</a:t>
+            </a:r>
+            <a:endParaRPr lang="en-US" sz="4000" dirty="0"/>
+          </a:p>
+        </p:txBody>
+      </p:sp>
+      <p:sp>
+        <p:nvSpPr>
+          <p:cNvPr id="15" name="Text 13"/>
+          <p:cNvSpPr/>
+          <p:nvPr/>
+        </p:nvSpPr>
+        <p:spPr>
+          <a:xfrm>
+            <a:off x="9061704" y="2734056"/>
+            <a:ext cx="2462479" cy="548640"/>
+          </a:xfrm>
+          <a:prstGeom prst="rect">
+            <a:avLst/>
+          </a:prstGeom>
+          <a:noFill/>
+          <a:ln/>
+        </p:spPr>
+        <p:txBody>
+          <a:bodyPr wrap="square" lIns="0" tIns="0" rIns="0" bIns="0" rtlCol="0" anchor="t"/>
+          <a:lstStyle/>
+          <a:p>
+            <a:pPr algn="ctr" indent="0" marL="0">
+              <a:buNone/>
+            </a:pPr>
+            <a:r>
+              <a:rPr lang="en-US" sz="1150" dirty="0">
+                <a:solidFill>
+                  <a:srgbClr val="5B6577"/>
+                </a:solidFill>
+                <a:latin typeface="Calibri" pitchFamily="34" charset="0"/>
+                <a:ea typeface="Calibri" pitchFamily="34" charset="-122"/>
+                <a:cs typeface="Calibri" pitchFamily="34" charset="-120"/>
+              </a:rPr>
+              <a:t>Replaces search + support + checkout hand-offs</a:t>
+            </a:r>
+            <a:endParaRPr lang="en-US" sz="1150" dirty="0"/>
+          </a:p>
+        </p:txBody>
+      </p:sp>
+      <p:sp>
+        <p:nvSpPr>
+          <p:cNvPr id="16" name="Shape 14"/>
+          <p:cNvSpPr/>
+          <p:nvPr/>
+        </p:nvSpPr>
+        <p:spPr>
+          <a:xfrm>
+            <a:off x="502920" y="3657600"/>
+            <a:ext cx="5318608" cy="1234440"/>
+          </a:xfrm>
+          <a:prstGeom prst="roundRect">
+            <a:avLst>
+              <a:gd name="adj" fmla="val 5926"/>
+            </a:avLst>
+          </a:prstGeom>
+          <a:solidFill>
+            <a:srgbClr val="F5F6FB"/>
+          </a:solidFill>
+          <a:ln w="12700">
+            <a:solidFill>
+              <a:srgbClr val="E6E8F0"/>
+            </a:solidFill>
+            <a:prstDash val="solid"/>
+          </a:ln>
+        </p:spPr>
+      </p:sp>
+      <p:sp>
+        <p:nvSpPr>
+          <p:cNvPr id="17" name="Shape 15"/>
+          <p:cNvSpPr/>
+          <p:nvPr/>
+        </p:nvSpPr>
+        <p:spPr>
+          <a:xfrm>
+            <a:off x="704088" y="3986784"/>
+            <a:ext cx="548640" cy="548640"/>
+          </a:xfrm>
+          <a:prstGeom prst="roundRect">
+            <a:avLst>
+              <a:gd name="adj" fmla="val 20000"/>
+            </a:avLst>
+          </a:prstGeom>
+          <a:solidFill>
+            <a:srgbClr val="E11D48"/>
+          </a:solidFill>
+          <a:ln/>
+        </p:spPr>
+      </p:sp>
+      <p:pic>
+        <p:nvPicPr>
+          <p:cNvPr id="18" name="Image 0" descr="icons/chart.png">    </p:cNvPr>
+          <p:cNvPicPr>
+            <a:picLocks noChangeAspect="1"/>
+          </p:cNvPicPr>
+          <p:nvPr/>
+        </p:nvPicPr>
+        <p:blipFill>
+          <a:blip r:embed="rId1"/>
+          <a:stretch>
+            <a:fillRect/>
+          </a:stretch>
+        </p:blipFill>
+        <p:spPr>
+          <a:xfrm>
+            <a:off x="841248" y="4123944"/>
+            <a:ext cx="274320" cy="274320"/>
+          </a:xfrm>
+          <a:prstGeom prst="rect">
+            <a:avLst/>
+          </a:prstGeom>
+        </p:spPr>
+      </p:pic>
+      <p:sp>
+        <p:nvSpPr>
+          <p:cNvPr id="19" name="Text 16"/>
+          <p:cNvSpPr/>
+          <p:nvPr/>
+        </p:nvSpPr>
+        <p:spPr>
+          <a:xfrm>
+            <a:off x="1417320" y="3840480"/>
+            <a:ext cx="4221328" cy="365760"/>
+          </a:xfrm>
+          <a:prstGeom prst="rect">
+            <a:avLst/>
+          </a:prstGeom>
+          <a:noFill/>
+          <a:ln/>
+        </p:spPr>
+        <p:txBody>
+          <a:bodyPr wrap="square" lIns="0" tIns="0" rIns="0" bIns="0" rtlCol="0" anchor="ctr"/>
+          <a:lstStyle/>
+          <a:p>
+            <a:pPr indent="0" marL="0">
+              <a:buNone/>
+            </a:pPr>
+            <a:r>
+              <a:rPr lang="en-US" sz="1450" b="1" dirty="0">
+                <a:solidFill>
+                  <a:srgbClr val="0F172A"/>
+                </a:solidFill>
+                <a:latin typeface="Calibri" pitchFamily="34" charset="0"/>
+                <a:ea typeface="Calibri" pitchFamily="34" charset="-122"/>
+                <a:cs typeface="Calibri" pitchFamily="34" charset="-120"/>
+              </a:rPr>
+              <a:t>Higher conversion &amp; AOV</a:t>
+            </a:r>
+            <a:endParaRPr lang="en-US" sz="1450" dirty="0"/>
+          </a:p>
+        </p:txBody>
+      </p:sp>
+      <p:sp>
+        <p:nvSpPr>
+          <p:cNvPr id="20" name="Text 17"/>
+          <p:cNvSpPr/>
+          <p:nvPr/>
+        </p:nvSpPr>
+        <p:spPr>
+          <a:xfrm>
+            <a:off x="1417320" y="4206240"/>
+            <a:ext cx="4221328" cy="603504"/>
+          </a:xfrm>
+          <a:prstGeom prst="rect">
+            <a:avLst/>
+          </a:prstGeom>
+          <a:noFill/>
+          <a:ln/>
+        </p:spPr>
+        <p:txBody>
+          <a:bodyPr wrap="square" lIns="0" tIns="0" rIns="0" bIns="0" rtlCol="0" anchor="t"/>
+          <a:lstStyle/>
+          <a:p>
+            <a:pPr indent="0" marL="0">
+              <a:buNone/>
+            </a:pPr>
+            <a:r>
+              <a:rPr lang="en-US" sz="1200" dirty="0">
+                <a:solidFill>
+                  <a:srgbClr val="5B6577"/>
+                </a:solidFill>
+                <a:latin typeface="Calibri" pitchFamily="34" charset="0"/>
+                <a:ea typeface="Calibri" pitchFamily="34" charset="-122"/>
+                <a:cs typeface="Calibri" pitchFamily="34" charset="-120"/>
+              </a:rPr>
+              <a:t>Natural discovery + “see-it-shop-it” + recommendations turn questions into orders.</a:t>
+            </a:r>
+            <a:endParaRPr lang="en-US" sz="1200" dirty="0"/>
+          </a:p>
+        </p:txBody>
+      </p:sp>
+      <p:sp>
+        <p:nvSpPr>
+          <p:cNvPr id="21" name="Shape 18"/>
+          <p:cNvSpPr/>
+          <p:nvPr/>
+        </p:nvSpPr>
+        <p:spPr>
+          <a:xfrm>
+            <a:off x="6370168" y="3657600"/>
+            <a:ext cx="5318608" cy="1234440"/>
+          </a:xfrm>
+          <a:prstGeom prst="roundRect">
+            <a:avLst>
+              <a:gd name="adj" fmla="val 5926"/>
+            </a:avLst>
+          </a:prstGeom>
+          <a:solidFill>
+            <a:srgbClr val="F5F6FB"/>
+          </a:solidFill>
+          <a:ln w="12700">
+            <a:solidFill>
+              <a:srgbClr val="E6E8F0"/>
+            </a:solidFill>
+            <a:prstDash val="solid"/>
+          </a:ln>
+        </p:spPr>
+      </p:sp>
+      <p:sp>
+        <p:nvSpPr>
+          <p:cNvPr id="22" name="Shape 19"/>
+          <p:cNvSpPr/>
+          <p:nvPr/>
+        </p:nvSpPr>
+        <p:spPr>
+          <a:xfrm>
+            <a:off x="6571336" y="3986784"/>
+            <a:ext cx="548640" cy="548640"/>
+          </a:xfrm>
+          <a:prstGeom prst="roundRect">
+            <a:avLst>
+              <a:gd name="adj" fmla="val 20000"/>
+            </a:avLst>
+          </a:prstGeom>
+          <a:solidFill>
+            <a:srgbClr val="E11D48"/>
+          </a:solidFill>
+          <a:ln/>
+        </p:spPr>
+      </p:sp>
+      <p:pic>
+        <p:nvPicPr>
+          <p:cNvPr id="23" name="Image 1" descr="icons/globe.png">    </p:cNvPr>
+          <p:cNvPicPr>
+            <a:picLocks noChangeAspect="1"/>
+          </p:cNvPicPr>
+          <p:nvPr/>
+        </p:nvPicPr>
+        <p:blipFill>
+          <a:blip r:embed="rId2"/>
+          <a:stretch>
+            <a:fillRect/>
+          </a:stretch>
+        </p:blipFill>
+        <p:spPr>
+          <a:xfrm>
+            <a:off x="6708496" y="4123944"/>
+            <a:ext cx="274320" cy="274320"/>
+          </a:xfrm>
+          <a:prstGeom prst="rect">
+            <a:avLst/>
+          </a:prstGeom>
+        </p:spPr>
+      </p:pic>
+      <p:sp>
+        <p:nvSpPr>
+          <p:cNvPr id="24" name="Text 20"/>
+          <p:cNvSpPr/>
+          <p:nvPr/>
+        </p:nvSpPr>
+        <p:spPr>
+          <a:xfrm>
+            <a:off x="7284568" y="3840480"/>
+            <a:ext cx="4221328" cy="365760"/>
+          </a:xfrm>
+          <a:prstGeom prst="rect">
+            <a:avLst/>
+          </a:prstGeom>
+          <a:noFill/>
+          <a:ln/>
+        </p:spPr>
+        <p:txBody>
+          <a:bodyPr wrap="square" lIns="0" tIns="0" rIns="0" bIns="0" rtlCol="0" anchor="ctr"/>
+          <a:lstStyle/>
+          <a:p>
+            <a:pPr indent="0" marL="0">
+              <a:buNone/>
+            </a:pPr>
+            <a:r>
+              <a:rPr lang="en-US" sz="1450" b="1" dirty="0">
+                <a:solidFill>
+                  <a:srgbClr val="0F172A"/>
+                </a:solidFill>
+                <a:latin typeface="Calibri" pitchFamily="34" charset="0"/>
+                <a:ea typeface="Calibri" pitchFamily="34" charset="-122"/>
+                <a:cs typeface="Calibri" pitchFamily="34" charset="-120"/>
+              </a:rPr>
+              <a:t>Instant global reach</a:t>
+            </a:r>
+            <a:endParaRPr lang="en-US" sz="1450" dirty="0"/>
+          </a:p>
+        </p:txBody>
+      </p:sp>
+      <p:sp>
+        <p:nvSpPr>
+          <p:cNvPr id="25" name="Text 21"/>
+          <p:cNvSpPr/>
+          <p:nvPr/>
+        </p:nvSpPr>
+        <p:spPr>
+          <a:xfrm>
+            <a:off x="7284568" y="4206240"/>
+            <a:ext cx="4221328" cy="603504"/>
+          </a:xfrm>
+          <a:prstGeom prst="rect">
+            <a:avLst/>
+          </a:prstGeom>
+          <a:noFill/>
+          <a:ln/>
+        </p:spPr>
+        <p:txBody>
+          <a:bodyPr wrap="square" lIns="0" tIns="0" rIns="0" bIns="0" rtlCol="0" anchor="t"/>
+          <a:lstStyle/>
+          <a:p>
+            <a:pPr indent="0" marL="0">
+              <a:buNone/>
+            </a:pPr>
+            <a:r>
+              <a:rPr lang="en-US" sz="1200" dirty="0">
+                <a:solidFill>
+                  <a:srgbClr val="5B6577"/>
+                </a:solidFill>
+                <a:latin typeface="Calibri" pitchFamily="34" charset="0"/>
+                <a:ea typeface="Calibri" pitchFamily="34" charset="-122"/>
+                <a:cs typeface="Calibri" pitchFamily="34" charset="-120"/>
+              </a:rPr>
+              <a:t>One agent serves every language &amp; channel — no per-market chatbot rebuilds.</a:t>
+            </a:r>
+            <a:endParaRPr lang="en-US" sz="1200" dirty="0"/>
+          </a:p>
+        </p:txBody>
+      </p:sp>
+      <p:sp>
+        <p:nvSpPr>
+          <p:cNvPr id="26" name="Shape 22"/>
+          <p:cNvSpPr/>
+          <p:nvPr/>
+        </p:nvSpPr>
+        <p:spPr>
+          <a:xfrm>
+            <a:off x="502920" y="5093208"/>
+            <a:ext cx="5318608" cy="1234440"/>
+          </a:xfrm>
+          <a:prstGeom prst="roundRect">
+            <a:avLst>
+              <a:gd name="adj" fmla="val 5926"/>
+            </a:avLst>
+          </a:prstGeom>
+          <a:solidFill>
+            <a:srgbClr val="F5F6FB"/>
+          </a:solidFill>
+          <a:ln w="12700">
+            <a:solidFill>
+              <a:srgbClr val="E6E8F0"/>
+            </a:solidFill>
+            <a:prstDash val="solid"/>
+          </a:ln>
+        </p:spPr>
+      </p:sp>
+      <p:sp>
+        <p:nvSpPr>
+          <p:cNvPr id="27" name="Shape 23"/>
+          <p:cNvSpPr/>
+          <p:nvPr/>
+        </p:nvSpPr>
+        <p:spPr>
+          <a:xfrm>
+            <a:off x="704088" y="5422392"/>
+            <a:ext cx="548640" cy="548640"/>
+          </a:xfrm>
+          <a:prstGeom prst="roundRect">
+            <a:avLst>
+              <a:gd name="adj" fmla="val 20000"/>
+            </a:avLst>
+          </a:prstGeom>
+          <a:solidFill>
+            <a:srgbClr val="E11D48"/>
+          </a:solidFill>
+          <a:ln/>
+        </p:spPr>
+      </p:sp>
+      <p:pic>
+        <p:nvPicPr>
+          <p:cNvPr id="28" name="Image 2" descr="icons/bolt.png">    </p:cNvPr>
+          <p:cNvPicPr>
+            <a:picLocks noChangeAspect="1"/>
+          </p:cNvPicPr>
+          <p:nvPr/>
+        </p:nvPicPr>
+        <p:blipFill>
+          <a:blip r:embed="rId3"/>
+          <a:stretch>
+            <a:fillRect/>
+          </a:stretch>
+        </p:blipFill>
+        <p:spPr>
+          <a:xfrm>
+            <a:off x="841248" y="5559552"/>
+            <a:ext cx="274320" cy="274320"/>
+          </a:xfrm>
+          <a:prstGeom prst="rect">
+            <a:avLst/>
+          </a:prstGeom>
+        </p:spPr>
+      </p:pic>
+      <p:sp>
+        <p:nvSpPr>
+          <p:cNvPr id="29" name="Text 24"/>
+          <p:cNvSpPr/>
+          <p:nvPr/>
+        </p:nvSpPr>
+        <p:spPr>
+          <a:xfrm>
+            <a:off x="1417320" y="5276088"/>
+            <a:ext cx="4221328" cy="365760"/>
+          </a:xfrm>
+          <a:prstGeom prst="rect">
+            <a:avLst/>
+          </a:prstGeom>
+          <a:noFill/>
+          <a:ln/>
+        </p:spPr>
+        <p:txBody>
+          <a:bodyPr wrap="square" lIns="0" tIns="0" rIns="0" bIns="0" rtlCol="0" anchor="ctr"/>
+          <a:lstStyle/>
+          <a:p>
+            <a:pPr indent="0" marL="0">
+              <a:buNone/>
+            </a:pPr>
+            <a:r>
+              <a:rPr lang="en-US" sz="1450" b="1" dirty="0">
+                <a:solidFill>
+                  <a:srgbClr val="0F172A"/>
+                </a:solidFill>
+                <a:latin typeface="Calibri" pitchFamily="34" charset="0"/>
+                <a:ea typeface="Calibri" pitchFamily="34" charset="-122"/>
+                <a:cs typeface="Calibri" pitchFamily="34" charset="-120"/>
+              </a:rPr>
+              <a:t>Lower cost to serve</a:t>
+            </a:r>
+            <a:endParaRPr lang="en-US" sz="1450" dirty="0"/>
+          </a:p>
+        </p:txBody>
+      </p:sp>
+      <p:sp>
+        <p:nvSpPr>
+          <p:cNvPr id="30" name="Text 25"/>
+          <p:cNvSpPr/>
+          <p:nvPr/>
+        </p:nvSpPr>
+        <p:spPr>
+          <a:xfrm>
+            <a:off x="1417320" y="5641848"/>
+            <a:ext cx="4221328" cy="603504"/>
+          </a:xfrm>
+          <a:prstGeom prst="rect">
+            <a:avLst/>
+          </a:prstGeom>
+          <a:noFill/>
+          <a:ln/>
+        </p:spPr>
+        <p:txBody>
+          <a:bodyPr wrap="square" lIns="0" tIns="0" rIns="0" bIns="0" rtlCol="0" anchor="t"/>
+          <a:lstStyle/>
+          <a:p>
+            <a:pPr indent="0" marL="0">
+              <a:buNone/>
+            </a:pPr>
+            <a:r>
+              <a:rPr lang="en-US" sz="1200" dirty="0">
+                <a:solidFill>
+                  <a:srgbClr val="5B6577"/>
+                </a:solidFill>
+                <a:latin typeface="Calibri" pitchFamily="34" charset="0"/>
+                <a:ea typeface="Calibri" pitchFamily="34" charset="-122"/>
+                <a:cs typeface="Calibri" pitchFamily="34" charset="-120"/>
+              </a:rPr>
+              <a:t>Deflect routine contacts; serverless + free-tier-first keeps run-cost low.</a:t>
+            </a:r>
+            <a:endParaRPr lang="en-US" sz="1200" dirty="0"/>
+          </a:p>
+        </p:txBody>
+      </p:sp>
+      <p:sp>
+        <p:nvSpPr>
+          <p:cNvPr id="31" name="Shape 26"/>
+          <p:cNvSpPr/>
+          <p:nvPr/>
+        </p:nvSpPr>
+        <p:spPr>
+          <a:xfrm>
+            <a:off x="6370168" y="5093208"/>
+            <a:ext cx="5318608" cy="1234440"/>
+          </a:xfrm>
+          <a:prstGeom prst="roundRect">
+            <a:avLst>
+              <a:gd name="adj" fmla="val 5926"/>
+            </a:avLst>
+          </a:prstGeom>
+          <a:solidFill>
+            <a:srgbClr val="F5F6FB"/>
+          </a:solidFill>
+          <a:ln w="12700">
+            <a:solidFill>
+              <a:srgbClr val="E6E8F0"/>
+            </a:solidFill>
+            <a:prstDash val="solid"/>
+          </a:ln>
+        </p:spPr>
+      </p:sp>
+      <p:sp>
+        <p:nvSpPr>
+          <p:cNvPr id="32" name="Shape 27"/>
+          <p:cNvSpPr/>
+          <p:nvPr/>
+        </p:nvSpPr>
+        <p:spPr>
+          <a:xfrm>
+            <a:off x="6571336" y="5422392"/>
+            <a:ext cx="548640" cy="548640"/>
+          </a:xfrm>
+          <a:prstGeom prst="roundRect">
+            <a:avLst>
+              <a:gd name="adj" fmla="val 20000"/>
+            </a:avLst>
+          </a:prstGeom>
+          <a:solidFill>
+            <a:srgbClr val="E11D48"/>
+          </a:solidFill>
+          <a:ln/>
+        </p:spPr>
+      </p:sp>
+      <p:pic>
+        <p:nvPicPr>
+          <p:cNvPr id="33" name="Image 3" descr="icons/shield.png">    </p:cNvPr>
+          <p:cNvPicPr>
+            <a:picLocks noChangeAspect="1"/>
+          </p:cNvPicPr>
+          <p:nvPr/>
+        </p:nvPicPr>
+        <p:blipFill>
+          <a:blip r:embed="rId4"/>
+          <a:stretch>
+            <a:fillRect/>
+          </a:stretch>
+        </p:blipFill>
+        <p:spPr>
+          <a:xfrm>
+            <a:off x="6708496" y="5559552"/>
+            <a:ext cx="274320" cy="274320"/>
+          </a:xfrm>
+          <a:prstGeom prst="rect">
+            <a:avLst/>
+          </a:prstGeom>
+        </p:spPr>
+      </p:pic>
+      <p:sp>
+        <p:nvSpPr>
+          <p:cNvPr id="34" name="Text 28"/>
+          <p:cNvSpPr/>
+          <p:nvPr/>
+        </p:nvSpPr>
+        <p:spPr>
+          <a:xfrm>
+            <a:off x="7284568" y="5276088"/>
+            <a:ext cx="4221328" cy="365760"/>
+          </a:xfrm>
+          <a:prstGeom prst="rect">
+            <a:avLst/>
+          </a:prstGeom>
+          <a:noFill/>
+          <a:ln/>
+        </p:spPr>
+        <p:txBody>
+          <a:bodyPr wrap="square" lIns="0" tIns="0" rIns="0" bIns="0" rtlCol="0" anchor="ctr"/>
+          <a:lstStyle/>
+          <a:p>
+            <a:pPr indent="0" marL="0">
+              <a:buNone/>
+            </a:pPr>
+            <a:r>
+              <a:rPr lang="en-US" sz="1450" b="1" dirty="0">
+                <a:solidFill>
+                  <a:srgbClr val="0F172A"/>
+                </a:solidFill>
+                <a:latin typeface="Calibri" pitchFamily="34" charset="0"/>
+                <a:ea typeface="Calibri" pitchFamily="34" charset="-122"/>
+                <a:cs typeface="Calibri" pitchFamily="34" charset="-120"/>
+              </a:rPr>
+              <a:t>Brand-safe automation</a:t>
+            </a:r>
+            <a:endParaRPr lang="en-US" sz="1450" dirty="0"/>
+          </a:p>
+        </p:txBody>
+      </p:sp>
+      <p:sp>
+        <p:nvSpPr>
+          <p:cNvPr id="35" name="Text 29"/>
+          <p:cNvSpPr/>
+          <p:nvPr/>
+        </p:nvSpPr>
+        <p:spPr>
+          <a:xfrm>
+            <a:off x="7284568" y="5641848"/>
+            <a:ext cx="4221328" cy="603504"/>
+          </a:xfrm>
+          <a:prstGeom prst="rect">
+            <a:avLst/>
+          </a:prstGeom>
+          <a:noFill/>
+          <a:ln/>
+        </p:spPr>
+        <p:txBody>
+          <a:bodyPr wrap="square" lIns="0" tIns="0" rIns="0" bIns="0" rtlCol="0" anchor="t"/>
+          <a:lstStyle/>
+          <a:p>
+            <a:pPr indent="0" marL="0">
+              <a:buNone/>
+            </a:pPr>
+            <a:r>
+              <a:rPr lang="en-US" sz="1200" dirty="0">
+                <a:solidFill>
+                  <a:srgbClr val="5B6577"/>
+                </a:solidFill>
+                <a:latin typeface="Calibri" pitchFamily="34" charset="0"/>
+                <a:ea typeface="Calibri" pitchFamily="34" charset="-122"/>
+                <a:cs typeface="Calibri" pitchFamily="34" charset="-120"/>
+              </a:rPr>
+              <a:t>No substitutions, confirm-before-charge, self-healing — automation you can trust on revenue.</a:t>
+            </a:r>
+            <a:endParaRPr lang="en-US" sz="1200" dirty="0"/>
+          </a:p>
+        </p:txBody>
+      </p:sp>
+      <p:sp>
+        <p:nvSpPr>
+          <p:cNvPr id="36" name="Text 30"/>
+          <p:cNvSpPr/>
+          <p:nvPr/>
+        </p:nvSpPr>
+        <p:spPr>
+          <a:xfrm>
+            <a:off x="502920" y="6272784"/>
+            <a:ext cx="11185855" cy="228600"/>
+          </a:xfrm>
+          <a:prstGeom prst="rect">
+            <a:avLst/>
+          </a:prstGeom>
+          <a:noFill/>
+          <a:ln/>
+        </p:spPr>
+        <p:txBody>
+          <a:bodyPr wrap="square" lIns="0" tIns="0" rIns="0" bIns="0" rtlCol="0" anchor="ctr"/>
+          <a:lstStyle/>
+          <a:p>
+            <a:pPr indent="0" marL="0">
+              <a:buNone/>
+            </a:pPr>
+            <a:r>
+              <a:rPr lang="en-US" sz="900" i="1" dirty="0">
+                <a:solidFill>
+                  <a:srgbClr val="8A94A6"/>
+                </a:solidFill>
+                <a:latin typeface="Calibri" pitchFamily="34" charset="0"/>
+                <a:ea typeface="Calibri" pitchFamily="34" charset="-122"/>
+                <a:cs typeface="Calibri" pitchFamily="34" charset="-120"/>
+              </a:rPr>
+              <a:t>Benchmarks are illustrative industry ranges, not client results.</a:t>
+            </a:r>
+            <a:endParaRPr lang="en-US" sz="900" dirty="0"/>
+          </a:p>
+        </p:txBody>
+      </p:sp>
+      <p:sp>
+        <p:nvSpPr>
+          <p:cNvPr id="37" name="Text 31"/>
+          <p:cNvSpPr/>
+          <p:nvPr/>
+        </p:nvSpPr>
+        <p:spPr>
+          <a:xfrm>
+            <a:off x="502920" y="6455664"/>
+            <a:ext cx="8229600" cy="274320"/>
+          </a:xfrm>
+          <a:prstGeom prst="rect">
+            <a:avLst/>
+          </a:prstGeom>
+          <a:noFill/>
+          <a:ln/>
+        </p:spPr>
+        <p:txBody>
+          <a:bodyPr wrap="square" lIns="0" tIns="0" rIns="0" bIns="0" rtlCol="0" anchor="ctr"/>
+          <a:lstStyle/>
+          <a:p>
+            <a:pPr indent="0" marL="0">
+              <a:buNone/>
+            </a:pPr>
+            <a:r>
+              <a:rPr lang="en-US" sz="900" dirty="0">
+                <a:solidFill>
+                  <a:srgbClr val="8A94A6"/>
+                </a:solidFill>
+                <a:latin typeface="Calibri" pitchFamily="34" charset="0"/>
+                <a:ea typeface="Calibri" pitchFamily="34" charset="-122"/>
+                <a:cs typeface="Calibri" pitchFamily="34" charset="-120"/>
+              </a:rPr>
+              <a:t>GOOPHER · Unified Conversational Retail Agent on Google Cloud</a:t>
+            </a:r>
+            <a:endParaRPr lang="en-US" sz="900" dirty="0"/>
+          </a:p>
+        </p:txBody>
+      </p:sp>
+      <p:sp>
+        <p:nvSpPr>
+          <p:cNvPr id="38" name="Text 32"/>
+          <p:cNvSpPr/>
+          <p:nvPr/>
+        </p:nvSpPr>
+        <p:spPr>
+          <a:xfrm>
+            <a:off x="11277295" y="6455664"/>
+            <a:ext cx="411480" cy="274320"/>
+          </a:xfrm>
+          <a:prstGeom prst="rect">
+            <a:avLst/>
+          </a:prstGeom>
+          <a:noFill/>
+          <a:ln/>
+        </p:spPr>
+        <p:txBody>
+          <a:bodyPr wrap="square" lIns="0" tIns="0" rIns="0" bIns="0" rtlCol="0" anchor="ctr"/>
+          <a:lstStyle/>
+          <a:p>
+            <a:pPr algn="r" indent="0" marL="0">
+              <a:buNone/>
+            </a:pPr>
+            <a:r>
+              <a:rPr lang="en-US" sz="900" dirty="0">
+                <a:solidFill>
+                  <a:srgbClr val="8A94A6"/>
+                </a:solidFill>
+                <a:latin typeface="Calibri" pitchFamily="34" charset="0"/>
+                <a:ea typeface="Calibri" pitchFamily="34" charset="-122"/>
+                <a:cs typeface="Calibri" pitchFamily="34" charset="-120"/>
+              </a:rPr>
+              <a:t>13</a:t>
+            </a:r>
+            <a:endParaRPr lang="en-US" sz="900" dirty="0"/>
+          </a:p>
+        </p:txBody>
+      </p:sp>
+    </p:spTree>
+  </p:cSld>
+  <p:clrMapOvr>
+    <a:masterClrMapping/>
+  </p:clrMapOvr>
+  <p:transition spd="med">
+    <p:fade/>
+  </p:transition>
+</p:sld>
+</file>
+
+<file path=ppt/slides/slide14.xml><?xml version="1.0" encoding="utf-8"?>
+<p:sld xmlns:a="http://schemas.openxmlformats.org/drawingml/2006/main" xmlns:r="http://schemas.openxmlformats.org/officeDocument/2006/relationships" xmlns:p="http://schemas.openxmlformats.org/presentationml/2006/main">
+  <p:cSld name="Slide 14">
+    <p:bg>
+      <p:bgPr>
+        <a:solidFill>
+          <a:srgbClr val="FFFFFF"/>
+        </a:solidFill>
+      </p:bgPr>
+    </p:bg>
+    <p:spTree>
+      <p:nvGrpSpPr>
+        <p:cNvPr id="1" name=""/>
+        <p:cNvGrpSpPr/>
+        <p:nvPr/>
+      </p:nvGrpSpPr>
+      <p:grpSpPr>
+        <a:xfrm>
+          <a:off x="0" y="0"/>
+          <a:ext cx="0" cy="0"/>
+          <a:chOff x="0" y="0"/>
+          <a:chExt cx="0" cy="0"/>
+        </a:xfrm>
+      </p:grpSpPr>
+      <p:sp>
+        <p:nvSpPr>
+          <p:cNvPr id="2" name="Text 0"/>
+          <p:cNvSpPr/>
+          <p:nvPr/>
+        </p:nvSpPr>
+        <p:spPr>
+          <a:xfrm>
+            <a:off x="502920" y="457200"/>
+            <a:ext cx="11185855" cy="274320"/>
+          </a:xfrm>
+          <a:prstGeom prst="rect">
+            <a:avLst/>
+          </a:prstGeom>
+          <a:noFill/>
+          <a:ln/>
+        </p:spPr>
+        <p:txBody>
+          <a:bodyPr wrap="square" lIns="0" tIns="0" rIns="0" bIns="0" rtlCol="0" anchor="ctr"/>
+          <a:lstStyle/>
+          <a:p>
+            <a:pPr indent="0" marL="0">
+              <a:buNone/>
+            </a:pPr>
+            <a:r>
+              <a:rPr lang="en-US" sz="1200" b="1" spc="300" kern="0" dirty="0">
+                <a:solidFill>
+                  <a:srgbClr val="2563EB"/>
+                </a:solidFill>
+                <a:latin typeface="Calibri" pitchFamily="34" charset="0"/>
+                <a:ea typeface="Calibri" pitchFamily="34" charset="-122"/>
+                <a:cs typeface="Calibri" pitchFamily="34" charset="-120"/>
+              </a:rPr>
+              <a:t>WHY GOOGLE CLOUD IS THE RIGHT PLATFORM</a:t>
+            </a:r>
+            <a:endParaRPr lang="en-US" sz="1200" dirty="0"/>
+          </a:p>
+        </p:txBody>
+      </p:sp>
+      <p:sp>
+        <p:nvSpPr>
+          <p:cNvPr id="3" name="Text 1"/>
+          <p:cNvSpPr/>
+          <p:nvPr/>
+        </p:nvSpPr>
+        <p:spPr>
+          <a:xfrm>
+            <a:off x="502920" y="749808"/>
+            <a:ext cx="11185855" cy="914400"/>
+          </a:xfrm>
+          <a:prstGeom prst="rect">
+            <a:avLst/>
+          </a:prstGeom>
+          <a:noFill/>
+          <a:ln/>
+        </p:spPr>
+        <p:txBody>
+          <a:bodyPr wrap="square" lIns="0" tIns="0" rIns="0" bIns="0" rtlCol="0" anchor="t"/>
+          <a:lstStyle/>
+          <a:p>
+            <a:pPr indent="0" marL="0">
+              <a:buNone/>
+            </a:pPr>
+            <a:r>
+              <a:rPr lang="en-US" sz="2800" b="1" dirty="0">
+                <a:solidFill>
+                  <a:srgbClr val="0F172A"/>
+                </a:solidFill>
+                <a:latin typeface="Georgia" pitchFamily="34" charset="0"/>
+                <a:ea typeface="Georgia" pitchFamily="34" charset="-122"/>
+                <a:cs typeface="Georgia" pitchFamily="34" charset="-120"/>
+              </a:rPr>
+              <a:t>The architecture maps cleanly to Google Cloud strengths</a:t>
+            </a:r>
+            <a:endParaRPr lang="en-US" sz="2800" dirty="0"/>
+          </a:p>
+        </p:txBody>
+      </p:sp>
+      <p:sp>
+        <p:nvSpPr>
+          <p:cNvPr id="4" name="Shape 2"/>
+          <p:cNvSpPr/>
+          <p:nvPr/>
+        </p:nvSpPr>
+        <p:spPr>
+          <a:xfrm>
+            <a:off x="502920" y="1783080"/>
+            <a:ext cx="3545738" cy="1783080"/>
+          </a:xfrm>
+          <a:prstGeom prst="roundRect">
+            <a:avLst>
+              <a:gd name="adj" fmla="val 4615"/>
+            </a:avLst>
+          </a:prstGeom>
+          <a:solidFill>
+            <a:srgbClr val="FFFFFF"/>
+          </a:solidFill>
+          <a:ln w="12700">
+            <a:solidFill>
+              <a:srgbClr val="E6E8F0"/>
+            </a:solidFill>
+            <a:prstDash val="solid"/>
+          </a:ln>
+          <a:effectLst>
+            <a:outerShdw sx="100000" sy="100000" kx="0" ky="0" algn="bl" rotWithShape="0" blurRad="114300" dist="38100" dir="8100000">
+              <a:srgbClr val="0F172A">
+                <a:alpha val="16000"/>
+              </a:srgbClr>
+            </a:outerShdw>
+          </a:effectLst>
+        </p:spPr>
+      </p:sp>
+      <p:sp>
+        <p:nvSpPr>
+          <p:cNvPr id="5" name="Shape 3"/>
+          <p:cNvSpPr/>
+          <p:nvPr/>
+        </p:nvSpPr>
+        <p:spPr>
+          <a:xfrm>
+            <a:off x="740664" y="2002536"/>
+            <a:ext cx="566928" cy="566928"/>
+          </a:xfrm>
+          <a:prstGeom prst="roundRect">
+            <a:avLst>
+              <a:gd name="adj" fmla="val 19355"/>
+            </a:avLst>
+          </a:prstGeom>
+          <a:solidFill>
+            <a:srgbClr val="7C3AED"/>
+          </a:solidFill>
+          <a:ln/>
+        </p:spPr>
+      </p:sp>
+      <p:pic>
+        <p:nvPicPr>
+          <p:cNvPr id="6" name="Image 0" descr="icons/robot.png">    </p:cNvPr>
+          <p:cNvPicPr>
+            <a:picLocks noChangeAspect="1"/>
+          </p:cNvPicPr>
+          <p:nvPr/>
+        </p:nvPicPr>
+        <p:blipFill>
+          <a:blip r:embed="rId1"/>
+          <a:stretch>
+            <a:fillRect/>
+          </a:stretch>
+        </p:blipFill>
+        <p:spPr>
+          <a:xfrm>
+            <a:off x="877824" y="2139696"/>
+            <a:ext cx="292608" cy="292608"/>
+          </a:xfrm>
+          <a:prstGeom prst="rect">
+            <a:avLst/>
+          </a:prstGeom>
+        </p:spPr>
+      </p:pic>
+      <p:sp>
+        <p:nvSpPr>
+          <p:cNvPr id="7" name="Text 4"/>
+          <p:cNvSpPr/>
+          <p:nvPr/>
+        </p:nvSpPr>
+        <p:spPr>
+          <a:xfrm>
+            <a:off x="1490472" y="1984248"/>
+            <a:ext cx="2357018" cy="603504"/>
+          </a:xfrm>
+          <a:prstGeom prst="rect">
+            <a:avLst/>
+          </a:prstGeom>
+          <a:noFill/>
+          <a:ln/>
+        </p:spPr>
+        <p:txBody>
+          <a:bodyPr wrap="square" lIns="0" tIns="0" rIns="0" bIns="0" rtlCol="0" anchor="ctr"/>
+          <a:lstStyle/>
+          <a:p>
+            <a:pPr indent="0" marL="0">
+              <a:buNone/>
+            </a:pPr>
+            <a:r>
+              <a:rPr lang="en-US" sz="1350" b="1" dirty="0">
+                <a:solidFill>
+                  <a:srgbClr val="0F172A"/>
+                </a:solidFill>
+                <a:latin typeface="Calibri" pitchFamily="34" charset="0"/>
+                <a:ea typeface="Calibri" pitchFamily="34" charset="-122"/>
+                <a:cs typeface="Calibri" pitchFamily="34" charset="-120"/>
+              </a:rPr>
+              <a:t>Vertex AI · Gemini 2.5 Flash</a:t>
+            </a:r>
+            <a:endParaRPr lang="en-US" sz="1350" dirty="0"/>
+          </a:p>
+        </p:txBody>
+      </p:sp>
+      <p:sp>
+        <p:nvSpPr>
+          <p:cNvPr id="8" name="Text 5"/>
+          <p:cNvSpPr/>
+          <p:nvPr/>
+        </p:nvSpPr>
+        <p:spPr>
+          <a:xfrm>
+            <a:off x="758952" y="2679192"/>
+            <a:ext cx="3088538" cy="740664"/>
+          </a:xfrm>
+          <a:prstGeom prst="rect">
+            <a:avLst/>
+          </a:prstGeom>
+          <a:noFill/>
+          <a:ln/>
+        </p:spPr>
+        <p:txBody>
+          <a:bodyPr wrap="square" lIns="0" tIns="0" rIns="0" bIns="0" rtlCol="0" anchor="t"/>
+          <a:lstStyle/>
+          <a:p>
+            <a:pPr marL="152400" indent="-152400">
+              <a:spcAft>
+                <a:spcPts val="500"/>
+              </a:spcAft>
+              <a:buSzPct val="100000"/>
+              <a:buChar char="•"/>
+            </a:pPr>
+            <a:r>
+              <a:rPr lang="en-US" sz="1200" dirty="0">
+                <a:solidFill>
+                  <a:srgbClr val="5B6577"/>
+                </a:solidFill>
+                <a:latin typeface="Calibri" pitchFamily="34" charset="0"/>
+                <a:ea typeface="Calibri" pitchFamily="34" charset="-122"/>
+                <a:cs typeface="Calibri" pitchFamily="34" charset="-120"/>
+              </a:rPr>
+              <a:t>One natively-multimodal model — text, reasoning &amp; vision in a managed, secure, high-quota service.</a:t>
+            </a:r>
+            <a:endParaRPr lang="en-US" sz="1200" dirty="0"/>
+          </a:p>
+        </p:txBody>
+      </p:sp>
+      <p:sp>
+        <p:nvSpPr>
+          <p:cNvPr id="9" name="Shape 6"/>
+          <p:cNvSpPr/>
+          <p:nvPr/>
+        </p:nvSpPr>
+        <p:spPr>
+          <a:xfrm>
+            <a:off x="4322978" y="1783080"/>
+            <a:ext cx="3545738" cy="1783080"/>
+          </a:xfrm>
+          <a:prstGeom prst="roundRect">
+            <a:avLst>
+              <a:gd name="adj" fmla="val 4615"/>
+            </a:avLst>
+          </a:prstGeom>
+          <a:solidFill>
+            <a:srgbClr val="FFFFFF"/>
+          </a:solidFill>
+          <a:ln w="12700">
+            <a:solidFill>
+              <a:srgbClr val="E6E8F0"/>
+            </a:solidFill>
+            <a:prstDash val="solid"/>
+          </a:ln>
+          <a:effectLst>
+            <a:outerShdw sx="100000" sy="100000" kx="0" ky="0" algn="bl" rotWithShape="0" blurRad="114300" dist="38100" dir="8100000">
+              <a:srgbClr val="0F172A">
+                <a:alpha val="16000"/>
+              </a:srgbClr>
+            </a:outerShdw>
+          </a:effectLst>
+        </p:spPr>
+      </p:sp>
+      <p:sp>
+        <p:nvSpPr>
+          <p:cNvPr id="10" name="Shape 7"/>
+          <p:cNvSpPr/>
+          <p:nvPr/>
+        </p:nvSpPr>
+        <p:spPr>
+          <a:xfrm>
+            <a:off x="4560722" y="2002536"/>
+            <a:ext cx="566928" cy="566928"/>
+          </a:xfrm>
+          <a:prstGeom prst="roundRect">
+            <a:avLst>
+              <a:gd name="adj" fmla="val 19355"/>
+            </a:avLst>
+          </a:prstGeom>
+          <a:solidFill>
+            <a:srgbClr val="2563EB"/>
+          </a:solidFill>
+          <a:ln/>
+        </p:spPr>
+      </p:sp>
+      <p:pic>
+        <p:nvPicPr>
+          <p:cNvPr id="11" name="Image 1" descr="icons/sitemap.png">    </p:cNvPr>
+          <p:cNvPicPr>
+            <a:picLocks noChangeAspect="1"/>
+          </p:cNvPicPr>
+          <p:nvPr/>
+        </p:nvPicPr>
+        <p:blipFill>
+          <a:blip r:embed="rId2"/>
+          <a:stretch>
+            <a:fillRect/>
+          </a:stretch>
+        </p:blipFill>
+        <p:spPr>
+          <a:xfrm>
+            <a:off x="4697882" y="2139696"/>
+            <a:ext cx="292608" cy="292608"/>
+          </a:xfrm>
+          <a:prstGeom prst="rect">
+            <a:avLst/>
+          </a:prstGeom>
+        </p:spPr>
+      </p:pic>
+      <p:sp>
+        <p:nvSpPr>
+          <p:cNvPr id="12" name="Text 8"/>
+          <p:cNvSpPr/>
+          <p:nvPr/>
+        </p:nvSpPr>
+        <p:spPr>
+          <a:xfrm>
+            <a:off x="5310530" y="1984248"/>
+            <a:ext cx="2357018" cy="603504"/>
+          </a:xfrm>
+          <a:prstGeom prst="rect">
+            <a:avLst/>
+          </a:prstGeom>
+          <a:noFill/>
+          <a:ln/>
+        </p:spPr>
+        <p:txBody>
+          <a:bodyPr wrap="square" lIns="0" tIns="0" rIns="0" bIns="0" rtlCol="0" anchor="ctr"/>
+          <a:lstStyle/>
+          <a:p>
+            <a:pPr indent="0" marL="0">
+              <a:buNone/>
+            </a:pPr>
+            <a:r>
+              <a:rPr lang="en-US" sz="1350" b="1" dirty="0">
+                <a:solidFill>
+                  <a:srgbClr val="0F172A"/>
+                </a:solidFill>
+                <a:latin typeface="Calibri" pitchFamily="34" charset="0"/>
+                <a:ea typeface="Calibri" pitchFamily="34" charset="-122"/>
+                <a:cs typeface="Calibri" pitchFamily="34" charset="-120"/>
+              </a:rPr>
+              <a:t>Agent Development Kit (ADK)</a:t>
+            </a:r>
+            <a:endParaRPr lang="en-US" sz="1350" dirty="0"/>
+          </a:p>
+        </p:txBody>
+      </p:sp>
+      <p:sp>
+        <p:nvSpPr>
+          <p:cNvPr id="13" name="Text 9"/>
+          <p:cNvSpPr/>
+          <p:nvPr/>
+        </p:nvSpPr>
+        <p:spPr>
+          <a:xfrm>
+            <a:off x="4579010" y="2679192"/>
+            <a:ext cx="3088538" cy="740664"/>
+          </a:xfrm>
+          <a:prstGeom prst="rect">
+            <a:avLst/>
+          </a:prstGeom>
+          <a:noFill/>
+          <a:ln/>
+        </p:spPr>
+        <p:txBody>
+          <a:bodyPr wrap="square" lIns="0" tIns="0" rIns="0" bIns="0" rtlCol="0" anchor="t"/>
+          <a:lstStyle/>
+          <a:p>
+            <a:pPr marL="152400" indent="-152400">
+              <a:spcAft>
+                <a:spcPts val="500"/>
+              </a:spcAft>
+              <a:buSzPct val="100000"/>
+              <a:buChar char="•"/>
+            </a:pPr>
+            <a:r>
+              <a:rPr lang="en-US" sz="1200" dirty="0">
+                <a:solidFill>
+                  <a:srgbClr val="5B6577"/>
+                </a:solidFill>
+                <a:latin typeface="Calibri" pitchFamily="34" charset="0"/>
+                <a:ea typeface="Calibri" pitchFamily="34" charset="-122"/>
+                <a:cs typeface="Calibri" pitchFamily="34" charset="-120"/>
+              </a:rPr>
+              <a:t>First-class multi-agent orchestration, tools &amp; tracing — less glue code, more capability.</a:t>
+            </a:r>
+            <a:endParaRPr lang="en-US" sz="1200" dirty="0"/>
+          </a:p>
+        </p:txBody>
+      </p:sp>
+      <p:sp>
+        <p:nvSpPr>
+          <p:cNvPr id="14" name="Shape 10"/>
+          <p:cNvSpPr/>
+          <p:nvPr/>
+        </p:nvSpPr>
+        <p:spPr>
+          <a:xfrm>
+            <a:off x="8143037" y="1783080"/>
+            <a:ext cx="3545738" cy="1783080"/>
+          </a:xfrm>
+          <a:prstGeom prst="roundRect">
+            <a:avLst>
+              <a:gd name="adj" fmla="val 4615"/>
+            </a:avLst>
+          </a:prstGeom>
+          <a:solidFill>
+            <a:srgbClr val="FFFFFF"/>
+          </a:solidFill>
+          <a:ln w="12700">
+            <a:solidFill>
+              <a:srgbClr val="E6E8F0"/>
+            </a:solidFill>
+            <a:prstDash val="solid"/>
+          </a:ln>
+          <a:effectLst>
+            <a:outerShdw sx="100000" sy="100000" kx="0" ky="0" algn="bl" rotWithShape="0" blurRad="114300" dist="38100" dir="8100000">
+              <a:srgbClr val="0F172A">
+                <a:alpha val="16000"/>
+              </a:srgbClr>
+            </a:outerShdw>
+          </a:effectLst>
+        </p:spPr>
+      </p:sp>
+      <p:sp>
+        <p:nvSpPr>
+          <p:cNvPr id="15" name="Shape 11"/>
+          <p:cNvSpPr/>
+          <p:nvPr/>
+        </p:nvSpPr>
+        <p:spPr>
+          <a:xfrm>
+            <a:off x="8380781" y="2002536"/>
+            <a:ext cx="566928" cy="566928"/>
+          </a:xfrm>
+          <a:prstGeom prst="roundRect">
+            <a:avLst>
+              <a:gd name="adj" fmla="val 19355"/>
+            </a:avLst>
+          </a:prstGeom>
+          <a:solidFill>
+            <a:srgbClr val="F59E0B"/>
+          </a:solidFill>
+          <a:ln/>
+        </p:spPr>
+      </p:sp>
+      <p:pic>
+        <p:nvPicPr>
+          <p:cNvPr id="16" name="Image 2" descr="icons/bolt.png">    </p:cNvPr>
+          <p:cNvPicPr>
+            <a:picLocks noChangeAspect="1"/>
+          </p:cNvPicPr>
+          <p:nvPr/>
+        </p:nvPicPr>
+        <p:blipFill>
+          <a:blip r:embed="rId3"/>
+          <a:stretch>
+            <a:fillRect/>
+          </a:stretch>
+        </p:blipFill>
+        <p:spPr>
+          <a:xfrm>
+            <a:off x="8517941" y="2139696"/>
+            <a:ext cx="292608" cy="292608"/>
+          </a:xfrm>
+          <a:prstGeom prst="rect">
+            <a:avLst/>
+          </a:prstGeom>
+        </p:spPr>
+      </p:pic>
+      <p:sp>
+        <p:nvSpPr>
+          <p:cNvPr id="17" name="Text 12"/>
+          <p:cNvSpPr/>
+          <p:nvPr/>
+        </p:nvSpPr>
+        <p:spPr>
+          <a:xfrm>
+            <a:off x="9130589" y="1984248"/>
+            <a:ext cx="2357018" cy="603504"/>
+          </a:xfrm>
+          <a:prstGeom prst="rect">
+            <a:avLst/>
+          </a:prstGeom>
+          <a:noFill/>
+          <a:ln/>
+        </p:spPr>
+        <p:txBody>
+          <a:bodyPr wrap="square" lIns="0" tIns="0" rIns="0" bIns="0" rtlCol="0" anchor="ctr"/>
+          <a:lstStyle/>
+          <a:p>
+            <a:pPr indent="0" marL="0">
+              <a:buNone/>
+            </a:pPr>
+            <a:r>
+              <a:rPr lang="en-US" sz="1350" b="1" dirty="0">
+                <a:solidFill>
+                  <a:srgbClr val="0F172A"/>
+                </a:solidFill>
+                <a:latin typeface="Calibri" pitchFamily="34" charset="0"/>
+                <a:ea typeface="Calibri" pitchFamily="34" charset="-122"/>
+                <a:cs typeface="Calibri" pitchFamily="34" charset="-120"/>
+              </a:rPr>
+              <a:t>Cloud Run</a:t>
+            </a:r>
+            <a:endParaRPr lang="en-US" sz="1350" dirty="0"/>
+          </a:p>
+        </p:txBody>
+      </p:sp>
+      <p:sp>
+        <p:nvSpPr>
+          <p:cNvPr id="18" name="Text 13"/>
+          <p:cNvSpPr/>
+          <p:nvPr/>
+        </p:nvSpPr>
+        <p:spPr>
+          <a:xfrm>
+            <a:off x="8399069" y="2679192"/>
+            <a:ext cx="3088538" cy="740664"/>
+          </a:xfrm>
+          <a:prstGeom prst="rect">
+            <a:avLst/>
+          </a:prstGeom>
+          <a:noFill/>
+          <a:ln/>
+        </p:spPr>
+        <p:txBody>
+          <a:bodyPr wrap="square" lIns="0" tIns="0" rIns="0" bIns="0" rtlCol="0" anchor="t"/>
+          <a:lstStyle/>
+          <a:p>
+            <a:pPr marL="152400" indent="-152400">
+              <a:spcAft>
+                <a:spcPts val="500"/>
+              </a:spcAft>
+              <a:buSzPct val="100000"/>
+              <a:buChar char="•"/>
+            </a:pPr>
+            <a:r>
+              <a:rPr lang="en-US" sz="1200" dirty="0">
+                <a:solidFill>
+                  <a:srgbClr val="5B6577"/>
+                </a:solidFill>
+                <a:latin typeface="Calibri" pitchFamily="34" charset="0"/>
+                <a:ea typeface="Calibri" pitchFamily="34" charset="-122"/>
+                <a:cs typeface="Calibri" pitchFamily="34" charset="-120"/>
+              </a:rPr>
+              <a:t>Serverless, scales to zero, container-native — pay only for live conversations.</a:t>
+            </a:r>
+            <a:endParaRPr lang="en-US" sz="1200" dirty="0"/>
+          </a:p>
+        </p:txBody>
+      </p:sp>
+      <p:sp>
+        <p:nvSpPr>
+          <p:cNvPr id="19" name="Shape 14"/>
+          <p:cNvSpPr/>
+          <p:nvPr/>
+        </p:nvSpPr>
+        <p:spPr>
+          <a:xfrm>
+            <a:off x="502920" y="3794760"/>
+            <a:ext cx="3545738" cy="1783080"/>
+          </a:xfrm>
+          <a:prstGeom prst="roundRect">
+            <a:avLst>
+              <a:gd name="adj" fmla="val 4615"/>
+            </a:avLst>
+          </a:prstGeom>
+          <a:solidFill>
+            <a:srgbClr val="FFFFFF"/>
+          </a:solidFill>
+          <a:ln w="12700">
+            <a:solidFill>
+              <a:srgbClr val="E6E8F0"/>
+            </a:solidFill>
+            <a:prstDash val="solid"/>
+          </a:ln>
+          <a:effectLst>
+            <a:outerShdw sx="100000" sy="100000" kx="0" ky="0" algn="bl" rotWithShape="0" blurRad="114300" dist="38100" dir="8100000">
+              <a:srgbClr val="0F172A">
+                <a:alpha val="16000"/>
+              </a:srgbClr>
+            </a:outerShdw>
+          </a:effectLst>
+        </p:spPr>
+      </p:sp>
+      <p:sp>
+        <p:nvSpPr>
+          <p:cNvPr id="20" name="Shape 15"/>
+          <p:cNvSpPr/>
+          <p:nvPr/>
+        </p:nvSpPr>
+        <p:spPr>
+          <a:xfrm>
+            <a:off x="740664" y="4014216"/>
+            <a:ext cx="566928" cy="566928"/>
+          </a:xfrm>
+          <a:prstGeom prst="roundRect">
+            <a:avLst>
+              <a:gd name="adj" fmla="val 19355"/>
+            </a:avLst>
+          </a:prstGeom>
+          <a:solidFill>
+            <a:srgbClr val="0D9488"/>
+          </a:solidFill>
+          <a:ln/>
+        </p:spPr>
+      </p:sp>
+      <p:pic>
+        <p:nvPicPr>
+          <p:cNvPr id="21" name="Image 3" descr="icons/db.png">    </p:cNvPr>
+          <p:cNvPicPr>
+            <a:picLocks noChangeAspect="1"/>
+          </p:cNvPicPr>
+          <p:nvPr/>
+        </p:nvPicPr>
+        <p:blipFill>
+          <a:blip r:embed="rId4"/>
+          <a:stretch>
+            <a:fillRect/>
+          </a:stretch>
+        </p:blipFill>
+        <p:spPr>
+          <a:xfrm>
+            <a:off x="877824" y="4151376"/>
+            <a:ext cx="292608" cy="292608"/>
+          </a:xfrm>
+          <a:prstGeom prst="rect">
+            <a:avLst/>
+          </a:prstGeom>
+        </p:spPr>
+      </p:pic>
+      <p:sp>
+        <p:nvSpPr>
+          <p:cNvPr id="22" name="Text 16"/>
+          <p:cNvSpPr/>
+          <p:nvPr/>
+        </p:nvSpPr>
+        <p:spPr>
+          <a:xfrm>
+            <a:off x="1490472" y="3995928"/>
+            <a:ext cx="2357018" cy="603504"/>
+          </a:xfrm>
+          <a:prstGeom prst="rect">
+            <a:avLst/>
+          </a:prstGeom>
+          <a:noFill/>
+          <a:ln/>
+        </p:spPr>
+        <p:txBody>
+          <a:bodyPr wrap="square" lIns="0" tIns="0" rIns="0" bIns="0" rtlCol="0" anchor="ctr"/>
+          <a:lstStyle/>
+          <a:p>
+            <a:pPr indent="0" marL="0">
+              <a:buNone/>
+            </a:pPr>
+            <a:r>
+              <a:rPr lang="en-US" sz="1350" b="1" dirty="0">
+                <a:solidFill>
+                  <a:srgbClr val="0F172A"/>
+                </a:solidFill>
+                <a:latin typeface="Calibri" pitchFamily="34" charset="0"/>
+                <a:ea typeface="Calibri" pitchFamily="34" charset="-122"/>
+                <a:cs typeface="Calibri" pitchFamily="34" charset="-120"/>
+              </a:rPr>
+              <a:t>Firestore</a:t>
+            </a:r>
+            <a:endParaRPr lang="en-US" sz="1350" dirty="0"/>
+          </a:p>
+        </p:txBody>
+      </p:sp>
+      <p:sp>
+        <p:nvSpPr>
+          <p:cNvPr id="23" name="Text 17"/>
+          <p:cNvSpPr/>
+          <p:nvPr/>
+        </p:nvSpPr>
+        <p:spPr>
+          <a:xfrm>
+            <a:off x="758952" y="4690872"/>
+            <a:ext cx="3088538" cy="740664"/>
+          </a:xfrm>
+          <a:prstGeom prst="rect">
+            <a:avLst/>
+          </a:prstGeom>
+          <a:noFill/>
+          <a:ln/>
+        </p:spPr>
+        <p:txBody>
+          <a:bodyPr wrap="square" lIns="0" tIns="0" rIns="0" bIns="0" rtlCol="0" anchor="t"/>
+          <a:lstStyle/>
+          <a:p>
+            <a:pPr marL="152400" indent="-152400">
+              <a:spcAft>
+                <a:spcPts val="500"/>
+              </a:spcAft>
+              <a:buSzPct val="100000"/>
+              <a:buChar char="•"/>
+            </a:pPr>
+            <a:r>
+              <a:rPr lang="en-US" sz="1200" dirty="0">
+                <a:solidFill>
+                  <a:srgbClr val="5B6577"/>
+                </a:solidFill>
+                <a:latin typeface="Calibri" pitchFamily="34" charset="0"/>
+                <a:ea typeface="Calibri" pitchFamily="34" charset="-122"/>
+                <a:cs typeface="Calibri" pitchFamily="34" charset="-120"/>
+              </a:rPr>
+              <a:t>Durable, shared session state across instances — context survives autoscaling.</a:t>
+            </a:r>
+            <a:endParaRPr lang="en-US" sz="1200" dirty="0"/>
+          </a:p>
+        </p:txBody>
+      </p:sp>
+      <p:sp>
+        <p:nvSpPr>
+          <p:cNvPr id="24" name="Shape 18"/>
+          <p:cNvSpPr/>
+          <p:nvPr/>
+        </p:nvSpPr>
+        <p:spPr>
+          <a:xfrm>
+            <a:off x="4322978" y="3794760"/>
+            <a:ext cx="3545738" cy="1783080"/>
+          </a:xfrm>
+          <a:prstGeom prst="roundRect">
+            <a:avLst>
+              <a:gd name="adj" fmla="val 4615"/>
+            </a:avLst>
+          </a:prstGeom>
+          <a:solidFill>
+            <a:srgbClr val="FFFFFF"/>
+          </a:solidFill>
+          <a:ln w="12700">
+            <a:solidFill>
+              <a:srgbClr val="E6E8F0"/>
+            </a:solidFill>
+            <a:prstDash val="solid"/>
+          </a:ln>
+          <a:effectLst>
+            <a:outerShdw sx="100000" sy="100000" kx="0" ky="0" algn="bl" rotWithShape="0" blurRad="114300" dist="38100" dir="8100000">
+              <a:srgbClr val="0F172A">
+                <a:alpha val="16000"/>
+              </a:srgbClr>
+            </a:outerShdw>
+          </a:effectLst>
+        </p:spPr>
+      </p:sp>
+      <p:sp>
+        <p:nvSpPr>
+          <p:cNvPr id="25" name="Shape 19"/>
+          <p:cNvSpPr/>
+          <p:nvPr/>
+        </p:nvSpPr>
+        <p:spPr>
+          <a:xfrm>
+            <a:off x="4560722" y="4014216"/>
+            <a:ext cx="566928" cy="566928"/>
+          </a:xfrm>
+          <a:prstGeom prst="roundRect">
+            <a:avLst>
+              <a:gd name="adj" fmla="val 19355"/>
+            </a:avLst>
+          </a:prstGeom>
+          <a:solidFill>
+            <a:srgbClr val="E11D48"/>
+          </a:solidFill>
+          <a:ln/>
+        </p:spPr>
+      </p:sp>
+      <p:pic>
+        <p:nvPicPr>
+          <p:cNvPr id="26" name="Image 4" descr="icons/eye.png">    </p:cNvPr>
+          <p:cNvPicPr>
+            <a:picLocks noChangeAspect="1"/>
+          </p:cNvPicPr>
+          <p:nvPr/>
+        </p:nvPicPr>
+        <p:blipFill>
+          <a:blip r:embed="rId5"/>
+          <a:stretch>
+            <a:fillRect/>
+          </a:stretch>
+        </p:blipFill>
+        <p:spPr>
+          <a:xfrm>
+            <a:off x="4697882" y="4151376"/>
+            <a:ext cx="292608" cy="292608"/>
+          </a:xfrm>
+          <a:prstGeom prst="rect">
+            <a:avLst/>
+          </a:prstGeom>
+        </p:spPr>
+      </p:pic>
+      <p:sp>
+        <p:nvSpPr>
+          <p:cNvPr id="27" name="Text 20"/>
+          <p:cNvSpPr/>
+          <p:nvPr/>
+        </p:nvSpPr>
+        <p:spPr>
+          <a:xfrm>
+            <a:off x="5310530" y="3995928"/>
+            <a:ext cx="2357018" cy="603504"/>
+          </a:xfrm>
+          <a:prstGeom prst="rect">
+            <a:avLst/>
+          </a:prstGeom>
+          <a:noFill/>
+          <a:ln/>
+        </p:spPr>
+        <p:txBody>
+          <a:bodyPr wrap="square" lIns="0" tIns="0" rIns="0" bIns="0" rtlCol="0" anchor="ctr"/>
+          <a:lstStyle/>
+          <a:p>
+            <a:pPr indent="0" marL="0">
+              <a:buNone/>
+            </a:pPr>
+            <a:r>
+              <a:rPr lang="en-US" sz="1350" b="1" dirty="0">
+                <a:solidFill>
+                  <a:srgbClr val="0F172A"/>
+                </a:solidFill>
+                <a:latin typeface="Calibri" pitchFamily="34" charset="0"/>
+                <a:ea typeface="Calibri" pitchFamily="34" charset="-122"/>
+                <a:cs typeface="Calibri" pitchFamily="34" charset="-120"/>
+              </a:rPr>
+              <a:t>Cloud Trace &amp; Logging</a:t>
+            </a:r>
+            <a:endParaRPr lang="en-US" sz="1350" dirty="0"/>
+          </a:p>
+        </p:txBody>
+      </p:sp>
+      <p:sp>
+        <p:nvSpPr>
+          <p:cNvPr id="28" name="Text 21"/>
+          <p:cNvSpPr/>
+          <p:nvPr/>
+        </p:nvSpPr>
+        <p:spPr>
+          <a:xfrm>
+            <a:off x="4579010" y="4690872"/>
+            <a:ext cx="3088538" cy="740664"/>
+          </a:xfrm>
+          <a:prstGeom prst="rect">
+            <a:avLst/>
+          </a:prstGeom>
+          <a:noFill/>
+          <a:ln/>
+        </p:spPr>
+        <p:txBody>
+          <a:bodyPr wrap="square" lIns="0" tIns="0" rIns="0" bIns="0" rtlCol="0" anchor="t"/>
+          <a:lstStyle/>
+          <a:p>
+            <a:pPr marL="152400" indent="-152400">
+              <a:spcAft>
+                <a:spcPts val="500"/>
+              </a:spcAft>
+              <a:buSzPct val="100000"/>
+              <a:buChar char="•"/>
+            </a:pPr>
+            <a:r>
+              <a:rPr lang="en-US" sz="1200" dirty="0">
+                <a:solidFill>
+                  <a:srgbClr val="5B6577"/>
+                </a:solidFill>
+                <a:latin typeface="Calibri" pitchFamily="34" charset="0"/>
+                <a:ea typeface="Calibri" pitchFamily="34" charset="-122"/>
+                <a:cs typeface="Calibri" pitchFamily="34" charset="-120"/>
+              </a:rPr>
+              <a:t>Every agent/tool is a span — pinpoint the failing node in a multi-agent turn.</a:t>
+            </a:r>
+            <a:endParaRPr lang="en-US" sz="1200" dirty="0"/>
+          </a:p>
+        </p:txBody>
+      </p:sp>
+      <p:sp>
+        <p:nvSpPr>
+          <p:cNvPr id="29" name="Shape 22"/>
+          <p:cNvSpPr/>
+          <p:nvPr/>
+        </p:nvSpPr>
+        <p:spPr>
+          <a:xfrm>
+            <a:off x="8143037" y="3794760"/>
+            <a:ext cx="3545738" cy="1783080"/>
+          </a:xfrm>
+          <a:prstGeom prst="roundRect">
+            <a:avLst>
+              <a:gd name="adj" fmla="val 4615"/>
+            </a:avLst>
+          </a:prstGeom>
+          <a:solidFill>
+            <a:srgbClr val="FFFFFF"/>
+          </a:solidFill>
+          <a:ln w="12700">
+            <a:solidFill>
+              <a:srgbClr val="E6E8F0"/>
+            </a:solidFill>
+            <a:prstDash val="solid"/>
+          </a:ln>
+          <a:effectLst>
+            <a:outerShdw sx="100000" sy="100000" kx="0" ky="0" algn="bl" rotWithShape="0" blurRad="114300" dist="38100" dir="8100000">
+              <a:srgbClr val="0F172A">
+                <a:alpha val="16000"/>
+              </a:srgbClr>
+            </a:outerShdw>
+          </a:effectLst>
+        </p:spPr>
+      </p:sp>
+      <p:sp>
+        <p:nvSpPr>
+          <p:cNvPr id="30" name="Shape 23"/>
+          <p:cNvSpPr/>
+          <p:nvPr/>
+        </p:nvSpPr>
+        <p:spPr>
+          <a:xfrm>
+            <a:off x="8380781" y="4014216"/>
+            <a:ext cx="566928" cy="566928"/>
+          </a:xfrm>
+          <a:prstGeom prst="roundRect">
+            <a:avLst>
+              <a:gd name="adj" fmla="val 19355"/>
+            </a:avLst>
+          </a:prstGeom>
+          <a:solidFill>
+            <a:srgbClr val="0D9488"/>
+          </a:solidFill>
+          <a:ln/>
+        </p:spPr>
+      </p:sp>
+      <p:pic>
+        <p:nvPicPr>
+          <p:cNvPr id="31" name="Image 5" descr="icons/plug.png">    </p:cNvPr>
+          <p:cNvPicPr>
+            <a:picLocks noChangeAspect="1"/>
+          </p:cNvPicPr>
+          <p:nvPr/>
+        </p:nvPicPr>
+        <p:blipFill>
+          <a:blip r:embed="rId6"/>
+          <a:stretch>
+            <a:fillRect/>
+          </a:stretch>
+        </p:blipFill>
+        <p:spPr>
+          <a:xfrm>
+            <a:off x="8517941" y="4151376"/>
+            <a:ext cx="292608" cy="292608"/>
+          </a:xfrm>
+          <a:prstGeom prst="rect">
+            <a:avLst/>
+          </a:prstGeom>
+        </p:spPr>
+      </p:pic>
+      <p:sp>
+        <p:nvSpPr>
+          <p:cNvPr id="32" name="Text 24"/>
+          <p:cNvSpPr/>
+          <p:nvPr/>
+        </p:nvSpPr>
+        <p:spPr>
+          <a:xfrm>
+            <a:off x="9130589" y="3995928"/>
+            <a:ext cx="2357018" cy="603504"/>
+          </a:xfrm>
+          <a:prstGeom prst="rect">
+            <a:avLst/>
+          </a:prstGeom>
+          <a:noFill/>
+          <a:ln/>
+        </p:spPr>
+        <p:txBody>
+          <a:bodyPr wrap="square" lIns="0" tIns="0" rIns="0" bIns="0" rtlCol="0" anchor="ctr"/>
+          <a:lstStyle/>
+          <a:p>
+            <a:pPr indent="0" marL="0">
+              <a:buNone/>
+            </a:pPr>
+            <a:r>
+              <a:rPr lang="en-US" sz="1350" b="1" dirty="0">
+                <a:solidFill>
+                  <a:srgbClr val="0F172A"/>
+                </a:solidFill>
+                <a:latin typeface="Calibri" pitchFamily="34" charset="0"/>
+                <a:ea typeface="Calibri" pitchFamily="34" charset="-122"/>
+                <a:cs typeface="Calibri" pitchFamily="34" charset="-120"/>
+              </a:rPr>
+              <a:t>Extensible to CCAI / Translation</a:t>
+            </a:r>
+            <a:endParaRPr lang="en-US" sz="1350" dirty="0"/>
+          </a:p>
+        </p:txBody>
+      </p:sp>
+      <p:sp>
+        <p:nvSpPr>
+          <p:cNvPr id="33" name="Text 25"/>
+          <p:cNvSpPr/>
+          <p:nvPr/>
+        </p:nvSpPr>
+        <p:spPr>
+          <a:xfrm>
+            <a:off x="8399069" y="4690872"/>
+            <a:ext cx="3088538" cy="740664"/>
+          </a:xfrm>
+          <a:prstGeom prst="rect">
+            <a:avLst/>
+          </a:prstGeom>
+          <a:noFill/>
+          <a:ln/>
+        </p:spPr>
+        <p:txBody>
+          <a:bodyPr wrap="square" lIns="0" tIns="0" rIns="0" bIns="0" rtlCol="0" anchor="t"/>
+          <a:lstStyle/>
+          <a:p>
+            <a:pPr marL="152400" indent="-152400">
+              <a:spcAft>
+                <a:spcPts val="500"/>
+              </a:spcAft>
+              <a:buSzPct val="100000"/>
+              <a:buChar char="•"/>
+            </a:pPr>
+            <a:r>
+              <a:rPr lang="en-US" sz="1200" dirty="0">
+                <a:solidFill>
+                  <a:srgbClr val="5B6577"/>
+                </a:solidFill>
+                <a:latin typeface="Calibri" pitchFamily="34" charset="0"/>
+                <a:ea typeface="Calibri" pitchFamily="34" charset="-122"/>
+                <a:cs typeface="Calibri" pitchFamily="34" charset="-120"/>
+              </a:rPr>
+              <a:t>Clear path to true telephony, agent-assist, and long-tail languages.</a:t>
+            </a:r>
+            <a:endParaRPr lang="en-US" sz="1200" dirty="0"/>
+          </a:p>
+        </p:txBody>
+      </p:sp>
+      <p:sp>
+        <p:nvSpPr>
+          <p:cNvPr id="34" name="Text 26"/>
+          <p:cNvSpPr/>
+          <p:nvPr/>
+        </p:nvSpPr>
+        <p:spPr>
+          <a:xfrm>
+            <a:off x="502920" y="6455664"/>
+            <a:ext cx="8229600" cy="274320"/>
+          </a:xfrm>
+          <a:prstGeom prst="rect">
+            <a:avLst/>
+          </a:prstGeom>
+          <a:noFill/>
+          <a:ln/>
+        </p:spPr>
+        <p:txBody>
+          <a:bodyPr wrap="square" lIns="0" tIns="0" rIns="0" bIns="0" rtlCol="0" anchor="ctr"/>
+          <a:lstStyle/>
+          <a:p>
+            <a:pPr indent="0" marL="0">
+              <a:buNone/>
+            </a:pPr>
+            <a:r>
+              <a:rPr lang="en-US" sz="900" dirty="0">
+                <a:solidFill>
+                  <a:srgbClr val="8A94A6"/>
+                </a:solidFill>
+                <a:latin typeface="Calibri" pitchFamily="34" charset="0"/>
+                <a:ea typeface="Calibri" pitchFamily="34" charset="-122"/>
+                <a:cs typeface="Calibri" pitchFamily="34" charset="-120"/>
+              </a:rPr>
+              <a:t>GOOPHER · Unified Conversational Retail Agent on Google Cloud</a:t>
+            </a:r>
+            <a:endParaRPr lang="en-US" sz="900" dirty="0"/>
+          </a:p>
+        </p:txBody>
+      </p:sp>
+      <p:sp>
+        <p:nvSpPr>
+          <p:cNvPr id="35" name="Text 27"/>
+          <p:cNvSpPr/>
+          <p:nvPr/>
+        </p:nvSpPr>
+        <p:spPr>
+          <a:xfrm>
+            <a:off x="11277295" y="6455664"/>
+            <a:ext cx="411480" cy="274320"/>
+          </a:xfrm>
+          <a:prstGeom prst="rect">
+            <a:avLst/>
+          </a:prstGeom>
+          <a:noFill/>
+          <a:ln/>
+        </p:spPr>
+        <p:txBody>
+          <a:bodyPr wrap="square" lIns="0" tIns="0" rIns="0" bIns="0" rtlCol="0" anchor="ctr"/>
+          <a:lstStyle/>
+          <a:p>
+            <a:pPr algn="r" indent="0" marL="0">
+              <a:buNone/>
+            </a:pPr>
+            <a:r>
+              <a:rPr lang="en-US" sz="900" dirty="0">
+                <a:solidFill>
+                  <a:srgbClr val="8A94A6"/>
+                </a:solidFill>
+                <a:latin typeface="Calibri" pitchFamily="34" charset="0"/>
+                <a:ea typeface="Calibri" pitchFamily="34" charset="-122"/>
+                <a:cs typeface="Calibri" pitchFamily="34" charset="-120"/>
+              </a:rPr>
+              <a:t>14</a:t>
+            </a:r>
+            <a:endParaRPr lang="en-US" sz="900" dirty="0"/>
+          </a:p>
+        </p:txBody>
+      </p:sp>
+    </p:spTree>
+  </p:cSld>
+  <p:clrMapOvr>
+    <a:masterClrMapping/>
+  </p:clrMapOvr>
+  <p:transition spd="med">
+    <p:fade/>
+  </p:transition>
+</p:sld>
+</file>
+
+<file path=ppt/slides/slide15.xml><?xml version="1.0" encoding="utf-8"?>
+<p:sld xmlns:a="http://schemas.openxmlformats.org/drawingml/2006/main" xmlns:r="http://schemas.openxmlformats.org/officeDocument/2006/relationships" xmlns:p="http://schemas.openxmlformats.org/presentationml/2006/main">
+  <p:cSld name="Slide 15">
+    <p:bg>
+      <p:bgPr>
+        <a:solidFill>
+          <a:srgbClr val="FFFFFF"/>
+        </a:solidFill>
+      </p:bgPr>
+    </p:bg>
+    <p:spTree>
+      <p:nvGrpSpPr>
+        <p:cNvPr id="1" name=""/>
+        <p:cNvGrpSpPr/>
+        <p:nvPr/>
+      </p:nvGrpSpPr>
+      <p:grpSpPr>
+        <a:xfrm>
+          <a:off x="0" y="0"/>
+          <a:ext cx="0" cy="0"/>
+          <a:chOff x="0" y="0"/>
+          <a:chExt cx="0" cy="0"/>
+        </a:xfrm>
+      </p:grpSpPr>
+      <p:sp>
+        <p:nvSpPr>
+          <p:cNvPr id="2" name="Text 0"/>
+          <p:cNvSpPr/>
+          <p:nvPr/>
+        </p:nvSpPr>
+        <p:spPr>
+          <a:xfrm>
+            <a:off x="502920" y="457200"/>
+            <a:ext cx="11185855" cy="274320"/>
+          </a:xfrm>
+          <a:prstGeom prst="rect">
+            <a:avLst/>
+          </a:prstGeom>
+          <a:noFill/>
+          <a:ln/>
+        </p:spPr>
+        <p:txBody>
+          <a:bodyPr wrap="square" lIns="0" tIns="0" rIns="0" bIns="0" rtlCol="0" anchor="ctr"/>
+          <a:lstStyle/>
+          <a:p>
+            <a:pPr indent="0" marL="0">
+              <a:buNone/>
+            </a:pPr>
+            <a:r>
+              <a:rPr lang="en-US" sz="1200" b="1" spc="300" kern="0" dirty="0">
+                <a:solidFill>
+                  <a:srgbClr val="7C3AED"/>
+                </a:solidFill>
+                <a:latin typeface="Calibri" pitchFamily="34" charset="0"/>
+                <a:ea typeface="Calibri" pitchFamily="34" charset="-122"/>
+                <a:cs typeface="Calibri" pitchFamily="34" charset="-120"/>
+              </a:rPr>
+              <a:t>WHAT I'D CARRY INTO THE NEXT BUILD</a:t>
+            </a:r>
+            <a:endParaRPr lang="en-US" sz="1200" dirty="0"/>
+          </a:p>
+        </p:txBody>
+      </p:sp>
+      <p:sp>
+        <p:nvSpPr>
+          <p:cNvPr id="3" name="Text 1"/>
+          <p:cNvSpPr/>
+          <p:nvPr/>
+        </p:nvSpPr>
+        <p:spPr>
+          <a:xfrm>
+            <a:off x="502920" y="749808"/>
+            <a:ext cx="11185855" cy="914400"/>
+          </a:xfrm>
+          <a:prstGeom prst="rect">
+            <a:avLst/>
+          </a:prstGeom>
+          <a:noFill/>
+          <a:ln/>
+        </p:spPr>
+        <p:txBody>
+          <a:bodyPr wrap="square" lIns="0" tIns="0" rIns="0" bIns="0" rtlCol="0" anchor="t"/>
+          <a:lstStyle/>
+          <a:p>
+            <a:pPr indent="0" marL="0">
+              <a:buNone/>
+            </a:pPr>
+            <a:r>
+              <a:rPr lang="en-US" sz="2800" b="1" dirty="0">
+                <a:solidFill>
+                  <a:srgbClr val="0F172A"/>
+                </a:solidFill>
+                <a:latin typeface="Georgia" pitchFamily="34" charset="0"/>
+                <a:ea typeface="Georgia" pitchFamily="34" charset="-122"/>
+                <a:cs typeface="Georgia" pitchFamily="34" charset="-120"/>
+              </a:rPr>
+              <a:t>Key learnings</a:t>
+            </a:r>
+            <a:endParaRPr lang="en-US" sz="2800" dirty="0"/>
+          </a:p>
+        </p:txBody>
+      </p:sp>
+      <p:sp>
+        <p:nvSpPr>
+          <p:cNvPr id="4" name="Shape 2"/>
+          <p:cNvSpPr/>
+          <p:nvPr/>
+        </p:nvSpPr>
+        <p:spPr>
+          <a:xfrm>
+            <a:off x="502920" y="1783080"/>
+            <a:ext cx="3545738" cy="1810512"/>
+          </a:xfrm>
+          <a:prstGeom prst="roundRect">
+            <a:avLst>
+              <a:gd name="adj" fmla="val 4545"/>
+            </a:avLst>
+          </a:prstGeom>
+          <a:solidFill>
+            <a:srgbClr val="FFFFFF"/>
+          </a:solidFill>
+          <a:ln w="12700">
+            <a:solidFill>
+              <a:srgbClr val="E6E8F0"/>
+            </a:solidFill>
+            <a:prstDash val="solid"/>
+          </a:ln>
+          <a:effectLst>
+            <a:outerShdw sx="100000" sy="100000" kx="0" ky="0" algn="bl" rotWithShape="0" blurRad="114300" dist="38100" dir="8100000">
+              <a:srgbClr val="0F172A">
+                <a:alpha val="16000"/>
+              </a:srgbClr>
+            </a:outerShdw>
+          </a:effectLst>
+        </p:spPr>
+      </p:sp>
+      <p:sp>
+        <p:nvSpPr>
+          <p:cNvPr id="5" name="Shape 3"/>
+          <p:cNvSpPr/>
+          <p:nvPr/>
+        </p:nvSpPr>
+        <p:spPr>
+          <a:xfrm>
+            <a:off x="740664" y="2002536"/>
+            <a:ext cx="566928" cy="566928"/>
+          </a:xfrm>
+          <a:prstGeom prst="roundRect">
+            <a:avLst>
+              <a:gd name="adj" fmla="val 19355"/>
+            </a:avLst>
+          </a:prstGeom>
+          <a:solidFill>
+            <a:srgbClr val="7C3AED"/>
+          </a:solidFill>
+          <a:ln/>
+        </p:spPr>
+      </p:sp>
+      <p:pic>
+        <p:nvPicPr>
+          <p:cNvPr id="6" name="Image 0" descr="icons/brain.png">    </p:cNvPr>
+          <p:cNvPicPr>
+            <a:picLocks noChangeAspect="1"/>
+          </p:cNvPicPr>
+          <p:nvPr/>
+        </p:nvPicPr>
+        <p:blipFill>
+          <a:blip r:embed="rId1"/>
+          <a:stretch>
+            <a:fillRect/>
+          </a:stretch>
+        </p:blipFill>
+        <p:spPr>
+          <a:xfrm>
+            <a:off x="877824" y="2139696"/>
+            <a:ext cx="292608" cy="292608"/>
+          </a:xfrm>
+          <a:prstGeom prst="rect">
+            <a:avLst/>
+          </a:prstGeom>
+        </p:spPr>
+      </p:pic>
+      <p:sp>
+        <p:nvSpPr>
+          <p:cNvPr id="7" name="Text 4"/>
+          <p:cNvSpPr/>
+          <p:nvPr/>
+        </p:nvSpPr>
+        <p:spPr>
+          <a:xfrm>
+            <a:off x="1490472" y="1984248"/>
+            <a:ext cx="2357018" cy="603504"/>
+          </a:xfrm>
+          <a:prstGeom prst="rect">
+            <a:avLst/>
+          </a:prstGeom>
+          <a:noFill/>
+          <a:ln/>
+        </p:spPr>
+        <p:txBody>
+          <a:bodyPr wrap="square" lIns="0" tIns="0" rIns="0" bIns="0" rtlCol="0" anchor="ctr"/>
+          <a:lstStyle/>
+          <a:p>
+            <a:pPr indent="0" marL="0">
+              <a:buNone/>
+            </a:pPr>
+            <a:r>
+              <a:rPr lang="en-US" sz="1300" b="1" dirty="0">
+                <a:solidFill>
+                  <a:srgbClr val="0F172A"/>
+                </a:solidFill>
+                <a:latin typeface="Calibri" pitchFamily="34" charset="0"/>
+                <a:ea typeface="Calibri" pitchFamily="34" charset="-122"/>
+                <a:cs typeface="Calibri" pitchFamily="34" charset="-120"/>
+              </a:rPr>
+              <a:t>“ReAct” is a paradigm, not a class</a:t>
+            </a:r>
+            <a:endParaRPr lang="en-US" sz="1300" dirty="0"/>
+          </a:p>
+        </p:txBody>
+      </p:sp>
+      <p:sp>
+        <p:nvSpPr>
+          <p:cNvPr id="8" name="Text 5"/>
+          <p:cNvSpPr/>
+          <p:nvPr/>
+        </p:nvSpPr>
+        <p:spPr>
+          <a:xfrm>
+            <a:off x="758952" y="2679192"/>
+            <a:ext cx="3088538" cy="768096"/>
+          </a:xfrm>
+          <a:prstGeom prst="rect">
+            <a:avLst/>
+          </a:prstGeom>
+          <a:noFill/>
+          <a:ln/>
+        </p:spPr>
+        <p:txBody>
+          <a:bodyPr wrap="square" lIns="0" tIns="0" rIns="0" bIns="0" rtlCol="0" anchor="t"/>
+          <a:lstStyle/>
+          <a:p>
+            <a:pPr marL="152400" indent="-152400">
+              <a:spcAft>
+                <a:spcPts val="500"/>
+              </a:spcAft>
+              <a:buSzPct val="100000"/>
+              <a:buChar char="•"/>
+            </a:pPr>
+            <a:r>
+              <a:rPr lang="en-US" sz="1150" dirty="0">
+                <a:solidFill>
+                  <a:srgbClr val="5B6577"/>
+                </a:solidFill>
+                <a:latin typeface="Calibri" pitchFamily="34" charset="0"/>
+                <a:ea typeface="Calibri" pitchFamily="34" charset="-122"/>
+                <a:cs typeface="Calibri" pitchFamily="34" charset="-120"/>
+              </a:rPr>
+              <a:t>Native function-calling IS ReAct — done better; reach for a text-scratchpad planner only when you want a visible plan.</a:t>
+            </a:r>
+            <a:endParaRPr lang="en-US" sz="1150" dirty="0"/>
+          </a:p>
+        </p:txBody>
+      </p:sp>
+      <p:sp>
+        <p:nvSpPr>
+          <p:cNvPr id="9" name="Shape 6"/>
+          <p:cNvSpPr/>
+          <p:nvPr/>
+        </p:nvSpPr>
+        <p:spPr>
+          <a:xfrm>
+            <a:off x="4322978" y="1783080"/>
+            <a:ext cx="3545738" cy="1810512"/>
+          </a:xfrm>
+          <a:prstGeom prst="roundRect">
+            <a:avLst>
+              <a:gd name="adj" fmla="val 4545"/>
+            </a:avLst>
+          </a:prstGeom>
+          <a:solidFill>
+            <a:srgbClr val="FFFFFF"/>
+          </a:solidFill>
+          <a:ln w="12700">
+            <a:solidFill>
+              <a:srgbClr val="E6E8F0"/>
+            </a:solidFill>
+            <a:prstDash val="solid"/>
+          </a:ln>
+          <a:effectLst>
+            <a:outerShdw sx="100000" sy="100000" kx="0" ky="0" algn="bl" rotWithShape="0" blurRad="114300" dist="38100" dir="8100000">
+              <a:srgbClr val="0F172A">
+                <a:alpha val="16000"/>
+              </a:srgbClr>
+            </a:outerShdw>
+          </a:effectLst>
+        </p:spPr>
+      </p:sp>
+      <p:sp>
+        <p:nvSpPr>
+          <p:cNvPr id="10" name="Shape 7"/>
+          <p:cNvSpPr/>
+          <p:nvPr/>
+        </p:nvSpPr>
+        <p:spPr>
+          <a:xfrm>
+            <a:off x="4560722" y="2002536"/>
+            <a:ext cx="566928" cy="566928"/>
+          </a:xfrm>
+          <a:prstGeom prst="roundRect">
+            <a:avLst>
+              <a:gd name="adj" fmla="val 19355"/>
+            </a:avLst>
+          </a:prstGeom>
+          <a:solidFill>
+            <a:srgbClr val="0D9488"/>
+          </a:solidFill>
+          <a:ln/>
+        </p:spPr>
+      </p:sp>
+      <p:pic>
+        <p:nvPicPr>
+          <p:cNvPr id="11" name="Image 1" descr="icons/lock.png">    </p:cNvPr>
+          <p:cNvPicPr>
+            <a:picLocks noChangeAspect="1"/>
+          </p:cNvPicPr>
+          <p:nvPr/>
+        </p:nvPicPr>
+        <p:blipFill>
+          <a:blip r:embed="rId2"/>
+          <a:stretch>
+            <a:fillRect/>
+          </a:stretch>
+        </p:blipFill>
+        <p:spPr>
+          <a:xfrm>
+            <a:off x="4697882" y="2139696"/>
+            <a:ext cx="292608" cy="292608"/>
+          </a:xfrm>
+          <a:prstGeom prst="rect">
+            <a:avLst/>
+          </a:prstGeom>
+        </p:spPr>
+      </p:pic>
+      <p:sp>
+        <p:nvSpPr>
+          <p:cNvPr id="12" name="Text 8"/>
+          <p:cNvSpPr/>
+          <p:nvPr/>
+        </p:nvSpPr>
+        <p:spPr>
+          <a:xfrm>
+            <a:off x="5310530" y="1984248"/>
+            <a:ext cx="2357018" cy="603504"/>
+          </a:xfrm>
+          <a:prstGeom prst="rect">
+            <a:avLst/>
+          </a:prstGeom>
+          <a:noFill/>
+          <a:ln/>
+        </p:spPr>
+        <p:txBody>
+          <a:bodyPr wrap="square" lIns="0" tIns="0" rIns="0" bIns="0" rtlCol="0" anchor="ctr"/>
+          <a:lstStyle/>
+          <a:p>
+            <a:pPr indent="0" marL="0">
+              <a:buNone/>
+            </a:pPr>
+            <a:r>
+              <a:rPr lang="en-US" sz="1300" b="1" dirty="0">
+                <a:solidFill>
+                  <a:srgbClr val="0F172A"/>
+                </a:solidFill>
+                <a:latin typeface="Calibri" pitchFamily="34" charset="0"/>
+                <a:ea typeface="Calibri" pitchFamily="34" charset="-122"/>
+                <a:cs typeface="Calibri" pitchFamily="34" charset="-120"/>
+              </a:rPr>
+              <a:t>LLM orchestrates; code transacts</a:t>
+            </a:r>
+            <a:endParaRPr lang="en-US" sz="1300" dirty="0"/>
+          </a:p>
+        </p:txBody>
+      </p:sp>
+      <p:sp>
+        <p:nvSpPr>
+          <p:cNvPr id="13" name="Text 9"/>
+          <p:cNvSpPr/>
+          <p:nvPr/>
+        </p:nvSpPr>
+        <p:spPr>
+          <a:xfrm>
+            <a:off x="4579010" y="2679192"/>
+            <a:ext cx="3088538" cy="768096"/>
+          </a:xfrm>
+          <a:prstGeom prst="rect">
+            <a:avLst/>
+          </a:prstGeom>
+          <a:noFill/>
+          <a:ln/>
+        </p:spPr>
+        <p:txBody>
+          <a:bodyPr wrap="square" lIns="0" tIns="0" rIns="0" bIns="0" rtlCol="0" anchor="t"/>
+          <a:lstStyle/>
+          <a:p>
+            <a:pPr marL="152400" indent="-152400">
+              <a:spcAft>
+                <a:spcPts val="500"/>
+              </a:spcAft>
+              <a:buSzPct val="100000"/>
+              <a:buChar char="•"/>
+            </a:pPr>
+            <a:r>
+              <a:rPr lang="en-US" sz="1150" dirty="0">
+                <a:solidFill>
+                  <a:srgbClr val="5B6577"/>
+                </a:solidFill>
+                <a:latin typeface="Calibri" pitchFamily="34" charset="0"/>
+                <a:ea typeface="Calibri" pitchFamily="34" charset="-122"/>
+                <a:cs typeface="Calibri" pitchFamily="34" charset="-120"/>
+              </a:rPr>
+              <a:t>Route money-affecting / irreversible actions through deterministic, auditable handlers — never the model.</a:t>
+            </a:r>
+            <a:endParaRPr lang="en-US" sz="1150" dirty="0"/>
+          </a:p>
+        </p:txBody>
+      </p:sp>
+      <p:sp>
+        <p:nvSpPr>
+          <p:cNvPr id="14" name="Shape 10"/>
+          <p:cNvSpPr/>
+          <p:nvPr/>
+        </p:nvSpPr>
+        <p:spPr>
+          <a:xfrm>
+            <a:off x="8143037" y="1783080"/>
+            <a:ext cx="3545738" cy="1810512"/>
+          </a:xfrm>
+          <a:prstGeom prst="roundRect">
+            <a:avLst>
+              <a:gd name="adj" fmla="val 4545"/>
+            </a:avLst>
+          </a:prstGeom>
+          <a:solidFill>
+            <a:srgbClr val="FFFFFF"/>
+          </a:solidFill>
+          <a:ln w="12700">
+            <a:solidFill>
+              <a:srgbClr val="E6E8F0"/>
+            </a:solidFill>
+            <a:prstDash val="solid"/>
+          </a:ln>
+          <a:effectLst>
+            <a:outerShdw sx="100000" sy="100000" kx="0" ky="0" algn="bl" rotWithShape="0" blurRad="114300" dist="38100" dir="8100000">
+              <a:srgbClr val="0F172A">
+                <a:alpha val="16000"/>
+              </a:srgbClr>
+            </a:outerShdw>
+          </a:effectLst>
+        </p:spPr>
+      </p:sp>
+      <p:sp>
+        <p:nvSpPr>
+          <p:cNvPr id="15" name="Shape 11"/>
+          <p:cNvSpPr/>
+          <p:nvPr/>
+        </p:nvSpPr>
+        <p:spPr>
+          <a:xfrm>
+            <a:off x="8380781" y="2002536"/>
+            <a:ext cx="566928" cy="566928"/>
+          </a:xfrm>
+          <a:prstGeom prst="roundRect">
+            <a:avLst>
+              <a:gd name="adj" fmla="val 19355"/>
+            </a:avLst>
+          </a:prstGeom>
+          <a:solidFill>
+            <a:srgbClr val="2563EB"/>
+          </a:solidFill>
+          <a:ln/>
+        </p:spPr>
+      </p:sp>
+      <p:pic>
+        <p:nvPicPr>
+          <p:cNvPr id="16" name="Image 2" descr="icons/sitemap.png">    </p:cNvPr>
+          <p:cNvPicPr>
+            <a:picLocks noChangeAspect="1"/>
+          </p:cNvPicPr>
+          <p:nvPr/>
+        </p:nvPicPr>
+        <p:blipFill>
+          <a:blip r:embed="rId3"/>
+          <a:stretch>
+            <a:fillRect/>
+          </a:stretch>
+        </p:blipFill>
+        <p:spPr>
+          <a:xfrm>
+            <a:off x="8517941" y="2139696"/>
+            <a:ext cx="292608" cy="292608"/>
+          </a:xfrm>
+          <a:prstGeom prst="rect">
+            <a:avLst/>
+          </a:prstGeom>
+        </p:spPr>
+      </p:pic>
+      <p:sp>
+        <p:nvSpPr>
+          <p:cNvPr id="17" name="Text 12"/>
+          <p:cNvSpPr/>
+          <p:nvPr/>
+        </p:nvSpPr>
+        <p:spPr>
+          <a:xfrm>
+            <a:off x="9130589" y="1984248"/>
+            <a:ext cx="2357018" cy="603504"/>
+          </a:xfrm>
+          <a:prstGeom prst="rect">
+            <a:avLst/>
+          </a:prstGeom>
+          <a:noFill/>
+          <a:ln/>
+        </p:spPr>
+        <p:txBody>
+          <a:bodyPr wrap="square" lIns="0" tIns="0" rIns="0" bIns="0" rtlCol="0" anchor="ctr"/>
+          <a:lstStyle/>
+          <a:p>
+            <a:pPr indent="0" marL="0">
+              <a:buNone/>
+            </a:pPr>
+            <a:r>
+              <a:rPr lang="en-US" sz="1300" b="1" dirty="0">
+                <a:solidFill>
+                  <a:srgbClr val="0F172A"/>
+                </a:solidFill>
+                <a:latin typeface="Calibri" pitchFamily="34" charset="0"/>
+                <a:ea typeface="Calibri" pitchFamily="34" charset="-122"/>
+                <a:cs typeface="Calibri" pitchFamily="34" charset="-120"/>
+              </a:rPr>
+              <a:t>Loop safety is graph shape, not prompts</a:t>
+            </a:r>
+            <a:endParaRPr lang="en-US" sz="1300" dirty="0"/>
+          </a:p>
+        </p:txBody>
+      </p:sp>
+      <p:sp>
+        <p:nvSpPr>
+          <p:cNvPr id="18" name="Text 13"/>
+          <p:cNvSpPr/>
+          <p:nvPr/>
+        </p:nvSpPr>
+        <p:spPr>
+          <a:xfrm>
+            <a:off x="8399069" y="2679192"/>
+            <a:ext cx="3088538" cy="768096"/>
+          </a:xfrm>
+          <a:prstGeom prst="rect">
+            <a:avLst/>
+          </a:prstGeom>
+          <a:noFill/>
+          <a:ln/>
+        </p:spPr>
+        <p:txBody>
+          <a:bodyPr wrap="square" lIns="0" tIns="0" rIns="0" bIns="0" rtlCol="0" anchor="t"/>
+          <a:lstStyle/>
+          <a:p>
+            <a:pPr marL="152400" indent="-152400">
+              <a:spcAft>
+                <a:spcPts val="500"/>
+              </a:spcAft>
+              <a:buSzPct val="100000"/>
+              <a:buChar char="•"/>
+            </a:pPr>
+            <a:r>
+              <a:rPr lang="en-US" sz="1150" dirty="0">
+                <a:solidFill>
+                  <a:srgbClr val="5B6577"/>
+                </a:solidFill>
+                <a:latin typeface="Calibri" pitchFamily="34" charset="0"/>
+                <a:ea typeface="Calibri" pitchFamily="34" charset="-122"/>
+                <a:cs typeface="Calibri" pitchFamily="34" charset="-120"/>
+              </a:rPr>
+              <a:t>Agent-as-tool (no transfer-back), workers with no nested agents, single-pass turns — cycles can't exist by construction.</a:t>
+            </a:r>
+            <a:endParaRPr lang="en-US" sz="1150" dirty="0"/>
+          </a:p>
+        </p:txBody>
+      </p:sp>
+      <p:sp>
+        <p:nvSpPr>
+          <p:cNvPr id="19" name="Shape 14"/>
+          <p:cNvSpPr/>
+          <p:nvPr/>
+        </p:nvSpPr>
+        <p:spPr>
+          <a:xfrm>
+            <a:off x="502920" y="3822192"/>
+            <a:ext cx="3545738" cy="1810512"/>
+          </a:xfrm>
+          <a:prstGeom prst="roundRect">
+            <a:avLst>
+              <a:gd name="adj" fmla="val 4545"/>
+            </a:avLst>
+          </a:prstGeom>
+          <a:solidFill>
+            <a:srgbClr val="FFFFFF"/>
+          </a:solidFill>
+          <a:ln w="12700">
+            <a:solidFill>
+              <a:srgbClr val="E6E8F0"/>
+            </a:solidFill>
+            <a:prstDash val="solid"/>
+          </a:ln>
+          <a:effectLst>
+            <a:outerShdw sx="100000" sy="100000" kx="0" ky="0" algn="bl" rotWithShape="0" blurRad="114300" dist="38100" dir="8100000">
+              <a:srgbClr val="0F172A">
+                <a:alpha val="16000"/>
+              </a:srgbClr>
+            </a:outerShdw>
+          </a:effectLst>
+        </p:spPr>
+      </p:sp>
+      <p:sp>
+        <p:nvSpPr>
+          <p:cNvPr id="20" name="Shape 15"/>
+          <p:cNvSpPr/>
+          <p:nvPr/>
+        </p:nvSpPr>
+        <p:spPr>
+          <a:xfrm>
+            <a:off x="740664" y="4041648"/>
+            <a:ext cx="566928" cy="566928"/>
+          </a:xfrm>
+          <a:prstGeom prst="roundRect">
+            <a:avLst>
+              <a:gd name="adj" fmla="val 19355"/>
+            </a:avLst>
+          </a:prstGeom>
+          <a:solidFill>
+            <a:srgbClr val="E11D48"/>
+          </a:solidFill>
+          <a:ln/>
+        </p:spPr>
+      </p:sp>
+      <p:pic>
+        <p:nvPicPr>
+          <p:cNvPr id="21" name="Image 3" descr="icons/sync.png">    </p:cNvPr>
+          <p:cNvPicPr>
+            <a:picLocks noChangeAspect="1"/>
+          </p:cNvPicPr>
+          <p:nvPr/>
+        </p:nvPicPr>
+        <p:blipFill>
+          <a:blip r:embed="rId4"/>
+          <a:stretch>
+            <a:fillRect/>
+          </a:stretch>
+        </p:blipFill>
+        <p:spPr>
+          <a:xfrm>
+            <a:off x="877824" y="4178808"/>
+            <a:ext cx="292608" cy="292608"/>
+          </a:xfrm>
+          <a:prstGeom prst="rect">
+            <a:avLst/>
+          </a:prstGeom>
+        </p:spPr>
+      </p:pic>
+      <p:sp>
+        <p:nvSpPr>
+          <p:cNvPr id="22" name="Text 16"/>
+          <p:cNvSpPr/>
+          <p:nvPr/>
+        </p:nvSpPr>
+        <p:spPr>
+          <a:xfrm>
+            <a:off x="1490472" y="4023360"/>
+            <a:ext cx="2357018" cy="603504"/>
+          </a:xfrm>
+          <a:prstGeom prst="rect">
+            <a:avLst/>
+          </a:prstGeom>
+          <a:noFill/>
+          <a:ln/>
+        </p:spPr>
+        <p:txBody>
+          <a:bodyPr wrap="square" lIns="0" tIns="0" rIns="0" bIns="0" rtlCol="0" anchor="ctr"/>
+          <a:lstStyle/>
+          <a:p>
+            <a:pPr indent="0" marL="0">
+              <a:buNone/>
+            </a:pPr>
+            <a:r>
+              <a:rPr lang="en-US" sz="1300" b="1" dirty="0">
+                <a:solidFill>
+                  <a:srgbClr val="0F172A"/>
+                </a:solidFill>
+                <a:latin typeface="Calibri" pitchFamily="34" charset="0"/>
+                <a:ea typeface="Calibri" pitchFamily="34" charset="-122"/>
+                <a:cs typeface="Calibri" pitchFamily="34" charset="-120"/>
+              </a:rPr>
+              <a:t>A model quirk that bit once bites again</a:t>
+            </a:r>
+            <a:endParaRPr lang="en-US" sz="1300" dirty="0"/>
+          </a:p>
+        </p:txBody>
+      </p:sp>
+      <p:sp>
+        <p:nvSpPr>
+          <p:cNvPr id="23" name="Text 17"/>
+          <p:cNvSpPr/>
+          <p:nvPr/>
+        </p:nvSpPr>
+        <p:spPr>
+          <a:xfrm>
+            <a:off x="758952" y="4718304"/>
+            <a:ext cx="3088538" cy="768096"/>
+          </a:xfrm>
+          <a:prstGeom prst="rect">
+            <a:avLst/>
+          </a:prstGeom>
+          <a:noFill/>
+          <a:ln/>
+        </p:spPr>
+        <p:txBody>
+          <a:bodyPr wrap="square" lIns="0" tIns="0" rIns="0" bIns="0" rtlCol="0" anchor="t"/>
+          <a:lstStyle/>
+          <a:p>
+            <a:pPr marL="152400" indent="-152400">
+              <a:spcAft>
+                <a:spcPts val="500"/>
+              </a:spcAft>
+              <a:buSzPct val="100000"/>
+              <a:buChar char="•"/>
+            </a:pPr>
+            <a:r>
+              <a:rPr lang="en-US" sz="1150" dirty="0">
+                <a:solidFill>
+                  <a:srgbClr val="5B6577"/>
+                </a:solidFill>
+                <a:latin typeface="Calibri" pitchFamily="34" charset="0"/>
+                <a:ea typeface="Calibri" pitchFamily="34" charset="-122"/>
+                <a:cs typeface="Calibri" pitchFamily="34" charset="-120"/>
+              </a:rPr>
+              <a:t>Encode the remedy as a reusable pattern (thinking_budget=0 fixed both vision and the ReAct advisor).</a:t>
+            </a:r>
+            <a:endParaRPr lang="en-US" sz="1150" dirty="0"/>
+          </a:p>
+        </p:txBody>
+      </p:sp>
+      <p:sp>
+        <p:nvSpPr>
+          <p:cNvPr id="24" name="Shape 18"/>
+          <p:cNvSpPr/>
+          <p:nvPr/>
+        </p:nvSpPr>
+        <p:spPr>
+          <a:xfrm>
+            <a:off x="4322978" y="3822192"/>
+            <a:ext cx="3545738" cy="1810512"/>
+          </a:xfrm>
+          <a:prstGeom prst="roundRect">
+            <a:avLst>
+              <a:gd name="adj" fmla="val 4545"/>
+            </a:avLst>
+          </a:prstGeom>
+          <a:solidFill>
+            <a:srgbClr val="FFFFFF"/>
+          </a:solidFill>
+          <a:ln w="12700">
+            <a:solidFill>
+              <a:srgbClr val="E6E8F0"/>
+            </a:solidFill>
+            <a:prstDash val="solid"/>
+          </a:ln>
+          <a:effectLst>
+            <a:outerShdw sx="100000" sy="100000" kx="0" ky="0" algn="bl" rotWithShape="0" blurRad="114300" dist="38100" dir="8100000">
+              <a:srgbClr val="0F172A">
+                <a:alpha val="16000"/>
+              </a:srgbClr>
+            </a:outerShdw>
+          </a:effectLst>
+        </p:spPr>
+      </p:sp>
+      <p:sp>
+        <p:nvSpPr>
+          <p:cNvPr id="25" name="Shape 19"/>
+          <p:cNvSpPr/>
+          <p:nvPr/>
+        </p:nvSpPr>
+        <p:spPr>
+          <a:xfrm>
+            <a:off x="4560722" y="4041648"/>
+            <a:ext cx="566928" cy="566928"/>
+          </a:xfrm>
+          <a:prstGeom prst="roundRect">
+            <a:avLst>
+              <a:gd name="adj" fmla="val 19355"/>
+            </a:avLst>
+          </a:prstGeom>
+          <a:solidFill>
+            <a:srgbClr val="16A34A"/>
+          </a:solidFill>
+          <a:ln/>
+        </p:spPr>
+      </p:sp>
+      <p:pic>
+        <p:nvPicPr>
+          <p:cNvPr id="26" name="Image 4" descr="icons/check.png">    </p:cNvPr>
+          <p:cNvPicPr>
+            <a:picLocks noChangeAspect="1"/>
+          </p:cNvPicPr>
+          <p:nvPr/>
+        </p:nvPicPr>
+        <p:blipFill>
+          <a:blip r:embed="rId5"/>
+          <a:stretch>
+            <a:fillRect/>
+          </a:stretch>
+        </p:blipFill>
+        <p:spPr>
+          <a:xfrm>
+            <a:off x="4697882" y="4178808"/>
+            <a:ext cx="292608" cy="292608"/>
+          </a:xfrm>
+          <a:prstGeom prst="rect">
+            <a:avLst/>
+          </a:prstGeom>
+        </p:spPr>
+      </p:pic>
+      <p:sp>
+        <p:nvSpPr>
+          <p:cNvPr id="27" name="Text 20"/>
+          <p:cNvSpPr/>
+          <p:nvPr/>
+        </p:nvSpPr>
+        <p:spPr>
+          <a:xfrm>
+            <a:off x="5310530" y="4023360"/>
+            <a:ext cx="2357018" cy="603504"/>
+          </a:xfrm>
+          <a:prstGeom prst="rect">
+            <a:avLst/>
+          </a:prstGeom>
+          <a:noFill/>
+          <a:ln/>
+        </p:spPr>
+        <p:txBody>
+          <a:bodyPr wrap="square" lIns="0" tIns="0" rIns="0" bIns="0" rtlCol="0" anchor="ctr"/>
+          <a:lstStyle/>
+          <a:p>
+            <a:pPr indent="0" marL="0">
+              <a:buNone/>
+            </a:pPr>
+            <a:r>
+              <a:rPr lang="en-US" sz="1300" b="1" dirty="0">
+                <a:solidFill>
+                  <a:srgbClr val="0F172A"/>
+                </a:solidFill>
+                <a:latin typeface="Calibri" pitchFamily="34" charset="0"/>
+                <a:ea typeface="Calibri" pitchFamily="34" charset="-122"/>
+                <a:cs typeface="Calibri" pitchFamily="34" charset="-120"/>
+              </a:rPr>
+              <a:t>Test the path production runs</a:t>
+            </a:r>
+            <a:endParaRPr lang="en-US" sz="1300" dirty="0"/>
+          </a:p>
+        </p:txBody>
+      </p:sp>
+      <p:sp>
+        <p:nvSpPr>
+          <p:cNvPr id="28" name="Text 21"/>
+          <p:cNvSpPr/>
+          <p:nvPr/>
+        </p:nvSpPr>
+        <p:spPr>
+          <a:xfrm>
+            <a:off x="4579010" y="4718304"/>
+            <a:ext cx="3088538" cy="768096"/>
+          </a:xfrm>
+          <a:prstGeom prst="rect">
+            <a:avLst/>
+          </a:prstGeom>
+          <a:noFill/>
+          <a:ln/>
+        </p:spPr>
+        <p:txBody>
+          <a:bodyPr wrap="square" lIns="0" tIns="0" rIns="0" bIns="0" rtlCol="0" anchor="t"/>
+          <a:lstStyle/>
+          <a:p>
+            <a:pPr marL="152400" indent="-152400">
+              <a:spcAft>
+                <a:spcPts val="500"/>
+              </a:spcAft>
+              <a:buSzPct val="100000"/>
+              <a:buChar char="•"/>
+            </a:pPr>
+            <a:r>
+              <a:rPr lang="en-US" sz="1150" dirty="0">
+                <a:solidFill>
+                  <a:srgbClr val="5B6577"/>
+                </a:solidFill>
+                <a:latin typeface="Calibri" pitchFamily="34" charset="0"/>
+                <a:ea typeface="Calibri" pitchFamily="34" charset="-122"/>
+                <a:cs typeface="Calibri" pitchFamily="34" charset="-120"/>
+              </a:rPr>
+              <a:t>A cloud-only ADK bug hid behind a green local suite — a CI-sim of the prod fallback is what gave confidence.</a:t>
+            </a:r>
+            <a:endParaRPr lang="en-US" sz="1150" dirty="0"/>
+          </a:p>
+        </p:txBody>
+      </p:sp>
+      <p:sp>
+        <p:nvSpPr>
+          <p:cNvPr id="29" name="Shape 22"/>
+          <p:cNvSpPr/>
+          <p:nvPr/>
+        </p:nvSpPr>
+        <p:spPr>
+          <a:xfrm>
+            <a:off x="8143037" y="3822192"/>
+            <a:ext cx="3545738" cy="1810512"/>
+          </a:xfrm>
+          <a:prstGeom prst="roundRect">
+            <a:avLst>
+              <a:gd name="adj" fmla="val 4545"/>
+            </a:avLst>
+          </a:prstGeom>
+          <a:solidFill>
+            <a:srgbClr val="FFFFFF"/>
+          </a:solidFill>
+          <a:ln w="12700">
+            <a:solidFill>
+              <a:srgbClr val="E6E8F0"/>
+            </a:solidFill>
+            <a:prstDash val="solid"/>
+          </a:ln>
+          <a:effectLst>
+            <a:outerShdw sx="100000" sy="100000" kx="0" ky="0" algn="bl" rotWithShape="0" blurRad="114300" dist="38100" dir="8100000">
+              <a:srgbClr val="0F172A">
+                <a:alpha val="16000"/>
+              </a:srgbClr>
+            </a:outerShdw>
+          </a:effectLst>
+        </p:spPr>
+      </p:sp>
+      <p:sp>
+        <p:nvSpPr>
+          <p:cNvPr id="30" name="Shape 23"/>
+          <p:cNvSpPr/>
+          <p:nvPr/>
+        </p:nvSpPr>
+        <p:spPr>
+          <a:xfrm>
+            <a:off x="8380781" y="4041648"/>
+            <a:ext cx="566928" cy="566928"/>
+          </a:xfrm>
+          <a:prstGeom prst="roundRect">
+            <a:avLst>
+              <a:gd name="adj" fmla="val 19355"/>
+            </a:avLst>
+          </a:prstGeom>
+          <a:solidFill>
+            <a:srgbClr val="0D9488"/>
+          </a:solidFill>
+          <a:ln/>
+        </p:spPr>
+      </p:sp>
+      <p:pic>
+        <p:nvPicPr>
+          <p:cNvPr id="31" name="Image 5" descr="icons/db.png">    </p:cNvPr>
+          <p:cNvPicPr>
+            <a:picLocks noChangeAspect="1"/>
+          </p:cNvPicPr>
+          <p:nvPr/>
+        </p:nvPicPr>
+        <p:blipFill>
+          <a:blip r:embed="rId6"/>
+          <a:stretch>
+            <a:fillRect/>
+          </a:stretch>
+        </p:blipFill>
+        <p:spPr>
+          <a:xfrm>
+            <a:off x="8517941" y="4178808"/>
+            <a:ext cx="292608" cy="292608"/>
+          </a:xfrm>
+          <a:prstGeom prst="rect">
+            <a:avLst/>
+          </a:prstGeom>
+        </p:spPr>
+      </p:pic>
+      <p:sp>
+        <p:nvSpPr>
+          <p:cNvPr id="32" name="Text 24"/>
+          <p:cNvSpPr/>
+          <p:nvPr/>
+        </p:nvSpPr>
+        <p:spPr>
+          <a:xfrm>
+            <a:off x="9130589" y="4023360"/>
+            <a:ext cx="2357018" cy="603504"/>
+          </a:xfrm>
+          <a:prstGeom prst="rect">
+            <a:avLst/>
+          </a:prstGeom>
+          <a:noFill/>
+          <a:ln/>
+        </p:spPr>
+        <p:txBody>
+          <a:bodyPr wrap="square" lIns="0" tIns="0" rIns="0" bIns="0" rtlCol="0" anchor="ctr"/>
+          <a:lstStyle/>
+          <a:p>
+            <a:pPr indent="0" marL="0">
+              <a:buNone/>
+            </a:pPr>
+            <a:r>
+              <a:rPr lang="en-US" sz="1300" b="1" dirty="0">
+                <a:solidFill>
+                  <a:srgbClr val="0F172A"/>
+                </a:solidFill>
+                <a:latin typeface="Calibri" pitchFamily="34" charset="0"/>
+                <a:ea typeface="Calibri" pitchFamily="34" charset="-122"/>
+                <a:cs typeface="Calibri" pitchFamily="34" charset="-120"/>
+              </a:rPr>
+              <a:t>Centralize state; keep agents stateless</a:t>
+            </a:r>
+            <a:endParaRPr lang="en-US" sz="1300" dirty="0"/>
+          </a:p>
+        </p:txBody>
+      </p:sp>
+      <p:sp>
+        <p:nvSpPr>
+          <p:cNvPr id="33" name="Text 25"/>
+          <p:cNvSpPr/>
+          <p:nvPr/>
+        </p:nvSpPr>
+        <p:spPr>
+          <a:xfrm>
+            <a:off x="8399069" y="4718304"/>
+            <a:ext cx="3088538" cy="768096"/>
+          </a:xfrm>
+          <a:prstGeom prst="rect">
+            <a:avLst/>
+          </a:prstGeom>
+          <a:noFill/>
+          <a:ln/>
+        </p:spPr>
+        <p:txBody>
+          <a:bodyPr wrap="square" lIns="0" tIns="0" rIns="0" bIns="0" rtlCol="0" anchor="t"/>
+          <a:lstStyle/>
+          <a:p>
+            <a:pPr marL="152400" indent="-152400">
+              <a:spcAft>
+                <a:spcPts val="500"/>
+              </a:spcAft>
+              <a:buSzPct val="100000"/>
+              <a:buChar char="•"/>
+            </a:pPr>
+            <a:r>
+              <a:rPr lang="en-US" sz="1150" dirty="0">
+                <a:solidFill>
+                  <a:srgbClr val="5B6577"/>
+                </a:solidFill>
+                <a:latin typeface="Calibri" pitchFamily="34" charset="0"/>
+                <a:ea typeface="Calibri" pitchFamily="34" charset="-122"/>
+                <a:cs typeface="Calibri" pitchFamily="34" charset="-120"/>
+              </a:rPr>
+              <a:t>One durable session store by session_id; let read-only agents pull memory from tools, not their own state.</a:t>
+            </a:r>
+            <a:endParaRPr lang="en-US" sz="1150" dirty="0"/>
+          </a:p>
+        </p:txBody>
+      </p:sp>
+      <p:sp>
+        <p:nvSpPr>
+          <p:cNvPr id="34" name="Text 26"/>
+          <p:cNvSpPr/>
+          <p:nvPr/>
+        </p:nvSpPr>
+        <p:spPr>
+          <a:xfrm>
+            <a:off x="502920" y="6455664"/>
+            <a:ext cx="8229600" cy="274320"/>
+          </a:xfrm>
+          <a:prstGeom prst="rect">
+            <a:avLst/>
+          </a:prstGeom>
+          <a:noFill/>
+          <a:ln/>
+        </p:spPr>
+        <p:txBody>
+          <a:bodyPr wrap="square" lIns="0" tIns="0" rIns="0" bIns="0" rtlCol="0" anchor="ctr"/>
+          <a:lstStyle/>
+          <a:p>
+            <a:pPr indent="0" marL="0">
+              <a:buNone/>
+            </a:pPr>
+            <a:r>
+              <a:rPr lang="en-US" sz="900" dirty="0">
+                <a:solidFill>
+                  <a:srgbClr val="8A94A6"/>
+                </a:solidFill>
+                <a:latin typeface="Calibri" pitchFamily="34" charset="0"/>
+                <a:ea typeface="Calibri" pitchFamily="34" charset="-122"/>
+                <a:cs typeface="Calibri" pitchFamily="34" charset="-120"/>
+              </a:rPr>
+              <a:t>GOOPHER · Unified Conversational Retail Agent on Google Cloud</a:t>
+            </a:r>
+            <a:endParaRPr lang="en-US" sz="900" dirty="0"/>
+          </a:p>
+        </p:txBody>
+      </p:sp>
+      <p:sp>
+        <p:nvSpPr>
+          <p:cNvPr id="35" name="Text 27"/>
+          <p:cNvSpPr/>
+          <p:nvPr/>
+        </p:nvSpPr>
+        <p:spPr>
+          <a:xfrm>
+            <a:off x="11277295" y="6455664"/>
+            <a:ext cx="411480" cy="274320"/>
+          </a:xfrm>
+          <a:prstGeom prst="rect">
+            <a:avLst/>
+          </a:prstGeom>
+          <a:noFill/>
+          <a:ln/>
+        </p:spPr>
+        <p:txBody>
+          <a:bodyPr wrap="square" lIns="0" tIns="0" rIns="0" bIns="0" rtlCol="0" anchor="ctr"/>
+          <a:lstStyle/>
+          <a:p>
+            <a:pPr algn="r" indent="0" marL="0">
+              <a:buNone/>
+            </a:pPr>
+            <a:r>
+              <a:rPr lang="en-US" sz="900" dirty="0">
+                <a:solidFill>
+                  <a:srgbClr val="8A94A6"/>
+                </a:solidFill>
+                <a:latin typeface="Calibri" pitchFamily="34" charset="0"/>
+                <a:ea typeface="Calibri" pitchFamily="34" charset="-122"/>
+                <a:cs typeface="Calibri" pitchFamily="34" charset="-120"/>
+              </a:rPr>
+              <a:t>15</a:t>
+            </a:r>
+            <a:endParaRPr lang="en-US" sz="900" dirty="0"/>
+          </a:p>
+        </p:txBody>
+      </p:sp>
+    </p:spTree>
+  </p:cSld>
+  <p:clrMapOvr>
+    <a:masterClrMapping/>
+  </p:clrMapOvr>
+  <p:transition spd="med">
+    <p:fade/>
+  </p:transition>
+</p:sld>
+</file>
+
+<file path=ppt/slides/slide16.xml><?xml version="1.0" encoding="utf-8"?>
+<p:sld xmlns:a="http://schemas.openxmlformats.org/drawingml/2006/main" xmlns:r="http://schemas.openxmlformats.org/officeDocument/2006/relationships" xmlns:p="http://schemas.openxmlformats.org/presentationml/2006/main">
+  <p:cSld name="Slide 16">
+    <p:bg>
+      <p:bgPr>
+        <a:solidFill>
+          <a:srgbClr val="FFFFFF"/>
+        </a:solidFill>
+      </p:bgPr>
+    </p:bg>
+    <p:spTree>
+      <p:nvGrpSpPr>
+        <p:cNvPr id="1" name=""/>
+        <p:cNvGrpSpPr/>
+        <p:nvPr/>
+      </p:nvGrpSpPr>
+      <p:grpSpPr>
+        <a:xfrm>
+          <a:off x="0" y="0"/>
+          <a:ext cx="0" cy="0"/>
+          <a:chOff x="0" y="0"/>
+          <a:chExt cx="0" cy="0"/>
+        </a:xfrm>
+      </p:grpSpPr>
+      <p:sp>
+        <p:nvSpPr>
+          <p:cNvPr id="2" name="Text 0"/>
+          <p:cNvSpPr/>
+          <p:nvPr/>
+        </p:nvSpPr>
+        <p:spPr>
+          <a:xfrm>
+            <a:off x="502920" y="457200"/>
+            <a:ext cx="11185855" cy="274320"/>
+          </a:xfrm>
+          <a:prstGeom prst="rect">
+            <a:avLst/>
+          </a:prstGeom>
+          <a:noFill/>
+          <a:ln/>
+        </p:spPr>
+        <p:txBody>
+          <a:bodyPr wrap="square" lIns="0" tIns="0" rIns="0" bIns="0" rtlCol="0" anchor="ctr"/>
+          <a:lstStyle/>
+          <a:p>
+            <a:pPr indent="0" marL="0">
+              <a:buNone/>
+            </a:pPr>
+            <a:r>
+              <a:rPr lang="en-US" sz="1200" b="1" spc="300" kern="0" dirty="0">
+                <a:solidFill>
+                  <a:srgbClr val="0D9488"/>
+                </a:solidFill>
+                <a:latin typeface="Calibri" pitchFamily="34" charset="0"/>
+                <a:ea typeface="Calibri" pitchFamily="34" charset="-122"/>
+                <a:cs typeface="Calibri" pitchFamily="34" charset="-120"/>
+              </a:rPr>
+              <a:t>IMPLEMENTATION &amp; NEXT STEPS</a:t>
+            </a:r>
+            <a:endParaRPr lang="en-US" sz="1200" dirty="0"/>
+          </a:p>
+        </p:txBody>
+      </p:sp>
+      <p:sp>
+        <p:nvSpPr>
+          <p:cNvPr id="3" name="Text 1"/>
+          <p:cNvSpPr/>
+          <p:nvPr/>
+        </p:nvSpPr>
+        <p:spPr>
+          <a:xfrm>
+            <a:off x="502920" y="749808"/>
+            <a:ext cx="11185855" cy="914400"/>
+          </a:xfrm>
+          <a:prstGeom prst="rect">
+            <a:avLst/>
+          </a:prstGeom>
+          <a:noFill/>
+          <a:ln/>
+        </p:spPr>
+        <p:txBody>
+          <a:bodyPr wrap="square" lIns="0" tIns="0" rIns="0" bIns="0" rtlCol="0" anchor="t"/>
+          <a:lstStyle/>
+          <a:p>
+            <a:pPr indent="0" marL="0">
+              <a:buNone/>
+            </a:pPr>
+            <a:r>
+              <a:rPr lang="en-US" sz="2800" b="1" dirty="0">
+                <a:solidFill>
+                  <a:srgbClr val="0F172A"/>
+                </a:solidFill>
+                <a:latin typeface="Georgia" pitchFamily="34" charset="0"/>
+                <a:ea typeface="Georgia" pitchFamily="34" charset="-122"/>
+                <a:cs typeface="Georgia" pitchFamily="34" charset="-120"/>
+              </a:rPr>
+              <a:t>From working prototype to production ramp</a:t>
+            </a:r>
+            <a:endParaRPr lang="en-US" sz="2800" dirty="0"/>
+          </a:p>
+        </p:txBody>
+      </p:sp>
+      <p:sp>
+        <p:nvSpPr>
+          <p:cNvPr id="4" name="Shape 2"/>
+          <p:cNvSpPr/>
+          <p:nvPr/>
+        </p:nvSpPr>
+        <p:spPr>
+          <a:xfrm>
+            <a:off x="502920" y="1920240"/>
+            <a:ext cx="2590724" cy="3383280"/>
+          </a:xfrm>
+          <a:prstGeom prst="roundRect">
+            <a:avLst>
+              <a:gd name="adj" fmla="val 3177"/>
+            </a:avLst>
+          </a:prstGeom>
+          <a:solidFill>
+            <a:srgbClr val="FFFFFF"/>
+          </a:solidFill>
+          <a:ln w="12700">
+            <a:solidFill>
+              <a:srgbClr val="E6E8F0"/>
+            </a:solidFill>
+            <a:prstDash val="solid"/>
+          </a:ln>
+          <a:effectLst>
+            <a:outerShdw sx="100000" sy="100000" kx="0" ky="0" algn="bl" rotWithShape="0" blurRad="114300" dist="38100" dir="8100000">
+              <a:srgbClr val="0F172A">
+                <a:alpha val="16000"/>
+              </a:srgbClr>
+            </a:outerShdw>
+          </a:effectLst>
+        </p:spPr>
+      </p:sp>
+      <p:sp>
+        <p:nvSpPr>
+          <p:cNvPr id="5" name="Shape 3"/>
+          <p:cNvSpPr/>
+          <p:nvPr/>
+        </p:nvSpPr>
+        <p:spPr>
+          <a:xfrm>
+            <a:off x="502920" y="1920240"/>
+            <a:ext cx="2590724" cy="109728"/>
+          </a:xfrm>
+          <a:prstGeom prst="rect">
+            <a:avLst/>
+          </a:prstGeom>
+          <a:solidFill>
+            <a:srgbClr val="16A34A"/>
+          </a:solidFill>
+          <a:ln/>
+        </p:spPr>
+      </p:sp>
+      <p:sp>
+        <p:nvSpPr>
+          <p:cNvPr id="6" name="Shape 4"/>
+          <p:cNvSpPr/>
+          <p:nvPr/>
+        </p:nvSpPr>
+        <p:spPr>
+          <a:xfrm>
+            <a:off x="722376" y="2231136"/>
+            <a:ext cx="603504" cy="603504"/>
+          </a:xfrm>
+          <a:prstGeom prst="roundRect">
+            <a:avLst>
+              <a:gd name="adj" fmla="val 19697"/>
+            </a:avLst>
+          </a:prstGeom>
+          <a:solidFill>
+            <a:srgbClr val="16A34A"/>
+          </a:solidFill>
+          <a:ln/>
+        </p:spPr>
+      </p:sp>
+      <p:pic>
+        <p:nvPicPr>
+          <p:cNvPr id="7" name="Image 0" descr="icons/check.png">    </p:cNvPr>
+          <p:cNvPicPr>
+            <a:picLocks noChangeAspect="1"/>
+          </p:cNvPicPr>
+          <p:nvPr/>
+        </p:nvPicPr>
+        <p:blipFill>
+          <a:blip r:embed="rId1"/>
+          <a:stretch>
+            <a:fillRect/>
+          </a:stretch>
+        </p:blipFill>
+        <p:spPr>
+          <a:xfrm>
+            <a:off x="877824" y="2386584"/>
+            <a:ext cx="292608" cy="292608"/>
+          </a:xfrm>
+          <a:prstGeom prst="rect">
+            <a:avLst/>
+          </a:prstGeom>
+        </p:spPr>
+      </p:pic>
+      <p:sp>
+        <p:nvSpPr>
+          <p:cNvPr id="8" name="Text 5"/>
+          <p:cNvSpPr/>
+          <p:nvPr/>
+        </p:nvSpPr>
+        <p:spPr>
+          <a:xfrm>
+            <a:off x="704088" y="2944368"/>
+            <a:ext cx="2188388" cy="548640"/>
+          </a:xfrm>
+          <a:prstGeom prst="rect">
+            <a:avLst/>
+          </a:prstGeom>
+          <a:noFill/>
+          <a:ln/>
+        </p:spPr>
+        <p:txBody>
+          <a:bodyPr wrap="square" lIns="0" tIns="0" rIns="0" bIns="0" rtlCol="0" anchor="t"/>
+          <a:lstStyle/>
+          <a:p>
+            <a:pPr indent="0" marL="0">
+              <a:buNone/>
+            </a:pPr>
+            <a:r>
+              <a:rPr lang="en-US" sz="1400" b="1" dirty="0">
+                <a:solidFill>
+                  <a:srgbClr val="0F172A"/>
+                </a:solidFill>
+                <a:latin typeface="Calibri" pitchFamily="34" charset="0"/>
+                <a:ea typeface="Calibri" pitchFamily="34" charset="-122"/>
+                <a:cs typeface="Calibri" pitchFamily="34" charset="-120"/>
+              </a:rPr>
+              <a:t>Now — Prototype (done)</a:t>
+            </a:r>
+            <a:endParaRPr lang="en-US" sz="1400" dirty="0"/>
+          </a:p>
+        </p:txBody>
+      </p:sp>
+      <p:sp>
+        <p:nvSpPr>
+          <p:cNvPr id="9" name="Text 6"/>
+          <p:cNvSpPr/>
+          <p:nvPr/>
+        </p:nvSpPr>
+        <p:spPr>
+          <a:xfrm>
+            <a:off x="722376" y="3493008"/>
+            <a:ext cx="2170100" cy="1691640"/>
+          </a:xfrm>
+          <a:prstGeom prst="rect">
+            <a:avLst/>
+          </a:prstGeom>
+          <a:noFill/>
+          <a:ln/>
+        </p:spPr>
+        <p:txBody>
+          <a:bodyPr wrap="square" lIns="0" tIns="0" rIns="0" bIns="0" rtlCol="0" anchor="t"/>
+          <a:lstStyle/>
+          <a:p>
+            <a:pPr marL="152400" indent="-152400">
+              <a:spcAft>
+                <a:spcPts val="700"/>
+              </a:spcAft>
+              <a:buSzPct val="100000"/>
+              <a:buChar char="•"/>
+            </a:pPr>
+            <a:r>
+              <a:rPr lang="en-US" sz="1150" dirty="0">
+                <a:solidFill>
+                  <a:srgbClr val="5B6577"/>
+                </a:solidFill>
+                <a:latin typeface="Calibri" pitchFamily="34" charset="0"/>
+                <a:ea typeface="Calibri" pitchFamily="34" charset="-122"/>
+                <a:cs typeface="Calibri" pitchFamily="34" charset="-120"/>
+              </a:rPr>
+              <a:t>Live on Cloud Run + Firestore</a:t>
+            </a:r>
+            <a:endParaRPr lang="en-US" sz="1150" dirty="0"/>
+          </a:p>
+          <a:p>
+            <a:pPr marL="152400" indent="-152400">
+              <a:spcAft>
+                <a:spcPts val="700"/>
+              </a:spcAft>
+              <a:buSzPct val="100000"/>
+              <a:buChar char="•"/>
+            </a:pPr>
+            <a:r>
+              <a:rPr lang="en-US" sz="1150" dirty="0">
+                <a:solidFill>
+                  <a:srgbClr val="5B6577"/>
+                </a:solidFill>
+                <a:latin typeface="Calibri" pitchFamily="34" charset="0"/>
+                <a:ea typeface="Calibri" pitchFamily="34" charset="-122"/>
+                <a:cs typeface="Calibri" pitchFamily="34" charset="-120"/>
+              </a:rPr>
+              <a:t>All 4 requirements + safe checkout</a:t>
+            </a:r>
+            <a:endParaRPr lang="en-US" sz="1150" dirty="0"/>
+          </a:p>
+          <a:p>
+            <a:pPr marL="152400" indent="-152400">
+              <a:spcAft>
+                <a:spcPts val="700"/>
+              </a:spcAft>
+              <a:buSzPct val="100000"/>
+              <a:buChar char="•"/>
+            </a:pPr>
+            <a:r>
+              <a:rPr lang="en-US" sz="1150" dirty="0">
+                <a:solidFill>
+                  <a:srgbClr val="5B6577"/>
+                </a:solidFill>
+                <a:latin typeface="Calibri" pitchFamily="34" charset="0"/>
+                <a:ea typeface="Calibri" pitchFamily="34" charset="-122"/>
+                <a:cs typeface="Calibri" pitchFamily="34" charset="-120"/>
+              </a:rPr>
+              <a:t>117 tests · CI/CD · /dev portal</a:t>
+            </a:r>
+            <a:endParaRPr lang="en-US" sz="1150" dirty="0"/>
+          </a:p>
+        </p:txBody>
+      </p:sp>
+      <p:pic>
+        <p:nvPicPr>
+          <p:cNvPr id="10" name="Image 1" descr="icons/arrow.png">    </p:cNvPr>
+          <p:cNvPicPr>
+            <a:picLocks noChangeAspect="1"/>
+          </p:cNvPicPr>
+          <p:nvPr/>
+        </p:nvPicPr>
+        <p:blipFill>
+          <a:blip r:embed="rId2"/>
+          <a:stretch>
+            <a:fillRect/>
+          </a:stretch>
+        </p:blipFill>
+        <p:spPr>
+          <a:xfrm>
+            <a:off x="3093644" y="3474720"/>
+            <a:ext cx="256032" cy="256032"/>
+          </a:xfrm>
+          <a:prstGeom prst="rect">
+            <a:avLst/>
+          </a:prstGeom>
+        </p:spPr>
+      </p:pic>
+      <p:sp>
+        <p:nvSpPr>
+          <p:cNvPr id="11" name="Shape 7"/>
+          <p:cNvSpPr/>
+          <p:nvPr/>
+        </p:nvSpPr>
+        <p:spPr>
+          <a:xfrm>
+            <a:off x="3367964" y="1920240"/>
+            <a:ext cx="2590724" cy="3383280"/>
+          </a:xfrm>
+          <a:prstGeom prst="roundRect">
+            <a:avLst>
+              <a:gd name="adj" fmla="val 3177"/>
+            </a:avLst>
+          </a:prstGeom>
+          <a:solidFill>
+            <a:srgbClr val="FFFFFF"/>
+          </a:solidFill>
+          <a:ln w="12700">
+            <a:solidFill>
+              <a:srgbClr val="E6E8F0"/>
+            </a:solidFill>
+            <a:prstDash val="solid"/>
+          </a:ln>
+          <a:effectLst>
+            <a:outerShdw sx="100000" sy="100000" kx="0" ky="0" algn="bl" rotWithShape="0" blurRad="114300" dist="38100" dir="8100000">
+              <a:srgbClr val="0F172A">
+                <a:alpha val="16000"/>
+              </a:srgbClr>
+            </a:outerShdw>
+          </a:effectLst>
+        </p:spPr>
+      </p:sp>
+      <p:sp>
+        <p:nvSpPr>
+          <p:cNvPr id="12" name="Shape 8"/>
+          <p:cNvSpPr/>
+          <p:nvPr/>
+        </p:nvSpPr>
+        <p:spPr>
+          <a:xfrm>
+            <a:off x="3367964" y="1920240"/>
+            <a:ext cx="2590724" cy="109728"/>
+          </a:xfrm>
+          <a:prstGeom prst="rect">
+            <a:avLst/>
+          </a:prstGeom>
+          <a:solidFill>
+            <a:srgbClr val="2563EB"/>
+          </a:solidFill>
+          <a:ln/>
+        </p:spPr>
+      </p:sp>
+      <p:sp>
+        <p:nvSpPr>
+          <p:cNvPr id="13" name="Shape 9"/>
+          <p:cNvSpPr/>
+          <p:nvPr/>
+        </p:nvSpPr>
+        <p:spPr>
+          <a:xfrm>
+            <a:off x="3587420" y="2231136"/>
+            <a:ext cx="603504" cy="603504"/>
+          </a:xfrm>
+          <a:prstGeom prst="roundRect">
+            <a:avLst>
+              <a:gd name="adj" fmla="val 19697"/>
+            </a:avLst>
+          </a:prstGeom>
+          <a:solidFill>
+            <a:srgbClr val="2563EB"/>
+          </a:solidFill>
+          <a:ln/>
+        </p:spPr>
+      </p:sp>
+      <p:pic>
+        <p:nvPicPr>
+          <p:cNvPr id="14" name="Image 2" descr="icons/users.png">    </p:cNvPr>
+          <p:cNvPicPr>
+            <a:picLocks noChangeAspect="1"/>
+          </p:cNvPicPr>
+          <p:nvPr/>
+        </p:nvPicPr>
+        <p:blipFill>
+          <a:blip r:embed="rId3"/>
+          <a:stretch>
+            <a:fillRect/>
+          </a:stretch>
+        </p:blipFill>
+        <p:spPr>
+          <a:xfrm>
+            <a:off x="3742868" y="2386584"/>
+            <a:ext cx="292608" cy="292608"/>
+          </a:xfrm>
+          <a:prstGeom prst="rect">
+            <a:avLst/>
+          </a:prstGeom>
+        </p:spPr>
+      </p:pic>
+      <p:sp>
+        <p:nvSpPr>
+          <p:cNvPr id="15" name="Text 10"/>
+          <p:cNvSpPr/>
+          <p:nvPr/>
+        </p:nvSpPr>
+        <p:spPr>
+          <a:xfrm>
+            <a:off x="3569132" y="2944368"/>
+            <a:ext cx="2188388" cy="548640"/>
+          </a:xfrm>
+          <a:prstGeom prst="rect">
+            <a:avLst/>
+          </a:prstGeom>
+          <a:noFill/>
+          <a:ln/>
+        </p:spPr>
+        <p:txBody>
+          <a:bodyPr wrap="square" lIns="0" tIns="0" rIns="0" bIns="0" rtlCol="0" anchor="t"/>
+          <a:lstStyle/>
+          <a:p>
+            <a:pPr indent="0" marL="0">
+              <a:buNone/>
+            </a:pPr>
+            <a:r>
+              <a:rPr lang="en-US" sz="1400" b="1" dirty="0">
+                <a:solidFill>
+                  <a:srgbClr val="0F172A"/>
+                </a:solidFill>
+                <a:latin typeface="Calibri" pitchFamily="34" charset="0"/>
+                <a:ea typeface="Calibri" pitchFamily="34" charset="-122"/>
+                <a:cs typeface="Calibri" pitchFamily="34" charset="-120"/>
+              </a:rPr>
+              <a:t>Pilot — 4–6 wks</a:t>
+            </a:r>
+            <a:endParaRPr lang="en-US" sz="1400" dirty="0"/>
+          </a:p>
+        </p:txBody>
+      </p:sp>
+      <p:sp>
+        <p:nvSpPr>
+          <p:cNvPr id="16" name="Text 11"/>
+          <p:cNvSpPr/>
+          <p:nvPr/>
+        </p:nvSpPr>
+        <p:spPr>
+          <a:xfrm>
+            <a:off x="3587420" y="3493008"/>
+            <a:ext cx="2170100" cy="1691640"/>
+          </a:xfrm>
+          <a:prstGeom prst="rect">
+            <a:avLst/>
+          </a:prstGeom>
+          <a:noFill/>
+          <a:ln/>
+        </p:spPr>
+        <p:txBody>
+          <a:bodyPr wrap="square" lIns="0" tIns="0" rIns="0" bIns="0" rtlCol="0" anchor="t"/>
+          <a:lstStyle/>
+          <a:p>
+            <a:pPr marL="152400" indent="-152400">
+              <a:spcAft>
+                <a:spcPts val="700"/>
+              </a:spcAft>
+              <a:buSzPct val="100000"/>
+              <a:buChar char="•"/>
+            </a:pPr>
+            <a:r>
+              <a:rPr lang="en-US" sz="1150" dirty="0">
+                <a:solidFill>
+                  <a:srgbClr val="5B6577"/>
+                </a:solidFill>
+                <a:latin typeface="Calibri" pitchFamily="34" charset="0"/>
+                <a:ea typeface="Calibri" pitchFamily="34" charset="-122"/>
+                <a:cs typeface="Calibri" pitchFamily="34" charset="-120"/>
+              </a:rPr>
+              <a:t>Multi-user + real SSO (Firebase/IdP)</a:t>
+            </a:r>
+            <a:endParaRPr lang="en-US" sz="1150" dirty="0"/>
+          </a:p>
+          <a:p>
+            <a:pPr marL="152400" indent="-152400">
+              <a:spcAft>
+                <a:spcPts val="700"/>
+              </a:spcAft>
+              <a:buSzPct val="100000"/>
+              <a:buChar char="•"/>
+            </a:pPr>
+            <a:r>
+              <a:rPr lang="en-US" sz="1150" dirty="0">
+                <a:solidFill>
+                  <a:srgbClr val="5B6577"/>
+                </a:solidFill>
+                <a:latin typeface="Calibri" pitchFamily="34" charset="0"/>
+                <a:ea typeface="Calibri" pitchFamily="34" charset="-122"/>
+                <a:cs typeface="Calibri" pitchFamily="34" charset="-120"/>
+              </a:rPr>
+              <a:t>Secret Manager · CORS/IAM hardening</a:t>
+            </a:r>
+            <a:endParaRPr lang="en-US" sz="1150" dirty="0"/>
+          </a:p>
+          <a:p>
+            <a:pPr marL="152400" indent="-152400">
+              <a:spcAft>
+                <a:spcPts val="700"/>
+              </a:spcAft>
+              <a:buSzPct val="100000"/>
+              <a:buChar char="•"/>
+            </a:pPr>
+            <a:r>
+              <a:rPr lang="en-US" sz="1150" dirty="0">
+                <a:solidFill>
+                  <a:srgbClr val="5B6577"/>
+                </a:solidFill>
+                <a:latin typeface="Calibri" pitchFamily="34" charset="0"/>
+                <a:ea typeface="Calibri" pitchFamily="34" charset="-122"/>
+                <a:cs typeface="Calibri" pitchFamily="34" charset="-120"/>
+              </a:rPr>
+              <a:t>Instrument deflection / conversion / CSAT</a:t>
+            </a:r>
+            <a:endParaRPr lang="en-US" sz="1150" dirty="0"/>
+          </a:p>
+        </p:txBody>
+      </p:sp>
+      <p:pic>
+        <p:nvPicPr>
+          <p:cNvPr id="17" name="Image 3" descr="icons/arrow.png">    </p:cNvPr>
+          <p:cNvPicPr>
+            <a:picLocks noChangeAspect="1"/>
+          </p:cNvPicPr>
+          <p:nvPr/>
+        </p:nvPicPr>
+        <p:blipFill>
+          <a:blip r:embed="rId4"/>
+          <a:stretch>
+            <a:fillRect/>
+          </a:stretch>
+        </p:blipFill>
+        <p:spPr>
+          <a:xfrm>
+            <a:off x="5958688" y="3474720"/>
+            <a:ext cx="256032" cy="256032"/>
+          </a:xfrm>
+          <a:prstGeom prst="rect">
+            <a:avLst/>
+          </a:prstGeom>
+        </p:spPr>
+      </p:pic>
+      <p:sp>
+        <p:nvSpPr>
+          <p:cNvPr id="18" name="Shape 12"/>
+          <p:cNvSpPr/>
+          <p:nvPr/>
+        </p:nvSpPr>
+        <p:spPr>
+          <a:xfrm>
+            <a:off x="6233008" y="1920240"/>
+            <a:ext cx="2590724" cy="3383280"/>
+          </a:xfrm>
+          <a:prstGeom prst="roundRect">
+            <a:avLst>
+              <a:gd name="adj" fmla="val 3177"/>
+            </a:avLst>
+          </a:prstGeom>
+          <a:solidFill>
+            <a:srgbClr val="FFFFFF"/>
+          </a:solidFill>
+          <a:ln w="12700">
+            <a:solidFill>
+              <a:srgbClr val="E6E8F0"/>
+            </a:solidFill>
+            <a:prstDash val="solid"/>
+          </a:ln>
+          <a:effectLst>
+            <a:outerShdw sx="100000" sy="100000" kx="0" ky="0" algn="bl" rotWithShape="0" blurRad="114300" dist="38100" dir="8100000">
+              <a:srgbClr val="0F172A">
+                <a:alpha val="16000"/>
+              </a:srgbClr>
+            </a:outerShdw>
+          </a:effectLst>
+        </p:spPr>
+      </p:sp>
+      <p:sp>
+        <p:nvSpPr>
+          <p:cNvPr id="19" name="Shape 13"/>
+          <p:cNvSpPr/>
+          <p:nvPr/>
+        </p:nvSpPr>
+        <p:spPr>
+          <a:xfrm>
+            <a:off x="6233008" y="1920240"/>
+            <a:ext cx="2590724" cy="109728"/>
+          </a:xfrm>
+          <a:prstGeom prst="rect">
+            <a:avLst/>
+          </a:prstGeom>
+          <a:solidFill>
+            <a:srgbClr val="7C3AED"/>
+          </a:solidFill>
+          <a:ln/>
+        </p:spPr>
+      </p:sp>
+      <p:sp>
+        <p:nvSpPr>
+          <p:cNvPr id="20" name="Shape 14"/>
+          <p:cNvSpPr/>
+          <p:nvPr/>
+        </p:nvSpPr>
+        <p:spPr>
+          <a:xfrm>
+            <a:off x="6452464" y="2231136"/>
+            <a:ext cx="603504" cy="603504"/>
+          </a:xfrm>
+          <a:prstGeom prst="roundRect">
+            <a:avLst>
+              <a:gd name="adj" fmla="val 19697"/>
+            </a:avLst>
+          </a:prstGeom>
+          <a:solidFill>
+            <a:srgbClr val="7C3AED"/>
+          </a:solidFill>
+          <a:ln/>
+        </p:spPr>
+      </p:sp>
+      <p:pic>
+        <p:nvPicPr>
+          <p:cNvPr id="21" name="Image 4" descr="icons/plug.png">    </p:cNvPr>
+          <p:cNvPicPr>
+            <a:picLocks noChangeAspect="1"/>
+          </p:cNvPicPr>
+          <p:nvPr/>
+        </p:nvPicPr>
+        <p:blipFill>
+          <a:blip r:embed="rId5"/>
+          <a:stretch>
+            <a:fillRect/>
+          </a:stretch>
+        </p:blipFill>
+        <p:spPr>
+          <a:xfrm>
+            <a:off x="6607912" y="2386584"/>
+            <a:ext cx="292608" cy="292608"/>
+          </a:xfrm>
+          <a:prstGeom prst="rect">
+            <a:avLst/>
+          </a:prstGeom>
+        </p:spPr>
+      </p:pic>
+      <p:sp>
+        <p:nvSpPr>
+          <p:cNvPr id="22" name="Text 15"/>
+          <p:cNvSpPr/>
+          <p:nvPr/>
+        </p:nvSpPr>
+        <p:spPr>
+          <a:xfrm>
+            <a:off x="6434176" y="2944368"/>
+            <a:ext cx="2188388" cy="548640"/>
+          </a:xfrm>
+          <a:prstGeom prst="rect">
+            <a:avLst/>
+          </a:prstGeom>
+          <a:noFill/>
+          <a:ln/>
+        </p:spPr>
+        <p:txBody>
+          <a:bodyPr wrap="square" lIns="0" tIns="0" rIns="0" bIns="0" rtlCol="0" anchor="t"/>
+          <a:lstStyle/>
+          <a:p>
+            <a:pPr indent="0" marL="0">
+              <a:buNone/>
+            </a:pPr>
+            <a:r>
+              <a:rPr lang="en-US" sz="1400" b="1" dirty="0">
+                <a:solidFill>
+                  <a:srgbClr val="0F172A"/>
+                </a:solidFill>
+                <a:latin typeface="Calibri" pitchFamily="34" charset="0"/>
+                <a:ea typeface="Calibri" pitchFamily="34" charset="-122"/>
+                <a:cs typeface="Calibri" pitchFamily="34" charset="-120"/>
+              </a:rPr>
+              <a:t>Integrate — 6–10 wks</a:t>
+            </a:r>
+            <a:endParaRPr lang="en-US" sz="1400" dirty="0"/>
+          </a:p>
+        </p:txBody>
+      </p:sp>
+      <p:sp>
+        <p:nvSpPr>
+          <p:cNvPr id="23" name="Text 16"/>
+          <p:cNvSpPr/>
+          <p:nvPr/>
+        </p:nvSpPr>
+        <p:spPr>
+          <a:xfrm>
+            <a:off x="6452464" y="3493008"/>
+            <a:ext cx="2170100" cy="1691640"/>
+          </a:xfrm>
+          <a:prstGeom prst="rect">
+            <a:avLst/>
+          </a:prstGeom>
+          <a:noFill/>
+          <a:ln/>
+        </p:spPr>
+        <p:txBody>
+          <a:bodyPr wrap="square" lIns="0" tIns="0" rIns="0" bIns="0" rtlCol="0" anchor="t"/>
+          <a:lstStyle/>
+          <a:p>
+            <a:pPr marL="152400" indent="-152400">
+              <a:spcAft>
+                <a:spcPts val="700"/>
+              </a:spcAft>
+              <a:buSzPct val="100000"/>
+              <a:buChar char="•"/>
+            </a:pPr>
+            <a:r>
+              <a:rPr lang="en-US" sz="1150" dirty="0">
+                <a:solidFill>
+                  <a:srgbClr val="5B6577"/>
+                </a:solidFill>
+                <a:latin typeface="Calibri" pitchFamily="34" charset="0"/>
+                <a:ea typeface="Calibri" pitchFamily="34" charset="-122"/>
+                <a:cs typeface="Calibri" pitchFamily="34" charset="-120"/>
+              </a:rPr>
+              <a:t>Live inventory/OMS + payment provider</a:t>
+            </a:r>
+            <a:endParaRPr lang="en-US" sz="1150" dirty="0"/>
+          </a:p>
+          <a:p>
+            <a:pPr marL="152400" indent="-152400">
+              <a:spcAft>
+                <a:spcPts val="700"/>
+              </a:spcAft>
+              <a:buSzPct val="100000"/>
+              <a:buChar char="•"/>
+            </a:pPr>
+            <a:r>
+              <a:rPr lang="en-US" sz="1150" dirty="0">
+                <a:solidFill>
+                  <a:srgbClr val="5B6577"/>
+                </a:solidFill>
+                <a:latin typeface="Calibri" pitchFamily="34" charset="0"/>
+                <a:ea typeface="Calibri" pitchFamily="34" charset="-122"/>
+                <a:cs typeface="Calibri" pitchFamily="34" charset="-120"/>
+              </a:rPr>
+              <a:t>CCAI telephony + agent-assist</a:t>
+            </a:r>
+            <a:endParaRPr lang="en-US" sz="1150" dirty="0"/>
+          </a:p>
+          <a:p>
+            <a:pPr marL="152400" indent="-152400">
+              <a:spcAft>
+                <a:spcPts val="700"/>
+              </a:spcAft>
+              <a:buSzPct val="100000"/>
+              <a:buChar char="•"/>
+            </a:pPr>
+            <a:r>
+              <a:rPr lang="en-US" sz="1150" dirty="0">
+                <a:solidFill>
+                  <a:srgbClr val="5B6577"/>
+                </a:solidFill>
+                <a:latin typeface="Calibri" pitchFamily="34" charset="0"/>
+                <a:ea typeface="Calibri" pitchFamily="34" charset="-122"/>
+                <a:cs typeface="Calibri" pitchFamily="34" charset="-120"/>
+              </a:rPr>
+              <a:t>Vertex Translation for long-tail locales</a:t>
+            </a:r>
+            <a:endParaRPr lang="en-US" sz="1150" dirty="0"/>
+          </a:p>
+        </p:txBody>
+      </p:sp>
+      <p:pic>
+        <p:nvPicPr>
+          <p:cNvPr id="24" name="Image 5" descr="icons/arrow.png">    </p:cNvPr>
+          <p:cNvPicPr>
+            <a:picLocks noChangeAspect="1"/>
+          </p:cNvPicPr>
+          <p:nvPr/>
+        </p:nvPicPr>
+        <p:blipFill>
+          <a:blip r:embed="rId6"/>
+          <a:stretch>
+            <a:fillRect/>
+          </a:stretch>
+        </p:blipFill>
+        <p:spPr>
+          <a:xfrm>
+            <a:off x="8823731" y="3474720"/>
+            <a:ext cx="256032" cy="256032"/>
+          </a:xfrm>
+          <a:prstGeom prst="rect">
+            <a:avLst/>
+          </a:prstGeom>
+        </p:spPr>
+      </p:pic>
+      <p:sp>
+        <p:nvSpPr>
+          <p:cNvPr id="25" name="Shape 17"/>
+          <p:cNvSpPr/>
+          <p:nvPr/>
+        </p:nvSpPr>
+        <p:spPr>
+          <a:xfrm>
+            <a:off x="9098051" y="1920240"/>
+            <a:ext cx="2590724" cy="3383280"/>
+          </a:xfrm>
+          <a:prstGeom prst="roundRect">
+            <a:avLst>
+              <a:gd name="adj" fmla="val 3177"/>
+            </a:avLst>
+          </a:prstGeom>
+          <a:solidFill>
+            <a:srgbClr val="FFFFFF"/>
+          </a:solidFill>
+          <a:ln w="12700">
+            <a:solidFill>
+              <a:srgbClr val="E6E8F0"/>
+            </a:solidFill>
+            <a:prstDash val="solid"/>
+          </a:ln>
+          <a:effectLst>
+            <a:outerShdw sx="100000" sy="100000" kx="0" ky="0" algn="bl" rotWithShape="0" blurRad="114300" dist="38100" dir="8100000">
+              <a:srgbClr val="0F172A">
+                <a:alpha val="16000"/>
+              </a:srgbClr>
+            </a:outerShdw>
+          </a:effectLst>
+        </p:spPr>
+      </p:sp>
+      <p:sp>
+        <p:nvSpPr>
           <p:cNvPr id="26" name="Shape 18"/>
           <p:cNvSpPr/>
           <p:nvPr/>
@@ -7385,7 +11406,7 @@
                 <a:ea typeface="Calibri" pitchFamily="34" charset="-122"/>
                 <a:cs typeface="Calibri" pitchFamily="34" charset="-120"/>
               </a:rPr>
-              <a:t>13</a:t>
+              <a:t>16</a:t>
             </a:r>
             <a:endParaRPr lang="en-US" sz="900" dirty="0"/>
           </a:p>
@@ -7396,12 +11417,15 @@
   <p:clrMapOvr>
     <a:masterClrMapping/>
   </p:clrMapOvr>
+  <p:transition spd="med">
+    <p:fade/>
+  </p:transition>
 </p:sld>
 </file>
 
-<file path=ppt/slides/slide14.xml><?xml version="1.0" encoding="utf-8"?>
+<file path=ppt/slides/slide17.xml><?xml version="1.0" encoding="utf-8"?>
 <p:sld xmlns:a="http://schemas.openxmlformats.org/drawingml/2006/main" xmlns:r="http://schemas.openxmlformats.org/officeDocument/2006/relationships" xmlns:p="http://schemas.openxmlformats.org/presentationml/2006/main">
-  <p:cSld name="Slide 14">
+  <p:cSld name="Slide 17">
     <p:bg>
       <p:bgPr>
         <a:blipFill dpi="0" rotWithShape="1">
@@ -8114,6 +12138,9 @@
   <p:clrMapOvr>
     <a:masterClrMapping/>
   </p:clrMapOvr>
+  <p:transition spd="med">
+    <p:fade/>
+  </p:transition>
 </p:sld>
 </file>
 
@@ -9173,6 +13200,9 @@
   <p:clrMapOvr>
     <a:masterClrMapping/>
   </p:clrMapOvr>
+  <p:transition spd="med">
+    <p:fade/>
+  </p:transition>
 </p:sld>
 </file>
 
@@ -10152,6 +14182,9 @@
   <p:clrMapOvr>
     <a:masterClrMapping/>
   </p:clrMapOvr>
+  <p:transition spd="med">
+    <p:fade/>
+  </p:transition>
 </p:sld>
 </file>
 
@@ -12126,6 +16159,9 @@
   <p:clrMapOvr>
     <a:masterClrMapping/>
   </p:clrMapOvr>
+  <p:transition spd="med">
+    <p:fade/>
+  </p:transition>
 </p:sld>
 </file>
 
@@ -14233,6 +18269,9 @@
   <p:clrMapOvr>
     <a:masterClrMapping/>
   </p:clrMapOvr>
+  <p:transition spd="med">
+    <p:fade/>
+  </p:transition>
 </p:sld>
 </file>
 
@@ -15939,6 +19978,9 @@
   <p:clrMapOvr>
     <a:masterClrMapping/>
   </p:clrMapOvr>
+  <p:transition spd="med">
+    <p:fade/>
+  </p:transition>
 </p:sld>
 </file>
 
@@ -16707,6 +20749,9 @@
   <p:clrMapOvr>
     <a:masterClrMapping/>
   </p:clrMapOvr>
+  <p:transition spd="med">
+    <p:fade/>
+  </p:transition>
 </p:sld>
 </file>
 
@@ -17711,6 +21756,9 @@
   <p:clrMapOvr>
     <a:masterClrMapping/>
   </p:clrMapOvr>
+  <p:transition spd="med">
+    <p:fade/>
+  </p:transition>
 </p:sld>
 </file>
 
@@ -19165,6 +23213,9 @@
   <p:clrMapOvr>
     <a:masterClrMapping/>
   </p:clrMapOvr>
+  <p:transition spd="med">
+    <p:fade/>
+  </p:transition>
 </p:sld>
 </file>
 

--- a/PRESENTATION.pptx
+++ b/PRESENTATION.pptx
@@ -4413,6 +4413,1404 @@
   <p:transition spd="med">
     <p:fade/>
   </p:transition>
+  <p:timing>
+    <p:tnLst>
+      <p:par>
+        <p:cTn id="1" dur="indefinite" restart="never" nodeType="tmRoot">
+          <p:childTnLst>
+            <p:seq concurrent="1" nextAc="seek">
+              <p:cTn id="2" dur="indefinite" nodeType="mainSeq">
+                <p:childTnLst>
+                  <p:par>
+                    <p:cTn id="3" fill="hold">
+                      <p:stCondLst>
+                        <p:cond delay="indefinite"/>
+                      </p:stCondLst>
+                      <p:childTnLst>
+                        <p:par>
+                          <p:cTn id="4" fill="hold">
+                            <p:stCondLst>
+                              <p:cond delay="0"/>
+                            </p:stCondLst>
+                            <p:childTnLst>
+                              <p:par>
+                                <p:cTn id="5" presetID="10" presetClass="entr" presetSubtype="0" fill="hold" grpId="0" nodeType="clickEffect">
+                                  <p:stCondLst>
+                                    <p:cond delay="0"/>
+                                  </p:stCondLst>
+                                  <p:childTnLst>
+                                    <p:set>
+                                      <p:cBhvr>
+                                        <p:cTn id="6" dur="1" fill="hold">
+                                          <p:stCondLst>
+                                            <p:cond delay="0"/>
+                                          </p:stCondLst>
+                                        </p:cTn>
+                                        <p:tgtEl>
+                                          <p:spTgt spid="4"/>
+                                        </p:tgtEl>
+                                        <p:attrNameLst>
+                                          <p:attrName>style.visibility</p:attrName>
+                                        </p:attrNameLst>
+                                      </p:cBhvr>
+                                      <p:to>
+                                        <p:strVal val="visible"/>
+                                      </p:to>
+                                    </p:set>
+                                    <p:animEffect transition="in" filter="fade">
+                                      <p:cBhvr>
+                                        <p:cTn id="7" dur="500"/>
+                                        <p:tgtEl>
+                                          <p:spTgt spid="4"/>
+                                        </p:tgtEl>
+                                      </p:cBhvr>
+                                    </p:animEffect>
+                                  </p:childTnLst>
+                                </p:cTn>
+                              </p:par>
+                              <p:par>
+                                <p:cTn id="8" presetID="10" presetClass="entr" presetSubtype="0" fill="hold" grpId="0" nodeType="withEffect">
+                                  <p:stCondLst>
+                                    <p:cond delay="0"/>
+                                  </p:stCondLst>
+                                  <p:childTnLst>
+                                    <p:set>
+                                      <p:cBhvr>
+                                        <p:cTn id="9" dur="1" fill="hold">
+                                          <p:stCondLst>
+                                            <p:cond delay="0"/>
+                                          </p:stCondLst>
+                                        </p:cTn>
+                                        <p:tgtEl>
+                                          <p:spTgt spid="5"/>
+                                        </p:tgtEl>
+                                        <p:attrNameLst>
+                                          <p:attrName>style.visibility</p:attrName>
+                                        </p:attrNameLst>
+                                      </p:cBhvr>
+                                      <p:to>
+                                        <p:strVal val="visible"/>
+                                      </p:to>
+                                    </p:set>
+                                    <p:animEffect transition="in" filter="fade">
+                                      <p:cBhvr>
+                                        <p:cTn id="10" dur="500"/>
+                                        <p:tgtEl>
+                                          <p:spTgt spid="5"/>
+                                        </p:tgtEl>
+                                      </p:cBhvr>
+                                    </p:animEffect>
+                                  </p:childTnLst>
+                                </p:cTn>
+                              </p:par>
+                              <p:par>
+                                <p:cTn id="11" presetID="10" presetClass="entr" presetSubtype="0" fill="hold" grpId="0" nodeType="withEffect">
+                                  <p:stCondLst>
+                                    <p:cond delay="0"/>
+                                  </p:stCondLst>
+                                  <p:childTnLst>
+                                    <p:set>
+                                      <p:cBhvr>
+                                        <p:cTn id="12" dur="1" fill="hold">
+                                          <p:stCondLst>
+                                            <p:cond delay="0"/>
+                                          </p:stCondLst>
+                                        </p:cTn>
+                                        <p:tgtEl>
+                                          <p:spTgt spid="6"/>
+                                        </p:tgtEl>
+                                        <p:attrNameLst>
+                                          <p:attrName>style.visibility</p:attrName>
+                                        </p:attrNameLst>
+                                      </p:cBhvr>
+                                      <p:to>
+                                        <p:strVal val="visible"/>
+                                      </p:to>
+                                    </p:set>
+                                    <p:animEffect transition="in" filter="fade">
+                                      <p:cBhvr>
+                                        <p:cTn id="13" dur="500"/>
+                                        <p:tgtEl>
+                                          <p:spTgt spid="6"/>
+                                        </p:tgtEl>
+                                      </p:cBhvr>
+                                    </p:animEffect>
+                                  </p:childTnLst>
+                                </p:cTn>
+                              </p:par>
+                              <p:par>
+                                <p:cTn id="14" presetID="10" presetClass="entr" presetSubtype="0" fill="hold" grpId="0" nodeType="withEffect">
+                                  <p:stCondLst>
+                                    <p:cond delay="0"/>
+                                  </p:stCondLst>
+                                  <p:childTnLst>
+                                    <p:set>
+                                      <p:cBhvr>
+                                        <p:cTn id="15" dur="1" fill="hold">
+                                          <p:stCondLst>
+                                            <p:cond delay="0"/>
+                                          </p:stCondLst>
+                                        </p:cTn>
+                                        <p:tgtEl>
+                                          <p:spTgt spid="7"/>
+                                        </p:tgtEl>
+                                        <p:attrNameLst>
+                                          <p:attrName>style.visibility</p:attrName>
+                                        </p:attrNameLst>
+                                      </p:cBhvr>
+                                      <p:to>
+                                        <p:strVal val="visible"/>
+                                      </p:to>
+                                    </p:set>
+                                    <p:animEffect transition="in" filter="fade">
+                                      <p:cBhvr>
+                                        <p:cTn id="16" dur="500"/>
+                                        <p:tgtEl>
+                                          <p:spTgt spid="7"/>
+                                        </p:tgtEl>
+                                      </p:cBhvr>
+                                    </p:animEffect>
+                                  </p:childTnLst>
+                                </p:cTn>
+                              </p:par>
+                              <p:par>
+                                <p:cTn id="17" presetID="10" presetClass="entr" presetSubtype="0" fill="hold" grpId="0" nodeType="withEffect">
+                                  <p:stCondLst>
+                                    <p:cond delay="0"/>
+                                  </p:stCondLst>
+                                  <p:childTnLst>
+                                    <p:set>
+                                      <p:cBhvr>
+                                        <p:cTn id="18" dur="1" fill="hold">
+                                          <p:stCondLst>
+                                            <p:cond delay="0"/>
+                                          </p:stCondLst>
+                                        </p:cTn>
+                                        <p:tgtEl>
+                                          <p:spTgt spid="8"/>
+                                        </p:tgtEl>
+                                        <p:attrNameLst>
+                                          <p:attrName>style.visibility</p:attrName>
+                                        </p:attrNameLst>
+                                      </p:cBhvr>
+                                      <p:to>
+                                        <p:strVal val="visible"/>
+                                      </p:to>
+                                    </p:set>
+                                    <p:animEffect transition="in" filter="fade">
+                                      <p:cBhvr>
+                                        <p:cTn id="19" dur="500"/>
+                                        <p:tgtEl>
+                                          <p:spTgt spid="8"/>
+                                        </p:tgtEl>
+                                      </p:cBhvr>
+                                    </p:animEffect>
+                                  </p:childTnLst>
+                                </p:cTn>
+                              </p:par>
+                              <p:par>
+                                <p:cTn id="20" presetID="10" presetClass="entr" presetSubtype="0" fill="hold" grpId="0" nodeType="withEffect">
+                                  <p:stCondLst>
+                                    <p:cond delay="0"/>
+                                  </p:stCondLst>
+                                  <p:childTnLst>
+                                    <p:set>
+                                      <p:cBhvr>
+                                        <p:cTn id="21" dur="1" fill="hold">
+                                          <p:stCondLst>
+                                            <p:cond delay="0"/>
+                                          </p:stCondLst>
+                                        </p:cTn>
+                                        <p:tgtEl>
+                                          <p:spTgt spid="9"/>
+                                        </p:tgtEl>
+                                        <p:attrNameLst>
+                                          <p:attrName>style.visibility</p:attrName>
+                                        </p:attrNameLst>
+                                      </p:cBhvr>
+                                      <p:to>
+                                        <p:strVal val="visible"/>
+                                      </p:to>
+                                    </p:set>
+                                    <p:animEffect transition="in" filter="fade">
+                                      <p:cBhvr>
+                                        <p:cTn id="22" dur="500"/>
+                                        <p:tgtEl>
+                                          <p:spTgt spid="9"/>
+                                        </p:tgtEl>
+                                      </p:cBhvr>
+                                    </p:animEffect>
+                                  </p:childTnLst>
+                                </p:cTn>
+                              </p:par>
+                            </p:childTnLst>
+                          </p:cTn>
+                        </p:par>
+                      </p:childTnLst>
+                    </p:cTn>
+                  </p:par>
+                  <p:par>
+                    <p:cTn id="23" fill="hold">
+                      <p:stCondLst>
+                        <p:cond delay="indefinite"/>
+                      </p:stCondLst>
+                      <p:childTnLst>
+                        <p:par>
+                          <p:cTn id="24" fill="hold">
+                            <p:stCondLst>
+                              <p:cond delay="0"/>
+                            </p:stCondLst>
+                            <p:childTnLst>
+                              <p:par>
+                                <p:cTn id="25" presetID="10" presetClass="entr" presetSubtype="0" fill="hold" grpId="0" nodeType="clickEffect">
+                                  <p:stCondLst>
+                                    <p:cond delay="0"/>
+                                  </p:stCondLst>
+                                  <p:childTnLst>
+                                    <p:set>
+                                      <p:cBhvr>
+                                        <p:cTn id="26" dur="1" fill="hold">
+                                          <p:stCondLst>
+                                            <p:cond delay="0"/>
+                                          </p:stCondLst>
+                                        </p:cTn>
+                                        <p:tgtEl>
+                                          <p:spTgt spid="10"/>
+                                        </p:tgtEl>
+                                        <p:attrNameLst>
+                                          <p:attrName>style.visibility</p:attrName>
+                                        </p:attrNameLst>
+                                      </p:cBhvr>
+                                      <p:to>
+                                        <p:strVal val="visible"/>
+                                      </p:to>
+                                    </p:set>
+                                    <p:animEffect transition="in" filter="fade">
+                                      <p:cBhvr>
+                                        <p:cTn id="27" dur="500"/>
+                                        <p:tgtEl>
+                                          <p:spTgt spid="10"/>
+                                        </p:tgtEl>
+                                      </p:cBhvr>
+                                    </p:animEffect>
+                                  </p:childTnLst>
+                                </p:cTn>
+                              </p:par>
+                              <p:par>
+                                <p:cTn id="28" presetID="10" presetClass="entr" presetSubtype="0" fill="hold" grpId="0" nodeType="withEffect">
+                                  <p:stCondLst>
+                                    <p:cond delay="0"/>
+                                  </p:stCondLst>
+                                  <p:childTnLst>
+                                    <p:set>
+                                      <p:cBhvr>
+                                        <p:cTn id="29" dur="1" fill="hold">
+                                          <p:stCondLst>
+                                            <p:cond delay="0"/>
+                                          </p:stCondLst>
+                                        </p:cTn>
+                                        <p:tgtEl>
+                                          <p:spTgt spid="11"/>
+                                        </p:tgtEl>
+                                        <p:attrNameLst>
+                                          <p:attrName>style.visibility</p:attrName>
+                                        </p:attrNameLst>
+                                      </p:cBhvr>
+                                      <p:to>
+                                        <p:strVal val="visible"/>
+                                      </p:to>
+                                    </p:set>
+                                    <p:animEffect transition="in" filter="fade">
+                                      <p:cBhvr>
+                                        <p:cTn id="30" dur="500"/>
+                                        <p:tgtEl>
+                                          <p:spTgt spid="11"/>
+                                        </p:tgtEl>
+                                      </p:cBhvr>
+                                    </p:animEffect>
+                                  </p:childTnLst>
+                                </p:cTn>
+                              </p:par>
+                              <p:par>
+                                <p:cTn id="31" presetID="10" presetClass="entr" presetSubtype="0" fill="hold" grpId="0" nodeType="withEffect">
+                                  <p:stCondLst>
+                                    <p:cond delay="0"/>
+                                  </p:stCondLst>
+                                  <p:childTnLst>
+                                    <p:set>
+                                      <p:cBhvr>
+                                        <p:cTn id="32" dur="1" fill="hold">
+                                          <p:stCondLst>
+                                            <p:cond delay="0"/>
+                                          </p:stCondLst>
+                                        </p:cTn>
+                                        <p:tgtEl>
+                                          <p:spTgt spid="12"/>
+                                        </p:tgtEl>
+                                        <p:attrNameLst>
+                                          <p:attrName>style.visibility</p:attrName>
+                                        </p:attrNameLst>
+                                      </p:cBhvr>
+                                      <p:to>
+                                        <p:strVal val="visible"/>
+                                      </p:to>
+                                    </p:set>
+                                    <p:animEffect transition="in" filter="fade">
+                                      <p:cBhvr>
+                                        <p:cTn id="33" dur="500"/>
+                                        <p:tgtEl>
+                                          <p:spTgt spid="12"/>
+                                        </p:tgtEl>
+                                      </p:cBhvr>
+                                    </p:animEffect>
+                                  </p:childTnLst>
+                                </p:cTn>
+                              </p:par>
+                              <p:par>
+                                <p:cTn id="34" presetID="10" presetClass="entr" presetSubtype="0" fill="hold" grpId="0" nodeType="withEffect">
+                                  <p:stCondLst>
+                                    <p:cond delay="0"/>
+                                  </p:stCondLst>
+                                  <p:childTnLst>
+                                    <p:set>
+                                      <p:cBhvr>
+                                        <p:cTn id="35" dur="1" fill="hold">
+                                          <p:stCondLst>
+                                            <p:cond delay="0"/>
+                                          </p:stCondLst>
+                                        </p:cTn>
+                                        <p:tgtEl>
+                                          <p:spTgt spid="13"/>
+                                        </p:tgtEl>
+                                        <p:attrNameLst>
+                                          <p:attrName>style.visibility</p:attrName>
+                                        </p:attrNameLst>
+                                      </p:cBhvr>
+                                      <p:to>
+                                        <p:strVal val="visible"/>
+                                      </p:to>
+                                    </p:set>
+                                    <p:animEffect transition="in" filter="fade">
+                                      <p:cBhvr>
+                                        <p:cTn id="36" dur="500"/>
+                                        <p:tgtEl>
+                                          <p:spTgt spid="13"/>
+                                        </p:tgtEl>
+                                      </p:cBhvr>
+                                    </p:animEffect>
+                                  </p:childTnLst>
+                                </p:cTn>
+                              </p:par>
+                              <p:par>
+                                <p:cTn id="37" presetID="10" presetClass="entr" presetSubtype="0" fill="hold" grpId="0" nodeType="withEffect">
+                                  <p:stCondLst>
+                                    <p:cond delay="0"/>
+                                  </p:stCondLst>
+                                  <p:childTnLst>
+                                    <p:set>
+                                      <p:cBhvr>
+                                        <p:cTn id="38" dur="1" fill="hold">
+                                          <p:stCondLst>
+                                            <p:cond delay="0"/>
+                                          </p:stCondLst>
+                                        </p:cTn>
+                                        <p:tgtEl>
+                                          <p:spTgt spid="14"/>
+                                        </p:tgtEl>
+                                        <p:attrNameLst>
+                                          <p:attrName>style.visibility</p:attrName>
+                                        </p:attrNameLst>
+                                      </p:cBhvr>
+                                      <p:to>
+                                        <p:strVal val="visible"/>
+                                      </p:to>
+                                    </p:set>
+                                    <p:animEffect transition="in" filter="fade">
+                                      <p:cBhvr>
+                                        <p:cTn id="39" dur="500"/>
+                                        <p:tgtEl>
+                                          <p:spTgt spid="14"/>
+                                        </p:tgtEl>
+                                      </p:cBhvr>
+                                    </p:animEffect>
+                                  </p:childTnLst>
+                                </p:cTn>
+                              </p:par>
+                              <p:par>
+                                <p:cTn id="40" presetID="10" presetClass="entr" presetSubtype="0" fill="hold" grpId="0" nodeType="withEffect">
+                                  <p:stCondLst>
+                                    <p:cond delay="0"/>
+                                  </p:stCondLst>
+                                  <p:childTnLst>
+                                    <p:set>
+                                      <p:cBhvr>
+                                        <p:cTn id="41" dur="1" fill="hold">
+                                          <p:stCondLst>
+                                            <p:cond delay="0"/>
+                                          </p:stCondLst>
+                                        </p:cTn>
+                                        <p:tgtEl>
+                                          <p:spTgt spid="15"/>
+                                        </p:tgtEl>
+                                        <p:attrNameLst>
+                                          <p:attrName>style.visibility</p:attrName>
+                                        </p:attrNameLst>
+                                      </p:cBhvr>
+                                      <p:to>
+                                        <p:strVal val="visible"/>
+                                      </p:to>
+                                    </p:set>
+                                    <p:animEffect transition="in" filter="fade">
+                                      <p:cBhvr>
+                                        <p:cTn id="42" dur="500"/>
+                                        <p:tgtEl>
+                                          <p:spTgt spid="15"/>
+                                        </p:tgtEl>
+                                      </p:cBhvr>
+                                    </p:animEffect>
+                                  </p:childTnLst>
+                                </p:cTn>
+                              </p:par>
+                            </p:childTnLst>
+                          </p:cTn>
+                        </p:par>
+                      </p:childTnLst>
+                    </p:cTn>
+                  </p:par>
+                  <p:par>
+                    <p:cTn id="43" fill="hold">
+                      <p:stCondLst>
+                        <p:cond delay="indefinite"/>
+                      </p:stCondLst>
+                      <p:childTnLst>
+                        <p:par>
+                          <p:cTn id="44" fill="hold">
+                            <p:stCondLst>
+                              <p:cond delay="0"/>
+                            </p:stCondLst>
+                            <p:childTnLst>
+                              <p:par>
+                                <p:cTn id="45" presetID="10" presetClass="entr" presetSubtype="0" fill="hold" grpId="0" nodeType="clickEffect">
+                                  <p:stCondLst>
+                                    <p:cond delay="0"/>
+                                  </p:stCondLst>
+                                  <p:childTnLst>
+                                    <p:set>
+                                      <p:cBhvr>
+                                        <p:cTn id="46" dur="1" fill="hold">
+                                          <p:stCondLst>
+                                            <p:cond delay="0"/>
+                                          </p:stCondLst>
+                                        </p:cTn>
+                                        <p:tgtEl>
+                                          <p:spTgt spid="16"/>
+                                        </p:tgtEl>
+                                        <p:attrNameLst>
+                                          <p:attrName>style.visibility</p:attrName>
+                                        </p:attrNameLst>
+                                      </p:cBhvr>
+                                      <p:to>
+                                        <p:strVal val="visible"/>
+                                      </p:to>
+                                    </p:set>
+                                    <p:animEffect transition="in" filter="fade">
+                                      <p:cBhvr>
+                                        <p:cTn id="47" dur="500"/>
+                                        <p:tgtEl>
+                                          <p:spTgt spid="16"/>
+                                        </p:tgtEl>
+                                      </p:cBhvr>
+                                    </p:animEffect>
+                                  </p:childTnLst>
+                                </p:cTn>
+                              </p:par>
+                              <p:par>
+                                <p:cTn id="48" presetID="10" presetClass="entr" presetSubtype="0" fill="hold" grpId="0" nodeType="withEffect">
+                                  <p:stCondLst>
+                                    <p:cond delay="0"/>
+                                  </p:stCondLst>
+                                  <p:childTnLst>
+                                    <p:set>
+                                      <p:cBhvr>
+                                        <p:cTn id="49" dur="1" fill="hold">
+                                          <p:stCondLst>
+                                            <p:cond delay="0"/>
+                                          </p:stCondLst>
+                                        </p:cTn>
+                                        <p:tgtEl>
+                                          <p:spTgt spid="17"/>
+                                        </p:tgtEl>
+                                        <p:attrNameLst>
+                                          <p:attrName>style.visibility</p:attrName>
+                                        </p:attrNameLst>
+                                      </p:cBhvr>
+                                      <p:to>
+                                        <p:strVal val="visible"/>
+                                      </p:to>
+                                    </p:set>
+                                    <p:animEffect transition="in" filter="fade">
+                                      <p:cBhvr>
+                                        <p:cTn id="50" dur="500"/>
+                                        <p:tgtEl>
+                                          <p:spTgt spid="17"/>
+                                        </p:tgtEl>
+                                      </p:cBhvr>
+                                    </p:animEffect>
+                                  </p:childTnLst>
+                                </p:cTn>
+                              </p:par>
+                              <p:par>
+                                <p:cTn id="51" presetID="10" presetClass="entr" presetSubtype="0" fill="hold" grpId="0" nodeType="withEffect">
+                                  <p:stCondLst>
+                                    <p:cond delay="0"/>
+                                  </p:stCondLst>
+                                  <p:childTnLst>
+                                    <p:set>
+                                      <p:cBhvr>
+                                        <p:cTn id="52" dur="1" fill="hold">
+                                          <p:stCondLst>
+                                            <p:cond delay="0"/>
+                                          </p:stCondLst>
+                                        </p:cTn>
+                                        <p:tgtEl>
+                                          <p:spTgt spid="18"/>
+                                        </p:tgtEl>
+                                        <p:attrNameLst>
+                                          <p:attrName>style.visibility</p:attrName>
+                                        </p:attrNameLst>
+                                      </p:cBhvr>
+                                      <p:to>
+                                        <p:strVal val="visible"/>
+                                      </p:to>
+                                    </p:set>
+                                    <p:animEffect transition="in" filter="fade">
+                                      <p:cBhvr>
+                                        <p:cTn id="53" dur="500"/>
+                                        <p:tgtEl>
+                                          <p:spTgt spid="18"/>
+                                        </p:tgtEl>
+                                      </p:cBhvr>
+                                    </p:animEffect>
+                                  </p:childTnLst>
+                                </p:cTn>
+                              </p:par>
+                              <p:par>
+                                <p:cTn id="54" presetID="10" presetClass="entr" presetSubtype="0" fill="hold" grpId="0" nodeType="withEffect">
+                                  <p:stCondLst>
+                                    <p:cond delay="0"/>
+                                  </p:stCondLst>
+                                  <p:childTnLst>
+                                    <p:set>
+                                      <p:cBhvr>
+                                        <p:cTn id="55" dur="1" fill="hold">
+                                          <p:stCondLst>
+                                            <p:cond delay="0"/>
+                                          </p:stCondLst>
+                                        </p:cTn>
+                                        <p:tgtEl>
+                                          <p:spTgt spid="19"/>
+                                        </p:tgtEl>
+                                        <p:attrNameLst>
+                                          <p:attrName>style.visibility</p:attrName>
+                                        </p:attrNameLst>
+                                      </p:cBhvr>
+                                      <p:to>
+                                        <p:strVal val="visible"/>
+                                      </p:to>
+                                    </p:set>
+                                    <p:animEffect transition="in" filter="fade">
+                                      <p:cBhvr>
+                                        <p:cTn id="56" dur="500"/>
+                                        <p:tgtEl>
+                                          <p:spTgt spid="19"/>
+                                        </p:tgtEl>
+                                      </p:cBhvr>
+                                    </p:animEffect>
+                                  </p:childTnLst>
+                                </p:cTn>
+                              </p:par>
+                              <p:par>
+                                <p:cTn id="57" presetID="10" presetClass="entr" presetSubtype="0" fill="hold" grpId="0" nodeType="withEffect">
+                                  <p:stCondLst>
+                                    <p:cond delay="0"/>
+                                  </p:stCondLst>
+                                  <p:childTnLst>
+                                    <p:set>
+                                      <p:cBhvr>
+                                        <p:cTn id="58" dur="1" fill="hold">
+                                          <p:stCondLst>
+                                            <p:cond delay="0"/>
+                                          </p:stCondLst>
+                                        </p:cTn>
+                                        <p:tgtEl>
+                                          <p:spTgt spid="20"/>
+                                        </p:tgtEl>
+                                        <p:attrNameLst>
+                                          <p:attrName>style.visibility</p:attrName>
+                                        </p:attrNameLst>
+                                      </p:cBhvr>
+                                      <p:to>
+                                        <p:strVal val="visible"/>
+                                      </p:to>
+                                    </p:set>
+                                    <p:animEffect transition="in" filter="fade">
+                                      <p:cBhvr>
+                                        <p:cTn id="59" dur="500"/>
+                                        <p:tgtEl>
+                                          <p:spTgt spid="20"/>
+                                        </p:tgtEl>
+                                      </p:cBhvr>
+                                    </p:animEffect>
+                                  </p:childTnLst>
+                                </p:cTn>
+                              </p:par>
+                              <p:par>
+                                <p:cTn id="60" presetID="10" presetClass="entr" presetSubtype="0" fill="hold" grpId="0" nodeType="withEffect">
+                                  <p:stCondLst>
+                                    <p:cond delay="0"/>
+                                  </p:stCondLst>
+                                  <p:childTnLst>
+                                    <p:set>
+                                      <p:cBhvr>
+                                        <p:cTn id="61" dur="1" fill="hold">
+                                          <p:stCondLst>
+                                            <p:cond delay="0"/>
+                                          </p:stCondLst>
+                                        </p:cTn>
+                                        <p:tgtEl>
+                                          <p:spTgt spid="21"/>
+                                        </p:tgtEl>
+                                        <p:attrNameLst>
+                                          <p:attrName>style.visibility</p:attrName>
+                                        </p:attrNameLst>
+                                      </p:cBhvr>
+                                      <p:to>
+                                        <p:strVal val="visible"/>
+                                      </p:to>
+                                    </p:set>
+                                    <p:animEffect transition="in" filter="fade">
+                                      <p:cBhvr>
+                                        <p:cTn id="62" dur="500"/>
+                                        <p:tgtEl>
+                                          <p:spTgt spid="21"/>
+                                        </p:tgtEl>
+                                      </p:cBhvr>
+                                    </p:animEffect>
+                                  </p:childTnLst>
+                                </p:cTn>
+                              </p:par>
+                            </p:childTnLst>
+                          </p:cTn>
+                        </p:par>
+                      </p:childTnLst>
+                    </p:cTn>
+                  </p:par>
+                  <p:par>
+                    <p:cTn id="63" fill="hold">
+                      <p:stCondLst>
+                        <p:cond delay="indefinite"/>
+                      </p:stCondLst>
+                      <p:childTnLst>
+                        <p:par>
+                          <p:cTn id="64" fill="hold">
+                            <p:stCondLst>
+                              <p:cond delay="0"/>
+                            </p:stCondLst>
+                            <p:childTnLst>
+                              <p:par>
+                                <p:cTn id="65" presetID="10" presetClass="entr" presetSubtype="0" fill="hold" grpId="0" nodeType="clickEffect">
+                                  <p:stCondLst>
+                                    <p:cond delay="0"/>
+                                  </p:stCondLst>
+                                  <p:childTnLst>
+                                    <p:set>
+                                      <p:cBhvr>
+                                        <p:cTn id="66" dur="1" fill="hold">
+                                          <p:stCondLst>
+                                            <p:cond delay="0"/>
+                                          </p:stCondLst>
+                                        </p:cTn>
+                                        <p:tgtEl>
+                                          <p:spTgt spid="22"/>
+                                        </p:tgtEl>
+                                        <p:attrNameLst>
+                                          <p:attrName>style.visibility</p:attrName>
+                                        </p:attrNameLst>
+                                      </p:cBhvr>
+                                      <p:to>
+                                        <p:strVal val="visible"/>
+                                      </p:to>
+                                    </p:set>
+                                    <p:animEffect transition="in" filter="fade">
+                                      <p:cBhvr>
+                                        <p:cTn id="67" dur="500"/>
+                                        <p:tgtEl>
+                                          <p:spTgt spid="22"/>
+                                        </p:tgtEl>
+                                      </p:cBhvr>
+                                    </p:animEffect>
+                                  </p:childTnLst>
+                                </p:cTn>
+                              </p:par>
+                              <p:par>
+                                <p:cTn id="68" presetID="10" presetClass="entr" presetSubtype="0" fill="hold" grpId="0" nodeType="withEffect">
+                                  <p:stCondLst>
+                                    <p:cond delay="0"/>
+                                  </p:stCondLst>
+                                  <p:childTnLst>
+                                    <p:set>
+                                      <p:cBhvr>
+                                        <p:cTn id="69" dur="1" fill="hold">
+                                          <p:stCondLst>
+                                            <p:cond delay="0"/>
+                                          </p:stCondLst>
+                                        </p:cTn>
+                                        <p:tgtEl>
+                                          <p:spTgt spid="23"/>
+                                        </p:tgtEl>
+                                        <p:attrNameLst>
+                                          <p:attrName>style.visibility</p:attrName>
+                                        </p:attrNameLst>
+                                      </p:cBhvr>
+                                      <p:to>
+                                        <p:strVal val="visible"/>
+                                      </p:to>
+                                    </p:set>
+                                    <p:animEffect transition="in" filter="fade">
+                                      <p:cBhvr>
+                                        <p:cTn id="70" dur="500"/>
+                                        <p:tgtEl>
+                                          <p:spTgt spid="23"/>
+                                        </p:tgtEl>
+                                      </p:cBhvr>
+                                    </p:animEffect>
+                                  </p:childTnLst>
+                                </p:cTn>
+                              </p:par>
+                              <p:par>
+                                <p:cTn id="71" presetID="10" presetClass="entr" presetSubtype="0" fill="hold" grpId="0" nodeType="withEffect">
+                                  <p:stCondLst>
+                                    <p:cond delay="0"/>
+                                  </p:stCondLst>
+                                  <p:childTnLst>
+                                    <p:set>
+                                      <p:cBhvr>
+                                        <p:cTn id="72" dur="1" fill="hold">
+                                          <p:stCondLst>
+                                            <p:cond delay="0"/>
+                                          </p:stCondLst>
+                                        </p:cTn>
+                                        <p:tgtEl>
+                                          <p:spTgt spid="24"/>
+                                        </p:tgtEl>
+                                        <p:attrNameLst>
+                                          <p:attrName>style.visibility</p:attrName>
+                                        </p:attrNameLst>
+                                      </p:cBhvr>
+                                      <p:to>
+                                        <p:strVal val="visible"/>
+                                      </p:to>
+                                    </p:set>
+                                    <p:animEffect transition="in" filter="fade">
+                                      <p:cBhvr>
+                                        <p:cTn id="73" dur="500"/>
+                                        <p:tgtEl>
+                                          <p:spTgt spid="24"/>
+                                        </p:tgtEl>
+                                      </p:cBhvr>
+                                    </p:animEffect>
+                                  </p:childTnLst>
+                                </p:cTn>
+                              </p:par>
+                              <p:par>
+                                <p:cTn id="74" presetID="10" presetClass="entr" presetSubtype="0" fill="hold" grpId="0" nodeType="withEffect">
+                                  <p:stCondLst>
+                                    <p:cond delay="0"/>
+                                  </p:stCondLst>
+                                  <p:childTnLst>
+                                    <p:set>
+                                      <p:cBhvr>
+                                        <p:cTn id="75" dur="1" fill="hold">
+                                          <p:stCondLst>
+                                            <p:cond delay="0"/>
+                                          </p:stCondLst>
+                                        </p:cTn>
+                                        <p:tgtEl>
+                                          <p:spTgt spid="25"/>
+                                        </p:tgtEl>
+                                        <p:attrNameLst>
+                                          <p:attrName>style.visibility</p:attrName>
+                                        </p:attrNameLst>
+                                      </p:cBhvr>
+                                      <p:to>
+                                        <p:strVal val="visible"/>
+                                      </p:to>
+                                    </p:set>
+                                    <p:animEffect transition="in" filter="fade">
+                                      <p:cBhvr>
+                                        <p:cTn id="76" dur="500"/>
+                                        <p:tgtEl>
+                                          <p:spTgt spid="25"/>
+                                        </p:tgtEl>
+                                      </p:cBhvr>
+                                    </p:animEffect>
+                                  </p:childTnLst>
+                                </p:cTn>
+                              </p:par>
+                              <p:par>
+                                <p:cTn id="77" presetID="10" presetClass="entr" presetSubtype="0" fill="hold" grpId="0" nodeType="withEffect">
+                                  <p:stCondLst>
+                                    <p:cond delay="0"/>
+                                  </p:stCondLst>
+                                  <p:childTnLst>
+                                    <p:set>
+                                      <p:cBhvr>
+                                        <p:cTn id="78" dur="1" fill="hold">
+                                          <p:stCondLst>
+                                            <p:cond delay="0"/>
+                                          </p:stCondLst>
+                                        </p:cTn>
+                                        <p:tgtEl>
+                                          <p:spTgt spid="26"/>
+                                        </p:tgtEl>
+                                        <p:attrNameLst>
+                                          <p:attrName>style.visibility</p:attrName>
+                                        </p:attrNameLst>
+                                      </p:cBhvr>
+                                      <p:to>
+                                        <p:strVal val="visible"/>
+                                      </p:to>
+                                    </p:set>
+                                    <p:animEffect transition="in" filter="fade">
+                                      <p:cBhvr>
+                                        <p:cTn id="79" dur="500"/>
+                                        <p:tgtEl>
+                                          <p:spTgt spid="26"/>
+                                        </p:tgtEl>
+                                      </p:cBhvr>
+                                    </p:animEffect>
+                                  </p:childTnLst>
+                                </p:cTn>
+                              </p:par>
+                              <p:par>
+                                <p:cTn id="80" presetID="10" presetClass="entr" presetSubtype="0" fill="hold" grpId="0" nodeType="withEffect">
+                                  <p:stCondLst>
+                                    <p:cond delay="0"/>
+                                  </p:stCondLst>
+                                  <p:childTnLst>
+                                    <p:set>
+                                      <p:cBhvr>
+                                        <p:cTn id="81" dur="1" fill="hold">
+                                          <p:stCondLst>
+                                            <p:cond delay="0"/>
+                                          </p:stCondLst>
+                                        </p:cTn>
+                                        <p:tgtEl>
+                                          <p:spTgt spid="27"/>
+                                        </p:tgtEl>
+                                        <p:attrNameLst>
+                                          <p:attrName>style.visibility</p:attrName>
+                                        </p:attrNameLst>
+                                      </p:cBhvr>
+                                      <p:to>
+                                        <p:strVal val="visible"/>
+                                      </p:to>
+                                    </p:set>
+                                    <p:animEffect transition="in" filter="fade">
+                                      <p:cBhvr>
+                                        <p:cTn id="82" dur="500"/>
+                                        <p:tgtEl>
+                                          <p:spTgt spid="27"/>
+                                        </p:tgtEl>
+                                      </p:cBhvr>
+                                    </p:animEffect>
+                                  </p:childTnLst>
+                                </p:cTn>
+                              </p:par>
+                            </p:childTnLst>
+                          </p:cTn>
+                        </p:par>
+                      </p:childTnLst>
+                    </p:cTn>
+                  </p:par>
+                  <p:par>
+                    <p:cTn id="83" fill="hold">
+                      <p:stCondLst>
+                        <p:cond delay="indefinite"/>
+                      </p:stCondLst>
+                      <p:childTnLst>
+                        <p:par>
+                          <p:cTn id="84" fill="hold">
+                            <p:stCondLst>
+                              <p:cond delay="0"/>
+                            </p:stCondLst>
+                            <p:childTnLst>
+                              <p:par>
+                                <p:cTn id="85" presetID="10" presetClass="entr" presetSubtype="0" fill="hold" grpId="0" nodeType="clickEffect">
+                                  <p:stCondLst>
+                                    <p:cond delay="0"/>
+                                  </p:stCondLst>
+                                  <p:childTnLst>
+                                    <p:set>
+                                      <p:cBhvr>
+                                        <p:cTn id="86" dur="1" fill="hold">
+                                          <p:stCondLst>
+                                            <p:cond delay="0"/>
+                                          </p:stCondLst>
+                                        </p:cTn>
+                                        <p:tgtEl>
+                                          <p:spTgt spid="28"/>
+                                        </p:tgtEl>
+                                        <p:attrNameLst>
+                                          <p:attrName>style.visibility</p:attrName>
+                                        </p:attrNameLst>
+                                      </p:cBhvr>
+                                      <p:to>
+                                        <p:strVal val="visible"/>
+                                      </p:to>
+                                    </p:set>
+                                    <p:animEffect transition="in" filter="fade">
+                                      <p:cBhvr>
+                                        <p:cTn id="87" dur="500"/>
+                                        <p:tgtEl>
+                                          <p:spTgt spid="28"/>
+                                        </p:tgtEl>
+                                      </p:cBhvr>
+                                    </p:animEffect>
+                                  </p:childTnLst>
+                                </p:cTn>
+                              </p:par>
+                              <p:par>
+                                <p:cTn id="88" presetID="10" presetClass="entr" presetSubtype="0" fill="hold" grpId="0" nodeType="withEffect">
+                                  <p:stCondLst>
+                                    <p:cond delay="0"/>
+                                  </p:stCondLst>
+                                  <p:childTnLst>
+                                    <p:set>
+                                      <p:cBhvr>
+                                        <p:cTn id="89" dur="1" fill="hold">
+                                          <p:stCondLst>
+                                            <p:cond delay="0"/>
+                                          </p:stCondLst>
+                                        </p:cTn>
+                                        <p:tgtEl>
+                                          <p:spTgt spid="29"/>
+                                        </p:tgtEl>
+                                        <p:attrNameLst>
+                                          <p:attrName>style.visibility</p:attrName>
+                                        </p:attrNameLst>
+                                      </p:cBhvr>
+                                      <p:to>
+                                        <p:strVal val="visible"/>
+                                      </p:to>
+                                    </p:set>
+                                    <p:animEffect transition="in" filter="fade">
+                                      <p:cBhvr>
+                                        <p:cTn id="90" dur="500"/>
+                                        <p:tgtEl>
+                                          <p:spTgt spid="29"/>
+                                        </p:tgtEl>
+                                      </p:cBhvr>
+                                    </p:animEffect>
+                                  </p:childTnLst>
+                                </p:cTn>
+                              </p:par>
+                              <p:par>
+                                <p:cTn id="91" presetID="10" presetClass="entr" presetSubtype="0" fill="hold" grpId="0" nodeType="withEffect">
+                                  <p:stCondLst>
+                                    <p:cond delay="0"/>
+                                  </p:stCondLst>
+                                  <p:childTnLst>
+                                    <p:set>
+                                      <p:cBhvr>
+                                        <p:cTn id="92" dur="1" fill="hold">
+                                          <p:stCondLst>
+                                            <p:cond delay="0"/>
+                                          </p:stCondLst>
+                                        </p:cTn>
+                                        <p:tgtEl>
+                                          <p:spTgt spid="30"/>
+                                        </p:tgtEl>
+                                        <p:attrNameLst>
+                                          <p:attrName>style.visibility</p:attrName>
+                                        </p:attrNameLst>
+                                      </p:cBhvr>
+                                      <p:to>
+                                        <p:strVal val="visible"/>
+                                      </p:to>
+                                    </p:set>
+                                    <p:animEffect transition="in" filter="fade">
+                                      <p:cBhvr>
+                                        <p:cTn id="93" dur="500"/>
+                                        <p:tgtEl>
+                                          <p:spTgt spid="30"/>
+                                        </p:tgtEl>
+                                      </p:cBhvr>
+                                    </p:animEffect>
+                                  </p:childTnLst>
+                                </p:cTn>
+                              </p:par>
+                              <p:par>
+                                <p:cTn id="94" presetID="10" presetClass="entr" presetSubtype="0" fill="hold" grpId="0" nodeType="withEffect">
+                                  <p:stCondLst>
+                                    <p:cond delay="0"/>
+                                  </p:stCondLst>
+                                  <p:childTnLst>
+                                    <p:set>
+                                      <p:cBhvr>
+                                        <p:cTn id="95" dur="1" fill="hold">
+                                          <p:stCondLst>
+                                            <p:cond delay="0"/>
+                                          </p:stCondLst>
+                                        </p:cTn>
+                                        <p:tgtEl>
+                                          <p:spTgt spid="31"/>
+                                        </p:tgtEl>
+                                        <p:attrNameLst>
+                                          <p:attrName>style.visibility</p:attrName>
+                                        </p:attrNameLst>
+                                      </p:cBhvr>
+                                      <p:to>
+                                        <p:strVal val="visible"/>
+                                      </p:to>
+                                    </p:set>
+                                    <p:animEffect transition="in" filter="fade">
+                                      <p:cBhvr>
+                                        <p:cTn id="96" dur="500"/>
+                                        <p:tgtEl>
+                                          <p:spTgt spid="31"/>
+                                        </p:tgtEl>
+                                      </p:cBhvr>
+                                    </p:animEffect>
+                                  </p:childTnLst>
+                                </p:cTn>
+                              </p:par>
+                              <p:par>
+                                <p:cTn id="97" presetID="10" presetClass="entr" presetSubtype="0" fill="hold" grpId="0" nodeType="withEffect">
+                                  <p:stCondLst>
+                                    <p:cond delay="0"/>
+                                  </p:stCondLst>
+                                  <p:childTnLst>
+                                    <p:set>
+                                      <p:cBhvr>
+                                        <p:cTn id="98" dur="1" fill="hold">
+                                          <p:stCondLst>
+                                            <p:cond delay="0"/>
+                                          </p:stCondLst>
+                                        </p:cTn>
+                                        <p:tgtEl>
+                                          <p:spTgt spid="32"/>
+                                        </p:tgtEl>
+                                        <p:attrNameLst>
+                                          <p:attrName>style.visibility</p:attrName>
+                                        </p:attrNameLst>
+                                      </p:cBhvr>
+                                      <p:to>
+                                        <p:strVal val="visible"/>
+                                      </p:to>
+                                    </p:set>
+                                    <p:animEffect transition="in" filter="fade">
+                                      <p:cBhvr>
+                                        <p:cTn id="99" dur="500"/>
+                                        <p:tgtEl>
+                                          <p:spTgt spid="32"/>
+                                        </p:tgtEl>
+                                      </p:cBhvr>
+                                    </p:animEffect>
+                                  </p:childTnLst>
+                                </p:cTn>
+                              </p:par>
+                              <p:par>
+                                <p:cTn id="100" presetID="10" presetClass="entr" presetSubtype="0" fill="hold" grpId="0" nodeType="withEffect">
+                                  <p:stCondLst>
+                                    <p:cond delay="0"/>
+                                  </p:stCondLst>
+                                  <p:childTnLst>
+                                    <p:set>
+                                      <p:cBhvr>
+                                        <p:cTn id="101" dur="1" fill="hold">
+                                          <p:stCondLst>
+                                            <p:cond delay="0"/>
+                                          </p:stCondLst>
+                                        </p:cTn>
+                                        <p:tgtEl>
+                                          <p:spTgt spid="33"/>
+                                        </p:tgtEl>
+                                        <p:attrNameLst>
+                                          <p:attrName>style.visibility</p:attrName>
+                                        </p:attrNameLst>
+                                      </p:cBhvr>
+                                      <p:to>
+                                        <p:strVal val="visible"/>
+                                      </p:to>
+                                    </p:set>
+                                    <p:animEffect transition="in" filter="fade">
+                                      <p:cBhvr>
+                                        <p:cTn id="102" dur="500"/>
+                                        <p:tgtEl>
+                                          <p:spTgt spid="33"/>
+                                        </p:tgtEl>
+                                      </p:cBhvr>
+                                    </p:animEffect>
+                                  </p:childTnLst>
+                                </p:cTn>
+                              </p:par>
+                            </p:childTnLst>
+                          </p:cTn>
+                        </p:par>
+                      </p:childTnLst>
+                    </p:cTn>
+                  </p:par>
+                  <p:par>
+                    <p:cTn id="103" fill="hold">
+                      <p:stCondLst>
+                        <p:cond delay="indefinite"/>
+                      </p:stCondLst>
+                      <p:childTnLst>
+                        <p:par>
+                          <p:cTn id="104" fill="hold">
+                            <p:stCondLst>
+                              <p:cond delay="0"/>
+                            </p:stCondLst>
+                            <p:childTnLst>
+                              <p:par>
+                                <p:cTn id="105" presetID="10" presetClass="entr" presetSubtype="0" fill="hold" grpId="0" nodeType="clickEffect">
+                                  <p:stCondLst>
+                                    <p:cond delay="0"/>
+                                  </p:stCondLst>
+                                  <p:childTnLst>
+                                    <p:set>
+                                      <p:cBhvr>
+                                        <p:cTn id="106" dur="1" fill="hold">
+                                          <p:stCondLst>
+                                            <p:cond delay="0"/>
+                                          </p:stCondLst>
+                                        </p:cTn>
+                                        <p:tgtEl>
+                                          <p:spTgt spid="34"/>
+                                        </p:tgtEl>
+                                        <p:attrNameLst>
+                                          <p:attrName>style.visibility</p:attrName>
+                                        </p:attrNameLst>
+                                      </p:cBhvr>
+                                      <p:to>
+                                        <p:strVal val="visible"/>
+                                      </p:to>
+                                    </p:set>
+                                    <p:animEffect transition="in" filter="fade">
+                                      <p:cBhvr>
+                                        <p:cTn id="107" dur="500"/>
+                                        <p:tgtEl>
+                                          <p:spTgt spid="34"/>
+                                        </p:tgtEl>
+                                      </p:cBhvr>
+                                    </p:animEffect>
+                                  </p:childTnLst>
+                                </p:cTn>
+                              </p:par>
+                              <p:par>
+                                <p:cTn id="108" presetID="10" presetClass="entr" presetSubtype="0" fill="hold" grpId="0" nodeType="withEffect">
+                                  <p:stCondLst>
+                                    <p:cond delay="0"/>
+                                  </p:stCondLst>
+                                  <p:childTnLst>
+                                    <p:set>
+                                      <p:cBhvr>
+                                        <p:cTn id="109" dur="1" fill="hold">
+                                          <p:stCondLst>
+                                            <p:cond delay="0"/>
+                                          </p:stCondLst>
+                                        </p:cTn>
+                                        <p:tgtEl>
+                                          <p:spTgt spid="35"/>
+                                        </p:tgtEl>
+                                        <p:attrNameLst>
+                                          <p:attrName>style.visibility</p:attrName>
+                                        </p:attrNameLst>
+                                      </p:cBhvr>
+                                      <p:to>
+                                        <p:strVal val="visible"/>
+                                      </p:to>
+                                    </p:set>
+                                    <p:animEffect transition="in" filter="fade">
+                                      <p:cBhvr>
+                                        <p:cTn id="110" dur="500"/>
+                                        <p:tgtEl>
+                                          <p:spTgt spid="35"/>
+                                        </p:tgtEl>
+                                      </p:cBhvr>
+                                    </p:animEffect>
+                                  </p:childTnLst>
+                                </p:cTn>
+                              </p:par>
+                              <p:par>
+                                <p:cTn id="111" presetID="10" presetClass="entr" presetSubtype="0" fill="hold" grpId="0" nodeType="withEffect">
+                                  <p:stCondLst>
+                                    <p:cond delay="0"/>
+                                  </p:stCondLst>
+                                  <p:childTnLst>
+                                    <p:set>
+                                      <p:cBhvr>
+                                        <p:cTn id="112" dur="1" fill="hold">
+                                          <p:stCondLst>
+                                            <p:cond delay="0"/>
+                                          </p:stCondLst>
+                                        </p:cTn>
+                                        <p:tgtEl>
+                                          <p:spTgt spid="36"/>
+                                        </p:tgtEl>
+                                        <p:attrNameLst>
+                                          <p:attrName>style.visibility</p:attrName>
+                                        </p:attrNameLst>
+                                      </p:cBhvr>
+                                      <p:to>
+                                        <p:strVal val="visible"/>
+                                      </p:to>
+                                    </p:set>
+                                    <p:animEffect transition="in" filter="fade">
+                                      <p:cBhvr>
+                                        <p:cTn id="113" dur="500"/>
+                                        <p:tgtEl>
+                                          <p:spTgt spid="36"/>
+                                        </p:tgtEl>
+                                      </p:cBhvr>
+                                    </p:animEffect>
+                                  </p:childTnLst>
+                                </p:cTn>
+                              </p:par>
+                              <p:par>
+                                <p:cTn id="114" presetID="10" presetClass="entr" presetSubtype="0" fill="hold" grpId="0" nodeType="withEffect">
+                                  <p:stCondLst>
+                                    <p:cond delay="0"/>
+                                  </p:stCondLst>
+                                  <p:childTnLst>
+                                    <p:set>
+                                      <p:cBhvr>
+                                        <p:cTn id="115" dur="1" fill="hold">
+                                          <p:stCondLst>
+                                            <p:cond delay="0"/>
+                                          </p:stCondLst>
+                                        </p:cTn>
+                                        <p:tgtEl>
+                                          <p:spTgt spid="37"/>
+                                        </p:tgtEl>
+                                        <p:attrNameLst>
+                                          <p:attrName>style.visibility</p:attrName>
+                                        </p:attrNameLst>
+                                      </p:cBhvr>
+                                      <p:to>
+                                        <p:strVal val="visible"/>
+                                      </p:to>
+                                    </p:set>
+                                    <p:animEffect transition="in" filter="fade">
+                                      <p:cBhvr>
+                                        <p:cTn id="116" dur="500"/>
+                                        <p:tgtEl>
+                                          <p:spTgt spid="37"/>
+                                        </p:tgtEl>
+                                      </p:cBhvr>
+                                    </p:animEffect>
+                                  </p:childTnLst>
+                                </p:cTn>
+                              </p:par>
+                              <p:par>
+                                <p:cTn id="117" presetID="10" presetClass="entr" presetSubtype="0" fill="hold" grpId="0" nodeType="withEffect">
+                                  <p:stCondLst>
+                                    <p:cond delay="0"/>
+                                  </p:stCondLst>
+                                  <p:childTnLst>
+                                    <p:set>
+                                      <p:cBhvr>
+                                        <p:cTn id="118" dur="1" fill="hold">
+                                          <p:stCondLst>
+                                            <p:cond delay="0"/>
+                                          </p:stCondLst>
+                                        </p:cTn>
+                                        <p:tgtEl>
+                                          <p:spTgt spid="38"/>
+                                        </p:tgtEl>
+                                        <p:attrNameLst>
+                                          <p:attrName>style.visibility</p:attrName>
+                                        </p:attrNameLst>
+                                      </p:cBhvr>
+                                      <p:to>
+                                        <p:strVal val="visible"/>
+                                      </p:to>
+                                    </p:set>
+                                    <p:animEffect transition="in" filter="fade">
+                                      <p:cBhvr>
+                                        <p:cTn id="119" dur="500"/>
+                                        <p:tgtEl>
+                                          <p:spTgt spid="38"/>
+                                        </p:tgtEl>
+                                      </p:cBhvr>
+                                    </p:animEffect>
+                                  </p:childTnLst>
+                                </p:cTn>
+                              </p:par>
+                              <p:par>
+                                <p:cTn id="120" presetID="10" presetClass="entr" presetSubtype="0" fill="hold" grpId="0" nodeType="withEffect">
+                                  <p:stCondLst>
+                                    <p:cond delay="0"/>
+                                  </p:stCondLst>
+                                  <p:childTnLst>
+                                    <p:set>
+                                      <p:cBhvr>
+                                        <p:cTn id="121" dur="1" fill="hold">
+                                          <p:stCondLst>
+                                            <p:cond delay="0"/>
+                                          </p:stCondLst>
+                                        </p:cTn>
+                                        <p:tgtEl>
+                                          <p:spTgt spid="39"/>
+                                        </p:tgtEl>
+                                        <p:attrNameLst>
+                                          <p:attrName>style.visibility</p:attrName>
+                                        </p:attrNameLst>
+                                      </p:cBhvr>
+                                      <p:to>
+                                        <p:strVal val="visible"/>
+                                      </p:to>
+                                    </p:set>
+                                    <p:animEffect transition="in" filter="fade">
+                                      <p:cBhvr>
+                                        <p:cTn id="122" dur="500"/>
+                                        <p:tgtEl>
+                                          <p:spTgt spid="39"/>
+                                        </p:tgtEl>
+                                      </p:cBhvr>
+                                    </p:animEffect>
+                                  </p:childTnLst>
+                                </p:cTn>
+                              </p:par>
+                            </p:childTnLst>
+                          </p:cTn>
+                        </p:par>
+                      </p:childTnLst>
+                    </p:cTn>
+                  </p:par>
+                </p:childTnLst>
+              </p:cTn>
+              <p:prevCondLst>
+                <p:cond evt="onPrev" delay="0">
+                  <p:tgtEl>
+                    <p:sldTgt/>
+                  </p:tgtEl>
+                </p:cond>
+              </p:prevCondLst>
+              <p:nextCondLst>
+                <p:cond evt="onNext" delay="0">
+                  <p:tgtEl>
+                    <p:sldTgt/>
+                  </p:tgtEl>
+                </p:cond>
+              </p:nextCondLst>
+            </p:seq>
+          </p:childTnLst>
+        </p:cTn>
+      </p:par>
+    </p:tnLst>
+  </p:timing>
 </p:sld>
 </file>
 
@@ -5451,6 +6849,1194 @@
   <p:transition spd="med">
     <p:fade/>
   </p:transition>
+  <p:timing>
+    <p:tnLst>
+      <p:par>
+        <p:cTn id="1" dur="indefinite" restart="never" nodeType="tmRoot">
+          <p:childTnLst>
+            <p:seq concurrent="1" nextAc="seek">
+              <p:cTn id="2" dur="indefinite" nodeType="mainSeq">
+                <p:childTnLst>
+                  <p:par>
+                    <p:cTn id="3" fill="hold">
+                      <p:stCondLst>
+                        <p:cond delay="indefinite"/>
+                      </p:stCondLst>
+                      <p:childTnLst>
+                        <p:par>
+                          <p:cTn id="4" fill="hold">
+                            <p:stCondLst>
+                              <p:cond delay="0"/>
+                            </p:stCondLst>
+                            <p:childTnLst>
+                              <p:par>
+                                <p:cTn id="5" presetID="10" presetClass="entr" presetSubtype="0" fill="hold" grpId="0" nodeType="clickEffect">
+                                  <p:stCondLst>
+                                    <p:cond delay="0"/>
+                                  </p:stCondLst>
+                                  <p:childTnLst>
+                                    <p:set>
+                                      <p:cBhvr>
+                                        <p:cTn id="6" dur="1" fill="hold">
+                                          <p:stCondLst>
+                                            <p:cond delay="0"/>
+                                          </p:stCondLst>
+                                        </p:cTn>
+                                        <p:tgtEl>
+                                          <p:spTgt spid="4"/>
+                                        </p:tgtEl>
+                                        <p:attrNameLst>
+                                          <p:attrName>style.visibility</p:attrName>
+                                        </p:attrNameLst>
+                                      </p:cBhvr>
+                                      <p:to>
+                                        <p:strVal val="visible"/>
+                                      </p:to>
+                                    </p:set>
+                                    <p:animEffect transition="in" filter="fade">
+                                      <p:cBhvr>
+                                        <p:cTn id="7" dur="500"/>
+                                        <p:tgtEl>
+                                          <p:spTgt spid="4"/>
+                                        </p:tgtEl>
+                                      </p:cBhvr>
+                                    </p:animEffect>
+                                  </p:childTnLst>
+                                </p:cTn>
+                              </p:par>
+                              <p:par>
+                                <p:cTn id="8" presetID="10" presetClass="entr" presetSubtype="0" fill="hold" grpId="0" nodeType="withEffect">
+                                  <p:stCondLst>
+                                    <p:cond delay="0"/>
+                                  </p:stCondLst>
+                                  <p:childTnLst>
+                                    <p:set>
+                                      <p:cBhvr>
+                                        <p:cTn id="9" dur="1" fill="hold">
+                                          <p:stCondLst>
+                                            <p:cond delay="0"/>
+                                          </p:stCondLst>
+                                        </p:cTn>
+                                        <p:tgtEl>
+                                          <p:spTgt spid="5"/>
+                                        </p:tgtEl>
+                                        <p:attrNameLst>
+                                          <p:attrName>style.visibility</p:attrName>
+                                        </p:attrNameLst>
+                                      </p:cBhvr>
+                                      <p:to>
+                                        <p:strVal val="visible"/>
+                                      </p:to>
+                                    </p:set>
+                                    <p:animEffect transition="in" filter="fade">
+                                      <p:cBhvr>
+                                        <p:cTn id="10" dur="500"/>
+                                        <p:tgtEl>
+                                          <p:spTgt spid="5"/>
+                                        </p:tgtEl>
+                                      </p:cBhvr>
+                                    </p:animEffect>
+                                  </p:childTnLst>
+                                </p:cTn>
+                              </p:par>
+                              <p:par>
+                                <p:cTn id="11" presetID="10" presetClass="entr" presetSubtype="0" fill="hold" grpId="0" nodeType="withEffect">
+                                  <p:stCondLst>
+                                    <p:cond delay="0"/>
+                                  </p:stCondLst>
+                                  <p:childTnLst>
+                                    <p:set>
+                                      <p:cBhvr>
+                                        <p:cTn id="12" dur="1" fill="hold">
+                                          <p:stCondLst>
+                                            <p:cond delay="0"/>
+                                          </p:stCondLst>
+                                        </p:cTn>
+                                        <p:tgtEl>
+                                          <p:spTgt spid="6"/>
+                                        </p:tgtEl>
+                                        <p:attrNameLst>
+                                          <p:attrName>style.visibility</p:attrName>
+                                        </p:attrNameLst>
+                                      </p:cBhvr>
+                                      <p:to>
+                                        <p:strVal val="visible"/>
+                                      </p:to>
+                                    </p:set>
+                                    <p:animEffect transition="in" filter="fade">
+                                      <p:cBhvr>
+                                        <p:cTn id="13" dur="500"/>
+                                        <p:tgtEl>
+                                          <p:spTgt spid="6"/>
+                                        </p:tgtEl>
+                                      </p:cBhvr>
+                                    </p:animEffect>
+                                  </p:childTnLst>
+                                </p:cTn>
+                              </p:par>
+                              <p:par>
+                                <p:cTn id="14" presetID="10" presetClass="entr" presetSubtype="0" fill="hold" grpId="0" nodeType="withEffect">
+                                  <p:stCondLst>
+                                    <p:cond delay="0"/>
+                                  </p:stCondLst>
+                                  <p:childTnLst>
+                                    <p:set>
+                                      <p:cBhvr>
+                                        <p:cTn id="15" dur="1" fill="hold">
+                                          <p:stCondLst>
+                                            <p:cond delay="0"/>
+                                          </p:stCondLst>
+                                        </p:cTn>
+                                        <p:tgtEl>
+                                          <p:spTgt spid="7"/>
+                                        </p:tgtEl>
+                                        <p:attrNameLst>
+                                          <p:attrName>style.visibility</p:attrName>
+                                        </p:attrNameLst>
+                                      </p:cBhvr>
+                                      <p:to>
+                                        <p:strVal val="visible"/>
+                                      </p:to>
+                                    </p:set>
+                                    <p:animEffect transition="in" filter="fade">
+                                      <p:cBhvr>
+                                        <p:cTn id="16" dur="500"/>
+                                        <p:tgtEl>
+                                          <p:spTgt spid="7"/>
+                                        </p:tgtEl>
+                                      </p:cBhvr>
+                                    </p:animEffect>
+                                  </p:childTnLst>
+                                </p:cTn>
+                              </p:par>
+                              <p:par>
+                                <p:cTn id="17" presetID="10" presetClass="entr" presetSubtype="0" fill="hold" grpId="0" nodeType="withEffect">
+                                  <p:stCondLst>
+                                    <p:cond delay="0"/>
+                                  </p:stCondLst>
+                                  <p:childTnLst>
+                                    <p:set>
+                                      <p:cBhvr>
+                                        <p:cTn id="18" dur="1" fill="hold">
+                                          <p:stCondLst>
+                                            <p:cond delay="0"/>
+                                          </p:stCondLst>
+                                        </p:cTn>
+                                        <p:tgtEl>
+                                          <p:spTgt spid="8"/>
+                                        </p:tgtEl>
+                                        <p:attrNameLst>
+                                          <p:attrName>style.visibility</p:attrName>
+                                        </p:attrNameLst>
+                                      </p:cBhvr>
+                                      <p:to>
+                                        <p:strVal val="visible"/>
+                                      </p:to>
+                                    </p:set>
+                                    <p:animEffect transition="in" filter="fade">
+                                      <p:cBhvr>
+                                        <p:cTn id="19" dur="500"/>
+                                        <p:tgtEl>
+                                          <p:spTgt spid="8"/>
+                                        </p:tgtEl>
+                                      </p:cBhvr>
+                                    </p:animEffect>
+                                  </p:childTnLst>
+                                </p:cTn>
+                              </p:par>
+                            </p:childTnLst>
+                          </p:cTn>
+                        </p:par>
+                      </p:childTnLst>
+                    </p:cTn>
+                  </p:par>
+                  <p:par>
+                    <p:cTn id="20" fill="hold">
+                      <p:stCondLst>
+                        <p:cond delay="indefinite"/>
+                      </p:stCondLst>
+                      <p:childTnLst>
+                        <p:par>
+                          <p:cTn id="21" fill="hold">
+                            <p:stCondLst>
+                              <p:cond delay="0"/>
+                            </p:stCondLst>
+                            <p:childTnLst>
+                              <p:par>
+                                <p:cTn id="22" presetID="10" presetClass="entr" presetSubtype="0" fill="hold" grpId="0" nodeType="clickEffect">
+                                  <p:stCondLst>
+                                    <p:cond delay="0"/>
+                                  </p:stCondLst>
+                                  <p:childTnLst>
+                                    <p:set>
+                                      <p:cBhvr>
+                                        <p:cTn id="23" dur="1" fill="hold">
+                                          <p:stCondLst>
+                                            <p:cond delay="0"/>
+                                          </p:stCondLst>
+                                        </p:cTn>
+                                        <p:tgtEl>
+                                          <p:spTgt spid="9"/>
+                                        </p:tgtEl>
+                                        <p:attrNameLst>
+                                          <p:attrName>style.visibility</p:attrName>
+                                        </p:attrNameLst>
+                                      </p:cBhvr>
+                                      <p:to>
+                                        <p:strVal val="visible"/>
+                                      </p:to>
+                                    </p:set>
+                                    <p:animEffect transition="in" filter="fade">
+                                      <p:cBhvr>
+                                        <p:cTn id="24" dur="500"/>
+                                        <p:tgtEl>
+                                          <p:spTgt spid="9"/>
+                                        </p:tgtEl>
+                                      </p:cBhvr>
+                                    </p:animEffect>
+                                  </p:childTnLst>
+                                </p:cTn>
+                              </p:par>
+                              <p:par>
+                                <p:cTn id="25" presetID="10" presetClass="entr" presetSubtype="0" fill="hold" grpId="0" nodeType="withEffect">
+                                  <p:stCondLst>
+                                    <p:cond delay="0"/>
+                                  </p:stCondLst>
+                                  <p:childTnLst>
+                                    <p:set>
+                                      <p:cBhvr>
+                                        <p:cTn id="26" dur="1" fill="hold">
+                                          <p:stCondLst>
+                                            <p:cond delay="0"/>
+                                          </p:stCondLst>
+                                        </p:cTn>
+                                        <p:tgtEl>
+                                          <p:spTgt spid="10"/>
+                                        </p:tgtEl>
+                                        <p:attrNameLst>
+                                          <p:attrName>style.visibility</p:attrName>
+                                        </p:attrNameLst>
+                                      </p:cBhvr>
+                                      <p:to>
+                                        <p:strVal val="visible"/>
+                                      </p:to>
+                                    </p:set>
+                                    <p:animEffect transition="in" filter="fade">
+                                      <p:cBhvr>
+                                        <p:cTn id="27" dur="500"/>
+                                        <p:tgtEl>
+                                          <p:spTgt spid="10"/>
+                                        </p:tgtEl>
+                                      </p:cBhvr>
+                                    </p:animEffect>
+                                  </p:childTnLst>
+                                </p:cTn>
+                              </p:par>
+                              <p:par>
+                                <p:cTn id="28" presetID="10" presetClass="entr" presetSubtype="0" fill="hold" grpId="0" nodeType="withEffect">
+                                  <p:stCondLst>
+                                    <p:cond delay="0"/>
+                                  </p:stCondLst>
+                                  <p:childTnLst>
+                                    <p:set>
+                                      <p:cBhvr>
+                                        <p:cTn id="29" dur="1" fill="hold">
+                                          <p:stCondLst>
+                                            <p:cond delay="0"/>
+                                          </p:stCondLst>
+                                        </p:cTn>
+                                        <p:tgtEl>
+                                          <p:spTgt spid="11"/>
+                                        </p:tgtEl>
+                                        <p:attrNameLst>
+                                          <p:attrName>style.visibility</p:attrName>
+                                        </p:attrNameLst>
+                                      </p:cBhvr>
+                                      <p:to>
+                                        <p:strVal val="visible"/>
+                                      </p:to>
+                                    </p:set>
+                                    <p:animEffect transition="in" filter="fade">
+                                      <p:cBhvr>
+                                        <p:cTn id="30" dur="500"/>
+                                        <p:tgtEl>
+                                          <p:spTgt spid="11"/>
+                                        </p:tgtEl>
+                                      </p:cBhvr>
+                                    </p:animEffect>
+                                  </p:childTnLst>
+                                </p:cTn>
+                              </p:par>
+                              <p:par>
+                                <p:cTn id="31" presetID="10" presetClass="entr" presetSubtype="0" fill="hold" grpId="0" nodeType="withEffect">
+                                  <p:stCondLst>
+                                    <p:cond delay="0"/>
+                                  </p:stCondLst>
+                                  <p:childTnLst>
+                                    <p:set>
+                                      <p:cBhvr>
+                                        <p:cTn id="32" dur="1" fill="hold">
+                                          <p:stCondLst>
+                                            <p:cond delay="0"/>
+                                          </p:stCondLst>
+                                        </p:cTn>
+                                        <p:tgtEl>
+                                          <p:spTgt spid="12"/>
+                                        </p:tgtEl>
+                                        <p:attrNameLst>
+                                          <p:attrName>style.visibility</p:attrName>
+                                        </p:attrNameLst>
+                                      </p:cBhvr>
+                                      <p:to>
+                                        <p:strVal val="visible"/>
+                                      </p:to>
+                                    </p:set>
+                                    <p:animEffect transition="in" filter="fade">
+                                      <p:cBhvr>
+                                        <p:cTn id="33" dur="500"/>
+                                        <p:tgtEl>
+                                          <p:spTgt spid="12"/>
+                                        </p:tgtEl>
+                                      </p:cBhvr>
+                                    </p:animEffect>
+                                  </p:childTnLst>
+                                </p:cTn>
+                              </p:par>
+                              <p:par>
+                                <p:cTn id="34" presetID="10" presetClass="entr" presetSubtype="0" fill="hold" grpId="0" nodeType="withEffect">
+                                  <p:stCondLst>
+                                    <p:cond delay="0"/>
+                                  </p:stCondLst>
+                                  <p:childTnLst>
+                                    <p:set>
+                                      <p:cBhvr>
+                                        <p:cTn id="35" dur="1" fill="hold">
+                                          <p:stCondLst>
+                                            <p:cond delay="0"/>
+                                          </p:stCondLst>
+                                        </p:cTn>
+                                        <p:tgtEl>
+                                          <p:spTgt spid="13"/>
+                                        </p:tgtEl>
+                                        <p:attrNameLst>
+                                          <p:attrName>style.visibility</p:attrName>
+                                        </p:attrNameLst>
+                                      </p:cBhvr>
+                                      <p:to>
+                                        <p:strVal val="visible"/>
+                                      </p:to>
+                                    </p:set>
+                                    <p:animEffect transition="in" filter="fade">
+                                      <p:cBhvr>
+                                        <p:cTn id="36" dur="500"/>
+                                        <p:tgtEl>
+                                          <p:spTgt spid="13"/>
+                                        </p:tgtEl>
+                                      </p:cBhvr>
+                                    </p:animEffect>
+                                  </p:childTnLst>
+                                </p:cTn>
+                              </p:par>
+                            </p:childTnLst>
+                          </p:cTn>
+                        </p:par>
+                      </p:childTnLst>
+                    </p:cTn>
+                  </p:par>
+                  <p:par>
+                    <p:cTn id="37" fill="hold">
+                      <p:stCondLst>
+                        <p:cond delay="indefinite"/>
+                      </p:stCondLst>
+                      <p:childTnLst>
+                        <p:par>
+                          <p:cTn id="38" fill="hold">
+                            <p:stCondLst>
+                              <p:cond delay="0"/>
+                            </p:stCondLst>
+                            <p:childTnLst>
+                              <p:par>
+                                <p:cTn id="39" presetID="10" presetClass="entr" presetSubtype="0" fill="hold" grpId="0" nodeType="clickEffect">
+                                  <p:stCondLst>
+                                    <p:cond delay="0"/>
+                                  </p:stCondLst>
+                                  <p:childTnLst>
+                                    <p:set>
+                                      <p:cBhvr>
+                                        <p:cTn id="40" dur="1" fill="hold">
+                                          <p:stCondLst>
+                                            <p:cond delay="0"/>
+                                          </p:stCondLst>
+                                        </p:cTn>
+                                        <p:tgtEl>
+                                          <p:spTgt spid="14"/>
+                                        </p:tgtEl>
+                                        <p:attrNameLst>
+                                          <p:attrName>style.visibility</p:attrName>
+                                        </p:attrNameLst>
+                                      </p:cBhvr>
+                                      <p:to>
+                                        <p:strVal val="visible"/>
+                                      </p:to>
+                                    </p:set>
+                                    <p:animEffect transition="in" filter="fade">
+                                      <p:cBhvr>
+                                        <p:cTn id="41" dur="500"/>
+                                        <p:tgtEl>
+                                          <p:spTgt spid="14"/>
+                                        </p:tgtEl>
+                                      </p:cBhvr>
+                                    </p:animEffect>
+                                  </p:childTnLst>
+                                </p:cTn>
+                              </p:par>
+                              <p:par>
+                                <p:cTn id="42" presetID="10" presetClass="entr" presetSubtype="0" fill="hold" grpId="0" nodeType="withEffect">
+                                  <p:stCondLst>
+                                    <p:cond delay="0"/>
+                                  </p:stCondLst>
+                                  <p:childTnLst>
+                                    <p:set>
+                                      <p:cBhvr>
+                                        <p:cTn id="43" dur="1" fill="hold">
+                                          <p:stCondLst>
+                                            <p:cond delay="0"/>
+                                          </p:stCondLst>
+                                        </p:cTn>
+                                        <p:tgtEl>
+                                          <p:spTgt spid="15"/>
+                                        </p:tgtEl>
+                                        <p:attrNameLst>
+                                          <p:attrName>style.visibility</p:attrName>
+                                        </p:attrNameLst>
+                                      </p:cBhvr>
+                                      <p:to>
+                                        <p:strVal val="visible"/>
+                                      </p:to>
+                                    </p:set>
+                                    <p:animEffect transition="in" filter="fade">
+                                      <p:cBhvr>
+                                        <p:cTn id="44" dur="500"/>
+                                        <p:tgtEl>
+                                          <p:spTgt spid="15"/>
+                                        </p:tgtEl>
+                                      </p:cBhvr>
+                                    </p:animEffect>
+                                  </p:childTnLst>
+                                </p:cTn>
+                              </p:par>
+                              <p:par>
+                                <p:cTn id="45" presetID="10" presetClass="entr" presetSubtype="0" fill="hold" grpId="0" nodeType="withEffect">
+                                  <p:stCondLst>
+                                    <p:cond delay="0"/>
+                                  </p:stCondLst>
+                                  <p:childTnLst>
+                                    <p:set>
+                                      <p:cBhvr>
+                                        <p:cTn id="46" dur="1" fill="hold">
+                                          <p:stCondLst>
+                                            <p:cond delay="0"/>
+                                          </p:stCondLst>
+                                        </p:cTn>
+                                        <p:tgtEl>
+                                          <p:spTgt spid="16"/>
+                                        </p:tgtEl>
+                                        <p:attrNameLst>
+                                          <p:attrName>style.visibility</p:attrName>
+                                        </p:attrNameLst>
+                                      </p:cBhvr>
+                                      <p:to>
+                                        <p:strVal val="visible"/>
+                                      </p:to>
+                                    </p:set>
+                                    <p:animEffect transition="in" filter="fade">
+                                      <p:cBhvr>
+                                        <p:cTn id="47" dur="500"/>
+                                        <p:tgtEl>
+                                          <p:spTgt spid="16"/>
+                                        </p:tgtEl>
+                                      </p:cBhvr>
+                                    </p:animEffect>
+                                  </p:childTnLst>
+                                </p:cTn>
+                              </p:par>
+                              <p:par>
+                                <p:cTn id="48" presetID="10" presetClass="entr" presetSubtype="0" fill="hold" grpId="0" nodeType="withEffect">
+                                  <p:stCondLst>
+                                    <p:cond delay="0"/>
+                                  </p:stCondLst>
+                                  <p:childTnLst>
+                                    <p:set>
+                                      <p:cBhvr>
+                                        <p:cTn id="49" dur="1" fill="hold">
+                                          <p:stCondLst>
+                                            <p:cond delay="0"/>
+                                          </p:stCondLst>
+                                        </p:cTn>
+                                        <p:tgtEl>
+                                          <p:spTgt spid="17"/>
+                                        </p:tgtEl>
+                                        <p:attrNameLst>
+                                          <p:attrName>style.visibility</p:attrName>
+                                        </p:attrNameLst>
+                                      </p:cBhvr>
+                                      <p:to>
+                                        <p:strVal val="visible"/>
+                                      </p:to>
+                                    </p:set>
+                                    <p:animEffect transition="in" filter="fade">
+                                      <p:cBhvr>
+                                        <p:cTn id="50" dur="500"/>
+                                        <p:tgtEl>
+                                          <p:spTgt spid="17"/>
+                                        </p:tgtEl>
+                                      </p:cBhvr>
+                                    </p:animEffect>
+                                  </p:childTnLst>
+                                </p:cTn>
+                              </p:par>
+                              <p:par>
+                                <p:cTn id="51" presetID="10" presetClass="entr" presetSubtype="0" fill="hold" grpId="0" nodeType="withEffect">
+                                  <p:stCondLst>
+                                    <p:cond delay="0"/>
+                                  </p:stCondLst>
+                                  <p:childTnLst>
+                                    <p:set>
+                                      <p:cBhvr>
+                                        <p:cTn id="52" dur="1" fill="hold">
+                                          <p:stCondLst>
+                                            <p:cond delay="0"/>
+                                          </p:stCondLst>
+                                        </p:cTn>
+                                        <p:tgtEl>
+                                          <p:spTgt spid="18"/>
+                                        </p:tgtEl>
+                                        <p:attrNameLst>
+                                          <p:attrName>style.visibility</p:attrName>
+                                        </p:attrNameLst>
+                                      </p:cBhvr>
+                                      <p:to>
+                                        <p:strVal val="visible"/>
+                                      </p:to>
+                                    </p:set>
+                                    <p:animEffect transition="in" filter="fade">
+                                      <p:cBhvr>
+                                        <p:cTn id="53" dur="500"/>
+                                        <p:tgtEl>
+                                          <p:spTgt spid="18"/>
+                                        </p:tgtEl>
+                                      </p:cBhvr>
+                                    </p:animEffect>
+                                  </p:childTnLst>
+                                </p:cTn>
+                              </p:par>
+                            </p:childTnLst>
+                          </p:cTn>
+                        </p:par>
+                      </p:childTnLst>
+                    </p:cTn>
+                  </p:par>
+                  <p:par>
+                    <p:cTn id="54" fill="hold">
+                      <p:stCondLst>
+                        <p:cond delay="indefinite"/>
+                      </p:stCondLst>
+                      <p:childTnLst>
+                        <p:par>
+                          <p:cTn id="55" fill="hold">
+                            <p:stCondLst>
+                              <p:cond delay="0"/>
+                            </p:stCondLst>
+                            <p:childTnLst>
+                              <p:par>
+                                <p:cTn id="56" presetID="10" presetClass="entr" presetSubtype="0" fill="hold" grpId="0" nodeType="clickEffect">
+                                  <p:stCondLst>
+                                    <p:cond delay="0"/>
+                                  </p:stCondLst>
+                                  <p:childTnLst>
+                                    <p:set>
+                                      <p:cBhvr>
+                                        <p:cTn id="57" dur="1" fill="hold">
+                                          <p:stCondLst>
+                                            <p:cond delay="0"/>
+                                          </p:stCondLst>
+                                        </p:cTn>
+                                        <p:tgtEl>
+                                          <p:spTgt spid="19"/>
+                                        </p:tgtEl>
+                                        <p:attrNameLst>
+                                          <p:attrName>style.visibility</p:attrName>
+                                        </p:attrNameLst>
+                                      </p:cBhvr>
+                                      <p:to>
+                                        <p:strVal val="visible"/>
+                                      </p:to>
+                                    </p:set>
+                                    <p:animEffect transition="in" filter="fade">
+                                      <p:cBhvr>
+                                        <p:cTn id="58" dur="500"/>
+                                        <p:tgtEl>
+                                          <p:spTgt spid="19"/>
+                                        </p:tgtEl>
+                                      </p:cBhvr>
+                                    </p:animEffect>
+                                  </p:childTnLst>
+                                </p:cTn>
+                              </p:par>
+                              <p:par>
+                                <p:cTn id="59" presetID="10" presetClass="entr" presetSubtype="0" fill="hold" grpId="0" nodeType="withEffect">
+                                  <p:stCondLst>
+                                    <p:cond delay="0"/>
+                                  </p:stCondLst>
+                                  <p:childTnLst>
+                                    <p:set>
+                                      <p:cBhvr>
+                                        <p:cTn id="60" dur="1" fill="hold">
+                                          <p:stCondLst>
+                                            <p:cond delay="0"/>
+                                          </p:stCondLst>
+                                        </p:cTn>
+                                        <p:tgtEl>
+                                          <p:spTgt spid="20"/>
+                                        </p:tgtEl>
+                                        <p:attrNameLst>
+                                          <p:attrName>style.visibility</p:attrName>
+                                        </p:attrNameLst>
+                                      </p:cBhvr>
+                                      <p:to>
+                                        <p:strVal val="visible"/>
+                                      </p:to>
+                                    </p:set>
+                                    <p:animEffect transition="in" filter="fade">
+                                      <p:cBhvr>
+                                        <p:cTn id="61" dur="500"/>
+                                        <p:tgtEl>
+                                          <p:spTgt spid="20"/>
+                                        </p:tgtEl>
+                                      </p:cBhvr>
+                                    </p:animEffect>
+                                  </p:childTnLst>
+                                </p:cTn>
+                              </p:par>
+                              <p:par>
+                                <p:cTn id="62" presetID="10" presetClass="entr" presetSubtype="0" fill="hold" grpId="0" nodeType="withEffect">
+                                  <p:stCondLst>
+                                    <p:cond delay="0"/>
+                                  </p:stCondLst>
+                                  <p:childTnLst>
+                                    <p:set>
+                                      <p:cBhvr>
+                                        <p:cTn id="63" dur="1" fill="hold">
+                                          <p:stCondLst>
+                                            <p:cond delay="0"/>
+                                          </p:stCondLst>
+                                        </p:cTn>
+                                        <p:tgtEl>
+                                          <p:spTgt spid="21"/>
+                                        </p:tgtEl>
+                                        <p:attrNameLst>
+                                          <p:attrName>style.visibility</p:attrName>
+                                        </p:attrNameLst>
+                                      </p:cBhvr>
+                                      <p:to>
+                                        <p:strVal val="visible"/>
+                                      </p:to>
+                                    </p:set>
+                                    <p:animEffect transition="in" filter="fade">
+                                      <p:cBhvr>
+                                        <p:cTn id="64" dur="500"/>
+                                        <p:tgtEl>
+                                          <p:spTgt spid="21"/>
+                                        </p:tgtEl>
+                                      </p:cBhvr>
+                                    </p:animEffect>
+                                  </p:childTnLst>
+                                </p:cTn>
+                              </p:par>
+                              <p:par>
+                                <p:cTn id="65" presetID="10" presetClass="entr" presetSubtype="0" fill="hold" grpId="0" nodeType="withEffect">
+                                  <p:stCondLst>
+                                    <p:cond delay="0"/>
+                                  </p:stCondLst>
+                                  <p:childTnLst>
+                                    <p:set>
+                                      <p:cBhvr>
+                                        <p:cTn id="66" dur="1" fill="hold">
+                                          <p:stCondLst>
+                                            <p:cond delay="0"/>
+                                          </p:stCondLst>
+                                        </p:cTn>
+                                        <p:tgtEl>
+                                          <p:spTgt spid="22"/>
+                                        </p:tgtEl>
+                                        <p:attrNameLst>
+                                          <p:attrName>style.visibility</p:attrName>
+                                        </p:attrNameLst>
+                                      </p:cBhvr>
+                                      <p:to>
+                                        <p:strVal val="visible"/>
+                                      </p:to>
+                                    </p:set>
+                                    <p:animEffect transition="in" filter="fade">
+                                      <p:cBhvr>
+                                        <p:cTn id="67" dur="500"/>
+                                        <p:tgtEl>
+                                          <p:spTgt spid="22"/>
+                                        </p:tgtEl>
+                                      </p:cBhvr>
+                                    </p:animEffect>
+                                  </p:childTnLst>
+                                </p:cTn>
+                              </p:par>
+                              <p:par>
+                                <p:cTn id="68" presetID="10" presetClass="entr" presetSubtype="0" fill="hold" grpId="0" nodeType="withEffect">
+                                  <p:stCondLst>
+                                    <p:cond delay="0"/>
+                                  </p:stCondLst>
+                                  <p:childTnLst>
+                                    <p:set>
+                                      <p:cBhvr>
+                                        <p:cTn id="69" dur="1" fill="hold">
+                                          <p:stCondLst>
+                                            <p:cond delay="0"/>
+                                          </p:stCondLst>
+                                        </p:cTn>
+                                        <p:tgtEl>
+                                          <p:spTgt spid="23"/>
+                                        </p:tgtEl>
+                                        <p:attrNameLst>
+                                          <p:attrName>style.visibility</p:attrName>
+                                        </p:attrNameLst>
+                                      </p:cBhvr>
+                                      <p:to>
+                                        <p:strVal val="visible"/>
+                                      </p:to>
+                                    </p:set>
+                                    <p:animEffect transition="in" filter="fade">
+                                      <p:cBhvr>
+                                        <p:cTn id="70" dur="500"/>
+                                        <p:tgtEl>
+                                          <p:spTgt spid="23"/>
+                                        </p:tgtEl>
+                                      </p:cBhvr>
+                                    </p:animEffect>
+                                  </p:childTnLst>
+                                </p:cTn>
+                              </p:par>
+                            </p:childTnLst>
+                          </p:cTn>
+                        </p:par>
+                      </p:childTnLst>
+                    </p:cTn>
+                  </p:par>
+                  <p:par>
+                    <p:cTn id="71" fill="hold">
+                      <p:stCondLst>
+                        <p:cond delay="indefinite"/>
+                      </p:stCondLst>
+                      <p:childTnLst>
+                        <p:par>
+                          <p:cTn id="72" fill="hold">
+                            <p:stCondLst>
+                              <p:cond delay="0"/>
+                            </p:stCondLst>
+                            <p:childTnLst>
+                              <p:par>
+                                <p:cTn id="73" presetID="10" presetClass="entr" presetSubtype="0" fill="hold" grpId="0" nodeType="clickEffect">
+                                  <p:stCondLst>
+                                    <p:cond delay="0"/>
+                                  </p:stCondLst>
+                                  <p:childTnLst>
+                                    <p:set>
+                                      <p:cBhvr>
+                                        <p:cTn id="74" dur="1" fill="hold">
+                                          <p:stCondLst>
+                                            <p:cond delay="0"/>
+                                          </p:stCondLst>
+                                        </p:cTn>
+                                        <p:tgtEl>
+                                          <p:spTgt spid="24"/>
+                                        </p:tgtEl>
+                                        <p:attrNameLst>
+                                          <p:attrName>style.visibility</p:attrName>
+                                        </p:attrNameLst>
+                                      </p:cBhvr>
+                                      <p:to>
+                                        <p:strVal val="visible"/>
+                                      </p:to>
+                                    </p:set>
+                                    <p:animEffect transition="in" filter="fade">
+                                      <p:cBhvr>
+                                        <p:cTn id="75" dur="500"/>
+                                        <p:tgtEl>
+                                          <p:spTgt spid="24"/>
+                                        </p:tgtEl>
+                                      </p:cBhvr>
+                                    </p:animEffect>
+                                  </p:childTnLst>
+                                </p:cTn>
+                              </p:par>
+                              <p:par>
+                                <p:cTn id="76" presetID="10" presetClass="entr" presetSubtype="0" fill="hold" grpId="0" nodeType="withEffect">
+                                  <p:stCondLst>
+                                    <p:cond delay="0"/>
+                                  </p:stCondLst>
+                                  <p:childTnLst>
+                                    <p:set>
+                                      <p:cBhvr>
+                                        <p:cTn id="77" dur="1" fill="hold">
+                                          <p:stCondLst>
+                                            <p:cond delay="0"/>
+                                          </p:stCondLst>
+                                        </p:cTn>
+                                        <p:tgtEl>
+                                          <p:spTgt spid="25"/>
+                                        </p:tgtEl>
+                                        <p:attrNameLst>
+                                          <p:attrName>style.visibility</p:attrName>
+                                        </p:attrNameLst>
+                                      </p:cBhvr>
+                                      <p:to>
+                                        <p:strVal val="visible"/>
+                                      </p:to>
+                                    </p:set>
+                                    <p:animEffect transition="in" filter="fade">
+                                      <p:cBhvr>
+                                        <p:cTn id="78" dur="500"/>
+                                        <p:tgtEl>
+                                          <p:spTgt spid="25"/>
+                                        </p:tgtEl>
+                                      </p:cBhvr>
+                                    </p:animEffect>
+                                  </p:childTnLst>
+                                </p:cTn>
+                              </p:par>
+                              <p:par>
+                                <p:cTn id="79" presetID="10" presetClass="entr" presetSubtype="0" fill="hold" grpId="0" nodeType="withEffect">
+                                  <p:stCondLst>
+                                    <p:cond delay="0"/>
+                                  </p:stCondLst>
+                                  <p:childTnLst>
+                                    <p:set>
+                                      <p:cBhvr>
+                                        <p:cTn id="80" dur="1" fill="hold">
+                                          <p:stCondLst>
+                                            <p:cond delay="0"/>
+                                          </p:stCondLst>
+                                        </p:cTn>
+                                        <p:tgtEl>
+                                          <p:spTgt spid="26"/>
+                                        </p:tgtEl>
+                                        <p:attrNameLst>
+                                          <p:attrName>style.visibility</p:attrName>
+                                        </p:attrNameLst>
+                                      </p:cBhvr>
+                                      <p:to>
+                                        <p:strVal val="visible"/>
+                                      </p:to>
+                                    </p:set>
+                                    <p:animEffect transition="in" filter="fade">
+                                      <p:cBhvr>
+                                        <p:cTn id="81" dur="500"/>
+                                        <p:tgtEl>
+                                          <p:spTgt spid="26"/>
+                                        </p:tgtEl>
+                                      </p:cBhvr>
+                                    </p:animEffect>
+                                  </p:childTnLst>
+                                </p:cTn>
+                              </p:par>
+                              <p:par>
+                                <p:cTn id="82" presetID="10" presetClass="entr" presetSubtype="0" fill="hold" grpId="0" nodeType="withEffect">
+                                  <p:stCondLst>
+                                    <p:cond delay="0"/>
+                                  </p:stCondLst>
+                                  <p:childTnLst>
+                                    <p:set>
+                                      <p:cBhvr>
+                                        <p:cTn id="83" dur="1" fill="hold">
+                                          <p:stCondLst>
+                                            <p:cond delay="0"/>
+                                          </p:stCondLst>
+                                        </p:cTn>
+                                        <p:tgtEl>
+                                          <p:spTgt spid="27"/>
+                                        </p:tgtEl>
+                                        <p:attrNameLst>
+                                          <p:attrName>style.visibility</p:attrName>
+                                        </p:attrNameLst>
+                                      </p:cBhvr>
+                                      <p:to>
+                                        <p:strVal val="visible"/>
+                                      </p:to>
+                                    </p:set>
+                                    <p:animEffect transition="in" filter="fade">
+                                      <p:cBhvr>
+                                        <p:cTn id="84" dur="500"/>
+                                        <p:tgtEl>
+                                          <p:spTgt spid="27"/>
+                                        </p:tgtEl>
+                                      </p:cBhvr>
+                                    </p:animEffect>
+                                  </p:childTnLst>
+                                </p:cTn>
+                              </p:par>
+                              <p:par>
+                                <p:cTn id="85" presetID="10" presetClass="entr" presetSubtype="0" fill="hold" grpId="0" nodeType="withEffect">
+                                  <p:stCondLst>
+                                    <p:cond delay="0"/>
+                                  </p:stCondLst>
+                                  <p:childTnLst>
+                                    <p:set>
+                                      <p:cBhvr>
+                                        <p:cTn id="86" dur="1" fill="hold">
+                                          <p:stCondLst>
+                                            <p:cond delay="0"/>
+                                          </p:stCondLst>
+                                        </p:cTn>
+                                        <p:tgtEl>
+                                          <p:spTgt spid="28"/>
+                                        </p:tgtEl>
+                                        <p:attrNameLst>
+                                          <p:attrName>style.visibility</p:attrName>
+                                        </p:attrNameLst>
+                                      </p:cBhvr>
+                                      <p:to>
+                                        <p:strVal val="visible"/>
+                                      </p:to>
+                                    </p:set>
+                                    <p:animEffect transition="in" filter="fade">
+                                      <p:cBhvr>
+                                        <p:cTn id="87" dur="500"/>
+                                        <p:tgtEl>
+                                          <p:spTgt spid="28"/>
+                                        </p:tgtEl>
+                                      </p:cBhvr>
+                                    </p:animEffect>
+                                  </p:childTnLst>
+                                </p:cTn>
+                              </p:par>
+                            </p:childTnLst>
+                          </p:cTn>
+                        </p:par>
+                      </p:childTnLst>
+                    </p:cTn>
+                  </p:par>
+                  <p:par>
+                    <p:cTn id="88" fill="hold">
+                      <p:stCondLst>
+                        <p:cond delay="indefinite"/>
+                      </p:stCondLst>
+                      <p:childTnLst>
+                        <p:par>
+                          <p:cTn id="89" fill="hold">
+                            <p:stCondLst>
+                              <p:cond delay="0"/>
+                            </p:stCondLst>
+                            <p:childTnLst>
+                              <p:par>
+                                <p:cTn id="90" presetID="10" presetClass="entr" presetSubtype="0" fill="hold" grpId="0" nodeType="clickEffect">
+                                  <p:stCondLst>
+                                    <p:cond delay="0"/>
+                                  </p:stCondLst>
+                                  <p:childTnLst>
+                                    <p:set>
+                                      <p:cBhvr>
+                                        <p:cTn id="91" dur="1" fill="hold">
+                                          <p:stCondLst>
+                                            <p:cond delay="0"/>
+                                          </p:stCondLst>
+                                        </p:cTn>
+                                        <p:tgtEl>
+                                          <p:spTgt spid="29"/>
+                                        </p:tgtEl>
+                                        <p:attrNameLst>
+                                          <p:attrName>style.visibility</p:attrName>
+                                        </p:attrNameLst>
+                                      </p:cBhvr>
+                                      <p:to>
+                                        <p:strVal val="visible"/>
+                                      </p:to>
+                                    </p:set>
+                                    <p:animEffect transition="in" filter="fade">
+                                      <p:cBhvr>
+                                        <p:cTn id="92" dur="500"/>
+                                        <p:tgtEl>
+                                          <p:spTgt spid="29"/>
+                                        </p:tgtEl>
+                                      </p:cBhvr>
+                                    </p:animEffect>
+                                  </p:childTnLst>
+                                </p:cTn>
+                              </p:par>
+                              <p:par>
+                                <p:cTn id="93" presetID="10" presetClass="entr" presetSubtype="0" fill="hold" grpId="0" nodeType="withEffect">
+                                  <p:stCondLst>
+                                    <p:cond delay="0"/>
+                                  </p:stCondLst>
+                                  <p:childTnLst>
+                                    <p:set>
+                                      <p:cBhvr>
+                                        <p:cTn id="94" dur="1" fill="hold">
+                                          <p:stCondLst>
+                                            <p:cond delay="0"/>
+                                          </p:stCondLst>
+                                        </p:cTn>
+                                        <p:tgtEl>
+                                          <p:spTgt spid="30"/>
+                                        </p:tgtEl>
+                                        <p:attrNameLst>
+                                          <p:attrName>style.visibility</p:attrName>
+                                        </p:attrNameLst>
+                                      </p:cBhvr>
+                                      <p:to>
+                                        <p:strVal val="visible"/>
+                                      </p:to>
+                                    </p:set>
+                                    <p:animEffect transition="in" filter="fade">
+                                      <p:cBhvr>
+                                        <p:cTn id="95" dur="500"/>
+                                        <p:tgtEl>
+                                          <p:spTgt spid="30"/>
+                                        </p:tgtEl>
+                                      </p:cBhvr>
+                                    </p:animEffect>
+                                  </p:childTnLst>
+                                </p:cTn>
+                              </p:par>
+                              <p:par>
+                                <p:cTn id="96" presetID="10" presetClass="entr" presetSubtype="0" fill="hold" grpId="0" nodeType="withEffect">
+                                  <p:stCondLst>
+                                    <p:cond delay="0"/>
+                                  </p:stCondLst>
+                                  <p:childTnLst>
+                                    <p:set>
+                                      <p:cBhvr>
+                                        <p:cTn id="97" dur="1" fill="hold">
+                                          <p:stCondLst>
+                                            <p:cond delay="0"/>
+                                          </p:stCondLst>
+                                        </p:cTn>
+                                        <p:tgtEl>
+                                          <p:spTgt spid="31"/>
+                                        </p:tgtEl>
+                                        <p:attrNameLst>
+                                          <p:attrName>style.visibility</p:attrName>
+                                        </p:attrNameLst>
+                                      </p:cBhvr>
+                                      <p:to>
+                                        <p:strVal val="visible"/>
+                                      </p:to>
+                                    </p:set>
+                                    <p:animEffect transition="in" filter="fade">
+                                      <p:cBhvr>
+                                        <p:cTn id="98" dur="500"/>
+                                        <p:tgtEl>
+                                          <p:spTgt spid="31"/>
+                                        </p:tgtEl>
+                                      </p:cBhvr>
+                                    </p:animEffect>
+                                  </p:childTnLst>
+                                </p:cTn>
+                              </p:par>
+                              <p:par>
+                                <p:cTn id="99" presetID="10" presetClass="entr" presetSubtype="0" fill="hold" grpId="0" nodeType="withEffect">
+                                  <p:stCondLst>
+                                    <p:cond delay="0"/>
+                                  </p:stCondLst>
+                                  <p:childTnLst>
+                                    <p:set>
+                                      <p:cBhvr>
+                                        <p:cTn id="100" dur="1" fill="hold">
+                                          <p:stCondLst>
+                                            <p:cond delay="0"/>
+                                          </p:stCondLst>
+                                        </p:cTn>
+                                        <p:tgtEl>
+                                          <p:spTgt spid="32"/>
+                                        </p:tgtEl>
+                                        <p:attrNameLst>
+                                          <p:attrName>style.visibility</p:attrName>
+                                        </p:attrNameLst>
+                                      </p:cBhvr>
+                                      <p:to>
+                                        <p:strVal val="visible"/>
+                                      </p:to>
+                                    </p:set>
+                                    <p:animEffect transition="in" filter="fade">
+                                      <p:cBhvr>
+                                        <p:cTn id="101" dur="500"/>
+                                        <p:tgtEl>
+                                          <p:spTgt spid="32"/>
+                                        </p:tgtEl>
+                                      </p:cBhvr>
+                                    </p:animEffect>
+                                  </p:childTnLst>
+                                </p:cTn>
+                              </p:par>
+                              <p:par>
+                                <p:cTn id="102" presetID="10" presetClass="entr" presetSubtype="0" fill="hold" grpId="0" nodeType="withEffect">
+                                  <p:stCondLst>
+                                    <p:cond delay="0"/>
+                                  </p:stCondLst>
+                                  <p:childTnLst>
+                                    <p:set>
+                                      <p:cBhvr>
+                                        <p:cTn id="103" dur="1" fill="hold">
+                                          <p:stCondLst>
+                                            <p:cond delay="0"/>
+                                          </p:stCondLst>
+                                        </p:cTn>
+                                        <p:tgtEl>
+                                          <p:spTgt spid="33"/>
+                                        </p:tgtEl>
+                                        <p:attrNameLst>
+                                          <p:attrName>style.visibility</p:attrName>
+                                        </p:attrNameLst>
+                                      </p:cBhvr>
+                                      <p:to>
+                                        <p:strVal val="visible"/>
+                                      </p:to>
+                                    </p:set>
+                                    <p:animEffect transition="in" filter="fade">
+                                      <p:cBhvr>
+                                        <p:cTn id="104" dur="500"/>
+                                        <p:tgtEl>
+                                          <p:spTgt spid="33"/>
+                                        </p:tgtEl>
+                                      </p:cBhvr>
+                                    </p:animEffect>
+                                  </p:childTnLst>
+                                </p:cTn>
+                              </p:par>
+                            </p:childTnLst>
+                          </p:cTn>
+                        </p:par>
+                      </p:childTnLst>
+                    </p:cTn>
+                  </p:par>
+                </p:childTnLst>
+              </p:cTn>
+              <p:prevCondLst>
+                <p:cond evt="onPrev" delay="0">
+                  <p:tgtEl>
+                    <p:sldTgt/>
+                  </p:tgtEl>
+                </p:cond>
+              </p:prevCondLst>
+              <p:nextCondLst>
+                <p:cond evt="onNext" delay="0">
+                  <p:tgtEl>
+                    <p:sldTgt/>
+                  </p:tgtEl>
+                </p:cond>
+              </p:nextCondLst>
+            </p:seq>
+          </p:childTnLst>
+        </p:cTn>
+      </p:par>
+    </p:tnLst>
+  </p:timing>
 </p:sld>
 </file>
 
@@ -6614,6 +9200,1194 @@
   <p:transition spd="med">
     <p:fade/>
   </p:transition>
+  <p:timing>
+    <p:tnLst>
+      <p:par>
+        <p:cTn id="1" dur="indefinite" restart="never" nodeType="tmRoot">
+          <p:childTnLst>
+            <p:seq concurrent="1" nextAc="seek">
+              <p:cTn id="2" dur="indefinite" nodeType="mainSeq">
+                <p:childTnLst>
+                  <p:par>
+                    <p:cTn id="3" fill="hold">
+                      <p:stCondLst>
+                        <p:cond delay="indefinite"/>
+                      </p:stCondLst>
+                      <p:childTnLst>
+                        <p:par>
+                          <p:cTn id="4" fill="hold">
+                            <p:stCondLst>
+                              <p:cond delay="0"/>
+                            </p:stCondLst>
+                            <p:childTnLst>
+                              <p:par>
+                                <p:cTn id="5" presetID="10" presetClass="entr" presetSubtype="0" fill="hold" grpId="0" nodeType="clickEffect">
+                                  <p:stCondLst>
+                                    <p:cond delay="0"/>
+                                  </p:stCondLst>
+                                  <p:childTnLst>
+                                    <p:set>
+                                      <p:cBhvr>
+                                        <p:cTn id="6" dur="1" fill="hold">
+                                          <p:stCondLst>
+                                            <p:cond delay="0"/>
+                                          </p:stCondLst>
+                                        </p:cTn>
+                                        <p:tgtEl>
+                                          <p:spTgt spid="4"/>
+                                        </p:tgtEl>
+                                        <p:attrNameLst>
+                                          <p:attrName>style.visibility</p:attrName>
+                                        </p:attrNameLst>
+                                      </p:cBhvr>
+                                      <p:to>
+                                        <p:strVal val="visible"/>
+                                      </p:to>
+                                    </p:set>
+                                    <p:animEffect transition="in" filter="fade">
+                                      <p:cBhvr>
+                                        <p:cTn id="7" dur="500"/>
+                                        <p:tgtEl>
+                                          <p:spTgt spid="4"/>
+                                        </p:tgtEl>
+                                      </p:cBhvr>
+                                    </p:animEffect>
+                                  </p:childTnLst>
+                                </p:cTn>
+                              </p:par>
+                              <p:par>
+                                <p:cTn id="8" presetID="10" presetClass="entr" presetSubtype="0" fill="hold" grpId="0" nodeType="withEffect">
+                                  <p:stCondLst>
+                                    <p:cond delay="0"/>
+                                  </p:stCondLst>
+                                  <p:childTnLst>
+                                    <p:set>
+                                      <p:cBhvr>
+                                        <p:cTn id="9" dur="1" fill="hold">
+                                          <p:stCondLst>
+                                            <p:cond delay="0"/>
+                                          </p:stCondLst>
+                                        </p:cTn>
+                                        <p:tgtEl>
+                                          <p:spTgt spid="5"/>
+                                        </p:tgtEl>
+                                        <p:attrNameLst>
+                                          <p:attrName>style.visibility</p:attrName>
+                                        </p:attrNameLst>
+                                      </p:cBhvr>
+                                      <p:to>
+                                        <p:strVal val="visible"/>
+                                      </p:to>
+                                    </p:set>
+                                    <p:animEffect transition="in" filter="fade">
+                                      <p:cBhvr>
+                                        <p:cTn id="10" dur="500"/>
+                                        <p:tgtEl>
+                                          <p:spTgt spid="5"/>
+                                        </p:tgtEl>
+                                      </p:cBhvr>
+                                    </p:animEffect>
+                                  </p:childTnLst>
+                                </p:cTn>
+                              </p:par>
+                              <p:par>
+                                <p:cTn id="11" presetID="10" presetClass="entr" presetSubtype="0" fill="hold" grpId="0" nodeType="withEffect">
+                                  <p:stCondLst>
+                                    <p:cond delay="0"/>
+                                  </p:stCondLst>
+                                  <p:childTnLst>
+                                    <p:set>
+                                      <p:cBhvr>
+                                        <p:cTn id="12" dur="1" fill="hold">
+                                          <p:stCondLst>
+                                            <p:cond delay="0"/>
+                                          </p:stCondLst>
+                                        </p:cTn>
+                                        <p:tgtEl>
+                                          <p:spTgt spid="6"/>
+                                        </p:tgtEl>
+                                        <p:attrNameLst>
+                                          <p:attrName>style.visibility</p:attrName>
+                                        </p:attrNameLst>
+                                      </p:cBhvr>
+                                      <p:to>
+                                        <p:strVal val="visible"/>
+                                      </p:to>
+                                    </p:set>
+                                    <p:animEffect transition="in" filter="fade">
+                                      <p:cBhvr>
+                                        <p:cTn id="13" dur="500"/>
+                                        <p:tgtEl>
+                                          <p:spTgt spid="6"/>
+                                        </p:tgtEl>
+                                      </p:cBhvr>
+                                    </p:animEffect>
+                                  </p:childTnLst>
+                                </p:cTn>
+                              </p:par>
+                              <p:par>
+                                <p:cTn id="14" presetID="10" presetClass="entr" presetSubtype="0" fill="hold" grpId="0" nodeType="withEffect">
+                                  <p:stCondLst>
+                                    <p:cond delay="0"/>
+                                  </p:stCondLst>
+                                  <p:childTnLst>
+                                    <p:set>
+                                      <p:cBhvr>
+                                        <p:cTn id="15" dur="1" fill="hold">
+                                          <p:stCondLst>
+                                            <p:cond delay="0"/>
+                                          </p:stCondLst>
+                                        </p:cTn>
+                                        <p:tgtEl>
+                                          <p:spTgt spid="7"/>
+                                        </p:tgtEl>
+                                        <p:attrNameLst>
+                                          <p:attrName>style.visibility</p:attrName>
+                                        </p:attrNameLst>
+                                      </p:cBhvr>
+                                      <p:to>
+                                        <p:strVal val="visible"/>
+                                      </p:to>
+                                    </p:set>
+                                    <p:animEffect transition="in" filter="fade">
+                                      <p:cBhvr>
+                                        <p:cTn id="16" dur="500"/>
+                                        <p:tgtEl>
+                                          <p:spTgt spid="7"/>
+                                        </p:tgtEl>
+                                      </p:cBhvr>
+                                    </p:animEffect>
+                                  </p:childTnLst>
+                                </p:cTn>
+                              </p:par>
+                              <p:par>
+                                <p:cTn id="17" presetID="10" presetClass="entr" presetSubtype="0" fill="hold" grpId="0" nodeType="withEffect">
+                                  <p:stCondLst>
+                                    <p:cond delay="0"/>
+                                  </p:stCondLst>
+                                  <p:childTnLst>
+                                    <p:set>
+                                      <p:cBhvr>
+                                        <p:cTn id="18" dur="1" fill="hold">
+                                          <p:stCondLst>
+                                            <p:cond delay="0"/>
+                                          </p:stCondLst>
+                                        </p:cTn>
+                                        <p:tgtEl>
+                                          <p:spTgt spid="8"/>
+                                        </p:tgtEl>
+                                        <p:attrNameLst>
+                                          <p:attrName>style.visibility</p:attrName>
+                                        </p:attrNameLst>
+                                      </p:cBhvr>
+                                      <p:to>
+                                        <p:strVal val="visible"/>
+                                      </p:to>
+                                    </p:set>
+                                    <p:animEffect transition="in" filter="fade">
+                                      <p:cBhvr>
+                                        <p:cTn id="19" dur="500"/>
+                                        <p:tgtEl>
+                                          <p:spTgt spid="8"/>
+                                        </p:tgtEl>
+                                      </p:cBhvr>
+                                    </p:animEffect>
+                                  </p:childTnLst>
+                                </p:cTn>
+                              </p:par>
+                            </p:childTnLst>
+                          </p:cTn>
+                        </p:par>
+                      </p:childTnLst>
+                    </p:cTn>
+                  </p:par>
+                  <p:par>
+                    <p:cTn id="20" fill="hold">
+                      <p:stCondLst>
+                        <p:cond delay="indefinite"/>
+                      </p:stCondLst>
+                      <p:childTnLst>
+                        <p:par>
+                          <p:cTn id="21" fill="hold">
+                            <p:stCondLst>
+                              <p:cond delay="0"/>
+                            </p:stCondLst>
+                            <p:childTnLst>
+                              <p:par>
+                                <p:cTn id="22" presetID="10" presetClass="entr" presetSubtype="0" fill="hold" grpId="0" nodeType="clickEffect">
+                                  <p:stCondLst>
+                                    <p:cond delay="0"/>
+                                  </p:stCondLst>
+                                  <p:childTnLst>
+                                    <p:set>
+                                      <p:cBhvr>
+                                        <p:cTn id="23" dur="1" fill="hold">
+                                          <p:stCondLst>
+                                            <p:cond delay="0"/>
+                                          </p:stCondLst>
+                                        </p:cTn>
+                                        <p:tgtEl>
+                                          <p:spTgt spid="9"/>
+                                        </p:tgtEl>
+                                        <p:attrNameLst>
+                                          <p:attrName>style.visibility</p:attrName>
+                                        </p:attrNameLst>
+                                      </p:cBhvr>
+                                      <p:to>
+                                        <p:strVal val="visible"/>
+                                      </p:to>
+                                    </p:set>
+                                    <p:animEffect transition="in" filter="fade">
+                                      <p:cBhvr>
+                                        <p:cTn id="24" dur="500"/>
+                                        <p:tgtEl>
+                                          <p:spTgt spid="9"/>
+                                        </p:tgtEl>
+                                      </p:cBhvr>
+                                    </p:animEffect>
+                                  </p:childTnLst>
+                                </p:cTn>
+                              </p:par>
+                              <p:par>
+                                <p:cTn id="25" presetID="10" presetClass="entr" presetSubtype="0" fill="hold" grpId="0" nodeType="withEffect">
+                                  <p:stCondLst>
+                                    <p:cond delay="0"/>
+                                  </p:stCondLst>
+                                  <p:childTnLst>
+                                    <p:set>
+                                      <p:cBhvr>
+                                        <p:cTn id="26" dur="1" fill="hold">
+                                          <p:stCondLst>
+                                            <p:cond delay="0"/>
+                                          </p:stCondLst>
+                                        </p:cTn>
+                                        <p:tgtEl>
+                                          <p:spTgt spid="10"/>
+                                        </p:tgtEl>
+                                        <p:attrNameLst>
+                                          <p:attrName>style.visibility</p:attrName>
+                                        </p:attrNameLst>
+                                      </p:cBhvr>
+                                      <p:to>
+                                        <p:strVal val="visible"/>
+                                      </p:to>
+                                    </p:set>
+                                    <p:animEffect transition="in" filter="fade">
+                                      <p:cBhvr>
+                                        <p:cTn id="27" dur="500"/>
+                                        <p:tgtEl>
+                                          <p:spTgt spid="10"/>
+                                        </p:tgtEl>
+                                      </p:cBhvr>
+                                    </p:animEffect>
+                                  </p:childTnLst>
+                                </p:cTn>
+                              </p:par>
+                              <p:par>
+                                <p:cTn id="28" presetID="10" presetClass="entr" presetSubtype="0" fill="hold" grpId="0" nodeType="withEffect">
+                                  <p:stCondLst>
+                                    <p:cond delay="0"/>
+                                  </p:stCondLst>
+                                  <p:childTnLst>
+                                    <p:set>
+                                      <p:cBhvr>
+                                        <p:cTn id="29" dur="1" fill="hold">
+                                          <p:stCondLst>
+                                            <p:cond delay="0"/>
+                                          </p:stCondLst>
+                                        </p:cTn>
+                                        <p:tgtEl>
+                                          <p:spTgt spid="11"/>
+                                        </p:tgtEl>
+                                        <p:attrNameLst>
+                                          <p:attrName>style.visibility</p:attrName>
+                                        </p:attrNameLst>
+                                      </p:cBhvr>
+                                      <p:to>
+                                        <p:strVal val="visible"/>
+                                      </p:to>
+                                    </p:set>
+                                    <p:animEffect transition="in" filter="fade">
+                                      <p:cBhvr>
+                                        <p:cTn id="30" dur="500"/>
+                                        <p:tgtEl>
+                                          <p:spTgt spid="11"/>
+                                        </p:tgtEl>
+                                      </p:cBhvr>
+                                    </p:animEffect>
+                                  </p:childTnLst>
+                                </p:cTn>
+                              </p:par>
+                              <p:par>
+                                <p:cTn id="31" presetID="10" presetClass="entr" presetSubtype="0" fill="hold" grpId="0" nodeType="withEffect">
+                                  <p:stCondLst>
+                                    <p:cond delay="0"/>
+                                  </p:stCondLst>
+                                  <p:childTnLst>
+                                    <p:set>
+                                      <p:cBhvr>
+                                        <p:cTn id="32" dur="1" fill="hold">
+                                          <p:stCondLst>
+                                            <p:cond delay="0"/>
+                                          </p:stCondLst>
+                                        </p:cTn>
+                                        <p:tgtEl>
+                                          <p:spTgt spid="12"/>
+                                        </p:tgtEl>
+                                        <p:attrNameLst>
+                                          <p:attrName>style.visibility</p:attrName>
+                                        </p:attrNameLst>
+                                      </p:cBhvr>
+                                      <p:to>
+                                        <p:strVal val="visible"/>
+                                      </p:to>
+                                    </p:set>
+                                    <p:animEffect transition="in" filter="fade">
+                                      <p:cBhvr>
+                                        <p:cTn id="33" dur="500"/>
+                                        <p:tgtEl>
+                                          <p:spTgt spid="12"/>
+                                        </p:tgtEl>
+                                      </p:cBhvr>
+                                    </p:animEffect>
+                                  </p:childTnLst>
+                                </p:cTn>
+                              </p:par>
+                              <p:par>
+                                <p:cTn id="34" presetID="10" presetClass="entr" presetSubtype="0" fill="hold" grpId="0" nodeType="withEffect">
+                                  <p:stCondLst>
+                                    <p:cond delay="0"/>
+                                  </p:stCondLst>
+                                  <p:childTnLst>
+                                    <p:set>
+                                      <p:cBhvr>
+                                        <p:cTn id="35" dur="1" fill="hold">
+                                          <p:stCondLst>
+                                            <p:cond delay="0"/>
+                                          </p:stCondLst>
+                                        </p:cTn>
+                                        <p:tgtEl>
+                                          <p:spTgt spid="13"/>
+                                        </p:tgtEl>
+                                        <p:attrNameLst>
+                                          <p:attrName>style.visibility</p:attrName>
+                                        </p:attrNameLst>
+                                      </p:cBhvr>
+                                      <p:to>
+                                        <p:strVal val="visible"/>
+                                      </p:to>
+                                    </p:set>
+                                    <p:animEffect transition="in" filter="fade">
+                                      <p:cBhvr>
+                                        <p:cTn id="36" dur="500"/>
+                                        <p:tgtEl>
+                                          <p:spTgt spid="13"/>
+                                        </p:tgtEl>
+                                      </p:cBhvr>
+                                    </p:animEffect>
+                                  </p:childTnLst>
+                                </p:cTn>
+                              </p:par>
+                            </p:childTnLst>
+                          </p:cTn>
+                        </p:par>
+                      </p:childTnLst>
+                    </p:cTn>
+                  </p:par>
+                  <p:par>
+                    <p:cTn id="37" fill="hold">
+                      <p:stCondLst>
+                        <p:cond delay="indefinite"/>
+                      </p:stCondLst>
+                      <p:childTnLst>
+                        <p:par>
+                          <p:cTn id="38" fill="hold">
+                            <p:stCondLst>
+                              <p:cond delay="0"/>
+                            </p:stCondLst>
+                            <p:childTnLst>
+                              <p:par>
+                                <p:cTn id="39" presetID="10" presetClass="entr" presetSubtype="0" fill="hold" grpId="0" nodeType="clickEffect">
+                                  <p:stCondLst>
+                                    <p:cond delay="0"/>
+                                  </p:stCondLst>
+                                  <p:childTnLst>
+                                    <p:set>
+                                      <p:cBhvr>
+                                        <p:cTn id="40" dur="1" fill="hold">
+                                          <p:stCondLst>
+                                            <p:cond delay="0"/>
+                                          </p:stCondLst>
+                                        </p:cTn>
+                                        <p:tgtEl>
+                                          <p:spTgt spid="14"/>
+                                        </p:tgtEl>
+                                        <p:attrNameLst>
+                                          <p:attrName>style.visibility</p:attrName>
+                                        </p:attrNameLst>
+                                      </p:cBhvr>
+                                      <p:to>
+                                        <p:strVal val="visible"/>
+                                      </p:to>
+                                    </p:set>
+                                    <p:animEffect transition="in" filter="fade">
+                                      <p:cBhvr>
+                                        <p:cTn id="41" dur="500"/>
+                                        <p:tgtEl>
+                                          <p:spTgt spid="14"/>
+                                        </p:tgtEl>
+                                      </p:cBhvr>
+                                    </p:animEffect>
+                                  </p:childTnLst>
+                                </p:cTn>
+                              </p:par>
+                              <p:par>
+                                <p:cTn id="42" presetID="10" presetClass="entr" presetSubtype="0" fill="hold" grpId="0" nodeType="withEffect">
+                                  <p:stCondLst>
+                                    <p:cond delay="0"/>
+                                  </p:stCondLst>
+                                  <p:childTnLst>
+                                    <p:set>
+                                      <p:cBhvr>
+                                        <p:cTn id="43" dur="1" fill="hold">
+                                          <p:stCondLst>
+                                            <p:cond delay="0"/>
+                                          </p:stCondLst>
+                                        </p:cTn>
+                                        <p:tgtEl>
+                                          <p:spTgt spid="15"/>
+                                        </p:tgtEl>
+                                        <p:attrNameLst>
+                                          <p:attrName>style.visibility</p:attrName>
+                                        </p:attrNameLst>
+                                      </p:cBhvr>
+                                      <p:to>
+                                        <p:strVal val="visible"/>
+                                      </p:to>
+                                    </p:set>
+                                    <p:animEffect transition="in" filter="fade">
+                                      <p:cBhvr>
+                                        <p:cTn id="44" dur="500"/>
+                                        <p:tgtEl>
+                                          <p:spTgt spid="15"/>
+                                        </p:tgtEl>
+                                      </p:cBhvr>
+                                    </p:animEffect>
+                                  </p:childTnLst>
+                                </p:cTn>
+                              </p:par>
+                              <p:par>
+                                <p:cTn id="45" presetID="10" presetClass="entr" presetSubtype="0" fill="hold" grpId="0" nodeType="withEffect">
+                                  <p:stCondLst>
+                                    <p:cond delay="0"/>
+                                  </p:stCondLst>
+                                  <p:childTnLst>
+                                    <p:set>
+                                      <p:cBhvr>
+                                        <p:cTn id="46" dur="1" fill="hold">
+                                          <p:stCondLst>
+                                            <p:cond delay="0"/>
+                                          </p:stCondLst>
+                                        </p:cTn>
+                                        <p:tgtEl>
+                                          <p:spTgt spid="16"/>
+                                        </p:tgtEl>
+                                        <p:attrNameLst>
+                                          <p:attrName>style.visibility</p:attrName>
+                                        </p:attrNameLst>
+                                      </p:cBhvr>
+                                      <p:to>
+                                        <p:strVal val="visible"/>
+                                      </p:to>
+                                    </p:set>
+                                    <p:animEffect transition="in" filter="fade">
+                                      <p:cBhvr>
+                                        <p:cTn id="47" dur="500"/>
+                                        <p:tgtEl>
+                                          <p:spTgt spid="16"/>
+                                        </p:tgtEl>
+                                      </p:cBhvr>
+                                    </p:animEffect>
+                                  </p:childTnLst>
+                                </p:cTn>
+                              </p:par>
+                              <p:par>
+                                <p:cTn id="48" presetID="10" presetClass="entr" presetSubtype="0" fill="hold" grpId="0" nodeType="withEffect">
+                                  <p:stCondLst>
+                                    <p:cond delay="0"/>
+                                  </p:stCondLst>
+                                  <p:childTnLst>
+                                    <p:set>
+                                      <p:cBhvr>
+                                        <p:cTn id="49" dur="1" fill="hold">
+                                          <p:stCondLst>
+                                            <p:cond delay="0"/>
+                                          </p:stCondLst>
+                                        </p:cTn>
+                                        <p:tgtEl>
+                                          <p:spTgt spid="17"/>
+                                        </p:tgtEl>
+                                        <p:attrNameLst>
+                                          <p:attrName>style.visibility</p:attrName>
+                                        </p:attrNameLst>
+                                      </p:cBhvr>
+                                      <p:to>
+                                        <p:strVal val="visible"/>
+                                      </p:to>
+                                    </p:set>
+                                    <p:animEffect transition="in" filter="fade">
+                                      <p:cBhvr>
+                                        <p:cTn id="50" dur="500"/>
+                                        <p:tgtEl>
+                                          <p:spTgt spid="17"/>
+                                        </p:tgtEl>
+                                      </p:cBhvr>
+                                    </p:animEffect>
+                                  </p:childTnLst>
+                                </p:cTn>
+                              </p:par>
+                              <p:par>
+                                <p:cTn id="51" presetID="10" presetClass="entr" presetSubtype="0" fill="hold" grpId="0" nodeType="withEffect">
+                                  <p:stCondLst>
+                                    <p:cond delay="0"/>
+                                  </p:stCondLst>
+                                  <p:childTnLst>
+                                    <p:set>
+                                      <p:cBhvr>
+                                        <p:cTn id="52" dur="1" fill="hold">
+                                          <p:stCondLst>
+                                            <p:cond delay="0"/>
+                                          </p:stCondLst>
+                                        </p:cTn>
+                                        <p:tgtEl>
+                                          <p:spTgt spid="18"/>
+                                        </p:tgtEl>
+                                        <p:attrNameLst>
+                                          <p:attrName>style.visibility</p:attrName>
+                                        </p:attrNameLst>
+                                      </p:cBhvr>
+                                      <p:to>
+                                        <p:strVal val="visible"/>
+                                      </p:to>
+                                    </p:set>
+                                    <p:animEffect transition="in" filter="fade">
+                                      <p:cBhvr>
+                                        <p:cTn id="53" dur="500"/>
+                                        <p:tgtEl>
+                                          <p:spTgt spid="18"/>
+                                        </p:tgtEl>
+                                      </p:cBhvr>
+                                    </p:animEffect>
+                                  </p:childTnLst>
+                                </p:cTn>
+                              </p:par>
+                            </p:childTnLst>
+                          </p:cTn>
+                        </p:par>
+                      </p:childTnLst>
+                    </p:cTn>
+                  </p:par>
+                  <p:par>
+                    <p:cTn id="54" fill="hold">
+                      <p:stCondLst>
+                        <p:cond delay="indefinite"/>
+                      </p:stCondLst>
+                      <p:childTnLst>
+                        <p:par>
+                          <p:cTn id="55" fill="hold">
+                            <p:stCondLst>
+                              <p:cond delay="0"/>
+                            </p:stCondLst>
+                            <p:childTnLst>
+                              <p:par>
+                                <p:cTn id="56" presetID="10" presetClass="entr" presetSubtype="0" fill="hold" grpId="0" nodeType="clickEffect">
+                                  <p:stCondLst>
+                                    <p:cond delay="0"/>
+                                  </p:stCondLst>
+                                  <p:childTnLst>
+                                    <p:set>
+                                      <p:cBhvr>
+                                        <p:cTn id="57" dur="1" fill="hold">
+                                          <p:stCondLst>
+                                            <p:cond delay="0"/>
+                                          </p:stCondLst>
+                                        </p:cTn>
+                                        <p:tgtEl>
+                                          <p:spTgt spid="19"/>
+                                        </p:tgtEl>
+                                        <p:attrNameLst>
+                                          <p:attrName>style.visibility</p:attrName>
+                                        </p:attrNameLst>
+                                      </p:cBhvr>
+                                      <p:to>
+                                        <p:strVal val="visible"/>
+                                      </p:to>
+                                    </p:set>
+                                    <p:animEffect transition="in" filter="fade">
+                                      <p:cBhvr>
+                                        <p:cTn id="58" dur="500"/>
+                                        <p:tgtEl>
+                                          <p:spTgt spid="19"/>
+                                        </p:tgtEl>
+                                      </p:cBhvr>
+                                    </p:animEffect>
+                                  </p:childTnLst>
+                                </p:cTn>
+                              </p:par>
+                              <p:par>
+                                <p:cTn id="59" presetID="10" presetClass="entr" presetSubtype="0" fill="hold" grpId="0" nodeType="withEffect">
+                                  <p:stCondLst>
+                                    <p:cond delay="0"/>
+                                  </p:stCondLst>
+                                  <p:childTnLst>
+                                    <p:set>
+                                      <p:cBhvr>
+                                        <p:cTn id="60" dur="1" fill="hold">
+                                          <p:stCondLst>
+                                            <p:cond delay="0"/>
+                                          </p:stCondLst>
+                                        </p:cTn>
+                                        <p:tgtEl>
+                                          <p:spTgt spid="20"/>
+                                        </p:tgtEl>
+                                        <p:attrNameLst>
+                                          <p:attrName>style.visibility</p:attrName>
+                                        </p:attrNameLst>
+                                      </p:cBhvr>
+                                      <p:to>
+                                        <p:strVal val="visible"/>
+                                      </p:to>
+                                    </p:set>
+                                    <p:animEffect transition="in" filter="fade">
+                                      <p:cBhvr>
+                                        <p:cTn id="61" dur="500"/>
+                                        <p:tgtEl>
+                                          <p:spTgt spid="20"/>
+                                        </p:tgtEl>
+                                      </p:cBhvr>
+                                    </p:animEffect>
+                                  </p:childTnLst>
+                                </p:cTn>
+                              </p:par>
+                              <p:par>
+                                <p:cTn id="62" presetID="10" presetClass="entr" presetSubtype="0" fill="hold" grpId="0" nodeType="withEffect">
+                                  <p:stCondLst>
+                                    <p:cond delay="0"/>
+                                  </p:stCondLst>
+                                  <p:childTnLst>
+                                    <p:set>
+                                      <p:cBhvr>
+                                        <p:cTn id="63" dur="1" fill="hold">
+                                          <p:stCondLst>
+                                            <p:cond delay="0"/>
+                                          </p:stCondLst>
+                                        </p:cTn>
+                                        <p:tgtEl>
+                                          <p:spTgt spid="21"/>
+                                        </p:tgtEl>
+                                        <p:attrNameLst>
+                                          <p:attrName>style.visibility</p:attrName>
+                                        </p:attrNameLst>
+                                      </p:cBhvr>
+                                      <p:to>
+                                        <p:strVal val="visible"/>
+                                      </p:to>
+                                    </p:set>
+                                    <p:animEffect transition="in" filter="fade">
+                                      <p:cBhvr>
+                                        <p:cTn id="64" dur="500"/>
+                                        <p:tgtEl>
+                                          <p:spTgt spid="21"/>
+                                        </p:tgtEl>
+                                      </p:cBhvr>
+                                    </p:animEffect>
+                                  </p:childTnLst>
+                                </p:cTn>
+                              </p:par>
+                              <p:par>
+                                <p:cTn id="65" presetID="10" presetClass="entr" presetSubtype="0" fill="hold" grpId="0" nodeType="withEffect">
+                                  <p:stCondLst>
+                                    <p:cond delay="0"/>
+                                  </p:stCondLst>
+                                  <p:childTnLst>
+                                    <p:set>
+                                      <p:cBhvr>
+                                        <p:cTn id="66" dur="1" fill="hold">
+                                          <p:stCondLst>
+                                            <p:cond delay="0"/>
+                                          </p:stCondLst>
+                                        </p:cTn>
+                                        <p:tgtEl>
+                                          <p:spTgt spid="22"/>
+                                        </p:tgtEl>
+                                        <p:attrNameLst>
+                                          <p:attrName>style.visibility</p:attrName>
+                                        </p:attrNameLst>
+                                      </p:cBhvr>
+                                      <p:to>
+                                        <p:strVal val="visible"/>
+                                      </p:to>
+                                    </p:set>
+                                    <p:animEffect transition="in" filter="fade">
+                                      <p:cBhvr>
+                                        <p:cTn id="67" dur="500"/>
+                                        <p:tgtEl>
+                                          <p:spTgt spid="22"/>
+                                        </p:tgtEl>
+                                      </p:cBhvr>
+                                    </p:animEffect>
+                                  </p:childTnLst>
+                                </p:cTn>
+                              </p:par>
+                              <p:par>
+                                <p:cTn id="68" presetID="10" presetClass="entr" presetSubtype="0" fill="hold" grpId="0" nodeType="withEffect">
+                                  <p:stCondLst>
+                                    <p:cond delay="0"/>
+                                  </p:stCondLst>
+                                  <p:childTnLst>
+                                    <p:set>
+                                      <p:cBhvr>
+                                        <p:cTn id="69" dur="1" fill="hold">
+                                          <p:stCondLst>
+                                            <p:cond delay="0"/>
+                                          </p:stCondLst>
+                                        </p:cTn>
+                                        <p:tgtEl>
+                                          <p:spTgt spid="23"/>
+                                        </p:tgtEl>
+                                        <p:attrNameLst>
+                                          <p:attrName>style.visibility</p:attrName>
+                                        </p:attrNameLst>
+                                      </p:cBhvr>
+                                      <p:to>
+                                        <p:strVal val="visible"/>
+                                      </p:to>
+                                    </p:set>
+                                    <p:animEffect transition="in" filter="fade">
+                                      <p:cBhvr>
+                                        <p:cTn id="70" dur="500"/>
+                                        <p:tgtEl>
+                                          <p:spTgt spid="23"/>
+                                        </p:tgtEl>
+                                      </p:cBhvr>
+                                    </p:animEffect>
+                                  </p:childTnLst>
+                                </p:cTn>
+                              </p:par>
+                            </p:childTnLst>
+                          </p:cTn>
+                        </p:par>
+                      </p:childTnLst>
+                    </p:cTn>
+                  </p:par>
+                  <p:par>
+                    <p:cTn id="71" fill="hold">
+                      <p:stCondLst>
+                        <p:cond delay="indefinite"/>
+                      </p:stCondLst>
+                      <p:childTnLst>
+                        <p:par>
+                          <p:cTn id="72" fill="hold">
+                            <p:stCondLst>
+                              <p:cond delay="0"/>
+                            </p:stCondLst>
+                            <p:childTnLst>
+                              <p:par>
+                                <p:cTn id="73" presetID="10" presetClass="entr" presetSubtype="0" fill="hold" grpId="0" nodeType="clickEffect">
+                                  <p:stCondLst>
+                                    <p:cond delay="0"/>
+                                  </p:stCondLst>
+                                  <p:childTnLst>
+                                    <p:set>
+                                      <p:cBhvr>
+                                        <p:cTn id="74" dur="1" fill="hold">
+                                          <p:stCondLst>
+                                            <p:cond delay="0"/>
+                                          </p:stCondLst>
+                                        </p:cTn>
+                                        <p:tgtEl>
+                                          <p:spTgt spid="24"/>
+                                        </p:tgtEl>
+                                        <p:attrNameLst>
+                                          <p:attrName>style.visibility</p:attrName>
+                                        </p:attrNameLst>
+                                      </p:cBhvr>
+                                      <p:to>
+                                        <p:strVal val="visible"/>
+                                      </p:to>
+                                    </p:set>
+                                    <p:animEffect transition="in" filter="fade">
+                                      <p:cBhvr>
+                                        <p:cTn id="75" dur="500"/>
+                                        <p:tgtEl>
+                                          <p:spTgt spid="24"/>
+                                        </p:tgtEl>
+                                      </p:cBhvr>
+                                    </p:animEffect>
+                                  </p:childTnLst>
+                                </p:cTn>
+                              </p:par>
+                              <p:par>
+                                <p:cTn id="76" presetID="10" presetClass="entr" presetSubtype="0" fill="hold" grpId="0" nodeType="withEffect">
+                                  <p:stCondLst>
+                                    <p:cond delay="0"/>
+                                  </p:stCondLst>
+                                  <p:childTnLst>
+                                    <p:set>
+                                      <p:cBhvr>
+                                        <p:cTn id="77" dur="1" fill="hold">
+                                          <p:stCondLst>
+                                            <p:cond delay="0"/>
+                                          </p:stCondLst>
+                                        </p:cTn>
+                                        <p:tgtEl>
+                                          <p:spTgt spid="25"/>
+                                        </p:tgtEl>
+                                        <p:attrNameLst>
+                                          <p:attrName>style.visibility</p:attrName>
+                                        </p:attrNameLst>
+                                      </p:cBhvr>
+                                      <p:to>
+                                        <p:strVal val="visible"/>
+                                      </p:to>
+                                    </p:set>
+                                    <p:animEffect transition="in" filter="fade">
+                                      <p:cBhvr>
+                                        <p:cTn id="78" dur="500"/>
+                                        <p:tgtEl>
+                                          <p:spTgt spid="25"/>
+                                        </p:tgtEl>
+                                      </p:cBhvr>
+                                    </p:animEffect>
+                                  </p:childTnLst>
+                                </p:cTn>
+                              </p:par>
+                              <p:par>
+                                <p:cTn id="79" presetID="10" presetClass="entr" presetSubtype="0" fill="hold" grpId="0" nodeType="withEffect">
+                                  <p:stCondLst>
+                                    <p:cond delay="0"/>
+                                  </p:stCondLst>
+                                  <p:childTnLst>
+                                    <p:set>
+                                      <p:cBhvr>
+                                        <p:cTn id="80" dur="1" fill="hold">
+                                          <p:stCondLst>
+                                            <p:cond delay="0"/>
+                                          </p:stCondLst>
+                                        </p:cTn>
+                                        <p:tgtEl>
+                                          <p:spTgt spid="26"/>
+                                        </p:tgtEl>
+                                        <p:attrNameLst>
+                                          <p:attrName>style.visibility</p:attrName>
+                                        </p:attrNameLst>
+                                      </p:cBhvr>
+                                      <p:to>
+                                        <p:strVal val="visible"/>
+                                      </p:to>
+                                    </p:set>
+                                    <p:animEffect transition="in" filter="fade">
+                                      <p:cBhvr>
+                                        <p:cTn id="81" dur="500"/>
+                                        <p:tgtEl>
+                                          <p:spTgt spid="26"/>
+                                        </p:tgtEl>
+                                      </p:cBhvr>
+                                    </p:animEffect>
+                                  </p:childTnLst>
+                                </p:cTn>
+                              </p:par>
+                              <p:par>
+                                <p:cTn id="82" presetID="10" presetClass="entr" presetSubtype="0" fill="hold" grpId="0" nodeType="withEffect">
+                                  <p:stCondLst>
+                                    <p:cond delay="0"/>
+                                  </p:stCondLst>
+                                  <p:childTnLst>
+                                    <p:set>
+                                      <p:cBhvr>
+                                        <p:cTn id="83" dur="1" fill="hold">
+                                          <p:stCondLst>
+                                            <p:cond delay="0"/>
+                                          </p:stCondLst>
+                                        </p:cTn>
+                                        <p:tgtEl>
+                                          <p:spTgt spid="27"/>
+                                        </p:tgtEl>
+                                        <p:attrNameLst>
+                                          <p:attrName>style.visibility</p:attrName>
+                                        </p:attrNameLst>
+                                      </p:cBhvr>
+                                      <p:to>
+                                        <p:strVal val="visible"/>
+                                      </p:to>
+                                    </p:set>
+                                    <p:animEffect transition="in" filter="fade">
+                                      <p:cBhvr>
+                                        <p:cTn id="84" dur="500"/>
+                                        <p:tgtEl>
+                                          <p:spTgt spid="27"/>
+                                        </p:tgtEl>
+                                      </p:cBhvr>
+                                    </p:animEffect>
+                                  </p:childTnLst>
+                                </p:cTn>
+                              </p:par>
+                              <p:par>
+                                <p:cTn id="85" presetID="10" presetClass="entr" presetSubtype="0" fill="hold" grpId="0" nodeType="withEffect">
+                                  <p:stCondLst>
+                                    <p:cond delay="0"/>
+                                  </p:stCondLst>
+                                  <p:childTnLst>
+                                    <p:set>
+                                      <p:cBhvr>
+                                        <p:cTn id="86" dur="1" fill="hold">
+                                          <p:stCondLst>
+                                            <p:cond delay="0"/>
+                                          </p:stCondLst>
+                                        </p:cTn>
+                                        <p:tgtEl>
+                                          <p:spTgt spid="28"/>
+                                        </p:tgtEl>
+                                        <p:attrNameLst>
+                                          <p:attrName>style.visibility</p:attrName>
+                                        </p:attrNameLst>
+                                      </p:cBhvr>
+                                      <p:to>
+                                        <p:strVal val="visible"/>
+                                      </p:to>
+                                    </p:set>
+                                    <p:animEffect transition="in" filter="fade">
+                                      <p:cBhvr>
+                                        <p:cTn id="87" dur="500"/>
+                                        <p:tgtEl>
+                                          <p:spTgt spid="28"/>
+                                        </p:tgtEl>
+                                      </p:cBhvr>
+                                    </p:animEffect>
+                                  </p:childTnLst>
+                                </p:cTn>
+                              </p:par>
+                            </p:childTnLst>
+                          </p:cTn>
+                        </p:par>
+                      </p:childTnLst>
+                    </p:cTn>
+                  </p:par>
+                  <p:par>
+                    <p:cTn id="88" fill="hold">
+                      <p:stCondLst>
+                        <p:cond delay="indefinite"/>
+                      </p:stCondLst>
+                      <p:childTnLst>
+                        <p:par>
+                          <p:cTn id="89" fill="hold">
+                            <p:stCondLst>
+                              <p:cond delay="0"/>
+                            </p:stCondLst>
+                            <p:childTnLst>
+                              <p:par>
+                                <p:cTn id="90" presetID="10" presetClass="entr" presetSubtype="0" fill="hold" grpId="0" nodeType="clickEffect">
+                                  <p:stCondLst>
+                                    <p:cond delay="0"/>
+                                  </p:stCondLst>
+                                  <p:childTnLst>
+                                    <p:set>
+                                      <p:cBhvr>
+                                        <p:cTn id="91" dur="1" fill="hold">
+                                          <p:stCondLst>
+                                            <p:cond delay="0"/>
+                                          </p:stCondLst>
+                                        </p:cTn>
+                                        <p:tgtEl>
+                                          <p:spTgt spid="29"/>
+                                        </p:tgtEl>
+                                        <p:attrNameLst>
+                                          <p:attrName>style.visibility</p:attrName>
+                                        </p:attrNameLst>
+                                      </p:cBhvr>
+                                      <p:to>
+                                        <p:strVal val="visible"/>
+                                      </p:to>
+                                    </p:set>
+                                    <p:animEffect transition="in" filter="fade">
+                                      <p:cBhvr>
+                                        <p:cTn id="92" dur="500"/>
+                                        <p:tgtEl>
+                                          <p:spTgt spid="29"/>
+                                        </p:tgtEl>
+                                      </p:cBhvr>
+                                    </p:animEffect>
+                                  </p:childTnLst>
+                                </p:cTn>
+                              </p:par>
+                              <p:par>
+                                <p:cTn id="93" presetID="10" presetClass="entr" presetSubtype="0" fill="hold" grpId="0" nodeType="withEffect">
+                                  <p:stCondLst>
+                                    <p:cond delay="0"/>
+                                  </p:stCondLst>
+                                  <p:childTnLst>
+                                    <p:set>
+                                      <p:cBhvr>
+                                        <p:cTn id="94" dur="1" fill="hold">
+                                          <p:stCondLst>
+                                            <p:cond delay="0"/>
+                                          </p:stCondLst>
+                                        </p:cTn>
+                                        <p:tgtEl>
+                                          <p:spTgt spid="30"/>
+                                        </p:tgtEl>
+                                        <p:attrNameLst>
+                                          <p:attrName>style.visibility</p:attrName>
+                                        </p:attrNameLst>
+                                      </p:cBhvr>
+                                      <p:to>
+                                        <p:strVal val="visible"/>
+                                      </p:to>
+                                    </p:set>
+                                    <p:animEffect transition="in" filter="fade">
+                                      <p:cBhvr>
+                                        <p:cTn id="95" dur="500"/>
+                                        <p:tgtEl>
+                                          <p:spTgt spid="30"/>
+                                        </p:tgtEl>
+                                      </p:cBhvr>
+                                    </p:animEffect>
+                                  </p:childTnLst>
+                                </p:cTn>
+                              </p:par>
+                              <p:par>
+                                <p:cTn id="96" presetID="10" presetClass="entr" presetSubtype="0" fill="hold" grpId="0" nodeType="withEffect">
+                                  <p:stCondLst>
+                                    <p:cond delay="0"/>
+                                  </p:stCondLst>
+                                  <p:childTnLst>
+                                    <p:set>
+                                      <p:cBhvr>
+                                        <p:cTn id="97" dur="1" fill="hold">
+                                          <p:stCondLst>
+                                            <p:cond delay="0"/>
+                                          </p:stCondLst>
+                                        </p:cTn>
+                                        <p:tgtEl>
+                                          <p:spTgt spid="31"/>
+                                        </p:tgtEl>
+                                        <p:attrNameLst>
+                                          <p:attrName>style.visibility</p:attrName>
+                                        </p:attrNameLst>
+                                      </p:cBhvr>
+                                      <p:to>
+                                        <p:strVal val="visible"/>
+                                      </p:to>
+                                    </p:set>
+                                    <p:animEffect transition="in" filter="fade">
+                                      <p:cBhvr>
+                                        <p:cTn id="98" dur="500"/>
+                                        <p:tgtEl>
+                                          <p:spTgt spid="31"/>
+                                        </p:tgtEl>
+                                      </p:cBhvr>
+                                    </p:animEffect>
+                                  </p:childTnLst>
+                                </p:cTn>
+                              </p:par>
+                              <p:par>
+                                <p:cTn id="99" presetID="10" presetClass="entr" presetSubtype="0" fill="hold" grpId="0" nodeType="withEffect">
+                                  <p:stCondLst>
+                                    <p:cond delay="0"/>
+                                  </p:stCondLst>
+                                  <p:childTnLst>
+                                    <p:set>
+                                      <p:cBhvr>
+                                        <p:cTn id="100" dur="1" fill="hold">
+                                          <p:stCondLst>
+                                            <p:cond delay="0"/>
+                                          </p:stCondLst>
+                                        </p:cTn>
+                                        <p:tgtEl>
+                                          <p:spTgt spid="32"/>
+                                        </p:tgtEl>
+                                        <p:attrNameLst>
+                                          <p:attrName>style.visibility</p:attrName>
+                                        </p:attrNameLst>
+                                      </p:cBhvr>
+                                      <p:to>
+                                        <p:strVal val="visible"/>
+                                      </p:to>
+                                    </p:set>
+                                    <p:animEffect transition="in" filter="fade">
+                                      <p:cBhvr>
+                                        <p:cTn id="101" dur="500"/>
+                                        <p:tgtEl>
+                                          <p:spTgt spid="32"/>
+                                        </p:tgtEl>
+                                      </p:cBhvr>
+                                    </p:animEffect>
+                                  </p:childTnLst>
+                                </p:cTn>
+                              </p:par>
+                              <p:par>
+                                <p:cTn id="102" presetID="10" presetClass="entr" presetSubtype="0" fill="hold" grpId="0" nodeType="withEffect">
+                                  <p:stCondLst>
+                                    <p:cond delay="0"/>
+                                  </p:stCondLst>
+                                  <p:childTnLst>
+                                    <p:set>
+                                      <p:cBhvr>
+                                        <p:cTn id="103" dur="1" fill="hold">
+                                          <p:stCondLst>
+                                            <p:cond delay="0"/>
+                                          </p:stCondLst>
+                                        </p:cTn>
+                                        <p:tgtEl>
+                                          <p:spTgt spid="33"/>
+                                        </p:tgtEl>
+                                        <p:attrNameLst>
+                                          <p:attrName>style.visibility</p:attrName>
+                                        </p:attrNameLst>
+                                      </p:cBhvr>
+                                      <p:to>
+                                        <p:strVal val="visible"/>
+                                      </p:to>
+                                    </p:set>
+                                    <p:animEffect transition="in" filter="fade">
+                                      <p:cBhvr>
+                                        <p:cTn id="104" dur="500"/>
+                                        <p:tgtEl>
+                                          <p:spTgt spid="33"/>
+                                        </p:tgtEl>
+                                      </p:cBhvr>
+                                    </p:animEffect>
+                                  </p:childTnLst>
+                                </p:cTn>
+                              </p:par>
+                            </p:childTnLst>
+                          </p:cTn>
+                        </p:par>
+                      </p:childTnLst>
+                    </p:cTn>
+                  </p:par>
+                </p:childTnLst>
+              </p:cTn>
+              <p:prevCondLst>
+                <p:cond evt="onPrev" delay="0">
+                  <p:tgtEl>
+                    <p:sldTgt/>
+                  </p:tgtEl>
+                </p:cond>
+              </p:prevCondLst>
+              <p:nextCondLst>
+                <p:cond evt="onNext" delay="0">
+                  <p:tgtEl>
+                    <p:sldTgt/>
+                  </p:tgtEl>
+                </p:cond>
+              </p:nextCondLst>
+            </p:seq>
+          </p:childTnLst>
+        </p:cTn>
+      </p:par>
+    </p:tnLst>
+  </p:timing>
 </p:sld>
 </file>
 
@@ -10222,6 +13996,1194 @@
   <p:transition spd="med">
     <p:fade/>
   </p:transition>
+  <p:timing>
+    <p:tnLst>
+      <p:par>
+        <p:cTn id="1" dur="indefinite" restart="never" nodeType="tmRoot">
+          <p:childTnLst>
+            <p:seq concurrent="1" nextAc="seek">
+              <p:cTn id="2" dur="indefinite" nodeType="mainSeq">
+                <p:childTnLst>
+                  <p:par>
+                    <p:cTn id="3" fill="hold">
+                      <p:stCondLst>
+                        <p:cond delay="indefinite"/>
+                      </p:stCondLst>
+                      <p:childTnLst>
+                        <p:par>
+                          <p:cTn id="4" fill="hold">
+                            <p:stCondLst>
+                              <p:cond delay="0"/>
+                            </p:stCondLst>
+                            <p:childTnLst>
+                              <p:par>
+                                <p:cTn id="5" presetID="10" presetClass="entr" presetSubtype="0" fill="hold" grpId="0" nodeType="clickEffect">
+                                  <p:stCondLst>
+                                    <p:cond delay="0"/>
+                                  </p:stCondLst>
+                                  <p:childTnLst>
+                                    <p:set>
+                                      <p:cBhvr>
+                                        <p:cTn id="6" dur="1" fill="hold">
+                                          <p:stCondLst>
+                                            <p:cond delay="0"/>
+                                          </p:stCondLst>
+                                        </p:cTn>
+                                        <p:tgtEl>
+                                          <p:spTgt spid="4"/>
+                                        </p:tgtEl>
+                                        <p:attrNameLst>
+                                          <p:attrName>style.visibility</p:attrName>
+                                        </p:attrNameLst>
+                                      </p:cBhvr>
+                                      <p:to>
+                                        <p:strVal val="visible"/>
+                                      </p:to>
+                                    </p:set>
+                                    <p:animEffect transition="in" filter="fade">
+                                      <p:cBhvr>
+                                        <p:cTn id="7" dur="500"/>
+                                        <p:tgtEl>
+                                          <p:spTgt spid="4"/>
+                                        </p:tgtEl>
+                                      </p:cBhvr>
+                                    </p:animEffect>
+                                  </p:childTnLst>
+                                </p:cTn>
+                              </p:par>
+                              <p:par>
+                                <p:cTn id="8" presetID="10" presetClass="entr" presetSubtype="0" fill="hold" grpId="0" nodeType="withEffect">
+                                  <p:stCondLst>
+                                    <p:cond delay="0"/>
+                                  </p:stCondLst>
+                                  <p:childTnLst>
+                                    <p:set>
+                                      <p:cBhvr>
+                                        <p:cTn id="9" dur="1" fill="hold">
+                                          <p:stCondLst>
+                                            <p:cond delay="0"/>
+                                          </p:stCondLst>
+                                        </p:cTn>
+                                        <p:tgtEl>
+                                          <p:spTgt spid="5"/>
+                                        </p:tgtEl>
+                                        <p:attrNameLst>
+                                          <p:attrName>style.visibility</p:attrName>
+                                        </p:attrNameLst>
+                                      </p:cBhvr>
+                                      <p:to>
+                                        <p:strVal val="visible"/>
+                                      </p:to>
+                                    </p:set>
+                                    <p:animEffect transition="in" filter="fade">
+                                      <p:cBhvr>
+                                        <p:cTn id="10" dur="500"/>
+                                        <p:tgtEl>
+                                          <p:spTgt spid="5"/>
+                                        </p:tgtEl>
+                                      </p:cBhvr>
+                                    </p:animEffect>
+                                  </p:childTnLst>
+                                </p:cTn>
+                              </p:par>
+                              <p:par>
+                                <p:cTn id="11" presetID="10" presetClass="entr" presetSubtype="0" fill="hold" grpId="0" nodeType="withEffect">
+                                  <p:stCondLst>
+                                    <p:cond delay="0"/>
+                                  </p:stCondLst>
+                                  <p:childTnLst>
+                                    <p:set>
+                                      <p:cBhvr>
+                                        <p:cTn id="12" dur="1" fill="hold">
+                                          <p:stCondLst>
+                                            <p:cond delay="0"/>
+                                          </p:stCondLst>
+                                        </p:cTn>
+                                        <p:tgtEl>
+                                          <p:spTgt spid="6"/>
+                                        </p:tgtEl>
+                                        <p:attrNameLst>
+                                          <p:attrName>style.visibility</p:attrName>
+                                        </p:attrNameLst>
+                                      </p:cBhvr>
+                                      <p:to>
+                                        <p:strVal val="visible"/>
+                                      </p:to>
+                                    </p:set>
+                                    <p:animEffect transition="in" filter="fade">
+                                      <p:cBhvr>
+                                        <p:cTn id="13" dur="500"/>
+                                        <p:tgtEl>
+                                          <p:spTgt spid="6"/>
+                                        </p:tgtEl>
+                                      </p:cBhvr>
+                                    </p:animEffect>
+                                  </p:childTnLst>
+                                </p:cTn>
+                              </p:par>
+                              <p:par>
+                                <p:cTn id="14" presetID="10" presetClass="entr" presetSubtype="0" fill="hold" grpId="0" nodeType="withEffect">
+                                  <p:stCondLst>
+                                    <p:cond delay="0"/>
+                                  </p:stCondLst>
+                                  <p:childTnLst>
+                                    <p:set>
+                                      <p:cBhvr>
+                                        <p:cTn id="15" dur="1" fill="hold">
+                                          <p:stCondLst>
+                                            <p:cond delay="0"/>
+                                          </p:stCondLst>
+                                        </p:cTn>
+                                        <p:tgtEl>
+                                          <p:spTgt spid="7"/>
+                                        </p:tgtEl>
+                                        <p:attrNameLst>
+                                          <p:attrName>style.visibility</p:attrName>
+                                        </p:attrNameLst>
+                                      </p:cBhvr>
+                                      <p:to>
+                                        <p:strVal val="visible"/>
+                                      </p:to>
+                                    </p:set>
+                                    <p:animEffect transition="in" filter="fade">
+                                      <p:cBhvr>
+                                        <p:cTn id="16" dur="500"/>
+                                        <p:tgtEl>
+                                          <p:spTgt spid="7"/>
+                                        </p:tgtEl>
+                                      </p:cBhvr>
+                                    </p:animEffect>
+                                  </p:childTnLst>
+                                </p:cTn>
+                              </p:par>
+                              <p:par>
+                                <p:cTn id="17" presetID="10" presetClass="entr" presetSubtype="0" fill="hold" grpId="0" nodeType="withEffect">
+                                  <p:stCondLst>
+                                    <p:cond delay="0"/>
+                                  </p:stCondLst>
+                                  <p:childTnLst>
+                                    <p:set>
+                                      <p:cBhvr>
+                                        <p:cTn id="18" dur="1" fill="hold">
+                                          <p:stCondLst>
+                                            <p:cond delay="0"/>
+                                          </p:stCondLst>
+                                        </p:cTn>
+                                        <p:tgtEl>
+                                          <p:spTgt spid="8"/>
+                                        </p:tgtEl>
+                                        <p:attrNameLst>
+                                          <p:attrName>style.visibility</p:attrName>
+                                        </p:attrNameLst>
+                                      </p:cBhvr>
+                                      <p:to>
+                                        <p:strVal val="visible"/>
+                                      </p:to>
+                                    </p:set>
+                                    <p:animEffect transition="in" filter="fade">
+                                      <p:cBhvr>
+                                        <p:cTn id="19" dur="500"/>
+                                        <p:tgtEl>
+                                          <p:spTgt spid="8"/>
+                                        </p:tgtEl>
+                                      </p:cBhvr>
+                                    </p:animEffect>
+                                  </p:childTnLst>
+                                </p:cTn>
+                              </p:par>
+                            </p:childTnLst>
+                          </p:cTn>
+                        </p:par>
+                      </p:childTnLst>
+                    </p:cTn>
+                  </p:par>
+                  <p:par>
+                    <p:cTn id="20" fill="hold">
+                      <p:stCondLst>
+                        <p:cond delay="indefinite"/>
+                      </p:stCondLst>
+                      <p:childTnLst>
+                        <p:par>
+                          <p:cTn id="21" fill="hold">
+                            <p:stCondLst>
+                              <p:cond delay="0"/>
+                            </p:stCondLst>
+                            <p:childTnLst>
+                              <p:par>
+                                <p:cTn id="22" presetID="10" presetClass="entr" presetSubtype="0" fill="hold" grpId="0" nodeType="clickEffect">
+                                  <p:stCondLst>
+                                    <p:cond delay="0"/>
+                                  </p:stCondLst>
+                                  <p:childTnLst>
+                                    <p:set>
+                                      <p:cBhvr>
+                                        <p:cTn id="23" dur="1" fill="hold">
+                                          <p:stCondLst>
+                                            <p:cond delay="0"/>
+                                          </p:stCondLst>
+                                        </p:cTn>
+                                        <p:tgtEl>
+                                          <p:spTgt spid="9"/>
+                                        </p:tgtEl>
+                                        <p:attrNameLst>
+                                          <p:attrName>style.visibility</p:attrName>
+                                        </p:attrNameLst>
+                                      </p:cBhvr>
+                                      <p:to>
+                                        <p:strVal val="visible"/>
+                                      </p:to>
+                                    </p:set>
+                                    <p:animEffect transition="in" filter="fade">
+                                      <p:cBhvr>
+                                        <p:cTn id="24" dur="500"/>
+                                        <p:tgtEl>
+                                          <p:spTgt spid="9"/>
+                                        </p:tgtEl>
+                                      </p:cBhvr>
+                                    </p:animEffect>
+                                  </p:childTnLst>
+                                </p:cTn>
+                              </p:par>
+                              <p:par>
+                                <p:cTn id="25" presetID="10" presetClass="entr" presetSubtype="0" fill="hold" grpId="0" nodeType="withEffect">
+                                  <p:stCondLst>
+                                    <p:cond delay="0"/>
+                                  </p:stCondLst>
+                                  <p:childTnLst>
+                                    <p:set>
+                                      <p:cBhvr>
+                                        <p:cTn id="26" dur="1" fill="hold">
+                                          <p:stCondLst>
+                                            <p:cond delay="0"/>
+                                          </p:stCondLst>
+                                        </p:cTn>
+                                        <p:tgtEl>
+                                          <p:spTgt spid="10"/>
+                                        </p:tgtEl>
+                                        <p:attrNameLst>
+                                          <p:attrName>style.visibility</p:attrName>
+                                        </p:attrNameLst>
+                                      </p:cBhvr>
+                                      <p:to>
+                                        <p:strVal val="visible"/>
+                                      </p:to>
+                                    </p:set>
+                                    <p:animEffect transition="in" filter="fade">
+                                      <p:cBhvr>
+                                        <p:cTn id="27" dur="500"/>
+                                        <p:tgtEl>
+                                          <p:spTgt spid="10"/>
+                                        </p:tgtEl>
+                                      </p:cBhvr>
+                                    </p:animEffect>
+                                  </p:childTnLst>
+                                </p:cTn>
+                              </p:par>
+                              <p:par>
+                                <p:cTn id="28" presetID="10" presetClass="entr" presetSubtype="0" fill="hold" grpId="0" nodeType="withEffect">
+                                  <p:stCondLst>
+                                    <p:cond delay="0"/>
+                                  </p:stCondLst>
+                                  <p:childTnLst>
+                                    <p:set>
+                                      <p:cBhvr>
+                                        <p:cTn id="29" dur="1" fill="hold">
+                                          <p:stCondLst>
+                                            <p:cond delay="0"/>
+                                          </p:stCondLst>
+                                        </p:cTn>
+                                        <p:tgtEl>
+                                          <p:spTgt spid="11"/>
+                                        </p:tgtEl>
+                                        <p:attrNameLst>
+                                          <p:attrName>style.visibility</p:attrName>
+                                        </p:attrNameLst>
+                                      </p:cBhvr>
+                                      <p:to>
+                                        <p:strVal val="visible"/>
+                                      </p:to>
+                                    </p:set>
+                                    <p:animEffect transition="in" filter="fade">
+                                      <p:cBhvr>
+                                        <p:cTn id="30" dur="500"/>
+                                        <p:tgtEl>
+                                          <p:spTgt spid="11"/>
+                                        </p:tgtEl>
+                                      </p:cBhvr>
+                                    </p:animEffect>
+                                  </p:childTnLst>
+                                </p:cTn>
+                              </p:par>
+                              <p:par>
+                                <p:cTn id="31" presetID="10" presetClass="entr" presetSubtype="0" fill="hold" grpId="0" nodeType="withEffect">
+                                  <p:stCondLst>
+                                    <p:cond delay="0"/>
+                                  </p:stCondLst>
+                                  <p:childTnLst>
+                                    <p:set>
+                                      <p:cBhvr>
+                                        <p:cTn id="32" dur="1" fill="hold">
+                                          <p:stCondLst>
+                                            <p:cond delay="0"/>
+                                          </p:stCondLst>
+                                        </p:cTn>
+                                        <p:tgtEl>
+                                          <p:spTgt spid="12"/>
+                                        </p:tgtEl>
+                                        <p:attrNameLst>
+                                          <p:attrName>style.visibility</p:attrName>
+                                        </p:attrNameLst>
+                                      </p:cBhvr>
+                                      <p:to>
+                                        <p:strVal val="visible"/>
+                                      </p:to>
+                                    </p:set>
+                                    <p:animEffect transition="in" filter="fade">
+                                      <p:cBhvr>
+                                        <p:cTn id="33" dur="500"/>
+                                        <p:tgtEl>
+                                          <p:spTgt spid="12"/>
+                                        </p:tgtEl>
+                                      </p:cBhvr>
+                                    </p:animEffect>
+                                  </p:childTnLst>
+                                </p:cTn>
+                              </p:par>
+                              <p:par>
+                                <p:cTn id="34" presetID="10" presetClass="entr" presetSubtype="0" fill="hold" grpId="0" nodeType="withEffect">
+                                  <p:stCondLst>
+                                    <p:cond delay="0"/>
+                                  </p:stCondLst>
+                                  <p:childTnLst>
+                                    <p:set>
+                                      <p:cBhvr>
+                                        <p:cTn id="35" dur="1" fill="hold">
+                                          <p:stCondLst>
+                                            <p:cond delay="0"/>
+                                          </p:stCondLst>
+                                        </p:cTn>
+                                        <p:tgtEl>
+                                          <p:spTgt spid="13"/>
+                                        </p:tgtEl>
+                                        <p:attrNameLst>
+                                          <p:attrName>style.visibility</p:attrName>
+                                        </p:attrNameLst>
+                                      </p:cBhvr>
+                                      <p:to>
+                                        <p:strVal val="visible"/>
+                                      </p:to>
+                                    </p:set>
+                                    <p:animEffect transition="in" filter="fade">
+                                      <p:cBhvr>
+                                        <p:cTn id="36" dur="500"/>
+                                        <p:tgtEl>
+                                          <p:spTgt spid="13"/>
+                                        </p:tgtEl>
+                                      </p:cBhvr>
+                                    </p:animEffect>
+                                  </p:childTnLst>
+                                </p:cTn>
+                              </p:par>
+                            </p:childTnLst>
+                          </p:cTn>
+                        </p:par>
+                      </p:childTnLst>
+                    </p:cTn>
+                  </p:par>
+                  <p:par>
+                    <p:cTn id="37" fill="hold">
+                      <p:stCondLst>
+                        <p:cond delay="indefinite"/>
+                      </p:stCondLst>
+                      <p:childTnLst>
+                        <p:par>
+                          <p:cTn id="38" fill="hold">
+                            <p:stCondLst>
+                              <p:cond delay="0"/>
+                            </p:stCondLst>
+                            <p:childTnLst>
+                              <p:par>
+                                <p:cTn id="39" presetID="10" presetClass="entr" presetSubtype="0" fill="hold" grpId="0" nodeType="clickEffect">
+                                  <p:stCondLst>
+                                    <p:cond delay="0"/>
+                                  </p:stCondLst>
+                                  <p:childTnLst>
+                                    <p:set>
+                                      <p:cBhvr>
+                                        <p:cTn id="40" dur="1" fill="hold">
+                                          <p:stCondLst>
+                                            <p:cond delay="0"/>
+                                          </p:stCondLst>
+                                        </p:cTn>
+                                        <p:tgtEl>
+                                          <p:spTgt spid="14"/>
+                                        </p:tgtEl>
+                                        <p:attrNameLst>
+                                          <p:attrName>style.visibility</p:attrName>
+                                        </p:attrNameLst>
+                                      </p:cBhvr>
+                                      <p:to>
+                                        <p:strVal val="visible"/>
+                                      </p:to>
+                                    </p:set>
+                                    <p:animEffect transition="in" filter="fade">
+                                      <p:cBhvr>
+                                        <p:cTn id="41" dur="500"/>
+                                        <p:tgtEl>
+                                          <p:spTgt spid="14"/>
+                                        </p:tgtEl>
+                                      </p:cBhvr>
+                                    </p:animEffect>
+                                  </p:childTnLst>
+                                </p:cTn>
+                              </p:par>
+                              <p:par>
+                                <p:cTn id="42" presetID="10" presetClass="entr" presetSubtype="0" fill="hold" grpId="0" nodeType="withEffect">
+                                  <p:stCondLst>
+                                    <p:cond delay="0"/>
+                                  </p:stCondLst>
+                                  <p:childTnLst>
+                                    <p:set>
+                                      <p:cBhvr>
+                                        <p:cTn id="43" dur="1" fill="hold">
+                                          <p:stCondLst>
+                                            <p:cond delay="0"/>
+                                          </p:stCondLst>
+                                        </p:cTn>
+                                        <p:tgtEl>
+                                          <p:spTgt spid="15"/>
+                                        </p:tgtEl>
+                                        <p:attrNameLst>
+                                          <p:attrName>style.visibility</p:attrName>
+                                        </p:attrNameLst>
+                                      </p:cBhvr>
+                                      <p:to>
+                                        <p:strVal val="visible"/>
+                                      </p:to>
+                                    </p:set>
+                                    <p:animEffect transition="in" filter="fade">
+                                      <p:cBhvr>
+                                        <p:cTn id="44" dur="500"/>
+                                        <p:tgtEl>
+                                          <p:spTgt spid="15"/>
+                                        </p:tgtEl>
+                                      </p:cBhvr>
+                                    </p:animEffect>
+                                  </p:childTnLst>
+                                </p:cTn>
+                              </p:par>
+                              <p:par>
+                                <p:cTn id="45" presetID="10" presetClass="entr" presetSubtype="0" fill="hold" grpId="0" nodeType="withEffect">
+                                  <p:stCondLst>
+                                    <p:cond delay="0"/>
+                                  </p:stCondLst>
+                                  <p:childTnLst>
+                                    <p:set>
+                                      <p:cBhvr>
+                                        <p:cTn id="46" dur="1" fill="hold">
+                                          <p:stCondLst>
+                                            <p:cond delay="0"/>
+                                          </p:stCondLst>
+                                        </p:cTn>
+                                        <p:tgtEl>
+                                          <p:spTgt spid="16"/>
+                                        </p:tgtEl>
+                                        <p:attrNameLst>
+                                          <p:attrName>style.visibility</p:attrName>
+                                        </p:attrNameLst>
+                                      </p:cBhvr>
+                                      <p:to>
+                                        <p:strVal val="visible"/>
+                                      </p:to>
+                                    </p:set>
+                                    <p:animEffect transition="in" filter="fade">
+                                      <p:cBhvr>
+                                        <p:cTn id="47" dur="500"/>
+                                        <p:tgtEl>
+                                          <p:spTgt spid="16"/>
+                                        </p:tgtEl>
+                                      </p:cBhvr>
+                                    </p:animEffect>
+                                  </p:childTnLst>
+                                </p:cTn>
+                              </p:par>
+                              <p:par>
+                                <p:cTn id="48" presetID="10" presetClass="entr" presetSubtype="0" fill="hold" grpId="0" nodeType="withEffect">
+                                  <p:stCondLst>
+                                    <p:cond delay="0"/>
+                                  </p:stCondLst>
+                                  <p:childTnLst>
+                                    <p:set>
+                                      <p:cBhvr>
+                                        <p:cTn id="49" dur="1" fill="hold">
+                                          <p:stCondLst>
+                                            <p:cond delay="0"/>
+                                          </p:stCondLst>
+                                        </p:cTn>
+                                        <p:tgtEl>
+                                          <p:spTgt spid="17"/>
+                                        </p:tgtEl>
+                                        <p:attrNameLst>
+                                          <p:attrName>style.visibility</p:attrName>
+                                        </p:attrNameLst>
+                                      </p:cBhvr>
+                                      <p:to>
+                                        <p:strVal val="visible"/>
+                                      </p:to>
+                                    </p:set>
+                                    <p:animEffect transition="in" filter="fade">
+                                      <p:cBhvr>
+                                        <p:cTn id="50" dur="500"/>
+                                        <p:tgtEl>
+                                          <p:spTgt spid="17"/>
+                                        </p:tgtEl>
+                                      </p:cBhvr>
+                                    </p:animEffect>
+                                  </p:childTnLst>
+                                </p:cTn>
+                              </p:par>
+                              <p:par>
+                                <p:cTn id="51" presetID="10" presetClass="entr" presetSubtype="0" fill="hold" grpId="0" nodeType="withEffect">
+                                  <p:stCondLst>
+                                    <p:cond delay="0"/>
+                                  </p:stCondLst>
+                                  <p:childTnLst>
+                                    <p:set>
+                                      <p:cBhvr>
+                                        <p:cTn id="52" dur="1" fill="hold">
+                                          <p:stCondLst>
+                                            <p:cond delay="0"/>
+                                          </p:stCondLst>
+                                        </p:cTn>
+                                        <p:tgtEl>
+                                          <p:spTgt spid="18"/>
+                                        </p:tgtEl>
+                                        <p:attrNameLst>
+                                          <p:attrName>style.visibility</p:attrName>
+                                        </p:attrNameLst>
+                                      </p:cBhvr>
+                                      <p:to>
+                                        <p:strVal val="visible"/>
+                                      </p:to>
+                                    </p:set>
+                                    <p:animEffect transition="in" filter="fade">
+                                      <p:cBhvr>
+                                        <p:cTn id="53" dur="500"/>
+                                        <p:tgtEl>
+                                          <p:spTgt spid="18"/>
+                                        </p:tgtEl>
+                                      </p:cBhvr>
+                                    </p:animEffect>
+                                  </p:childTnLst>
+                                </p:cTn>
+                              </p:par>
+                            </p:childTnLst>
+                          </p:cTn>
+                        </p:par>
+                      </p:childTnLst>
+                    </p:cTn>
+                  </p:par>
+                  <p:par>
+                    <p:cTn id="54" fill="hold">
+                      <p:stCondLst>
+                        <p:cond delay="indefinite"/>
+                      </p:stCondLst>
+                      <p:childTnLst>
+                        <p:par>
+                          <p:cTn id="55" fill="hold">
+                            <p:stCondLst>
+                              <p:cond delay="0"/>
+                            </p:stCondLst>
+                            <p:childTnLst>
+                              <p:par>
+                                <p:cTn id="56" presetID="10" presetClass="entr" presetSubtype="0" fill="hold" grpId="0" nodeType="clickEffect">
+                                  <p:stCondLst>
+                                    <p:cond delay="0"/>
+                                  </p:stCondLst>
+                                  <p:childTnLst>
+                                    <p:set>
+                                      <p:cBhvr>
+                                        <p:cTn id="57" dur="1" fill="hold">
+                                          <p:stCondLst>
+                                            <p:cond delay="0"/>
+                                          </p:stCondLst>
+                                        </p:cTn>
+                                        <p:tgtEl>
+                                          <p:spTgt spid="19"/>
+                                        </p:tgtEl>
+                                        <p:attrNameLst>
+                                          <p:attrName>style.visibility</p:attrName>
+                                        </p:attrNameLst>
+                                      </p:cBhvr>
+                                      <p:to>
+                                        <p:strVal val="visible"/>
+                                      </p:to>
+                                    </p:set>
+                                    <p:animEffect transition="in" filter="fade">
+                                      <p:cBhvr>
+                                        <p:cTn id="58" dur="500"/>
+                                        <p:tgtEl>
+                                          <p:spTgt spid="19"/>
+                                        </p:tgtEl>
+                                      </p:cBhvr>
+                                    </p:animEffect>
+                                  </p:childTnLst>
+                                </p:cTn>
+                              </p:par>
+                              <p:par>
+                                <p:cTn id="59" presetID="10" presetClass="entr" presetSubtype="0" fill="hold" grpId="0" nodeType="withEffect">
+                                  <p:stCondLst>
+                                    <p:cond delay="0"/>
+                                  </p:stCondLst>
+                                  <p:childTnLst>
+                                    <p:set>
+                                      <p:cBhvr>
+                                        <p:cTn id="60" dur="1" fill="hold">
+                                          <p:stCondLst>
+                                            <p:cond delay="0"/>
+                                          </p:stCondLst>
+                                        </p:cTn>
+                                        <p:tgtEl>
+                                          <p:spTgt spid="20"/>
+                                        </p:tgtEl>
+                                        <p:attrNameLst>
+                                          <p:attrName>style.visibility</p:attrName>
+                                        </p:attrNameLst>
+                                      </p:cBhvr>
+                                      <p:to>
+                                        <p:strVal val="visible"/>
+                                      </p:to>
+                                    </p:set>
+                                    <p:animEffect transition="in" filter="fade">
+                                      <p:cBhvr>
+                                        <p:cTn id="61" dur="500"/>
+                                        <p:tgtEl>
+                                          <p:spTgt spid="20"/>
+                                        </p:tgtEl>
+                                      </p:cBhvr>
+                                    </p:animEffect>
+                                  </p:childTnLst>
+                                </p:cTn>
+                              </p:par>
+                              <p:par>
+                                <p:cTn id="62" presetID="10" presetClass="entr" presetSubtype="0" fill="hold" grpId="0" nodeType="withEffect">
+                                  <p:stCondLst>
+                                    <p:cond delay="0"/>
+                                  </p:stCondLst>
+                                  <p:childTnLst>
+                                    <p:set>
+                                      <p:cBhvr>
+                                        <p:cTn id="63" dur="1" fill="hold">
+                                          <p:stCondLst>
+                                            <p:cond delay="0"/>
+                                          </p:stCondLst>
+                                        </p:cTn>
+                                        <p:tgtEl>
+                                          <p:spTgt spid="21"/>
+                                        </p:tgtEl>
+                                        <p:attrNameLst>
+                                          <p:attrName>style.visibility</p:attrName>
+                                        </p:attrNameLst>
+                                      </p:cBhvr>
+                                      <p:to>
+                                        <p:strVal val="visible"/>
+                                      </p:to>
+                                    </p:set>
+                                    <p:animEffect transition="in" filter="fade">
+                                      <p:cBhvr>
+                                        <p:cTn id="64" dur="500"/>
+                                        <p:tgtEl>
+                                          <p:spTgt spid="21"/>
+                                        </p:tgtEl>
+                                      </p:cBhvr>
+                                    </p:animEffect>
+                                  </p:childTnLst>
+                                </p:cTn>
+                              </p:par>
+                              <p:par>
+                                <p:cTn id="65" presetID="10" presetClass="entr" presetSubtype="0" fill="hold" grpId="0" nodeType="withEffect">
+                                  <p:stCondLst>
+                                    <p:cond delay="0"/>
+                                  </p:stCondLst>
+                                  <p:childTnLst>
+                                    <p:set>
+                                      <p:cBhvr>
+                                        <p:cTn id="66" dur="1" fill="hold">
+                                          <p:stCondLst>
+                                            <p:cond delay="0"/>
+                                          </p:stCondLst>
+                                        </p:cTn>
+                                        <p:tgtEl>
+                                          <p:spTgt spid="22"/>
+                                        </p:tgtEl>
+                                        <p:attrNameLst>
+                                          <p:attrName>style.visibility</p:attrName>
+                                        </p:attrNameLst>
+                                      </p:cBhvr>
+                                      <p:to>
+                                        <p:strVal val="visible"/>
+                                      </p:to>
+                                    </p:set>
+                                    <p:animEffect transition="in" filter="fade">
+                                      <p:cBhvr>
+                                        <p:cTn id="67" dur="500"/>
+                                        <p:tgtEl>
+                                          <p:spTgt spid="22"/>
+                                        </p:tgtEl>
+                                      </p:cBhvr>
+                                    </p:animEffect>
+                                  </p:childTnLst>
+                                </p:cTn>
+                              </p:par>
+                              <p:par>
+                                <p:cTn id="68" presetID="10" presetClass="entr" presetSubtype="0" fill="hold" grpId="0" nodeType="withEffect">
+                                  <p:stCondLst>
+                                    <p:cond delay="0"/>
+                                  </p:stCondLst>
+                                  <p:childTnLst>
+                                    <p:set>
+                                      <p:cBhvr>
+                                        <p:cTn id="69" dur="1" fill="hold">
+                                          <p:stCondLst>
+                                            <p:cond delay="0"/>
+                                          </p:stCondLst>
+                                        </p:cTn>
+                                        <p:tgtEl>
+                                          <p:spTgt spid="23"/>
+                                        </p:tgtEl>
+                                        <p:attrNameLst>
+                                          <p:attrName>style.visibility</p:attrName>
+                                        </p:attrNameLst>
+                                      </p:cBhvr>
+                                      <p:to>
+                                        <p:strVal val="visible"/>
+                                      </p:to>
+                                    </p:set>
+                                    <p:animEffect transition="in" filter="fade">
+                                      <p:cBhvr>
+                                        <p:cTn id="70" dur="500"/>
+                                        <p:tgtEl>
+                                          <p:spTgt spid="23"/>
+                                        </p:tgtEl>
+                                      </p:cBhvr>
+                                    </p:animEffect>
+                                  </p:childTnLst>
+                                </p:cTn>
+                              </p:par>
+                            </p:childTnLst>
+                          </p:cTn>
+                        </p:par>
+                      </p:childTnLst>
+                    </p:cTn>
+                  </p:par>
+                  <p:par>
+                    <p:cTn id="71" fill="hold">
+                      <p:stCondLst>
+                        <p:cond delay="indefinite"/>
+                      </p:stCondLst>
+                      <p:childTnLst>
+                        <p:par>
+                          <p:cTn id="72" fill="hold">
+                            <p:stCondLst>
+                              <p:cond delay="0"/>
+                            </p:stCondLst>
+                            <p:childTnLst>
+                              <p:par>
+                                <p:cTn id="73" presetID="10" presetClass="entr" presetSubtype="0" fill="hold" grpId="0" nodeType="clickEffect">
+                                  <p:stCondLst>
+                                    <p:cond delay="0"/>
+                                  </p:stCondLst>
+                                  <p:childTnLst>
+                                    <p:set>
+                                      <p:cBhvr>
+                                        <p:cTn id="74" dur="1" fill="hold">
+                                          <p:stCondLst>
+                                            <p:cond delay="0"/>
+                                          </p:stCondLst>
+                                        </p:cTn>
+                                        <p:tgtEl>
+                                          <p:spTgt spid="24"/>
+                                        </p:tgtEl>
+                                        <p:attrNameLst>
+                                          <p:attrName>style.visibility</p:attrName>
+                                        </p:attrNameLst>
+                                      </p:cBhvr>
+                                      <p:to>
+                                        <p:strVal val="visible"/>
+                                      </p:to>
+                                    </p:set>
+                                    <p:animEffect transition="in" filter="fade">
+                                      <p:cBhvr>
+                                        <p:cTn id="75" dur="500"/>
+                                        <p:tgtEl>
+                                          <p:spTgt spid="24"/>
+                                        </p:tgtEl>
+                                      </p:cBhvr>
+                                    </p:animEffect>
+                                  </p:childTnLst>
+                                </p:cTn>
+                              </p:par>
+                              <p:par>
+                                <p:cTn id="76" presetID="10" presetClass="entr" presetSubtype="0" fill="hold" grpId="0" nodeType="withEffect">
+                                  <p:stCondLst>
+                                    <p:cond delay="0"/>
+                                  </p:stCondLst>
+                                  <p:childTnLst>
+                                    <p:set>
+                                      <p:cBhvr>
+                                        <p:cTn id="77" dur="1" fill="hold">
+                                          <p:stCondLst>
+                                            <p:cond delay="0"/>
+                                          </p:stCondLst>
+                                        </p:cTn>
+                                        <p:tgtEl>
+                                          <p:spTgt spid="25"/>
+                                        </p:tgtEl>
+                                        <p:attrNameLst>
+                                          <p:attrName>style.visibility</p:attrName>
+                                        </p:attrNameLst>
+                                      </p:cBhvr>
+                                      <p:to>
+                                        <p:strVal val="visible"/>
+                                      </p:to>
+                                    </p:set>
+                                    <p:animEffect transition="in" filter="fade">
+                                      <p:cBhvr>
+                                        <p:cTn id="78" dur="500"/>
+                                        <p:tgtEl>
+                                          <p:spTgt spid="25"/>
+                                        </p:tgtEl>
+                                      </p:cBhvr>
+                                    </p:animEffect>
+                                  </p:childTnLst>
+                                </p:cTn>
+                              </p:par>
+                              <p:par>
+                                <p:cTn id="79" presetID="10" presetClass="entr" presetSubtype="0" fill="hold" grpId="0" nodeType="withEffect">
+                                  <p:stCondLst>
+                                    <p:cond delay="0"/>
+                                  </p:stCondLst>
+                                  <p:childTnLst>
+                                    <p:set>
+                                      <p:cBhvr>
+                                        <p:cTn id="80" dur="1" fill="hold">
+                                          <p:stCondLst>
+                                            <p:cond delay="0"/>
+                                          </p:stCondLst>
+                                        </p:cTn>
+                                        <p:tgtEl>
+                                          <p:spTgt spid="26"/>
+                                        </p:tgtEl>
+                                        <p:attrNameLst>
+                                          <p:attrName>style.visibility</p:attrName>
+                                        </p:attrNameLst>
+                                      </p:cBhvr>
+                                      <p:to>
+                                        <p:strVal val="visible"/>
+                                      </p:to>
+                                    </p:set>
+                                    <p:animEffect transition="in" filter="fade">
+                                      <p:cBhvr>
+                                        <p:cTn id="81" dur="500"/>
+                                        <p:tgtEl>
+                                          <p:spTgt spid="26"/>
+                                        </p:tgtEl>
+                                      </p:cBhvr>
+                                    </p:animEffect>
+                                  </p:childTnLst>
+                                </p:cTn>
+                              </p:par>
+                              <p:par>
+                                <p:cTn id="82" presetID="10" presetClass="entr" presetSubtype="0" fill="hold" grpId="0" nodeType="withEffect">
+                                  <p:stCondLst>
+                                    <p:cond delay="0"/>
+                                  </p:stCondLst>
+                                  <p:childTnLst>
+                                    <p:set>
+                                      <p:cBhvr>
+                                        <p:cTn id="83" dur="1" fill="hold">
+                                          <p:stCondLst>
+                                            <p:cond delay="0"/>
+                                          </p:stCondLst>
+                                        </p:cTn>
+                                        <p:tgtEl>
+                                          <p:spTgt spid="27"/>
+                                        </p:tgtEl>
+                                        <p:attrNameLst>
+                                          <p:attrName>style.visibility</p:attrName>
+                                        </p:attrNameLst>
+                                      </p:cBhvr>
+                                      <p:to>
+                                        <p:strVal val="visible"/>
+                                      </p:to>
+                                    </p:set>
+                                    <p:animEffect transition="in" filter="fade">
+                                      <p:cBhvr>
+                                        <p:cTn id="84" dur="500"/>
+                                        <p:tgtEl>
+                                          <p:spTgt spid="27"/>
+                                        </p:tgtEl>
+                                      </p:cBhvr>
+                                    </p:animEffect>
+                                  </p:childTnLst>
+                                </p:cTn>
+                              </p:par>
+                              <p:par>
+                                <p:cTn id="85" presetID="10" presetClass="entr" presetSubtype="0" fill="hold" grpId="0" nodeType="withEffect">
+                                  <p:stCondLst>
+                                    <p:cond delay="0"/>
+                                  </p:stCondLst>
+                                  <p:childTnLst>
+                                    <p:set>
+                                      <p:cBhvr>
+                                        <p:cTn id="86" dur="1" fill="hold">
+                                          <p:stCondLst>
+                                            <p:cond delay="0"/>
+                                          </p:stCondLst>
+                                        </p:cTn>
+                                        <p:tgtEl>
+                                          <p:spTgt spid="28"/>
+                                        </p:tgtEl>
+                                        <p:attrNameLst>
+                                          <p:attrName>style.visibility</p:attrName>
+                                        </p:attrNameLst>
+                                      </p:cBhvr>
+                                      <p:to>
+                                        <p:strVal val="visible"/>
+                                      </p:to>
+                                    </p:set>
+                                    <p:animEffect transition="in" filter="fade">
+                                      <p:cBhvr>
+                                        <p:cTn id="87" dur="500"/>
+                                        <p:tgtEl>
+                                          <p:spTgt spid="28"/>
+                                        </p:tgtEl>
+                                      </p:cBhvr>
+                                    </p:animEffect>
+                                  </p:childTnLst>
+                                </p:cTn>
+                              </p:par>
+                            </p:childTnLst>
+                          </p:cTn>
+                        </p:par>
+                      </p:childTnLst>
+                    </p:cTn>
+                  </p:par>
+                  <p:par>
+                    <p:cTn id="88" fill="hold">
+                      <p:stCondLst>
+                        <p:cond delay="indefinite"/>
+                      </p:stCondLst>
+                      <p:childTnLst>
+                        <p:par>
+                          <p:cTn id="89" fill="hold">
+                            <p:stCondLst>
+                              <p:cond delay="0"/>
+                            </p:stCondLst>
+                            <p:childTnLst>
+                              <p:par>
+                                <p:cTn id="90" presetID="10" presetClass="entr" presetSubtype="0" fill="hold" grpId="0" nodeType="clickEffect">
+                                  <p:stCondLst>
+                                    <p:cond delay="0"/>
+                                  </p:stCondLst>
+                                  <p:childTnLst>
+                                    <p:set>
+                                      <p:cBhvr>
+                                        <p:cTn id="91" dur="1" fill="hold">
+                                          <p:stCondLst>
+                                            <p:cond delay="0"/>
+                                          </p:stCondLst>
+                                        </p:cTn>
+                                        <p:tgtEl>
+                                          <p:spTgt spid="29"/>
+                                        </p:tgtEl>
+                                        <p:attrNameLst>
+                                          <p:attrName>style.visibility</p:attrName>
+                                        </p:attrNameLst>
+                                      </p:cBhvr>
+                                      <p:to>
+                                        <p:strVal val="visible"/>
+                                      </p:to>
+                                    </p:set>
+                                    <p:animEffect transition="in" filter="fade">
+                                      <p:cBhvr>
+                                        <p:cTn id="92" dur="500"/>
+                                        <p:tgtEl>
+                                          <p:spTgt spid="29"/>
+                                        </p:tgtEl>
+                                      </p:cBhvr>
+                                    </p:animEffect>
+                                  </p:childTnLst>
+                                </p:cTn>
+                              </p:par>
+                              <p:par>
+                                <p:cTn id="93" presetID="10" presetClass="entr" presetSubtype="0" fill="hold" grpId="0" nodeType="withEffect">
+                                  <p:stCondLst>
+                                    <p:cond delay="0"/>
+                                  </p:stCondLst>
+                                  <p:childTnLst>
+                                    <p:set>
+                                      <p:cBhvr>
+                                        <p:cTn id="94" dur="1" fill="hold">
+                                          <p:stCondLst>
+                                            <p:cond delay="0"/>
+                                          </p:stCondLst>
+                                        </p:cTn>
+                                        <p:tgtEl>
+                                          <p:spTgt spid="30"/>
+                                        </p:tgtEl>
+                                        <p:attrNameLst>
+                                          <p:attrName>style.visibility</p:attrName>
+                                        </p:attrNameLst>
+                                      </p:cBhvr>
+                                      <p:to>
+                                        <p:strVal val="visible"/>
+                                      </p:to>
+                                    </p:set>
+                                    <p:animEffect transition="in" filter="fade">
+                                      <p:cBhvr>
+                                        <p:cTn id="95" dur="500"/>
+                                        <p:tgtEl>
+                                          <p:spTgt spid="30"/>
+                                        </p:tgtEl>
+                                      </p:cBhvr>
+                                    </p:animEffect>
+                                  </p:childTnLst>
+                                </p:cTn>
+                              </p:par>
+                              <p:par>
+                                <p:cTn id="96" presetID="10" presetClass="entr" presetSubtype="0" fill="hold" grpId="0" nodeType="withEffect">
+                                  <p:stCondLst>
+                                    <p:cond delay="0"/>
+                                  </p:stCondLst>
+                                  <p:childTnLst>
+                                    <p:set>
+                                      <p:cBhvr>
+                                        <p:cTn id="97" dur="1" fill="hold">
+                                          <p:stCondLst>
+                                            <p:cond delay="0"/>
+                                          </p:stCondLst>
+                                        </p:cTn>
+                                        <p:tgtEl>
+                                          <p:spTgt spid="31"/>
+                                        </p:tgtEl>
+                                        <p:attrNameLst>
+                                          <p:attrName>style.visibility</p:attrName>
+                                        </p:attrNameLst>
+                                      </p:cBhvr>
+                                      <p:to>
+                                        <p:strVal val="visible"/>
+                                      </p:to>
+                                    </p:set>
+                                    <p:animEffect transition="in" filter="fade">
+                                      <p:cBhvr>
+                                        <p:cTn id="98" dur="500"/>
+                                        <p:tgtEl>
+                                          <p:spTgt spid="31"/>
+                                        </p:tgtEl>
+                                      </p:cBhvr>
+                                    </p:animEffect>
+                                  </p:childTnLst>
+                                </p:cTn>
+                              </p:par>
+                              <p:par>
+                                <p:cTn id="99" presetID="10" presetClass="entr" presetSubtype="0" fill="hold" grpId="0" nodeType="withEffect">
+                                  <p:stCondLst>
+                                    <p:cond delay="0"/>
+                                  </p:stCondLst>
+                                  <p:childTnLst>
+                                    <p:set>
+                                      <p:cBhvr>
+                                        <p:cTn id="100" dur="1" fill="hold">
+                                          <p:stCondLst>
+                                            <p:cond delay="0"/>
+                                          </p:stCondLst>
+                                        </p:cTn>
+                                        <p:tgtEl>
+                                          <p:spTgt spid="32"/>
+                                        </p:tgtEl>
+                                        <p:attrNameLst>
+                                          <p:attrName>style.visibility</p:attrName>
+                                        </p:attrNameLst>
+                                      </p:cBhvr>
+                                      <p:to>
+                                        <p:strVal val="visible"/>
+                                      </p:to>
+                                    </p:set>
+                                    <p:animEffect transition="in" filter="fade">
+                                      <p:cBhvr>
+                                        <p:cTn id="101" dur="500"/>
+                                        <p:tgtEl>
+                                          <p:spTgt spid="32"/>
+                                        </p:tgtEl>
+                                      </p:cBhvr>
+                                    </p:animEffect>
+                                  </p:childTnLst>
+                                </p:cTn>
+                              </p:par>
+                              <p:par>
+                                <p:cTn id="102" presetID="10" presetClass="entr" presetSubtype="0" fill="hold" grpId="0" nodeType="withEffect">
+                                  <p:stCondLst>
+                                    <p:cond delay="0"/>
+                                  </p:stCondLst>
+                                  <p:childTnLst>
+                                    <p:set>
+                                      <p:cBhvr>
+                                        <p:cTn id="103" dur="1" fill="hold">
+                                          <p:stCondLst>
+                                            <p:cond delay="0"/>
+                                          </p:stCondLst>
+                                        </p:cTn>
+                                        <p:tgtEl>
+                                          <p:spTgt spid="33"/>
+                                        </p:tgtEl>
+                                        <p:attrNameLst>
+                                          <p:attrName>style.visibility</p:attrName>
+                                        </p:attrNameLst>
+                                      </p:cBhvr>
+                                      <p:to>
+                                        <p:strVal val="visible"/>
+                                      </p:to>
+                                    </p:set>
+                                    <p:animEffect transition="in" filter="fade">
+                                      <p:cBhvr>
+                                        <p:cTn id="104" dur="500"/>
+                                        <p:tgtEl>
+                                          <p:spTgt spid="33"/>
+                                        </p:tgtEl>
+                                      </p:cBhvr>
+                                    </p:animEffect>
+                                  </p:childTnLst>
+                                </p:cTn>
+                              </p:par>
+                            </p:childTnLst>
+                          </p:cTn>
+                        </p:par>
+                      </p:childTnLst>
+                    </p:cTn>
+                  </p:par>
+                </p:childTnLst>
+              </p:cTn>
+              <p:prevCondLst>
+                <p:cond evt="onPrev" delay="0">
+                  <p:tgtEl>
+                    <p:sldTgt/>
+                  </p:tgtEl>
+                </p:cond>
+              </p:prevCondLst>
+              <p:nextCondLst>
+                <p:cond evt="onNext" delay="0">
+                  <p:tgtEl>
+                    <p:sldTgt/>
+                  </p:tgtEl>
+                </p:cond>
+              </p:nextCondLst>
+            </p:seq>
+          </p:childTnLst>
+        </p:cTn>
+      </p:par>
+    </p:tnLst>
+  </p:timing>
 </p:sld>
 </file>
 
@@ -19981,6 +24943,1194 @@
   <p:transition spd="med">
     <p:fade/>
   </p:transition>
+  <p:timing>
+    <p:tnLst>
+      <p:par>
+        <p:cTn id="1" dur="indefinite" restart="never" nodeType="tmRoot">
+          <p:childTnLst>
+            <p:seq concurrent="1" nextAc="seek">
+              <p:cTn id="2" dur="indefinite" nodeType="mainSeq">
+                <p:childTnLst>
+                  <p:par>
+                    <p:cTn id="3" fill="hold">
+                      <p:stCondLst>
+                        <p:cond delay="indefinite"/>
+                      </p:stCondLst>
+                      <p:childTnLst>
+                        <p:par>
+                          <p:cTn id="4" fill="hold">
+                            <p:stCondLst>
+                              <p:cond delay="0"/>
+                            </p:stCondLst>
+                            <p:childTnLst>
+                              <p:par>
+                                <p:cTn id="5" presetID="10" presetClass="entr" presetSubtype="0" fill="hold" grpId="0" nodeType="clickEffect">
+                                  <p:stCondLst>
+                                    <p:cond delay="0"/>
+                                  </p:stCondLst>
+                                  <p:childTnLst>
+                                    <p:set>
+                                      <p:cBhvr>
+                                        <p:cTn id="6" dur="1" fill="hold">
+                                          <p:stCondLst>
+                                            <p:cond delay="0"/>
+                                          </p:stCondLst>
+                                        </p:cTn>
+                                        <p:tgtEl>
+                                          <p:spTgt spid="4"/>
+                                        </p:tgtEl>
+                                        <p:attrNameLst>
+                                          <p:attrName>style.visibility</p:attrName>
+                                        </p:attrNameLst>
+                                      </p:cBhvr>
+                                      <p:to>
+                                        <p:strVal val="visible"/>
+                                      </p:to>
+                                    </p:set>
+                                    <p:animEffect transition="in" filter="fade">
+                                      <p:cBhvr>
+                                        <p:cTn id="7" dur="500"/>
+                                        <p:tgtEl>
+                                          <p:spTgt spid="4"/>
+                                        </p:tgtEl>
+                                      </p:cBhvr>
+                                    </p:animEffect>
+                                  </p:childTnLst>
+                                </p:cTn>
+                              </p:par>
+                              <p:par>
+                                <p:cTn id="8" presetID="10" presetClass="entr" presetSubtype="0" fill="hold" grpId="0" nodeType="withEffect">
+                                  <p:stCondLst>
+                                    <p:cond delay="0"/>
+                                  </p:stCondLst>
+                                  <p:childTnLst>
+                                    <p:set>
+                                      <p:cBhvr>
+                                        <p:cTn id="9" dur="1" fill="hold">
+                                          <p:stCondLst>
+                                            <p:cond delay="0"/>
+                                          </p:stCondLst>
+                                        </p:cTn>
+                                        <p:tgtEl>
+                                          <p:spTgt spid="5"/>
+                                        </p:tgtEl>
+                                        <p:attrNameLst>
+                                          <p:attrName>style.visibility</p:attrName>
+                                        </p:attrNameLst>
+                                      </p:cBhvr>
+                                      <p:to>
+                                        <p:strVal val="visible"/>
+                                      </p:to>
+                                    </p:set>
+                                    <p:animEffect transition="in" filter="fade">
+                                      <p:cBhvr>
+                                        <p:cTn id="10" dur="500"/>
+                                        <p:tgtEl>
+                                          <p:spTgt spid="5"/>
+                                        </p:tgtEl>
+                                      </p:cBhvr>
+                                    </p:animEffect>
+                                  </p:childTnLst>
+                                </p:cTn>
+                              </p:par>
+                              <p:par>
+                                <p:cTn id="11" presetID="10" presetClass="entr" presetSubtype="0" fill="hold" grpId="0" nodeType="withEffect">
+                                  <p:stCondLst>
+                                    <p:cond delay="0"/>
+                                  </p:stCondLst>
+                                  <p:childTnLst>
+                                    <p:set>
+                                      <p:cBhvr>
+                                        <p:cTn id="12" dur="1" fill="hold">
+                                          <p:stCondLst>
+                                            <p:cond delay="0"/>
+                                          </p:stCondLst>
+                                        </p:cTn>
+                                        <p:tgtEl>
+                                          <p:spTgt spid="6"/>
+                                        </p:tgtEl>
+                                        <p:attrNameLst>
+                                          <p:attrName>style.visibility</p:attrName>
+                                        </p:attrNameLst>
+                                      </p:cBhvr>
+                                      <p:to>
+                                        <p:strVal val="visible"/>
+                                      </p:to>
+                                    </p:set>
+                                    <p:animEffect transition="in" filter="fade">
+                                      <p:cBhvr>
+                                        <p:cTn id="13" dur="500"/>
+                                        <p:tgtEl>
+                                          <p:spTgt spid="6"/>
+                                        </p:tgtEl>
+                                      </p:cBhvr>
+                                    </p:animEffect>
+                                  </p:childTnLst>
+                                </p:cTn>
+                              </p:par>
+                              <p:par>
+                                <p:cTn id="14" presetID="10" presetClass="entr" presetSubtype="0" fill="hold" grpId="0" nodeType="withEffect">
+                                  <p:stCondLst>
+                                    <p:cond delay="0"/>
+                                  </p:stCondLst>
+                                  <p:childTnLst>
+                                    <p:set>
+                                      <p:cBhvr>
+                                        <p:cTn id="15" dur="1" fill="hold">
+                                          <p:stCondLst>
+                                            <p:cond delay="0"/>
+                                          </p:stCondLst>
+                                        </p:cTn>
+                                        <p:tgtEl>
+                                          <p:spTgt spid="7"/>
+                                        </p:tgtEl>
+                                        <p:attrNameLst>
+                                          <p:attrName>style.visibility</p:attrName>
+                                        </p:attrNameLst>
+                                      </p:cBhvr>
+                                      <p:to>
+                                        <p:strVal val="visible"/>
+                                      </p:to>
+                                    </p:set>
+                                    <p:animEffect transition="in" filter="fade">
+                                      <p:cBhvr>
+                                        <p:cTn id="16" dur="500"/>
+                                        <p:tgtEl>
+                                          <p:spTgt spid="7"/>
+                                        </p:tgtEl>
+                                      </p:cBhvr>
+                                    </p:animEffect>
+                                  </p:childTnLst>
+                                </p:cTn>
+                              </p:par>
+                              <p:par>
+                                <p:cTn id="17" presetID="10" presetClass="entr" presetSubtype="0" fill="hold" grpId="0" nodeType="withEffect">
+                                  <p:stCondLst>
+                                    <p:cond delay="0"/>
+                                  </p:stCondLst>
+                                  <p:childTnLst>
+                                    <p:set>
+                                      <p:cBhvr>
+                                        <p:cTn id="18" dur="1" fill="hold">
+                                          <p:stCondLst>
+                                            <p:cond delay="0"/>
+                                          </p:stCondLst>
+                                        </p:cTn>
+                                        <p:tgtEl>
+                                          <p:spTgt spid="8"/>
+                                        </p:tgtEl>
+                                        <p:attrNameLst>
+                                          <p:attrName>style.visibility</p:attrName>
+                                        </p:attrNameLst>
+                                      </p:cBhvr>
+                                      <p:to>
+                                        <p:strVal val="visible"/>
+                                      </p:to>
+                                    </p:set>
+                                    <p:animEffect transition="in" filter="fade">
+                                      <p:cBhvr>
+                                        <p:cTn id="19" dur="500"/>
+                                        <p:tgtEl>
+                                          <p:spTgt spid="8"/>
+                                        </p:tgtEl>
+                                      </p:cBhvr>
+                                    </p:animEffect>
+                                  </p:childTnLst>
+                                </p:cTn>
+                              </p:par>
+                            </p:childTnLst>
+                          </p:cTn>
+                        </p:par>
+                      </p:childTnLst>
+                    </p:cTn>
+                  </p:par>
+                  <p:par>
+                    <p:cTn id="20" fill="hold">
+                      <p:stCondLst>
+                        <p:cond delay="indefinite"/>
+                      </p:stCondLst>
+                      <p:childTnLst>
+                        <p:par>
+                          <p:cTn id="21" fill="hold">
+                            <p:stCondLst>
+                              <p:cond delay="0"/>
+                            </p:stCondLst>
+                            <p:childTnLst>
+                              <p:par>
+                                <p:cTn id="22" presetID="10" presetClass="entr" presetSubtype="0" fill="hold" grpId="0" nodeType="clickEffect">
+                                  <p:stCondLst>
+                                    <p:cond delay="0"/>
+                                  </p:stCondLst>
+                                  <p:childTnLst>
+                                    <p:set>
+                                      <p:cBhvr>
+                                        <p:cTn id="23" dur="1" fill="hold">
+                                          <p:stCondLst>
+                                            <p:cond delay="0"/>
+                                          </p:stCondLst>
+                                        </p:cTn>
+                                        <p:tgtEl>
+                                          <p:spTgt spid="9"/>
+                                        </p:tgtEl>
+                                        <p:attrNameLst>
+                                          <p:attrName>style.visibility</p:attrName>
+                                        </p:attrNameLst>
+                                      </p:cBhvr>
+                                      <p:to>
+                                        <p:strVal val="visible"/>
+                                      </p:to>
+                                    </p:set>
+                                    <p:animEffect transition="in" filter="fade">
+                                      <p:cBhvr>
+                                        <p:cTn id="24" dur="500"/>
+                                        <p:tgtEl>
+                                          <p:spTgt spid="9"/>
+                                        </p:tgtEl>
+                                      </p:cBhvr>
+                                    </p:animEffect>
+                                  </p:childTnLst>
+                                </p:cTn>
+                              </p:par>
+                              <p:par>
+                                <p:cTn id="25" presetID="10" presetClass="entr" presetSubtype="0" fill="hold" grpId="0" nodeType="withEffect">
+                                  <p:stCondLst>
+                                    <p:cond delay="0"/>
+                                  </p:stCondLst>
+                                  <p:childTnLst>
+                                    <p:set>
+                                      <p:cBhvr>
+                                        <p:cTn id="26" dur="1" fill="hold">
+                                          <p:stCondLst>
+                                            <p:cond delay="0"/>
+                                          </p:stCondLst>
+                                        </p:cTn>
+                                        <p:tgtEl>
+                                          <p:spTgt spid="10"/>
+                                        </p:tgtEl>
+                                        <p:attrNameLst>
+                                          <p:attrName>style.visibility</p:attrName>
+                                        </p:attrNameLst>
+                                      </p:cBhvr>
+                                      <p:to>
+                                        <p:strVal val="visible"/>
+                                      </p:to>
+                                    </p:set>
+                                    <p:animEffect transition="in" filter="fade">
+                                      <p:cBhvr>
+                                        <p:cTn id="27" dur="500"/>
+                                        <p:tgtEl>
+                                          <p:spTgt spid="10"/>
+                                        </p:tgtEl>
+                                      </p:cBhvr>
+                                    </p:animEffect>
+                                  </p:childTnLst>
+                                </p:cTn>
+                              </p:par>
+                              <p:par>
+                                <p:cTn id="28" presetID="10" presetClass="entr" presetSubtype="0" fill="hold" grpId="0" nodeType="withEffect">
+                                  <p:stCondLst>
+                                    <p:cond delay="0"/>
+                                  </p:stCondLst>
+                                  <p:childTnLst>
+                                    <p:set>
+                                      <p:cBhvr>
+                                        <p:cTn id="29" dur="1" fill="hold">
+                                          <p:stCondLst>
+                                            <p:cond delay="0"/>
+                                          </p:stCondLst>
+                                        </p:cTn>
+                                        <p:tgtEl>
+                                          <p:spTgt spid="11"/>
+                                        </p:tgtEl>
+                                        <p:attrNameLst>
+                                          <p:attrName>style.visibility</p:attrName>
+                                        </p:attrNameLst>
+                                      </p:cBhvr>
+                                      <p:to>
+                                        <p:strVal val="visible"/>
+                                      </p:to>
+                                    </p:set>
+                                    <p:animEffect transition="in" filter="fade">
+                                      <p:cBhvr>
+                                        <p:cTn id="30" dur="500"/>
+                                        <p:tgtEl>
+                                          <p:spTgt spid="11"/>
+                                        </p:tgtEl>
+                                      </p:cBhvr>
+                                    </p:animEffect>
+                                  </p:childTnLst>
+                                </p:cTn>
+                              </p:par>
+                              <p:par>
+                                <p:cTn id="31" presetID="10" presetClass="entr" presetSubtype="0" fill="hold" grpId="0" nodeType="withEffect">
+                                  <p:stCondLst>
+                                    <p:cond delay="0"/>
+                                  </p:stCondLst>
+                                  <p:childTnLst>
+                                    <p:set>
+                                      <p:cBhvr>
+                                        <p:cTn id="32" dur="1" fill="hold">
+                                          <p:stCondLst>
+                                            <p:cond delay="0"/>
+                                          </p:stCondLst>
+                                        </p:cTn>
+                                        <p:tgtEl>
+                                          <p:spTgt spid="12"/>
+                                        </p:tgtEl>
+                                        <p:attrNameLst>
+                                          <p:attrName>style.visibility</p:attrName>
+                                        </p:attrNameLst>
+                                      </p:cBhvr>
+                                      <p:to>
+                                        <p:strVal val="visible"/>
+                                      </p:to>
+                                    </p:set>
+                                    <p:animEffect transition="in" filter="fade">
+                                      <p:cBhvr>
+                                        <p:cTn id="33" dur="500"/>
+                                        <p:tgtEl>
+                                          <p:spTgt spid="12"/>
+                                        </p:tgtEl>
+                                      </p:cBhvr>
+                                    </p:animEffect>
+                                  </p:childTnLst>
+                                </p:cTn>
+                              </p:par>
+                              <p:par>
+                                <p:cTn id="34" presetID="10" presetClass="entr" presetSubtype="0" fill="hold" grpId="0" nodeType="withEffect">
+                                  <p:stCondLst>
+                                    <p:cond delay="0"/>
+                                  </p:stCondLst>
+                                  <p:childTnLst>
+                                    <p:set>
+                                      <p:cBhvr>
+                                        <p:cTn id="35" dur="1" fill="hold">
+                                          <p:stCondLst>
+                                            <p:cond delay="0"/>
+                                          </p:stCondLst>
+                                        </p:cTn>
+                                        <p:tgtEl>
+                                          <p:spTgt spid="13"/>
+                                        </p:tgtEl>
+                                        <p:attrNameLst>
+                                          <p:attrName>style.visibility</p:attrName>
+                                        </p:attrNameLst>
+                                      </p:cBhvr>
+                                      <p:to>
+                                        <p:strVal val="visible"/>
+                                      </p:to>
+                                    </p:set>
+                                    <p:animEffect transition="in" filter="fade">
+                                      <p:cBhvr>
+                                        <p:cTn id="36" dur="500"/>
+                                        <p:tgtEl>
+                                          <p:spTgt spid="13"/>
+                                        </p:tgtEl>
+                                      </p:cBhvr>
+                                    </p:animEffect>
+                                  </p:childTnLst>
+                                </p:cTn>
+                              </p:par>
+                            </p:childTnLst>
+                          </p:cTn>
+                        </p:par>
+                      </p:childTnLst>
+                    </p:cTn>
+                  </p:par>
+                  <p:par>
+                    <p:cTn id="37" fill="hold">
+                      <p:stCondLst>
+                        <p:cond delay="indefinite"/>
+                      </p:stCondLst>
+                      <p:childTnLst>
+                        <p:par>
+                          <p:cTn id="38" fill="hold">
+                            <p:stCondLst>
+                              <p:cond delay="0"/>
+                            </p:stCondLst>
+                            <p:childTnLst>
+                              <p:par>
+                                <p:cTn id="39" presetID="10" presetClass="entr" presetSubtype="0" fill="hold" grpId="0" nodeType="clickEffect">
+                                  <p:stCondLst>
+                                    <p:cond delay="0"/>
+                                  </p:stCondLst>
+                                  <p:childTnLst>
+                                    <p:set>
+                                      <p:cBhvr>
+                                        <p:cTn id="40" dur="1" fill="hold">
+                                          <p:stCondLst>
+                                            <p:cond delay="0"/>
+                                          </p:stCondLst>
+                                        </p:cTn>
+                                        <p:tgtEl>
+                                          <p:spTgt spid="14"/>
+                                        </p:tgtEl>
+                                        <p:attrNameLst>
+                                          <p:attrName>style.visibility</p:attrName>
+                                        </p:attrNameLst>
+                                      </p:cBhvr>
+                                      <p:to>
+                                        <p:strVal val="visible"/>
+                                      </p:to>
+                                    </p:set>
+                                    <p:animEffect transition="in" filter="fade">
+                                      <p:cBhvr>
+                                        <p:cTn id="41" dur="500"/>
+                                        <p:tgtEl>
+                                          <p:spTgt spid="14"/>
+                                        </p:tgtEl>
+                                      </p:cBhvr>
+                                    </p:animEffect>
+                                  </p:childTnLst>
+                                </p:cTn>
+                              </p:par>
+                              <p:par>
+                                <p:cTn id="42" presetID="10" presetClass="entr" presetSubtype="0" fill="hold" grpId="0" nodeType="withEffect">
+                                  <p:stCondLst>
+                                    <p:cond delay="0"/>
+                                  </p:stCondLst>
+                                  <p:childTnLst>
+                                    <p:set>
+                                      <p:cBhvr>
+                                        <p:cTn id="43" dur="1" fill="hold">
+                                          <p:stCondLst>
+                                            <p:cond delay="0"/>
+                                          </p:stCondLst>
+                                        </p:cTn>
+                                        <p:tgtEl>
+                                          <p:spTgt spid="15"/>
+                                        </p:tgtEl>
+                                        <p:attrNameLst>
+                                          <p:attrName>style.visibility</p:attrName>
+                                        </p:attrNameLst>
+                                      </p:cBhvr>
+                                      <p:to>
+                                        <p:strVal val="visible"/>
+                                      </p:to>
+                                    </p:set>
+                                    <p:animEffect transition="in" filter="fade">
+                                      <p:cBhvr>
+                                        <p:cTn id="44" dur="500"/>
+                                        <p:tgtEl>
+                                          <p:spTgt spid="15"/>
+                                        </p:tgtEl>
+                                      </p:cBhvr>
+                                    </p:animEffect>
+                                  </p:childTnLst>
+                                </p:cTn>
+                              </p:par>
+                              <p:par>
+                                <p:cTn id="45" presetID="10" presetClass="entr" presetSubtype="0" fill="hold" grpId="0" nodeType="withEffect">
+                                  <p:stCondLst>
+                                    <p:cond delay="0"/>
+                                  </p:stCondLst>
+                                  <p:childTnLst>
+                                    <p:set>
+                                      <p:cBhvr>
+                                        <p:cTn id="46" dur="1" fill="hold">
+                                          <p:stCondLst>
+                                            <p:cond delay="0"/>
+                                          </p:stCondLst>
+                                        </p:cTn>
+                                        <p:tgtEl>
+                                          <p:spTgt spid="16"/>
+                                        </p:tgtEl>
+                                        <p:attrNameLst>
+                                          <p:attrName>style.visibility</p:attrName>
+                                        </p:attrNameLst>
+                                      </p:cBhvr>
+                                      <p:to>
+                                        <p:strVal val="visible"/>
+                                      </p:to>
+                                    </p:set>
+                                    <p:animEffect transition="in" filter="fade">
+                                      <p:cBhvr>
+                                        <p:cTn id="47" dur="500"/>
+                                        <p:tgtEl>
+                                          <p:spTgt spid="16"/>
+                                        </p:tgtEl>
+                                      </p:cBhvr>
+                                    </p:animEffect>
+                                  </p:childTnLst>
+                                </p:cTn>
+                              </p:par>
+                              <p:par>
+                                <p:cTn id="48" presetID="10" presetClass="entr" presetSubtype="0" fill="hold" grpId="0" nodeType="withEffect">
+                                  <p:stCondLst>
+                                    <p:cond delay="0"/>
+                                  </p:stCondLst>
+                                  <p:childTnLst>
+                                    <p:set>
+                                      <p:cBhvr>
+                                        <p:cTn id="49" dur="1" fill="hold">
+                                          <p:stCondLst>
+                                            <p:cond delay="0"/>
+                                          </p:stCondLst>
+                                        </p:cTn>
+                                        <p:tgtEl>
+                                          <p:spTgt spid="17"/>
+                                        </p:tgtEl>
+                                        <p:attrNameLst>
+                                          <p:attrName>style.visibility</p:attrName>
+                                        </p:attrNameLst>
+                                      </p:cBhvr>
+                                      <p:to>
+                                        <p:strVal val="visible"/>
+                                      </p:to>
+                                    </p:set>
+                                    <p:animEffect transition="in" filter="fade">
+                                      <p:cBhvr>
+                                        <p:cTn id="50" dur="500"/>
+                                        <p:tgtEl>
+                                          <p:spTgt spid="17"/>
+                                        </p:tgtEl>
+                                      </p:cBhvr>
+                                    </p:animEffect>
+                                  </p:childTnLst>
+                                </p:cTn>
+                              </p:par>
+                              <p:par>
+                                <p:cTn id="51" presetID="10" presetClass="entr" presetSubtype="0" fill="hold" grpId="0" nodeType="withEffect">
+                                  <p:stCondLst>
+                                    <p:cond delay="0"/>
+                                  </p:stCondLst>
+                                  <p:childTnLst>
+                                    <p:set>
+                                      <p:cBhvr>
+                                        <p:cTn id="52" dur="1" fill="hold">
+                                          <p:stCondLst>
+                                            <p:cond delay="0"/>
+                                          </p:stCondLst>
+                                        </p:cTn>
+                                        <p:tgtEl>
+                                          <p:spTgt spid="18"/>
+                                        </p:tgtEl>
+                                        <p:attrNameLst>
+                                          <p:attrName>style.visibility</p:attrName>
+                                        </p:attrNameLst>
+                                      </p:cBhvr>
+                                      <p:to>
+                                        <p:strVal val="visible"/>
+                                      </p:to>
+                                    </p:set>
+                                    <p:animEffect transition="in" filter="fade">
+                                      <p:cBhvr>
+                                        <p:cTn id="53" dur="500"/>
+                                        <p:tgtEl>
+                                          <p:spTgt spid="18"/>
+                                        </p:tgtEl>
+                                      </p:cBhvr>
+                                    </p:animEffect>
+                                  </p:childTnLst>
+                                </p:cTn>
+                              </p:par>
+                            </p:childTnLst>
+                          </p:cTn>
+                        </p:par>
+                      </p:childTnLst>
+                    </p:cTn>
+                  </p:par>
+                  <p:par>
+                    <p:cTn id="54" fill="hold">
+                      <p:stCondLst>
+                        <p:cond delay="indefinite"/>
+                      </p:stCondLst>
+                      <p:childTnLst>
+                        <p:par>
+                          <p:cTn id="55" fill="hold">
+                            <p:stCondLst>
+                              <p:cond delay="0"/>
+                            </p:stCondLst>
+                            <p:childTnLst>
+                              <p:par>
+                                <p:cTn id="56" presetID="10" presetClass="entr" presetSubtype="0" fill="hold" grpId="0" nodeType="clickEffect">
+                                  <p:stCondLst>
+                                    <p:cond delay="0"/>
+                                  </p:stCondLst>
+                                  <p:childTnLst>
+                                    <p:set>
+                                      <p:cBhvr>
+                                        <p:cTn id="57" dur="1" fill="hold">
+                                          <p:stCondLst>
+                                            <p:cond delay="0"/>
+                                          </p:stCondLst>
+                                        </p:cTn>
+                                        <p:tgtEl>
+                                          <p:spTgt spid="19"/>
+                                        </p:tgtEl>
+                                        <p:attrNameLst>
+                                          <p:attrName>style.visibility</p:attrName>
+                                        </p:attrNameLst>
+                                      </p:cBhvr>
+                                      <p:to>
+                                        <p:strVal val="visible"/>
+                                      </p:to>
+                                    </p:set>
+                                    <p:animEffect transition="in" filter="fade">
+                                      <p:cBhvr>
+                                        <p:cTn id="58" dur="500"/>
+                                        <p:tgtEl>
+                                          <p:spTgt spid="19"/>
+                                        </p:tgtEl>
+                                      </p:cBhvr>
+                                    </p:animEffect>
+                                  </p:childTnLst>
+                                </p:cTn>
+                              </p:par>
+                              <p:par>
+                                <p:cTn id="59" presetID="10" presetClass="entr" presetSubtype="0" fill="hold" grpId="0" nodeType="withEffect">
+                                  <p:stCondLst>
+                                    <p:cond delay="0"/>
+                                  </p:stCondLst>
+                                  <p:childTnLst>
+                                    <p:set>
+                                      <p:cBhvr>
+                                        <p:cTn id="60" dur="1" fill="hold">
+                                          <p:stCondLst>
+                                            <p:cond delay="0"/>
+                                          </p:stCondLst>
+                                        </p:cTn>
+                                        <p:tgtEl>
+                                          <p:spTgt spid="20"/>
+                                        </p:tgtEl>
+                                        <p:attrNameLst>
+                                          <p:attrName>style.visibility</p:attrName>
+                                        </p:attrNameLst>
+                                      </p:cBhvr>
+                                      <p:to>
+                                        <p:strVal val="visible"/>
+                                      </p:to>
+                                    </p:set>
+                                    <p:animEffect transition="in" filter="fade">
+                                      <p:cBhvr>
+                                        <p:cTn id="61" dur="500"/>
+                                        <p:tgtEl>
+                                          <p:spTgt spid="20"/>
+                                        </p:tgtEl>
+                                      </p:cBhvr>
+                                    </p:animEffect>
+                                  </p:childTnLst>
+                                </p:cTn>
+                              </p:par>
+                              <p:par>
+                                <p:cTn id="62" presetID="10" presetClass="entr" presetSubtype="0" fill="hold" grpId="0" nodeType="withEffect">
+                                  <p:stCondLst>
+                                    <p:cond delay="0"/>
+                                  </p:stCondLst>
+                                  <p:childTnLst>
+                                    <p:set>
+                                      <p:cBhvr>
+                                        <p:cTn id="63" dur="1" fill="hold">
+                                          <p:stCondLst>
+                                            <p:cond delay="0"/>
+                                          </p:stCondLst>
+                                        </p:cTn>
+                                        <p:tgtEl>
+                                          <p:spTgt spid="21"/>
+                                        </p:tgtEl>
+                                        <p:attrNameLst>
+                                          <p:attrName>style.visibility</p:attrName>
+                                        </p:attrNameLst>
+                                      </p:cBhvr>
+                                      <p:to>
+                                        <p:strVal val="visible"/>
+                                      </p:to>
+                                    </p:set>
+                                    <p:animEffect transition="in" filter="fade">
+                                      <p:cBhvr>
+                                        <p:cTn id="64" dur="500"/>
+                                        <p:tgtEl>
+                                          <p:spTgt spid="21"/>
+                                        </p:tgtEl>
+                                      </p:cBhvr>
+                                    </p:animEffect>
+                                  </p:childTnLst>
+                                </p:cTn>
+                              </p:par>
+                              <p:par>
+                                <p:cTn id="65" presetID="10" presetClass="entr" presetSubtype="0" fill="hold" grpId="0" nodeType="withEffect">
+                                  <p:stCondLst>
+                                    <p:cond delay="0"/>
+                                  </p:stCondLst>
+                                  <p:childTnLst>
+                                    <p:set>
+                                      <p:cBhvr>
+                                        <p:cTn id="66" dur="1" fill="hold">
+                                          <p:stCondLst>
+                                            <p:cond delay="0"/>
+                                          </p:stCondLst>
+                                        </p:cTn>
+                                        <p:tgtEl>
+                                          <p:spTgt spid="22"/>
+                                        </p:tgtEl>
+                                        <p:attrNameLst>
+                                          <p:attrName>style.visibility</p:attrName>
+                                        </p:attrNameLst>
+                                      </p:cBhvr>
+                                      <p:to>
+                                        <p:strVal val="visible"/>
+                                      </p:to>
+                                    </p:set>
+                                    <p:animEffect transition="in" filter="fade">
+                                      <p:cBhvr>
+                                        <p:cTn id="67" dur="500"/>
+                                        <p:tgtEl>
+                                          <p:spTgt spid="22"/>
+                                        </p:tgtEl>
+                                      </p:cBhvr>
+                                    </p:animEffect>
+                                  </p:childTnLst>
+                                </p:cTn>
+                              </p:par>
+                              <p:par>
+                                <p:cTn id="68" presetID="10" presetClass="entr" presetSubtype="0" fill="hold" grpId="0" nodeType="withEffect">
+                                  <p:stCondLst>
+                                    <p:cond delay="0"/>
+                                  </p:stCondLst>
+                                  <p:childTnLst>
+                                    <p:set>
+                                      <p:cBhvr>
+                                        <p:cTn id="69" dur="1" fill="hold">
+                                          <p:stCondLst>
+                                            <p:cond delay="0"/>
+                                          </p:stCondLst>
+                                        </p:cTn>
+                                        <p:tgtEl>
+                                          <p:spTgt spid="23"/>
+                                        </p:tgtEl>
+                                        <p:attrNameLst>
+                                          <p:attrName>style.visibility</p:attrName>
+                                        </p:attrNameLst>
+                                      </p:cBhvr>
+                                      <p:to>
+                                        <p:strVal val="visible"/>
+                                      </p:to>
+                                    </p:set>
+                                    <p:animEffect transition="in" filter="fade">
+                                      <p:cBhvr>
+                                        <p:cTn id="70" dur="500"/>
+                                        <p:tgtEl>
+                                          <p:spTgt spid="23"/>
+                                        </p:tgtEl>
+                                      </p:cBhvr>
+                                    </p:animEffect>
+                                  </p:childTnLst>
+                                </p:cTn>
+                              </p:par>
+                            </p:childTnLst>
+                          </p:cTn>
+                        </p:par>
+                      </p:childTnLst>
+                    </p:cTn>
+                  </p:par>
+                  <p:par>
+                    <p:cTn id="71" fill="hold">
+                      <p:stCondLst>
+                        <p:cond delay="indefinite"/>
+                      </p:stCondLst>
+                      <p:childTnLst>
+                        <p:par>
+                          <p:cTn id="72" fill="hold">
+                            <p:stCondLst>
+                              <p:cond delay="0"/>
+                            </p:stCondLst>
+                            <p:childTnLst>
+                              <p:par>
+                                <p:cTn id="73" presetID="10" presetClass="entr" presetSubtype="0" fill="hold" grpId="0" nodeType="clickEffect">
+                                  <p:stCondLst>
+                                    <p:cond delay="0"/>
+                                  </p:stCondLst>
+                                  <p:childTnLst>
+                                    <p:set>
+                                      <p:cBhvr>
+                                        <p:cTn id="74" dur="1" fill="hold">
+                                          <p:stCondLst>
+                                            <p:cond delay="0"/>
+                                          </p:stCondLst>
+                                        </p:cTn>
+                                        <p:tgtEl>
+                                          <p:spTgt spid="24"/>
+                                        </p:tgtEl>
+                                        <p:attrNameLst>
+                                          <p:attrName>style.visibility</p:attrName>
+                                        </p:attrNameLst>
+                                      </p:cBhvr>
+                                      <p:to>
+                                        <p:strVal val="visible"/>
+                                      </p:to>
+                                    </p:set>
+                                    <p:animEffect transition="in" filter="fade">
+                                      <p:cBhvr>
+                                        <p:cTn id="75" dur="500"/>
+                                        <p:tgtEl>
+                                          <p:spTgt spid="24"/>
+                                        </p:tgtEl>
+                                      </p:cBhvr>
+                                    </p:animEffect>
+                                  </p:childTnLst>
+                                </p:cTn>
+                              </p:par>
+                              <p:par>
+                                <p:cTn id="76" presetID="10" presetClass="entr" presetSubtype="0" fill="hold" grpId="0" nodeType="withEffect">
+                                  <p:stCondLst>
+                                    <p:cond delay="0"/>
+                                  </p:stCondLst>
+                                  <p:childTnLst>
+                                    <p:set>
+                                      <p:cBhvr>
+                                        <p:cTn id="77" dur="1" fill="hold">
+                                          <p:stCondLst>
+                                            <p:cond delay="0"/>
+                                          </p:stCondLst>
+                                        </p:cTn>
+                                        <p:tgtEl>
+                                          <p:spTgt spid="25"/>
+                                        </p:tgtEl>
+                                        <p:attrNameLst>
+                                          <p:attrName>style.visibility</p:attrName>
+                                        </p:attrNameLst>
+                                      </p:cBhvr>
+                                      <p:to>
+                                        <p:strVal val="visible"/>
+                                      </p:to>
+                                    </p:set>
+                                    <p:animEffect transition="in" filter="fade">
+                                      <p:cBhvr>
+                                        <p:cTn id="78" dur="500"/>
+                                        <p:tgtEl>
+                                          <p:spTgt spid="25"/>
+                                        </p:tgtEl>
+                                      </p:cBhvr>
+                                    </p:animEffect>
+                                  </p:childTnLst>
+                                </p:cTn>
+                              </p:par>
+                              <p:par>
+                                <p:cTn id="79" presetID="10" presetClass="entr" presetSubtype="0" fill="hold" grpId="0" nodeType="withEffect">
+                                  <p:stCondLst>
+                                    <p:cond delay="0"/>
+                                  </p:stCondLst>
+                                  <p:childTnLst>
+                                    <p:set>
+                                      <p:cBhvr>
+                                        <p:cTn id="80" dur="1" fill="hold">
+                                          <p:stCondLst>
+                                            <p:cond delay="0"/>
+                                          </p:stCondLst>
+                                        </p:cTn>
+                                        <p:tgtEl>
+                                          <p:spTgt spid="26"/>
+                                        </p:tgtEl>
+                                        <p:attrNameLst>
+                                          <p:attrName>style.visibility</p:attrName>
+                                        </p:attrNameLst>
+                                      </p:cBhvr>
+                                      <p:to>
+                                        <p:strVal val="visible"/>
+                                      </p:to>
+                                    </p:set>
+                                    <p:animEffect transition="in" filter="fade">
+                                      <p:cBhvr>
+                                        <p:cTn id="81" dur="500"/>
+                                        <p:tgtEl>
+                                          <p:spTgt spid="26"/>
+                                        </p:tgtEl>
+                                      </p:cBhvr>
+                                    </p:animEffect>
+                                  </p:childTnLst>
+                                </p:cTn>
+                              </p:par>
+                              <p:par>
+                                <p:cTn id="82" presetID="10" presetClass="entr" presetSubtype="0" fill="hold" grpId="0" nodeType="withEffect">
+                                  <p:stCondLst>
+                                    <p:cond delay="0"/>
+                                  </p:stCondLst>
+                                  <p:childTnLst>
+                                    <p:set>
+                                      <p:cBhvr>
+                                        <p:cTn id="83" dur="1" fill="hold">
+                                          <p:stCondLst>
+                                            <p:cond delay="0"/>
+                                          </p:stCondLst>
+                                        </p:cTn>
+                                        <p:tgtEl>
+                                          <p:spTgt spid="27"/>
+                                        </p:tgtEl>
+                                        <p:attrNameLst>
+                                          <p:attrName>style.visibility</p:attrName>
+                                        </p:attrNameLst>
+                                      </p:cBhvr>
+                                      <p:to>
+                                        <p:strVal val="visible"/>
+                                      </p:to>
+                                    </p:set>
+                                    <p:animEffect transition="in" filter="fade">
+                                      <p:cBhvr>
+                                        <p:cTn id="84" dur="500"/>
+                                        <p:tgtEl>
+                                          <p:spTgt spid="27"/>
+                                        </p:tgtEl>
+                                      </p:cBhvr>
+                                    </p:animEffect>
+                                  </p:childTnLst>
+                                </p:cTn>
+                              </p:par>
+                              <p:par>
+                                <p:cTn id="85" presetID="10" presetClass="entr" presetSubtype="0" fill="hold" grpId="0" nodeType="withEffect">
+                                  <p:stCondLst>
+                                    <p:cond delay="0"/>
+                                  </p:stCondLst>
+                                  <p:childTnLst>
+                                    <p:set>
+                                      <p:cBhvr>
+                                        <p:cTn id="86" dur="1" fill="hold">
+                                          <p:stCondLst>
+                                            <p:cond delay="0"/>
+                                          </p:stCondLst>
+                                        </p:cTn>
+                                        <p:tgtEl>
+                                          <p:spTgt spid="28"/>
+                                        </p:tgtEl>
+                                        <p:attrNameLst>
+                                          <p:attrName>style.visibility</p:attrName>
+                                        </p:attrNameLst>
+                                      </p:cBhvr>
+                                      <p:to>
+                                        <p:strVal val="visible"/>
+                                      </p:to>
+                                    </p:set>
+                                    <p:animEffect transition="in" filter="fade">
+                                      <p:cBhvr>
+                                        <p:cTn id="87" dur="500"/>
+                                        <p:tgtEl>
+                                          <p:spTgt spid="28"/>
+                                        </p:tgtEl>
+                                      </p:cBhvr>
+                                    </p:animEffect>
+                                  </p:childTnLst>
+                                </p:cTn>
+                              </p:par>
+                            </p:childTnLst>
+                          </p:cTn>
+                        </p:par>
+                      </p:childTnLst>
+                    </p:cTn>
+                  </p:par>
+                  <p:par>
+                    <p:cTn id="88" fill="hold">
+                      <p:stCondLst>
+                        <p:cond delay="indefinite"/>
+                      </p:stCondLst>
+                      <p:childTnLst>
+                        <p:par>
+                          <p:cTn id="89" fill="hold">
+                            <p:stCondLst>
+                              <p:cond delay="0"/>
+                            </p:stCondLst>
+                            <p:childTnLst>
+                              <p:par>
+                                <p:cTn id="90" presetID="10" presetClass="entr" presetSubtype="0" fill="hold" grpId="0" nodeType="clickEffect">
+                                  <p:stCondLst>
+                                    <p:cond delay="0"/>
+                                  </p:stCondLst>
+                                  <p:childTnLst>
+                                    <p:set>
+                                      <p:cBhvr>
+                                        <p:cTn id="91" dur="1" fill="hold">
+                                          <p:stCondLst>
+                                            <p:cond delay="0"/>
+                                          </p:stCondLst>
+                                        </p:cTn>
+                                        <p:tgtEl>
+                                          <p:spTgt spid="29"/>
+                                        </p:tgtEl>
+                                        <p:attrNameLst>
+                                          <p:attrName>style.visibility</p:attrName>
+                                        </p:attrNameLst>
+                                      </p:cBhvr>
+                                      <p:to>
+                                        <p:strVal val="visible"/>
+                                      </p:to>
+                                    </p:set>
+                                    <p:animEffect transition="in" filter="fade">
+                                      <p:cBhvr>
+                                        <p:cTn id="92" dur="500"/>
+                                        <p:tgtEl>
+                                          <p:spTgt spid="29"/>
+                                        </p:tgtEl>
+                                      </p:cBhvr>
+                                    </p:animEffect>
+                                  </p:childTnLst>
+                                </p:cTn>
+                              </p:par>
+                              <p:par>
+                                <p:cTn id="93" presetID="10" presetClass="entr" presetSubtype="0" fill="hold" grpId="0" nodeType="withEffect">
+                                  <p:stCondLst>
+                                    <p:cond delay="0"/>
+                                  </p:stCondLst>
+                                  <p:childTnLst>
+                                    <p:set>
+                                      <p:cBhvr>
+                                        <p:cTn id="94" dur="1" fill="hold">
+                                          <p:stCondLst>
+                                            <p:cond delay="0"/>
+                                          </p:stCondLst>
+                                        </p:cTn>
+                                        <p:tgtEl>
+                                          <p:spTgt spid="30"/>
+                                        </p:tgtEl>
+                                        <p:attrNameLst>
+                                          <p:attrName>style.visibility</p:attrName>
+                                        </p:attrNameLst>
+                                      </p:cBhvr>
+                                      <p:to>
+                                        <p:strVal val="visible"/>
+                                      </p:to>
+                                    </p:set>
+                                    <p:animEffect transition="in" filter="fade">
+                                      <p:cBhvr>
+                                        <p:cTn id="95" dur="500"/>
+                                        <p:tgtEl>
+                                          <p:spTgt spid="30"/>
+                                        </p:tgtEl>
+                                      </p:cBhvr>
+                                    </p:animEffect>
+                                  </p:childTnLst>
+                                </p:cTn>
+                              </p:par>
+                              <p:par>
+                                <p:cTn id="96" presetID="10" presetClass="entr" presetSubtype="0" fill="hold" grpId="0" nodeType="withEffect">
+                                  <p:stCondLst>
+                                    <p:cond delay="0"/>
+                                  </p:stCondLst>
+                                  <p:childTnLst>
+                                    <p:set>
+                                      <p:cBhvr>
+                                        <p:cTn id="97" dur="1" fill="hold">
+                                          <p:stCondLst>
+                                            <p:cond delay="0"/>
+                                          </p:stCondLst>
+                                        </p:cTn>
+                                        <p:tgtEl>
+                                          <p:spTgt spid="31"/>
+                                        </p:tgtEl>
+                                        <p:attrNameLst>
+                                          <p:attrName>style.visibility</p:attrName>
+                                        </p:attrNameLst>
+                                      </p:cBhvr>
+                                      <p:to>
+                                        <p:strVal val="visible"/>
+                                      </p:to>
+                                    </p:set>
+                                    <p:animEffect transition="in" filter="fade">
+                                      <p:cBhvr>
+                                        <p:cTn id="98" dur="500"/>
+                                        <p:tgtEl>
+                                          <p:spTgt spid="31"/>
+                                        </p:tgtEl>
+                                      </p:cBhvr>
+                                    </p:animEffect>
+                                  </p:childTnLst>
+                                </p:cTn>
+                              </p:par>
+                              <p:par>
+                                <p:cTn id="99" presetID="10" presetClass="entr" presetSubtype="0" fill="hold" grpId="0" nodeType="withEffect">
+                                  <p:stCondLst>
+                                    <p:cond delay="0"/>
+                                  </p:stCondLst>
+                                  <p:childTnLst>
+                                    <p:set>
+                                      <p:cBhvr>
+                                        <p:cTn id="100" dur="1" fill="hold">
+                                          <p:stCondLst>
+                                            <p:cond delay="0"/>
+                                          </p:stCondLst>
+                                        </p:cTn>
+                                        <p:tgtEl>
+                                          <p:spTgt spid="32"/>
+                                        </p:tgtEl>
+                                        <p:attrNameLst>
+                                          <p:attrName>style.visibility</p:attrName>
+                                        </p:attrNameLst>
+                                      </p:cBhvr>
+                                      <p:to>
+                                        <p:strVal val="visible"/>
+                                      </p:to>
+                                    </p:set>
+                                    <p:animEffect transition="in" filter="fade">
+                                      <p:cBhvr>
+                                        <p:cTn id="101" dur="500"/>
+                                        <p:tgtEl>
+                                          <p:spTgt spid="32"/>
+                                        </p:tgtEl>
+                                      </p:cBhvr>
+                                    </p:animEffect>
+                                  </p:childTnLst>
+                                </p:cTn>
+                              </p:par>
+                              <p:par>
+                                <p:cTn id="102" presetID="10" presetClass="entr" presetSubtype="0" fill="hold" grpId="0" nodeType="withEffect">
+                                  <p:stCondLst>
+                                    <p:cond delay="0"/>
+                                  </p:stCondLst>
+                                  <p:childTnLst>
+                                    <p:set>
+                                      <p:cBhvr>
+                                        <p:cTn id="103" dur="1" fill="hold">
+                                          <p:stCondLst>
+                                            <p:cond delay="0"/>
+                                          </p:stCondLst>
+                                        </p:cTn>
+                                        <p:tgtEl>
+                                          <p:spTgt spid="33"/>
+                                        </p:tgtEl>
+                                        <p:attrNameLst>
+                                          <p:attrName>style.visibility</p:attrName>
+                                        </p:attrNameLst>
+                                      </p:cBhvr>
+                                      <p:to>
+                                        <p:strVal val="visible"/>
+                                      </p:to>
+                                    </p:set>
+                                    <p:animEffect transition="in" filter="fade">
+                                      <p:cBhvr>
+                                        <p:cTn id="104" dur="500"/>
+                                        <p:tgtEl>
+                                          <p:spTgt spid="33"/>
+                                        </p:tgtEl>
+                                      </p:cBhvr>
+                                    </p:animEffect>
+                                  </p:childTnLst>
+                                </p:cTn>
+                              </p:par>
+                            </p:childTnLst>
+                          </p:cTn>
+                        </p:par>
+                      </p:childTnLst>
+                    </p:cTn>
+                  </p:par>
+                </p:childTnLst>
+              </p:cTn>
+              <p:prevCondLst>
+                <p:cond evt="onPrev" delay="0">
+                  <p:tgtEl>
+                    <p:sldTgt/>
+                  </p:tgtEl>
+                </p:cond>
+              </p:prevCondLst>
+              <p:nextCondLst>
+                <p:cond evt="onNext" delay="0">
+                  <p:tgtEl>
+                    <p:sldTgt/>
+                  </p:tgtEl>
+                </p:cond>
+              </p:nextCondLst>
+            </p:seq>
+          </p:childTnLst>
+        </p:cTn>
+      </p:par>
+    </p:tnLst>
+  </p:timing>
 </p:sld>
 </file>
 
@@ -21759,6 +27909,808 @@
   <p:transition spd="med">
     <p:fade/>
   </p:transition>
+  <p:timing>
+    <p:tnLst>
+      <p:par>
+        <p:cTn id="1" dur="indefinite" restart="never" nodeType="tmRoot">
+          <p:childTnLst>
+            <p:seq concurrent="1" nextAc="seek">
+              <p:cTn id="2" dur="indefinite" nodeType="mainSeq">
+                <p:childTnLst>
+                  <p:par>
+                    <p:cTn id="3" fill="hold">
+                      <p:stCondLst>
+                        <p:cond delay="indefinite"/>
+                      </p:stCondLst>
+                      <p:childTnLst>
+                        <p:par>
+                          <p:cTn id="4" fill="hold">
+                            <p:stCondLst>
+                              <p:cond delay="0"/>
+                            </p:stCondLst>
+                            <p:childTnLst>
+                              <p:par>
+                                <p:cTn id="5" presetID="10" presetClass="entr" presetSubtype="0" fill="hold" grpId="0" nodeType="clickEffect">
+                                  <p:stCondLst>
+                                    <p:cond delay="0"/>
+                                  </p:stCondLst>
+                                  <p:childTnLst>
+                                    <p:set>
+                                      <p:cBhvr>
+                                        <p:cTn id="6" dur="1" fill="hold">
+                                          <p:stCondLst>
+                                            <p:cond delay="0"/>
+                                          </p:stCondLst>
+                                        </p:cTn>
+                                        <p:tgtEl>
+                                          <p:spTgt spid="4"/>
+                                        </p:tgtEl>
+                                        <p:attrNameLst>
+                                          <p:attrName>style.visibility</p:attrName>
+                                        </p:attrNameLst>
+                                      </p:cBhvr>
+                                      <p:to>
+                                        <p:strVal val="visible"/>
+                                      </p:to>
+                                    </p:set>
+                                    <p:animEffect transition="in" filter="fade">
+                                      <p:cBhvr>
+                                        <p:cTn id="7" dur="500"/>
+                                        <p:tgtEl>
+                                          <p:spTgt spid="4"/>
+                                        </p:tgtEl>
+                                      </p:cBhvr>
+                                    </p:animEffect>
+                                  </p:childTnLst>
+                                </p:cTn>
+                              </p:par>
+                              <p:par>
+                                <p:cTn id="8" presetID="10" presetClass="entr" presetSubtype="0" fill="hold" grpId="0" nodeType="withEffect">
+                                  <p:stCondLst>
+                                    <p:cond delay="0"/>
+                                  </p:stCondLst>
+                                  <p:childTnLst>
+                                    <p:set>
+                                      <p:cBhvr>
+                                        <p:cTn id="9" dur="1" fill="hold">
+                                          <p:stCondLst>
+                                            <p:cond delay="0"/>
+                                          </p:stCondLst>
+                                        </p:cTn>
+                                        <p:tgtEl>
+                                          <p:spTgt spid="5"/>
+                                        </p:tgtEl>
+                                        <p:attrNameLst>
+                                          <p:attrName>style.visibility</p:attrName>
+                                        </p:attrNameLst>
+                                      </p:cBhvr>
+                                      <p:to>
+                                        <p:strVal val="visible"/>
+                                      </p:to>
+                                    </p:set>
+                                    <p:animEffect transition="in" filter="fade">
+                                      <p:cBhvr>
+                                        <p:cTn id="10" dur="500"/>
+                                        <p:tgtEl>
+                                          <p:spTgt spid="5"/>
+                                        </p:tgtEl>
+                                      </p:cBhvr>
+                                    </p:animEffect>
+                                  </p:childTnLst>
+                                </p:cTn>
+                              </p:par>
+                              <p:par>
+                                <p:cTn id="11" presetID="10" presetClass="entr" presetSubtype="0" fill="hold" grpId="0" nodeType="withEffect">
+                                  <p:stCondLst>
+                                    <p:cond delay="0"/>
+                                  </p:stCondLst>
+                                  <p:childTnLst>
+                                    <p:set>
+                                      <p:cBhvr>
+                                        <p:cTn id="12" dur="1" fill="hold">
+                                          <p:stCondLst>
+                                            <p:cond delay="0"/>
+                                          </p:stCondLst>
+                                        </p:cTn>
+                                        <p:tgtEl>
+                                          <p:spTgt spid="6"/>
+                                        </p:tgtEl>
+                                        <p:attrNameLst>
+                                          <p:attrName>style.visibility</p:attrName>
+                                        </p:attrNameLst>
+                                      </p:cBhvr>
+                                      <p:to>
+                                        <p:strVal val="visible"/>
+                                      </p:to>
+                                    </p:set>
+                                    <p:animEffect transition="in" filter="fade">
+                                      <p:cBhvr>
+                                        <p:cTn id="13" dur="500"/>
+                                        <p:tgtEl>
+                                          <p:spTgt spid="6"/>
+                                        </p:tgtEl>
+                                      </p:cBhvr>
+                                    </p:animEffect>
+                                  </p:childTnLst>
+                                </p:cTn>
+                              </p:par>
+                              <p:par>
+                                <p:cTn id="14" presetID="10" presetClass="entr" presetSubtype="0" fill="hold" grpId="0" nodeType="withEffect">
+                                  <p:stCondLst>
+                                    <p:cond delay="0"/>
+                                  </p:stCondLst>
+                                  <p:childTnLst>
+                                    <p:set>
+                                      <p:cBhvr>
+                                        <p:cTn id="15" dur="1" fill="hold">
+                                          <p:stCondLst>
+                                            <p:cond delay="0"/>
+                                          </p:stCondLst>
+                                        </p:cTn>
+                                        <p:tgtEl>
+                                          <p:spTgt spid="7"/>
+                                        </p:tgtEl>
+                                        <p:attrNameLst>
+                                          <p:attrName>style.visibility</p:attrName>
+                                        </p:attrNameLst>
+                                      </p:cBhvr>
+                                      <p:to>
+                                        <p:strVal val="visible"/>
+                                      </p:to>
+                                    </p:set>
+                                    <p:animEffect transition="in" filter="fade">
+                                      <p:cBhvr>
+                                        <p:cTn id="16" dur="500"/>
+                                        <p:tgtEl>
+                                          <p:spTgt spid="7"/>
+                                        </p:tgtEl>
+                                      </p:cBhvr>
+                                    </p:animEffect>
+                                  </p:childTnLst>
+                                </p:cTn>
+                              </p:par>
+                              <p:par>
+                                <p:cTn id="17" presetID="10" presetClass="entr" presetSubtype="0" fill="hold" grpId="0" nodeType="withEffect">
+                                  <p:stCondLst>
+                                    <p:cond delay="0"/>
+                                  </p:stCondLst>
+                                  <p:childTnLst>
+                                    <p:set>
+                                      <p:cBhvr>
+                                        <p:cTn id="18" dur="1" fill="hold">
+                                          <p:stCondLst>
+                                            <p:cond delay="0"/>
+                                          </p:stCondLst>
+                                        </p:cTn>
+                                        <p:tgtEl>
+                                          <p:spTgt spid="8"/>
+                                        </p:tgtEl>
+                                        <p:attrNameLst>
+                                          <p:attrName>style.visibility</p:attrName>
+                                        </p:attrNameLst>
+                                      </p:cBhvr>
+                                      <p:to>
+                                        <p:strVal val="visible"/>
+                                      </p:to>
+                                    </p:set>
+                                    <p:animEffect transition="in" filter="fade">
+                                      <p:cBhvr>
+                                        <p:cTn id="19" dur="500"/>
+                                        <p:tgtEl>
+                                          <p:spTgt spid="8"/>
+                                        </p:tgtEl>
+                                      </p:cBhvr>
+                                    </p:animEffect>
+                                  </p:childTnLst>
+                                </p:cTn>
+                              </p:par>
+                            </p:childTnLst>
+                          </p:cTn>
+                        </p:par>
+                      </p:childTnLst>
+                    </p:cTn>
+                  </p:par>
+                  <p:par>
+                    <p:cTn id="20" fill="hold">
+                      <p:stCondLst>
+                        <p:cond delay="indefinite"/>
+                      </p:stCondLst>
+                      <p:childTnLst>
+                        <p:par>
+                          <p:cTn id="21" fill="hold">
+                            <p:stCondLst>
+                              <p:cond delay="0"/>
+                            </p:stCondLst>
+                            <p:childTnLst>
+                              <p:par>
+                                <p:cTn id="22" presetID="10" presetClass="entr" presetSubtype="0" fill="hold" grpId="0" nodeType="clickEffect">
+                                  <p:stCondLst>
+                                    <p:cond delay="0"/>
+                                  </p:stCondLst>
+                                  <p:childTnLst>
+                                    <p:set>
+                                      <p:cBhvr>
+                                        <p:cTn id="23" dur="1" fill="hold">
+                                          <p:stCondLst>
+                                            <p:cond delay="0"/>
+                                          </p:stCondLst>
+                                        </p:cTn>
+                                        <p:tgtEl>
+                                          <p:spTgt spid="9"/>
+                                        </p:tgtEl>
+                                        <p:attrNameLst>
+                                          <p:attrName>style.visibility</p:attrName>
+                                        </p:attrNameLst>
+                                      </p:cBhvr>
+                                      <p:to>
+                                        <p:strVal val="visible"/>
+                                      </p:to>
+                                    </p:set>
+                                    <p:animEffect transition="in" filter="fade">
+                                      <p:cBhvr>
+                                        <p:cTn id="24" dur="500"/>
+                                        <p:tgtEl>
+                                          <p:spTgt spid="9"/>
+                                        </p:tgtEl>
+                                      </p:cBhvr>
+                                    </p:animEffect>
+                                  </p:childTnLst>
+                                </p:cTn>
+                              </p:par>
+                              <p:par>
+                                <p:cTn id="25" presetID="10" presetClass="entr" presetSubtype="0" fill="hold" grpId="0" nodeType="withEffect">
+                                  <p:stCondLst>
+                                    <p:cond delay="0"/>
+                                  </p:stCondLst>
+                                  <p:childTnLst>
+                                    <p:set>
+                                      <p:cBhvr>
+                                        <p:cTn id="26" dur="1" fill="hold">
+                                          <p:stCondLst>
+                                            <p:cond delay="0"/>
+                                          </p:stCondLst>
+                                        </p:cTn>
+                                        <p:tgtEl>
+                                          <p:spTgt spid="10"/>
+                                        </p:tgtEl>
+                                        <p:attrNameLst>
+                                          <p:attrName>style.visibility</p:attrName>
+                                        </p:attrNameLst>
+                                      </p:cBhvr>
+                                      <p:to>
+                                        <p:strVal val="visible"/>
+                                      </p:to>
+                                    </p:set>
+                                    <p:animEffect transition="in" filter="fade">
+                                      <p:cBhvr>
+                                        <p:cTn id="27" dur="500"/>
+                                        <p:tgtEl>
+                                          <p:spTgt spid="10"/>
+                                        </p:tgtEl>
+                                      </p:cBhvr>
+                                    </p:animEffect>
+                                  </p:childTnLst>
+                                </p:cTn>
+                              </p:par>
+                              <p:par>
+                                <p:cTn id="28" presetID="10" presetClass="entr" presetSubtype="0" fill="hold" grpId="0" nodeType="withEffect">
+                                  <p:stCondLst>
+                                    <p:cond delay="0"/>
+                                  </p:stCondLst>
+                                  <p:childTnLst>
+                                    <p:set>
+                                      <p:cBhvr>
+                                        <p:cTn id="29" dur="1" fill="hold">
+                                          <p:stCondLst>
+                                            <p:cond delay="0"/>
+                                          </p:stCondLst>
+                                        </p:cTn>
+                                        <p:tgtEl>
+                                          <p:spTgt spid="11"/>
+                                        </p:tgtEl>
+                                        <p:attrNameLst>
+                                          <p:attrName>style.visibility</p:attrName>
+                                        </p:attrNameLst>
+                                      </p:cBhvr>
+                                      <p:to>
+                                        <p:strVal val="visible"/>
+                                      </p:to>
+                                    </p:set>
+                                    <p:animEffect transition="in" filter="fade">
+                                      <p:cBhvr>
+                                        <p:cTn id="30" dur="500"/>
+                                        <p:tgtEl>
+                                          <p:spTgt spid="11"/>
+                                        </p:tgtEl>
+                                      </p:cBhvr>
+                                    </p:animEffect>
+                                  </p:childTnLst>
+                                </p:cTn>
+                              </p:par>
+                              <p:par>
+                                <p:cTn id="31" presetID="10" presetClass="entr" presetSubtype="0" fill="hold" grpId="0" nodeType="withEffect">
+                                  <p:stCondLst>
+                                    <p:cond delay="0"/>
+                                  </p:stCondLst>
+                                  <p:childTnLst>
+                                    <p:set>
+                                      <p:cBhvr>
+                                        <p:cTn id="32" dur="1" fill="hold">
+                                          <p:stCondLst>
+                                            <p:cond delay="0"/>
+                                          </p:stCondLst>
+                                        </p:cTn>
+                                        <p:tgtEl>
+                                          <p:spTgt spid="12"/>
+                                        </p:tgtEl>
+                                        <p:attrNameLst>
+                                          <p:attrName>style.visibility</p:attrName>
+                                        </p:attrNameLst>
+                                      </p:cBhvr>
+                                      <p:to>
+                                        <p:strVal val="visible"/>
+                                      </p:to>
+                                    </p:set>
+                                    <p:animEffect transition="in" filter="fade">
+                                      <p:cBhvr>
+                                        <p:cTn id="33" dur="500"/>
+                                        <p:tgtEl>
+                                          <p:spTgt spid="12"/>
+                                        </p:tgtEl>
+                                      </p:cBhvr>
+                                    </p:animEffect>
+                                  </p:childTnLst>
+                                </p:cTn>
+                              </p:par>
+                              <p:par>
+                                <p:cTn id="34" presetID="10" presetClass="entr" presetSubtype="0" fill="hold" grpId="0" nodeType="withEffect">
+                                  <p:stCondLst>
+                                    <p:cond delay="0"/>
+                                  </p:stCondLst>
+                                  <p:childTnLst>
+                                    <p:set>
+                                      <p:cBhvr>
+                                        <p:cTn id="35" dur="1" fill="hold">
+                                          <p:stCondLst>
+                                            <p:cond delay="0"/>
+                                          </p:stCondLst>
+                                        </p:cTn>
+                                        <p:tgtEl>
+                                          <p:spTgt spid="13"/>
+                                        </p:tgtEl>
+                                        <p:attrNameLst>
+                                          <p:attrName>style.visibility</p:attrName>
+                                        </p:attrNameLst>
+                                      </p:cBhvr>
+                                      <p:to>
+                                        <p:strVal val="visible"/>
+                                      </p:to>
+                                    </p:set>
+                                    <p:animEffect transition="in" filter="fade">
+                                      <p:cBhvr>
+                                        <p:cTn id="36" dur="500"/>
+                                        <p:tgtEl>
+                                          <p:spTgt spid="13"/>
+                                        </p:tgtEl>
+                                      </p:cBhvr>
+                                    </p:animEffect>
+                                  </p:childTnLst>
+                                </p:cTn>
+                              </p:par>
+                            </p:childTnLst>
+                          </p:cTn>
+                        </p:par>
+                      </p:childTnLst>
+                    </p:cTn>
+                  </p:par>
+                  <p:par>
+                    <p:cTn id="37" fill="hold">
+                      <p:stCondLst>
+                        <p:cond delay="indefinite"/>
+                      </p:stCondLst>
+                      <p:childTnLst>
+                        <p:par>
+                          <p:cTn id="38" fill="hold">
+                            <p:stCondLst>
+                              <p:cond delay="0"/>
+                            </p:stCondLst>
+                            <p:childTnLst>
+                              <p:par>
+                                <p:cTn id="39" presetID="10" presetClass="entr" presetSubtype="0" fill="hold" grpId="0" nodeType="clickEffect">
+                                  <p:stCondLst>
+                                    <p:cond delay="0"/>
+                                  </p:stCondLst>
+                                  <p:childTnLst>
+                                    <p:set>
+                                      <p:cBhvr>
+                                        <p:cTn id="40" dur="1" fill="hold">
+                                          <p:stCondLst>
+                                            <p:cond delay="0"/>
+                                          </p:stCondLst>
+                                        </p:cTn>
+                                        <p:tgtEl>
+                                          <p:spTgt spid="14"/>
+                                        </p:tgtEl>
+                                        <p:attrNameLst>
+                                          <p:attrName>style.visibility</p:attrName>
+                                        </p:attrNameLst>
+                                      </p:cBhvr>
+                                      <p:to>
+                                        <p:strVal val="visible"/>
+                                      </p:to>
+                                    </p:set>
+                                    <p:animEffect transition="in" filter="fade">
+                                      <p:cBhvr>
+                                        <p:cTn id="41" dur="500"/>
+                                        <p:tgtEl>
+                                          <p:spTgt spid="14"/>
+                                        </p:tgtEl>
+                                      </p:cBhvr>
+                                    </p:animEffect>
+                                  </p:childTnLst>
+                                </p:cTn>
+                              </p:par>
+                              <p:par>
+                                <p:cTn id="42" presetID="10" presetClass="entr" presetSubtype="0" fill="hold" grpId="0" nodeType="withEffect">
+                                  <p:stCondLst>
+                                    <p:cond delay="0"/>
+                                  </p:stCondLst>
+                                  <p:childTnLst>
+                                    <p:set>
+                                      <p:cBhvr>
+                                        <p:cTn id="43" dur="1" fill="hold">
+                                          <p:stCondLst>
+                                            <p:cond delay="0"/>
+                                          </p:stCondLst>
+                                        </p:cTn>
+                                        <p:tgtEl>
+                                          <p:spTgt spid="15"/>
+                                        </p:tgtEl>
+                                        <p:attrNameLst>
+                                          <p:attrName>style.visibility</p:attrName>
+                                        </p:attrNameLst>
+                                      </p:cBhvr>
+                                      <p:to>
+                                        <p:strVal val="visible"/>
+                                      </p:to>
+                                    </p:set>
+                                    <p:animEffect transition="in" filter="fade">
+                                      <p:cBhvr>
+                                        <p:cTn id="44" dur="500"/>
+                                        <p:tgtEl>
+                                          <p:spTgt spid="15"/>
+                                        </p:tgtEl>
+                                      </p:cBhvr>
+                                    </p:animEffect>
+                                  </p:childTnLst>
+                                </p:cTn>
+                              </p:par>
+                              <p:par>
+                                <p:cTn id="45" presetID="10" presetClass="entr" presetSubtype="0" fill="hold" grpId="0" nodeType="withEffect">
+                                  <p:stCondLst>
+                                    <p:cond delay="0"/>
+                                  </p:stCondLst>
+                                  <p:childTnLst>
+                                    <p:set>
+                                      <p:cBhvr>
+                                        <p:cTn id="46" dur="1" fill="hold">
+                                          <p:stCondLst>
+                                            <p:cond delay="0"/>
+                                          </p:stCondLst>
+                                        </p:cTn>
+                                        <p:tgtEl>
+                                          <p:spTgt spid="16"/>
+                                        </p:tgtEl>
+                                        <p:attrNameLst>
+                                          <p:attrName>style.visibility</p:attrName>
+                                        </p:attrNameLst>
+                                      </p:cBhvr>
+                                      <p:to>
+                                        <p:strVal val="visible"/>
+                                      </p:to>
+                                    </p:set>
+                                    <p:animEffect transition="in" filter="fade">
+                                      <p:cBhvr>
+                                        <p:cTn id="47" dur="500"/>
+                                        <p:tgtEl>
+                                          <p:spTgt spid="16"/>
+                                        </p:tgtEl>
+                                      </p:cBhvr>
+                                    </p:animEffect>
+                                  </p:childTnLst>
+                                </p:cTn>
+                              </p:par>
+                              <p:par>
+                                <p:cTn id="48" presetID="10" presetClass="entr" presetSubtype="0" fill="hold" grpId="0" nodeType="withEffect">
+                                  <p:stCondLst>
+                                    <p:cond delay="0"/>
+                                  </p:stCondLst>
+                                  <p:childTnLst>
+                                    <p:set>
+                                      <p:cBhvr>
+                                        <p:cTn id="49" dur="1" fill="hold">
+                                          <p:stCondLst>
+                                            <p:cond delay="0"/>
+                                          </p:stCondLst>
+                                        </p:cTn>
+                                        <p:tgtEl>
+                                          <p:spTgt spid="17"/>
+                                        </p:tgtEl>
+                                        <p:attrNameLst>
+                                          <p:attrName>style.visibility</p:attrName>
+                                        </p:attrNameLst>
+                                      </p:cBhvr>
+                                      <p:to>
+                                        <p:strVal val="visible"/>
+                                      </p:to>
+                                    </p:set>
+                                    <p:animEffect transition="in" filter="fade">
+                                      <p:cBhvr>
+                                        <p:cTn id="50" dur="500"/>
+                                        <p:tgtEl>
+                                          <p:spTgt spid="17"/>
+                                        </p:tgtEl>
+                                      </p:cBhvr>
+                                    </p:animEffect>
+                                  </p:childTnLst>
+                                </p:cTn>
+                              </p:par>
+                              <p:par>
+                                <p:cTn id="51" presetID="10" presetClass="entr" presetSubtype="0" fill="hold" grpId="0" nodeType="withEffect">
+                                  <p:stCondLst>
+                                    <p:cond delay="0"/>
+                                  </p:stCondLst>
+                                  <p:childTnLst>
+                                    <p:set>
+                                      <p:cBhvr>
+                                        <p:cTn id="52" dur="1" fill="hold">
+                                          <p:stCondLst>
+                                            <p:cond delay="0"/>
+                                          </p:stCondLst>
+                                        </p:cTn>
+                                        <p:tgtEl>
+                                          <p:spTgt spid="18"/>
+                                        </p:tgtEl>
+                                        <p:attrNameLst>
+                                          <p:attrName>style.visibility</p:attrName>
+                                        </p:attrNameLst>
+                                      </p:cBhvr>
+                                      <p:to>
+                                        <p:strVal val="visible"/>
+                                      </p:to>
+                                    </p:set>
+                                    <p:animEffect transition="in" filter="fade">
+                                      <p:cBhvr>
+                                        <p:cTn id="53" dur="500"/>
+                                        <p:tgtEl>
+                                          <p:spTgt spid="18"/>
+                                        </p:tgtEl>
+                                      </p:cBhvr>
+                                    </p:animEffect>
+                                  </p:childTnLst>
+                                </p:cTn>
+                              </p:par>
+                            </p:childTnLst>
+                          </p:cTn>
+                        </p:par>
+                      </p:childTnLst>
+                    </p:cTn>
+                  </p:par>
+                  <p:par>
+                    <p:cTn id="54" fill="hold">
+                      <p:stCondLst>
+                        <p:cond delay="indefinite"/>
+                      </p:stCondLst>
+                      <p:childTnLst>
+                        <p:par>
+                          <p:cTn id="55" fill="hold">
+                            <p:stCondLst>
+                              <p:cond delay="0"/>
+                            </p:stCondLst>
+                            <p:childTnLst>
+                              <p:par>
+                                <p:cTn id="56" presetID="10" presetClass="entr" presetSubtype="0" fill="hold" grpId="0" nodeType="clickEffect">
+                                  <p:stCondLst>
+                                    <p:cond delay="0"/>
+                                  </p:stCondLst>
+                                  <p:childTnLst>
+                                    <p:set>
+                                      <p:cBhvr>
+                                        <p:cTn id="57" dur="1" fill="hold">
+                                          <p:stCondLst>
+                                            <p:cond delay="0"/>
+                                          </p:stCondLst>
+                                        </p:cTn>
+                                        <p:tgtEl>
+                                          <p:spTgt spid="19"/>
+                                        </p:tgtEl>
+                                        <p:attrNameLst>
+                                          <p:attrName>style.visibility</p:attrName>
+                                        </p:attrNameLst>
+                                      </p:cBhvr>
+                                      <p:to>
+                                        <p:strVal val="visible"/>
+                                      </p:to>
+                                    </p:set>
+                                    <p:animEffect transition="in" filter="fade">
+                                      <p:cBhvr>
+                                        <p:cTn id="58" dur="500"/>
+                                        <p:tgtEl>
+                                          <p:spTgt spid="19"/>
+                                        </p:tgtEl>
+                                      </p:cBhvr>
+                                    </p:animEffect>
+                                  </p:childTnLst>
+                                </p:cTn>
+                              </p:par>
+                              <p:par>
+                                <p:cTn id="59" presetID="10" presetClass="entr" presetSubtype="0" fill="hold" grpId="0" nodeType="withEffect">
+                                  <p:stCondLst>
+                                    <p:cond delay="0"/>
+                                  </p:stCondLst>
+                                  <p:childTnLst>
+                                    <p:set>
+                                      <p:cBhvr>
+                                        <p:cTn id="60" dur="1" fill="hold">
+                                          <p:stCondLst>
+                                            <p:cond delay="0"/>
+                                          </p:stCondLst>
+                                        </p:cTn>
+                                        <p:tgtEl>
+                                          <p:spTgt spid="20"/>
+                                        </p:tgtEl>
+                                        <p:attrNameLst>
+                                          <p:attrName>style.visibility</p:attrName>
+                                        </p:attrNameLst>
+                                      </p:cBhvr>
+                                      <p:to>
+                                        <p:strVal val="visible"/>
+                                      </p:to>
+                                    </p:set>
+                                    <p:animEffect transition="in" filter="fade">
+                                      <p:cBhvr>
+                                        <p:cTn id="61" dur="500"/>
+                                        <p:tgtEl>
+                                          <p:spTgt spid="20"/>
+                                        </p:tgtEl>
+                                      </p:cBhvr>
+                                    </p:animEffect>
+                                  </p:childTnLst>
+                                </p:cTn>
+                              </p:par>
+                              <p:par>
+                                <p:cTn id="62" presetID="10" presetClass="entr" presetSubtype="0" fill="hold" grpId="0" nodeType="withEffect">
+                                  <p:stCondLst>
+                                    <p:cond delay="0"/>
+                                  </p:stCondLst>
+                                  <p:childTnLst>
+                                    <p:set>
+                                      <p:cBhvr>
+                                        <p:cTn id="63" dur="1" fill="hold">
+                                          <p:stCondLst>
+                                            <p:cond delay="0"/>
+                                          </p:stCondLst>
+                                        </p:cTn>
+                                        <p:tgtEl>
+                                          <p:spTgt spid="21"/>
+                                        </p:tgtEl>
+                                        <p:attrNameLst>
+                                          <p:attrName>style.visibility</p:attrName>
+                                        </p:attrNameLst>
+                                      </p:cBhvr>
+                                      <p:to>
+                                        <p:strVal val="visible"/>
+                                      </p:to>
+                                    </p:set>
+                                    <p:animEffect transition="in" filter="fade">
+                                      <p:cBhvr>
+                                        <p:cTn id="64" dur="500"/>
+                                        <p:tgtEl>
+                                          <p:spTgt spid="21"/>
+                                        </p:tgtEl>
+                                      </p:cBhvr>
+                                    </p:animEffect>
+                                  </p:childTnLst>
+                                </p:cTn>
+                              </p:par>
+                              <p:par>
+                                <p:cTn id="65" presetID="10" presetClass="entr" presetSubtype="0" fill="hold" grpId="0" nodeType="withEffect">
+                                  <p:stCondLst>
+                                    <p:cond delay="0"/>
+                                  </p:stCondLst>
+                                  <p:childTnLst>
+                                    <p:set>
+                                      <p:cBhvr>
+                                        <p:cTn id="66" dur="1" fill="hold">
+                                          <p:stCondLst>
+                                            <p:cond delay="0"/>
+                                          </p:stCondLst>
+                                        </p:cTn>
+                                        <p:tgtEl>
+                                          <p:spTgt spid="22"/>
+                                        </p:tgtEl>
+                                        <p:attrNameLst>
+                                          <p:attrName>style.visibility</p:attrName>
+                                        </p:attrNameLst>
+                                      </p:cBhvr>
+                                      <p:to>
+                                        <p:strVal val="visible"/>
+                                      </p:to>
+                                    </p:set>
+                                    <p:animEffect transition="in" filter="fade">
+                                      <p:cBhvr>
+                                        <p:cTn id="67" dur="500"/>
+                                        <p:tgtEl>
+                                          <p:spTgt spid="22"/>
+                                        </p:tgtEl>
+                                      </p:cBhvr>
+                                    </p:animEffect>
+                                  </p:childTnLst>
+                                </p:cTn>
+                              </p:par>
+                              <p:par>
+                                <p:cTn id="68" presetID="10" presetClass="entr" presetSubtype="0" fill="hold" grpId="0" nodeType="withEffect">
+                                  <p:stCondLst>
+                                    <p:cond delay="0"/>
+                                  </p:stCondLst>
+                                  <p:childTnLst>
+                                    <p:set>
+                                      <p:cBhvr>
+                                        <p:cTn id="69" dur="1" fill="hold">
+                                          <p:stCondLst>
+                                            <p:cond delay="0"/>
+                                          </p:stCondLst>
+                                        </p:cTn>
+                                        <p:tgtEl>
+                                          <p:spTgt spid="23"/>
+                                        </p:tgtEl>
+                                        <p:attrNameLst>
+                                          <p:attrName>style.visibility</p:attrName>
+                                        </p:attrNameLst>
+                                      </p:cBhvr>
+                                      <p:to>
+                                        <p:strVal val="visible"/>
+                                      </p:to>
+                                    </p:set>
+                                    <p:animEffect transition="in" filter="fade">
+                                      <p:cBhvr>
+                                        <p:cTn id="70" dur="500"/>
+                                        <p:tgtEl>
+                                          <p:spTgt spid="23"/>
+                                        </p:tgtEl>
+                                      </p:cBhvr>
+                                    </p:animEffect>
+                                  </p:childTnLst>
+                                </p:cTn>
+                              </p:par>
+                            </p:childTnLst>
+                          </p:cTn>
+                        </p:par>
+                      </p:childTnLst>
+                    </p:cTn>
+                  </p:par>
+                </p:childTnLst>
+              </p:cTn>
+              <p:prevCondLst>
+                <p:cond evt="onPrev" delay="0">
+                  <p:tgtEl>
+                    <p:sldTgt/>
+                  </p:tgtEl>
+                </p:cond>
+              </p:prevCondLst>
+              <p:nextCondLst>
+                <p:cond evt="onNext" delay="0">
+                  <p:tgtEl>
+                    <p:sldTgt/>
+                  </p:tgtEl>
+                </p:cond>
+              </p:nextCondLst>
+            </p:seq>
+          </p:childTnLst>
+        </p:cTn>
+      </p:par>
+    </p:tnLst>
+  </p:timing>
 </p:sld>
 </file>
 

--- a/PRESENTATION.pptx
+++ b/PRESENTATION.pptx
@@ -22,9 +22,10 @@
     <p:sldId id="270" r:id="rId16"/>
     <p:sldId id="271" r:id="rId17"/>
     <p:sldId id="272" r:id="rId18"/>
+    <p:sldId id="273" r:id="rId19"/>
   </p:sldIdLst>
   <p:notesMasterIdLst>
-    <p:notesMasterId r:id="rId19"/>
+    <p:notesMasterId r:id="rId20"/>
   </p:notesMasterIdLst>
   <p:sldSz cx="12191695" cy="6858000"/>
   <p:notesSz cx="6858000" cy="12191695"/>
@@ -870,7 +871,7 @@
           <a:p>
             <a:r>
               <a:rPr lang="en-US" dirty="0"/>
-              <a:t>Business value (2–3 min — speak to the VP of Strategy). 'Translate the tech into outcomes: 24/7 self-service across every channel and language; deflection of routine contacts (industry sees 60–80%); near-zero idle cost because it scales to zero; and one agent replacing three hand-offs. The growth levers: higher conversion &amp; basket size from natural discovery and see-it-shop-it; instant global reach without rebuilding per market; lower cost to serve; and brand-safe automation. I'm flagging the numbers as illustrative benchmarks — in a pilot we'd instrument the real deflection, conversion and CSAT.'</a:t>
+              <a:t>RSI (~2 min — the 'it gets better on its own' wow). 'Most agents are static. GOOPHER self-heals on two levels: the Guardian heals the infrastructure, and the CriticAgent heals the BEHAVIOUR. When an answer is poor, the shopper thumbs-down; the CriticAgent uses Gemini-as-judge to find the root cause and write a corrective lesson, stores it confidence-gated, and retrieves it via RAG to improve the next similar answer — no retraining, no redeploy. Live: reset lessons in /dev, ask 'do you have laptops?' (flat), thumbs-down, ask again — now it names real in-stock alternatives and asks a clarifying question, and /dev shows DETECT → JUDGE → LESSON. In production this is a Cloud Run Job every 15 minutes sourced from CCAI Insights, backed by Vertex AI Embeddings + Vector Search. It's isolated and additive — it never changes routing or checkout.'</a:t>
             </a:r>
             <a:endParaRPr lang="en-US" dirty="0"/>
           </a:p>
@@ -958,7 +959,7 @@
           <a:p>
             <a:r>
               <a:rPr lang="en-US" dirty="0"/>
-              <a:t>Why Google Cloud (90s — the CE angle). 'Every block of this design is a Google Cloud strength: Gemini on Vertex gives us one multimodal model under managed security and quota; ADK gives first-class multi-agent orchestration and tracing; Cloud Run is serverless and scales to zero; Firestore gives durable shared state; Cloud Trace makes it debuggable; and there's a clean path to CCAI and Vertex Translation. The prototype isn't bolted onto the cloud — it's native to it.'</a:t>
+              <a:t>Business value (2–3 min — speak to the VP of Strategy). 'Translate the tech into outcomes: 24/7 self-service across every channel and language; deflection of routine contacts (industry sees 60–80%); near-zero idle cost because it scales to zero; and one agent replacing three hand-offs. The growth levers: higher conversion &amp; basket size from natural discovery and see-it-shop-it; instant global reach without rebuilding per market; lower cost to serve; and brand-safe automation. I'm flagging the numbers as illustrative benchmarks — in a pilot we'd instrument the real deflection, conversion and CSAT.'</a:t>
             </a:r>
             <a:endParaRPr lang="en-US" dirty="0"/>
           </a:p>
@@ -1046,7 +1047,7 @@
           <a:p>
             <a:r>
               <a:rPr lang="en-US" dirty="0"/>
-              <a:t>Learnings (90s — shows reflection / seniority). 'Six takeaways I'd carry forward: ReAct is a paradigm, not a class — native function-calling is ReAct done better. Keep money off the model — LLM orchestrates, code transacts. Loop safety comes from the graph shape, not prompt wording. A model quirk that bites once will bite again, so encode the fix. Test the path production actually runs — a CI-sim of the ADK fallback caught what local tests couldn't. And centralize state by session_id while keeping agents stateless where you can. All of these are written up in LEARNINGS.md with the war stories behind them.'</a:t>
+              <a:t>Why Google Cloud (90s — the CE angle). 'Every block of this design is a Google Cloud strength: Gemini on Vertex gives us one multimodal model under managed security and quota; ADK gives first-class multi-agent orchestration and tracing; Cloud Run is serverless and scales to zero; Firestore gives durable shared state; Cloud Trace makes it debuggable; and there's a clean path to CCAI and Vertex Translation. The prototype isn't bolted onto the cloud — it's native to it.'</a:t>
             </a:r>
             <a:endParaRPr lang="en-US" dirty="0"/>
           </a:p>
@@ -1134,7 +1135,7 @@
           <a:p>
             <a:r>
               <a:rPr lang="en-US" dirty="0"/>
-              <a:t>Roadmap (90s). 'The prototype already solves the hard parts — the safety gate, shared context, and multimodal. So production is a low-risk ramp: Pilot adds real auth, Secret Manager, hardening, and instrumentation. Integrate connects live OMS/payments and CCAI telephony plus Vertex Translation. Scale is multi-region, evals in CI, and more sub-agents. Each phase is integration and hardening — not re-architecture.'</a:t>
+              <a:t>Learnings (90s — shows reflection / seniority). 'Six takeaways I'd carry forward: ReAct is a paradigm, not a class — native function-calling is ReAct done better. Keep money off the model — LLM orchestrates, code transacts. Loop safety comes from the graph shape, not prompt wording. A model quirk that bites once will bite again, so encode the fix. Test the path production actually runs — a CI-sim of the ADK fallback caught what local tests couldn't. And centralize state by session_id while keeping agents stateless where you can. All of these are written up in LEARNINGS.md with the war stories behind them.'</a:t>
             </a:r>
             <a:endParaRPr lang="en-US" dirty="0"/>
           </a:p>
@@ -1222,7 +1223,7 @@
           <a:p>
             <a:r>
               <a:rPr lang="en-US" dirty="0"/>
-              <a:t>Close + Q&amp;A (30s, then open the floor). 'To recap: one agent across every channel, language and modality; safe to transact because deterministic code does the transacting; and it heals itself. It directly unblocks the engagement and it's native to Google Cloud. I'd love your questions — and I can pull up the live extension or the /dev portal to answer any of them.' Keep QUESTION-ANSWER.md open for crisp answers + where-to-point.</a:t>
+              <a:t>Roadmap (90s). 'The prototype already solves the hard parts — the safety gate, shared context, and multimodal. So production is a low-risk ramp: Pilot adds real auth, Secret Manager, hardening, and instrumentation. Integrate connects live OMS/payments and CCAI telephony plus Vertex Translation. Scale is multi-region, evals in CI, and more sub-agents. Each phase is integration and hardening — not re-architecture.'</a:t>
             </a:r>
             <a:endParaRPr lang="en-US" dirty="0"/>
           </a:p>
@@ -1246,6 +1247,94 @@
             <a:fld id="{F7021451-1387-4CA6-816F-3879F97B5CBC}" type="slidenum">
               <a:rPr lang="en-US"/>
               <a:t>17</a:t>
+            </a:fld>
+            <a:endParaRPr lang="en-US"/>
+          </a:p>
+        </p:txBody>
+      </p:sp>
+    </p:spTree>
+    <p:extLst>
+      <p:ext uri="{BB962C8B-B14F-4D97-AF65-F5344CB8AC3E}">
+        <p14:creationId xmlns:p14="http://schemas.microsoft.com/office/powerpoint/2010/main" val="1024086991"/>
+      </p:ext>
+    </p:extLst>
+  </p:cSld>
+  <p:clrMapOvr>
+    <a:masterClrMapping/>
+  </p:clrMapOvr>
+</p:notes>
+</file>
+
+<file path=ppt/notesSlides/notesSlide18.xml><?xml version="1.0" encoding="utf-8"?>
+<p:notes xmlns:a="http://schemas.openxmlformats.org/drawingml/2006/main" xmlns:r="http://schemas.openxmlformats.org/officeDocument/2006/relationships" xmlns:p="http://schemas.openxmlformats.org/presentationml/2006/main">
+  <p:cSld>
+    <p:spTree>
+      <p:nvGrpSpPr>
+        <p:cNvPr id="1" name=""/>
+        <p:cNvGrpSpPr/>
+        <p:nvPr/>
+      </p:nvGrpSpPr>
+      <p:grpSpPr>
+        <a:xfrm>
+          <a:off x="0" y="0"/>
+          <a:ext cx="0" cy="0"/>
+          <a:chOff x="0" y="0"/>
+          <a:chExt cx="0" cy="0"/>
+        </a:xfrm>
+      </p:grpSpPr>
+      <p:sp>
+        <p:nvSpPr>
+          <p:cNvPr id="2" name="Slide Image Placeholder 1"/>
+          <p:cNvSpPr>
+            <a:spLocks noGrp="1" noRot="1" noChangeAspect="1"/>
+          </p:cNvSpPr>
+          <p:nvPr>
+            <p:ph type="sldImg"/>
+          </p:nvPr>
+        </p:nvSpPr>
+        <p:spPr/>
+      </p:sp>
+      <p:sp>
+        <p:nvSpPr>
+          <p:cNvPr id="3" name="Notes Placeholder 2"/>
+          <p:cNvSpPr>
+            <a:spLocks noGrp="1"/>
+          </p:cNvSpPr>
+          <p:nvPr>
+            <p:ph type="body" idx="1"/>
+          </p:nvPr>
+        </p:nvSpPr>
+        <p:spPr/>
+        <p:txBody>
+          <a:bodyPr/>
+          <a:lstStyle/>
+          <a:p>
+            <a:r>
+              <a:rPr lang="en-US" dirty="0"/>
+              <a:t>Close + Q&amp;A (30s, then open the floor). 'To recap: one agent across every channel, language and modality; safe to transact because deterministic code does the transacting; and it heals itself. It directly unblocks the engagement and it's native to Google Cloud. I'd love your questions — and I can pull up the live extension or the /dev portal to answer any of them.' Keep QUESTION-ANSWER.md open for crisp answers + where-to-point.</a:t>
+            </a:r>
+            <a:endParaRPr lang="en-US" dirty="0"/>
+          </a:p>
+        </p:txBody>
+      </p:sp>
+      <p:sp>
+        <p:nvSpPr>
+          <p:cNvPr id="4" name="Slide Number Placeholder 3"/>
+          <p:cNvSpPr>
+            <a:spLocks noGrp="1"/>
+          </p:cNvSpPr>
+          <p:nvPr>
+            <p:ph type="sldNum" sz="quarter" idx="10"/>
+          </p:nvPr>
+        </p:nvSpPr>
+        <p:spPr/>
+        <p:txBody>
+          <a:bodyPr/>
+          <a:lstStyle/>
+          <a:p>
+            <a:fld id="{F7021451-1387-4CA6-816F-3879F97B5CBC}" type="slidenum">
+              <a:rPr lang="en-US"/>
+              <a:t>18</a:t>
             </a:fld>
             <a:endParaRPr lang="en-US"/>
           </a:p>
@@ -10448,7 +10537,7 @@
                 <a:ea typeface="Calibri" pitchFamily="34" charset="-122"/>
                 <a:cs typeface="Calibri" pitchFamily="34" charset="-120"/>
               </a:rPr>
-              <a:t>BUSINESS &amp; STRATEGIC VALUE — FOR THE VP OF STRATEGY</a:t>
+              <a:t>SELF-IMPROVEMENT · THE NEXT LAYER OF SELF-HEALING</a:t>
             </a:r>
             <a:endParaRPr lang="en-US" sz="1200" dirty="0"/>
           </a:p>
@@ -10487,7 +10576,7 @@
                 <a:ea typeface="Georgia" pitchFamily="34" charset="-122"/>
                 <a:cs typeface="Georgia" pitchFamily="34" charset="-120"/>
               </a:rPr>
-              <a:t>From technical win to measurable business value</a:t>
+              <a:t>Recursive self-improvement — the agent learns from failure</a:t>
             </a:r>
             <a:endParaRPr lang="en-US" sz="2800" dirty="0"/>
           </a:p>
@@ -10495,18 +10584,85 @@
       </p:sp>
       <p:sp>
         <p:nvSpPr>
-          <p:cNvPr id="4" name="Shape 2"/>
-          <p:cNvSpPr/>
-          <p:nvPr/>
-        </p:nvSpPr>
-        <p:spPr>
-          <a:xfrm>
-            <a:off x="502920" y="1783080"/>
-            <a:ext cx="2615184" cy="1554480"/>
+          <p:cNvPr id="4" name="Text 2"/>
+          <p:cNvSpPr/>
+          <p:nvPr/>
+        </p:nvSpPr>
+        <p:spPr>
+          <a:xfrm>
+            <a:off x="502920" y="1591056"/>
+            <a:ext cx="11185855" cy="411480"/>
+          </a:xfrm>
+          <a:prstGeom prst="rect">
+            <a:avLst/>
+          </a:prstGeom>
+          <a:noFill/>
+          <a:ln/>
+        </p:spPr>
+        <p:txBody>
+          <a:bodyPr wrap="square" lIns="0" tIns="0" rIns="0" bIns="0" rtlCol="0" anchor="ctr"/>
+          <a:lstStyle/>
+          <a:p>
+            <a:pPr indent="0" marL="0">
+              <a:buNone/>
+            </a:pPr>
+            <a:r>
+              <a:rPr lang="en-US" sz="1350" dirty="0">
+                <a:solidFill>
+                  <a:srgbClr val="5B6577"/>
+                </a:solidFill>
+                <a:latin typeface="Calibri" pitchFamily="34" charset="0"/>
+                <a:ea typeface="Calibri" pitchFamily="34" charset="-122"/>
+                <a:cs typeface="Calibri" pitchFamily="34" charset="-120"/>
+              </a:rPr>
+              <a:t>Guardian heals the infrastructure. </a:t>
+            </a:r>
+            <a:pPr indent="0" marL="0">
+              <a:buNone/>
+            </a:pPr>
+            <a:r>
+              <a:rPr lang="en-US" sz="1350" b="1" dirty="0">
+                <a:solidFill>
+                  <a:srgbClr val="0F172A"/>
+                </a:solidFill>
+                <a:latin typeface="Calibri" pitchFamily="34" charset="0"/>
+                <a:ea typeface="Calibri" pitchFamily="34" charset="-122"/>
+                <a:cs typeface="Calibri" pitchFamily="34" charset="-120"/>
+              </a:rPr>
+              <a:t>The CriticAgent heals the behaviour</a:t>
+            </a:r>
+            <a:pPr indent="0" marL="0">
+              <a:buNone/>
+            </a:pPr>
+            <a:r>
+              <a:rPr lang="en-US" sz="1350" dirty="0">
+                <a:solidFill>
+                  <a:srgbClr val="5B6577"/>
+                </a:solidFill>
+                <a:latin typeface="Calibri" pitchFamily="34" charset="0"/>
+                <a:ea typeface="Calibri" pitchFamily="34" charset="-122"/>
+                <a:cs typeface="Calibri" pitchFamily="34" charset="-120"/>
+              </a:rPr>
+              <a:t> — a closed learning loop, no retraining, no redeploy.</a:t>
+            </a:r>
+            <a:endParaRPr lang="en-US" sz="1350" dirty="0"/>
+          </a:p>
+        </p:txBody>
+      </p:sp>
+      <p:sp>
+        <p:nvSpPr>
+          <p:cNvPr id="5" name="Shape 3"/>
+          <p:cNvSpPr/>
+          <p:nvPr/>
+        </p:nvSpPr>
+        <p:spPr>
+          <a:xfrm>
+            <a:off x="502920" y="2240280"/>
+            <a:ext cx="2017715" cy="2331720"/>
           </a:xfrm>
           <a:prstGeom prst="roundRect">
             <a:avLst>
-              <a:gd name="adj" fmla="val 5294"/>
+              <a:gd name="adj" fmla="val 4079"/>
             </a:avLst>
           </a:prstGeom>
           <a:solidFill>
@@ -10529,14 +10685,78 @@
       </p:sp>
       <p:sp>
         <p:nvSpPr>
-          <p:cNvPr id="5" name="Text 3"/>
-          <p:cNvSpPr/>
-          <p:nvPr/>
-        </p:nvSpPr>
-        <p:spPr>
-          <a:xfrm>
-            <a:off x="594360" y="1965960"/>
-            <a:ext cx="2432304" cy="777240"/>
+          <p:cNvPr id="6" name="Shape 4"/>
+          <p:cNvSpPr/>
+          <p:nvPr/>
+        </p:nvSpPr>
+        <p:spPr>
+          <a:xfrm>
+            <a:off x="502920" y="2240280"/>
+            <a:ext cx="2017715" cy="109728"/>
+          </a:xfrm>
+          <a:prstGeom prst="rect">
+            <a:avLst/>
+          </a:prstGeom>
+          <a:solidFill>
+            <a:srgbClr val="E11D48"/>
+          </a:solidFill>
+          <a:ln/>
+        </p:spPr>
+      </p:sp>
+      <p:sp>
+        <p:nvSpPr>
+          <p:cNvPr id="7" name="Shape 5"/>
+          <p:cNvSpPr/>
+          <p:nvPr/>
+        </p:nvSpPr>
+        <p:spPr>
+          <a:xfrm>
+            <a:off x="1283178" y="2551176"/>
+            <a:ext cx="457200" cy="457200"/>
+          </a:xfrm>
+          <a:prstGeom prst="ellipse">
+            <a:avLst/>
+          </a:prstGeom>
+          <a:solidFill>
+            <a:srgbClr val="E11D48"/>
+          </a:solidFill>
+          <a:ln/>
+        </p:spPr>
+      </p:sp>
+      <p:pic>
+        <p:nvPicPr>
+          <p:cNvPr id="8" name="Image 0" descr="icons/ban.png">    </p:cNvPr>
+          <p:cNvPicPr>
+            <a:picLocks noChangeAspect="1"/>
+          </p:cNvPicPr>
+          <p:nvPr/>
+        </p:nvPicPr>
+        <p:blipFill>
+          <a:blip r:embed="rId1"/>
+          <a:stretch>
+            <a:fillRect/>
+          </a:stretch>
+        </p:blipFill>
+        <p:spPr>
+          <a:xfrm>
+            <a:off x="1392906" y="2660904"/>
+            <a:ext cx="237744" cy="237744"/>
+          </a:xfrm>
+          <a:prstGeom prst="rect">
+            <a:avLst/>
+          </a:prstGeom>
+        </p:spPr>
+      </p:pic>
+      <p:sp>
+        <p:nvSpPr>
+          <p:cNvPr id="9" name="Text 6"/>
+          <p:cNvSpPr/>
+          <p:nvPr/>
+        </p:nvSpPr>
+        <p:spPr>
+          <a:xfrm>
+            <a:off x="612648" y="3118104"/>
+            <a:ext cx="1798259" cy="310896"/>
           </a:xfrm>
           <a:prstGeom prst="rect">
             <a:avLst/>
@@ -10552,30 +10772,30 @@
               <a:buNone/>
             </a:pPr>
             <a:r>
-              <a:rPr lang="en-US" sz="4000" b="1" dirty="0">
-                <a:solidFill>
-                  <a:srgbClr val="7C3AED"/>
-                </a:solidFill>
-                <a:latin typeface="Georgia" pitchFamily="34" charset="0"/>
-                <a:ea typeface="Georgia" pitchFamily="34" charset="-122"/>
-                <a:cs typeface="Georgia" pitchFamily="34" charset="-120"/>
-              </a:rPr>
-              <a:t>24/7</a:t>
-            </a:r>
-            <a:endParaRPr lang="en-US" sz="4000" dirty="0"/>
-          </a:p>
-        </p:txBody>
-      </p:sp>
-      <p:sp>
-        <p:nvSpPr>
-          <p:cNvPr id="6" name="Text 4"/>
-          <p:cNvSpPr/>
-          <p:nvPr/>
-        </p:nvSpPr>
-        <p:spPr>
-          <a:xfrm>
-            <a:off x="667512" y="2734056"/>
-            <a:ext cx="2286000" cy="548640"/>
+              <a:rPr lang="en-US" sz="1400" b="1" dirty="0">
+                <a:solidFill>
+                  <a:srgbClr val="0F172A"/>
+                </a:solidFill>
+                <a:latin typeface="Calibri" pitchFamily="34" charset="0"/>
+                <a:ea typeface="Calibri" pitchFamily="34" charset="-122"/>
+                <a:cs typeface="Calibri" pitchFamily="34" charset="-120"/>
+              </a:rPr>
+              <a:t>1. DETECT</a:t>
+            </a:r>
+            <a:endParaRPr lang="en-US" sz="1400" dirty="0"/>
+          </a:p>
+        </p:txBody>
+      </p:sp>
+      <p:sp>
+        <p:nvSpPr>
+          <p:cNvPr id="10" name="Text 7"/>
+          <p:cNvSpPr/>
+          <p:nvPr/>
+        </p:nvSpPr>
+        <p:spPr>
+          <a:xfrm>
+            <a:off x="649224" y="3447288"/>
+            <a:ext cx="1725107" cy="731520"/>
           </a:xfrm>
           <a:prstGeom prst="rect">
             <a:avLst/>
@@ -10591,7 +10811,7 @@
               <a:buNone/>
             </a:pPr>
             <a:r>
-              <a:rPr lang="en-US" sz="1150" dirty="0">
+              <a:rPr lang="en-US" sz="1100" dirty="0">
                 <a:solidFill>
                   <a:srgbClr val="5B6577"/>
                 </a:solidFill>
@@ -10599,26 +10819,89 @@
                 <a:ea typeface="Calibri" pitchFamily="34" charset="-122"/>
                 <a:cs typeface="Calibri" pitchFamily="34" charset="-120"/>
               </a:rPr>
-              <a:t>Self-service order mgmt &amp; support — every channel, every language</a:t>
-            </a:r>
-            <a:endParaRPr lang="en-US" sz="1150" dirty="0"/>
-          </a:p>
-        </p:txBody>
-      </p:sp>
-      <p:sp>
-        <p:nvSpPr>
-          <p:cNvPr id="7" name="Shape 5"/>
-          <p:cNvSpPr/>
-          <p:nvPr/>
-        </p:nvSpPr>
-        <p:spPr>
-          <a:xfrm>
-            <a:off x="3300984" y="1783080"/>
-            <a:ext cx="2615184" cy="1554480"/>
+              <a:t>👎 low-CSAT conversation</a:t>
+            </a:r>
+            <a:endParaRPr lang="en-US" sz="1100" dirty="0"/>
+          </a:p>
+        </p:txBody>
+      </p:sp>
+      <p:sp>
+        <p:nvSpPr>
+          <p:cNvPr id="11" name="Text 8"/>
+          <p:cNvSpPr/>
+          <p:nvPr/>
+        </p:nvSpPr>
+        <p:spPr>
+          <a:xfrm>
+            <a:off x="612648" y="4114800"/>
+            <a:ext cx="1798259" cy="365760"/>
+          </a:xfrm>
+          <a:prstGeom prst="rect">
+            <a:avLst/>
+          </a:prstGeom>
+          <a:noFill/>
+          <a:ln/>
+        </p:spPr>
+        <p:txBody>
+          <a:bodyPr wrap="square" lIns="0" tIns="0" rIns="0" bIns="0" rtlCol="0" anchor="t"/>
+          <a:lstStyle/>
+          <a:p>
+            <a:pPr algn="ctr" indent="0" marL="0">
+              <a:buNone/>
+            </a:pPr>
+            <a:r>
+              <a:rPr lang="en-US" sz="950" i="1" dirty="0">
+                <a:solidFill>
+                  <a:srgbClr val="E11D48"/>
+                </a:solidFill>
+                <a:latin typeface="Calibri" pitchFamily="34" charset="0"/>
+                <a:ea typeface="Calibri" pitchFamily="34" charset="-122"/>
+                <a:cs typeface="Calibri" pitchFamily="34" charset="-120"/>
+              </a:rPr>
+              <a:t>CCAI Insights</a:t>
+            </a:r>
+            <a:endParaRPr lang="en-US" sz="950" dirty="0"/>
+          </a:p>
+        </p:txBody>
+      </p:sp>
+      <p:pic>
+        <p:nvPicPr>
+          <p:cNvPr id="12" name="Image 1" descr="icons/arrow.png">    </p:cNvPr>
+          <p:cNvPicPr>
+            <a:picLocks noChangeAspect="1"/>
+          </p:cNvPicPr>
+          <p:nvPr/>
+        </p:nvPicPr>
+        <p:blipFill>
+          <a:blip r:embed="rId2"/>
+          <a:stretch>
+            <a:fillRect/>
+          </a:stretch>
+        </p:blipFill>
+        <p:spPr>
+          <a:xfrm>
+            <a:off x="2538923" y="2697480"/>
+            <a:ext cx="237744" cy="237744"/>
+          </a:xfrm>
+          <a:prstGeom prst="rect">
+            <a:avLst/>
+          </a:prstGeom>
+        </p:spPr>
+      </p:pic>
+      <p:sp>
+        <p:nvSpPr>
+          <p:cNvPr id="13" name="Shape 9"/>
+          <p:cNvSpPr/>
+          <p:nvPr/>
+        </p:nvSpPr>
+        <p:spPr>
+          <a:xfrm>
+            <a:off x="2794955" y="2240280"/>
+            <a:ext cx="2017715" cy="2331720"/>
           </a:xfrm>
           <a:prstGeom prst="roundRect">
             <a:avLst>
-              <a:gd name="adj" fmla="val 5294"/>
+              <a:gd name="adj" fmla="val 4079"/>
             </a:avLst>
           </a:prstGeom>
           <a:solidFill>
@@ -10641,14 +10924,78 @@
       </p:sp>
       <p:sp>
         <p:nvSpPr>
-          <p:cNvPr id="8" name="Text 6"/>
-          <p:cNvSpPr/>
-          <p:nvPr/>
-        </p:nvSpPr>
-        <p:spPr>
-          <a:xfrm>
-            <a:off x="3392424" y="1965960"/>
-            <a:ext cx="2432304" cy="777240"/>
+          <p:cNvPr id="14" name="Shape 10"/>
+          <p:cNvSpPr/>
+          <p:nvPr/>
+        </p:nvSpPr>
+        <p:spPr>
+          <a:xfrm>
+            <a:off x="2794955" y="2240280"/>
+            <a:ext cx="2017715" cy="109728"/>
+          </a:xfrm>
+          <a:prstGeom prst="rect">
+            <a:avLst/>
+          </a:prstGeom>
+          <a:solidFill>
+            <a:srgbClr val="7C3AED"/>
+          </a:solidFill>
+          <a:ln/>
+        </p:spPr>
+      </p:sp>
+      <p:sp>
+        <p:nvSpPr>
+          <p:cNvPr id="15" name="Shape 11"/>
+          <p:cNvSpPr/>
+          <p:nvPr/>
+        </p:nvSpPr>
+        <p:spPr>
+          <a:xfrm>
+            <a:off x="3575213" y="2551176"/>
+            <a:ext cx="457200" cy="457200"/>
+          </a:xfrm>
+          <a:prstGeom prst="ellipse">
+            <a:avLst/>
+          </a:prstGeom>
+          <a:solidFill>
+            <a:srgbClr val="7C3AED"/>
+          </a:solidFill>
+          <a:ln/>
+        </p:spPr>
+      </p:sp>
+      <p:pic>
+        <p:nvPicPr>
+          <p:cNvPr id="16" name="Image 2" descr="icons/brain.png">    </p:cNvPr>
+          <p:cNvPicPr>
+            <a:picLocks noChangeAspect="1"/>
+          </p:cNvPicPr>
+          <p:nvPr/>
+        </p:nvPicPr>
+        <p:blipFill>
+          <a:blip r:embed="rId3"/>
+          <a:stretch>
+            <a:fillRect/>
+          </a:stretch>
+        </p:blipFill>
+        <p:spPr>
+          <a:xfrm>
+            <a:off x="3684941" y="2660904"/>
+            <a:ext cx="237744" cy="237744"/>
+          </a:xfrm>
+          <a:prstGeom prst="rect">
+            <a:avLst/>
+          </a:prstGeom>
+        </p:spPr>
+      </p:pic>
+      <p:sp>
+        <p:nvSpPr>
+          <p:cNvPr id="17" name="Text 12"/>
+          <p:cNvSpPr/>
+          <p:nvPr/>
+        </p:nvSpPr>
+        <p:spPr>
+          <a:xfrm>
+            <a:off x="2904683" y="3118104"/>
+            <a:ext cx="1798259" cy="310896"/>
           </a:xfrm>
           <a:prstGeom prst="rect">
             <a:avLst/>
@@ -10664,30 +11011,30 @@
               <a:buNone/>
             </a:pPr>
             <a:r>
-              <a:rPr lang="en-US" sz="4000" b="1" dirty="0">
-                <a:solidFill>
-                  <a:srgbClr val="0D9488"/>
-                </a:solidFill>
-                <a:latin typeface="Georgia" pitchFamily="34" charset="0"/>
-                <a:ea typeface="Georgia" pitchFamily="34" charset="-122"/>
-                <a:cs typeface="Georgia" pitchFamily="34" charset="-120"/>
-              </a:rPr>
-              <a:t>60–80%</a:t>
-            </a:r>
-            <a:endParaRPr lang="en-US" sz="4000" dirty="0"/>
-          </a:p>
-        </p:txBody>
-      </p:sp>
-      <p:sp>
-        <p:nvSpPr>
-          <p:cNvPr id="9" name="Text 7"/>
-          <p:cNvSpPr/>
-          <p:nvPr/>
-        </p:nvSpPr>
-        <p:spPr>
-          <a:xfrm>
-            <a:off x="3465576" y="2734056"/>
-            <a:ext cx="2286000" cy="548640"/>
+              <a:rPr lang="en-US" sz="1400" b="1" dirty="0">
+                <a:solidFill>
+                  <a:srgbClr val="0F172A"/>
+                </a:solidFill>
+                <a:latin typeface="Calibri" pitchFamily="34" charset="0"/>
+                <a:ea typeface="Calibri" pitchFamily="34" charset="-122"/>
+                <a:cs typeface="Calibri" pitchFamily="34" charset="-120"/>
+              </a:rPr>
+              <a:t>2. JUDGE</a:t>
+            </a:r>
+            <a:endParaRPr lang="en-US" sz="1400" dirty="0"/>
+          </a:p>
+        </p:txBody>
+      </p:sp>
+      <p:sp>
+        <p:nvSpPr>
+          <p:cNvPr id="18" name="Text 13"/>
+          <p:cNvSpPr/>
+          <p:nvPr/>
+        </p:nvSpPr>
+        <p:spPr>
+          <a:xfrm>
+            <a:off x="2941259" y="3447288"/>
+            <a:ext cx="1725107" cy="731520"/>
           </a:xfrm>
           <a:prstGeom prst="rect">
             <a:avLst/>
@@ -10703,7 +11050,7 @@
               <a:buNone/>
             </a:pPr>
             <a:r>
-              <a:rPr lang="en-US" sz="1150" dirty="0">
+              <a:rPr lang="en-US" sz="1100" dirty="0">
                 <a:solidFill>
                   <a:srgbClr val="5B6577"/>
                 </a:solidFill>
@@ -10711,26 +11058,89 @@
                 <a:ea typeface="Calibri" pitchFamily="34" charset="-122"/>
                 <a:cs typeface="Calibri" pitchFamily="34" charset="-120"/>
               </a:rPr>
-              <a:t>Typical self-service deflection of routine contacts (industry benchmark)</a:t>
-            </a:r>
-            <a:endParaRPr lang="en-US" sz="1150" dirty="0"/>
-          </a:p>
-        </p:txBody>
-      </p:sp>
-      <p:sp>
-        <p:nvSpPr>
-          <p:cNvPr id="10" name="Shape 8"/>
-          <p:cNvSpPr/>
-          <p:nvPr/>
-        </p:nvSpPr>
-        <p:spPr>
-          <a:xfrm>
-            <a:off x="6099048" y="1783080"/>
-            <a:ext cx="2615184" cy="1554480"/>
+              <a:t>Gemini-as-judge: root cause + corrective lesson</a:t>
+            </a:r>
+            <a:endParaRPr lang="en-US" sz="1100" dirty="0"/>
+          </a:p>
+        </p:txBody>
+      </p:sp>
+      <p:sp>
+        <p:nvSpPr>
+          <p:cNvPr id="19" name="Text 14"/>
+          <p:cNvSpPr/>
+          <p:nvPr/>
+        </p:nvSpPr>
+        <p:spPr>
+          <a:xfrm>
+            <a:off x="2904683" y="4114800"/>
+            <a:ext cx="1798259" cy="365760"/>
+          </a:xfrm>
+          <a:prstGeom prst="rect">
+            <a:avLst/>
+          </a:prstGeom>
+          <a:noFill/>
+          <a:ln/>
+        </p:spPr>
+        <p:txBody>
+          <a:bodyPr wrap="square" lIns="0" tIns="0" rIns="0" bIns="0" rtlCol="0" anchor="t"/>
+          <a:lstStyle/>
+          <a:p>
+            <a:pPr algn="ctr" indent="0" marL="0">
+              <a:buNone/>
+            </a:pPr>
+            <a:r>
+              <a:rPr lang="en-US" sz="950" i="1" dirty="0">
+                <a:solidFill>
+                  <a:srgbClr val="7C3AED"/>
+                </a:solidFill>
+                <a:latin typeface="Calibri" pitchFamily="34" charset="0"/>
+                <a:ea typeface="Calibri" pitchFamily="34" charset="-122"/>
+                <a:cs typeface="Calibri" pitchFamily="34" charset="-120"/>
+              </a:rPr>
+              <a:t>Gemini 2.5 · Vertex</a:t>
+            </a:r>
+            <a:endParaRPr lang="en-US" sz="950" dirty="0"/>
+          </a:p>
+        </p:txBody>
+      </p:sp>
+      <p:pic>
+        <p:nvPicPr>
+          <p:cNvPr id="20" name="Image 3" descr="icons/arrow.png">    </p:cNvPr>
+          <p:cNvPicPr>
+            <a:picLocks noChangeAspect="1"/>
+          </p:cNvPicPr>
+          <p:nvPr/>
+        </p:nvPicPr>
+        <p:blipFill>
+          <a:blip r:embed="rId4"/>
+          <a:stretch>
+            <a:fillRect/>
+          </a:stretch>
+        </p:blipFill>
+        <p:spPr>
+          <a:xfrm>
+            <a:off x="4830958" y="2697480"/>
+            <a:ext cx="237744" cy="237744"/>
+          </a:xfrm>
+          <a:prstGeom prst="rect">
+            <a:avLst/>
+          </a:prstGeom>
+        </p:spPr>
+      </p:pic>
+      <p:sp>
+        <p:nvSpPr>
+          <p:cNvPr id="21" name="Shape 15"/>
+          <p:cNvSpPr/>
+          <p:nvPr/>
+        </p:nvSpPr>
+        <p:spPr>
+          <a:xfrm>
+            <a:off x="5086990" y="2240280"/>
+            <a:ext cx="2017715" cy="2331720"/>
           </a:xfrm>
           <a:prstGeom prst="roundRect">
             <a:avLst>
-              <a:gd name="adj" fmla="val 5294"/>
+              <a:gd name="adj" fmla="val 4079"/>
             </a:avLst>
           </a:prstGeom>
           <a:solidFill>
@@ -10753,14 +11163,78 @@
       </p:sp>
       <p:sp>
         <p:nvSpPr>
-          <p:cNvPr id="11" name="Text 9"/>
-          <p:cNvSpPr/>
-          <p:nvPr/>
-        </p:nvSpPr>
-        <p:spPr>
-          <a:xfrm>
-            <a:off x="6190488" y="1965960"/>
-            <a:ext cx="2432304" cy="777240"/>
+          <p:cNvPr id="22" name="Shape 16"/>
+          <p:cNvSpPr/>
+          <p:nvPr/>
+        </p:nvSpPr>
+        <p:spPr>
+          <a:xfrm>
+            <a:off x="5086990" y="2240280"/>
+            <a:ext cx="2017715" cy="109728"/>
+          </a:xfrm>
+          <a:prstGeom prst="rect">
+            <a:avLst/>
+          </a:prstGeom>
+          <a:solidFill>
+            <a:srgbClr val="0D9488"/>
+          </a:solidFill>
+          <a:ln/>
+        </p:spPr>
+      </p:sp>
+      <p:sp>
+        <p:nvSpPr>
+          <p:cNvPr id="23" name="Shape 17"/>
+          <p:cNvSpPr/>
+          <p:nvPr/>
+        </p:nvSpPr>
+        <p:spPr>
+          <a:xfrm>
+            <a:off x="5867248" y="2551176"/>
+            <a:ext cx="457200" cy="457200"/>
+          </a:xfrm>
+          <a:prstGeom prst="ellipse">
+            <a:avLst/>
+          </a:prstGeom>
+          <a:solidFill>
+            <a:srgbClr val="0D9488"/>
+          </a:solidFill>
+          <a:ln/>
+        </p:spPr>
+      </p:sp>
+      <p:pic>
+        <p:nvPicPr>
+          <p:cNvPr id="24" name="Image 4" descr="icons/db.png">    </p:cNvPr>
+          <p:cNvPicPr>
+            <a:picLocks noChangeAspect="1"/>
+          </p:cNvPicPr>
+          <p:nvPr/>
+        </p:nvPicPr>
+        <p:blipFill>
+          <a:blip r:embed="rId5"/>
+          <a:stretch>
+            <a:fillRect/>
+          </a:stretch>
+        </p:blipFill>
+        <p:spPr>
+          <a:xfrm>
+            <a:off x="5976976" y="2660904"/>
+            <a:ext cx="237744" cy="237744"/>
+          </a:xfrm>
+          <a:prstGeom prst="rect">
+            <a:avLst/>
+          </a:prstGeom>
+        </p:spPr>
+      </p:pic>
+      <p:sp>
+        <p:nvSpPr>
+          <p:cNvPr id="25" name="Text 18"/>
+          <p:cNvSpPr/>
+          <p:nvPr/>
+        </p:nvSpPr>
+        <p:spPr>
+          <a:xfrm>
+            <a:off x="5196718" y="3118104"/>
+            <a:ext cx="1798259" cy="310896"/>
           </a:xfrm>
           <a:prstGeom prst="rect">
             <a:avLst/>
@@ -10776,30 +11250,30 @@
               <a:buNone/>
             </a:pPr>
             <a:r>
-              <a:rPr lang="en-US" sz="4000" b="1" dirty="0">
-                <a:solidFill>
-                  <a:srgbClr val="F59E0B"/>
-                </a:solidFill>
-                <a:latin typeface="Georgia" pitchFamily="34" charset="0"/>
-                <a:ea typeface="Georgia" pitchFamily="34" charset="-122"/>
-                <a:cs typeface="Georgia" pitchFamily="34" charset="-120"/>
-              </a:rPr>
-              <a:t>~$0</a:t>
-            </a:r>
-            <a:endParaRPr lang="en-US" sz="4000" dirty="0"/>
-          </a:p>
-        </p:txBody>
-      </p:sp>
-      <p:sp>
-        <p:nvSpPr>
-          <p:cNvPr id="12" name="Text 10"/>
-          <p:cNvSpPr/>
-          <p:nvPr/>
-        </p:nvSpPr>
-        <p:spPr>
-          <a:xfrm>
-            <a:off x="6263640" y="2734056"/>
-            <a:ext cx="2286000" cy="548640"/>
+              <a:rPr lang="en-US" sz="1400" b="1" dirty="0">
+                <a:solidFill>
+                  <a:srgbClr val="0F172A"/>
+                </a:solidFill>
+                <a:latin typeface="Calibri" pitchFamily="34" charset="0"/>
+                <a:ea typeface="Calibri" pitchFamily="34" charset="-122"/>
+                <a:cs typeface="Calibri" pitchFamily="34" charset="-120"/>
+              </a:rPr>
+              <a:t>3. STORE</a:t>
+            </a:r>
+            <a:endParaRPr lang="en-US" sz="1400" dirty="0"/>
+          </a:p>
+        </p:txBody>
+      </p:sp>
+      <p:sp>
+        <p:nvSpPr>
+          <p:cNvPr id="26" name="Text 19"/>
+          <p:cNvSpPr/>
+          <p:nvPr/>
+        </p:nvSpPr>
+        <p:spPr>
+          <a:xfrm>
+            <a:off x="5233294" y="3447288"/>
+            <a:ext cx="1725107" cy="731520"/>
           </a:xfrm>
           <a:prstGeom prst="rect">
             <a:avLst/>
@@ -10815,7 +11289,7 @@
               <a:buNone/>
             </a:pPr>
             <a:r>
-              <a:rPr lang="en-US" sz="1150" dirty="0">
+              <a:rPr lang="en-US" sz="1100" dirty="0">
                 <a:solidFill>
                   <a:srgbClr val="5B6577"/>
                 </a:solidFill>
@@ -10823,26 +11297,89 @@
                 <a:ea typeface="Calibri" pitchFamily="34" charset="-122"/>
                 <a:cs typeface="Calibri" pitchFamily="34" charset="-120"/>
               </a:rPr>
-              <a:t>Idle cost — Cloud Run scales to zero between conversations</a:t>
-            </a:r>
-            <a:endParaRPr lang="en-US" sz="1150" dirty="0"/>
-          </a:p>
-        </p:txBody>
-      </p:sp>
-      <p:sp>
-        <p:nvSpPr>
-          <p:cNvPr id="13" name="Shape 11"/>
-          <p:cNvSpPr/>
-          <p:nvPr/>
-        </p:nvSpPr>
-        <p:spPr>
-          <a:xfrm>
-            <a:off x="8897112" y="1783080"/>
-            <a:ext cx="2791663" cy="1554480"/>
+              <a:t>confidence-gated lesson (≥ 0.70)</a:t>
+            </a:r>
+            <a:endParaRPr lang="en-US" sz="1100" dirty="0"/>
+          </a:p>
+        </p:txBody>
+      </p:sp>
+      <p:sp>
+        <p:nvSpPr>
+          <p:cNvPr id="27" name="Text 20"/>
+          <p:cNvSpPr/>
+          <p:nvPr/>
+        </p:nvSpPr>
+        <p:spPr>
+          <a:xfrm>
+            <a:off x="5196718" y="4114800"/>
+            <a:ext cx="1798259" cy="365760"/>
+          </a:xfrm>
+          <a:prstGeom prst="rect">
+            <a:avLst/>
+          </a:prstGeom>
+          <a:noFill/>
+          <a:ln/>
+        </p:spPr>
+        <p:txBody>
+          <a:bodyPr wrap="square" lIns="0" tIns="0" rIns="0" bIns="0" rtlCol="0" anchor="t"/>
+          <a:lstStyle/>
+          <a:p>
+            <a:pPr algn="ctr" indent="0" marL="0">
+              <a:buNone/>
+            </a:pPr>
+            <a:r>
+              <a:rPr lang="en-US" sz="950" i="1" dirty="0">
+                <a:solidFill>
+                  <a:srgbClr val="0D9488"/>
+                </a:solidFill>
+                <a:latin typeface="Calibri" pitchFamily="34" charset="0"/>
+                <a:ea typeface="Calibri" pitchFamily="34" charset="-122"/>
+                <a:cs typeface="Calibri" pitchFamily="34" charset="-120"/>
+              </a:rPr>
+              <a:t>Vertex Vector Search + AlloyDB</a:t>
+            </a:r>
+            <a:endParaRPr lang="en-US" sz="950" dirty="0"/>
+          </a:p>
+        </p:txBody>
+      </p:sp>
+      <p:pic>
+        <p:nvPicPr>
+          <p:cNvPr id="28" name="Image 5" descr="icons/arrow.png">    </p:cNvPr>
+          <p:cNvPicPr>
+            <a:picLocks noChangeAspect="1"/>
+          </p:cNvPicPr>
+          <p:nvPr/>
+        </p:nvPicPr>
+        <p:blipFill>
+          <a:blip r:embed="rId6"/>
+          <a:stretch>
+            <a:fillRect/>
+          </a:stretch>
+        </p:blipFill>
+        <p:spPr>
+          <a:xfrm>
+            <a:off x="7122993" y="2697480"/>
+            <a:ext cx="237744" cy="237744"/>
+          </a:xfrm>
+          <a:prstGeom prst="rect">
+            <a:avLst/>
+          </a:prstGeom>
+        </p:spPr>
+      </p:pic>
+      <p:sp>
+        <p:nvSpPr>
+          <p:cNvPr id="29" name="Shape 21"/>
+          <p:cNvSpPr/>
+          <p:nvPr/>
+        </p:nvSpPr>
+        <p:spPr>
+          <a:xfrm>
+            <a:off x="7379025" y="2240280"/>
+            <a:ext cx="2017715" cy="2331720"/>
           </a:xfrm>
           <a:prstGeom prst="roundRect">
             <a:avLst>
-              <a:gd name="adj" fmla="val 5294"/>
+              <a:gd name="adj" fmla="val 4079"/>
             </a:avLst>
           </a:prstGeom>
           <a:solidFill>
@@ -10865,14 +11402,78 @@
       </p:sp>
       <p:sp>
         <p:nvSpPr>
-          <p:cNvPr id="14" name="Text 12"/>
-          <p:cNvSpPr/>
-          <p:nvPr/>
-        </p:nvSpPr>
-        <p:spPr>
-          <a:xfrm>
-            <a:off x="8988552" y="1965960"/>
-            <a:ext cx="2608783" cy="777240"/>
+          <p:cNvPr id="30" name="Shape 22"/>
+          <p:cNvSpPr/>
+          <p:nvPr/>
+        </p:nvSpPr>
+        <p:spPr>
+          <a:xfrm>
+            <a:off x="7379025" y="2240280"/>
+            <a:ext cx="2017715" cy="109728"/>
+          </a:xfrm>
+          <a:prstGeom prst="rect">
+            <a:avLst/>
+          </a:prstGeom>
+          <a:solidFill>
+            <a:srgbClr val="F59E0B"/>
+          </a:solidFill>
+          <a:ln/>
+        </p:spPr>
+      </p:sp>
+      <p:sp>
+        <p:nvSpPr>
+          <p:cNvPr id="31" name="Shape 23"/>
+          <p:cNvSpPr/>
+          <p:nvPr/>
+        </p:nvSpPr>
+        <p:spPr>
+          <a:xfrm>
+            <a:off x="8159283" y="2551176"/>
+            <a:ext cx="457200" cy="457200"/>
+          </a:xfrm>
+          <a:prstGeom prst="ellipse">
+            <a:avLst/>
+          </a:prstGeom>
+          <a:solidFill>
+            <a:srgbClr val="F59E0B"/>
+          </a:solidFill>
+          <a:ln/>
+        </p:spPr>
+      </p:sp>
+      <p:pic>
+        <p:nvPicPr>
+          <p:cNvPr id="32" name="Image 6" descr="icons/eye.png">    </p:cNvPr>
+          <p:cNvPicPr>
+            <a:picLocks noChangeAspect="1"/>
+          </p:cNvPicPr>
+          <p:nvPr/>
+        </p:nvPicPr>
+        <p:blipFill>
+          <a:blip r:embed="rId7"/>
+          <a:stretch>
+            <a:fillRect/>
+          </a:stretch>
+        </p:blipFill>
+        <p:spPr>
+          <a:xfrm>
+            <a:off x="8269011" y="2660904"/>
+            <a:ext cx="237744" cy="237744"/>
+          </a:xfrm>
+          <a:prstGeom prst="rect">
+            <a:avLst/>
+          </a:prstGeom>
+        </p:spPr>
+      </p:pic>
+      <p:sp>
+        <p:nvSpPr>
+          <p:cNvPr id="33" name="Text 24"/>
+          <p:cNvSpPr/>
+          <p:nvPr/>
+        </p:nvSpPr>
+        <p:spPr>
+          <a:xfrm>
+            <a:off x="7488753" y="3118104"/>
+            <a:ext cx="1798259" cy="310896"/>
           </a:xfrm>
           <a:prstGeom prst="rect">
             <a:avLst/>
@@ -10888,30 +11489,30 @@
               <a:buNone/>
             </a:pPr>
             <a:r>
-              <a:rPr lang="en-US" sz="4000" b="1" dirty="0">
-                <a:solidFill>
-                  <a:srgbClr val="E11D48"/>
-                </a:solidFill>
-                <a:latin typeface="Georgia" pitchFamily="34" charset="0"/>
-                <a:ea typeface="Georgia" pitchFamily="34" charset="-122"/>
-                <a:cs typeface="Georgia" pitchFamily="34" charset="-120"/>
-              </a:rPr>
-              <a:t>1 agent</a:t>
-            </a:r>
-            <a:endParaRPr lang="en-US" sz="4000" dirty="0"/>
-          </a:p>
-        </p:txBody>
-      </p:sp>
-      <p:sp>
-        <p:nvSpPr>
-          <p:cNvPr id="15" name="Text 13"/>
-          <p:cNvSpPr/>
-          <p:nvPr/>
-        </p:nvSpPr>
-        <p:spPr>
-          <a:xfrm>
-            <a:off x="9061704" y="2734056"/>
-            <a:ext cx="2462479" cy="548640"/>
+              <a:rPr lang="en-US" sz="1400" b="1" dirty="0">
+                <a:solidFill>
+                  <a:srgbClr val="0F172A"/>
+                </a:solidFill>
+                <a:latin typeface="Calibri" pitchFamily="34" charset="0"/>
+                <a:ea typeface="Calibri" pitchFamily="34" charset="-122"/>
+                <a:cs typeface="Calibri" pitchFamily="34" charset="-120"/>
+              </a:rPr>
+              <a:t>4. RETRIEVE</a:t>
+            </a:r>
+            <a:endParaRPr lang="en-US" sz="1400" dirty="0"/>
+          </a:p>
+        </p:txBody>
+      </p:sp>
+      <p:sp>
+        <p:nvSpPr>
+          <p:cNvPr id="34" name="Text 25"/>
+          <p:cNvSpPr/>
+          <p:nvPr/>
+        </p:nvSpPr>
+        <p:spPr>
+          <a:xfrm>
+            <a:off x="7525329" y="3447288"/>
+            <a:ext cx="1725107" cy="731520"/>
           </a:xfrm>
           <a:prstGeom prst="rect">
             <a:avLst/>
@@ -10927,7 +11528,7 @@
               <a:buNone/>
             </a:pPr>
             <a:r>
-              <a:rPr lang="en-US" sz="1150" dirty="0">
+              <a:rPr lang="en-US" sz="1100" dirty="0">
                 <a:solidFill>
                   <a:srgbClr val="5B6577"/>
                 </a:solidFill>
@@ -10935,30 +11536,93 @@
                 <a:ea typeface="Calibri" pitchFamily="34" charset="-122"/>
                 <a:cs typeface="Calibri" pitchFamily="34" charset="-120"/>
               </a:rPr>
-              <a:t>Replaces search + support + checkout hand-offs</a:t>
-            </a:r>
-            <a:endParaRPr lang="en-US" sz="1150" dirty="0"/>
-          </a:p>
-        </p:txBody>
-      </p:sp>
-      <p:sp>
-        <p:nvSpPr>
-          <p:cNvPr id="16" name="Shape 14"/>
-          <p:cNvSpPr/>
-          <p:nvPr/>
-        </p:nvSpPr>
-        <p:spPr>
-          <a:xfrm>
-            <a:off x="502920" y="3657600"/>
-            <a:ext cx="5318608" cy="1234440"/>
+              <a:t>lesson_retrieve before the next answer</a:t>
+            </a:r>
+            <a:endParaRPr lang="en-US" sz="1100" dirty="0"/>
+          </a:p>
+        </p:txBody>
+      </p:sp>
+      <p:sp>
+        <p:nvSpPr>
+          <p:cNvPr id="35" name="Text 26"/>
+          <p:cNvSpPr/>
+          <p:nvPr/>
+        </p:nvSpPr>
+        <p:spPr>
+          <a:xfrm>
+            <a:off x="7488753" y="4114800"/>
+            <a:ext cx="1798259" cy="365760"/>
+          </a:xfrm>
+          <a:prstGeom prst="rect">
+            <a:avLst/>
+          </a:prstGeom>
+          <a:noFill/>
+          <a:ln/>
+        </p:spPr>
+        <p:txBody>
+          <a:bodyPr wrap="square" lIns="0" tIns="0" rIns="0" bIns="0" rtlCol="0" anchor="t"/>
+          <a:lstStyle/>
+          <a:p>
+            <a:pPr algn="ctr" indent="0" marL="0">
+              <a:buNone/>
+            </a:pPr>
+            <a:r>
+              <a:rPr lang="en-US" sz="950" i="1" dirty="0">
+                <a:solidFill>
+                  <a:srgbClr val="F59E0B"/>
+                </a:solidFill>
+                <a:latin typeface="Calibri" pitchFamily="34" charset="0"/>
+                <a:ea typeface="Calibri" pitchFamily="34" charset="-122"/>
+                <a:cs typeface="Calibri" pitchFamily="34" charset="-120"/>
+              </a:rPr>
+              <a:t>RAG (top-k)</a:t>
+            </a:r>
+            <a:endParaRPr lang="en-US" sz="950" dirty="0"/>
+          </a:p>
+        </p:txBody>
+      </p:sp>
+      <p:pic>
+        <p:nvPicPr>
+          <p:cNvPr id="36" name="Image 7" descr="icons/arrow.png">    </p:cNvPr>
+          <p:cNvPicPr>
+            <a:picLocks noChangeAspect="1"/>
+          </p:cNvPicPr>
+          <p:nvPr/>
+        </p:nvPicPr>
+        <p:blipFill>
+          <a:blip r:embed="rId8"/>
+          <a:stretch>
+            <a:fillRect/>
+          </a:stretch>
+        </p:blipFill>
+        <p:spPr>
+          <a:xfrm>
+            <a:off x="9415028" y="2697480"/>
+            <a:ext cx="237744" cy="237744"/>
+          </a:xfrm>
+          <a:prstGeom prst="rect">
+            <a:avLst/>
+          </a:prstGeom>
+        </p:spPr>
+      </p:pic>
+      <p:sp>
+        <p:nvSpPr>
+          <p:cNvPr id="37" name="Shape 27"/>
+          <p:cNvSpPr/>
+          <p:nvPr/>
+        </p:nvSpPr>
+        <p:spPr>
+          <a:xfrm>
+            <a:off x="9671060" y="2240280"/>
+            <a:ext cx="2017715" cy="2331720"/>
           </a:xfrm>
           <a:prstGeom prst="roundRect">
             <a:avLst>
-              <a:gd name="adj" fmla="val 5926"/>
+              <a:gd name="adj" fmla="val 4079"/>
             </a:avLst>
           </a:prstGeom>
           <a:solidFill>
-            <a:srgbClr val="F5F6FB"/>
+            <a:srgbClr val="FFFFFF"/>
           </a:solidFill>
           <a:ln w="12700">
             <a:solidFill>
@@ -10966,48 +11630,73 @@
             </a:solidFill>
             <a:prstDash val="solid"/>
           </a:ln>
-        </p:spPr>
-      </p:sp>
-      <p:sp>
-        <p:nvSpPr>
-          <p:cNvPr id="17" name="Shape 15"/>
-          <p:cNvSpPr/>
-          <p:nvPr/>
-        </p:nvSpPr>
-        <p:spPr>
-          <a:xfrm>
-            <a:off x="704088" y="3986784"/>
-            <a:ext cx="548640" cy="548640"/>
-          </a:xfrm>
-          <a:prstGeom prst="roundRect">
-            <a:avLst>
-              <a:gd name="adj" fmla="val 20000"/>
-            </a:avLst>
+          <a:effectLst>
+            <a:outerShdw sx="100000" sy="100000" kx="0" ky="0" algn="bl" rotWithShape="0" blurRad="114300" dist="38100" dir="8100000">
+              <a:srgbClr val="0F172A">
+                <a:alpha val="16000"/>
+              </a:srgbClr>
+            </a:outerShdw>
+          </a:effectLst>
+        </p:spPr>
+      </p:sp>
+      <p:sp>
+        <p:nvSpPr>
+          <p:cNvPr id="38" name="Shape 28"/>
+          <p:cNvSpPr/>
+          <p:nvPr/>
+        </p:nvSpPr>
+        <p:spPr>
+          <a:xfrm>
+            <a:off x="9671060" y="2240280"/>
+            <a:ext cx="2017715" cy="109728"/>
+          </a:xfrm>
+          <a:prstGeom prst="rect">
+            <a:avLst/>
           </a:prstGeom>
           <a:solidFill>
-            <a:srgbClr val="E11D48"/>
+            <a:srgbClr val="16A34A"/>
+          </a:solidFill>
+          <a:ln/>
+        </p:spPr>
+      </p:sp>
+      <p:sp>
+        <p:nvSpPr>
+          <p:cNvPr id="39" name="Shape 29"/>
+          <p:cNvSpPr/>
+          <p:nvPr/>
+        </p:nvSpPr>
+        <p:spPr>
+          <a:xfrm>
+            <a:off x="10451318" y="2551176"/>
+            <a:ext cx="457200" cy="457200"/>
+          </a:xfrm>
+          <a:prstGeom prst="ellipse">
+            <a:avLst/>
+          </a:prstGeom>
+          <a:solidFill>
+            <a:srgbClr val="16A34A"/>
           </a:solidFill>
           <a:ln/>
         </p:spPr>
       </p:sp>
       <p:pic>
         <p:nvPicPr>
-          <p:cNvPr id="18" name="Image 0" descr="icons/chart.png">    </p:cNvPr>
+          <p:cNvPr id="40" name="Image 8" descr="icons/check.png">    </p:cNvPr>
           <p:cNvPicPr>
             <a:picLocks noChangeAspect="1"/>
           </p:cNvPicPr>
           <p:nvPr/>
         </p:nvPicPr>
         <p:blipFill>
-          <a:blip r:embed="rId1"/>
+          <a:blip r:embed="rId9"/>
           <a:stretch>
             <a:fillRect/>
           </a:stretch>
         </p:blipFill>
         <p:spPr>
           <a:xfrm>
-            <a:off x="841248" y="4123944"/>
-            <a:ext cx="274320" cy="274320"/>
+            <a:off x="10561046" y="2660904"/>
+            <a:ext cx="237744" cy="237744"/>
           </a:xfrm>
           <a:prstGeom prst="rect">
             <a:avLst/>
@@ -11016,14 +11705,14 @@
       </p:pic>
       <p:sp>
         <p:nvSpPr>
-          <p:cNvPr id="19" name="Text 16"/>
-          <p:cNvSpPr/>
-          <p:nvPr/>
-        </p:nvSpPr>
-        <p:spPr>
-          <a:xfrm>
-            <a:off x="1417320" y="3840480"/>
-            <a:ext cx="4221328" cy="365760"/>
+          <p:cNvPr id="41" name="Text 30"/>
+          <p:cNvSpPr/>
+          <p:nvPr/>
+        </p:nvSpPr>
+        <p:spPr>
+          <a:xfrm>
+            <a:off x="9780788" y="3118104"/>
+            <a:ext cx="1798259" cy="310896"/>
           </a:xfrm>
           <a:prstGeom prst="rect">
             <a:avLst/>
@@ -11035,11 +11724,11 @@
           <a:bodyPr wrap="square" lIns="0" tIns="0" rIns="0" bIns="0" rtlCol="0" anchor="ctr"/>
           <a:lstStyle/>
           <a:p>
-            <a:pPr indent="0" marL="0">
+            <a:pPr algn="ctr" indent="0" marL="0">
               <a:buNone/>
             </a:pPr>
             <a:r>
-              <a:rPr lang="en-US" sz="1450" b="1" dirty="0">
+              <a:rPr lang="en-US" sz="1400" b="1" dirty="0">
                 <a:solidFill>
                   <a:srgbClr val="0F172A"/>
                 </a:solidFill>
@@ -11047,22 +11736,22 @@
                 <a:ea typeface="Calibri" pitchFamily="34" charset="-122"/>
                 <a:cs typeface="Calibri" pitchFamily="34" charset="-120"/>
               </a:rPr>
-              <a:t>Higher conversion &amp; AOV</a:t>
-            </a:r>
-            <a:endParaRPr lang="en-US" sz="1450" dirty="0"/>
-          </a:p>
-        </p:txBody>
-      </p:sp>
-      <p:sp>
-        <p:nvSpPr>
-          <p:cNvPr id="20" name="Text 17"/>
-          <p:cNvSpPr/>
-          <p:nvPr/>
-        </p:nvSpPr>
-        <p:spPr>
-          <a:xfrm>
-            <a:off x="1417320" y="4206240"/>
-            <a:ext cx="4221328" cy="603504"/>
+              <a:t>5. IMPROVE</a:t>
+            </a:r>
+            <a:endParaRPr lang="en-US" sz="1400" dirty="0"/>
+          </a:p>
+        </p:txBody>
+      </p:sp>
+      <p:sp>
+        <p:nvSpPr>
+          <p:cNvPr id="42" name="Text 31"/>
+          <p:cNvSpPr/>
+          <p:nvPr/>
+        </p:nvSpPr>
+        <p:spPr>
+          <a:xfrm>
+            <a:off x="9817364" y="3447288"/>
+            <a:ext cx="1725107" cy="731520"/>
           </a:xfrm>
           <a:prstGeom prst="rect">
             <a:avLst/>
@@ -11074,11 +11763,11 @@
           <a:bodyPr wrap="square" lIns="0" tIns="0" rIns="0" bIns="0" rtlCol="0" anchor="t"/>
           <a:lstStyle/>
           <a:p>
-            <a:pPr indent="0" marL="0">
+            <a:pPr algn="ctr" indent="0" marL="0">
               <a:buNone/>
             </a:pPr>
             <a:r>
-              <a:rPr lang="en-US" sz="1200" dirty="0">
+              <a:rPr lang="en-US" sz="1100" dirty="0">
                 <a:solidFill>
                   <a:srgbClr val="5B6577"/>
                 </a:solidFill>
@@ -11086,79 +11775,91 @@
                 <a:ea typeface="Calibri" pitchFamily="34" charset="-122"/>
                 <a:cs typeface="Calibri" pitchFamily="34" charset="-120"/>
               </a:rPr>
-              <a:t>Natural discovery + “see-it-shop-it” + recommendations turn questions into orders.</a:t>
-            </a:r>
-            <a:endParaRPr lang="en-US" sz="1200" dirty="0"/>
-          </a:p>
-        </p:txBody>
-      </p:sp>
-      <p:sp>
-        <p:nvSpPr>
-          <p:cNvPr id="21" name="Shape 18"/>
-          <p:cNvSpPr/>
-          <p:nvPr/>
-        </p:nvSpPr>
-        <p:spPr>
-          <a:xfrm>
-            <a:off x="6370168" y="3657600"/>
-            <a:ext cx="5318608" cy="1234440"/>
+              <a:t>the next reply applies the lesson</a:t>
+            </a:r>
+            <a:endParaRPr lang="en-US" sz="1100" dirty="0"/>
+          </a:p>
+        </p:txBody>
+      </p:sp>
+      <p:sp>
+        <p:nvSpPr>
+          <p:cNvPr id="43" name="Text 32"/>
+          <p:cNvSpPr/>
+          <p:nvPr/>
+        </p:nvSpPr>
+        <p:spPr>
+          <a:xfrm>
+            <a:off x="9780788" y="4114800"/>
+            <a:ext cx="1798259" cy="365760"/>
+          </a:xfrm>
+          <a:prstGeom prst="rect">
+            <a:avLst/>
+          </a:prstGeom>
+          <a:noFill/>
+          <a:ln/>
+        </p:spPr>
+        <p:txBody>
+          <a:bodyPr wrap="square" lIns="0" tIns="0" rIns="0" bIns="0" rtlCol="0" anchor="t"/>
+          <a:lstStyle/>
+          <a:p>
+            <a:pPr algn="ctr" indent="0" marL="0">
+              <a:buNone/>
+            </a:pPr>
+            <a:r>
+              <a:rPr lang="en-US" sz="950" i="1" dirty="0">
+                <a:solidFill>
+                  <a:srgbClr val="16A34A"/>
+                </a:solidFill>
+                <a:latin typeface="Calibri" pitchFamily="34" charset="0"/>
+                <a:ea typeface="Calibri" pitchFamily="34" charset="-122"/>
+                <a:cs typeface="Calibri" pitchFamily="34" charset="-120"/>
+              </a:rPr>
+              <a:t>no retrain · no redeploy</a:t>
+            </a:r>
+            <a:endParaRPr lang="en-US" sz="950" dirty="0"/>
+          </a:p>
+        </p:txBody>
+      </p:sp>
+      <p:sp>
+        <p:nvSpPr>
+          <p:cNvPr id="44" name="Shape 33"/>
+          <p:cNvSpPr/>
+          <p:nvPr/>
+        </p:nvSpPr>
+        <p:spPr>
+          <a:xfrm>
+            <a:off x="502920" y="4846320"/>
+            <a:ext cx="11185855" cy="658368"/>
           </a:xfrm>
           <a:prstGeom prst="roundRect">
             <a:avLst>
-              <a:gd name="adj" fmla="val 5926"/>
+              <a:gd name="adj" fmla="val 12500"/>
             </a:avLst>
           </a:prstGeom>
           <a:solidFill>
-            <a:srgbClr val="F5F6FB"/>
-          </a:solidFill>
-          <a:ln w="12700">
-            <a:solidFill>
-              <a:srgbClr val="E6E8F0"/>
-            </a:solidFill>
-            <a:prstDash val="solid"/>
-          </a:ln>
-        </p:spPr>
-      </p:sp>
-      <p:sp>
-        <p:nvSpPr>
-          <p:cNvPr id="22" name="Shape 19"/>
-          <p:cNvSpPr/>
-          <p:nvPr/>
-        </p:nvSpPr>
-        <p:spPr>
-          <a:xfrm>
-            <a:off x="6571336" y="3986784"/>
-            <a:ext cx="548640" cy="548640"/>
-          </a:xfrm>
-          <a:prstGeom prst="roundRect">
-            <a:avLst>
-              <a:gd name="adj" fmla="val 20000"/>
-            </a:avLst>
-          </a:prstGeom>
-          <a:solidFill>
-            <a:srgbClr val="E11D48"/>
+            <a:srgbClr val="0A0E1F"/>
           </a:solidFill>
           <a:ln/>
         </p:spPr>
       </p:sp>
       <p:pic>
         <p:nvPicPr>
-          <p:cNvPr id="23" name="Image 1" descr="icons/globe.png">    </p:cNvPr>
+          <p:cNvPr id="45" name="Image 9" descr="icons/sync.png">    </p:cNvPr>
           <p:cNvPicPr>
             <a:picLocks noChangeAspect="1"/>
           </p:cNvPicPr>
           <p:nvPr/>
         </p:nvPicPr>
         <p:blipFill>
-          <a:blip r:embed="rId2"/>
+          <a:blip r:embed="rId10"/>
           <a:stretch>
             <a:fillRect/>
           </a:stretch>
         </p:blipFill>
         <p:spPr>
           <a:xfrm>
-            <a:off x="6708496" y="4123944"/>
-            <a:ext cx="274320" cy="274320"/>
+            <a:off x="758952" y="5029200"/>
+            <a:ext cx="310896" cy="310896"/>
           </a:xfrm>
           <a:prstGeom prst="rect">
             <a:avLst/>
@@ -11167,14 +11868,14 @@
       </p:pic>
       <p:sp>
         <p:nvSpPr>
-          <p:cNvPr id="24" name="Text 20"/>
-          <p:cNvSpPr/>
-          <p:nvPr/>
-        </p:nvSpPr>
-        <p:spPr>
-          <a:xfrm>
-            <a:off x="7284568" y="3840480"/>
-            <a:ext cx="4221328" cy="365760"/>
+          <p:cNvPr id="46" name="Text 34"/>
+          <p:cNvSpPr/>
+          <p:nvPr/>
+        </p:nvSpPr>
+        <p:spPr>
+          <a:xfrm>
+            <a:off x="1234440" y="4846320"/>
+            <a:ext cx="10271455" cy="658368"/>
           </a:xfrm>
           <a:prstGeom prst="rect">
             <a:avLst/>
@@ -11190,142 +11891,44 @@
               <a:buNone/>
             </a:pPr>
             <a:r>
-              <a:rPr lang="en-US" sz="1450" b="1" dirty="0">
-                <a:solidFill>
-                  <a:srgbClr val="0F172A"/>
-                </a:solidFill>
-                <a:latin typeface="Calibri" pitchFamily="34" charset="0"/>
-                <a:ea typeface="Calibri" pitchFamily="34" charset="-122"/>
-                <a:cs typeface="Calibri" pitchFamily="34" charset="-120"/>
-              </a:rPr>
-              <a:t>Instant global reach</a:t>
-            </a:r>
-            <a:endParaRPr lang="en-US" sz="1450" dirty="0"/>
-          </a:p>
-        </p:txBody>
-      </p:sp>
-      <p:sp>
-        <p:nvSpPr>
-          <p:cNvPr id="25" name="Text 21"/>
-          <p:cNvSpPr/>
-          <p:nvPr/>
-        </p:nvSpPr>
-        <p:spPr>
-          <a:xfrm>
-            <a:off x="7284568" y="4206240"/>
-            <a:ext cx="4221328" cy="603504"/>
-          </a:xfrm>
-          <a:prstGeom prst="rect">
-            <a:avLst/>
-          </a:prstGeom>
-          <a:noFill/>
-          <a:ln/>
-        </p:spPr>
-        <p:txBody>
-          <a:bodyPr wrap="square" lIns="0" tIns="0" rIns="0" bIns="0" rtlCol="0" anchor="t"/>
-          <a:lstStyle/>
-          <a:p>
+              <a:rPr lang="en-US" sz="1150" b="1" spc="100" kern="0" dirty="0">
+                <a:solidFill>
+                  <a:srgbClr val="FCA5C0"/>
+                </a:solidFill>
+                <a:latin typeface="Calibri" pitchFamily="34" charset="0"/>
+                <a:ea typeface="Calibri" pitchFamily="34" charset="-122"/>
+                <a:cs typeface="Calibri" pitchFamily="34" charset="-120"/>
+              </a:rPr>
+              <a:t>↺ RECURSION   </a:t>
+            </a:r>
             <a:pPr indent="0" marL="0">
               <a:buNone/>
             </a:pPr>
             <a:r>
-              <a:rPr lang="en-US" sz="1200" dirty="0">
-                <a:solidFill>
-                  <a:srgbClr val="5B6577"/>
-                </a:solidFill>
-                <a:latin typeface="Calibri" pitchFamily="34" charset="0"/>
-                <a:ea typeface="Calibri" pitchFamily="34" charset="-122"/>
-                <a:cs typeface="Calibri" pitchFamily="34" charset="-120"/>
-              </a:rPr>
-              <a:t>One agent serves every language &amp; channel — no per-market chatbot rebuilds.</a:t>
-            </a:r>
-            <a:endParaRPr lang="en-US" sz="1200" dirty="0"/>
-          </a:p>
-        </p:txBody>
-      </p:sp>
-      <p:sp>
-        <p:nvSpPr>
-          <p:cNvPr id="26" name="Shape 22"/>
-          <p:cNvSpPr/>
-          <p:nvPr/>
-        </p:nvSpPr>
-        <p:spPr>
-          <a:xfrm>
-            <a:off x="502920" y="5093208"/>
-            <a:ext cx="5318608" cy="1234440"/>
-          </a:xfrm>
-          <a:prstGeom prst="roundRect">
-            <a:avLst>
-              <a:gd name="adj" fmla="val 5926"/>
-            </a:avLst>
-          </a:prstGeom>
-          <a:solidFill>
-            <a:srgbClr val="F5F6FB"/>
-          </a:solidFill>
-          <a:ln w="12700">
-            <a:solidFill>
-              <a:srgbClr val="E6E8F0"/>
-            </a:solidFill>
-            <a:prstDash val="solid"/>
-          </a:ln>
-        </p:spPr>
-      </p:sp>
-      <p:sp>
-        <p:nvSpPr>
-          <p:cNvPr id="27" name="Shape 23"/>
-          <p:cNvSpPr/>
-          <p:nvPr/>
-        </p:nvSpPr>
-        <p:spPr>
-          <a:xfrm>
-            <a:off x="704088" y="5422392"/>
-            <a:ext cx="548640" cy="548640"/>
-          </a:xfrm>
-          <a:prstGeom prst="roundRect">
-            <a:avLst>
-              <a:gd name="adj" fmla="val 20000"/>
-            </a:avLst>
-          </a:prstGeom>
-          <a:solidFill>
-            <a:srgbClr val="E11D48"/>
-          </a:solidFill>
-          <a:ln/>
-        </p:spPr>
-      </p:sp>
-      <p:pic>
-        <p:nvPicPr>
-          <p:cNvPr id="28" name="Image 2" descr="icons/bolt.png">    </p:cNvPr>
-          <p:cNvPicPr>
-            <a:picLocks noChangeAspect="1"/>
-          </p:cNvPicPr>
-          <p:nvPr/>
-        </p:nvPicPr>
-        <p:blipFill>
-          <a:blip r:embed="rId3"/>
-          <a:stretch>
-            <a:fillRect/>
-          </a:stretch>
-        </p:blipFill>
-        <p:spPr>
-          <a:xfrm>
-            <a:off x="841248" y="5559552"/>
-            <a:ext cx="274320" cy="274320"/>
-          </a:xfrm>
-          <a:prstGeom prst="rect">
-            <a:avLst/>
-          </a:prstGeom>
-        </p:spPr>
-      </p:pic>
-      <p:sp>
-        <p:nvSpPr>
-          <p:cNvPr id="29" name="Text 24"/>
-          <p:cNvSpPr/>
-          <p:nvPr/>
-        </p:nvSpPr>
-        <p:spPr>
-          <a:xfrm>
-            <a:off x="1417320" y="5276088"/>
-            <a:ext cx="4221328" cy="365760"/>
+              <a:rPr lang="en-US" sz="1150" dirty="0">
+                <a:solidFill>
+                  <a:srgbClr val="D7D3EC"/>
+                </a:solidFill>
+                <a:latin typeface="Calibri" pitchFamily="34" charset="0"/>
+                <a:ea typeface="Calibri" pitchFamily="34" charset="-122"/>
+                <a:cs typeface="Calibri" pitchFamily="34" charset="-120"/>
+              </a:rPr>
+              <a:t>lessons feed every future answer · the cycle runs as a Cloud Run Job every 15 min (Cloud Scheduler) · isolated &amp; additive — a no-op when no lesson matches</a:t>
+            </a:r>
+            <a:endParaRPr lang="en-US" sz="1150" dirty="0"/>
+          </a:p>
+        </p:txBody>
+      </p:sp>
+      <p:sp>
+        <p:nvSpPr>
+          <p:cNvPr id="47" name="Text 35"/>
+          <p:cNvSpPr/>
+          <p:nvPr/>
+        </p:nvSpPr>
+        <p:spPr>
+          <a:xfrm>
+            <a:off x="502920" y="5623560"/>
+            <a:ext cx="11185855" cy="457200"/>
           </a:xfrm>
           <a:prstGeom prst="rect">
             <a:avLst/>
@@ -11341,7 +11944,7 @@
               <a:buNone/>
             </a:pPr>
             <a:r>
-              <a:rPr lang="en-US" sz="1450" b="1" dirty="0">
+              <a:rPr lang="en-US" sz="1100" b="1" i="1" dirty="0">
                 <a:solidFill>
                   <a:srgbClr val="0F172A"/>
                 </a:solidFill>
@@ -11349,38 +11952,13 @@
                 <a:ea typeface="Calibri" pitchFamily="34" charset="-122"/>
                 <a:cs typeface="Calibri" pitchFamily="34" charset="-120"/>
               </a:rPr>
-              <a:t>Lower cost to serve</a:t>
-            </a:r>
-            <a:endParaRPr lang="en-US" sz="1450" dirty="0"/>
-          </a:p>
-        </p:txBody>
-      </p:sp>
-      <p:sp>
-        <p:nvSpPr>
-          <p:cNvPr id="30" name="Text 25"/>
-          <p:cNvSpPr/>
-          <p:nvPr/>
-        </p:nvSpPr>
-        <p:spPr>
-          <a:xfrm>
-            <a:off x="1417320" y="5641848"/>
-            <a:ext cx="4221328" cy="603504"/>
-          </a:xfrm>
-          <a:prstGeom prst="rect">
-            <a:avLst/>
-          </a:prstGeom>
-          <a:noFill/>
-          <a:ln/>
-        </p:spPr>
-        <p:txBody>
-          <a:bodyPr wrap="square" lIns="0" tIns="0" rIns="0" bIns="0" rtlCol="0" anchor="t"/>
-          <a:lstStyle/>
-          <a:p>
+              <a:t>Demo:  </a:t>
+            </a:r>
             <a:pPr indent="0" marL="0">
               <a:buNone/>
             </a:pPr>
             <a:r>
-              <a:rPr lang="en-US" sz="1200" dirty="0">
+              <a:rPr lang="en-US" sz="1100" i="1" dirty="0">
                 <a:solidFill>
                   <a:srgbClr val="5B6577"/>
                 </a:solidFill>
@@ -11388,95 +11966,22 @@
                 <a:ea typeface="Calibri" pitchFamily="34" charset="-122"/>
                 <a:cs typeface="Calibri" pitchFamily="34" charset="-120"/>
               </a:rPr>
-              <a:t>Deflect routine contacts; serverless + free-tier-first keeps run-cost low.</a:t>
-            </a:r>
-            <a:endParaRPr lang="en-US" sz="1200" dirty="0"/>
-          </a:p>
-        </p:txBody>
-      </p:sp>
-      <p:sp>
-        <p:nvSpPr>
-          <p:cNvPr id="31" name="Shape 26"/>
-          <p:cNvSpPr/>
-          <p:nvPr/>
-        </p:nvSpPr>
-        <p:spPr>
-          <a:xfrm>
-            <a:off x="6370168" y="5093208"/>
-            <a:ext cx="5318608" cy="1234440"/>
-          </a:xfrm>
-          <a:prstGeom prst="roundRect">
-            <a:avLst>
-              <a:gd name="adj" fmla="val 5926"/>
-            </a:avLst>
-          </a:prstGeom>
-          <a:solidFill>
-            <a:srgbClr val="F5F6FB"/>
-          </a:solidFill>
-          <a:ln w="12700">
-            <a:solidFill>
-              <a:srgbClr val="E6E8F0"/>
-            </a:solidFill>
-            <a:prstDash val="solid"/>
-          </a:ln>
-        </p:spPr>
-      </p:sp>
-      <p:sp>
-        <p:nvSpPr>
-          <p:cNvPr id="32" name="Shape 27"/>
-          <p:cNvSpPr/>
-          <p:nvPr/>
-        </p:nvSpPr>
-        <p:spPr>
-          <a:xfrm>
-            <a:off x="6571336" y="5422392"/>
-            <a:ext cx="548640" cy="548640"/>
-          </a:xfrm>
-          <a:prstGeom prst="roundRect">
-            <a:avLst>
-              <a:gd name="adj" fmla="val 20000"/>
-            </a:avLst>
-          </a:prstGeom>
-          <a:solidFill>
-            <a:srgbClr val="E11D48"/>
-          </a:solidFill>
-          <a:ln/>
-        </p:spPr>
-      </p:sp>
-      <p:pic>
-        <p:nvPicPr>
-          <p:cNvPr id="33" name="Image 3" descr="icons/shield.png">    </p:cNvPr>
-          <p:cNvPicPr>
-            <a:picLocks noChangeAspect="1"/>
-          </p:cNvPicPr>
-          <p:nvPr/>
-        </p:nvPicPr>
-        <p:blipFill>
-          <a:blip r:embed="rId4"/>
-          <a:stretch>
-            <a:fillRect/>
-          </a:stretch>
-        </p:blipFill>
-        <p:spPr>
-          <a:xfrm>
-            <a:off x="6708496" y="5559552"/>
-            <a:ext cx="274320" cy="274320"/>
-          </a:xfrm>
-          <a:prstGeom prst="rect">
-            <a:avLst/>
-          </a:prstGeom>
-        </p:spPr>
-      </p:pic>
-      <p:sp>
-        <p:nvSpPr>
-          <p:cNvPr id="34" name="Text 28"/>
-          <p:cNvSpPr/>
-          <p:nvPr/>
-        </p:nvSpPr>
-        <p:spPr>
-          <a:xfrm>
-            <a:off x="7284568" y="5276088"/>
-            <a:ext cx="4221328" cy="365760"/>
+              <a:t>ask “do you have laptops?” → flat refusal → 👎 Teach GOOPHER → ask again → it names real in-stock items &amp; asks a clarifying question (watch 🔎 DETECT → 🧠 JUDGE → 💡 LESSON in /dev).</a:t>
+            </a:r>
+            <a:endParaRPr lang="en-US" sz="1100" dirty="0"/>
+          </a:p>
+        </p:txBody>
+      </p:sp>
+      <p:sp>
+        <p:nvSpPr>
+          <p:cNvPr id="48" name="Text 36"/>
+          <p:cNvSpPr/>
+          <p:nvPr/>
+        </p:nvSpPr>
+        <p:spPr>
+          <a:xfrm>
+            <a:off x="502920" y="6455664"/>
+            <a:ext cx="8229600" cy="274320"/>
           </a:xfrm>
           <a:prstGeom prst="rect">
             <a:avLst/>
@@ -11492,85 +11997,7 @@
               <a:buNone/>
             </a:pPr>
             <a:r>
-              <a:rPr lang="en-US" sz="1450" b="1" dirty="0">
-                <a:solidFill>
-                  <a:srgbClr val="0F172A"/>
-                </a:solidFill>
-                <a:latin typeface="Calibri" pitchFamily="34" charset="0"/>
-                <a:ea typeface="Calibri" pitchFamily="34" charset="-122"/>
-                <a:cs typeface="Calibri" pitchFamily="34" charset="-120"/>
-              </a:rPr>
-              <a:t>Brand-safe automation</a:t>
-            </a:r>
-            <a:endParaRPr lang="en-US" sz="1450" dirty="0"/>
-          </a:p>
-        </p:txBody>
-      </p:sp>
-      <p:sp>
-        <p:nvSpPr>
-          <p:cNvPr id="35" name="Text 29"/>
-          <p:cNvSpPr/>
-          <p:nvPr/>
-        </p:nvSpPr>
-        <p:spPr>
-          <a:xfrm>
-            <a:off x="7284568" y="5641848"/>
-            <a:ext cx="4221328" cy="603504"/>
-          </a:xfrm>
-          <a:prstGeom prst="rect">
-            <a:avLst/>
-          </a:prstGeom>
-          <a:noFill/>
-          <a:ln/>
-        </p:spPr>
-        <p:txBody>
-          <a:bodyPr wrap="square" lIns="0" tIns="0" rIns="0" bIns="0" rtlCol="0" anchor="t"/>
-          <a:lstStyle/>
-          <a:p>
-            <a:pPr indent="0" marL="0">
-              <a:buNone/>
-            </a:pPr>
-            <a:r>
-              <a:rPr lang="en-US" sz="1200" dirty="0">
-                <a:solidFill>
-                  <a:srgbClr val="5B6577"/>
-                </a:solidFill>
-                <a:latin typeface="Calibri" pitchFamily="34" charset="0"/>
-                <a:ea typeface="Calibri" pitchFamily="34" charset="-122"/>
-                <a:cs typeface="Calibri" pitchFamily="34" charset="-120"/>
-              </a:rPr>
-              <a:t>No substitutions, confirm-before-charge, self-healing — automation you can trust on revenue.</a:t>
-            </a:r>
-            <a:endParaRPr lang="en-US" sz="1200" dirty="0"/>
-          </a:p>
-        </p:txBody>
-      </p:sp>
-      <p:sp>
-        <p:nvSpPr>
-          <p:cNvPr id="36" name="Text 30"/>
-          <p:cNvSpPr/>
-          <p:nvPr/>
-        </p:nvSpPr>
-        <p:spPr>
-          <a:xfrm>
-            <a:off x="502920" y="6272784"/>
-            <a:ext cx="11185855" cy="228600"/>
-          </a:xfrm>
-          <a:prstGeom prst="rect">
-            <a:avLst/>
-          </a:prstGeom>
-          <a:noFill/>
-          <a:ln/>
-        </p:spPr>
-        <p:txBody>
-          <a:bodyPr wrap="square" lIns="0" tIns="0" rIns="0" bIns="0" rtlCol="0" anchor="ctr"/>
-          <a:lstStyle/>
-          <a:p>
-            <a:pPr indent="0" marL="0">
-              <a:buNone/>
-            </a:pPr>
-            <a:r>
-              <a:rPr lang="en-US" sz="900" i="1" dirty="0">
+              <a:rPr lang="en-US" sz="900" dirty="0">
                 <a:solidFill>
                   <a:srgbClr val="8A94A6"/>
                 </a:solidFill>
@@ -11578,7 +12005,7 @@
                 <a:ea typeface="Calibri" pitchFamily="34" charset="-122"/>
                 <a:cs typeface="Calibri" pitchFamily="34" charset="-120"/>
               </a:rPr>
-              <a:t>Benchmarks are illustrative industry ranges, not client results.</a:t>
+              <a:t>GOOPHER · Unified Conversational Retail Agent on Google Cloud</a:t>
             </a:r>
             <a:endParaRPr lang="en-US" sz="900" dirty="0"/>
           </a:p>
@@ -11586,46 +12013,7 @@
       </p:sp>
       <p:sp>
         <p:nvSpPr>
-          <p:cNvPr id="37" name="Text 31"/>
-          <p:cNvSpPr/>
-          <p:nvPr/>
-        </p:nvSpPr>
-        <p:spPr>
-          <a:xfrm>
-            <a:off x="502920" y="6455664"/>
-            <a:ext cx="8229600" cy="274320"/>
-          </a:xfrm>
-          <a:prstGeom prst="rect">
-            <a:avLst/>
-          </a:prstGeom>
-          <a:noFill/>
-          <a:ln/>
-        </p:spPr>
-        <p:txBody>
-          <a:bodyPr wrap="square" lIns="0" tIns="0" rIns="0" bIns="0" rtlCol="0" anchor="ctr"/>
-          <a:lstStyle/>
-          <a:p>
-            <a:pPr indent="0" marL="0">
-              <a:buNone/>
-            </a:pPr>
-            <a:r>
-              <a:rPr lang="en-US" sz="900" dirty="0">
-                <a:solidFill>
-                  <a:srgbClr val="8A94A6"/>
-                </a:solidFill>
-                <a:latin typeface="Calibri" pitchFamily="34" charset="0"/>
-                <a:ea typeface="Calibri" pitchFamily="34" charset="-122"/>
-                <a:cs typeface="Calibri" pitchFamily="34" charset="-120"/>
-              </a:rPr>
-              <a:t>GOOPHER · Unified Conversational Retail Agent on Google Cloud</a:t>
-            </a:r>
-            <a:endParaRPr lang="en-US" sz="900" dirty="0"/>
-          </a:p>
-        </p:txBody>
-      </p:sp>
-      <p:sp>
-        <p:nvSpPr>
-          <p:cNvPr id="38" name="Text 32"/>
+          <p:cNvPr id="49" name="Text 37"/>
           <p:cNvSpPr/>
           <p:nvPr/>
         </p:nvSpPr>
@@ -11724,13 +12112,13 @@
             <a:r>
               <a:rPr lang="en-US" sz="1200" b="1" spc="300" kern="0" dirty="0">
                 <a:solidFill>
-                  <a:srgbClr val="2563EB"/>
-                </a:solidFill>
-                <a:latin typeface="Calibri" pitchFamily="34" charset="0"/>
-                <a:ea typeface="Calibri" pitchFamily="34" charset="-122"/>
-                <a:cs typeface="Calibri" pitchFamily="34" charset="-120"/>
-              </a:rPr>
-              <a:t>WHY GOOGLE CLOUD IS THE RIGHT PLATFORM</a:t>
+                  <a:srgbClr val="E11D48"/>
+                </a:solidFill>
+                <a:latin typeface="Calibri" pitchFamily="34" charset="0"/>
+                <a:ea typeface="Calibri" pitchFamily="34" charset="-122"/>
+                <a:cs typeface="Calibri" pitchFamily="34" charset="-120"/>
+              </a:rPr>
+              <a:t>BUSINESS &amp; STRATEGIC VALUE — FOR THE VP OF STRATEGY</a:t>
             </a:r>
             <a:endParaRPr lang="en-US" sz="1200" dirty="0"/>
           </a:p>
@@ -11769,7 +12157,7 @@
                 <a:ea typeface="Georgia" pitchFamily="34" charset="-122"/>
                 <a:cs typeface="Georgia" pitchFamily="34" charset="-120"/>
               </a:rPr>
-              <a:t>The architecture maps cleanly to Google Cloud strengths</a:t>
+              <a:t>From technical win to measurable business value</a:t>
             </a:r>
             <a:endParaRPr lang="en-US" sz="2800" dirty="0"/>
           </a:p>
@@ -11784,11 +12172,11 @@
         <p:spPr>
           <a:xfrm>
             <a:off x="502920" y="1783080"/>
-            <a:ext cx="3545738" cy="1783080"/>
+            <a:ext cx="2615184" cy="1554480"/>
           </a:xfrm>
           <a:prstGeom prst="roundRect">
             <a:avLst>
-              <a:gd name="adj" fmla="val 4615"/>
+              <a:gd name="adj" fmla="val 5294"/>
             </a:avLst>
           </a:prstGeom>
           <a:solidFill>
@@ -11811,146 +12199,96 @@
       </p:sp>
       <p:sp>
         <p:nvSpPr>
-          <p:cNvPr id="5" name="Shape 3"/>
-          <p:cNvSpPr/>
-          <p:nvPr/>
-        </p:nvSpPr>
-        <p:spPr>
-          <a:xfrm>
-            <a:off x="740664" y="2002536"/>
-            <a:ext cx="566928" cy="566928"/>
+          <p:cNvPr id="5" name="Text 3"/>
+          <p:cNvSpPr/>
+          <p:nvPr/>
+        </p:nvSpPr>
+        <p:spPr>
+          <a:xfrm>
+            <a:off x="594360" y="1965960"/>
+            <a:ext cx="2432304" cy="777240"/>
+          </a:xfrm>
+          <a:prstGeom prst="rect">
+            <a:avLst/>
+          </a:prstGeom>
+          <a:noFill/>
+          <a:ln/>
+        </p:spPr>
+        <p:txBody>
+          <a:bodyPr wrap="square" lIns="0" tIns="0" rIns="0" bIns="0" rtlCol="0" anchor="ctr"/>
+          <a:lstStyle/>
+          <a:p>
+            <a:pPr algn="ctr" indent="0" marL="0">
+              <a:buNone/>
+            </a:pPr>
+            <a:r>
+              <a:rPr lang="en-US" sz="4000" b="1" dirty="0">
+                <a:solidFill>
+                  <a:srgbClr val="7C3AED"/>
+                </a:solidFill>
+                <a:latin typeface="Georgia" pitchFamily="34" charset="0"/>
+                <a:ea typeface="Georgia" pitchFamily="34" charset="-122"/>
+                <a:cs typeface="Georgia" pitchFamily="34" charset="-120"/>
+              </a:rPr>
+              <a:t>24/7</a:t>
+            </a:r>
+            <a:endParaRPr lang="en-US" sz="4000" dirty="0"/>
+          </a:p>
+        </p:txBody>
+      </p:sp>
+      <p:sp>
+        <p:nvSpPr>
+          <p:cNvPr id="6" name="Text 4"/>
+          <p:cNvSpPr/>
+          <p:nvPr/>
+        </p:nvSpPr>
+        <p:spPr>
+          <a:xfrm>
+            <a:off x="667512" y="2734056"/>
+            <a:ext cx="2286000" cy="548640"/>
+          </a:xfrm>
+          <a:prstGeom prst="rect">
+            <a:avLst/>
+          </a:prstGeom>
+          <a:noFill/>
+          <a:ln/>
+        </p:spPr>
+        <p:txBody>
+          <a:bodyPr wrap="square" lIns="0" tIns="0" rIns="0" bIns="0" rtlCol="0" anchor="t"/>
+          <a:lstStyle/>
+          <a:p>
+            <a:pPr algn="ctr" indent="0" marL="0">
+              <a:buNone/>
+            </a:pPr>
+            <a:r>
+              <a:rPr lang="en-US" sz="1150" dirty="0">
+                <a:solidFill>
+                  <a:srgbClr val="5B6577"/>
+                </a:solidFill>
+                <a:latin typeface="Calibri" pitchFamily="34" charset="0"/>
+                <a:ea typeface="Calibri" pitchFamily="34" charset="-122"/>
+                <a:cs typeface="Calibri" pitchFamily="34" charset="-120"/>
+              </a:rPr>
+              <a:t>Self-service order mgmt &amp; support — every channel, every language</a:t>
+            </a:r>
+            <a:endParaRPr lang="en-US" sz="1150" dirty="0"/>
+          </a:p>
+        </p:txBody>
+      </p:sp>
+      <p:sp>
+        <p:nvSpPr>
+          <p:cNvPr id="7" name="Shape 5"/>
+          <p:cNvSpPr/>
+          <p:nvPr/>
+        </p:nvSpPr>
+        <p:spPr>
+          <a:xfrm>
+            <a:off x="3300984" y="1783080"/>
+            <a:ext cx="2615184" cy="1554480"/>
           </a:xfrm>
           <a:prstGeom prst="roundRect">
             <a:avLst>
-              <a:gd name="adj" fmla="val 19355"/>
-            </a:avLst>
-          </a:prstGeom>
-          <a:solidFill>
-            <a:srgbClr val="7C3AED"/>
-          </a:solidFill>
-          <a:ln/>
-        </p:spPr>
-      </p:sp>
-      <p:pic>
-        <p:nvPicPr>
-          <p:cNvPr id="6" name="Image 0" descr="icons/robot.png">    </p:cNvPr>
-          <p:cNvPicPr>
-            <a:picLocks noChangeAspect="1"/>
-          </p:cNvPicPr>
-          <p:nvPr/>
-        </p:nvPicPr>
-        <p:blipFill>
-          <a:blip r:embed="rId1"/>
-          <a:stretch>
-            <a:fillRect/>
-          </a:stretch>
-        </p:blipFill>
-        <p:spPr>
-          <a:xfrm>
-            <a:off x="877824" y="2139696"/>
-            <a:ext cx="292608" cy="292608"/>
-          </a:xfrm>
-          <a:prstGeom prst="rect">
-            <a:avLst/>
-          </a:prstGeom>
-        </p:spPr>
-      </p:pic>
-      <p:sp>
-        <p:nvSpPr>
-          <p:cNvPr id="7" name="Text 4"/>
-          <p:cNvSpPr/>
-          <p:nvPr/>
-        </p:nvSpPr>
-        <p:spPr>
-          <a:xfrm>
-            <a:off x="1490472" y="1984248"/>
-            <a:ext cx="2357018" cy="603504"/>
-          </a:xfrm>
-          <a:prstGeom prst="rect">
-            <a:avLst/>
-          </a:prstGeom>
-          <a:noFill/>
-          <a:ln/>
-        </p:spPr>
-        <p:txBody>
-          <a:bodyPr wrap="square" lIns="0" tIns="0" rIns="0" bIns="0" rtlCol="0" anchor="ctr"/>
-          <a:lstStyle/>
-          <a:p>
-            <a:pPr indent="0" marL="0">
-              <a:buNone/>
-            </a:pPr>
-            <a:r>
-              <a:rPr lang="en-US" sz="1350" b="1" dirty="0">
-                <a:solidFill>
-                  <a:srgbClr val="0F172A"/>
-                </a:solidFill>
-                <a:latin typeface="Calibri" pitchFamily="34" charset="0"/>
-                <a:ea typeface="Calibri" pitchFamily="34" charset="-122"/>
-                <a:cs typeface="Calibri" pitchFamily="34" charset="-120"/>
-              </a:rPr>
-              <a:t>Vertex AI · Gemini 2.5 Flash</a:t>
-            </a:r>
-            <a:endParaRPr lang="en-US" sz="1350" dirty="0"/>
-          </a:p>
-        </p:txBody>
-      </p:sp>
-      <p:sp>
-        <p:nvSpPr>
-          <p:cNvPr id="8" name="Text 5"/>
-          <p:cNvSpPr/>
-          <p:nvPr/>
-        </p:nvSpPr>
-        <p:spPr>
-          <a:xfrm>
-            <a:off x="758952" y="2679192"/>
-            <a:ext cx="3088538" cy="740664"/>
-          </a:xfrm>
-          <a:prstGeom prst="rect">
-            <a:avLst/>
-          </a:prstGeom>
-          <a:noFill/>
-          <a:ln/>
-        </p:spPr>
-        <p:txBody>
-          <a:bodyPr wrap="square" lIns="0" tIns="0" rIns="0" bIns="0" rtlCol="0" anchor="t"/>
-          <a:lstStyle/>
-          <a:p>
-            <a:pPr marL="152400" indent="-152400">
-              <a:spcAft>
-                <a:spcPts val="500"/>
-              </a:spcAft>
-              <a:buSzPct val="100000"/>
-              <a:buChar char="•"/>
-            </a:pPr>
-            <a:r>
-              <a:rPr lang="en-US" sz="1200" dirty="0">
-                <a:solidFill>
-                  <a:srgbClr val="5B6577"/>
-                </a:solidFill>
-                <a:latin typeface="Calibri" pitchFamily="34" charset="0"/>
-                <a:ea typeface="Calibri" pitchFamily="34" charset="-122"/>
-                <a:cs typeface="Calibri" pitchFamily="34" charset="-120"/>
-              </a:rPr>
-              <a:t>One natively-multimodal model — text, reasoning &amp; vision in a managed, secure, high-quota service.</a:t>
-            </a:r>
-            <a:endParaRPr lang="en-US" sz="1200" dirty="0"/>
-          </a:p>
-        </p:txBody>
-      </p:sp>
-      <p:sp>
-        <p:nvSpPr>
-          <p:cNvPr id="9" name="Shape 6"/>
-          <p:cNvSpPr/>
-          <p:nvPr/>
-        </p:nvSpPr>
-        <p:spPr>
-          <a:xfrm>
-            <a:off x="4322978" y="1783080"/>
-            <a:ext cx="3545738" cy="1783080"/>
-          </a:xfrm>
-          <a:prstGeom prst="roundRect">
-            <a:avLst>
-              <a:gd name="adj" fmla="val 4615"/>
+              <a:gd name="adj" fmla="val 5294"/>
             </a:avLst>
           </a:prstGeom>
           <a:solidFill>
@@ -11973,146 +12311,96 @@
       </p:sp>
       <p:sp>
         <p:nvSpPr>
-          <p:cNvPr id="10" name="Shape 7"/>
-          <p:cNvSpPr/>
-          <p:nvPr/>
-        </p:nvSpPr>
-        <p:spPr>
-          <a:xfrm>
-            <a:off x="4560722" y="2002536"/>
-            <a:ext cx="566928" cy="566928"/>
+          <p:cNvPr id="8" name="Text 6"/>
+          <p:cNvSpPr/>
+          <p:nvPr/>
+        </p:nvSpPr>
+        <p:spPr>
+          <a:xfrm>
+            <a:off x="3392424" y="1965960"/>
+            <a:ext cx="2432304" cy="777240"/>
+          </a:xfrm>
+          <a:prstGeom prst="rect">
+            <a:avLst/>
+          </a:prstGeom>
+          <a:noFill/>
+          <a:ln/>
+        </p:spPr>
+        <p:txBody>
+          <a:bodyPr wrap="square" lIns="0" tIns="0" rIns="0" bIns="0" rtlCol="0" anchor="ctr"/>
+          <a:lstStyle/>
+          <a:p>
+            <a:pPr algn="ctr" indent="0" marL="0">
+              <a:buNone/>
+            </a:pPr>
+            <a:r>
+              <a:rPr lang="en-US" sz="4000" b="1" dirty="0">
+                <a:solidFill>
+                  <a:srgbClr val="0D9488"/>
+                </a:solidFill>
+                <a:latin typeface="Georgia" pitchFamily="34" charset="0"/>
+                <a:ea typeface="Georgia" pitchFamily="34" charset="-122"/>
+                <a:cs typeface="Georgia" pitchFamily="34" charset="-120"/>
+              </a:rPr>
+              <a:t>60–80%</a:t>
+            </a:r>
+            <a:endParaRPr lang="en-US" sz="4000" dirty="0"/>
+          </a:p>
+        </p:txBody>
+      </p:sp>
+      <p:sp>
+        <p:nvSpPr>
+          <p:cNvPr id="9" name="Text 7"/>
+          <p:cNvSpPr/>
+          <p:nvPr/>
+        </p:nvSpPr>
+        <p:spPr>
+          <a:xfrm>
+            <a:off x="3465576" y="2734056"/>
+            <a:ext cx="2286000" cy="548640"/>
+          </a:xfrm>
+          <a:prstGeom prst="rect">
+            <a:avLst/>
+          </a:prstGeom>
+          <a:noFill/>
+          <a:ln/>
+        </p:spPr>
+        <p:txBody>
+          <a:bodyPr wrap="square" lIns="0" tIns="0" rIns="0" bIns="0" rtlCol="0" anchor="t"/>
+          <a:lstStyle/>
+          <a:p>
+            <a:pPr algn="ctr" indent="0" marL="0">
+              <a:buNone/>
+            </a:pPr>
+            <a:r>
+              <a:rPr lang="en-US" sz="1150" dirty="0">
+                <a:solidFill>
+                  <a:srgbClr val="5B6577"/>
+                </a:solidFill>
+                <a:latin typeface="Calibri" pitchFamily="34" charset="0"/>
+                <a:ea typeface="Calibri" pitchFamily="34" charset="-122"/>
+                <a:cs typeface="Calibri" pitchFamily="34" charset="-120"/>
+              </a:rPr>
+              <a:t>Typical self-service deflection of routine contacts (industry benchmark)</a:t>
+            </a:r>
+            <a:endParaRPr lang="en-US" sz="1150" dirty="0"/>
+          </a:p>
+        </p:txBody>
+      </p:sp>
+      <p:sp>
+        <p:nvSpPr>
+          <p:cNvPr id="10" name="Shape 8"/>
+          <p:cNvSpPr/>
+          <p:nvPr/>
+        </p:nvSpPr>
+        <p:spPr>
+          <a:xfrm>
+            <a:off x="6099048" y="1783080"/>
+            <a:ext cx="2615184" cy="1554480"/>
           </a:xfrm>
           <a:prstGeom prst="roundRect">
             <a:avLst>
-              <a:gd name="adj" fmla="val 19355"/>
-            </a:avLst>
-          </a:prstGeom>
-          <a:solidFill>
-            <a:srgbClr val="2563EB"/>
-          </a:solidFill>
-          <a:ln/>
-        </p:spPr>
-      </p:sp>
-      <p:pic>
-        <p:nvPicPr>
-          <p:cNvPr id="11" name="Image 1" descr="icons/sitemap.png">    </p:cNvPr>
-          <p:cNvPicPr>
-            <a:picLocks noChangeAspect="1"/>
-          </p:cNvPicPr>
-          <p:nvPr/>
-        </p:nvPicPr>
-        <p:blipFill>
-          <a:blip r:embed="rId2"/>
-          <a:stretch>
-            <a:fillRect/>
-          </a:stretch>
-        </p:blipFill>
-        <p:spPr>
-          <a:xfrm>
-            <a:off x="4697882" y="2139696"/>
-            <a:ext cx="292608" cy="292608"/>
-          </a:xfrm>
-          <a:prstGeom prst="rect">
-            <a:avLst/>
-          </a:prstGeom>
-        </p:spPr>
-      </p:pic>
-      <p:sp>
-        <p:nvSpPr>
-          <p:cNvPr id="12" name="Text 8"/>
-          <p:cNvSpPr/>
-          <p:nvPr/>
-        </p:nvSpPr>
-        <p:spPr>
-          <a:xfrm>
-            <a:off x="5310530" y="1984248"/>
-            <a:ext cx="2357018" cy="603504"/>
-          </a:xfrm>
-          <a:prstGeom prst="rect">
-            <a:avLst/>
-          </a:prstGeom>
-          <a:noFill/>
-          <a:ln/>
-        </p:spPr>
-        <p:txBody>
-          <a:bodyPr wrap="square" lIns="0" tIns="0" rIns="0" bIns="0" rtlCol="0" anchor="ctr"/>
-          <a:lstStyle/>
-          <a:p>
-            <a:pPr indent="0" marL="0">
-              <a:buNone/>
-            </a:pPr>
-            <a:r>
-              <a:rPr lang="en-US" sz="1350" b="1" dirty="0">
-                <a:solidFill>
-                  <a:srgbClr val="0F172A"/>
-                </a:solidFill>
-                <a:latin typeface="Calibri" pitchFamily="34" charset="0"/>
-                <a:ea typeface="Calibri" pitchFamily="34" charset="-122"/>
-                <a:cs typeface="Calibri" pitchFamily="34" charset="-120"/>
-              </a:rPr>
-              <a:t>Agent Development Kit (ADK)</a:t>
-            </a:r>
-            <a:endParaRPr lang="en-US" sz="1350" dirty="0"/>
-          </a:p>
-        </p:txBody>
-      </p:sp>
-      <p:sp>
-        <p:nvSpPr>
-          <p:cNvPr id="13" name="Text 9"/>
-          <p:cNvSpPr/>
-          <p:nvPr/>
-        </p:nvSpPr>
-        <p:spPr>
-          <a:xfrm>
-            <a:off x="4579010" y="2679192"/>
-            <a:ext cx="3088538" cy="740664"/>
-          </a:xfrm>
-          <a:prstGeom prst="rect">
-            <a:avLst/>
-          </a:prstGeom>
-          <a:noFill/>
-          <a:ln/>
-        </p:spPr>
-        <p:txBody>
-          <a:bodyPr wrap="square" lIns="0" tIns="0" rIns="0" bIns="0" rtlCol="0" anchor="t"/>
-          <a:lstStyle/>
-          <a:p>
-            <a:pPr marL="152400" indent="-152400">
-              <a:spcAft>
-                <a:spcPts val="500"/>
-              </a:spcAft>
-              <a:buSzPct val="100000"/>
-              <a:buChar char="•"/>
-            </a:pPr>
-            <a:r>
-              <a:rPr lang="en-US" sz="1200" dirty="0">
-                <a:solidFill>
-                  <a:srgbClr val="5B6577"/>
-                </a:solidFill>
-                <a:latin typeface="Calibri" pitchFamily="34" charset="0"/>
-                <a:ea typeface="Calibri" pitchFamily="34" charset="-122"/>
-                <a:cs typeface="Calibri" pitchFamily="34" charset="-120"/>
-              </a:rPr>
-              <a:t>First-class multi-agent orchestration, tools &amp; tracing — less glue code, more capability.</a:t>
-            </a:r>
-            <a:endParaRPr lang="en-US" sz="1200" dirty="0"/>
-          </a:p>
-        </p:txBody>
-      </p:sp>
-      <p:sp>
-        <p:nvSpPr>
-          <p:cNvPr id="14" name="Shape 10"/>
-          <p:cNvSpPr/>
-          <p:nvPr/>
-        </p:nvSpPr>
-        <p:spPr>
-          <a:xfrm>
-            <a:off x="8143037" y="1783080"/>
-            <a:ext cx="3545738" cy="1783080"/>
-          </a:xfrm>
-          <a:prstGeom prst="roundRect">
-            <a:avLst>
-              <a:gd name="adj" fmla="val 4615"/>
+              <a:gd name="adj" fmla="val 5294"/>
             </a:avLst>
           </a:prstGeom>
           <a:solidFill>
@@ -12135,146 +12423,96 @@
       </p:sp>
       <p:sp>
         <p:nvSpPr>
-          <p:cNvPr id="15" name="Shape 11"/>
-          <p:cNvSpPr/>
-          <p:nvPr/>
-        </p:nvSpPr>
-        <p:spPr>
-          <a:xfrm>
-            <a:off x="8380781" y="2002536"/>
-            <a:ext cx="566928" cy="566928"/>
+          <p:cNvPr id="11" name="Text 9"/>
+          <p:cNvSpPr/>
+          <p:nvPr/>
+        </p:nvSpPr>
+        <p:spPr>
+          <a:xfrm>
+            <a:off x="6190488" y="1965960"/>
+            <a:ext cx="2432304" cy="777240"/>
+          </a:xfrm>
+          <a:prstGeom prst="rect">
+            <a:avLst/>
+          </a:prstGeom>
+          <a:noFill/>
+          <a:ln/>
+        </p:spPr>
+        <p:txBody>
+          <a:bodyPr wrap="square" lIns="0" tIns="0" rIns="0" bIns="0" rtlCol="0" anchor="ctr"/>
+          <a:lstStyle/>
+          <a:p>
+            <a:pPr algn="ctr" indent="0" marL="0">
+              <a:buNone/>
+            </a:pPr>
+            <a:r>
+              <a:rPr lang="en-US" sz="4000" b="1" dirty="0">
+                <a:solidFill>
+                  <a:srgbClr val="F59E0B"/>
+                </a:solidFill>
+                <a:latin typeface="Georgia" pitchFamily="34" charset="0"/>
+                <a:ea typeface="Georgia" pitchFamily="34" charset="-122"/>
+                <a:cs typeface="Georgia" pitchFamily="34" charset="-120"/>
+              </a:rPr>
+              <a:t>~$0</a:t>
+            </a:r>
+            <a:endParaRPr lang="en-US" sz="4000" dirty="0"/>
+          </a:p>
+        </p:txBody>
+      </p:sp>
+      <p:sp>
+        <p:nvSpPr>
+          <p:cNvPr id="12" name="Text 10"/>
+          <p:cNvSpPr/>
+          <p:nvPr/>
+        </p:nvSpPr>
+        <p:spPr>
+          <a:xfrm>
+            <a:off x="6263640" y="2734056"/>
+            <a:ext cx="2286000" cy="548640"/>
+          </a:xfrm>
+          <a:prstGeom prst="rect">
+            <a:avLst/>
+          </a:prstGeom>
+          <a:noFill/>
+          <a:ln/>
+        </p:spPr>
+        <p:txBody>
+          <a:bodyPr wrap="square" lIns="0" tIns="0" rIns="0" bIns="0" rtlCol="0" anchor="t"/>
+          <a:lstStyle/>
+          <a:p>
+            <a:pPr algn="ctr" indent="0" marL="0">
+              <a:buNone/>
+            </a:pPr>
+            <a:r>
+              <a:rPr lang="en-US" sz="1150" dirty="0">
+                <a:solidFill>
+                  <a:srgbClr val="5B6577"/>
+                </a:solidFill>
+                <a:latin typeface="Calibri" pitchFamily="34" charset="0"/>
+                <a:ea typeface="Calibri" pitchFamily="34" charset="-122"/>
+                <a:cs typeface="Calibri" pitchFamily="34" charset="-120"/>
+              </a:rPr>
+              <a:t>Idle cost — Cloud Run scales to zero between conversations</a:t>
+            </a:r>
+            <a:endParaRPr lang="en-US" sz="1150" dirty="0"/>
+          </a:p>
+        </p:txBody>
+      </p:sp>
+      <p:sp>
+        <p:nvSpPr>
+          <p:cNvPr id="13" name="Shape 11"/>
+          <p:cNvSpPr/>
+          <p:nvPr/>
+        </p:nvSpPr>
+        <p:spPr>
+          <a:xfrm>
+            <a:off x="8897112" y="1783080"/>
+            <a:ext cx="2791663" cy="1554480"/>
           </a:xfrm>
           <a:prstGeom prst="roundRect">
             <a:avLst>
-              <a:gd name="adj" fmla="val 19355"/>
-            </a:avLst>
-          </a:prstGeom>
-          <a:solidFill>
-            <a:srgbClr val="F59E0B"/>
-          </a:solidFill>
-          <a:ln/>
-        </p:spPr>
-      </p:sp>
-      <p:pic>
-        <p:nvPicPr>
-          <p:cNvPr id="16" name="Image 2" descr="icons/bolt.png">    </p:cNvPr>
-          <p:cNvPicPr>
-            <a:picLocks noChangeAspect="1"/>
-          </p:cNvPicPr>
-          <p:nvPr/>
-        </p:nvPicPr>
-        <p:blipFill>
-          <a:blip r:embed="rId3"/>
-          <a:stretch>
-            <a:fillRect/>
-          </a:stretch>
-        </p:blipFill>
-        <p:spPr>
-          <a:xfrm>
-            <a:off x="8517941" y="2139696"/>
-            <a:ext cx="292608" cy="292608"/>
-          </a:xfrm>
-          <a:prstGeom prst="rect">
-            <a:avLst/>
-          </a:prstGeom>
-        </p:spPr>
-      </p:pic>
-      <p:sp>
-        <p:nvSpPr>
-          <p:cNvPr id="17" name="Text 12"/>
-          <p:cNvSpPr/>
-          <p:nvPr/>
-        </p:nvSpPr>
-        <p:spPr>
-          <a:xfrm>
-            <a:off x="9130589" y="1984248"/>
-            <a:ext cx="2357018" cy="603504"/>
-          </a:xfrm>
-          <a:prstGeom prst="rect">
-            <a:avLst/>
-          </a:prstGeom>
-          <a:noFill/>
-          <a:ln/>
-        </p:spPr>
-        <p:txBody>
-          <a:bodyPr wrap="square" lIns="0" tIns="0" rIns="0" bIns="0" rtlCol="0" anchor="ctr"/>
-          <a:lstStyle/>
-          <a:p>
-            <a:pPr indent="0" marL="0">
-              <a:buNone/>
-            </a:pPr>
-            <a:r>
-              <a:rPr lang="en-US" sz="1350" b="1" dirty="0">
-                <a:solidFill>
-                  <a:srgbClr val="0F172A"/>
-                </a:solidFill>
-                <a:latin typeface="Calibri" pitchFamily="34" charset="0"/>
-                <a:ea typeface="Calibri" pitchFamily="34" charset="-122"/>
-                <a:cs typeface="Calibri" pitchFamily="34" charset="-120"/>
-              </a:rPr>
-              <a:t>Cloud Run</a:t>
-            </a:r>
-            <a:endParaRPr lang="en-US" sz="1350" dirty="0"/>
-          </a:p>
-        </p:txBody>
-      </p:sp>
-      <p:sp>
-        <p:nvSpPr>
-          <p:cNvPr id="18" name="Text 13"/>
-          <p:cNvSpPr/>
-          <p:nvPr/>
-        </p:nvSpPr>
-        <p:spPr>
-          <a:xfrm>
-            <a:off x="8399069" y="2679192"/>
-            <a:ext cx="3088538" cy="740664"/>
-          </a:xfrm>
-          <a:prstGeom prst="rect">
-            <a:avLst/>
-          </a:prstGeom>
-          <a:noFill/>
-          <a:ln/>
-        </p:spPr>
-        <p:txBody>
-          <a:bodyPr wrap="square" lIns="0" tIns="0" rIns="0" bIns="0" rtlCol="0" anchor="t"/>
-          <a:lstStyle/>
-          <a:p>
-            <a:pPr marL="152400" indent="-152400">
-              <a:spcAft>
-                <a:spcPts val="500"/>
-              </a:spcAft>
-              <a:buSzPct val="100000"/>
-              <a:buChar char="•"/>
-            </a:pPr>
-            <a:r>
-              <a:rPr lang="en-US" sz="1200" dirty="0">
-                <a:solidFill>
-                  <a:srgbClr val="5B6577"/>
-                </a:solidFill>
-                <a:latin typeface="Calibri" pitchFamily="34" charset="0"/>
-                <a:ea typeface="Calibri" pitchFamily="34" charset="-122"/>
-                <a:cs typeface="Calibri" pitchFamily="34" charset="-120"/>
-              </a:rPr>
-              <a:t>Serverless, scales to zero, container-native — pay only for live conversations.</a:t>
-            </a:r>
-            <a:endParaRPr lang="en-US" sz="1200" dirty="0"/>
-          </a:p>
-        </p:txBody>
-      </p:sp>
-      <p:sp>
-        <p:nvSpPr>
-          <p:cNvPr id="19" name="Shape 14"/>
-          <p:cNvSpPr/>
-          <p:nvPr/>
-        </p:nvSpPr>
-        <p:spPr>
-          <a:xfrm>
-            <a:off x="502920" y="3794760"/>
-            <a:ext cx="3545738" cy="1783080"/>
-          </a:xfrm>
-          <a:prstGeom prst="roundRect">
-            <a:avLst>
-              <a:gd name="adj" fmla="val 4615"/>
+              <a:gd name="adj" fmla="val 5294"/>
             </a:avLst>
           </a:prstGeom>
           <a:solidFill>
@@ -12297,29 +12535,587 @@
       </p:sp>
       <p:sp>
         <p:nvSpPr>
-          <p:cNvPr id="20" name="Shape 15"/>
-          <p:cNvSpPr/>
-          <p:nvPr/>
-        </p:nvSpPr>
-        <p:spPr>
-          <a:xfrm>
-            <a:off x="740664" y="4014216"/>
-            <a:ext cx="566928" cy="566928"/>
+          <p:cNvPr id="14" name="Text 12"/>
+          <p:cNvSpPr/>
+          <p:nvPr/>
+        </p:nvSpPr>
+        <p:spPr>
+          <a:xfrm>
+            <a:off x="8988552" y="1965960"/>
+            <a:ext cx="2608783" cy="777240"/>
+          </a:xfrm>
+          <a:prstGeom prst="rect">
+            <a:avLst/>
+          </a:prstGeom>
+          <a:noFill/>
+          <a:ln/>
+        </p:spPr>
+        <p:txBody>
+          <a:bodyPr wrap="square" lIns="0" tIns="0" rIns="0" bIns="0" rtlCol="0" anchor="ctr"/>
+          <a:lstStyle/>
+          <a:p>
+            <a:pPr algn="ctr" indent="0" marL="0">
+              <a:buNone/>
+            </a:pPr>
+            <a:r>
+              <a:rPr lang="en-US" sz="4000" b="1" dirty="0">
+                <a:solidFill>
+                  <a:srgbClr val="E11D48"/>
+                </a:solidFill>
+                <a:latin typeface="Georgia" pitchFamily="34" charset="0"/>
+                <a:ea typeface="Georgia" pitchFamily="34" charset="-122"/>
+                <a:cs typeface="Georgia" pitchFamily="34" charset="-120"/>
+              </a:rPr>
+              <a:t>1 agent</a:t>
+            </a:r>
+            <a:endParaRPr lang="en-US" sz="4000" dirty="0"/>
+          </a:p>
+        </p:txBody>
+      </p:sp>
+      <p:sp>
+        <p:nvSpPr>
+          <p:cNvPr id="15" name="Text 13"/>
+          <p:cNvSpPr/>
+          <p:nvPr/>
+        </p:nvSpPr>
+        <p:spPr>
+          <a:xfrm>
+            <a:off x="9061704" y="2734056"/>
+            <a:ext cx="2462479" cy="548640"/>
+          </a:xfrm>
+          <a:prstGeom prst="rect">
+            <a:avLst/>
+          </a:prstGeom>
+          <a:noFill/>
+          <a:ln/>
+        </p:spPr>
+        <p:txBody>
+          <a:bodyPr wrap="square" lIns="0" tIns="0" rIns="0" bIns="0" rtlCol="0" anchor="t"/>
+          <a:lstStyle/>
+          <a:p>
+            <a:pPr algn="ctr" indent="0" marL="0">
+              <a:buNone/>
+            </a:pPr>
+            <a:r>
+              <a:rPr lang="en-US" sz="1150" dirty="0">
+                <a:solidFill>
+                  <a:srgbClr val="5B6577"/>
+                </a:solidFill>
+                <a:latin typeface="Calibri" pitchFamily="34" charset="0"/>
+                <a:ea typeface="Calibri" pitchFamily="34" charset="-122"/>
+                <a:cs typeface="Calibri" pitchFamily="34" charset="-120"/>
+              </a:rPr>
+              <a:t>Replaces search + support + checkout hand-offs</a:t>
+            </a:r>
+            <a:endParaRPr lang="en-US" sz="1150" dirty="0"/>
+          </a:p>
+        </p:txBody>
+      </p:sp>
+      <p:sp>
+        <p:nvSpPr>
+          <p:cNvPr id="16" name="Shape 14"/>
+          <p:cNvSpPr/>
+          <p:nvPr/>
+        </p:nvSpPr>
+        <p:spPr>
+          <a:xfrm>
+            <a:off x="502920" y="3657600"/>
+            <a:ext cx="5318608" cy="1234440"/>
           </a:xfrm>
           <a:prstGeom prst="roundRect">
             <a:avLst>
-              <a:gd name="adj" fmla="val 19355"/>
+              <a:gd name="adj" fmla="val 5926"/>
             </a:avLst>
           </a:prstGeom>
           <a:solidFill>
-            <a:srgbClr val="0D9488"/>
+            <a:srgbClr val="F5F6FB"/>
+          </a:solidFill>
+          <a:ln w="12700">
+            <a:solidFill>
+              <a:srgbClr val="E6E8F0"/>
+            </a:solidFill>
+            <a:prstDash val="solid"/>
+          </a:ln>
+        </p:spPr>
+      </p:sp>
+      <p:sp>
+        <p:nvSpPr>
+          <p:cNvPr id="17" name="Shape 15"/>
+          <p:cNvSpPr/>
+          <p:nvPr/>
+        </p:nvSpPr>
+        <p:spPr>
+          <a:xfrm>
+            <a:off x="704088" y="3986784"/>
+            <a:ext cx="548640" cy="548640"/>
+          </a:xfrm>
+          <a:prstGeom prst="roundRect">
+            <a:avLst>
+              <a:gd name="adj" fmla="val 20000"/>
+            </a:avLst>
+          </a:prstGeom>
+          <a:solidFill>
+            <a:srgbClr val="E11D48"/>
           </a:solidFill>
           <a:ln/>
         </p:spPr>
       </p:sp>
       <p:pic>
         <p:nvPicPr>
-          <p:cNvPr id="21" name="Image 3" descr="icons/db.png">    </p:cNvPr>
+          <p:cNvPr id="18" name="Image 0" descr="icons/chart.png">    </p:cNvPr>
+          <p:cNvPicPr>
+            <a:picLocks noChangeAspect="1"/>
+          </p:cNvPicPr>
+          <p:nvPr/>
+        </p:nvPicPr>
+        <p:blipFill>
+          <a:blip r:embed="rId1"/>
+          <a:stretch>
+            <a:fillRect/>
+          </a:stretch>
+        </p:blipFill>
+        <p:spPr>
+          <a:xfrm>
+            <a:off x="841248" y="4123944"/>
+            <a:ext cx="274320" cy="274320"/>
+          </a:xfrm>
+          <a:prstGeom prst="rect">
+            <a:avLst/>
+          </a:prstGeom>
+        </p:spPr>
+      </p:pic>
+      <p:sp>
+        <p:nvSpPr>
+          <p:cNvPr id="19" name="Text 16"/>
+          <p:cNvSpPr/>
+          <p:nvPr/>
+        </p:nvSpPr>
+        <p:spPr>
+          <a:xfrm>
+            <a:off x="1417320" y="3840480"/>
+            <a:ext cx="4221328" cy="365760"/>
+          </a:xfrm>
+          <a:prstGeom prst="rect">
+            <a:avLst/>
+          </a:prstGeom>
+          <a:noFill/>
+          <a:ln/>
+        </p:spPr>
+        <p:txBody>
+          <a:bodyPr wrap="square" lIns="0" tIns="0" rIns="0" bIns="0" rtlCol="0" anchor="ctr"/>
+          <a:lstStyle/>
+          <a:p>
+            <a:pPr indent="0" marL="0">
+              <a:buNone/>
+            </a:pPr>
+            <a:r>
+              <a:rPr lang="en-US" sz="1450" b="1" dirty="0">
+                <a:solidFill>
+                  <a:srgbClr val="0F172A"/>
+                </a:solidFill>
+                <a:latin typeface="Calibri" pitchFamily="34" charset="0"/>
+                <a:ea typeface="Calibri" pitchFamily="34" charset="-122"/>
+                <a:cs typeface="Calibri" pitchFamily="34" charset="-120"/>
+              </a:rPr>
+              <a:t>Higher conversion &amp; AOV</a:t>
+            </a:r>
+            <a:endParaRPr lang="en-US" sz="1450" dirty="0"/>
+          </a:p>
+        </p:txBody>
+      </p:sp>
+      <p:sp>
+        <p:nvSpPr>
+          <p:cNvPr id="20" name="Text 17"/>
+          <p:cNvSpPr/>
+          <p:nvPr/>
+        </p:nvSpPr>
+        <p:spPr>
+          <a:xfrm>
+            <a:off x="1417320" y="4206240"/>
+            <a:ext cx="4221328" cy="603504"/>
+          </a:xfrm>
+          <a:prstGeom prst="rect">
+            <a:avLst/>
+          </a:prstGeom>
+          <a:noFill/>
+          <a:ln/>
+        </p:spPr>
+        <p:txBody>
+          <a:bodyPr wrap="square" lIns="0" tIns="0" rIns="0" bIns="0" rtlCol="0" anchor="t"/>
+          <a:lstStyle/>
+          <a:p>
+            <a:pPr indent="0" marL="0">
+              <a:buNone/>
+            </a:pPr>
+            <a:r>
+              <a:rPr lang="en-US" sz="1200" dirty="0">
+                <a:solidFill>
+                  <a:srgbClr val="5B6577"/>
+                </a:solidFill>
+                <a:latin typeface="Calibri" pitchFamily="34" charset="0"/>
+                <a:ea typeface="Calibri" pitchFamily="34" charset="-122"/>
+                <a:cs typeface="Calibri" pitchFamily="34" charset="-120"/>
+              </a:rPr>
+              <a:t>Natural discovery + “see-it-shop-it” + recommendations turn questions into orders.</a:t>
+            </a:r>
+            <a:endParaRPr lang="en-US" sz="1200" dirty="0"/>
+          </a:p>
+        </p:txBody>
+      </p:sp>
+      <p:sp>
+        <p:nvSpPr>
+          <p:cNvPr id="21" name="Shape 18"/>
+          <p:cNvSpPr/>
+          <p:nvPr/>
+        </p:nvSpPr>
+        <p:spPr>
+          <a:xfrm>
+            <a:off x="6370168" y="3657600"/>
+            <a:ext cx="5318608" cy="1234440"/>
+          </a:xfrm>
+          <a:prstGeom prst="roundRect">
+            <a:avLst>
+              <a:gd name="adj" fmla="val 5926"/>
+            </a:avLst>
+          </a:prstGeom>
+          <a:solidFill>
+            <a:srgbClr val="F5F6FB"/>
+          </a:solidFill>
+          <a:ln w="12700">
+            <a:solidFill>
+              <a:srgbClr val="E6E8F0"/>
+            </a:solidFill>
+            <a:prstDash val="solid"/>
+          </a:ln>
+        </p:spPr>
+      </p:sp>
+      <p:sp>
+        <p:nvSpPr>
+          <p:cNvPr id="22" name="Shape 19"/>
+          <p:cNvSpPr/>
+          <p:nvPr/>
+        </p:nvSpPr>
+        <p:spPr>
+          <a:xfrm>
+            <a:off x="6571336" y="3986784"/>
+            <a:ext cx="548640" cy="548640"/>
+          </a:xfrm>
+          <a:prstGeom prst="roundRect">
+            <a:avLst>
+              <a:gd name="adj" fmla="val 20000"/>
+            </a:avLst>
+          </a:prstGeom>
+          <a:solidFill>
+            <a:srgbClr val="E11D48"/>
+          </a:solidFill>
+          <a:ln/>
+        </p:spPr>
+      </p:sp>
+      <p:pic>
+        <p:nvPicPr>
+          <p:cNvPr id="23" name="Image 1" descr="icons/globe.png">    </p:cNvPr>
+          <p:cNvPicPr>
+            <a:picLocks noChangeAspect="1"/>
+          </p:cNvPicPr>
+          <p:nvPr/>
+        </p:nvPicPr>
+        <p:blipFill>
+          <a:blip r:embed="rId2"/>
+          <a:stretch>
+            <a:fillRect/>
+          </a:stretch>
+        </p:blipFill>
+        <p:spPr>
+          <a:xfrm>
+            <a:off x="6708496" y="4123944"/>
+            <a:ext cx="274320" cy="274320"/>
+          </a:xfrm>
+          <a:prstGeom prst="rect">
+            <a:avLst/>
+          </a:prstGeom>
+        </p:spPr>
+      </p:pic>
+      <p:sp>
+        <p:nvSpPr>
+          <p:cNvPr id="24" name="Text 20"/>
+          <p:cNvSpPr/>
+          <p:nvPr/>
+        </p:nvSpPr>
+        <p:spPr>
+          <a:xfrm>
+            <a:off x="7284568" y="3840480"/>
+            <a:ext cx="4221328" cy="365760"/>
+          </a:xfrm>
+          <a:prstGeom prst="rect">
+            <a:avLst/>
+          </a:prstGeom>
+          <a:noFill/>
+          <a:ln/>
+        </p:spPr>
+        <p:txBody>
+          <a:bodyPr wrap="square" lIns="0" tIns="0" rIns="0" bIns="0" rtlCol="0" anchor="ctr"/>
+          <a:lstStyle/>
+          <a:p>
+            <a:pPr indent="0" marL="0">
+              <a:buNone/>
+            </a:pPr>
+            <a:r>
+              <a:rPr lang="en-US" sz="1450" b="1" dirty="0">
+                <a:solidFill>
+                  <a:srgbClr val="0F172A"/>
+                </a:solidFill>
+                <a:latin typeface="Calibri" pitchFamily="34" charset="0"/>
+                <a:ea typeface="Calibri" pitchFamily="34" charset="-122"/>
+                <a:cs typeface="Calibri" pitchFamily="34" charset="-120"/>
+              </a:rPr>
+              <a:t>Instant global reach</a:t>
+            </a:r>
+            <a:endParaRPr lang="en-US" sz="1450" dirty="0"/>
+          </a:p>
+        </p:txBody>
+      </p:sp>
+      <p:sp>
+        <p:nvSpPr>
+          <p:cNvPr id="25" name="Text 21"/>
+          <p:cNvSpPr/>
+          <p:nvPr/>
+        </p:nvSpPr>
+        <p:spPr>
+          <a:xfrm>
+            <a:off x="7284568" y="4206240"/>
+            <a:ext cx="4221328" cy="603504"/>
+          </a:xfrm>
+          <a:prstGeom prst="rect">
+            <a:avLst/>
+          </a:prstGeom>
+          <a:noFill/>
+          <a:ln/>
+        </p:spPr>
+        <p:txBody>
+          <a:bodyPr wrap="square" lIns="0" tIns="0" rIns="0" bIns="0" rtlCol="0" anchor="t"/>
+          <a:lstStyle/>
+          <a:p>
+            <a:pPr indent="0" marL="0">
+              <a:buNone/>
+            </a:pPr>
+            <a:r>
+              <a:rPr lang="en-US" sz="1200" dirty="0">
+                <a:solidFill>
+                  <a:srgbClr val="5B6577"/>
+                </a:solidFill>
+                <a:latin typeface="Calibri" pitchFamily="34" charset="0"/>
+                <a:ea typeface="Calibri" pitchFamily="34" charset="-122"/>
+                <a:cs typeface="Calibri" pitchFamily="34" charset="-120"/>
+              </a:rPr>
+              <a:t>One agent serves every language &amp; channel — no per-market chatbot rebuilds.</a:t>
+            </a:r>
+            <a:endParaRPr lang="en-US" sz="1200" dirty="0"/>
+          </a:p>
+        </p:txBody>
+      </p:sp>
+      <p:sp>
+        <p:nvSpPr>
+          <p:cNvPr id="26" name="Shape 22"/>
+          <p:cNvSpPr/>
+          <p:nvPr/>
+        </p:nvSpPr>
+        <p:spPr>
+          <a:xfrm>
+            <a:off x="502920" y="5093208"/>
+            <a:ext cx="5318608" cy="1234440"/>
+          </a:xfrm>
+          <a:prstGeom prst="roundRect">
+            <a:avLst>
+              <a:gd name="adj" fmla="val 5926"/>
+            </a:avLst>
+          </a:prstGeom>
+          <a:solidFill>
+            <a:srgbClr val="F5F6FB"/>
+          </a:solidFill>
+          <a:ln w="12700">
+            <a:solidFill>
+              <a:srgbClr val="E6E8F0"/>
+            </a:solidFill>
+            <a:prstDash val="solid"/>
+          </a:ln>
+        </p:spPr>
+      </p:sp>
+      <p:sp>
+        <p:nvSpPr>
+          <p:cNvPr id="27" name="Shape 23"/>
+          <p:cNvSpPr/>
+          <p:nvPr/>
+        </p:nvSpPr>
+        <p:spPr>
+          <a:xfrm>
+            <a:off x="704088" y="5422392"/>
+            <a:ext cx="548640" cy="548640"/>
+          </a:xfrm>
+          <a:prstGeom prst="roundRect">
+            <a:avLst>
+              <a:gd name="adj" fmla="val 20000"/>
+            </a:avLst>
+          </a:prstGeom>
+          <a:solidFill>
+            <a:srgbClr val="E11D48"/>
+          </a:solidFill>
+          <a:ln/>
+        </p:spPr>
+      </p:sp>
+      <p:pic>
+        <p:nvPicPr>
+          <p:cNvPr id="28" name="Image 2" descr="icons/bolt.png">    </p:cNvPr>
+          <p:cNvPicPr>
+            <a:picLocks noChangeAspect="1"/>
+          </p:cNvPicPr>
+          <p:nvPr/>
+        </p:nvPicPr>
+        <p:blipFill>
+          <a:blip r:embed="rId3"/>
+          <a:stretch>
+            <a:fillRect/>
+          </a:stretch>
+        </p:blipFill>
+        <p:spPr>
+          <a:xfrm>
+            <a:off x="841248" y="5559552"/>
+            <a:ext cx="274320" cy="274320"/>
+          </a:xfrm>
+          <a:prstGeom prst="rect">
+            <a:avLst/>
+          </a:prstGeom>
+        </p:spPr>
+      </p:pic>
+      <p:sp>
+        <p:nvSpPr>
+          <p:cNvPr id="29" name="Text 24"/>
+          <p:cNvSpPr/>
+          <p:nvPr/>
+        </p:nvSpPr>
+        <p:spPr>
+          <a:xfrm>
+            <a:off x="1417320" y="5276088"/>
+            <a:ext cx="4221328" cy="365760"/>
+          </a:xfrm>
+          <a:prstGeom prst="rect">
+            <a:avLst/>
+          </a:prstGeom>
+          <a:noFill/>
+          <a:ln/>
+        </p:spPr>
+        <p:txBody>
+          <a:bodyPr wrap="square" lIns="0" tIns="0" rIns="0" bIns="0" rtlCol="0" anchor="ctr"/>
+          <a:lstStyle/>
+          <a:p>
+            <a:pPr indent="0" marL="0">
+              <a:buNone/>
+            </a:pPr>
+            <a:r>
+              <a:rPr lang="en-US" sz="1450" b="1" dirty="0">
+                <a:solidFill>
+                  <a:srgbClr val="0F172A"/>
+                </a:solidFill>
+                <a:latin typeface="Calibri" pitchFamily="34" charset="0"/>
+                <a:ea typeface="Calibri" pitchFamily="34" charset="-122"/>
+                <a:cs typeface="Calibri" pitchFamily="34" charset="-120"/>
+              </a:rPr>
+              <a:t>Lower cost to serve</a:t>
+            </a:r>
+            <a:endParaRPr lang="en-US" sz="1450" dirty="0"/>
+          </a:p>
+        </p:txBody>
+      </p:sp>
+      <p:sp>
+        <p:nvSpPr>
+          <p:cNvPr id="30" name="Text 25"/>
+          <p:cNvSpPr/>
+          <p:nvPr/>
+        </p:nvSpPr>
+        <p:spPr>
+          <a:xfrm>
+            <a:off x="1417320" y="5641848"/>
+            <a:ext cx="4221328" cy="603504"/>
+          </a:xfrm>
+          <a:prstGeom prst="rect">
+            <a:avLst/>
+          </a:prstGeom>
+          <a:noFill/>
+          <a:ln/>
+        </p:spPr>
+        <p:txBody>
+          <a:bodyPr wrap="square" lIns="0" tIns="0" rIns="0" bIns="0" rtlCol="0" anchor="t"/>
+          <a:lstStyle/>
+          <a:p>
+            <a:pPr indent="0" marL="0">
+              <a:buNone/>
+            </a:pPr>
+            <a:r>
+              <a:rPr lang="en-US" sz="1200" dirty="0">
+                <a:solidFill>
+                  <a:srgbClr val="5B6577"/>
+                </a:solidFill>
+                <a:latin typeface="Calibri" pitchFamily="34" charset="0"/>
+                <a:ea typeface="Calibri" pitchFamily="34" charset="-122"/>
+                <a:cs typeface="Calibri" pitchFamily="34" charset="-120"/>
+              </a:rPr>
+              <a:t>Deflect routine contacts; serverless + free-tier-first keeps run-cost low.</a:t>
+            </a:r>
+            <a:endParaRPr lang="en-US" sz="1200" dirty="0"/>
+          </a:p>
+        </p:txBody>
+      </p:sp>
+      <p:sp>
+        <p:nvSpPr>
+          <p:cNvPr id="31" name="Shape 26"/>
+          <p:cNvSpPr/>
+          <p:nvPr/>
+        </p:nvSpPr>
+        <p:spPr>
+          <a:xfrm>
+            <a:off x="6370168" y="5093208"/>
+            <a:ext cx="5318608" cy="1234440"/>
+          </a:xfrm>
+          <a:prstGeom prst="roundRect">
+            <a:avLst>
+              <a:gd name="adj" fmla="val 5926"/>
+            </a:avLst>
+          </a:prstGeom>
+          <a:solidFill>
+            <a:srgbClr val="F5F6FB"/>
+          </a:solidFill>
+          <a:ln w="12700">
+            <a:solidFill>
+              <a:srgbClr val="E6E8F0"/>
+            </a:solidFill>
+            <a:prstDash val="solid"/>
+          </a:ln>
+        </p:spPr>
+      </p:sp>
+      <p:sp>
+        <p:nvSpPr>
+          <p:cNvPr id="32" name="Shape 27"/>
+          <p:cNvSpPr/>
+          <p:nvPr/>
+        </p:nvSpPr>
+        <p:spPr>
+          <a:xfrm>
+            <a:off x="6571336" y="5422392"/>
+            <a:ext cx="548640" cy="548640"/>
+          </a:xfrm>
+          <a:prstGeom prst="roundRect">
+            <a:avLst>
+              <a:gd name="adj" fmla="val 20000"/>
+            </a:avLst>
+          </a:prstGeom>
+          <a:solidFill>
+            <a:srgbClr val="E11D48"/>
+          </a:solidFill>
+          <a:ln/>
+        </p:spPr>
+      </p:sp>
+      <p:pic>
+        <p:nvPicPr>
+          <p:cNvPr id="33" name="Image 3" descr="icons/shield.png">    </p:cNvPr>
           <p:cNvPicPr>
             <a:picLocks noChangeAspect="1"/>
           </p:cNvPicPr>
@@ -12333,8 +13129,8 @@
         </p:blipFill>
         <p:spPr>
           <a:xfrm>
-            <a:off x="877824" y="4151376"/>
-            <a:ext cx="292608" cy="292608"/>
+            <a:off x="6708496" y="5559552"/>
+            <a:ext cx="274320" cy="274320"/>
           </a:xfrm>
           <a:prstGeom prst="rect">
             <a:avLst/>
@@ -12343,14 +13139,14 @@
       </p:pic>
       <p:sp>
         <p:nvSpPr>
-          <p:cNvPr id="22" name="Text 16"/>
-          <p:cNvSpPr/>
-          <p:nvPr/>
-        </p:nvSpPr>
-        <p:spPr>
-          <a:xfrm>
-            <a:off x="1490472" y="3995928"/>
-            <a:ext cx="2357018" cy="603504"/>
+          <p:cNvPr id="34" name="Text 28"/>
+          <p:cNvSpPr/>
+          <p:nvPr/>
+        </p:nvSpPr>
+        <p:spPr>
+          <a:xfrm>
+            <a:off x="7284568" y="5276088"/>
+            <a:ext cx="4221328" cy="365760"/>
           </a:xfrm>
           <a:prstGeom prst="rect">
             <a:avLst/>
@@ -12366,7 +13162,7 @@
               <a:buNone/>
             </a:pPr>
             <a:r>
-              <a:rPr lang="en-US" sz="1350" b="1" dirty="0">
+              <a:rPr lang="en-US" sz="1450" b="1" dirty="0">
                 <a:solidFill>
                   <a:srgbClr val="0F172A"/>
                 </a:solidFill>
@@ -12374,22 +13170,22 @@
                 <a:ea typeface="Calibri" pitchFamily="34" charset="-122"/>
                 <a:cs typeface="Calibri" pitchFamily="34" charset="-120"/>
               </a:rPr>
-              <a:t>Firestore</a:t>
-            </a:r>
-            <a:endParaRPr lang="en-US" sz="1350" dirty="0"/>
-          </a:p>
-        </p:txBody>
-      </p:sp>
-      <p:sp>
-        <p:nvSpPr>
-          <p:cNvPr id="23" name="Text 17"/>
-          <p:cNvSpPr/>
-          <p:nvPr/>
-        </p:nvSpPr>
-        <p:spPr>
-          <a:xfrm>
-            <a:off x="758952" y="4690872"/>
-            <a:ext cx="3088538" cy="740664"/>
+              <a:t>Brand-safe automation</a:t>
+            </a:r>
+            <a:endParaRPr lang="en-US" sz="1450" dirty="0"/>
+          </a:p>
+        </p:txBody>
+      </p:sp>
+      <p:sp>
+        <p:nvSpPr>
+          <p:cNvPr id="35" name="Text 29"/>
+          <p:cNvSpPr/>
+          <p:nvPr/>
+        </p:nvSpPr>
+        <p:spPr>
+          <a:xfrm>
+            <a:off x="7284568" y="5641848"/>
+            <a:ext cx="4221328" cy="603504"/>
           </a:xfrm>
           <a:prstGeom prst="rect">
             <a:avLst/>
@@ -12399,178 +13195,12 @@
         </p:spPr>
         <p:txBody>
           <a:bodyPr wrap="square" lIns="0" tIns="0" rIns="0" bIns="0" rtlCol="0" anchor="t"/>
-          <a:lstStyle/>
-          <a:p>
-            <a:pPr marL="152400" indent="-152400">
-              <a:spcAft>
-                <a:spcPts val="500"/>
-              </a:spcAft>
-              <a:buSzPct val="100000"/>
-              <a:buChar char="•"/>
-            </a:pPr>
-            <a:r>
-              <a:rPr lang="en-US" sz="1200" dirty="0">
-                <a:solidFill>
-                  <a:srgbClr val="5B6577"/>
-                </a:solidFill>
-                <a:latin typeface="Calibri" pitchFamily="34" charset="0"/>
-                <a:ea typeface="Calibri" pitchFamily="34" charset="-122"/>
-                <a:cs typeface="Calibri" pitchFamily="34" charset="-120"/>
-              </a:rPr>
-              <a:t>Durable, shared session state across instances — context survives autoscaling.</a:t>
-            </a:r>
-            <a:endParaRPr lang="en-US" sz="1200" dirty="0"/>
-          </a:p>
-        </p:txBody>
-      </p:sp>
-      <p:sp>
-        <p:nvSpPr>
-          <p:cNvPr id="24" name="Shape 18"/>
-          <p:cNvSpPr/>
-          <p:nvPr/>
-        </p:nvSpPr>
-        <p:spPr>
-          <a:xfrm>
-            <a:off x="4322978" y="3794760"/>
-            <a:ext cx="3545738" cy="1783080"/>
-          </a:xfrm>
-          <a:prstGeom prst="roundRect">
-            <a:avLst>
-              <a:gd name="adj" fmla="val 4615"/>
-            </a:avLst>
-          </a:prstGeom>
-          <a:solidFill>
-            <a:srgbClr val="FFFFFF"/>
-          </a:solidFill>
-          <a:ln w="12700">
-            <a:solidFill>
-              <a:srgbClr val="E6E8F0"/>
-            </a:solidFill>
-            <a:prstDash val="solid"/>
-          </a:ln>
-          <a:effectLst>
-            <a:outerShdw sx="100000" sy="100000" kx="0" ky="0" algn="bl" rotWithShape="0" blurRad="114300" dist="38100" dir="8100000">
-              <a:srgbClr val="0F172A">
-                <a:alpha val="16000"/>
-              </a:srgbClr>
-            </a:outerShdw>
-          </a:effectLst>
-        </p:spPr>
-      </p:sp>
-      <p:sp>
-        <p:nvSpPr>
-          <p:cNvPr id="25" name="Shape 19"/>
-          <p:cNvSpPr/>
-          <p:nvPr/>
-        </p:nvSpPr>
-        <p:spPr>
-          <a:xfrm>
-            <a:off x="4560722" y="4014216"/>
-            <a:ext cx="566928" cy="566928"/>
-          </a:xfrm>
-          <a:prstGeom prst="roundRect">
-            <a:avLst>
-              <a:gd name="adj" fmla="val 19355"/>
-            </a:avLst>
-          </a:prstGeom>
-          <a:solidFill>
-            <a:srgbClr val="E11D48"/>
-          </a:solidFill>
-          <a:ln/>
-        </p:spPr>
-      </p:sp>
-      <p:pic>
-        <p:nvPicPr>
-          <p:cNvPr id="26" name="Image 4" descr="icons/eye.png">    </p:cNvPr>
-          <p:cNvPicPr>
-            <a:picLocks noChangeAspect="1"/>
-          </p:cNvPicPr>
-          <p:nvPr/>
-        </p:nvPicPr>
-        <p:blipFill>
-          <a:blip r:embed="rId5"/>
-          <a:stretch>
-            <a:fillRect/>
-          </a:stretch>
-        </p:blipFill>
-        <p:spPr>
-          <a:xfrm>
-            <a:off x="4697882" y="4151376"/>
-            <a:ext cx="292608" cy="292608"/>
-          </a:xfrm>
-          <a:prstGeom prst="rect">
-            <a:avLst/>
-          </a:prstGeom>
-        </p:spPr>
-      </p:pic>
-      <p:sp>
-        <p:nvSpPr>
-          <p:cNvPr id="27" name="Text 20"/>
-          <p:cNvSpPr/>
-          <p:nvPr/>
-        </p:nvSpPr>
-        <p:spPr>
-          <a:xfrm>
-            <a:off x="5310530" y="3995928"/>
-            <a:ext cx="2357018" cy="603504"/>
-          </a:xfrm>
-          <a:prstGeom prst="rect">
-            <a:avLst/>
-          </a:prstGeom>
-          <a:noFill/>
-          <a:ln/>
-        </p:spPr>
-        <p:txBody>
-          <a:bodyPr wrap="square" lIns="0" tIns="0" rIns="0" bIns="0" rtlCol="0" anchor="ctr"/>
           <a:lstStyle/>
           <a:p>
             <a:pPr indent="0" marL="0">
               <a:buNone/>
             </a:pPr>
             <a:r>
-              <a:rPr lang="en-US" sz="1350" b="1" dirty="0">
-                <a:solidFill>
-                  <a:srgbClr val="0F172A"/>
-                </a:solidFill>
-                <a:latin typeface="Calibri" pitchFamily="34" charset="0"/>
-                <a:ea typeface="Calibri" pitchFamily="34" charset="-122"/>
-                <a:cs typeface="Calibri" pitchFamily="34" charset="-120"/>
-              </a:rPr>
-              <a:t>Cloud Trace &amp; Logging</a:t>
-            </a:r>
-            <a:endParaRPr lang="en-US" sz="1350" dirty="0"/>
-          </a:p>
-        </p:txBody>
-      </p:sp>
-      <p:sp>
-        <p:nvSpPr>
-          <p:cNvPr id="28" name="Text 21"/>
-          <p:cNvSpPr/>
-          <p:nvPr/>
-        </p:nvSpPr>
-        <p:spPr>
-          <a:xfrm>
-            <a:off x="4579010" y="4690872"/>
-            <a:ext cx="3088538" cy="740664"/>
-          </a:xfrm>
-          <a:prstGeom prst="rect">
-            <a:avLst/>
-          </a:prstGeom>
-          <a:noFill/>
-          <a:ln/>
-        </p:spPr>
-        <p:txBody>
-          <a:bodyPr wrap="square" lIns="0" tIns="0" rIns="0" bIns="0" rtlCol="0" anchor="t"/>
-          <a:lstStyle/>
-          <a:p>
-            <a:pPr marL="152400" indent="-152400">
-              <a:spcAft>
-                <a:spcPts val="500"/>
-              </a:spcAft>
-              <a:buSzPct val="100000"/>
-              <a:buChar char="•"/>
-            </a:pPr>
-            <a:r>
               <a:rPr lang="en-US" sz="1200" dirty="0">
                 <a:solidFill>
                   <a:srgbClr val="5B6577"/>
@@ -12579,7 +13209,7 @@
                 <a:ea typeface="Calibri" pitchFamily="34" charset="-122"/>
                 <a:cs typeface="Calibri" pitchFamily="34" charset="-120"/>
               </a:rPr>
-              <a:t>Every agent/tool is a span — pinpoint the failing node in a multi-agent turn.</a:t>
+              <a:t>No substitutions, confirm-before-charge, self-healing — automation you can trust on revenue.</a:t>
             </a:r>
             <a:endParaRPr lang="en-US" sz="1200" dirty="0"/>
           </a:p>
@@ -12587,94 +13217,14 @@
       </p:sp>
       <p:sp>
         <p:nvSpPr>
-          <p:cNvPr id="29" name="Shape 22"/>
-          <p:cNvSpPr/>
-          <p:nvPr/>
-        </p:nvSpPr>
-        <p:spPr>
-          <a:xfrm>
-            <a:off x="8143037" y="3794760"/>
-            <a:ext cx="3545738" cy="1783080"/>
-          </a:xfrm>
-          <a:prstGeom prst="roundRect">
-            <a:avLst>
-              <a:gd name="adj" fmla="val 4615"/>
-            </a:avLst>
-          </a:prstGeom>
-          <a:solidFill>
-            <a:srgbClr val="FFFFFF"/>
-          </a:solidFill>
-          <a:ln w="12700">
-            <a:solidFill>
-              <a:srgbClr val="E6E8F0"/>
-            </a:solidFill>
-            <a:prstDash val="solid"/>
-          </a:ln>
-          <a:effectLst>
-            <a:outerShdw sx="100000" sy="100000" kx="0" ky="0" algn="bl" rotWithShape="0" blurRad="114300" dist="38100" dir="8100000">
-              <a:srgbClr val="0F172A">
-                <a:alpha val="16000"/>
-              </a:srgbClr>
-            </a:outerShdw>
-          </a:effectLst>
-        </p:spPr>
-      </p:sp>
-      <p:sp>
-        <p:nvSpPr>
-          <p:cNvPr id="30" name="Shape 23"/>
-          <p:cNvSpPr/>
-          <p:nvPr/>
-        </p:nvSpPr>
-        <p:spPr>
-          <a:xfrm>
-            <a:off x="8380781" y="4014216"/>
-            <a:ext cx="566928" cy="566928"/>
-          </a:xfrm>
-          <a:prstGeom prst="roundRect">
-            <a:avLst>
-              <a:gd name="adj" fmla="val 19355"/>
-            </a:avLst>
-          </a:prstGeom>
-          <a:solidFill>
-            <a:srgbClr val="0D9488"/>
-          </a:solidFill>
-          <a:ln/>
-        </p:spPr>
-      </p:sp>
-      <p:pic>
-        <p:nvPicPr>
-          <p:cNvPr id="31" name="Image 5" descr="icons/plug.png">    </p:cNvPr>
-          <p:cNvPicPr>
-            <a:picLocks noChangeAspect="1"/>
-          </p:cNvPicPr>
-          <p:nvPr/>
-        </p:nvPicPr>
-        <p:blipFill>
-          <a:blip r:embed="rId6"/>
-          <a:stretch>
-            <a:fillRect/>
-          </a:stretch>
-        </p:blipFill>
-        <p:spPr>
-          <a:xfrm>
-            <a:off x="8517941" y="4151376"/>
-            <a:ext cx="292608" cy="292608"/>
-          </a:xfrm>
-          <a:prstGeom prst="rect">
-            <a:avLst/>
-          </a:prstGeom>
-        </p:spPr>
-      </p:pic>
-      <p:sp>
-        <p:nvSpPr>
-          <p:cNvPr id="32" name="Text 24"/>
-          <p:cNvSpPr/>
-          <p:nvPr/>
-        </p:nvSpPr>
-        <p:spPr>
-          <a:xfrm>
-            <a:off x="9130589" y="3995928"/>
-            <a:ext cx="2357018" cy="603504"/>
+          <p:cNvPr id="36" name="Text 30"/>
+          <p:cNvSpPr/>
+          <p:nvPr/>
+        </p:nvSpPr>
+        <p:spPr>
+          <a:xfrm>
+            <a:off x="502920" y="6272784"/>
+            <a:ext cx="11185855" cy="228600"/>
           </a:xfrm>
           <a:prstGeom prst="rect">
             <a:avLst/>
@@ -12690,66 +13240,23 @@
               <a:buNone/>
             </a:pPr>
             <a:r>
-              <a:rPr lang="en-US" sz="1350" b="1" dirty="0">
-                <a:solidFill>
-                  <a:srgbClr val="0F172A"/>
-                </a:solidFill>
-                <a:latin typeface="Calibri" pitchFamily="34" charset="0"/>
-                <a:ea typeface="Calibri" pitchFamily="34" charset="-122"/>
-                <a:cs typeface="Calibri" pitchFamily="34" charset="-120"/>
-              </a:rPr>
-              <a:t>Extensible to CCAI / Translation</a:t>
-            </a:r>
-            <a:endParaRPr lang="en-US" sz="1350" dirty="0"/>
-          </a:p>
-        </p:txBody>
-      </p:sp>
-      <p:sp>
-        <p:nvSpPr>
-          <p:cNvPr id="33" name="Text 25"/>
-          <p:cNvSpPr/>
-          <p:nvPr/>
-        </p:nvSpPr>
-        <p:spPr>
-          <a:xfrm>
-            <a:off x="8399069" y="4690872"/>
-            <a:ext cx="3088538" cy="740664"/>
-          </a:xfrm>
-          <a:prstGeom prst="rect">
-            <a:avLst/>
-          </a:prstGeom>
-          <a:noFill/>
-          <a:ln/>
-        </p:spPr>
-        <p:txBody>
-          <a:bodyPr wrap="square" lIns="0" tIns="0" rIns="0" bIns="0" rtlCol="0" anchor="t"/>
-          <a:lstStyle/>
-          <a:p>
-            <a:pPr marL="152400" indent="-152400">
-              <a:spcAft>
-                <a:spcPts val="500"/>
-              </a:spcAft>
-              <a:buSzPct val="100000"/>
-              <a:buChar char="•"/>
-            </a:pPr>
-            <a:r>
-              <a:rPr lang="en-US" sz="1200" dirty="0">
-                <a:solidFill>
-                  <a:srgbClr val="5B6577"/>
-                </a:solidFill>
-                <a:latin typeface="Calibri" pitchFamily="34" charset="0"/>
-                <a:ea typeface="Calibri" pitchFamily="34" charset="-122"/>
-                <a:cs typeface="Calibri" pitchFamily="34" charset="-120"/>
-              </a:rPr>
-              <a:t>Clear path to true telephony, agent-assist, and long-tail languages.</a:t>
-            </a:r>
-            <a:endParaRPr lang="en-US" sz="1200" dirty="0"/>
-          </a:p>
-        </p:txBody>
-      </p:sp>
-      <p:sp>
-        <p:nvSpPr>
-          <p:cNvPr id="34" name="Text 26"/>
+              <a:rPr lang="en-US" sz="900" i="1" dirty="0">
+                <a:solidFill>
+                  <a:srgbClr val="8A94A6"/>
+                </a:solidFill>
+                <a:latin typeface="Calibri" pitchFamily="34" charset="0"/>
+                <a:ea typeface="Calibri" pitchFamily="34" charset="-122"/>
+                <a:cs typeface="Calibri" pitchFamily="34" charset="-120"/>
+              </a:rPr>
+              <a:t>Benchmarks are illustrative industry ranges, not client results.</a:t>
+            </a:r>
+            <a:endParaRPr lang="en-US" sz="900" dirty="0"/>
+          </a:p>
+        </p:txBody>
+      </p:sp>
+      <p:sp>
+        <p:nvSpPr>
+          <p:cNvPr id="37" name="Text 31"/>
           <p:cNvSpPr/>
           <p:nvPr/>
         </p:nvSpPr>
@@ -12788,7 +13295,7 @@
       </p:sp>
       <p:sp>
         <p:nvSpPr>
-          <p:cNvPr id="35" name="Text 27"/>
+          <p:cNvPr id="38" name="Text 32"/>
           <p:cNvSpPr/>
           <p:nvPr/>
         </p:nvSpPr>
@@ -12887,13 +13394,13 @@
             <a:r>
               <a:rPr lang="en-US" sz="1200" b="1" spc="300" kern="0" dirty="0">
                 <a:solidFill>
-                  <a:srgbClr val="7C3AED"/>
-                </a:solidFill>
-                <a:latin typeface="Calibri" pitchFamily="34" charset="0"/>
-                <a:ea typeface="Calibri" pitchFamily="34" charset="-122"/>
-                <a:cs typeface="Calibri" pitchFamily="34" charset="-120"/>
-              </a:rPr>
-              <a:t>WHAT I'D CARRY INTO THE NEXT BUILD</a:t>
+                  <a:srgbClr val="2563EB"/>
+                </a:solidFill>
+                <a:latin typeface="Calibri" pitchFamily="34" charset="0"/>
+                <a:ea typeface="Calibri" pitchFamily="34" charset="-122"/>
+                <a:cs typeface="Calibri" pitchFamily="34" charset="-120"/>
+              </a:rPr>
+              <a:t>WHY GOOGLE CLOUD IS THE RIGHT PLATFORM</a:t>
             </a:r>
             <a:endParaRPr lang="en-US" sz="1200" dirty="0"/>
           </a:p>
@@ -12932,7 +13439,7 @@
                 <a:ea typeface="Georgia" pitchFamily="34" charset="-122"/>
                 <a:cs typeface="Georgia" pitchFamily="34" charset="-120"/>
               </a:rPr>
-              <a:t>Key learnings</a:t>
+              <a:t>The architecture maps cleanly to Google Cloud strengths</a:t>
             </a:r>
             <a:endParaRPr lang="en-US" sz="2800" dirty="0"/>
           </a:p>
@@ -12947,11 +13454,11 @@
         <p:spPr>
           <a:xfrm>
             <a:off x="502920" y="1783080"/>
-            <a:ext cx="3545738" cy="1810512"/>
+            <a:ext cx="3545738" cy="1783080"/>
           </a:xfrm>
           <a:prstGeom prst="roundRect">
             <a:avLst>
-              <a:gd name="adj" fmla="val 4545"/>
+              <a:gd name="adj" fmla="val 4615"/>
             </a:avLst>
           </a:prstGeom>
           <a:solidFill>
@@ -12996,7 +13503,7 @@
       </p:sp>
       <p:pic>
         <p:nvPicPr>
-          <p:cNvPr id="6" name="Image 0" descr="icons/brain.png">    </p:cNvPr>
+          <p:cNvPr id="6" name="Image 0" descr="icons/robot.png">    </p:cNvPr>
           <p:cNvPicPr>
             <a:picLocks noChangeAspect="1"/>
           </p:cNvPicPr>
@@ -13043,7 +13550,7 @@
               <a:buNone/>
             </a:pPr>
             <a:r>
-              <a:rPr lang="en-US" sz="1300" b="1" dirty="0">
+              <a:rPr lang="en-US" sz="1350" b="1" dirty="0">
                 <a:solidFill>
                   <a:srgbClr val="0F172A"/>
                 </a:solidFill>
@@ -13051,9 +13558,9 @@
                 <a:ea typeface="Calibri" pitchFamily="34" charset="-122"/>
                 <a:cs typeface="Calibri" pitchFamily="34" charset="-120"/>
               </a:rPr>
-              <a:t>“ReAct” is a paradigm, not a class</a:t>
-            </a:r>
-            <a:endParaRPr lang="en-US" sz="1300" dirty="0"/>
+              <a:t>Vertex AI · Gemini 2.5 Flash</a:t>
+            </a:r>
+            <a:endParaRPr lang="en-US" sz="1350" dirty="0"/>
           </a:p>
         </p:txBody>
       </p:sp>
@@ -13066,7 +13573,7 @@
         <p:spPr>
           <a:xfrm>
             <a:off x="758952" y="2679192"/>
-            <a:ext cx="3088538" cy="768096"/>
+            <a:ext cx="3088538" cy="740664"/>
           </a:xfrm>
           <a:prstGeom prst="rect">
             <a:avLst/>
@@ -13086,7 +13593,7 @@
               <a:buChar char="•"/>
             </a:pPr>
             <a:r>
-              <a:rPr lang="en-US" sz="1150" dirty="0">
+              <a:rPr lang="en-US" sz="1200" dirty="0">
                 <a:solidFill>
                   <a:srgbClr val="5B6577"/>
                 </a:solidFill>
@@ -13094,9 +13601,9 @@
                 <a:ea typeface="Calibri" pitchFamily="34" charset="-122"/>
                 <a:cs typeface="Calibri" pitchFamily="34" charset="-120"/>
               </a:rPr>
-              <a:t>Native function-calling IS ReAct — done better; reach for a text-scratchpad planner only when you want a visible plan.</a:t>
-            </a:r>
-            <a:endParaRPr lang="en-US" sz="1150" dirty="0"/>
+              <a:t>One natively-multimodal model — text, reasoning &amp; vision in a managed, secure, high-quota service.</a:t>
+            </a:r>
+            <a:endParaRPr lang="en-US" sz="1200" dirty="0"/>
           </a:p>
         </p:txBody>
       </p:sp>
@@ -13109,11 +13616,11 @@
         <p:spPr>
           <a:xfrm>
             <a:off x="4322978" y="1783080"/>
-            <a:ext cx="3545738" cy="1810512"/>
+            <a:ext cx="3545738" cy="1783080"/>
           </a:xfrm>
           <a:prstGeom prst="roundRect">
             <a:avLst>
-              <a:gd name="adj" fmla="val 4545"/>
+              <a:gd name="adj" fmla="val 4615"/>
             </a:avLst>
           </a:prstGeom>
           <a:solidFill>
@@ -13151,14 +13658,14 @@
             </a:avLst>
           </a:prstGeom>
           <a:solidFill>
-            <a:srgbClr val="0D9488"/>
+            <a:srgbClr val="2563EB"/>
           </a:solidFill>
           <a:ln/>
         </p:spPr>
       </p:sp>
       <p:pic>
         <p:nvPicPr>
-          <p:cNvPr id="11" name="Image 1" descr="icons/lock.png">    </p:cNvPr>
+          <p:cNvPr id="11" name="Image 1" descr="icons/sitemap.png">    </p:cNvPr>
           <p:cNvPicPr>
             <a:picLocks noChangeAspect="1"/>
           </p:cNvPicPr>
@@ -13205,7 +13712,7 @@
               <a:buNone/>
             </a:pPr>
             <a:r>
-              <a:rPr lang="en-US" sz="1300" b="1" dirty="0">
+              <a:rPr lang="en-US" sz="1350" b="1" dirty="0">
                 <a:solidFill>
                   <a:srgbClr val="0F172A"/>
                 </a:solidFill>
@@ -13213,9 +13720,9 @@
                 <a:ea typeface="Calibri" pitchFamily="34" charset="-122"/>
                 <a:cs typeface="Calibri" pitchFamily="34" charset="-120"/>
               </a:rPr>
-              <a:t>LLM orchestrates; code transacts</a:t>
-            </a:r>
-            <a:endParaRPr lang="en-US" sz="1300" dirty="0"/>
+              <a:t>Agent Development Kit (ADK)</a:t>
+            </a:r>
+            <a:endParaRPr lang="en-US" sz="1350" dirty="0"/>
           </a:p>
         </p:txBody>
       </p:sp>
@@ -13228,7 +13735,7 @@
         <p:spPr>
           <a:xfrm>
             <a:off x="4579010" y="2679192"/>
-            <a:ext cx="3088538" cy="768096"/>
+            <a:ext cx="3088538" cy="740664"/>
           </a:xfrm>
           <a:prstGeom prst="rect">
             <a:avLst/>
@@ -13248,7 +13755,7 @@
               <a:buChar char="•"/>
             </a:pPr>
             <a:r>
-              <a:rPr lang="en-US" sz="1150" dirty="0">
+              <a:rPr lang="en-US" sz="1200" dirty="0">
                 <a:solidFill>
                   <a:srgbClr val="5B6577"/>
                 </a:solidFill>
@@ -13256,9 +13763,9 @@
                 <a:ea typeface="Calibri" pitchFamily="34" charset="-122"/>
                 <a:cs typeface="Calibri" pitchFamily="34" charset="-120"/>
               </a:rPr>
-              <a:t>Route money-affecting / irreversible actions through deterministic, auditable handlers — never the model.</a:t>
-            </a:r>
-            <a:endParaRPr lang="en-US" sz="1150" dirty="0"/>
+              <a:t>First-class multi-agent orchestration, tools &amp; tracing — less glue code, more capability.</a:t>
+            </a:r>
+            <a:endParaRPr lang="en-US" sz="1200" dirty="0"/>
           </a:p>
         </p:txBody>
       </p:sp>
@@ -13271,11 +13778,11 @@
         <p:spPr>
           <a:xfrm>
             <a:off x="8143037" y="1783080"/>
-            <a:ext cx="3545738" cy="1810512"/>
+            <a:ext cx="3545738" cy="1783080"/>
           </a:xfrm>
           <a:prstGeom prst="roundRect">
             <a:avLst>
-              <a:gd name="adj" fmla="val 4545"/>
+              <a:gd name="adj" fmla="val 4615"/>
             </a:avLst>
           </a:prstGeom>
           <a:solidFill>
@@ -13313,14 +13820,14 @@
             </a:avLst>
           </a:prstGeom>
           <a:solidFill>
-            <a:srgbClr val="2563EB"/>
+            <a:srgbClr val="F59E0B"/>
           </a:solidFill>
           <a:ln/>
         </p:spPr>
       </p:sp>
       <p:pic>
         <p:nvPicPr>
-          <p:cNvPr id="16" name="Image 2" descr="icons/sitemap.png">    </p:cNvPr>
+          <p:cNvPr id="16" name="Image 2" descr="icons/bolt.png">    </p:cNvPr>
           <p:cNvPicPr>
             <a:picLocks noChangeAspect="1"/>
           </p:cNvPicPr>
@@ -13367,7 +13874,7 @@
               <a:buNone/>
             </a:pPr>
             <a:r>
-              <a:rPr lang="en-US" sz="1300" b="1" dirty="0">
+              <a:rPr lang="en-US" sz="1350" b="1" dirty="0">
                 <a:solidFill>
                   <a:srgbClr val="0F172A"/>
                 </a:solidFill>
@@ -13375,9 +13882,9 @@
                 <a:ea typeface="Calibri" pitchFamily="34" charset="-122"/>
                 <a:cs typeface="Calibri" pitchFamily="34" charset="-120"/>
               </a:rPr>
-              <a:t>Loop safety is graph shape, not prompts</a:t>
-            </a:r>
-            <a:endParaRPr lang="en-US" sz="1300" dirty="0"/>
+              <a:t>Cloud Run</a:t>
+            </a:r>
+            <a:endParaRPr lang="en-US" sz="1350" dirty="0"/>
           </a:p>
         </p:txBody>
       </p:sp>
@@ -13390,7 +13897,7 @@
         <p:spPr>
           <a:xfrm>
             <a:off x="8399069" y="2679192"/>
-            <a:ext cx="3088538" cy="768096"/>
+            <a:ext cx="3088538" cy="740664"/>
           </a:xfrm>
           <a:prstGeom prst="rect">
             <a:avLst/>
@@ -13410,7 +13917,7 @@
               <a:buChar char="•"/>
             </a:pPr>
             <a:r>
-              <a:rPr lang="en-US" sz="1150" dirty="0">
+              <a:rPr lang="en-US" sz="1200" dirty="0">
                 <a:solidFill>
                   <a:srgbClr val="5B6577"/>
                 </a:solidFill>
@@ -13418,9 +13925,9 @@
                 <a:ea typeface="Calibri" pitchFamily="34" charset="-122"/>
                 <a:cs typeface="Calibri" pitchFamily="34" charset="-120"/>
               </a:rPr>
-              <a:t>Agent-as-tool (no transfer-back), workers with no nested agents, single-pass turns — cycles can't exist by construction.</a:t>
-            </a:r>
-            <a:endParaRPr lang="en-US" sz="1150" dirty="0"/>
+              <a:t>Serverless, scales to zero, container-native — pay only for live conversations.</a:t>
+            </a:r>
+            <a:endParaRPr lang="en-US" sz="1200" dirty="0"/>
           </a:p>
         </p:txBody>
       </p:sp>
@@ -13432,12 +13939,12 @@
         </p:nvSpPr>
         <p:spPr>
           <a:xfrm>
-            <a:off x="502920" y="3822192"/>
-            <a:ext cx="3545738" cy="1810512"/>
+            <a:off x="502920" y="3794760"/>
+            <a:ext cx="3545738" cy="1783080"/>
           </a:xfrm>
           <a:prstGeom prst="roundRect">
             <a:avLst>
-              <a:gd name="adj" fmla="val 4545"/>
+              <a:gd name="adj" fmla="val 4615"/>
             </a:avLst>
           </a:prstGeom>
           <a:solidFill>
@@ -13466,7 +13973,7 @@
         </p:nvSpPr>
         <p:spPr>
           <a:xfrm>
-            <a:off x="740664" y="4041648"/>
+            <a:off x="740664" y="4014216"/>
             <a:ext cx="566928" cy="566928"/>
           </a:xfrm>
           <a:prstGeom prst="roundRect">
@@ -13475,14 +13982,14 @@
             </a:avLst>
           </a:prstGeom>
           <a:solidFill>
-            <a:srgbClr val="E11D48"/>
+            <a:srgbClr val="0D9488"/>
           </a:solidFill>
           <a:ln/>
         </p:spPr>
       </p:sp>
       <p:pic>
         <p:nvPicPr>
-          <p:cNvPr id="21" name="Image 3" descr="icons/sync.png">    </p:cNvPr>
+          <p:cNvPr id="21" name="Image 3" descr="icons/db.png">    </p:cNvPr>
           <p:cNvPicPr>
             <a:picLocks noChangeAspect="1"/>
           </p:cNvPicPr>
@@ -13496,7 +14003,7 @@
         </p:blipFill>
         <p:spPr>
           <a:xfrm>
-            <a:off x="877824" y="4178808"/>
+            <a:off x="877824" y="4151376"/>
             <a:ext cx="292608" cy="292608"/>
           </a:xfrm>
           <a:prstGeom prst="rect">
@@ -13512,7 +14019,7 @@
         </p:nvSpPr>
         <p:spPr>
           <a:xfrm>
-            <a:off x="1490472" y="4023360"/>
+            <a:off x="1490472" y="3995928"/>
             <a:ext cx="2357018" cy="603504"/>
           </a:xfrm>
           <a:prstGeom prst="rect">
@@ -13529,7 +14036,7 @@
               <a:buNone/>
             </a:pPr>
             <a:r>
-              <a:rPr lang="en-US" sz="1300" b="1" dirty="0">
+              <a:rPr lang="en-US" sz="1350" b="1" dirty="0">
                 <a:solidFill>
                   <a:srgbClr val="0F172A"/>
                 </a:solidFill>
@@ -13537,9 +14044,9 @@
                 <a:ea typeface="Calibri" pitchFamily="34" charset="-122"/>
                 <a:cs typeface="Calibri" pitchFamily="34" charset="-120"/>
               </a:rPr>
-              <a:t>A model quirk that bit once bites again</a:t>
-            </a:r>
-            <a:endParaRPr lang="en-US" sz="1300" dirty="0"/>
+              <a:t>Firestore</a:t>
+            </a:r>
+            <a:endParaRPr lang="en-US" sz="1350" dirty="0"/>
           </a:p>
         </p:txBody>
       </p:sp>
@@ -13551,8 +14058,8 @@
         </p:nvSpPr>
         <p:spPr>
           <a:xfrm>
-            <a:off x="758952" y="4718304"/>
-            <a:ext cx="3088538" cy="768096"/>
+            <a:off x="758952" y="4690872"/>
+            <a:ext cx="3088538" cy="740664"/>
           </a:xfrm>
           <a:prstGeom prst="rect">
             <a:avLst/>
@@ -13572,7 +14079,7 @@
               <a:buChar char="•"/>
             </a:pPr>
             <a:r>
-              <a:rPr lang="en-US" sz="1150" dirty="0">
+              <a:rPr lang="en-US" sz="1200" dirty="0">
                 <a:solidFill>
                   <a:srgbClr val="5B6577"/>
                 </a:solidFill>
@@ -13580,9 +14087,9 @@
                 <a:ea typeface="Calibri" pitchFamily="34" charset="-122"/>
                 <a:cs typeface="Calibri" pitchFamily="34" charset="-120"/>
               </a:rPr>
-              <a:t>Encode the remedy as a reusable pattern (thinking_budget=0 fixed both vision and the ReAct advisor).</a:t>
-            </a:r>
-            <a:endParaRPr lang="en-US" sz="1150" dirty="0"/>
+              <a:t>Durable, shared session state across instances — context survives autoscaling.</a:t>
+            </a:r>
+            <a:endParaRPr lang="en-US" sz="1200" dirty="0"/>
           </a:p>
         </p:txBody>
       </p:sp>
@@ -13594,12 +14101,12 @@
         </p:nvSpPr>
         <p:spPr>
           <a:xfrm>
-            <a:off x="4322978" y="3822192"/>
-            <a:ext cx="3545738" cy="1810512"/>
+            <a:off x="4322978" y="3794760"/>
+            <a:ext cx="3545738" cy="1783080"/>
           </a:xfrm>
           <a:prstGeom prst="roundRect">
             <a:avLst>
-              <a:gd name="adj" fmla="val 4545"/>
+              <a:gd name="adj" fmla="val 4615"/>
             </a:avLst>
           </a:prstGeom>
           <a:solidFill>
@@ -13628,7 +14135,7 @@
         </p:nvSpPr>
         <p:spPr>
           <a:xfrm>
-            <a:off x="4560722" y="4041648"/>
+            <a:off x="4560722" y="4014216"/>
             <a:ext cx="566928" cy="566928"/>
           </a:xfrm>
           <a:prstGeom prst="roundRect">
@@ -13637,14 +14144,14 @@
             </a:avLst>
           </a:prstGeom>
           <a:solidFill>
-            <a:srgbClr val="16A34A"/>
+            <a:srgbClr val="E11D48"/>
           </a:solidFill>
           <a:ln/>
         </p:spPr>
       </p:sp>
       <p:pic>
         <p:nvPicPr>
-          <p:cNvPr id="26" name="Image 4" descr="icons/check.png">    </p:cNvPr>
+          <p:cNvPr id="26" name="Image 4" descr="icons/eye.png">    </p:cNvPr>
           <p:cNvPicPr>
             <a:picLocks noChangeAspect="1"/>
           </p:cNvPicPr>
@@ -13658,7 +14165,7 @@
         </p:blipFill>
         <p:spPr>
           <a:xfrm>
-            <a:off x="4697882" y="4178808"/>
+            <a:off x="4697882" y="4151376"/>
             <a:ext cx="292608" cy="292608"/>
           </a:xfrm>
           <a:prstGeom prst="rect">
@@ -13674,7 +14181,7 @@
         </p:nvSpPr>
         <p:spPr>
           <a:xfrm>
-            <a:off x="5310530" y="4023360"/>
+            <a:off x="5310530" y="3995928"/>
             <a:ext cx="2357018" cy="603504"/>
           </a:xfrm>
           <a:prstGeom prst="rect">
@@ -13691,7 +14198,7 @@
               <a:buNone/>
             </a:pPr>
             <a:r>
-              <a:rPr lang="en-US" sz="1300" b="1" dirty="0">
+              <a:rPr lang="en-US" sz="1350" b="1" dirty="0">
                 <a:solidFill>
                   <a:srgbClr val="0F172A"/>
                 </a:solidFill>
@@ -13699,9 +14206,9 @@
                 <a:ea typeface="Calibri" pitchFamily="34" charset="-122"/>
                 <a:cs typeface="Calibri" pitchFamily="34" charset="-120"/>
               </a:rPr>
-              <a:t>Test the path production runs</a:t>
-            </a:r>
-            <a:endParaRPr lang="en-US" sz="1300" dirty="0"/>
+              <a:t>Cloud Trace &amp; Logging</a:t>
+            </a:r>
+            <a:endParaRPr lang="en-US" sz="1350" dirty="0"/>
           </a:p>
         </p:txBody>
       </p:sp>
@@ -13713,8 +14220,8 @@
         </p:nvSpPr>
         <p:spPr>
           <a:xfrm>
-            <a:off x="4579010" y="4718304"/>
-            <a:ext cx="3088538" cy="768096"/>
+            <a:off x="4579010" y="4690872"/>
+            <a:ext cx="3088538" cy="740664"/>
           </a:xfrm>
           <a:prstGeom prst="rect">
             <a:avLst/>
@@ -13734,7 +14241,7 @@
               <a:buChar char="•"/>
             </a:pPr>
             <a:r>
-              <a:rPr lang="en-US" sz="1150" dirty="0">
+              <a:rPr lang="en-US" sz="1200" dirty="0">
                 <a:solidFill>
                   <a:srgbClr val="5B6577"/>
                 </a:solidFill>
@@ -13742,9 +14249,9 @@
                 <a:ea typeface="Calibri" pitchFamily="34" charset="-122"/>
                 <a:cs typeface="Calibri" pitchFamily="34" charset="-120"/>
               </a:rPr>
-              <a:t>A cloud-only ADK bug hid behind a green local suite — a CI-sim of the prod fallback is what gave confidence.</a:t>
-            </a:r>
-            <a:endParaRPr lang="en-US" sz="1150" dirty="0"/>
+              <a:t>Every agent/tool is a span — pinpoint the failing node in a multi-agent turn.</a:t>
+            </a:r>
+            <a:endParaRPr lang="en-US" sz="1200" dirty="0"/>
           </a:p>
         </p:txBody>
       </p:sp>
@@ -13756,12 +14263,12 @@
         </p:nvSpPr>
         <p:spPr>
           <a:xfrm>
-            <a:off x="8143037" y="3822192"/>
-            <a:ext cx="3545738" cy="1810512"/>
+            <a:off x="8143037" y="3794760"/>
+            <a:ext cx="3545738" cy="1783080"/>
           </a:xfrm>
           <a:prstGeom prst="roundRect">
             <a:avLst>
-              <a:gd name="adj" fmla="val 4545"/>
+              <a:gd name="adj" fmla="val 4615"/>
             </a:avLst>
           </a:prstGeom>
           <a:solidFill>
@@ -13790,7 +14297,7 @@
         </p:nvSpPr>
         <p:spPr>
           <a:xfrm>
-            <a:off x="8380781" y="4041648"/>
+            <a:off x="8380781" y="4014216"/>
             <a:ext cx="566928" cy="566928"/>
           </a:xfrm>
           <a:prstGeom prst="roundRect">
@@ -13806,7 +14313,7 @@
       </p:sp>
       <p:pic>
         <p:nvPicPr>
-          <p:cNvPr id="31" name="Image 5" descr="icons/db.png">    </p:cNvPr>
+          <p:cNvPr id="31" name="Image 5" descr="icons/plug.png">    </p:cNvPr>
           <p:cNvPicPr>
             <a:picLocks noChangeAspect="1"/>
           </p:cNvPicPr>
@@ -13820,7 +14327,7 @@
         </p:blipFill>
         <p:spPr>
           <a:xfrm>
-            <a:off x="8517941" y="4178808"/>
+            <a:off x="8517941" y="4151376"/>
             <a:ext cx="292608" cy="292608"/>
           </a:xfrm>
           <a:prstGeom prst="rect">
@@ -13836,7 +14343,7 @@
         </p:nvSpPr>
         <p:spPr>
           <a:xfrm>
-            <a:off x="9130589" y="4023360"/>
+            <a:off x="9130589" y="3995928"/>
             <a:ext cx="2357018" cy="603504"/>
           </a:xfrm>
           <a:prstGeom prst="rect">
@@ -13853,7 +14360,7 @@
               <a:buNone/>
             </a:pPr>
             <a:r>
-              <a:rPr lang="en-US" sz="1300" b="1" dirty="0">
+              <a:rPr lang="en-US" sz="1350" b="1" dirty="0">
                 <a:solidFill>
                   <a:srgbClr val="0F172A"/>
                 </a:solidFill>
@@ -13861,9 +14368,9 @@
                 <a:ea typeface="Calibri" pitchFamily="34" charset="-122"/>
                 <a:cs typeface="Calibri" pitchFamily="34" charset="-120"/>
               </a:rPr>
-              <a:t>Centralize state; keep agents stateless</a:t>
-            </a:r>
-            <a:endParaRPr lang="en-US" sz="1300" dirty="0"/>
+              <a:t>Extensible to CCAI / Translation</a:t>
+            </a:r>
+            <a:endParaRPr lang="en-US" sz="1350" dirty="0"/>
           </a:p>
         </p:txBody>
       </p:sp>
@@ -13875,8 +14382,8 @@
         </p:nvSpPr>
         <p:spPr>
           <a:xfrm>
-            <a:off x="8399069" y="4718304"/>
-            <a:ext cx="3088538" cy="768096"/>
+            <a:off x="8399069" y="4690872"/>
+            <a:ext cx="3088538" cy="740664"/>
           </a:xfrm>
           <a:prstGeom prst="rect">
             <a:avLst/>
@@ -13896,7 +14403,7 @@
               <a:buChar char="•"/>
             </a:pPr>
             <a:r>
-              <a:rPr lang="en-US" sz="1150" dirty="0">
+              <a:rPr lang="en-US" sz="1200" dirty="0">
                 <a:solidFill>
                   <a:srgbClr val="5B6577"/>
                 </a:solidFill>
@@ -13904,9 +14411,9 @@
                 <a:ea typeface="Calibri" pitchFamily="34" charset="-122"/>
                 <a:cs typeface="Calibri" pitchFamily="34" charset="-120"/>
               </a:rPr>
-              <a:t>One durable session store by session_id; let read-only agents pull memory from tools, not their own state.</a:t>
-            </a:r>
-            <a:endParaRPr lang="en-US" sz="1150" dirty="0"/>
+              <a:t>Clear path to true telephony, agent-assist, and long-tail languages.</a:t>
+            </a:r>
+            <a:endParaRPr lang="en-US" sz="1200" dirty="0"/>
           </a:p>
         </p:txBody>
       </p:sp>
@@ -15238,13 +15745,13 @@
             <a:r>
               <a:rPr lang="en-US" sz="1200" b="1" spc="300" kern="0" dirty="0">
                 <a:solidFill>
-                  <a:srgbClr val="0D9488"/>
-                </a:solidFill>
-                <a:latin typeface="Calibri" pitchFamily="34" charset="0"/>
-                <a:ea typeface="Calibri" pitchFamily="34" charset="-122"/>
-                <a:cs typeface="Calibri" pitchFamily="34" charset="-120"/>
-              </a:rPr>
-              <a:t>IMPLEMENTATION &amp; NEXT STEPS</a:t>
+                  <a:srgbClr val="7C3AED"/>
+                </a:solidFill>
+                <a:latin typeface="Calibri" pitchFamily="34" charset="0"/>
+                <a:ea typeface="Calibri" pitchFamily="34" charset="-122"/>
+                <a:cs typeface="Calibri" pitchFamily="34" charset="-120"/>
+              </a:rPr>
+              <a:t>WHAT I'D CARRY INTO THE NEXT BUILD</a:t>
             </a:r>
             <a:endParaRPr lang="en-US" sz="1200" dirty="0"/>
           </a:p>
@@ -15283,7 +15790,7 @@
                 <a:ea typeface="Georgia" pitchFamily="34" charset="-122"/>
                 <a:cs typeface="Georgia" pitchFamily="34" charset="-120"/>
               </a:rPr>
-              <a:t>From working prototype to production ramp</a:t>
+              <a:t>Key learnings</a:t>
             </a:r>
             <a:endParaRPr lang="en-US" sz="2800" dirty="0"/>
           </a:p>
@@ -15297,12 +15804,12 @@
         </p:nvSpPr>
         <p:spPr>
           <a:xfrm>
-            <a:off x="502920" y="1920240"/>
-            <a:ext cx="2590724" cy="3383280"/>
+            <a:off x="502920" y="1783080"/>
+            <a:ext cx="3545738" cy="1810512"/>
           </a:xfrm>
           <a:prstGeom prst="roundRect">
             <a:avLst>
-              <a:gd name="adj" fmla="val 3177"/>
+              <a:gd name="adj" fmla="val 4545"/>
             </a:avLst>
           </a:prstGeom>
           <a:solidFill>
@@ -15331,43 +15838,23 @@
         </p:nvSpPr>
         <p:spPr>
           <a:xfrm>
-            <a:off x="502920" y="1920240"/>
-            <a:ext cx="2590724" cy="109728"/>
-          </a:xfrm>
-          <a:prstGeom prst="rect">
-            <a:avLst/>
-          </a:prstGeom>
-          <a:solidFill>
-            <a:srgbClr val="16A34A"/>
-          </a:solidFill>
-          <a:ln/>
-        </p:spPr>
-      </p:sp>
-      <p:sp>
-        <p:nvSpPr>
-          <p:cNvPr id="6" name="Shape 4"/>
-          <p:cNvSpPr/>
-          <p:nvPr/>
-        </p:nvSpPr>
-        <p:spPr>
-          <a:xfrm>
-            <a:off x="722376" y="2231136"/>
-            <a:ext cx="603504" cy="603504"/>
+            <a:off x="740664" y="2002536"/>
+            <a:ext cx="566928" cy="566928"/>
           </a:xfrm>
           <a:prstGeom prst="roundRect">
             <a:avLst>
-              <a:gd name="adj" fmla="val 19697"/>
+              <a:gd name="adj" fmla="val 19355"/>
             </a:avLst>
           </a:prstGeom>
           <a:solidFill>
-            <a:srgbClr val="16A34A"/>
+            <a:srgbClr val="7C3AED"/>
           </a:solidFill>
           <a:ln/>
         </p:spPr>
       </p:sp>
       <p:pic>
         <p:nvPicPr>
-          <p:cNvPr id="7" name="Image 0" descr="icons/check.png">    </p:cNvPr>
+          <p:cNvPr id="6" name="Image 0" descr="icons/brain.png">    </p:cNvPr>
           <p:cNvPicPr>
             <a:picLocks noChangeAspect="1"/>
           </p:cNvPicPr>
@@ -15381,7 +15868,7 @@
         </p:blipFill>
         <p:spPr>
           <a:xfrm>
-            <a:off x="877824" y="2386584"/>
+            <a:off x="877824" y="2139696"/>
             <a:ext cx="292608" cy="292608"/>
           </a:xfrm>
           <a:prstGeom prst="rect">
@@ -15391,14 +15878,14 @@
       </p:pic>
       <p:sp>
         <p:nvSpPr>
-          <p:cNvPr id="8" name="Text 5"/>
-          <p:cNvSpPr/>
-          <p:nvPr/>
-        </p:nvSpPr>
-        <p:spPr>
-          <a:xfrm>
-            <a:off x="704088" y="2944368"/>
-            <a:ext cx="2188388" cy="548640"/>
+          <p:cNvPr id="7" name="Text 4"/>
+          <p:cNvSpPr/>
+          <p:nvPr/>
+        </p:nvSpPr>
+        <p:spPr>
+          <a:xfrm>
+            <a:off x="1490472" y="1984248"/>
+            <a:ext cx="2357018" cy="603504"/>
           </a:xfrm>
           <a:prstGeom prst="rect">
             <a:avLst/>
@@ -15407,14 +15894,14 @@
           <a:ln/>
         </p:spPr>
         <p:txBody>
-          <a:bodyPr wrap="square" lIns="0" tIns="0" rIns="0" bIns="0" rtlCol="0" anchor="t"/>
+          <a:bodyPr wrap="square" lIns="0" tIns="0" rIns="0" bIns="0" rtlCol="0" anchor="ctr"/>
           <a:lstStyle/>
           <a:p>
             <a:pPr indent="0" marL="0">
               <a:buNone/>
             </a:pPr>
             <a:r>
-              <a:rPr lang="en-US" sz="1400" b="1" dirty="0">
+              <a:rPr lang="en-US" sz="1300" b="1" dirty="0">
                 <a:solidFill>
                   <a:srgbClr val="0F172A"/>
                 </a:solidFill>
@@ -15422,22 +15909,22 @@
                 <a:ea typeface="Calibri" pitchFamily="34" charset="-122"/>
                 <a:cs typeface="Calibri" pitchFamily="34" charset="-120"/>
               </a:rPr>
-              <a:t>Now — Prototype (done)</a:t>
-            </a:r>
-            <a:endParaRPr lang="en-US" sz="1400" dirty="0"/>
-          </a:p>
-        </p:txBody>
-      </p:sp>
-      <p:sp>
-        <p:nvSpPr>
-          <p:cNvPr id="9" name="Text 6"/>
-          <p:cNvSpPr/>
-          <p:nvPr/>
-        </p:nvSpPr>
-        <p:spPr>
-          <a:xfrm>
-            <a:off x="722376" y="3493008"/>
-            <a:ext cx="2170100" cy="1691640"/>
+              <a:t>“ReAct” is a paradigm, not a class</a:t>
+            </a:r>
+            <a:endParaRPr lang="en-US" sz="1300" dirty="0"/>
+          </a:p>
+        </p:txBody>
+      </p:sp>
+      <p:sp>
+        <p:nvSpPr>
+          <p:cNvPr id="8" name="Text 5"/>
+          <p:cNvSpPr/>
+          <p:nvPr/>
+        </p:nvSpPr>
+        <p:spPr>
+          <a:xfrm>
+            <a:off x="758952" y="2679192"/>
+            <a:ext cx="3088538" cy="768096"/>
           </a:xfrm>
           <a:prstGeom prst="rect">
             <a:avLst/>
@@ -15451,7 +15938,7 @@
           <a:p>
             <a:pPr marL="152400" indent="-152400">
               <a:spcAft>
-                <a:spcPts val="700"/>
+                <a:spcPts val="500"/>
               </a:spcAft>
               <a:buSzPct val="100000"/>
               <a:buChar char="•"/>
@@ -15465,92 +15952,26 @@
                 <a:ea typeface="Calibri" pitchFamily="34" charset="-122"/>
                 <a:cs typeface="Calibri" pitchFamily="34" charset="-120"/>
               </a:rPr>
-              <a:t>Live on Cloud Run + Firestore</a:t>
+              <a:t>Native function-calling IS ReAct — done better; reach for a text-scratchpad planner only when you want a visible plan.</a:t>
             </a:r>
             <a:endParaRPr lang="en-US" sz="1150" dirty="0"/>
           </a:p>
-          <a:p>
-            <a:pPr marL="152400" indent="-152400">
-              <a:spcAft>
-                <a:spcPts val="700"/>
-              </a:spcAft>
-              <a:buSzPct val="100000"/>
-              <a:buChar char="•"/>
-            </a:pPr>
-            <a:r>
-              <a:rPr lang="en-US" sz="1150" dirty="0">
-                <a:solidFill>
-                  <a:srgbClr val="5B6577"/>
-                </a:solidFill>
-                <a:latin typeface="Calibri" pitchFamily="34" charset="0"/>
-                <a:ea typeface="Calibri" pitchFamily="34" charset="-122"/>
-                <a:cs typeface="Calibri" pitchFamily="34" charset="-120"/>
-              </a:rPr>
-              <a:t>All 4 requirements + safe checkout</a:t>
-            </a:r>
-            <a:endParaRPr lang="en-US" sz="1150" dirty="0"/>
-          </a:p>
-          <a:p>
-            <a:pPr marL="152400" indent="-152400">
-              <a:spcAft>
-                <a:spcPts val="700"/>
-              </a:spcAft>
-              <a:buSzPct val="100000"/>
-              <a:buChar char="•"/>
-            </a:pPr>
-            <a:r>
-              <a:rPr lang="en-US" sz="1150" dirty="0">
-                <a:solidFill>
-                  <a:srgbClr val="5B6577"/>
-                </a:solidFill>
-                <a:latin typeface="Calibri" pitchFamily="34" charset="0"/>
-                <a:ea typeface="Calibri" pitchFamily="34" charset="-122"/>
-                <a:cs typeface="Calibri" pitchFamily="34" charset="-120"/>
-              </a:rPr>
-              <a:t>117 tests · CI/CD · /dev portal</a:t>
-            </a:r>
-            <a:endParaRPr lang="en-US" sz="1150" dirty="0"/>
-          </a:p>
-        </p:txBody>
-      </p:sp>
-      <p:pic>
-        <p:nvPicPr>
-          <p:cNvPr id="10" name="Image 1" descr="icons/arrow.png">    </p:cNvPr>
-          <p:cNvPicPr>
-            <a:picLocks noChangeAspect="1"/>
-          </p:cNvPicPr>
-          <p:nvPr/>
-        </p:nvPicPr>
-        <p:blipFill>
-          <a:blip r:embed="rId2"/>
-          <a:stretch>
-            <a:fillRect/>
-          </a:stretch>
-        </p:blipFill>
-        <p:spPr>
-          <a:xfrm>
-            <a:off x="3093644" y="3474720"/>
-            <a:ext cx="256032" cy="256032"/>
-          </a:xfrm>
-          <a:prstGeom prst="rect">
-            <a:avLst/>
-          </a:prstGeom>
-        </p:spPr>
-      </p:pic>
-      <p:sp>
-        <p:nvSpPr>
-          <p:cNvPr id="11" name="Shape 7"/>
-          <p:cNvSpPr/>
-          <p:nvPr/>
-        </p:nvSpPr>
-        <p:spPr>
-          <a:xfrm>
-            <a:off x="3367964" y="1920240"/>
-            <a:ext cx="2590724" cy="3383280"/>
+        </p:txBody>
+      </p:sp>
+      <p:sp>
+        <p:nvSpPr>
+          <p:cNvPr id="9" name="Shape 6"/>
+          <p:cNvSpPr/>
+          <p:nvPr/>
+        </p:nvSpPr>
+        <p:spPr>
+          <a:xfrm>
+            <a:off x="4322978" y="1783080"/>
+            <a:ext cx="3545738" cy="1810512"/>
           </a:xfrm>
           <a:prstGeom prst="roundRect">
             <a:avLst>
-              <a:gd name="adj" fmla="val 3177"/>
+              <a:gd name="adj" fmla="val 4545"/>
             </a:avLst>
           </a:prstGeom>
           <a:solidFill>
@@ -15573,63 +15994,43 @@
       </p:sp>
       <p:sp>
         <p:nvSpPr>
-          <p:cNvPr id="12" name="Shape 8"/>
-          <p:cNvSpPr/>
-          <p:nvPr/>
-        </p:nvSpPr>
-        <p:spPr>
-          <a:xfrm>
-            <a:off x="3367964" y="1920240"/>
-            <a:ext cx="2590724" cy="109728"/>
-          </a:xfrm>
-          <a:prstGeom prst="rect">
-            <a:avLst/>
-          </a:prstGeom>
-          <a:solidFill>
-            <a:srgbClr val="2563EB"/>
-          </a:solidFill>
-          <a:ln/>
-        </p:spPr>
-      </p:sp>
-      <p:sp>
-        <p:nvSpPr>
-          <p:cNvPr id="13" name="Shape 9"/>
-          <p:cNvSpPr/>
-          <p:nvPr/>
-        </p:nvSpPr>
-        <p:spPr>
-          <a:xfrm>
-            <a:off x="3587420" y="2231136"/>
-            <a:ext cx="603504" cy="603504"/>
+          <p:cNvPr id="10" name="Shape 7"/>
+          <p:cNvSpPr/>
+          <p:nvPr/>
+        </p:nvSpPr>
+        <p:spPr>
+          <a:xfrm>
+            <a:off x="4560722" y="2002536"/>
+            <a:ext cx="566928" cy="566928"/>
           </a:xfrm>
           <a:prstGeom prst="roundRect">
             <a:avLst>
-              <a:gd name="adj" fmla="val 19697"/>
+              <a:gd name="adj" fmla="val 19355"/>
             </a:avLst>
           </a:prstGeom>
           <a:solidFill>
-            <a:srgbClr val="2563EB"/>
+            <a:srgbClr val="0D9488"/>
           </a:solidFill>
           <a:ln/>
         </p:spPr>
       </p:sp>
       <p:pic>
         <p:nvPicPr>
-          <p:cNvPr id="14" name="Image 2" descr="icons/users.png">    </p:cNvPr>
+          <p:cNvPr id="11" name="Image 1" descr="icons/lock.png">    </p:cNvPr>
           <p:cNvPicPr>
             <a:picLocks noChangeAspect="1"/>
           </p:cNvPicPr>
           <p:nvPr/>
         </p:nvPicPr>
         <p:blipFill>
-          <a:blip r:embed="rId3"/>
+          <a:blip r:embed="rId2"/>
           <a:stretch>
             <a:fillRect/>
           </a:stretch>
         </p:blipFill>
         <p:spPr>
           <a:xfrm>
-            <a:off x="3742868" y="2386584"/>
+            <a:off x="4697882" y="2139696"/>
             <a:ext cx="292608" cy="292608"/>
           </a:xfrm>
           <a:prstGeom prst="rect">
@@ -15639,14 +16040,14 @@
       </p:pic>
       <p:sp>
         <p:nvSpPr>
-          <p:cNvPr id="15" name="Text 10"/>
-          <p:cNvSpPr/>
-          <p:nvPr/>
-        </p:nvSpPr>
-        <p:spPr>
-          <a:xfrm>
-            <a:off x="3569132" y="2944368"/>
-            <a:ext cx="2188388" cy="548640"/>
+          <p:cNvPr id="12" name="Text 8"/>
+          <p:cNvSpPr/>
+          <p:nvPr/>
+        </p:nvSpPr>
+        <p:spPr>
+          <a:xfrm>
+            <a:off x="5310530" y="1984248"/>
+            <a:ext cx="2357018" cy="603504"/>
           </a:xfrm>
           <a:prstGeom prst="rect">
             <a:avLst/>
@@ -15655,14 +16056,14 @@
           <a:ln/>
         </p:spPr>
         <p:txBody>
-          <a:bodyPr wrap="square" lIns="0" tIns="0" rIns="0" bIns="0" rtlCol="0" anchor="t"/>
+          <a:bodyPr wrap="square" lIns="0" tIns="0" rIns="0" bIns="0" rtlCol="0" anchor="ctr"/>
           <a:lstStyle/>
           <a:p>
             <a:pPr indent="0" marL="0">
               <a:buNone/>
             </a:pPr>
             <a:r>
-              <a:rPr lang="en-US" sz="1400" b="1" dirty="0">
+              <a:rPr lang="en-US" sz="1300" b="1" dirty="0">
                 <a:solidFill>
                   <a:srgbClr val="0F172A"/>
                 </a:solidFill>
@@ -15670,22 +16071,22 @@
                 <a:ea typeface="Calibri" pitchFamily="34" charset="-122"/>
                 <a:cs typeface="Calibri" pitchFamily="34" charset="-120"/>
               </a:rPr>
-              <a:t>Pilot — 4–6 wks</a:t>
-            </a:r>
-            <a:endParaRPr lang="en-US" sz="1400" dirty="0"/>
-          </a:p>
-        </p:txBody>
-      </p:sp>
-      <p:sp>
-        <p:nvSpPr>
-          <p:cNvPr id="16" name="Text 11"/>
-          <p:cNvSpPr/>
-          <p:nvPr/>
-        </p:nvSpPr>
-        <p:spPr>
-          <a:xfrm>
-            <a:off x="3587420" y="3493008"/>
-            <a:ext cx="2170100" cy="1691640"/>
+              <a:t>LLM orchestrates; code transacts</a:t>
+            </a:r>
+            <a:endParaRPr lang="en-US" sz="1300" dirty="0"/>
+          </a:p>
+        </p:txBody>
+      </p:sp>
+      <p:sp>
+        <p:nvSpPr>
+          <p:cNvPr id="13" name="Text 9"/>
+          <p:cNvSpPr/>
+          <p:nvPr/>
+        </p:nvSpPr>
+        <p:spPr>
+          <a:xfrm>
+            <a:off x="4579010" y="2679192"/>
+            <a:ext cx="3088538" cy="768096"/>
           </a:xfrm>
           <a:prstGeom prst="rect">
             <a:avLst/>
@@ -15699,7 +16100,7 @@
           <a:p>
             <a:pPr marL="152400" indent="-152400">
               <a:spcAft>
-                <a:spcPts val="700"/>
+                <a:spcPts val="500"/>
               </a:spcAft>
               <a:buSzPct val="100000"/>
               <a:buChar char="•"/>
@@ -15713,92 +16114,26 @@
                 <a:ea typeface="Calibri" pitchFamily="34" charset="-122"/>
                 <a:cs typeface="Calibri" pitchFamily="34" charset="-120"/>
               </a:rPr>
-              <a:t>Multi-user + real SSO (Firebase/IdP)</a:t>
+              <a:t>Route money-affecting / irreversible actions through deterministic, auditable handlers — never the model.</a:t>
             </a:r>
             <a:endParaRPr lang="en-US" sz="1150" dirty="0"/>
           </a:p>
-          <a:p>
-            <a:pPr marL="152400" indent="-152400">
-              <a:spcAft>
-                <a:spcPts val="700"/>
-              </a:spcAft>
-              <a:buSzPct val="100000"/>
-              <a:buChar char="•"/>
-            </a:pPr>
-            <a:r>
-              <a:rPr lang="en-US" sz="1150" dirty="0">
-                <a:solidFill>
-                  <a:srgbClr val="5B6577"/>
-                </a:solidFill>
-                <a:latin typeface="Calibri" pitchFamily="34" charset="0"/>
-                <a:ea typeface="Calibri" pitchFamily="34" charset="-122"/>
-                <a:cs typeface="Calibri" pitchFamily="34" charset="-120"/>
-              </a:rPr>
-              <a:t>Secret Manager · CORS/IAM hardening</a:t>
-            </a:r>
-            <a:endParaRPr lang="en-US" sz="1150" dirty="0"/>
-          </a:p>
-          <a:p>
-            <a:pPr marL="152400" indent="-152400">
-              <a:spcAft>
-                <a:spcPts val="700"/>
-              </a:spcAft>
-              <a:buSzPct val="100000"/>
-              <a:buChar char="•"/>
-            </a:pPr>
-            <a:r>
-              <a:rPr lang="en-US" sz="1150" dirty="0">
-                <a:solidFill>
-                  <a:srgbClr val="5B6577"/>
-                </a:solidFill>
-                <a:latin typeface="Calibri" pitchFamily="34" charset="0"/>
-                <a:ea typeface="Calibri" pitchFamily="34" charset="-122"/>
-                <a:cs typeface="Calibri" pitchFamily="34" charset="-120"/>
-              </a:rPr>
-              <a:t>Instrument deflection / conversion / CSAT</a:t>
-            </a:r>
-            <a:endParaRPr lang="en-US" sz="1150" dirty="0"/>
-          </a:p>
-        </p:txBody>
-      </p:sp>
-      <p:pic>
-        <p:nvPicPr>
-          <p:cNvPr id="17" name="Image 3" descr="icons/arrow.png">    </p:cNvPr>
-          <p:cNvPicPr>
-            <a:picLocks noChangeAspect="1"/>
-          </p:cNvPicPr>
-          <p:nvPr/>
-        </p:nvPicPr>
-        <p:blipFill>
-          <a:blip r:embed="rId4"/>
-          <a:stretch>
-            <a:fillRect/>
-          </a:stretch>
-        </p:blipFill>
-        <p:spPr>
-          <a:xfrm>
-            <a:off x="5958688" y="3474720"/>
-            <a:ext cx="256032" cy="256032"/>
-          </a:xfrm>
-          <a:prstGeom prst="rect">
-            <a:avLst/>
-          </a:prstGeom>
-        </p:spPr>
-      </p:pic>
-      <p:sp>
-        <p:nvSpPr>
-          <p:cNvPr id="18" name="Shape 12"/>
-          <p:cNvSpPr/>
-          <p:nvPr/>
-        </p:nvSpPr>
-        <p:spPr>
-          <a:xfrm>
-            <a:off x="6233008" y="1920240"/>
-            <a:ext cx="2590724" cy="3383280"/>
+        </p:txBody>
+      </p:sp>
+      <p:sp>
+        <p:nvSpPr>
+          <p:cNvPr id="14" name="Shape 10"/>
+          <p:cNvSpPr/>
+          <p:nvPr/>
+        </p:nvSpPr>
+        <p:spPr>
+          <a:xfrm>
+            <a:off x="8143037" y="1783080"/>
+            <a:ext cx="3545738" cy="1810512"/>
           </a:xfrm>
           <a:prstGeom prst="roundRect">
             <a:avLst>
-              <a:gd name="adj" fmla="val 3177"/>
+              <a:gd name="adj" fmla="val 4545"/>
             </a:avLst>
           </a:prstGeom>
           <a:solidFill>
@@ -15821,63 +16156,43 @@
       </p:sp>
       <p:sp>
         <p:nvSpPr>
-          <p:cNvPr id="19" name="Shape 13"/>
-          <p:cNvSpPr/>
-          <p:nvPr/>
-        </p:nvSpPr>
-        <p:spPr>
-          <a:xfrm>
-            <a:off x="6233008" y="1920240"/>
-            <a:ext cx="2590724" cy="109728"/>
-          </a:xfrm>
-          <a:prstGeom prst="rect">
-            <a:avLst/>
-          </a:prstGeom>
-          <a:solidFill>
-            <a:srgbClr val="7C3AED"/>
-          </a:solidFill>
-          <a:ln/>
-        </p:spPr>
-      </p:sp>
-      <p:sp>
-        <p:nvSpPr>
-          <p:cNvPr id="20" name="Shape 14"/>
-          <p:cNvSpPr/>
-          <p:nvPr/>
-        </p:nvSpPr>
-        <p:spPr>
-          <a:xfrm>
-            <a:off x="6452464" y="2231136"/>
-            <a:ext cx="603504" cy="603504"/>
+          <p:cNvPr id="15" name="Shape 11"/>
+          <p:cNvSpPr/>
+          <p:nvPr/>
+        </p:nvSpPr>
+        <p:spPr>
+          <a:xfrm>
+            <a:off x="8380781" y="2002536"/>
+            <a:ext cx="566928" cy="566928"/>
           </a:xfrm>
           <a:prstGeom prst="roundRect">
             <a:avLst>
-              <a:gd name="adj" fmla="val 19697"/>
+              <a:gd name="adj" fmla="val 19355"/>
             </a:avLst>
           </a:prstGeom>
           <a:solidFill>
-            <a:srgbClr val="7C3AED"/>
+            <a:srgbClr val="2563EB"/>
           </a:solidFill>
           <a:ln/>
         </p:spPr>
       </p:sp>
       <p:pic>
         <p:nvPicPr>
-          <p:cNvPr id="21" name="Image 4" descr="icons/plug.png">    </p:cNvPr>
+          <p:cNvPr id="16" name="Image 2" descr="icons/sitemap.png">    </p:cNvPr>
           <p:cNvPicPr>
             <a:picLocks noChangeAspect="1"/>
           </p:cNvPicPr>
           <p:nvPr/>
         </p:nvPicPr>
         <p:blipFill>
-          <a:blip r:embed="rId5"/>
+          <a:blip r:embed="rId3"/>
           <a:stretch>
             <a:fillRect/>
           </a:stretch>
         </p:blipFill>
         <p:spPr>
           <a:xfrm>
-            <a:off x="6607912" y="2386584"/>
+            <a:off x="8517941" y="2139696"/>
             <a:ext cx="292608" cy="292608"/>
           </a:xfrm>
           <a:prstGeom prst="rect">
@@ -15887,14 +16202,14 @@
       </p:pic>
       <p:sp>
         <p:nvSpPr>
-          <p:cNvPr id="22" name="Text 15"/>
-          <p:cNvSpPr/>
-          <p:nvPr/>
-        </p:nvSpPr>
-        <p:spPr>
-          <a:xfrm>
-            <a:off x="6434176" y="2944368"/>
-            <a:ext cx="2188388" cy="548640"/>
+          <p:cNvPr id="17" name="Text 12"/>
+          <p:cNvSpPr/>
+          <p:nvPr/>
+        </p:nvSpPr>
+        <p:spPr>
+          <a:xfrm>
+            <a:off x="9130589" y="1984248"/>
+            <a:ext cx="2357018" cy="603504"/>
           </a:xfrm>
           <a:prstGeom prst="rect">
             <a:avLst/>
@@ -15903,14 +16218,14 @@
           <a:ln/>
         </p:spPr>
         <p:txBody>
-          <a:bodyPr wrap="square" lIns="0" tIns="0" rIns="0" bIns="0" rtlCol="0" anchor="t"/>
+          <a:bodyPr wrap="square" lIns="0" tIns="0" rIns="0" bIns="0" rtlCol="0" anchor="ctr"/>
           <a:lstStyle/>
           <a:p>
             <a:pPr indent="0" marL="0">
               <a:buNone/>
             </a:pPr>
             <a:r>
-              <a:rPr lang="en-US" sz="1400" b="1" dirty="0">
+              <a:rPr lang="en-US" sz="1300" b="1" dirty="0">
                 <a:solidFill>
                   <a:srgbClr val="0F172A"/>
                 </a:solidFill>
@@ -15918,22 +16233,22 @@
                 <a:ea typeface="Calibri" pitchFamily="34" charset="-122"/>
                 <a:cs typeface="Calibri" pitchFamily="34" charset="-120"/>
               </a:rPr>
-              <a:t>Integrate — 6–10 wks</a:t>
-            </a:r>
-            <a:endParaRPr lang="en-US" sz="1400" dirty="0"/>
-          </a:p>
-        </p:txBody>
-      </p:sp>
-      <p:sp>
-        <p:nvSpPr>
-          <p:cNvPr id="23" name="Text 16"/>
-          <p:cNvSpPr/>
-          <p:nvPr/>
-        </p:nvSpPr>
-        <p:spPr>
-          <a:xfrm>
-            <a:off x="6452464" y="3493008"/>
-            <a:ext cx="2170100" cy="1691640"/>
+              <a:t>Loop safety is graph shape, not prompts</a:t>
+            </a:r>
+            <a:endParaRPr lang="en-US" sz="1300" dirty="0"/>
+          </a:p>
+        </p:txBody>
+      </p:sp>
+      <p:sp>
+        <p:nvSpPr>
+          <p:cNvPr id="18" name="Text 13"/>
+          <p:cNvSpPr/>
+          <p:nvPr/>
+        </p:nvSpPr>
+        <p:spPr>
+          <a:xfrm>
+            <a:off x="8399069" y="2679192"/>
+            <a:ext cx="3088538" cy="768096"/>
           </a:xfrm>
           <a:prstGeom prst="rect">
             <a:avLst/>
@@ -15947,7 +16262,7 @@
           <a:p>
             <a:pPr marL="152400" indent="-152400">
               <a:spcAft>
-                <a:spcPts val="700"/>
+                <a:spcPts val="500"/>
               </a:spcAft>
               <a:buSzPct val="100000"/>
               <a:buChar char="•"/>
@@ -15961,92 +16276,26 @@
                 <a:ea typeface="Calibri" pitchFamily="34" charset="-122"/>
                 <a:cs typeface="Calibri" pitchFamily="34" charset="-120"/>
               </a:rPr>
-              <a:t>Live inventory/OMS + payment provider</a:t>
+              <a:t>Agent-as-tool (no transfer-back), workers with no nested agents, single-pass turns — cycles can't exist by construction.</a:t>
             </a:r>
             <a:endParaRPr lang="en-US" sz="1150" dirty="0"/>
           </a:p>
-          <a:p>
-            <a:pPr marL="152400" indent="-152400">
-              <a:spcAft>
-                <a:spcPts val="700"/>
-              </a:spcAft>
-              <a:buSzPct val="100000"/>
-              <a:buChar char="•"/>
-            </a:pPr>
-            <a:r>
-              <a:rPr lang="en-US" sz="1150" dirty="0">
-                <a:solidFill>
-                  <a:srgbClr val="5B6577"/>
-                </a:solidFill>
-                <a:latin typeface="Calibri" pitchFamily="34" charset="0"/>
-                <a:ea typeface="Calibri" pitchFamily="34" charset="-122"/>
-                <a:cs typeface="Calibri" pitchFamily="34" charset="-120"/>
-              </a:rPr>
-              <a:t>CCAI telephony + agent-assist</a:t>
-            </a:r>
-            <a:endParaRPr lang="en-US" sz="1150" dirty="0"/>
-          </a:p>
-          <a:p>
-            <a:pPr marL="152400" indent="-152400">
-              <a:spcAft>
-                <a:spcPts val="700"/>
-              </a:spcAft>
-              <a:buSzPct val="100000"/>
-              <a:buChar char="•"/>
-            </a:pPr>
-            <a:r>
-              <a:rPr lang="en-US" sz="1150" dirty="0">
-                <a:solidFill>
-                  <a:srgbClr val="5B6577"/>
-                </a:solidFill>
-                <a:latin typeface="Calibri" pitchFamily="34" charset="0"/>
-                <a:ea typeface="Calibri" pitchFamily="34" charset="-122"/>
-                <a:cs typeface="Calibri" pitchFamily="34" charset="-120"/>
-              </a:rPr>
-              <a:t>Vertex Translation for long-tail locales</a:t>
-            </a:r>
-            <a:endParaRPr lang="en-US" sz="1150" dirty="0"/>
-          </a:p>
-        </p:txBody>
-      </p:sp>
-      <p:pic>
-        <p:nvPicPr>
-          <p:cNvPr id="24" name="Image 5" descr="icons/arrow.png">    </p:cNvPr>
-          <p:cNvPicPr>
-            <a:picLocks noChangeAspect="1"/>
-          </p:cNvPicPr>
-          <p:nvPr/>
-        </p:nvPicPr>
-        <p:blipFill>
-          <a:blip r:embed="rId6"/>
-          <a:stretch>
-            <a:fillRect/>
-          </a:stretch>
-        </p:blipFill>
-        <p:spPr>
-          <a:xfrm>
-            <a:off x="8823731" y="3474720"/>
-            <a:ext cx="256032" cy="256032"/>
-          </a:xfrm>
-          <a:prstGeom prst="rect">
-            <a:avLst/>
-          </a:prstGeom>
-        </p:spPr>
-      </p:pic>
-      <p:sp>
-        <p:nvSpPr>
-          <p:cNvPr id="25" name="Shape 17"/>
-          <p:cNvSpPr/>
-          <p:nvPr/>
-        </p:nvSpPr>
-        <p:spPr>
-          <a:xfrm>
-            <a:off x="9098051" y="1920240"/>
-            <a:ext cx="2590724" cy="3383280"/>
+        </p:txBody>
+      </p:sp>
+      <p:sp>
+        <p:nvSpPr>
+          <p:cNvPr id="19" name="Shape 14"/>
+          <p:cNvSpPr/>
+          <p:nvPr/>
+        </p:nvSpPr>
+        <p:spPr>
+          <a:xfrm>
+            <a:off x="502920" y="3822192"/>
+            <a:ext cx="3545738" cy="1810512"/>
           </a:xfrm>
           <a:prstGeom prst="roundRect">
             <a:avLst>
-              <a:gd name="adj" fmla="val 3177"/>
+              <a:gd name="adj" fmla="val 4545"/>
             </a:avLst>
           </a:prstGeom>
           <a:solidFill>
@@ -16069,6 +16318,2615 @@
       </p:sp>
       <p:sp>
         <p:nvSpPr>
+          <p:cNvPr id="20" name="Shape 15"/>
+          <p:cNvSpPr/>
+          <p:nvPr/>
+        </p:nvSpPr>
+        <p:spPr>
+          <a:xfrm>
+            <a:off x="740664" y="4041648"/>
+            <a:ext cx="566928" cy="566928"/>
+          </a:xfrm>
+          <a:prstGeom prst="roundRect">
+            <a:avLst>
+              <a:gd name="adj" fmla="val 19355"/>
+            </a:avLst>
+          </a:prstGeom>
+          <a:solidFill>
+            <a:srgbClr val="E11D48"/>
+          </a:solidFill>
+          <a:ln/>
+        </p:spPr>
+      </p:sp>
+      <p:pic>
+        <p:nvPicPr>
+          <p:cNvPr id="21" name="Image 3" descr="icons/sync.png">    </p:cNvPr>
+          <p:cNvPicPr>
+            <a:picLocks noChangeAspect="1"/>
+          </p:cNvPicPr>
+          <p:nvPr/>
+        </p:nvPicPr>
+        <p:blipFill>
+          <a:blip r:embed="rId4"/>
+          <a:stretch>
+            <a:fillRect/>
+          </a:stretch>
+        </p:blipFill>
+        <p:spPr>
+          <a:xfrm>
+            <a:off x="877824" y="4178808"/>
+            <a:ext cx="292608" cy="292608"/>
+          </a:xfrm>
+          <a:prstGeom prst="rect">
+            <a:avLst/>
+          </a:prstGeom>
+        </p:spPr>
+      </p:pic>
+      <p:sp>
+        <p:nvSpPr>
+          <p:cNvPr id="22" name="Text 16"/>
+          <p:cNvSpPr/>
+          <p:nvPr/>
+        </p:nvSpPr>
+        <p:spPr>
+          <a:xfrm>
+            <a:off x="1490472" y="4023360"/>
+            <a:ext cx="2357018" cy="603504"/>
+          </a:xfrm>
+          <a:prstGeom prst="rect">
+            <a:avLst/>
+          </a:prstGeom>
+          <a:noFill/>
+          <a:ln/>
+        </p:spPr>
+        <p:txBody>
+          <a:bodyPr wrap="square" lIns="0" tIns="0" rIns="0" bIns="0" rtlCol="0" anchor="ctr"/>
+          <a:lstStyle/>
+          <a:p>
+            <a:pPr indent="0" marL="0">
+              <a:buNone/>
+            </a:pPr>
+            <a:r>
+              <a:rPr lang="en-US" sz="1300" b="1" dirty="0">
+                <a:solidFill>
+                  <a:srgbClr val="0F172A"/>
+                </a:solidFill>
+                <a:latin typeface="Calibri" pitchFamily="34" charset="0"/>
+                <a:ea typeface="Calibri" pitchFamily="34" charset="-122"/>
+                <a:cs typeface="Calibri" pitchFamily="34" charset="-120"/>
+              </a:rPr>
+              <a:t>A model quirk that bit once bites again</a:t>
+            </a:r>
+            <a:endParaRPr lang="en-US" sz="1300" dirty="0"/>
+          </a:p>
+        </p:txBody>
+      </p:sp>
+      <p:sp>
+        <p:nvSpPr>
+          <p:cNvPr id="23" name="Text 17"/>
+          <p:cNvSpPr/>
+          <p:nvPr/>
+        </p:nvSpPr>
+        <p:spPr>
+          <a:xfrm>
+            <a:off x="758952" y="4718304"/>
+            <a:ext cx="3088538" cy="768096"/>
+          </a:xfrm>
+          <a:prstGeom prst="rect">
+            <a:avLst/>
+          </a:prstGeom>
+          <a:noFill/>
+          <a:ln/>
+        </p:spPr>
+        <p:txBody>
+          <a:bodyPr wrap="square" lIns="0" tIns="0" rIns="0" bIns="0" rtlCol="0" anchor="t"/>
+          <a:lstStyle/>
+          <a:p>
+            <a:pPr marL="152400" indent="-152400">
+              <a:spcAft>
+                <a:spcPts val="500"/>
+              </a:spcAft>
+              <a:buSzPct val="100000"/>
+              <a:buChar char="•"/>
+            </a:pPr>
+            <a:r>
+              <a:rPr lang="en-US" sz="1150" dirty="0">
+                <a:solidFill>
+                  <a:srgbClr val="5B6577"/>
+                </a:solidFill>
+                <a:latin typeface="Calibri" pitchFamily="34" charset="0"/>
+                <a:ea typeface="Calibri" pitchFamily="34" charset="-122"/>
+                <a:cs typeface="Calibri" pitchFamily="34" charset="-120"/>
+              </a:rPr>
+              <a:t>Encode the remedy as a reusable pattern (thinking_budget=0 fixed both vision and the ReAct advisor).</a:t>
+            </a:r>
+            <a:endParaRPr lang="en-US" sz="1150" dirty="0"/>
+          </a:p>
+        </p:txBody>
+      </p:sp>
+      <p:sp>
+        <p:nvSpPr>
+          <p:cNvPr id="24" name="Shape 18"/>
+          <p:cNvSpPr/>
+          <p:nvPr/>
+        </p:nvSpPr>
+        <p:spPr>
+          <a:xfrm>
+            <a:off x="4322978" y="3822192"/>
+            <a:ext cx="3545738" cy="1810512"/>
+          </a:xfrm>
+          <a:prstGeom prst="roundRect">
+            <a:avLst>
+              <a:gd name="adj" fmla="val 4545"/>
+            </a:avLst>
+          </a:prstGeom>
+          <a:solidFill>
+            <a:srgbClr val="FFFFFF"/>
+          </a:solidFill>
+          <a:ln w="12700">
+            <a:solidFill>
+              <a:srgbClr val="E6E8F0"/>
+            </a:solidFill>
+            <a:prstDash val="solid"/>
+          </a:ln>
+          <a:effectLst>
+            <a:outerShdw sx="100000" sy="100000" kx="0" ky="0" algn="bl" rotWithShape="0" blurRad="114300" dist="38100" dir="8100000">
+              <a:srgbClr val="0F172A">
+                <a:alpha val="16000"/>
+              </a:srgbClr>
+            </a:outerShdw>
+          </a:effectLst>
+        </p:spPr>
+      </p:sp>
+      <p:sp>
+        <p:nvSpPr>
+          <p:cNvPr id="25" name="Shape 19"/>
+          <p:cNvSpPr/>
+          <p:nvPr/>
+        </p:nvSpPr>
+        <p:spPr>
+          <a:xfrm>
+            <a:off x="4560722" y="4041648"/>
+            <a:ext cx="566928" cy="566928"/>
+          </a:xfrm>
+          <a:prstGeom prst="roundRect">
+            <a:avLst>
+              <a:gd name="adj" fmla="val 19355"/>
+            </a:avLst>
+          </a:prstGeom>
+          <a:solidFill>
+            <a:srgbClr val="16A34A"/>
+          </a:solidFill>
+          <a:ln/>
+        </p:spPr>
+      </p:sp>
+      <p:pic>
+        <p:nvPicPr>
+          <p:cNvPr id="26" name="Image 4" descr="icons/check.png">    </p:cNvPr>
+          <p:cNvPicPr>
+            <a:picLocks noChangeAspect="1"/>
+          </p:cNvPicPr>
+          <p:nvPr/>
+        </p:nvPicPr>
+        <p:blipFill>
+          <a:blip r:embed="rId5"/>
+          <a:stretch>
+            <a:fillRect/>
+          </a:stretch>
+        </p:blipFill>
+        <p:spPr>
+          <a:xfrm>
+            <a:off x="4697882" y="4178808"/>
+            <a:ext cx="292608" cy="292608"/>
+          </a:xfrm>
+          <a:prstGeom prst="rect">
+            <a:avLst/>
+          </a:prstGeom>
+        </p:spPr>
+      </p:pic>
+      <p:sp>
+        <p:nvSpPr>
+          <p:cNvPr id="27" name="Text 20"/>
+          <p:cNvSpPr/>
+          <p:nvPr/>
+        </p:nvSpPr>
+        <p:spPr>
+          <a:xfrm>
+            <a:off x="5310530" y="4023360"/>
+            <a:ext cx="2357018" cy="603504"/>
+          </a:xfrm>
+          <a:prstGeom prst="rect">
+            <a:avLst/>
+          </a:prstGeom>
+          <a:noFill/>
+          <a:ln/>
+        </p:spPr>
+        <p:txBody>
+          <a:bodyPr wrap="square" lIns="0" tIns="0" rIns="0" bIns="0" rtlCol="0" anchor="ctr"/>
+          <a:lstStyle/>
+          <a:p>
+            <a:pPr indent="0" marL="0">
+              <a:buNone/>
+            </a:pPr>
+            <a:r>
+              <a:rPr lang="en-US" sz="1300" b="1" dirty="0">
+                <a:solidFill>
+                  <a:srgbClr val="0F172A"/>
+                </a:solidFill>
+                <a:latin typeface="Calibri" pitchFamily="34" charset="0"/>
+                <a:ea typeface="Calibri" pitchFamily="34" charset="-122"/>
+                <a:cs typeface="Calibri" pitchFamily="34" charset="-120"/>
+              </a:rPr>
+              <a:t>Test the path production runs</a:t>
+            </a:r>
+            <a:endParaRPr lang="en-US" sz="1300" dirty="0"/>
+          </a:p>
+        </p:txBody>
+      </p:sp>
+      <p:sp>
+        <p:nvSpPr>
+          <p:cNvPr id="28" name="Text 21"/>
+          <p:cNvSpPr/>
+          <p:nvPr/>
+        </p:nvSpPr>
+        <p:spPr>
+          <a:xfrm>
+            <a:off x="4579010" y="4718304"/>
+            <a:ext cx="3088538" cy="768096"/>
+          </a:xfrm>
+          <a:prstGeom prst="rect">
+            <a:avLst/>
+          </a:prstGeom>
+          <a:noFill/>
+          <a:ln/>
+        </p:spPr>
+        <p:txBody>
+          <a:bodyPr wrap="square" lIns="0" tIns="0" rIns="0" bIns="0" rtlCol="0" anchor="t"/>
+          <a:lstStyle/>
+          <a:p>
+            <a:pPr marL="152400" indent="-152400">
+              <a:spcAft>
+                <a:spcPts val="500"/>
+              </a:spcAft>
+              <a:buSzPct val="100000"/>
+              <a:buChar char="•"/>
+            </a:pPr>
+            <a:r>
+              <a:rPr lang="en-US" sz="1150" dirty="0">
+                <a:solidFill>
+                  <a:srgbClr val="5B6577"/>
+                </a:solidFill>
+                <a:latin typeface="Calibri" pitchFamily="34" charset="0"/>
+                <a:ea typeface="Calibri" pitchFamily="34" charset="-122"/>
+                <a:cs typeface="Calibri" pitchFamily="34" charset="-120"/>
+              </a:rPr>
+              <a:t>A cloud-only ADK bug hid behind a green local suite — a CI-sim of the prod fallback is what gave confidence.</a:t>
+            </a:r>
+            <a:endParaRPr lang="en-US" sz="1150" dirty="0"/>
+          </a:p>
+        </p:txBody>
+      </p:sp>
+      <p:sp>
+        <p:nvSpPr>
+          <p:cNvPr id="29" name="Shape 22"/>
+          <p:cNvSpPr/>
+          <p:nvPr/>
+        </p:nvSpPr>
+        <p:spPr>
+          <a:xfrm>
+            <a:off x="8143037" y="3822192"/>
+            <a:ext cx="3545738" cy="1810512"/>
+          </a:xfrm>
+          <a:prstGeom prst="roundRect">
+            <a:avLst>
+              <a:gd name="adj" fmla="val 4545"/>
+            </a:avLst>
+          </a:prstGeom>
+          <a:solidFill>
+            <a:srgbClr val="FFFFFF"/>
+          </a:solidFill>
+          <a:ln w="12700">
+            <a:solidFill>
+              <a:srgbClr val="E6E8F0"/>
+            </a:solidFill>
+            <a:prstDash val="solid"/>
+          </a:ln>
+          <a:effectLst>
+            <a:outerShdw sx="100000" sy="100000" kx="0" ky="0" algn="bl" rotWithShape="0" blurRad="114300" dist="38100" dir="8100000">
+              <a:srgbClr val="0F172A">
+                <a:alpha val="16000"/>
+              </a:srgbClr>
+            </a:outerShdw>
+          </a:effectLst>
+        </p:spPr>
+      </p:sp>
+      <p:sp>
+        <p:nvSpPr>
+          <p:cNvPr id="30" name="Shape 23"/>
+          <p:cNvSpPr/>
+          <p:nvPr/>
+        </p:nvSpPr>
+        <p:spPr>
+          <a:xfrm>
+            <a:off x="8380781" y="4041648"/>
+            <a:ext cx="566928" cy="566928"/>
+          </a:xfrm>
+          <a:prstGeom prst="roundRect">
+            <a:avLst>
+              <a:gd name="adj" fmla="val 19355"/>
+            </a:avLst>
+          </a:prstGeom>
+          <a:solidFill>
+            <a:srgbClr val="0D9488"/>
+          </a:solidFill>
+          <a:ln/>
+        </p:spPr>
+      </p:sp>
+      <p:pic>
+        <p:nvPicPr>
+          <p:cNvPr id="31" name="Image 5" descr="icons/db.png">    </p:cNvPr>
+          <p:cNvPicPr>
+            <a:picLocks noChangeAspect="1"/>
+          </p:cNvPicPr>
+          <p:nvPr/>
+        </p:nvPicPr>
+        <p:blipFill>
+          <a:blip r:embed="rId6"/>
+          <a:stretch>
+            <a:fillRect/>
+          </a:stretch>
+        </p:blipFill>
+        <p:spPr>
+          <a:xfrm>
+            <a:off x="8517941" y="4178808"/>
+            <a:ext cx="292608" cy="292608"/>
+          </a:xfrm>
+          <a:prstGeom prst="rect">
+            <a:avLst/>
+          </a:prstGeom>
+        </p:spPr>
+      </p:pic>
+      <p:sp>
+        <p:nvSpPr>
+          <p:cNvPr id="32" name="Text 24"/>
+          <p:cNvSpPr/>
+          <p:nvPr/>
+        </p:nvSpPr>
+        <p:spPr>
+          <a:xfrm>
+            <a:off x="9130589" y="4023360"/>
+            <a:ext cx="2357018" cy="603504"/>
+          </a:xfrm>
+          <a:prstGeom prst="rect">
+            <a:avLst/>
+          </a:prstGeom>
+          <a:noFill/>
+          <a:ln/>
+        </p:spPr>
+        <p:txBody>
+          <a:bodyPr wrap="square" lIns="0" tIns="0" rIns="0" bIns="0" rtlCol="0" anchor="ctr"/>
+          <a:lstStyle/>
+          <a:p>
+            <a:pPr indent="0" marL="0">
+              <a:buNone/>
+            </a:pPr>
+            <a:r>
+              <a:rPr lang="en-US" sz="1300" b="1" dirty="0">
+                <a:solidFill>
+                  <a:srgbClr val="0F172A"/>
+                </a:solidFill>
+                <a:latin typeface="Calibri" pitchFamily="34" charset="0"/>
+                <a:ea typeface="Calibri" pitchFamily="34" charset="-122"/>
+                <a:cs typeface="Calibri" pitchFamily="34" charset="-120"/>
+              </a:rPr>
+              <a:t>Centralize state; keep agents stateless</a:t>
+            </a:r>
+            <a:endParaRPr lang="en-US" sz="1300" dirty="0"/>
+          </a:p>
+        </p:txBody>
+      </p:sp>
+      <p:sp>
+        <p:nvSpPr>
+          <p:cNvPr id="33" name="Text 25"/>
+          <p:cNvSpPr/>
+          <p:nvPr/>
+        </p:nvSpPr>
+        <p:spPr>
+          <a:xfrm>
+            <a:off x="8399069" y="4718304"/>
+            <a:ext cx="3088538" cy="768096"/>
+          </a:xfrm>
+          <a:prstGeom prst="rect">
+            <a:avLst/>
+          </a:prstGeom>
+          <a:noFill/>
+          <a:ln/>
+        </p:spPr>
+        <p:txBody>
+          <a:bodyPr wrap="square" lIns="0" tIns="0" rIns="0" bIns="0" rtlCol="0" anchor="t"/>
+          <a:lstStyle/>
+          <a:p>
+            <a:pPr marL="152400" indent="-152400">
+              <a:spcAft>
+                <a:spcPts val="500"/>
+              </a:spcAft>
+              <a:buSzPct val="100000"/>
+              <a:buChar char="•"/>
+            </a:pPr>
+            <a:r>
+              <a:rPr lang="en-US" sz="1150" dirty="0">
+                <a:solidFill>
+                  <a:srgbClr val="5B6577"/>
+                </a:solidFill>
+                <a:latin typeface="Calibri" pitchFamily="34" charset="0"/>
+                <a:ea typeface="Calibri" pitchFamily="34" charset="-122"/>
+                <a:cs typeface="Calibri" pitchFamily="34" charset="-120"/>
+              </a:rPr>
+              <a:t>One durable session store by session_id; let read-only agents pull memory from tools, not their own state.</a:t>
+            </a:r>
+            <a:endParaRPr lang="en-US" sz="1150" dirty="0"/>
+          </a:p>
+        </p:txBody>
+      </p:sp>
+      <p:sp>
+        <p:nvSpPr>
+          <p:cNvPr id="34" name="Text 26"/>
+          <p:cNvSpPr/>
+          <p:nvPr/>
+        </p:nvSpPr>
+        <p:spPr>
+          <a:xfrm>
+            <a:off x="502920" y="6455664"/>
+            <a:ext cx="8229600" cy="274320"/>
+          </a:xfrm>
+          <a:prstGeom prst="rect">
+            <a:avLst/>
+          </a:prstGeom>
+          <a:noFill/>
+          <a:ln/>
+        </p:spPr>
+        <p:txBody>
+          <a:bodyPr wrap="square" lIns="0" tIns="0" rIns="0" bIns="0" rtlCol="0" anchor="ctr"/>
+          <a:lstStyle/>
+          <a:p>
+            <a:pPr indent="0" marL="0">
+              <a:buNone/>
+            </a:pPr>
+            <a:r>
+              <a:rPr lang="en-US" sz="900" dirty="0">
+                <a:solidFill>
+                  <a:srgbClr val="8A94A6"/>
+                </a:solidFill>
+                <a:latin typeface="Calibri" pitchFamily="34" charset="0"/>
+                <a:ea typeface="Calibri" pitchFamily="34" charset="-122"/>
+                <a:cs typeface="Calibri" pitchFamily="34" charset="-120"/>
+              </a:rPr>
+              <a:t>GOOPHER · Unified Conversational Retail Agent on Google Cloud</a:t>
+            </a:r>
+            <a:endParaRPr lang="en-US" sz="900" dirty="0"/>
+          </a:p>
+        </p:txBody>
+      </p:sp>
+      <p:sp>
+        <p:nvSpPr>
+          <p:cNvPr id="35" name="Text 27"/>
+          <p:cNvSpPr/>
+          <p:nvPr/>
+        </p:nvSpPr>
+        <p:spPr>
+          <a:xfrm>
+            <a:off x="11277295" y="6455664"/>
+            <a:ext cx="411480" cy="274320"/>
+          </a:xfrm>
+          <a:prstGeom prst="rect">
+            <a:avLst/>
+          </a:prstGeom>
+          <a:noFill/>
+          <a:ln/>
+        </p:spPr>
+        <p:txBody>
+          <a:bodyPr wrap="square" lIns="0" tIns="0" rIns="0" bIns="0" rtlCol="0" anchor="ctr"/>
+          <a:lstStyle/>
+          <a:p>
+            <a:pPr algn="r" indent="0" marL="0">
+              <a:buNone/>
+            </a:pPr>
+            <a:r>
+              <a:rPr lang="en-US" sz="900" dirty="0">
+                <a:solidFill>
+                  <a:srgbClr val="8A94A6"/>
+                </a:solidFill>
+                <a:latin typeface="Calibri" pitchFamily="34" charset="0"/>
+                <a:ea typeface="Calibri" pitchFamily="34" charset="-122"/>
+                <a:cs typeface="Calibri" pitchFamily="34" charset="-120"/>
+              </a:rPr>
+              <a:t>16</a:t>
+            </a:r>
+            <a:endParaRPr lang="en-US" sz="900" dirty="0"/>
+          </a:p>
+        </p:txBody>
+      </p:sp>
+    </p:spTree>
+  </p:cSld>
+  <p:clrMapOvr>
+    <a:masterClrMapping/>
+  </p:clrMapOvr>
+  <p:transition spd="med">
+    <p:fade/>
+  </p:transition>
+  <p:timing>
+    <p:tnLst>
+      <p:par>
+        <p:cTn id="1" dur="indefinite" restart="never" nodeType="tmRoot">
+          <p:childTnLst>
+            <p:seq concurrent="1" nextAc="seek">
+              <p:cTn id="2" dur="indefinite" nodeType="mainSeq">
+                <p:childTnLst>
+                  <p:par>
+                    <p:cTn id="3" fill="hold">
+                      <p:stCondLst>
+                        <p:cond delay="indefinite"/>
+                      </p:stCondLst>
+                      <p:childTnLst>
+                        <p:par>
+                          <p:cTn id="4" fill="hold">
+                            <p:stCondLst>
+                              <p:cond delay="0"/>
+                            </p:stCondLst>
+                            <p:childTnLst>
+                              <p:par>
+                                <p:cTn id="5" presetID="10" presetClass="entr" presetSubtype="0" fill="hold" grpId="0" nodeType="clickEffect">
+                                  <p:stCondLst>
+                                    <p:cond delay="0"/>
+                                  </p:stCondLst>
+                                  <p:childTnLst>
+                                    <p:set>
+                                      <p:cBhvr>
+                                        <p:cTn id="6" dur="1" fill="hold">
+                                          <p:stCondLst>
+                                            <p:cond delay="0"/>
+                                          </p:stCondLst>
+                                        </p:cTn>
+                                        <p:tgtEl>
+                                          <p:spTgt spid="4"/>
+                                        </p:tgtEl>
+                                        <p:attrNameLst>
+                                          <p:attrName>style.visibility</p:attrName>
+                                        </p:attrNameLst>
+                                      </p:cBhvr>
+                                      <p:to>
+                                        <p:strVal val="visible"/>
+                                      </p:to>
+                                    </p:set>
+                                    <p:animEffect transition="in" filter="fade">
+                                      <p:cBhvr>
+                                        <p:cTn id="7" dur="500"/>
+                                        <p:tgtEl>
+                                          <p:spTgt spid="4"/>
+                                        </p:tgtEl>
+                                      </p:cBhvr>
+                                    </p:animEffect>
+                                  </p:childTnLst>
+                                </p:cTn>
+                              </p:par>
+                              <p:par>
+                                <p:cTn id="8" presetID="10" presetClass="entr" presetSubtype="0" fill="hold" grpId="0" nodeType="withEffect">
+                                  <p:stCondLst>
+                                    <p:cond delay="0"/>
+                                  </p:stCondLst>
+                                  <p:childTnLst>
+                                    <p:set>
+                                      <p:cBhvr>
+                                        <p:cTn id="9" dur="1" fill="hold">
+                                          <p:stCondLst>
+                                            <p:cond delay="0"/>
+                                          </p:stCondLst>
+                                        </p:cTn>
+                                        <p:tgtEl>
+                                          <p:spTgt spid="5"/>
+                                        </p:tgtEl>
+                                        <p:attrNameLst>
+                                          <p:attrName>style.visibility</p:attrName>
+                                        </p:attrNameLst>
+                                      </p:cBhvr>
+                                      <p:to>
+                                        <p:strVal val="visible"/>
+                                      </p:to>
+                                    </p:set>
+                                    <p:animEffect transition="in" filter="fade">
+                                      <p:cBhvr>
+                                        <p:cTn id="10" dur="500"/>
+                                        <p:tgtEl>
+                                          <p:spTgt spid="5"/>
+                                        </p:tgtEl>
+                                      </p:cBhvr>
+                                    </p:animEffect>
+                                  </p:childTnLst>
+                                </p:cTn>
+                              </p:par>
+                              <p:par>
+                                <p:cTn id="11" presetID="10" presetClass="entr" presetSubtype="0" fill="hold" grpId="0" nodeType="withEffect">
+                                  <p:stCondLst>
+                                    <p:cond delay="0"/>
+                                  </p:stCondLst>
+                                  <p:childTnLst>
+                                    <p:set>
+                                      <p:cBhvr>
+                                        <p:cTn id="12" dur="1" fill="hold">
+                                          <p:stCondLst>
+                                            <p:cond delay="0"/>
+                                          </p:stCondLst>
+                                        </p:cTn>
+                                        <p:tgtEl>
+                                          <p:spTgt spid="6"/>
+                                        </p:tgtEl>
+                                        <p:attrNameLst>
+                                          <p:attrName>style.visibility</p:attrName>
+                                        </p:attrNameLst>
+                                      </p:cBhvr>
+                                      <p:to>
+                                        <p:strVal val="visible"/>
+                                      </p:to>
+                                    </p:set>
+                                    <p:animEffect transition="in" filter="fade">
+                                      <p:cBhvr>
+                                        <p:cTn id="13" dur="500"/>
+                                        <p:tgtEl>
+                                          <p:spTgt spid="6"/>
+                                        </p:tgtEl>
+                                      </p:cBhvr>
+                                    </p:animEffect>
+                                  </p:childTnLst>
+                                </p:cTn>
+                              </p:par>
+                              <p:par>
+                                <p:cTn id="14" presetID="10" presetClass="entr" presetSubtype="0" fill="hold" grpId="0" nodeType="withEffect">
+                                  <p:stCondLst>
+                                    <p:cond delay="0"/>
+                                  </p:stCondLst>
+                                  <p:childTnLst>
+                                    <p:set>
+                                      <p:cBhvr>
+                                        <p:cTn id="15" dur="1" fill="hold">
+                                          <p:stCondLst>
+                                            <p:cond delay="0"/>
+                                          </p:stCondLst>
+                                        </p:cTn>
+                                        <p:tgtEl>
+                                          <p:spTgt spid="7"/>
+                                        </p:tgtEl>
+                                        <p:attrNameLst>
+                                          <p:attrName>style.visibility</p:attrName>
+                                        </p:attrNameLst>
+                                      </p:cBhvr>
+                                      <p:to>
+                                        <p:strVal val="visible"/>
+                                      </p:to>
+                                    </p:set>
+                                    <p:animEffect transition="in" filter="fade">
+                                      <p:cBhvr>
+                                        <p:cTn id="16" dur="500"/>
+                                        <p:tgtEl>
+                                          <p:spTgt spid="7"/>
+                                        </p:tgtEl>
+                                      </p:cBhvr>
+                                    </p:animEffect>
+                                  </p:childTnLst>
+                                </p:cTn>
+                              </p:par>
+                              <p:par>
+                                <p:cTn id="17" presetID="10" presetClass="entr" presetSubtype="0" fill="hold" grpId="0" nodeType="withEffect">
+                                  <p:stCondLst>
+                                    <p:cond delay="0"/>
+                                  </p:stCondLst>
+                                  <p:childTnLst>
+                                    <p:set>
+                                      <p:cBhvr>
+                                        <p:cTn id="18" dur="1" fill="hold">
+                                          <p:stCondLst>
+                                            <p:cond delay="0"/>
+                                          </p:stCondLst>
+                                        </p:cTn>
+                                        <p:tgtEl>
+                                          <p:spTgt spid="8"/>
+                                        </p:tgtEl>
+                                        <p:attrNameLst>
+                                          <p:attrName>style.visibility</p:attrName>
+                                        </p:attrNameLst>
+                                      </p:cBhvr>
+                                      <p:to>
+                                        <p:strVal val="visible"/>
+                                      </p:to>
+                                    </p:set>
+                                    <p:animEffect transition="in" filter="fade">
+                                      <p:cBhvr>
+                                        <p:cTn id="19" dur="500"/>
+                                        <p:tgtEl>
+                                          <p:spTgt spid="8"/>
+                                        </p:tgtEl>
+                                      </p:cBhvr>
+                                    </p:animEffect>
+                                  </p:childTnLst>
+                                </p:cTn>
+                              </p:par>
+                            </p:childTnLst>
+                          </p:cTn>
+                        </p:par>
+                      </p:childTnLst>
+                    </p:cTn>
+                  </p:par>
+                  <p:par>
+                    <p:cTn id="20" fill="hold">
+                      <p:stCondLst>
+                        <p:cond delay="indefinite"/>
+                      </p:stCondLst>
+                      <p:childTnLst>
+                        <p:par>
+                          <p:cTn id="21" fill="hold">
+                            <p:stCondLst>
+                              <p:cond delay="0"/>
+                            </p:stCondLst>
+                            <p:childTnLst>
+                              <p:par>
+                                <p:cTn id="22" presetID="10" presetClass="entr" presetSubtype="0" fill="hold" grpId="0" nodeType="clickEffect">
+                                  <p:stCondLst>
+                                    <p:cond delay="0"/>
+                                  </p:stCondLst>
+                                  <p:childTnLst>
+                                    <p:set>
+                                      <p:cBhvr>
+                                        <p:cTn id="23" dur="1" fill="hold">
+                                          <p:stCondLst>
+                                            <p:cond delay="0"/>
+                                          </p:stCondLst>
+                                        </p:cTn>
+                                        <p:tgtEl>
+                                          <p:spTgt spid="9"/>
+                                        </p:tgtEl>
+                                        <p:attrNameLst>
+                                          <p:attrName>style.visibility</p:attrName>
+                                        </p:attrNameLst>
+                                      </p:cBhvr>
+                                      <p:to>
+                                        <p:strVal val="visible"/>
+                                      </p:to>
+                                    </p:set>
+                                    <p:animEffect transition="in" filter="fade">
+                                      <p:cBhvr>
+                                        <p:cTn id="24" dur="500"/>
+                                        <p:tgtEl>
+                                          <p:spTgt spid="9"/>
+                                        </p:tgtEl>
+                                      </p:cBhvr>
+                                    </p:animEffect>
+                                  </p:childTnLst>
+                                </p:cTn>
+                              </p:par>
+                              <p:par>
+                                <p:cTn id="25" presetID="10" presetClass="entr" presetSubtype="0" fill="hold" grpId="0" nodeType="withEffect">
+                                  <p:stCondLst>
+                                    <p:cond delay="0"/>
+                                  </p:stCondLst>
+                                  <p:childTnLst>
+                                    <p:set>
+                                      <p:cBhvr>
+                                        <p:cTn id="26" dur="1" fill="hold">
+                                          <p:stCondLst>
+                                            <p:cond delay="0"/>
+                                          </p:stCondLst>
+                                        </p:cTn>
+                                        <p:tgtEl>
+                                          <p:spTgt spid="10"/>
+                                        </p:tgtEl>
+                                        <p:attrNameLst>
+                                          <p:attrName>style.visibility</p:attrName>
+                                        </p:attrNameLst>
+                                      </p:cBhvr>
+                                      <p:to>
+                                        <p:strVal val="visible"/>
+                                      </p:to>
+                                    </p:set>
+                                    <p:animEffect transition="in" filter="fade">
+                                      <p:cBhvr>
+                                        <p:cTn id="27" dur="500"/>
+                                        <p:tgtEl>
+                                          <p:spTgt spid="10"/>
+                                        </p:tgtEl>
+                                      </p:cBhvr>
+                                    </p:animEffect>
+                                  </p:childTnLst>
+                                </p:cTn>
+                              </p:par>
+                              <p:par>
+                                <p:cTn id="28" presetID="10" presetClass="entr" presetSubtype="0" fill="hold" grpId="0" nodeType="withEffect">
+                                  <p:stCondLst>
+                                    <p:cond delay="0"/>
+                                  </p:stCondLst>
+                                  <p:childTnLst>
+                                    <p:set>
+                                      <p:cBhvr>
+                                        <p:cTn id="29" dur="1" fill="hold">
+                                          <p:stCondLst>
+                                            <p:cond delay="0"/>
+                                          </p:stCondLst>
+                                        </p:cTn>
+                                        <p:tgtEl>
+                                          <p:spTgt spid="11"/>
+                                        </p:tgtEl>
+                                        <p:attrNameLst>
+                                          <p:attrName>style.visibility</p:attrName>
+                                        </p:attrNameLst>
+                                      </p:cBhvr>
+                                      <p:to>
+                                        <p:strVal val="visible"/>
+                                      </p:to>
+                                    </p:set>
+                                    <p:animEffect transition="in" filter="fade">
+                                      <p:cBhvr>
+                                        <p:cTn id="30" dur="500"/>
+                                        <p:tgtEl>
+                                          <p:spTgt spid="11"/>
+                                        </p:tgtEl>
+                                      </p:cBhvr>
+                                    </p:animEffect>
+                                  </p:childTnLst>
+                                </p:cTn>
+                              </p:par>
+                              <p:par>
+                                <p:cTn id="31" presetID="10" presetClass="entr" presetSubtype="0" fill="hold" grpId="0" nodeType="withEffect">
+                                  <p:stCondLst>
+                                    <p:cond delay="0"/>
+                                  </p:stCondLst>
+                                  <p:childTnLst>
+                                    <p:set>
+                                      <p:cBhvr>
+                                        <p:cTn id="32" dur="1" fill="hold">
+                                          <p:stCondLst>
+                                            <p:cond delay="0"/>
+                                          </p:stCondLst>
+                                        </p:cTn>
+                                        <p:tgtEl>
+                                          <p:spTgt spid="12"/>
+                                        </p:tgtEl>
+                                        <p:attrNameLst>
+                                          <p:attrName>style.visibility</p:attrName>
+                                        </p:attrNameLst>
+                                      </p:cBhvr>
+                                      <p:to>
+                                        <p:strVal val="visible"/>
+                                      </p:to>
+                                    </p:set>
+                                    <p:animEffect transition="in" filter="fade">
+                                      <p:cBhvr>
+                                        <p:cTn id="33" dur="500"/>
+                                        <p:tgtEl>
+                                          <p:spTgt spid="12"/>
+                                        </p:tgtEl>
+                                      </p:cBhvr>
+                                    </p:animEffect>
+                                  </p:childTnLst>
+                                </p:cTn>
+                              </p:par>
+                              <p:par>
+                                <p:cTn id="34" presetID="10" presetClass="entr" presetSubtype="0" fill="hold" grpId="0" nodeType="withEffect">
+                                  <p:stCondLst>
+                                    <p:cond delay="0"/>
+                                  </p:stCondLst>
+                                  <p:childTnLst>
+                                    <p:set>
+                                      <p:cBhvr>
+                                        <p:cTn id="35" dur="1" fill="hold">
+                                          <p:stCondLst>
+                                            <p:cond delay="0"/>
+                                          </p:stCondLst>
+                                        </p:cTn>
+                                        <p:tgtEl>
+                                          <p:spTgt spid="13"/>
+                                        </p:tgtEl>
+                                        <p:attrNameLst>
+                                          <p:attrName>style.visibility</p:attrName>
+                                        </p:attrNameLst>
+                                      </p:cBhvr>
+                                      <p:to>
+                                        <p:strVal val="visible"/>
+                                      </p:to>
+                                    </p:set>
+                                    <p:animEffect transition="in" filter="fade">
+                                      <p:cBhvr>
+                                        <p:cTn id="36" dur="500"/>
+                                        <p:tgtEl>
+                                          <p:spTgt spid="13"/>
+                                        </p:tgtEl>
+                                      </p:cBhvr>
+                                    </p:animEffect>
+                                  </p:childTnLst>
+                                </p:cTn>
+                              </p:par>
+                            </p:childTnLst>
+                          </p:cTn>
+                        </p:par>
+                      </p:childTnLst>
+                    </p:cTn>
+                  </p:par>
+                  <p:par>
+                    <p:cTn id="37" fill="hold">
+                      <p:stCondLst>
+                        <p:cond delay="indefinite"/>
+                      </p:stCondLst>
+                      <p:childTnLst>
+                        <p:par>
+                          <p:cTn id="38" fill="hold">
+                            <p:stCondLst>
+                              <p:cond delay="0"/>
+                            </p:stCondLst>
+                            <p:childTnLst>
+                              <p:par>
+                                <p:cTn id="39" presetID="10" presetClass="entr" presetSubtype="0" fill="hold" grpId="0" nodeType="clickEffect">
+                                  <p:stCondLst>
+                                    <p:cond delay="0"/>
+                                  </p:stCondLst>
+                                  <p:childTnLst>
+                                    <p:set>
+                                      <p:cBhvr>
+                                        <p:cTn id="40" dur="1" fill="hold">
+                                          <p:stCondLst>
+                                            <p:cond delay="0"/>
+                                          </p:stCondLst>
+                                        </p:cTn>
+                                        <p:tgtEl>
+                                          <p:spTgt spid="14"/>
+                                        </p:tgtEl>
+                                        <p:attrNameLst>
+                                          <p:attrName>style.visibility</p:attrName>
+                                        </p:attrNameLst>
+                                      </p:cBhvr>
+                                      <p:to>
+                                        <p:strVal val="visible"/>
+                                      </p:to>
+                                    </p:set>
+                                    <p:animEffect transition="in" filter="fade">
+                                      <p:cBhvr>
+                                        <p:cTn id="41" dur="500"/>
+                                        <p:tgtEl>
+                                          <p:spTgt spid="14"/>
+                                        </p:tgtEl>
+                                      </p:cBhvr>
+                                    </p:animEffect>
+                                  </p:childTnLst>
+                                </p:cTn>
+                              </p:par>
+                              <p:par>
+                                <p:cTn id="42" presetID="10" presetClass="entr" presetSubtype="0" fill="hold" grpId="0" nodeType="withEffect">
+                                  <p:stCondLst>
+                                    <p:cond delay="0"/>
+                                  </p:stCondLst>
+                                  <p:childTnLst>
+                                    <p:set>
+                                      <p:cBhvr>
+                                        <p:cTn id="43" dur="1" fill="hold">
+                                          <p:stCondLst>
+                                            <p:cond delay="0"/>
+                                          </p:stCondLst>
+                                        </p:cTn>
+                                        <p:tgtEl>
+                                          <p:spTgt spid="15"/>
+                                        </p:tgtEl>
+                                        <p:attrNameLst>
+                                          <p:attrName>style.visibility</p:attrName>
+                                        </p:attrNameLst>
+                                      </p:cBhvr>
+                                      <p:to>
+                                        <p:strVal val="visible"/>
+                                      </p:to>
+                                    </p:set>
+                                    <p:animEffect transition="in" filter="fade">
+                                      <p:cBhvr>
+                                        <p:cTn id="44" dur="500"/>
+                                        <p:tgtEl>
+                                          <p:spTgt spid="15"/>
+                                        </p:tgtEl>
+                                      </p:cBhvr>
+                                    </p:animEffect>
+                                  </p:childTnLst>
+                                </p:cTn>
+                              </p:par>
+                              <p:par>
+                                <p:cTn id="45" presetID="10" presetClass="entr" presetSubtype="0" fill="hold" grpId="0" nodeType="withEffect">
+                                  <p:stCondLst>
+                                    <p:cond delay="0"/>
+                                  </p:stCondLst>
+                                  <p:childTnLst>
+                                    <p:set>
+                                      <p:cBhvr>
+                                        <p:cTn id="46" dur="1" fill="hold">
+                                          <p:stCondLst>
+                                            <p:cond delay="0"/>
+                                          </p:stCondLst>
+                                        </p:cTn>
+                                        <p:tgtEl>
+                                          <p:spTgt spid="16"/>
+                                        </p:tgtEl>
+                                        <p:attrNameLst>
+                                          <p:attrName>style.visibility</p:attrName>
+                                        </p:attrNameLst>
+                                      </p:cBhvr>
+                                      <p:to>
+                                        <p:strVal val="visible"/>
+                                      </p:to>
+                                    </p:set>
+                                    <p:animEffect transition="in" filter="fade">
+                                      <p:cBhvr>
+                                        <p:cTn id="47" dur="500"/>
+                                        <p:tgtEl>
+                                          <p:spTgt spid="16"/>
+                                        </p:tgtEl>
+                                      </p:cBhvr>
+                                    </p:animEffect>
+                                  </p:childTnLst>
+                                </p:cTn>
+                              </p:par>
+                              <p:par>
+                                <p:cTn id="48" presetID="10" presetClass="entr" presetSubtype="0" fill="hold" grpId="0" nodeType="withEffect">
+                                  <p:stCondLst>
+                                    <p:cond delay="0"/>
+                                  </p:stCondLst>
+                                  <p:childTnLst>
+                                    <p:set>
+                                      <p:cBhvr>
+                                        <p:cTn id="49" dur="1" fill="hold">
+                                          <p:stCondLst>
+                                            <p:cond delay="0"/>
+                                          </p:stCondLst>
+                                        </p:cTn>
+                                        <p:tgtEl>
+                                          <p:spTgt spid="17"/>
+                                        </p:tgtEl>
+                                        <p:attrNameLst>
+                                          <p:attrName>style.visibility</p:attrName>
+                                        </p:attrNameLst>
+                                      </p:cBhvr>
+                                      <p:to>
+                                        <p:strVal val="visible"/>
+                                      </p:to>
+                                    </p:set>
+                                    <p:animEffect transition="in" filter="fade">
+                                      <p:cBhvr>
+                                        <p:cTn id="50" dur="500"/>
+                                        <p:tgtEl>
+                                          <p:spTgt spid="17"/>
+                                        </p:tgtEl>
+                                      </p:cBhvr>
+                                    </p:animEffect>
+                                  </p:childTnLst>
+                                </p:cTn>
+                              </p:par>
+                              <p:par>
+                                <p:cTn id="51" presetID="10" presetClass="entr" presetSubtype="0" fill="hold" grpId="0" nodeType="withEffect">
+                                  <p:stCondLst>
+                                    <p:cond delay="0"/>
+                                  </p:stCondLst>
+                                  <p:childTnLst>
+                                    <p:set>
+                                      <p:cBhvr>
+                                        <p:cTn id="52" dur="1" fill="hold">
+                                          <p:stCondLst>
+                                            <p:cond delay="0"/>
+                                          </p:stCondLst>
+                                        </p:cTn>
+                                        <p:tgtEl>
+                                          <p:spTgt spid="18"/>
+                                        </p:tgtEl>
+                                        <p:attrNameLst>
+                                          <p:attrName>style.visibility</p:attrName>
+                                        </p:attrNameLst>
+                                      </p:cBhvr>
+                                      <p:to>
+                                        <p:strVal val="visible"/>
+                                      </p:to>
+                                    </p:set>
+                                    <p:animEffect transition="in" filter="fade">
+                                      <p:cBhvr>
+                                        <p:cTn id="53" dur="500"/>
+                                        <p:tgtEl>
+                                          <p:spTgt spid="18"/>
+                                        </p:tgtEl>
+                                      </p:cBhvr>
+                                    </p:animEffect>
+                                  </p:childTnLst>
+                                </p:cTn>
+                              </p:par>
+                            </p:childTnLst>
+                          </p:cTn>
+                        </p:par>
+                      </p:childTnLst>
+                    </p:cTn>
+                  </p:par>
+                  <p:par>
+                    <p:cTn id="54" fill="hold">
+                      <p:stCondLst>
+                        <p:cond delay="indefinite"/>
+                      </p:stCondLst>
+                      <p:childTnLst>
+                        <p:par>
+                          <p:cTn id="55" fill="hold">
+                            <p:stCondLst>
+                              <p:cond delay="0"/>
+                            </p:stCondLst>
+                            <p:childTnLst>
+                              <p:par>
+                                <p:cTn id="56" presetID="10" presetClass="entr" presetSubtype="0" fill="hold" grpId="0" nodeType="clickEffect">
+                                  <p:stCondLst>
+                                    <p:cond delay="0"/>
+                                  </p:stCondLst>
+                                  <p:childTnLst>
+                                    <p:set>
+                                      <p:cBhvr>
+                                        <p:cTn id="57" dur="1" fill="hold">
+                                          <p:stCondLst>
+                                            <p:cond delay="0"/>
+                                          </p:stCondLst>
+                                        </p:cTn>
+                                        <p:tgtEl>
+                                          <p:spTgt spid="19"/>
+                                        </p:tgtEl>
+                                        <p:attrNameLst>
+                                          <p:attrName>style.visibility</p:attrName>
+                                        </p:attrNameLst>
+                                      </p:cBhvr>
+                                      <p:to>
+                                        <p:strVal val="visible"/>
+                                      </p:to>
+                                    </p:set>
+                                    <p:animEffect transition="in" filter="fade">
+                                      <p:cBhvr>
+                                        <p:cTn id="58" dur="500"/>
+                                        <p:tgtEl>
+                                          <p:spTgt spid="19"/>
+                                        </p:tgtEl>
+                                      </p:cBhvr>
+                                    </p:animEffect>
+                                  </p:childTnLst>
+                                </p:cTn>
+                              </p:par>
+                              <p:par>
+                                <p:cTn id="59" presetID="10" presetClass="entr" presetSubtype="0" fill="hold" grpId="0" nodeType="withEffect">
+                                  <p:stCondLst>
+                                    <p:cond delay="0"/>
+                                  </p:stCondLst>
+                                  <p:childTnLst>
+                                    <p:set>
+                                      <p:cBhvr>
+                                        <p:cTn id="60" dur="1" fill="hold">
+                                          <p:stCondLst>
+                                            <p:cond delay="0"/>
+                                          </p:stCondLst>
+                                        </p:cTn>
+                                        <p:tgtEl>
+                                          <p:spTgt spid="20"/>
+                                        </p:tgtEl>
+                                        <p:attrNameLst>
+                                          <p:attrName>style.visibility</p:attrName>
+                                        </p:attrNameLst>
+                                      </p:cBhvr>
+                                      <p:to>
+                                        <p:strVal val="visible"/>
+                                      </p:to>
+                                    </p:set>
+                                    <p:animEffect transition="in" filter="fade">
+                                      <p:cBhvr>
+                                        <p:cTn id="61" dur="500"/>
+                                        <p:tgtEl>
+                                          <p:spTgt spid="20"/>
+                                        </p:tgtEl>
+                                      </p:cBhvr>
+                                    </p:animEffect>
+                                  </p:childTnLst>
+                                </p:cTn>
+                              </p:par>
+                              <p:par>
+                                <p:cTn id="62" presetID="10" presetClass="entr" presetSubtype="0" fill="hold" grpId="0" nodeType="withEffect">
+                                  <p:stCondLst>
+                                    <p:cond delay="0"/>
+                                  </p:stCondLst>
+                                  <p:childTnLst>
+                                    <p:set>
+                                      <p:cBhvr>
+                                        <p:cTn id="63" dur="1" fill="hold">
+                                          <p:stCondLst>
+                                            <p:cond delay="0"/>
+                                          </p:stCondLst>
+                                        </p:cTn>
+                                        <p:tgtEl>
+                                          <p:spTgt spid="21"/>
+                                        </p:tgtEl>
+                                        <p:attrNameLst>
+                                          <p:attrName>style.visibility</p:attrName>
+                                        </p:attrNameLst>
+                                      </p:cBhvr>
+                                      <p:to>
+                                        <p:strVal val="visible"/>
+                                      </p:to>
+                                    </p:set>
+                                    <p:animEffect transition="in" filter="fade">
+                                      <p:cBhvr>
+                                        <p:cTn id="64" dur="500"/>
+                                        <p:tgtEl>
+                                          <p:spTgt spid="21"/>
+                                        </p:tgtEl>
+                                      </p:cBhvr>
+                                    </p:animEffect>
+                                  </p:childTnLst>
+                                </p:cTn>
+                              </p:par>
+                              <p:par>
+                                <p:cTn id="65" presetID="10" presetClass="entr" presetSubtype="0" fill="hold" grpId="0" nodeType="withEffect">
+                                  <p:stCondLst>
+                                    <p:cond delay="0"/>
+                                  </p:stCondLst>
+                                  <p:childTnLst>
+                                    <p:set>
+                                      <p:cBhvr>
+                                        <p:cTn id="66" dur="1" fill="hold">
+                                          <p:stCondLst>
+                                            <p:cond delay="0"/>
+                                          </p:stCondLst>
+                                        </p:cTn>
+                                        <p:tgtEl>
+                                          <p:spTgt spid="22"/>
+                                        </p:tgtEl>
+                                        <p:attrNameLst>
+                                          <p:attrName>style.visibility</p:attrName>
+                                        </p:attrNameLst>
+                                      </p:cBhvr>
+                                      <p:to>
+                                        <p:strVal val="visible"/>
+                                      </p:to>
+                                    </p:set>
+                                    <p:animEffect transition="in" filter="fade">
+                                      <p:cBhvr>
+                                        <p:cTn id="67" dur="500"/>
+                                        <p:tgtEl>
+                                          <p:spTgt spid="22"/>
+                                        </p:tgtEl>
+                                      </p:cBhvr>
+                                    </p:animEffect>
+                                  </p:childTnLst>
+                                </p:cTn>
+                              </p:par>
+                              <p:par>
+                                <p:cTn id="68" presetID="10" presetClass="entr" presetSubtype="0" fill="hold" grpId="0" nodeType="withEffect">
+                                  <p:stCondLst>
+                                    <p:cond delay="0"/>
+                                  </p:stCondLst>
+                                  <p:childTnLst>
+                                    <p:set>
+                                      <p:cBhvr>
+                                        <p:cTn id="69" dur="1" fill="hold">
+                                          <p:stCondLst>
+                                            <p:cond delay="0"/>
+                                          </p:stCondLst>
+                                        </p:cTn>
+                                        <p:tgtEl>
+                                          <p:spTgt spid="23"/>
+                                        </p:tgtEl>
+                                        <p:attrNameLst>
+                                          <p:attrName>style.visibility</p:attrName>
+                                        </p:attrNameLst>
+                                      </p:cBhvr>
+                                      <p:to>
+                                        <p:strVal val="visible"/>
+                                      </p:to>
+                                    </p:set>
+                                    <p:animEffect transition="in" filter="fade">
+                                      <p:cBhvr>
+                                        <p:cTn id="70" dur="500"/>
+                                        <p:tgtEl>
+                                          <p:spTgt spid="23"/>
+                                        </p:tgtEl>
+                                      </p:cBhvr>
+                                    </p:animEffect>
+                                  </p:childTnLst>
+                                </p:cTn>
+                              </p:par>
+                            </p:childTnLst>
+                          </p:cTn>
+                        </p:par>
+                      </p:childTnLst>
+                    </p:cTn>
+                  </p:par>
+                  <p:par>
+                    <p:cTn id="71" fill="hold">
+                      <p:stCondLst>
+                        <p:cond delay="indefinite"/>
+                      </p:stCondLst>
+                      <p:childTnLst>
+                        <p:par>
+                          <p:cTn id="72" fill="hold">
+                            <p:stCondLst>
+                              <p:cond delay="0"/>
+                            </p:stCondLst>
+                            <p:childTnLst>
+                              <p:par>
+                                <p:cTn id="73" presetID="10" presetClass="entr" presetSubtype="0" fill="hold" grpId="0" nodeType="clickEffect">
+                                  <p:stCondLst>
+                                    <p:cond delay="0"/>
+                                  </p:stCondLst>
+                                  <p:childTnLst>
+                                    <p:set>
+                                      <p:cBhvr>
+                                        <p:cTn id="74" dur="1" fill="hold">
+                                          <p:stCondLst>
+                                            <p:cond delay="0"/>
+                                          </p:stCondLst>
+                                        </p:cTn>
+                                        <p:tgtEl>
+                                          <p:spTgt spid="24"/>
+                                        </p:tgtEl>
+                                        <p:attrNameLst>
+                                          <p:attrName>style.visibility</p:attrName>
+                                        </p:attrNameLst>
+                                      </p:cBhvr>
+                                      <p:to>
+                                        <p:strVal val="visible"/>
+                                      </p:to>
+                                    </p:set>
+                                    <p:animEffect transition="in" filter="fade">
+                                      <p:cBhvr>
+                                        <p:cTn id="75" dur="500"/>
+                                        <p:tgtEl>
+                                          <p:spTgt spid="24"/>
+                                        </p:tgtEl>
+                                      </p:cBhvr>
+                                    </p:animEffect>
+                                  </p:childTnLst>
+                                </p:cTn>
+                              </p:par>
+                              <p:par>
+                                <p:cTn id="76" presetID="10" presetClass="entr" presetSubtype="0" fill="hold" grpId="0" nodeType="withEffect">
+                                  <p:stCondLst>
+                                    <p:cond delay="0"/>
+                                  </p:stCondLst>
+                                  <p:childTnLst>
+                                    <p:set>
+                                      <p:cBhvr>
+                                        <p:cTn id="77" dur="1" fill="hold">
+                                          <p:stCondLst>
+                                            <p:cond delay="0"/>
+                                          </p:stCondLst>
+                                        </p:cTn>
+                                        <p:tgtEl>
+                                          <p:spTgt spid="25"/>
+                                        </p:tgtEl>
+                                        <p:attrNameLst>
+                                          <p:attrName>style.visibility</p:attrName>
+                                        </p:attrNameLst>
+                                      </p:cBhvr>
+                                      <p:to>
+                                        <p:strVal val="visible"/>
+                                      </p:to>
+                                    </p:set>
+                                    <p:animEffect transition="in" filter="fade">
+                                      <p:cBhvr>
+                                        <p:cTn id="78" dur="500"/>
+                                        <p:tgtEl>
+                                          <p:spTgt spid="25"/>
+                                        </p:tgtEl>
+                                      </p:cBhvr>
+                                    </p:animEffect>
+                                  </p:childTnLst>
+                                </p:cTn>
+                              </p:par>
+                              <p:par>
+                                <p:cTn id="79" presetID="10" presetClass="entr" presetSubtype="0" fill="hold" grpId="0" nodeType="withEffect">
+                                  <p:stCondLst>
+                                    <p:cond delay="0"/>
+                                  </p:stCondLst>
+                                  <p:childTnLst>
+                                    <p:set>
+                                      <p:cBhvr>
+                                        <p:cTn id="80" dur="1" fill="hold">
+                                          <p:stCondLst>
+                                            <p:cond delay="0"/>
+                                          </p:stCondLst>
+                                        </p:cTn>
+                                        <p:tgtEl>
+                                          <p:spTgt spid="26"/>
+                                        </p:tgtEl>
+                                        <p:attrNameLst>
+                                          <p:attrName>style.visibility</p:attrName>
+                                        </p:attrNameLst>
+                                      </p:cBhvr>
+                                      <p:to>
+                                        <p:strVal val="visible"/>
+                                      </p:to>
+                                    </p:set>
+                                    <p:animEffect transition="in" filter="fade">
+                                      <p:cBhvr>
+                                        <p:cTn id="81" dur="500"/>
+                                        <p:tgtEl>
+                                          <p:spTgt spid="26"/>
+                                        </p:tgtEl>
+                                      </p:cBhvr>
+                                    </p:animEffect>
+                                  </p:childTnLst>
+                                </p:cTn>
+                              </p:par>
+                              <p:par>
+                                <p:cTn id="82" presetID="10" presetClass="entr" presetSubtype="0" fill="hold" grpId="0" nodeType="withEffect">
+                                  <p:stCondLst>
+                                    <p:cond delay="0"/>
+                                  </p:stCondLst>
+                                  <p:childTnLst>
+                                    <p:set>
+                                      <p:cBhvr>
+                                        <p:cTn id="83" dur="1" fill="hold">
+                                          <p:stCondLst>
+                                            <p:cond delay="0"/>
+                                          </p:stCondLst>
+                                        </p:cTn>
+                                        <p:tgtEl>
+                                          <p:spTgt spid="27"/>
+                                        </p:tgtEl>
+                                        <p:attrNameLst>
+                                          <p:attrName>style.visibility</p:attrName>
+                                        </p:attrNameLst>
+                                      </p:cBhvr>
+                                      <p:to>
+                                        <p:strVal val="visible"/>
+                                      </p:to>
+                                    </p:set>
+                                    <p:animEffect transition="in" filter="fade">
+                                      <p:cBhvr>
+                                        <p:cTn id="84" dur="500"/>
+                                        <p:tgtEl>
+                                          <p:spTgt spid="27"/>
+                                        </p:tgtEl>
+                                      </p:cBhvr>
+                                    </p:animEffect>
+                                  </p:childTnLst>
+                                </p:cTn>
+                              </p:par>
+                              <p:par>
+                                <p:cTn id="85" presetID="10" presetClass="entr" presetSubtype="0" fill="hold" grpId="0" nodeType="withEffect">
+                                  <p:stCondLst>
+                                    <p:cond delay="0"/>
+                                  </p:stCondLst>
+                                  <p:childTnLst>
+                                    <p:set>
+                                      <p:cBhvr>
+                                        <p:cTn id="86" dur="1" fill="hold">
+                                          <p:stCondLst>
+                                            <p:cond delay="0"/>
+                                          </p:stCondLst>
+                                        </p:cTn>
+                                        <p:tgtEl>
+                                          <p:spTgt spid="28"/>
+                                        </p:tgtEl>
+                                        <p:attrNameLst>
+                                          <p:attrName>style.visibility</p:attrName>
+                                        </p:attrNameLst>
+                                      </p:cBhvr>
+                                      <p:to>
+                                        <p:strVal val="visible"/>
+                                      </p:to>
+                                    </p:set>
+                                    <p:animEffect transition="in" filter="fade">
+                                      <p:cBhvr>
+                                        <p:cTn id="87" dur="500"/>
+                                        <p:tgtEl>
+                                          <p:spTgt spid="28"/>
+                                        </p:tgtEl>
+                                      </p:cBhvr>
+                                    </p:animEffect>
+                                  </p:childTnLst>
+                                </p:cTn>
+                              </p:par>
+                            </p:childTnLst>
+                          </p:cTn>
+                        </p:par>
+                      </p:childTnLst>
+                    </p:cTn>
+                  </p:par>
+                  <p:par>
+                    <p:cTn id="88" fill="hold">
+                      <p:stCondLst>
+                        <p:cond delay="indefinite"/>
+                      </p:stCondLst>
+                      <p:childTnLst>
+                        <p:par>
+                          <p:cTn id="89" fill="hold">
+                            <p:stCondLst>
+                              <p:cond delay="0"/>
+                            </p:stCondLst>
+                            <p:childTnLst>
+                              <p:par>
+                                <p:cTn id="90" presetID="10" presetClass="entr" presetSubtype="0" fill="hold" grpId="0" nodeType="clickEffect">
+                                  <p:stCondLst>
+                                    <p:cond delay="0"/>
+                                  </p:stCondLst>
+                                  <p:childTnLst>
+                                    <p:set>
+                                      <p:cBhvr>
+                                        <p:cTn id="91" dur="1" fill="hold">
+                                          <p:stCondLst>
+                                            <p:cond delay="0"/>
+                                          </p:stCondLst>
+                                        </p:cTn>
+                                        <p:tgtEl>
+                                          <p:spTgt spid="29"/>
+                                        </p:tgtEl>
+                                        <p:attrNameLst>
+                                          <p:attrName>style.visibility</p:attrName>
+                                        </p:attrNameLst>
+                                      </p:cBhvr>
+                                      <p:to>
+                                        <p:strVal val="visible"/>
+                                      </p:to>
+                                    </p:set>
+                                    <p:animEffect transition="in" filter="fade">
+                                      <p:cBhvr>
+                                        <p:cTn id="92" dur="500"/>
+                                        <p:tgtEl>
+                                          <p:spTgt spid="29"/>
+                                        </p:tgtEl>
+                                      </p:cBhvr>
+                                    </p:animEffect>
+                                  </p:childTnLst>
+                                </p:cTn>
+                              </p:par>
+                              <p:par>
+                                <p:cTn id="93" presetID="10" presetClass="entr" presetSubtype="0" fill="hold" grpId="0" nodeType="withEffect">
+                                  <p:stCondLst>
+                                    <p:cond delay="0"/>
+                                  </p:stCondLst>
+                                  <p:childTnLst>
+                                    <p:set>
+                                      <p:cBhvr>
+                                        <p:cTn id="94" dur="1" fill="hold">
+                                          <p:stCondLst>
+                                            <p:cond delay="0"/>
+                                          </p:stCondLst>
+                                        </p:cTn>
+                                        <p:tgtEl>
+                                          <p:spTgt spid="30"/>
+                                        </p:tgtEl>
+                                        <p:attrNameLst>
+                                          <p:attrName>style.visibility</p:attrName>
+                                        </p:attrNameLst>
+                                      </p:cBhvr>
+                                      <p:to>
+                                        <p:strVal val="visible"/>
+                                      </p:to>
+                                    </p:set>
+                                    <p:animEffect transition="in" filter="fade">
+                                      <p:cBhvr>
+                                        <p:cTn id="95" dur="500"/>
+                                        <p:tgtEl>
+                                          <p:spTgt spid="30"/>
+                                        </p:tgtEl>
+                                      </p:cBhvr>
+                                    </p:animEffect>
+                                  </p:childTnLst>
+                                </p:cTn>
+                              </p:par>
+                              <p:par>
+                                <p:cTn id="96" presetID="10" presetClass="entr" presetSubtype="0" fill="hold" grpId="0" nodeType="withEffect">
+                                  <p:stCondLst>
+                                    <p:cond delay="0"/>
+                                  </p:stCondLst>
+                                  <p:childTnLst>
+                                    <p:set>
+                                      <p:cBhvr>
+                                        <p:cTn id="97" dur="1" fill="hold">
+                                          <p:stCondLst>
+                                            <p:cond delay="0"/>
+                                          </p:stCondLst>
+                                        </p:cTn>
+                                        <p:tgtEl>
+                                          <p:spTgt spid="31"/>
+                                        </p:tgtEl>
+                                        <p:attrNameLst>
+                                          <p:attrName>style.visibility</p:attrName>
+                                        </p:attrNameLst>
+                                      </p:cBhvr>
+                                      <p:to>
+                                        <p:strVal val="visible"/>
+                                      </p:to>
+                                    </p:set>
+                                    <p:animEffect transition="in" filter="fade">
+                                      <p:cBhvr>
+                                        <p:cTn id="98" dur="500"/>
+                                        <p:tgtEl>
+                                          <p:spTgt spid="31"/>
+                                        </p:tgtEl>
+                                      </p:cBhvr>
+                                    </p:animEffect>
+                                  </p:childTnLst>
+                                </p:cTn>
+                              </p:par>
+                              <p:par>
+                                <p:cTn id="99" presetID="10" presetClass="entr" presetSubtype="0" fill="hold" grpId="0" nodeType="withEffect">
+                                  <p:stCondLst>
+                                    <p:cond delay="0"/>
+                                  </p:stCondLst>
+                                  <p:childTnLst>
+                                    <p:set>
+                                      <p:cBhvr>
+                                        <p:cTn id="100" dur="1" fill="hold">
+                                          <p:stCondLst>
+                                            <p:cond delay="0"/>
+                                          </p:stCondLst>
+                                        </p:cTn>
+                                        <p:tgtEl>
+                                          <p:spTgt spid="32"/>
+                                        </p:tgtEl>
+                                        <p:attrNameLst>
+                                          <p:attrName>style.visibility</p:attrName>
+                                        </p:attrNameLst>
+                                      </p:cBhvr>
+                                      <p:to>
+                                        <p:strVal val="visible"/>
+                                      </p:to>
+                                    </p:set>
+                                    <p:animEffect transition="in" filter="fade">
+                                      <p:cBhvr>
+                                        <p:cTn id="101" dur="500"/>
+                                        <p:tgtEl>
+                                          <p:spTgt spid="32"/>
+                                        </p:tgtEl>
+                                      </p:cBhvr>
+                                    </p:animEffect>
+                                  </p:childTnLst>
+                                </p:cTn>
+                              </p:par>
+                              <p:par>
+                                <p:cTn id="102" presetID="10" presetClass="entr" presetSubtype="0" fill="hold" grpId="0" nodeType="withEffect">
+                                  <p:stCondLst>
+                                    <p:cond delay="0"/>
+                                  </p:stCondLst>
+                                  <p:childTnLst>
+                                    <p:set>
+                                      <p:cBhvr>
+                                        <p:cTn id="103" dur="1" fill="hold">
+                                          <p:stCondLst>
+                                            <p:cond delay="0"/>
+                                          </p:stCondLst>
+                                        </p:cTn>
+                                        <p:tgtEl>
+                                          <p:spTgt spid="33"/>
+                                        </p:tgtEl>
+                                        <p:attrNameLst>
+                                          <p:attrName>style.visibility</p:attrName>
+                                        </p:attrNameLst>
+                                      </p:cBhvr>
+                                      <p:to>
+                                        <p:strVal val="visible"/>
+                                      </p:to>
+                                    </p:set>
+                                    <p:animEffect transition="in" filter="fade">
+                                      <p:cBhvr>
+                                        <p:cTn id="104" dur="500"/>
+                                        <p:tgtEl>
+                                          <p:spTgt spid="33"/>
+                                        </p:tgtEl>
+                                      </p:cBhvr>
+                                    </p:animEffect>
+                                  </p:childTnLst>
+                                </p:cTn>
+                              </p:par>
+                            </p:childTnLst>
+                          </p:cTn>
+                        </p:par>
+                      </p:childTnLst>
+                    </p:cTn>
+                  </p:par>
+                </p:childTnLst>
+              </p:cTn>
+              <p:prevCondLst>
+                <p:cond evt="onPrev" delay="0">
+                  <p:tgtEl>
+                    <p:sldTgt/>
+                  </p:tgtEl>
+                </p:cond>
+              </p:prevCondLst>
+              <p:nextCondLst>
+                <p:cond evt="onNext" delay="0">
+                  <p:tgtEl>
+                    <p:sldTgt/>
+                  </p:tgtEl>
+                </p:cond>
+              </p:nextCondLst>
+            </p:seq>
+          </p:childTnLst>
+        </p:cTn>
+      </p:par>
+    </p:tnLst>
+  </p:timing>
+</p:sld>
+</file>
+
+<file path=ppt/slides/slide17.xml><?xml version="1.0" encoding="utf-8"?>
+<p:sld xmlns:a="http://schemas.openxmlformats.org/drawingml/2006/main" xmlns:r="http://schemas.openxmlformats.org/officeDocument/2006/relationships" xmlns:p="http://schemas.openxmlformats.org/presentationml/2006/main">
+  <p:cSld name="Slide 17">
+    <p:bg>
+      <p:bgPr>
+        <a:solidFill>
+          <a:srgbClr val="FFFFFF"/>
+        </a:solidFill>
+      </p:bgPr>
+    </p:bg>
+    <p:spTree>
+      <p:nvGrpSpPr>
+        <p:cNvPr id="1" name=""/>
+        <p:cNvGrpSpPr/>
+        <p:nvPr/>
+      </p:nvGrpSpPr>
+      <p:grpSpPr>
+        <a:xfrm>
+          <a:off x="0" y="0"/>
+          <a:ext cx="0" cy="0"/>
+          <a:chOff x="0" y="0"/>
+          <a:chExt cx="0" cy="0"/>
+        </a:xfrm>
+      </p:grpSpPr>
+      <p:sp>
+        <p:nvSpPr>
+          <p:cNvPr id="2" name="Text 0"/>
+          <p:cNvSpPr/>
+          <p:nvPr/>
+        </p:nvSpPr>
+        <p:spPr>
+          <a:xfrm>
+            <a:off x="502920" y="457200"/>
+            <a:ext cx="11185855" cy="274320"/>
+          </a:xfrm>
+          <a:prstGeom prst="rect">
+            <a:avLst/>
+          </a:prstGeom>
+          <a:noFill/>
+          <a:ln/>
+        </p:spPr>
+        <p:txBody>
+          <a:bodyPr wrap="square" lIns="0" tIns="0" rIns="0" bIns="0" rtlCol="0" anchor="ctr"/>
+          <a:lstStyle/>
+          <a:p>
+            <a:pPr indent="0" marL="0">
+              <a:buNone/>
+            </a:pPr>
+            <a:r>
+              <a:rPr lang="en-US" sz="1200" b="1" spc="300" kern="0" dirty="0">
+                <a:solidFill>
+                  <a:srgbClr val="0D9488"/>
+                </a:solidFill>
+                <a:latin typeface="Calibri" pitchFamily="34" charset="0"/>
+                <a:ea typeface="Calibri" pitchFamily="34" charset="-122"/>
+                <a:cs typeface="Calibri" pitchFamily="34" charset="-120"/>
+              </a:rPr>
+              <a:t>IMPLEMENTATION &amp; NEXT STEPS</a:t>
+            </a:r>
+            <a:endParaRPr lang="en-US" sz="1200" dirty="0"/>
+          </a:p>
+        </p:txBody>
+      </p:sp>
+      <p:sp>
+        <p:nvSpPr>
+          <p:cNvPr id="3" name="Text 1"/>
+          <p:cNvSpPr/>
+          <p:nvPr/>
+        </p:nvSpPr>
+        <p:spPr>
+          <a:xfrm>
+            <a:off x="502920" y="749808"/>
+            <a:ext cx="11185855" cy="914400"/>
+          </a:xfrm>
+          <a:prstGeom prst="rect">
+            <a:avLst/>
+          </a:prstGeom>
+          <a:noFill/>
+          <a:ln/>
+        </p:spPr>
+        <p:txBody>
+          <a:bodyPr wrap="square" lIns="0" tIns="0" rIns="0" bIns="0" rtlCol="0" anchor="t"/>
+          <a:lstStyle/>
+          <a:p>
+            <a:pPr indent="0" marL="0">
+              <a:buNone/>
+            </a:pPr>
+            <a:r>
+              <a:rPr lang="en-US" sz="2800" b="1" dirty="0">
+                <a:solidFill>
+                  <a:srgbClr val="0F172A"/>
+                </a:solidFill>
+                <a:latin typeface="Georgia" pitchFamily="34" charset="0"/>
+                <a:ea typeface="Georgia" pitchFamily="34" charset="-122"/>
+                <a:cs typeface="Georgia" pitchFamily="34" charset="-120"/>
+              </a:rPr>
+              <a:t>From working prototype to production ramp</a:t>
+            </a:r>
+            <a:endParaRPr lang="en-US" sz="2800" dirty="0"/>
+          </a:p>
+        </p:txBody>
+      </p:sp>
+      <p:sp>
+        <p:nvSpPr>
+          <p:cNvPr id="4" name="Shape 2"/>
+          <p:cNvSpPr/>
+          <p:nvPr/>
+        </p:nvSpPr>
+        <p:spPr>
+          <a:xfrm>
+            <a:off x="502920" y="1920240"/>
+            <a:ext cx="2590724" cy="3383280"/>
+          </a:xfrm>
+          <a:prstGeom prst="roundRect">
+            <a:avLst>
+              <a:gd name="adj" fmla="val 3177"/>
+            </a:avLst>
+          </a:prstGeom>
+          <a:solidFill>
+            <a:srgbClr val="FFFFFF"/>
+          </a:solidFill>
+          <a:ln w="12700">
+            <a:solidFill>
+              <a:srgbClr val="E6E8F0"/>
+            </a:solidFill>
+            <a:prstDash val="solid"/>
+          </a:ln>
+          <a:effectLst>
+            <a:outerShdw sx="100000" sy="100000" kx="0" ky="0" algn="bl" rotWithShape="0" blurRad="114300" dist="38100" dir="8100000">
+              <a:srgbClr val="0F172A">
+                <a:alpha val="16000"/>
+              </a:srgbClr>
+            </a:outerShdw>
+          </a:effectLst>
+        </p:spPr>
+      </p:sp>
+      <p:sp>
+        <p:nvSpPr>
+          <p:cNvPr id="5" name="Shape 3"/>
+          <p:cNvSpPr/>
+          <p:nvPr/>
+        </p:nvSpPr>
+        <p:spPr>
+          <a:xfrm>
+            <a:off x="502920" y="1920240"/>
+            <a:ext cx="2590724" cy="109728"/>
+          </a:xfrm>
+          <a:prstGeom prst="rect">
+            <a:avLst/>
+          </a:prstGeom>
+          <a:solidFill>
+            <a:srgbClr val="16A34A"/>
+          </a:solidFill>
+          <a:ln/>
+        </p:spPr>
+      </p:sp>
+      <p:sp>
+        <p:nvSpPr>
+          <p:cNvPr id="6" name="Shape 4"/>
+          <p:cNvSpPr/>
+          <p:nvPr/>
+        </p:nvSpPr>
+        <p:spPr>
+          <a:xfrm>
+            <a:off x="722376" y="2231136"/>
+            <a:ext cx="603504" cy="603504"/>
+          </a:xfrm>
+          <a:prstGeom prst="roundRect">
+            <a:avLst>
+              <a:gd name="adj" fmla="val 19697"/>
+            </a:avLst>
+          </a:prstGeom>
+          <a:solidFill>
+            <a:srgbClr val="16A34A"/>
+          </a:solidFill>
+          <a:ln/>
+        </p:spPr>
+      </p:sp>
+      <p:pic>
+        <p:nvPicPr>
+          <p:cNvPr id="7" name="Image 0" descr="icons/check.png">    </p:cNvPr>
+          <p:cNvPicPr>
+            <a:picLocks noChangeAspect="1"/>
+          </p:cNvPicPr>
+          <p:nvPr/>
+        </p:nvPicPr>
+        <p:blipFill>
+          <a:blip r:embed="rId1"/>
+          <a:stretch>
+            <a:fillRect/>
+          </a:stretch>
+        </p:blipFill>
+        <p:spPr>
+          <a:xfrm>
+            <a:off x="877824" y="2386584"/>
+            <a:ext cx="292608" cy="292608"/>
+          </a:xfrm>
+          <a:prstGeom prst="rect">
+            <a:avLst/>
+          </a:prstGeom>
+        </p:spPr>
+      </p:pic>
+      <p:sp>
+        <p:nvSpPr>
+          <p:cNvPr id="8" name="Text 5"/>
+          <p:cNvSpPr/>
+          <p:nvPr/>
+        </p:nvSpPr>
+        <p:spPr>
+          <a:xfrm>
+            <a:off x="704088" y="2944368"/>
+            <a:ext cx="2188388" cy="548640"/>
+          </a:xfrm>
+          <a:prstGeom prst="rect">
+            <a:avLst/>
+          </a:prstGeom>
+          <a:noFill/>
+          <a:ln/>
+        </p:spPr>
+        <p:txBody>
+          <a:bodyPr wrap="square" lIns="0" tIns="0" rIns="0" bIns="0" rtlCol="0" anchor="t"/>
+          <a:lstStyle/>
+          <a:p>
+            <a:pPr indent="0" marL="0">
+              <a:buNone/>
+            </a:pPr>
+            <a:r>
+              <a:rPr lang="en-US" sz="1400" b="1" dirty="0">
+                <a:solidFill>
+                  <a:srgbClr val="0F172A"/>
+                </a:solidFill>
+                <a:latin typeface="Calibri" pitchFamily="34" charset="0"/>
+                <a:ea typeface="Calibri" pitchFamily="34" charset="-122"/>
+                <a:cs typeface="Calibri" pitchFamily="34" charset="-120"/>
+              </a:rPr>
+              <a:t>Now — Prototype (done)</a:t>
+            </a:r>
+            <a:endParaRPr lang="en-US" sz="1400" dirty="0"/>
+          </a:p>
+        </p:txBody>
+      </p:sp>
+      <p:sp>
+        <p:nvSpPr>
+          <p:cNvPr id="9" name="Text 6"/>
+          <p:cNvSpPr/>
+          <p:nvPr/>
+        </p:nvSpPr>
+        <p:spPr>
+          <a:xfrm>
+            <a:off x="722376" y="3493008"/>
+            <a:ext cx="2170100" cy="1691640"/>
+          </a:xfrm>
+          <a:prstGeom prst="rect">
+            <a:avLst/>
+          </a:prstGeom>
+          <a:noFill/>
+          <a:ln/>
+        </p:spPr>
+        <p:txBody>
+          <a:bodyPr wrap="square" lIns="0" tIns="0" rIns="0" bIns="0" rtlCol="0" anchor="t"/>
+          <a:lstStyle/>
+          <a:p>
+            <a:pPr marL="152400" indent="-152400">
+              <a:spcAft>
+                <a:spcPts val="700"/>
+              </a:spcAft>
+              <a:buSzPct val="100000"/>
+              <a:buChar char="•"/>
+            </a:pPr>
+            <a:r>
+              <a:rPr lang="en-US" sz="1150" dirty="0">
+                <a:solidFill>
+                  <a:srgbClr val="5B6577"/>
+                </a:solidFill>
+                <a:latin typeface="Calibri" pitchFamily="34" charset="0"/>
+                <a:ea typeface="Calibri" pitchFamily="34" charset="-122"/>
+                <a:cs typeface="Calibri" pitchFamily="34" charset="-120"/>
+              </a:rPr>
+              <a:t>Live on Cloud Run + Firestore</a:t>
+            </a:r>
+            <a:endParaRPr lang="en-US" sz="1150" dirty="0"/>
+          </a:p>
+          <a:p>
+            <a:pPr marL="152400" indent="-152400">
+              <a:spcAft>
+                <a:spcPts val="700"/>
+              </a:spcAft>
+              <a:buSzPct val="100000"/>
+              <a:buChar char="•"/>
+            </a:pPr>
+            <a:r>
+              <a:rPr lang="en-US" sz="1150" dirty="0">
+                <a:solidFill>
+                  <a:srgbClr val="5B6577"/>
+                </a:solidFill>
+                <a:latin typeface="Calibri" pitchFamily="34" charset="0"/>
+                <a:ea typeface="Calibri" pitchFamily="34" charset="-122"/>
+                <a:cs typeface="Calibri" pitchFamily="34" charset="-120"/>
+              </a:rPr>
+              <a:t>All 4 requirements + safe checkout</a:t>
+            </a:r>
+            <a:endParaRPr lang="en-US" sz="1150" dirty="0"/>
+          </a:p>
+          <a:p>
+            <a:pPr marL="152400" indent="-152400">
+              <a:spcAft>
+                <a:spcPts val="700"/>
+              </a:spcAft>
+              <a:buSzPct val="100000"/>
+              <a:buChar char="•"/>
+            </a:pPr>
+            <a:r>
+              <a:rPr lang="en-US" sz="1150" dirty="0">
+                <a:solidFill>
+                  <a:srgbClr val="5B6577"/>
+                </a:solidFill>
+                <a:latin typeface="Calibri" pitchFamily="34" charset="0"/>
+                <a:ea typeface="Calibri" pitchFamily="34" charset="-122"/>
+                <a:cs typeface="Calibri" pitchFamily="34" charset="-120"/>
+              </a:rPr>
+              <a:t>117 tests · CI/CD · /dev portal</a:t>
+            </a:r>
+            <a:endParaRPr lang="en-US" sz="1150" dirty="0"/>
+          </a:p>
+        </p:txBody>
+      </p:sp>
+      <p:pic>
+        <p:nvPicPr>
+          <p:cNvPr id="10" name="Image 1" descr="icons/arrow.png">    </p:cNvPr>
+          <p:cNvPicPr>
+            <a:picLocks noChangeAspect="1"/>
+          </p:cNvPicPr>
+          <p:nvPr/>
+        </p:nvPicPr>
+        <p:blipFill>
+          <a:blip r:embed="rId2"/>
+          <a:stretch>
+            <a:fillRect/>
+          </a:stretch>
+        </p:blipFill>
+        <p:spPr>
+          <a:xfrm>
+            <a:off x="3093644" y="3474720"/>
+            <a:ext cx="256032" cy="256032"/>
+          </a:xfrm>
+          <a:prstGeom prst="rect">
+            <a:avLst/>
+          </a:prstGeom>
+        </p:spPr>
+      </p:pic>
+      <p:sp>
+        <p:nvSpPr>
+          <p:cNvPr id="11" name="Shape 7"/>
+          <p:cNvSpPr/>
+          <p:nvPr/>
+        </p:nvSpPr>
+        <p:spPr>
+          <a:xfrm>
+            <a:off x="3367964" y="1920240"/>
+            <a:ext cx="2590724" cy="3383280"/>
+          </a:xfrm>
+          <a:prstGeom prst="roundRect">
+            <a:avLst>
+              <a:gd name="adj" fmla="val 3177"/>
+            </a:avLst>
+          </a:prstGeom>
+          <a:solidFill>
+            <a:srgbClr val="FFFFFF"/>
+          </a:solidFill>
+          <a:ln w="12700">
+            <a:solidFill>
+              <a:srgbClr val="E6E8F0"/>
+            </a:solidFill>
+            <a:prstDash val="solid"/>
+          </a:ln>
+          <a:effectLst>
+            <a:outerShdw sx="100000" sy="100000" kx="0" ky="0" algn="bl" rotWithShape="0" blurRad="114300" dist="38100" dir="8100000">
+              <a:srgbClr val="0F172A">
+                <a:alpha val="16000"/>
+              </a:srgbClr>
+            </a:outerShdw>
+          </a:effectLst>
+        </p:spPr>
+      </p:sp>
+      <p:sp>
+        <p:nvSpPr>
+          <p:cNvPr id="12" name="Shape 8"/>
+          <p:cNvSpPr/>
+          <p:nvPr/>
+        </p:nvSpPr>
+        <p:spPr>
+          <a:xfrm>
+            <a:off x="3367964" y="1920240"/>
+            <a:ext cx="2590724" cy="109728"/>
+          </a:xfrm>
+          <a:prstGeom prst="rect">
+            <a:avLst/>
+          </a:prstGeom>
+          <a:solidFill>
+            <a:srgbClr val="2563EB"/>
+          </a:solidFill>
+          <a:ln/>
+        </p:spPr>
+      </p:sp>
+      <p:sp>
+        <p:nvSpPr>
+          <p:cNvPr id="13" name="Shape 9"/>
+          <p:cNvSpPr/>
+          <p:nvPr/>
+        </p:nvSpPr>
+        <p:spPr>
+          <a:xfrm>
+            <a:off x="3587420" y="2231136"/>
+            <a:ext cx="603504" cy="603504"/>
+          </a:xfrm>
+          <a:prstGeom prst="roundRect">
+            <a:avLst>
+              <a:gd name="adj" fmla="val 19697"/>
+            </a:avLst>
+          </a:prstGeom>
+          <a:solidFill>
+            <a:srgbClr val="2563EB"/>
+          </a:solidFill>
+          <a:ln/>
+        </p:spPr>
+      </p:sp>
+      <p:pic>
+        <p:nvPicPr>
+          <p:cNvPr id="14" name="Image 2" descr="icons/users.png">    </p:cNvPr>
+          <p:cNvPicPr>
+            <a:picLocks noChangeAspect="1"/>
+          </p:cNvPicPr>
+          <p:nvPr/>
+        </p:nvPicPr>
+        <p:blipFill>
+          <a:blip r:embed="rId3"/>
+          <a:stretch>
+            <a:fillRect/>
+          </a:stretch>
+        </p:blipFill>
+        <p:spPr>
+          <a:xfrm>
+            <a:off x="3742868" y="2386584"/>
+            <a:ext cx="292608" cy="292608"/>
+          </a:xfrm>
+          <a:prstGeom prst="rect">
+            <a:avLst/>
+          </a:prstGeom>
+        </p:spPr>
+      </p:pic>
+      <p:sp>
+        <p:nvSpPr>
+          <p:cNvPr id="15" name="Text 10"/>
+          <p:cNvSpPr/>
+          <p:nvPr/>
+        </p:nvSpPr>
+        <p:spPr>
+          <a:xfrm>
+            <a:off x="3569132" y="2944368"/>
+            <a:ext cx="2188388" cy="548640"/>
+          </a:xfrm>
+          <a:prstGeom prst="rect">
+            <a:avLst/>
+          </a:prstGeom>
+          <a:noFill/>
+          <a:ln/>
+        </p:spPr>
+        <p:txBody>
+          <a:bodyPr wrap="square" lIns="0" tIns="0" rIns="0" bIns="0" rtlCol="0" anchor="t"/>
+          <a:lstStyle/>
+          <a:p>
+            <a:pPr indent="0" marL="0">
+              <a:buNone/>
+            </a:pPr>
+            <a:r>
+              <a:rPr lang="en-US" sz="1400" b="1" dirty="0">
+                <a:solidFill>
+                  <a:srgbClr val="0F172A"/>
+                </a:solidFill>
+                <a:latin typeface="Calibri" pitchFamily="34" charset="0"/>
+                <a:ea typeface="Calibri" pitchFamily="34" charset="-122"/>
+                <a:cs typeface="Calibri" pitchFamily="34" charset="-120"/>
+              </a:rPr>
+              <a:t>Pilot — 4–6 wks</a:t>
+            </a:r>
+            <a:endParaRPr lang="en-US" sz="1400" dirty="0"/>
+          </a:p>
+        </p:txBody>
+      </p:sp>
+      <p:sp>
+        <p:nvSpPr>
+          <p:cNvPr id="16" name="Text 11"/>
+          <p:cNvSpPr/>
+          <p:nvPr/>
+        </p:nvSpPr>
+        <p:spPr>
+          <a:xfrm>
+            <a:off x="3587420" y="3493008"/>
+            <a:ext cx="2170100" cy="1691640"/>
+          </a:xfrm>
+          <a:prstGeom prst="rect">
+            <a:avLst/>
+          </a:prstGeom>
+          <a:noFill/>
+          <a:ln/>
+        </p:spPr>
+        <p:txBody>
+          <a:bodyPr wrap="square" lIns="0" tIns="0" rIns="0" bIns="0" rtlCol="0" anchor="t"/>
+          <a:lstStyle/>
+          <a:p>
+            <a:pPr marL="152400" indent="-152400">
+              <a:spcAft>
+                <a:spcPts val="700"/>
+              </a:spcAft>
+              <a:buSzPct val="100000"/>
+              <a:buChar char="•"/>
+            </a:pPr>
+            <a:r>
+              <a:rPr lang="en-US" sz="1150" dirty="0">
+                <a:solidFill>
+                  <a:srgbClr val="5B6577"/>
+                </a:solidFill>
+                <a:latin typeface="Calibri" pitchFamily="34" charset="0"/>
+                <a:ea typeface="Calibri" pitchFamily="34" charset="-122"/>
+                <a:cs typeface="Calibri" pitchFamily="34" charset="-120"/>
+              </a:rPr>
+              <a:t>Multi-user + real SSO (Firebase/IdP)</a:t>
+            </a:r>
+            <a:endParaRPr lang="en-US" sz="1150" dirty="0"/>
+          </a:p>
+          <a:p>
+            <a:pPr marL="152400" indent="-152400">
+              <a:spcAft>
+                <a:spcPts val="700"/>
+              </a:spcAft>
+              <a:buSzPct val="100000"/>
+              <a:buChar char="•"/>
+            </a:pPr>
+            <a:r>
+              <a:rPr lang="en-US" sz="1150" dirty="0">
+                <a:solidFill>
+                  <a:srgbClr val="5B6577"/>
+                </a:solidFill>
+                <a:latin typeface="Calibri" pitchFamily="34" charset="0"/>
+                <a:ea typeface="Calibri" pitchFamily="34" charset="-122"/>
+                <a:cs typeface="Calibri" pitchFamily="34" charset="-120"/>
+              </a:rPr>
+              <a:t>Secret Manager · CORS/IAM hardening</a:t>
+            </a:r>
+            <a:endParaRPr lang="en-US" sz="1150" dirty="0"/>
+          </a:p>
+          <a:p>
+            <a:pPr marL="152400" indent="-152400">
+              <a:spcAft>
+                <a:spcPts val="700"/>
+              </a:spcAft>
+              <a:buSzPct val="100000"/>
+              <a:buChar char="•"/>
+            </a:pPr>
+            <a:r>
+              <a:rPr lang="en-US" sz="1150" dirty="0">
+                <a:solidFill>
+                  <a:srgbClr val="5B6577"/>
+                </a:solidFill>
+                <a:latin typeface="Calibri" pitchFamily="34" charset="0"/>
+                <a:ea typeface="Calibri" pitchFamily="34" charset="-122"/>
+                <a:cs typeface="Calibri" pitchFamily="34" charset="-120"/>
+              </a:rPr>
+              <a:t>Instrument deflection / conversion / CSAT</a:t>
+            </a:r>
+            <a:endParaRPr lang="en-US" sz="1150" dirty="0"/>
+          </a:p>
+        </p:txBody>
+      </p:sp>
+      <p:pic>
+        <p:nvPicPr>
+          <p:cNvPr id="17" name="Image 3" descr="icons/arrow.png">    </p:cNvPr>
+          <p:cNvPicPr>
+            <a:picLocks noChangeAspect="1"/>
+          </p:cNvPicPr>
+          <p:nvPr/>
+        </p:nvPicPr>
+        <p:blipFill>
+          <a:blip r:embed="rId4"/>
+          <a:stretch>
+            <a:fillRect/>
+          </a:stretch>
+        </p:blipFill>
+        <p:spPr>
+          <a:xfrm>
+            <a:off x="5958688" y="3474720"/>
+            <a:ext cx="256032" cy="256032"/>
+          </a:xfrm>
+          <a:prstGeom prst="rect">
+            <a:avLst/>
+          </a:prstGeom>
+        </p:spPr>
+      </p:pic>
+      <p:sp>
+        <p:nvSpPr>
+          <p:cNvPr id="18" name="Shape 12"/>
+          <p:cNvSpPr/>
+          <p:nvPr/>
+        </p:nvSpPr>
+        <p:spPr>
+          <a:xfrm>
+            <a:off x="6233008" y="1920240"/>
+            <a:ext cx="2590724" cy="3383280"/>
+          </a:xfrm>
+          <a:prstGeom prst="roundRect">
+            <a:avLst>
+              <a:gd name="adj" fmla="val 3177"/>
+            </a:avLst>
+          </a:prstGeom>
+          <a:solidFill>
+            <a:srgbClr val="FFFFFF"/>
+          </a:solidFill>
+          <a:ln w="12700">
+            <a:solidFill>
+              <a:srgbClr val="E6E8F0"/>
+            </a:solidFill>
+            <a:prstDash val="solid"/>
+          </a:ln>
+          <a:effectLst>
+            <a:outerShdw sx="100000" sy="100000" kx="0" ky="0" algn="bl" rotWithShape="0" blurRad="114300" dist="38100" dir="8100000">
+              <a:srgbClr val="0F172A">
+                <a:alpha val="16000"/>
+              </a:srgbClr>
+            </a:outerShdw>
+          </a:effectLst>
+        </p:spPr>
+      </p:sp>
+      <p:sp>
+        <p:nvSpPr>
+          <p:cNvPr id="19" name="Shape 13"/>
+          <p:cNvSpPr/>
+          <p:nvPr/>
+        </p:nvSpPr>
+        <p:spPr>
+          <a:xfrm>
+            <a:off x="6233008" y="1920240"/>
+            <a:ext cx="2590724" cy="109728"/>
+          </a:xfrm>
+          <a:prstGeom prst="rect">
+            <a:avLst/>
+          </a:prstGeom>
+          <a:solidFill>
+            <a:srgbClr val="7C3AED"/>
+          </a:solidFill>
+          <a:ln/>
+        </p:spPr>
+      </p:sp>
+      <p:sp>
+        <p:nvSpPr>
+          <p:cNvPr id="20" name="Shape 14"/>
+          <p:cNvSpPr/>
+          <p:nvPr/>
+        </p:nvSpPr>
+        <p:spPr>
+          <a:xfrm>
+            <a:off x="6452464" y="2231136"/>
+            <a:ext cx="603504" cy="603504"/>
+          </a:xfrm>
+          <a:prstGeom prst="roundRect">
+            <a:avLst>
+              <a:gd name="adj" fmla="val 19697"/>
+            </a:avLst>
+          </a:prstGeom>
+          <a:solidFill>
+            <a:srgbClr val="7C3AED"/>
+          </a:solidFill>
+          <a:ln/>
+        </p:spPr>
+      </p:sp>
+      <p:pic>
+        <p:nvPicPr>
+          <p:cNvPr id="21" name="Image 4" descr="icons/plug.png">    </p:cNvPr>
+          <p:cNvPicPr>
+            <a:picLocks noChangeAspect="1"/>
+          </p:cNvPicPr>
+          <p:nvPr/>
+        </p:nvPicPr>
+        <p:blipFill>
+          <a:blip r:embed="rId5"/>
+          <a:stretch>
+            <a:fillRect/>
+          </a:stretch>
+        </p:blipFill>
+        <p:spPr>
+          <a:xfrm>
+            <a:off x="6607912" y="2386584"/>
+            <a:ext cx="292608" cy="292608"/>
+          </a:xfrm>
+          <a:prstGeom prst="rect">
+            <a:avLst/>
+          </a:prstGeom>
+        </p:spPr>
+      </p:pic>
+      <p:sp>
+        <p:nvSpPr>
+          <p:cNvPr id="22" name="Text 15"/>
+          <p:cNvSpPr/>
+          <p:nvPr/>
+        </p:nvSpPr>
+        <p:spPr>
+          <a:xfrm>
+            <a:off x="6434176" y="2944368"/>
+            <a:ext cx="2188388" cy="548640"/>
+          </a:xfrm>
+          <a:prstGeom prst="rect">
+            <a:avLst/>
+          </a:prstGeom>
+          <a:noFill/>
+          <a:ln/>
+        </p:spPr>
+        <p:txBody>
+          <a:bodyPr wrap="square" lIns="0" tIns="0" rIns="0" bIns="0" rtlCol="0" anchor="t"/>
+          <a:lstStyle/>
+          <a:p>
+            <a:pPr indent="0" marL="0">
+              <a:buNone/>
+            </a:pPr>
+            <a:r>
+              <a:rPr lang="en-US" sz="1400" b="1" dirty="0">
+                <a:solidFill>
+                  <a:srgbClr val="0F172A"/>
+                </a:solidFill>
+                <a:latin typeface="Calibri" pitchFamily="34" charset="0"/>
+                <a:ea typeface="Calibri" pitchFamily="34" charset="-122"/>
+                <a:cs typeface="Calibri" pitchFamily="34" charset="-120"/>
+              </a:rPr>
+              <a:t>Integrate — 6–10 wks</a:t>
+            </a:r>
+            <a:endParaRPr lang="en-US" sz="1400" dirty="0"/>
+          </a:p>
+        </p:txBody>
+      </p:sp>
+      <p:sp>
+        <p:nvSpPr>
+          <p:cNvPr id="23" name="Text 16"/>
+          <p:cNvSpPr/>
+          <p:nvPr/>
+        </p:nvSpPr>
+        <p:spPr>
+          <a:xfrm>
+            <a:off x="6452464" y="3493008"/>
+            <a:ext cx="2170100" cy="1691640"/>
+          </a:xfrm>
+          <a:prstGeom prst="rect">
+            <a:avLst/>
+          </a:prstGeom>
+          <a:noFill/>
+          <a:ln/>
+        </p:spPr>
+        <p:txBody>
+          <a:bodyPr wrap="square" lIns="0" tIns="0" rIns="0" bIns="0" rtlCol="0" anchor="t"/>
+          <a:lstStyle/>
+          <a:p>
+            <a:pPr marL="152400" indent="-152400">
+              <a:spcAft>
+                <a:spcPts val="700"/>
+              </a:spcAft>
+              <a:buSzPct val="100000"/>
+              <a:buChar char="•"/>
+            </a:pPr>
+            <a:r>
+              <a:rPr lang="en-US" sz="1150" dirty="0">
+                <a:solidFill>
+                  <a:srgbClr val="5B6577"/>
+                </a:solidFill>
+                <a:latin typeface="Calibri" pitchFamily="34" charset="0"/>
+                <a:ea typeface="Calibri" pitchFamily="34" charset="-122"/>
+                <a:cs typeface="Calibri" pitchFamily="34" charset="-120"/>
+              </a:rPr>
+              <a:t>Live inventory/OMS + payment provider</a:t>
+            </a:r>
+            <a:endParaRPr lang="en-US" sz="1150" dirty="0"/>
+          </a:p>
+          <a:p>
+            <a:pPr marL="152400" indent="-152400">
+              <a:spcAft>
+                <a:spcPts val="700"/>
+              </a:spcAft>
+              <a:buSzPct val="100000"/>
+              <a:buChar char="•"/>
+            </a:pPr>
+            <a:r>
+              <a:rPr lang="en-US" sz="1150" dirty="0">
+                <a:solidFill>
+                  <a:srgbClr val="5B6577"/>
+                </a:solidFill>
+                <a:latin typeface="Calibri" pitchFamily="34" charset="0"/>
+                <a:ea typeface="Calibri" pitchFamily="34" charset="-122"/>
+                <a:cs typeface="Calibri" pitchFamily="34" charset="-120"/>
+              </a:rPr>
+              <a:t>CCAI telephony + agent-assist</a:t>
+            </a:r>
+            <a:endParaRPr lang="en-US" sz="1150" dirty="0"/>
+          </a:p>
+          <a:p>
+            <a:pPr marL="152400" indent="-152400">
+              <a:spcAft>
+                <a:spcPts val="700"/>
+              </a:spcAft>
+              <a:buSzPct val="100000"/>
+              <a:buChar char="•"/>
+            </a:pPr>
+            <a:r>
+              <a:rPr lang="en-US" sz="1150" dirty="0">
+                <a:solidFill>
+                  <a:srgbClr val="5B6577"/>
+                </a:solidFill>
+                <a:latin typeface="Calibri" pitchFamily="34" charset="0"/>
+                <a:ea typeface="Calibri" pitchFamily="34" charset="-122"/>
+                <a:cs typeface="Calibri" pitchFamily="34" charset="-120"/>
+              </a:rPr>
+              <a:t>Vertex Translation for long-tail locales</a:t>
+            </a:r>
+            <a:endParaRPr lang="en-US" sz="1150" dirty="0"/>
+          </a:p>
+        </p:txBody>
+      </p:sp>
+      <p:pic>
+        <p:nvPicPr>
+          <p:cNvPr id="24" name="Image 5" descr="icons/arrow.png">    </p:cNvPr>
+          <p:cNvPicPr>
+            <a:picLocks noChangeAspect="1"/>
+          </p:cNvPicPr>
+          <p:nvPr/>
+        </p:nvPicPr>
+        <p:blipFill>
+          <a:blip r:embed="rId6"/>
+          <a:stretch>
+            <a:fillRect/>
+          </a:stretch>
+        </p:blipFill>
+        <p:spPr>
+          <a:xfrm>
+            <a:off x="8823731" y="3474720"/>
+            <a:ext cx="256032" cy="256032"/>
+          </a:xfrm>
+          <a:prstGeom prst="rect">
+            <a:avLst/>
+          </a:prstGeom>
+        </p:spPr>
+      </p:pic>
+      <p:sp>
+        <p:nvSpPr>
+          <p:cNvPr id="25" name="Shape 17"/>
+          <p:cNvSpPr/>
+          <p:nvPr/>
+        </p:nvSpPr>
+        <p:spPr>
+          <a:xfrm>
+            <a:off x="9098051" y="1920240"/>
+            <a:ext cx="2590724" cy="3383280"/>
+          </a:xfrm>
+          <a:prstGeom prst="roundRect">
+            <a:avLst>
+              <a:gd name="adj" fmla="val 3177"/>
+            </a:avLst>
+          </a:prstGeom>
+          <a:solidFill>
+            <a:srgbClr val="FFFFFF"/>
+          </a:solidFill>
+          <a:ln w="12700">
+            <a:solidFill>
+              <a:srgbClr val="E6E8F0"/>
+            </a:solidFill>
+            <a:prstDash val="solid"/>
+          </a:ln>
+          <a:effectLst>
+            <a:outerShdw sx="100000" sy="100000" kx="0" ky="0" algn="bl" rotWithShape="0" blurRad="114300" dist="38100" dir="8100000">
+              <a:srgbClr val="0F172A">
+                <a:alpha val="16000"/>
+              </a:srgbClr>
+            </a:outerShdw>
+          </a:effectLst>
+        </p:spPr>
+      </p:sp>
+      <p:sp>
+        <p:nvSpPr>
           <p:cNvPr id="26" name="Shape 18"/>
           <p:cNvSpPr/>
           <p:nvPr/>
@@ -16368,7 +19226,7 @@
                 <a:ea typeface="Calibri" pitchFamily="34" charset="-122"/>
                 <a:cs typeface="Calibri" pitchFamily="34" charset="-120"/>
               </a:rPr>
-              <a:t>16</a:t>
+              <a:t>17</a:t>
             </a:r>
             <a:endParaRPr lang="en-US" sz="900" dirty="0"/>
           </a:p>
@@ -16385,9 +19243,9 @@
 </p:sld>
 </file>
 
-<file path=ppt/slides/slide17.xml><?xml version="1.0" encoding="utf-8"?>
+<file path=ppt/slides/slide18.xml><?xml version="1.0" encoding="utf-8"?>
 <p:sld xmlns:a="http://schemas.openxmlformats.org/drawingml/2006/main" xmlns:r="http://schemas.openxmlformats.org/officeDocument/2006/relationships" xmlns:p="http://schemas.openxmlformats.org/presentationml/2006/main">
-  <p:cSld name="Slide 17">
+  <p:cSld name="Slide 18">
     <p:bg>
       <p:bgPr>
         <a:blipFill dpi="0" rotWithShape="1">

--- a/PRESENTATION.pptx
+++ b/PRESENTATION.pptx
@@ -2015,7 +2015,7 @@
           <a:p>
             <a:r>
               <a:rPr lang="en-US" dirty="0"/>
-              <a:t>Defend the design (3 min — the technical-acumen score). For each: name the choice, the alternative, and WHY. The headline trade-off is the deterministic gate — we deliberately keep the LLM OUT of executing payments. Agent-as-tool prevents loops structurally. We didn't force deterministic work into agents. We use native function-calling for reliability and reserve explicit ReAct for the one read-only advisor. One Gemini model on Vertex keeps ops and latency down. And graceful fallback + self-healing means we degrade, not fail. Invite the expert to push on any row — this is where the conversation gets good.</a:t>
+              <a:t>Defend the design (3 min — the technical-acumen score). For each: name the choice, the alternative, and WHY. Headline: the deterministic gate keeps the LLM OUT of executing payments. Agent-as-tool prevents loops structurally. We didn't force deterministic work into agents. Native function-calling for reliability; explicit ReAct only for the read-only advisor. The RSI critic is an LLM-as-judge — a single structured call, NOT an ADK/ReAct agent — because judging a failure has no multi-step tool loop. One Gemini model on Vertex; graceful fallback + self-heal so we degrade, not fail. The full log of every trade-off (options → chosen → why) is in TRADEOFFS.md — invite the expert to push on any row.</a:t>
             </a:r>
             <a:endParaRPr lang="en-US" dirty="0"/>
           </a:p>
@@ -31682,12 +31682,12 @@
         </p:nvSpPr>
         <p:spPr>
           <a:xfrm>
-            <a:off x="502920" y="1737360"/>
-            <a:ext cx="5364328" cy="1280160"/>
+            <a:off x="502920" y="1664208"/>
+            <a:ext cx="5364328" cy="1078992"/>
           </a:xfrm>
           <a:prstGeom prst="roundRect">
             <a:avLst>
-              <a:gd name="adj" fmla="val 5714"/>
+              <a:gd name="adj" fmla="val 6780"/>
             </a:avLst>
           </a:prstGeom>
           <a:solidFill>
@@ -31716,12 +31716,12 @@
         </p:nvSpPr>
         <p:spPr>
           <a:xfrm>
-            <a:off x="685800" y="1938528"/>
-            <a:ext cx="457200" cy="457200"/>
+            <a:off x="685800" y="1847088"/>
+            <a:ext cx="420624" cy="420624"/>
           </a:xfrm>
           <a:prstGeom prst="roundRect">
             <a:avLst>
-              <a:gd name="adj" fmla="val 20000"/>
+              <a:gd name="adj" fmla="val 21739"/>
             </a:avLst>
           </a:prstGeom>
           <a:solidFill>
@@ -31746,8 +31746,8 @@
         </p:blipFill>
         <p:spPr>
           <a:xfrm>
-            <a:off x="795528" y="2048256"/>
-            <a:ext cx="237744" cy="237744"/>
+            <a:off x="786384" y="1947672"/>
+            <a:ext cx="219456" cy="219456"/>
           </a:xfrm>
           <a:prstGeom prst="rect">
             <a:avLst/>
@@ -31762,8 +31762,8 @@
         </p:nvSpPr>
         <p:spPr>
           <a:xfrm>
-            <a:off x="1252728" y="1883664"/>
-            <a:ext cx="4449928" cy="310896"/>
+            <a:off x="1216152" y="1792224"/>
+            <a:ext cx="4486504" cy="274320"/>
           </a:xfrm>
           <a:prstGeom prst="rect">
             <a:avLst/>
@@ -31779,7 +31779,7 @@
               <a:buNone/>
             </a:pPr>
             <a:r>
-              <a:rPr lang="en-US" sz="1350" b="1" dirty="0">
+              <a:rPr lang="en-US" sz="1300" b="1" dirty="0">
                 <a:solidFill>
                   <a:srgbClr val="0F172A"/>
                 </a:solidFill>
@@ -31789,7 +31789,7 @@
               </a:rPr>
               <a:t>Deterministic transactional gate</a:t>
             </a:r>
-            <a:endParaRPr lang="en-US" sz="1350" dirty="0"/>
+            <a:endParaRPr lang="en-US" sz="1300" dirty="0"/>
           </a:p>
         </p:txBody>
       </p:sp>
@@ -31801,8 +31801,8 @@
         </p:nvSpPr>
         <p:spPr>
           <a:xfrm>
-            <a:off x="1252728" y="2167128"/>
-            <a:ext cx="4449928" cy="237744"/>
+            <a:off x="1216152" y="2066544"/>
+            <a:ext cx="4486504" cy="219456"/>
           </a:xfrm>
           <a:prstGeom prst="rect">
             <a:avLst/>
@@ -31818,7 +31818,7 @@
               <a:buNone/>
             </a:pPr>
             <a:r>
-              <a:rPr lang="en-US" sz="1050" i="1" dirty="0">
+              <a:rPr lang="en-US" sz="1000" i="1" dirty="0">
                 <a:solidFill>
                   <a:srgbClr val="E11D48"/>
                 </a:solidFill>
@@ -31826,13 +31826,13 @@
                 <a:ea typeface="Calibri" pitchFamily="34" charset="-122"/>
                 <a:cs typeface="Calibri" pitchFamily="34" charset="-120"/>
               </a:rPr>
-              <a:t>Chosen over: </a:t>
+              <a:t>vs </a:t>
             </a:r>
             <a:pPr indent="0" marL="0">
               <a:buNone/>
             </a:pPr>
             <a:r>
-              <a:rPr lang="en-US" sz="1050" i="1" dirty="0">
+              <a:rPr lang="en-US" sz="1000" i="1" dirty="0">
                 <a:solidFill>
                   <a:srgbClr val="8A94A6"/>
                 </a:solidFill>
@@ -31840,9 +31840,9 @@
                 <a:ea typeface="Calibri" pitchFamily="34" charset="-122"/>
                 <a:cs typeface="Calibri" pitchFamily="34" charset="-120"/>
               </a:rPr>
-              <a:t>LLM places orders end-to-end</a:t>
-            </a:r>
-            <a:endParaRPr lang="en-US" sz="1050" dirty="0"/>
+              <a:t>the LLM places orders</a:t>
+            </a:r>
+            <a:endParaRPr lang="en-US" sz="1000" dirty="0"/>
           </a:p>
         </p:txBody>
       </p:sp>
@@ -31854,8 +31854,8 @@
         </p:nvSpPr>
         <p:spPr>
           <a:xfrm>
-            <a:off x="704088" y="2450592"/>
-            <a:ext cx="4980280" cy="512064"/>
+            <a:off x="704088" y="2322576"/>
+            <a:ext cx="4980280" cy="384048"/>
           </a:xfrm>
           <a:prstGeom prst="rect">
             <a:avLst/>
@@ -31871,7 +31871,7 @@
               <a:buNone/>
             </a:pPr>
             <a:r>
-              <a:rPr lang="en-US" sz="1100" dirty="0">
+              <a:rPr lang="en-US" sz="1050" dirty="0">
                 <a:solidFill>
                   <a:srgbClr val="5B6577"/>
                 </a:solidFill>
@@ -31879,9 +31879,9 @@
                 <a:ea typeface="Calibri" pitchFamily="34" charset="-122"/>
                 <a:cs typeface="Calibri" pitchFamily="34" charset="-120"/>
               </a:rPr>
-              <a:t>“LLM orchestrates, code transacts.” Money/inventory actions are structured, auditable, reproducible — never a hallucinated purchase.</a:t>
-            </a:r>
-            <a:endParaRPr lang="en-US" sz="1100" dirty="0"/>
+              <a:t>Money/inventory = auditable code, never a hallucinated purchase.</a:t>
+            </a:r>
+            <a:endParaRPr lang="en-US" sz="1050" dirty="0"/>
           </a:p>
         </p:txBody>
       </p:sp>
@@ -31893,12 +31893,12 @@
         </p:nvSpPr>
         <p:spPr>
           <a:xfrm>
-            <a:off x="6324448" y="1737360"/>
-            <a:ext cx="5364328" cy="1280160"/>
+            <a:off x="6324448" y="1664208"/>
+            <a:ext cx="5364328" cy="1078992"/>
           </a:xfrm>
           <a:prstGeom prst="roundRect">
             <a:avLst>
-              <a:gd name="adj" fmla="val 5714"/>
+              <a:gd name="adj" fmla="val 6780"/>
             </a:avLst>
           </a:prstGeom>
           <a:solidFill>
@@ -31927,12 +31927,12 @@
         </p:nvSpPr>
         <p:spPr>
           <a:xfrm>
-            <a:off x="6507328" y="1938528"/>
-            <a:ext cx="457200" cy="457200"/>
+            <a:off x="6507328" y="1847088"/>
+            <a:ext cx="420624" cy="420624"/>
           </a:xfrm>
           <a:prstGeom prst="roundRect">
             <a:avLst>
-              <a:gd name="adj" fmla="val 20000"/>
+              <a:gd name="adj" fmla="val 21739"/>
             </a:avLst>
           </a:prstGeom>
           <a:solidFill>
@@ -31957,8 +31957,8 @@
         </p:blipFill>
         <p:spPr>
           <a:xfrm>
-            <a:off x="6617056" y="2048256"/>
-            <a:ext cx="237744" cy="237744"/>
+            <a:off x="6607912" y="1947672"/>
+            <a:ext cx="219456" cy="219456"/>
           </a:xfrm>
           <a:prstGeom prst="rect">
             <a:avLst/>
@@ -31973,8 +31973,8 @@
         </p:nvSpPr>
         <p:spPr>
           <a:xfrm>
-            <a:off x="7074256" y="1883664"/>
-            <a:ext cx="4449928" cy="310896"/>
+            <a:off x="7037680" y="1792224"/>
+            <a:ext cx="4486504" cy="274320"/>
           </a:xfrm>
           <a:prstGeom prst="rect">
             <a:avLst/>
@@ -31990,7 +31990,7 @@
               <a:buNone/>
             </a:pPr>
             <a:r>
-              <a:rPr lang="en-US" sz="1350" b="1" dirty="0">
+              <a:rPr lang="en-US" sz="1300" b="1" dirty="0">
                 <a:solidFill>
                   <a:srgbClr val="0F172A"/>
                 </a:solidFill>
@@ -32000,7 +32000,7 @@
               </a:rPr>
               <a:t>Agent-as-tool (not transfer)</a:t>
             </a:r>
-            <a:endParaRPr lang="en-US" sz="1350" dirty="0"/>
+            <a:endParaRPr lang="en-US" sz="1300" dirty="0"/>
           </a:p>
         </p:txBody>
       </p:sp>
@@ -32012,8 +32012,8 @@
         </p:nvSpPr>
         <p:spPr>
           <a:xfrm>
-            <a:off x="7074256" y="2167128"/>
-            <a:ext cx="4449928" cy="237744"/>
+            <a:off x="7037680" y="2066544"/>
+            <a:ext cx="4486504" cy="219456"/>
           </a:xfrm>
           <a:prstGeom prst="rect">
             <a:avLst/>
@@ -32029,7 +32029,7 @@
               <a:buNone/>
             </a:pPr>
             <a:r>
-              <a:rPr lang="en-US" sz="1050" i="1" dirty="0">
+              <a:rPr lang="en-US" sz="1000" i="1" dirty="0">
                 <a:solidFill>
                   <a:srgbClr val="E11D48"/>
                 </a:solidFill>
@@ -32037,13 +32037,13 @@
                 <a:ea typeface="Calibri" pitchFamily="34" charset="-122"/>
                 <a:cs typeface="Calibri" pitchFamily="34" charset="-120"/>
               </a:rPr>
-              <a:t>Chosen over: </a:t>
+              <a:t>vs </a:t>
             </a:r>
             <a:pPr indent="0" marL="0">
               <a:buNone/>
             </a:pPr>
             <a:r>
-              <a:rPr lang="en-US" sz="1050" i="1" dirty="0">
+              <a:rPr lang="en-US" sz="1000" i="1" dirty="0">
                 <a:solidFill>
                   <a:srgbClr val="8A94A6"/>
                 </a:solidFill>
@@ -32051,9 +32051,9 @@
                 <a:ea typeface="Calibri" pitchFamily="34" charset="-122"/>
                 <a:cs typeface="Calibri" pitchFamily="34" charset="-120"/>
               </a:rPr>
-              <a:t>sub_agents / transfer handoff</a:t>
-            </a:r>
-            <a:endParaRPr lang="en-US" sz="1050" dirty="0"/>
+              <a:t>sub_agents / transfer</a:t>
+            </a:r>
+            <a:endParaRPr lang="en-US" sz="1000" dirty="0"/>
           </a:p>
         </p:txBody>
       </p:sp>
@@ -32065,8 +32065,8 @@
         </p:nvSpPr>
         <p:spPr>
           <a:xfrm>
-            <a:off x="6525616" y="2450592"/>
-            <a:ext cx="4980280" cy="512064"/>
+            <a:off x="6525616" y="2322576"/>
+            <a:ext cx="4980280" cy="384048"/>
           </a:xfrm>
           <a:prstGeom prst="rect">
             <a:avLst/>
@@ -32082,7 +32082,7 @@
               <a:buNone/>
             </a:pPr>
             <a:r>
-              <a:rPr lang="en-US" sz="1100" dirty="0">
+              <a:rPr lang="en-US" sz="1050" dirty="0">
                 <a:solidFill>
                   <a:srgbClr val="5B6577"/>
                 </a:solidFill>
@@ -32090,9 +32090,9 @@
                 <a:ea typeface="Calibri" pitchFamily="34" charset="-122"/>
                 <a:cs typeface="Calibri" pitchFamily="34" charset="-120"/>
               </a:rPr>
-              <a:t>Orchestrator stays in control &amp; composes the reply; workers can't transfer back → delegation loops are impossible by construction.</a:t>
-            </a:r>
-            <a:endParaRPr lang="en-US" sz="1100" dirty="0"/>
+              <a:t>Workers can't hand control back → delegation loops can't form.</a:t>
+            </a:r>
+            <a:endParaRPr lang="en-US" sz="1050" dirty="0"/>
           </a:p>
         </p:txBody>
       </p:sp>
@@ -32104,12 +32104,12 @@
         </p:nvSpPr>
         <p:spPr>
           <a:xfrm>
-            <a:off x="502920" y="3182112"/>
-            <a:ext cx="5364328" cy="1280160"/>
+            <a:off x="502920" y="2871216"/>
+            <a:ext cx="5364328" cy="1078992"/>
           </a:xfrm>
           <a:prstGeom prst="roundRect">
             <a:avLst>
-              <a:gd name="adj" fmla="val 5714"/>
+              <a:gd name="adj" fmla="val 6780"/>
             </a:avLst>
           </a:prstGeom>
           <a:solidFill>
@@ -32138,12 +32138,12 @@
         </p:nvSpPr>
         <p:spPr>
           <a:xfrm>
-            <a:off x="685800" y="3383280"/>
-            <a:ext cx="457200" cy="457200"/>
+            <a:off x="685800" y="3054096"/>
+            <a:ext cx="420624" cy="420624"/>
           </a:xfrm>
           <a:prstGeom prst="roundRect">
             <a:avLst>
-              <a:gd name="adj" fmla="val 20000"/>
+              <a:gd name="adj" fmla="val 21739"/>
             </a:avLst>
           </a:prstGeom>
           <a:solidFill>
@@ -32168,8 +32168,8 @@
         </p:blipFill>
         <p:spPr>
           <a:xfrm>
-            <a:off x="795528" y="3493008"/>
-            <a:ext cx="237744" cy="237744"/>
+            <a:off x="786384" y="3154680"/>
+            <a:ext cx="219456" cy="219456"/>
           </a:xfrm>
           <a:prstGeom prst="rect">
             <a:avLst/>
@@ -32184,8 +32184,8 @@
         </p:nvSpPr>
         <p:spPr>
           <a:xfrm>
-            <a:off x="1252728" y="3328416"/>
-            <a:ext cx="4449928" cy="310896"/>
+            <a:off x="1216152" y="2999232"/>
+            <a:ext cx="4486504" cy="274320"/>
           </a:xfrm>
           <a:prstGeom prst="rect">
             <a:avLst/>
@@ -32201,7 +32201,7 @@
               <a:buNone/>
             </a:pPr>
             <a:r>
-              <a:rPr lang="en-US" sz="1350" b="1" dirty="0">
+              <a:rPr lang="en-US" sz="1300" b="1" dirty="0">
                 <a:solidFill>
                   <a:srgbClr val="0F172A"/>
                 </a:solidFill>
@@ -32211,7 +32211,7 @@
               </a:rPr>
               <a:t>Deterministic pre-processing</a:t>
             </a:r>
-            <a:endParaRPr lang="en-US" sz="1350" dirty="0"/>
+            <a:endParaRPr lang="en-US" sz="1300" dirty="0"/>
           </a:p>
         </p:txBody>
       </p:sp>
@@ -32223,8 +32223,8 @@
         </p:nvSpPr>
         <p:spPr>
           <a:xfrm>
-            <a:off x="1252728" y="3611880"/>
-            <a:ext cx="4449928" cy="237744"/>
+            <a:off x="1216152" y="3273552"/>
+            <a:ext cx="4486504" cy="219456"/>
           </a:xfrm>
           <a:prstGeom prst="rect">
             <a:avLst/>
@@ -32240,7 +32240,7 @@
               <a:buNone/>
             </a:pPr>
             <a:r>
-              <a:rPr lang="en-US" sz="1050" i="1" dirty="0">
+              <a:rPr lang="en-US" sz="1000" i="1" dirty="0">
                 <a:solidFill>
                   <a:srgbClr val="E11D48"/>
                 </a:solidFill>
@@ -32248,13 +32248,13 @@
                 <a:ea typeface="Calibri" pitchFamily="34" charset="-122"/>
                 <a:cs typeface="Calibri" pitchFamily="34" charset="-120"/>
               </a:rPr>
-              <a:t>Chosen over: </a:t>
+              <a:t>vs </a:t>
             </a:r>
             <a:pPr indent="0" marL="0">
               <a:buNone/>
             </a:pPr>
             <a:r>
-              <a:rPr lang="en-US" sz="1050" i="1" dirty="0">
+              <a:rPr lang="en-US" sz="1000" i="1" dirty="0">
                 <a:solidFill>
                   <a:srgbClr val="8A94A6"/>
                 </a:solidFill>
@@ -32262,9 +32262,9 @@
                 <a:ea typeface="Calibri" pitchFamily="34" charset="-122"/>
                 <a:cs typeface="Calibri" pitchFamily="34" charset="-120"/>
               </a:rPr>
-              <a:t>modality/lang/channel as LLM agents</a:t>
-            </a:r>
-            <a:endParaRPr lang="en-US" sz="1050" dirty="0"/>
+              <a:t>modality/lang as LLM agents</a:t>
+            </a:r>
+            <a:endParaRPr lang="en-US" sz="1000" dirty="0"/>
           </a:p>
         </p:txBody>
       </p:sp>
@@ -32276,8 +32276,8 @@
         </p:nvSpPr>
         <p:spPr>
           <a:xfrm>
-            <a:off x="704088" y="3895344"/>
-            <a:ext cx="4980280" cy="512064"/>
+            <a:off x="704088" y="3529584"/>
+            <a:ext cx="4980280" cy="384048"/>
           </a:xfrm>
           <a:prstGeom prst="rect">
             <a:avLst/>
@@ -32293,7 +32293,7 @@
               <a:buNone/>
             </a:pPr>
             <a:r>
-              <a:rPr lang="en-US" sz="1100" dirty="0">
+              <a:rPr lang="en-US" sz="1050" dirty="0">
                 <a:solidFill>
                   <a:srgbClr val="5B6577"/>
                 </a:solidFill>
@@ -32301,9 +32301,9 @@
                 <a:ea typeface="Calibri" pitchFamily="34" charset="-122"/>
                 <a:cs typeface="Calibri" pitchFamily="34" charset="-120"/>
               </a:rPr>
-              <a:t>We tried LLM agents — they failed for zero benefit. Detecting language needs no intelligence; plain code is reliable &amp; free.</a:t>
-            </a:r>
-            <a:endParaRPr lang="en-US" sz="1100" dirty="0"/>
+              <a:t>No intelligence needed → plain code is reliable &amp; free.</a:t>
+            </a:r>
+            <a:endParaRPr lang="en-US" sz="1050" dirty="0"/>
           </a:p>
         </p:txBody>
       </p:sp>
@@ -32315,12 +32315,12 @@
         </p:nvSpPr>
         <p:spPr>
           <a:xfrm>
-            <a:off x="6324448" y="3182112"/>
-            <a:ext cx="5364328" cy="1280160"/>
+            <a:off x="6324448" y="2871216"/>
+            <a:ext cx="5364328" cy="1078992"/>
           </a:xfrm>
           <a:prstGeom prst="roundRect">
             <a:avLst>
-              <a:gd name="adj" fmla="val 5714"/>
+              <a:gd name="adj" fmla="val 6780"/>
             </a:avLst>
           </a:prstGeom>
           <a:solidFill>
@@ -32349,12 +32349,12 @@
         </p:nvSpPr>
         <p:spPr>
           <a:xfrm>
-            <a:off x="6507328" y="3383280"/>
-            <a:ext cx="457200" cy="457200"/>
+            <a:off x="6507328" y="3054096"/>
+            <a:ext cx="420624" cy="420624"/>
           </a:xfrm>
           <a:prstGeom prst="roundRect">
             <a:avLst>
-              <a:gd name="adj" fmla="val 20000"/>
+              <a:gd name="adj" fmla="val 21739"/>
             </a:avLst>
           </a:prstGeom>
           <a:solidFill>
@@ -32379,8 +32379,8 @@
         </p:blipFill>
         <p:spPr>
           <a:xfrm>
-            <a:off x="6617056" y="3493008"/>
-            <a:ext cx="237744" cy="237744"/>
+            <a:off x="6607912" y="3154680"/>
+            <a:ext cx="219456" cy="219456"/>
           </a:xfrm>
           <a:prstGeom prst="rect">
             <a:avLst/>
@@ -32395,8 +32395,8 @@
         </p:nvSpPr>
         <p:spPr>
           <a:xfrm>
-            <a:off x="7074256" y="3328416"/>
-            <a:ext cx="4449928" cy="310896"/>
+            <a:off x="7037680" y="2999232"/>
+            <a:ext cx="4486504" cy="274320"/>
           </a:xfrm>
           <a:prstGeom prst="rect">
             <a:avLst/>
@@ -32412,7 +32412,7 @@
               <a:buNone/>
             </a:pPr>
             <a:r>
-              <a:rPr lang="en-US" sz="1350" b="1" dirty="0">
+              <a:rPr lang="en-US" sz="1300" b="1" dirty="0">
                 <a:solidFill>
                   <a:srgbClr val="0F172A"/>
                 </a:solidFill>
@@ -32420,9 +32420,9 @@
                 <a:ea typeface="Calibri" pitchFamily="34" charset="-122"/>
                 <a:cs typeface="Calibri" pitchFamily="34" charset="-120"/>
               </a:rPr>
-              <a:t>Native function-calling + targeted ReAct</a:t>
-            </a:r>
-            <a:endParaRPr lang="en-US" sz="1350" dirty="0"/>
+              <a:t>Native function-calling</a:t>
+            </a:r>
+            <a:endParaRPr lang="en-US" sz="1300" dirty="0"/>
           </a:p>
         </p:txBody>
       </p:sp>
@@ -32434,8 +32434,8 @@
         </p:nvSpPr>
         <p:spPr>
           <a:xfrm>
-            <a:off x="7074256" y="3611880"/>
-            <a:ext cx="4449928" cy="237744"/>
+            <a:off x="7037680" y="3273552"/>
+            <a:ext cx="4486504" cy="219456"/>
           </a:xfrm>
           <a:prstGeom prst="rect">
             <a:avLst/>
@@ -32451,7 +32451,7 @@
               <a:buNone/>
             </a:pPr>
             <a:r>
-              <a:rPr lang="en-US" sz="1050" i="1" dirty="0">
+              <a:rPr lang="en-US" sz="1000" i="1" dirty="0">
                 <a:solidFill>
                   <a:srgbClr val="E11D48"/>
                 </a:solidFill>
@@ -32459,13 +32459,13 @@
                 <a:ea typeface="Calibri" pitchFamily="34" charset="-122"/>
                 <a:cs typeface="Calibri" pitchFamily="34" charset="-120"/>
               </a:rPr>
-              <a:t>Chosen over: </a:t>
+              <a:t>vs </a:t>
             </a:r>
             <a:pPr indent="0" marL="0">
               <a:buNone/>
             </a:pPr>
             <a:r>
-              <a:rPr lang="en-US" sz="1050" i="1" dirty="0">
+              <a:rPr lang="en-US" sz="1000" i="1" dirty="0">
                 <a:solidFill>
                   <a:srgbClr val="8A94A6"/>
                 </a:solidFill>
@@ -32473,9 +32473,9 @@
                 <a:ea typeface="Calibri" pitchFamily="34" charset="-122"/>
                 <a:cs typeface="Calibri" pitchFamily="34" charset="-120"/>
               </a:rPr>
-              <a:t>PlanReActPlanner everywhere</a:t>
-            </a:r>
-            <a:endParaRPr lang="en-US" sz="1050" dirty="0"/>
+              <a:t>ReAct everywhere</a:t>
+            </a:r>
+            <a:endParaRPr lang="en-US" sz="1000" dirty="0"/>
           </a:p>
         </p:txBody>
       </p:sp>
@@ -32487,8 +32487,8 @@
         </p:nvSpPr>
         <p:spPr>
           <a:xfrm>
-            <a:off x="6525616" y="3895344"/>
-            <a:ext cx="4980280" cy="512064"/>
+            <a:off x="6525616" y="3529584"/>
+            <a:ext cx="4980280" cy="384048"/>
           </a:xfrm>
           <a:prstGeom prst="rect">
             <a:avLst/>
@@ -32504,7 +32504,7 @@
               <a:buNone/>
             </a:pPr>
             <a:r>
-              <a:rPr lang="en-US" sz="1100" dirty="0">
+              <a:rPr lang="en-US" sz="1050" dirty="0">
                 <a:solidFill>
                   <a:srgbClr val="5B6577"/>
                 </a:solidFill>
@@ -32512,9 +32512,9 @@
                 <a:ea typeface="Calibri" pitchFamily="34" charset="-122"/>
                 <a:cs typeface="Calibri" pitchFamily="34" charset="-120"/>
               </a:rPr>
-              <a:t>Native tool-calling for production (reliable, fast); explicit ReAct only for the read-only advisor, where the visible plan adds value.</a:t>
-            </a:r>
-            <a:endParaRPr lang="en-US" sz="1100" dirty="0"/>
+              <a:t>No brittle text parsing; explicit ReAct only for the read-only advisor.</a:t>
+            </a:r>
+            <a:endParaRPr lang="en-US" sz="1050" dirty="0"/>
           </a:p>
         </p:txBody>
       </p:sp>
@@ -32526,12 +32526,12 @@
         </p:nvSpPr>
         <p:spPr>
           <a:xfrm>
-            <a:off x="502920" y="4626864"/>
-            <a:ext cx="5364328" cy="1280160"/>
+            <a:off x="502920" y="4078224"/>
+            <a:ext cx="5364328" cy="1078992"/>
           </a:xfrm>
           <a:prstGeom prst="roundRect">
             <a:avLst>
-              <a:gd name="adj" fmla="val 5714"/>
+              <a:gd name="adj" fmla="val 6780"/>
             </a:avLst>
           </a:prstGeom>
           <a:solidFill>
@@ -32560,12 +32560,12 @@
         </p:nvSpPr>
         <p:spPr>
           <a:xfrm>
-            <a:off x="685800" y="4828032"/>
-            <a:ext cx="457200" cy="457200"/>
+            <a:off x="685800" y="4261104"/>
+            <a:ext cx="420624" cy="420624"/>
           </a:xfrm>
           <a:prstGeom prst="roundRect">
             <a:avLst>
-              <a:gd name="adj" fmla="val 20000"/>
+              <a:gd name="adj" fmla="val 21739"/>
             </a:avLst>
           </a:prstGeom>
           <a:solidFill>
@@ -32576,7 +32576,7 @@
       </p:sp>
       <p:pic>
         <p:nvPicPr>
-          <p:cNvPr id="30" name="Image 4" descr="icons/cloud.png">    </p:cNvPr>
+          <p:cNvPr id="30" name="Image 4" descr="icons/check.png">    </p:cNvPr>
           <p:cNvPicPr>
             <a:picLocks noChangeAspect="1"/>
           </p:cNvPicPr>
@@ -32590,8 +32590,8 @@
         </p:blipFill>
         <p:spPr>
           <a:xfrm>
-            <a:off x="795528" y="4937760"/>
-            <a:ext cx="237744" cy="237744"/>
+            <a:off x="786384" y="4361688"/>
+            <a:ext cx="219456" cy="219456"/>
           </a:xfrm>
           <a:prstGeom prst="rect">
             <a:avLst/>
@@ -32606,8 +32606,8 @@
         </p:nvSpPr>
         <p:spPr>
           <a:xfrm>
-            <a:off x="1252728" y="4773168"/>
-            <a:ext cx="4449928" cy="310896"/>
+            <a:off x="1216152" y="4206240"/>
+            <a:ext cx="4486504" cy="274320"/>
           </a:xfrm>
           <a:prstGeom prst="rect">
             <a:avLst/>
@@ -32623,7 +32623,7 @@
               <a:buNone/>
             </a:pPr>
             <a:r>
-              <a:rPr lang="en-US" sz="1350" b="1" dirty="0">
+              <a:rPr lang="en-US" sz="1300" b="1" dirty="0">
                 <a:solidFill>
                   <a:srgbClr val="0F172A"/>
                 </a:solidFill>
@@ -32631,9 +32631,9 @@
                 <a:ea typeface="Calibri" pitchFamily="34" charset="-122"/>
                 <a:cs typeface="Calibri" pitchFamily="34" charset="-120"/>
               </a:rPr>
-              <a:t>Gemini 2.5 Flash on Vertex (one model)</a:t>
-            </a:r>
-            <a:endParaRPr lang="en-US" sz="1350" dirty="0"/>
+              <a:t>LLM-as-judge (RSI critic)</a:t>
+            </a:r>
+            <a:endParaRPr lang="en-US" sz="1300" dirty="0"/>
           </a:p>
         </p:txBody>
       </p:sp>
@@ -32645,8 +32645,8 @@
         </p:nvSpPr>
         <p:spPr>
           <a:xfrm>
-            <a:off x="1252728" y="5056632"/>
-            <a:ext cx="4449928" cy="237744"/>
+            <a:off x="1216152" y="4480560"/>
+            <a:ext cx="4486504" cy="219456"/>
           </a:xfrm>
           <a:prstGeom prst="rect">
             <a:avLst/>
@@ -32662,7 +32662,7 @@
               <a:buNone/>
             </a:pPr>
             <a:r>
-              <a:rPr lang="en-US" sz="1050" i="1" dirty="0">
+              <a:rPr lang="en-US" sz="1000" i="1" dirty="0">
                 <a:solidFill>
                   <a:srgbClr val="E11D48"/>
                 </a:solidFill>
@@ -32670,13 +32670,13 @@
                 <a:ea typeface="Calibri" pitchFamily="34" charset="-122"/>
                 <a:cs typeface="Calibri" pitchFamily="34" charset="-120"/>
               </a:rPr>
-              <a:t>Chosen over: </a:t>
+              <a:t>vs </a:t>
             </a:r>
             <a:pPr indent="0" marL="0">
               <a:buNone/>
             </a:pPr>
             <a:r>
-              <a:rPr lang="en-US" sz="1050" i="1" dirty="0">
+              <a:rPr lang="en-US" sz="1000" i="1" dirty="0">
                 <a:solidFill>
                   <a:srgbClr val="8A94A6"/>
                 </a:solidFill>
@@ -32684,9 +32684,9 @@
                 <a:ea typeface="Calibri" pitchFamily="34" charset="-122"/>
                 <a:cs typeface="Calibri" pitchFamily="34" charset="-120"/>
               </a:rPr>
-              <a:t>many models / self-hosted</a:t>
-            </a:r>
-            <a:endParaRPr lang="en-US" sz="1050" dirty="0"/>
+              <a:t>an ADK / ReAct critic</a:t>
+            </a:r>
+            <a:endParaRPr lang="en-US" sz="1000" dirty="0"/>
           </a:p>
         </p:txBody>
       </p:sp>
@@ -32698,8 +32698,8 @@
         </p:nvSpPr>
         <p:spPr>
           <a:xfrm>
-            <a:off x="704088" y="5340096"/>
-            <a:ext cx="4980280" cy="512064"/>
+            <a:off x="704088" y="4736592"/>
+            <a:ext cx="4980280" cy="384048"/>
           </a:xfrm>
           <a:prstGeom prst="rect">
             <a:avLst/>
@@ -32715,7 +32715,7 @@
               <a:buNone/>
             </a:pPr>
             <a:r>
-              <a:rPr lang="en-US" sz="1100" dirty="0">
+              <a:rPr lang="en-US" sz="1050" dirty="0">
                 <a:solidFill>
                   <a:srgbClr val="5B6577"/>
                 </a:solidFill>
@@ -32723,9 +32723,9 @@
                 <a:ea typeface="Calibri" pitchFamily="34" charset="-122"/>
                 <a:cs typeface="Calibri" pitchFamily="34" charset="-120"/>
               </a:rPr>
-              <a:t>One natively-multimodal model does reasoning, language AND vision — less ops, lower latency, Vertex security &amp; quota.</a:t>
-            </a:r>
-            <a:endParaRPr lang="en-US" sz="1100" dirty="0"/>
+              <a:t>Judging a failure is ONE structured call — no tool loop needed.</a:t>
+            </a:r>
+            <a:endParaRPr lang="en-US" sz="1050" dirty="0"/>
           </a:p>
         </p:txBody>
       </p:sp>
@@ -32737,12 +32737,12 @@
         </p:nvSpPr>
         <p:spPr>
           <a:xfrm>
-            <a:off x="6324448" y="4626864"/>
-            <a:ext cx="5364328" cy="1280160"/>
+            <a:off x="6324448" y="4078224"/>
+            <a:ext cx="5364328" cy="1078992"/>
           </a:xfrm>
           <a:prstGeom prst="roundRect">
             <a:avLst>
-              <a:gd name="adj" fmla="val 5714"/>
+              <a:gd name="adj" fmla="val 6780"/>
             </a:avLst>
           </a:prstGeom>
           <a:solidFill>
@@ -32771,12 +32771,12 @@
         </p:nvSpPr>
         <p:spPr>
           <a:xfrm>
-            <a:off x="6507328" y="4828032"/>
-            <a:ext cx="457200" cy="457200"/>
+            <a:off x="6507328" y="4261104"/>
+            <a:ext cx="420624" cy="420624"/>
           </a:xfrm>
           <a:prstGeom prst="roundRect">
             <a:avLst>
-              <a:gd name="adj" fmla="val 20000"/>
+              <a:gd name="adj" fmla="val 21739"/>
             </a:avLst>
           </a:prstGeom>
           <a:solidFill>
@@ -32787,7 +32787,7 @@
       </p:sp>
       <p:pic>
         <p:nvPicPr>
-          <p:cNvPr id="36" name="Image 5" descr="icons/sync.png">    </p:cNvPr>
+          <p:cNvPr id="36" name="Image 5" descr="icons/cloud.png">    </p:cNvPr>
           <p:cNvPicPr>
             <a:picLocks noChangeAspect="1"/>
           </p:cNvPicPr>
@@ -32801,8 +32801,8 @@
         </p:blipFill>
         <p:spPr>
           <a:xfrm>
-            <a:off x="6617056" y="4937760"/>
-            <a:ext cx="237744" cy="237744"/>
+            <a:off x="6607912" y="4361688"/>
+            <a:ext cx="219456" cy="219456"/>
           </a:xfrm>
           <a:prstGeom prst="rect">
             <a:avLst/>
@@ -32817,8 +32817,8 @@
         </p:nvSpPr>
         <p:spPr>
           <a:xfrm>
-            <a:off x="7074256" y="4773168"/>
-            <a:ext cx="4449928" cy="310896"/>
+            <a:off x="7037680" y="4206240"/>
+            <a:ext cx="4486504" cy="274320"/>
           </a:xfrm>
           <a:prstGeom prst="rect">
             <a:avLst/>
@@ -32834,7 +32834,7 @@
               <a:buNone/>
             </a:pPr>
             <a:r>
-              <a:rPr lang="en-US" sz="1350" b="1" dirty="0">
+              <a:rPr lang="en-US" sz="1300" b="1" dirty="0">
                 <a:solidFill>
                   <a:srgbClr val="0F172A"/>
                 </a:solidFill>
@@ -32842,9 +32842,9 @@
                 <a:ea typeface="Calibri" pitchFamily="34" charset="-122"/>
                 <a:cs typeface="Calibri" pitchFamily="34" charset="-120"/>
               </a:rPr>
-              <a:t>Graceful fallback + self-heal</a:t>
-            </a:r>
-            <a:endParaRPr lang="en-US" sz="1350" dirty="0"/>
+              <a:t>One Gemini model on Vertex</a:t>
+            </a:r>
+            <a:endParaRPr lang="en-US" sz="1300" dirty="0"/>
           </a:p>
         </p:txBody>
       </p:sp>
@@ -32856,8 +32856,8 @@
         </p:nvSpPr>
         <p:spPr>
           <a:xfrm>
-            <a:off x="7074256" y="5056632"/>
-            <a:ext cx="4449928" cy="237744"/>
+            <a:off x="7037680" y="4480560"/>
+            <a:ext cx="4486504" cy="219456"/>
           </a:xfrm>
           <a:prstGeom prst="rect">
             <a:avLst/>
@@ -32873,7 +32873,7 @@
               <a:buNone/>
             </a:pPr>
             <a:r>
-              <a:rPr lang="en-US" sz="1050" i="1" dirty="0">
+              <a:rPr lang="en-US" sz="1000" i="1" dirty="0">
                 <a:solidFill>
                   <a:srgbClr val="E11D48"/>
                 </a:solidFill>
@@ -32881,13 +32881,13 @@
                 <a:ea typeface="Calibri" pitchFamily="34" charset="-122"/>
                 <a:cs typeface="Calibri" pitchFamily="34" charset="-120"/>
               </a:rPr>
-              <a:t>Chosen over: </a:t>
+              <a:t>vs </a:t>
             </a:r>
             <a:pPr indent="0" marL="0">
               <a:buNone/>
             </a:pPr>
             <a:r>
-              <a:rPr lang="en-US" sz="1050" i="1" dirty="0">
+              <a:rPr lang="en-US" sz="1000" i="1" dirty="0">
                 <a:solidFill>
                   <a:srgbClr val="8A94A6"/>
                 </a:solidFill>
@@ -32895,9 +32895,9 @@
                 <a:ea typeface="Calibri" pitchFamily="34" charset="-122"/>
                 <a:cs typeface="Calibri" pitchFamily="34" charset="-120"/>
               </a:rPr>
-              <a:t>fail the request</a:t>
-            </a:r>
-            <a:endParaRPr lang="en-US" sz="1050" dirty="0"/>
+              <a:t>many models / self-host</a:t>
+            </a:r>
+            <a:endParaRPr lang="en-US" sz="1000" dirty="0"/>
           </a:p>
         </p:txBody>
       </p:sp>
@@ -32909,8 +32909,8 @@
         </p:nvSpPr>
         <p:spPr>
           <a:xfrm>
-            <a:off x="6525616" y="5340096"/>
-            <a:ext cx="4980280" cy="512064"/>
+            <a:off x="6525616" y="4736592"/>
+            <a:ext cx="4980280" cy="384048"/>
           </a:xfrm>
           <a:prstGeom prst="rect">
             <a:avLst/>
@@ -32926,7 +32926,7 @@
               <a:buNone/>
             </a:pPr>
             <a:r>
-              <a:rPr lang="en-US" sz="1100" dirty="0">
+              <a:rPr lang="en-US" sz="1050" dirty="0">
                 <a:solidFill>
                   <a:srgbClr val="5B6577"/>
                 </a:solidFill>
@@ -32934,15 +32934,381 @@
                 <a:ea typeface="Calibri" pitchFamily="34" charset="-122"/>
                 <a:cs typeface="Calibri" pitchFamily="34" charset="-120"/>
               </a:rPr>
-              <a:t>If the LLM/ADK path errors, a deterministic engine answers; the Guardian heals forward — the service degrades, it doesn't go down.</a:t>
-            </a:r>
-            <a:endParaRPr lang="en-US" sz="1100" dirty="0"/>
-          </a:p>
-        </p:txBody>
-      </p:sp>
-      <p:sp>
-        <p:nvSpPr>
-          <p:cNvPr id="40" name="Text 32"/>
+              <a:t>Reasoning + language + vision in one managed model — less ops.</a:t>
+            </a:r>
+            <a:endParaRPr lang="en-US" sz="1050" dirty="0"/>
+          </a:p>
+        </p:txBody>
+      </p:sp>
+      <p:sp>
+        <p:nvSpPr>
+          <p:cNvPr id="40" name="Shape 32"/>
+          <p:cNvSpPr/>
+          <p:nvPr/>
+        </p:nvSpPr>
+        <p:spPr>
+          <a:xfrm>
+            <a:off x="502920" y="5285232"/>
+            <a:ext cx="5364328" cy="1078992"/>
+          </a:xfrm>
+          <a:prstGeom prst="roundRect">
+            <a:avLst>
+              <a:gd name="adj" fmla="val 6780"/>
+            </a:avLst>
+          </a:prstGeom>
+          <a:solidFill>
+            <a:srgbClr val="FFFFFF"/>
+          </a:solidFill>
+          <a:ln w="12700">
+            <a:solidFill>
+              <a:srgbClr val="E6E8F0"/>
+            </a:solidFill>
+            <a:prstDash val="solid"/>
+          </a:ln>
+          <a:effectLst>
+            <a:outerShdw sx="100000" sy="100000" kx="0" ky="0" algn="bl" rotWithShape="0" blurRad="114300" dist="38100" dir="8100000">
+              <a:srgbClr val="0F172A">
+                <a:alpha val="16000"/>
+              </a:srgbClr>
+            </a:outerShdw>
+          </a:effectLst>
+        </p:spPr>
+      </p:sp>
+      <p:sp>
+        <p:nvSpPr>
+          <p:cNvPr id="41" name="Shape 33"/>
+          <p:cNvSpPr/>
+          <p:nvPr/>
+        </p:nvSpPr>
+        <p:spPr>
+          <a:xfrm>
+            <a:off x="685800" y="5468112"/>
+            <a:ext cx="420624" cy="420624"/>
+          </a:xfrm>
+          <a:prstGeom prst="roundRect">
+            <a:avLst>
+              <a:gd name="adj" fmla="val 21739"/>
+            </a:avLst>
+          </a:prstGeom>
+          <a:solidFill>
+            <a:srgbClr val="7C3AED"/>
+          </a:solidFill>
+          <a:ln/>
+        </p:spPr>
+      </p:sp>
+      <p:pic>
+        <p:nvPicPr>
+          <p:cNvPr id="42" name="Image 6" descr="icons/sync.png">    </p:cNvPr>
+          <p:cNvPicPr>
+            <a:picLocks noChangeAspect="1"/>
+          </p:cNvPicPr>
+          <p:nvPr/>
+        </p:nvPicPr>
+        <p:blipFill>
+          <a:blip r:embed="rId7"/>
+          <a:stretch>
+            <a:fillRect/>
+          </a:stretch>
+        </p:blipFill>
+        <p:spPr>
+          <a:xfrm>
+            <a:off x="786384" y="5568696"/>
+            <a:ext cx="219456" cy="219456"/>
+          </a:xfrm>
+          <a:prstGeom prst="rect">
+            <a:avLst/>
+          </a:prstGeom>
+        </p:spPr>
+      </p:pic>
+      <p:sp>
+        <p:nvSpPr>
+          <p:cNvPr id="43" name="Text 34"/>
+          <p:cNvSpPr/>
+          <p:nvPr/>
+        </p:nvSpPr>
+        <p:spPr>
+          <a:xfrm>
+            <a:off x="1216152" y="5413248"/>
+            <a:ext cx="4486504" cy="274320"/>
+          </a:xfrm>
+          <a:prstGeom prst="rect">
+            <a:avLst/>
+          </a:prstGeom>
+          <a:noFill/>
+          <a:ln/>
+        </p:spPr>
+        <p:txBody>
+          <a:bodyPr wrap="square" lIns="0" tIns="0" rIns="0" bIns="0" rtlCol="0" anchor="ctr"/>
+          <a:lstStyle/>
+          <a:p>
+            <a:pPr indent="0" marL="0">
+              <a:buNone/>
+            </a:pPr>
+            <a:r>
+              <a:rPr lang="en-US" sz="1300" b="1" dirty="0">
+                <a:solidFill>
+                  <a:srgbClr val="0F172A"/>
+                </a:solidFill>
+                <a:latin typeface="Calibri" pitchFamily="34" charset="0"/>
+                <a:ea typeface="Calibri" pitchFamily="34" charset="-122"/>
+                <a:cs typeface="Calibri" pitchFamily="34" charset="-120"/>
+              </a:rPr>
+              <a:t>Graceful fallback + self-heal</a:t>
+            </a:r>
+            <a:endParaRPr lang="en-US" sz="1300" dirty="0"/>
+          </a:p>
+        </p:txBody>
+      </p:sp>
+      <p:sp>
+        <p:nvSpPr>
+          <p:cNvPr id="44" name="Text 35"/>
+          <p:cNvSpPr/>
+          <p:nvPr/>
+        </p:nvSpPr>
+        <p:spPr>
+          <a:xfrm>
+            <a:off x="1216152" y="5687568"/>
+            <a:ext cx="4486504" cy="219456"/>
+          </a:xfrm>
+          <a:prstGeom prst="rect">
+            <a:avLst/>
+          </a:prstGeom>
+          <a:noFill/>
+          <a:ln/>
+        </p:spPr>
+        <p:txBody>
+          <a:bodyPr wrap="square" lIns="0" tIns="0" rIns="0" bIns="0" rtlCol="0" anchor="ctr"/>
+          <a:lstStyle/>
+          <a:p>
+            <a:pPr indent="0" marL="0">
+              <a:buNone/>
+            </a:pPr>
+            <a:r>
+              <a:rPr lang="en-US" sz="1000" i="1" dirty="0">
+                <a:solidFill>
+                  <a:srgbClr val="E11D48"/>
+                </a:solidFill>
+                <a:latin typeface="Calibri" pitchFamily="34" charset="0"/>
+                <a:ea typeface="Calibri" pitchFamily="34" charset="-122"/>
+                <a:cs typeface="Calibri" pitchFamily="34" charset="-120"/>
+              </a:rPr>
+              <a:t>vs </a:t>
+            </a:r>
+            <a:pPr indent="0" marL="0">
+              <a:buNone/>
+            </a:pPr>
+            <a:r>
+              <a:rPr lang="en-US" sz="1000" i="1" dirty="0">
+                <a:solidFill>
+                  <a:srgbClr val="8A94A6"/>
+                </a:solidFill>
+                <a:latin typeface="Calibri" pitchFamily="34" charset="0"/>
+                <a:ea typeface="Calibri" pitchFamily="34" charset="-122"/>
+                <a:cs typeface="Calibri" pitchFamily="34" charset="-120"/>
+              </a:rPr>
+              <a:t>fail the request</a:t>
+            </a:r>
+            <a:endParaRPr lang="en-US" sz="1000" dirty="0"/>
+          </a:p>
+        </p:txBody>
+      </p:sp>
+      <p:sp>
+        <p:nvSpPr>
+          <p:cNvPr id="45" name="Text 36"/>
+          <p:cNvSpPr/>
+          <p:nvPr/>
+        </p:nvSpPr>
+        <p:spPr>
+          <a:xfrm>
+            <a:off x="704088" y="5943600"/>
+            <a:ext cx="4980280" cy="384048"/>
+          </a:xfrm>
+          <a:prstGeom prst="rect">
+            <a:avLst/>
+          </a:prstGeom>
+          <a:noFill/>
+          <a:ln/>
+        </p:spPr>
+        <p:txBody>
+          <a:bodyPr wrap="square" lIns="0" tIns="0" rIns="0" bIns="0" rtlCol="0" anchor="t"/>
+          <a:lstStyle/>
+          <a:p>
+            <a:pPr indent="0" marL="0">
+              <a:buNone/>
+            </a:pPr>
+            <a:r>
+              <a:rPr lang="en-US" sz="1050" dirty="0">
+                <a:solidFill>
+                  <a:srgbClr val="5B6577"/>
+                </a:solidFill>
+                <a:latin typeface="Calibri" pitchFamily="34" charset="0"/>
+                <a:ea typeface="Calibri" pitchFamily="34" charset="-122"/>
+                <a:cs typeface="Calibri" pitchFamily="34" charset="-120"/>
+              </a:rPr>
+              <a:t>Degrade, don't go down — fallback engine + Guardian heal-forward.</a:t>
+            </a:r>
+            <a:endParaRPr lang="en-US" sz="1050" dirty="0"/>
+          </a:p>
+        </p:txBody>
+      </p:sp>
+      <p:sp>
+        <p:nvSpPr>
+          <p:cNvPr id="46" name="Shape 37"/>
+          <p:cNvSpPr/>
+          <p:nvPr/>
+        </p:nvSpPr>
+        <p:spPr>
+          <a:xfrm>
+            <a:off x="6324448" y="5285232"/>
+            <a:ext cx="5364328" cy="1078992"/>
+          </a:xfrm>
+          <a:prstGeom prst="roundRect">
+            <a:avLst>
+              <a:gd name="adj" fmla="val 6780"/>
+            </a:avLst>
+          </a:prstGeom>
+          <a:solidFill>
+            <a:srgbClr val="7C3AED"/>
+          </a:solidFill>
+          <a:ln/>
+          <a:effectLst>
+            <a:outerShdw sx="100000" sy="100000" kx="0" ky="0" algn="bl" rotWithShape="0" blurRad="114300" dist="38100" dir="8100000">
+              <a:srgbClr val="0F172A">
+                <a:alpha val="16000"/>
+              </a:srgbClr>
+            </a:outerShdw>
+          </a:effectLst>
+        </p:spPr>
+      </p:sp>
+      <p:sp>
+        <p:nvSpPr>
+          <p:cNvPr id="47" name="Shape 38"/>
+          <p:cNvSpPr/>
+          <p:nvPr/>
+        </p:nvSpPr>
+        <p:spPr>
+          <a:xfrm>
+            <a:off x="6507328" y="5468112"/>
+            <a:ext cx="420624" cy="420624"/>
+          </a:xfrm>
+          <a:prstGeom prst="roundRect">
+            <a:avLst>
+              <a:gd name="adj" fmla="val 21739"/>
+            </a:avLst>
+          </a:prstGeom>
+          <a:solidFill>
+            <a:srgbClr val="FFFFFF">
+              <a:alpha val="20000"/>
+            </a:srgbClr>
+          </a:solidFill>
+          <a:ln/>
+        </p:spPr>
+      </p:sp>
+      <p:pic>
+        <p:nvPicPr>
+          <p:cNvPr id="48" name="Image 7" descr="icons/bulb.png">    </p:cNvPr>
+          <p:cNvPicPr>
+            <a:picLocks noChangeAspect="1"/>
+          </p:cNvPicPr>
+          <p:nvPr/>
+        </p:nvPicPr>
+        <p:blipFill>
+          <a:blip r:embed="rId8"/>
+          <a:stretch>
+            <a:fillRect/>
+          </a:stretch>
+        </p:blipFill>
+        <p:spPr>
+          <a:xfrm>
+            <a:off x="6607912" y="5568696"/>
+            <a:ext cx="219456" cy="219456"/>
+          </a:xfrm>
+          <a:prstGeom prst="rect">
+            <a:avLst/>
+          </a:prstGeom>
+        </p:spPr>
+      </p:pic>
+      <p:sp>
+        <p:nvSpPr>
+          <p:cNvPr id="49" name="Text 39"/>
+          <p:cNvSpPr/>
+          <p:nvPr/>
+        </p:nvSpPr>
+        <p:spPr>
+          <a:xfrm>
+            <a:off x="7037680" y="5449824"/>
+            <a:ext cx="4486504" cy="274320"/>
+          </a:xfrm>
+          <a:prstGeom prst="rect">
+            <a:avLst/>
+          </a:prstGeom>
+          <a:noFill/>
+          <a:ln/>
+        </p:spPr>
+        <p:txBody>
+          <a:bodyPr wrap="square" lIns="0" tIns="0" rIns="0" bIns="0" rtlCol="0" anchor="ctr"/>
+          <a:lstStyle/>
+          <a:p>
+            <a:pPr indent="0" marL="0">
+              <a:buNone/>
+            </a:pPr>
+            <a:r>
+              <a:rPr lang="en-US" sz="1300" b="1" dirty="0">
+                <a:solidFill>
+                  <a:srgbClr val="FFFFFF"/>
+                </a:solidFill>
+                <a:latin typeface="Calibri" pitchFamily="34" charset="0"/>
+                <a:ea typeface="Calibri" pitchFamily="34" charset="-122"/>
+                <a:cs typeface="Calibri" pitchFamily="34" charset="-120"/>
+              </a:rPr>
+              <a:t>Full trade-off log</a:t>
+            </a:r>
+            <a:endParaRPr lang="en-US" sz="1300" dirty="0"/>
+          </a:p>
+        </p:txBody>
+      </p:sp>
+      <p:sp>
+        <p:nvSpPr>
+          <p:cNvPr id="50" name="Text 40"/>
+          <p:cNvSpPr/>
+          <p:nvPr/>
+        </p:nvSpPr>
+        <p:spPr>
+          <a:xfrm>
+            <a:off x="6525616" y="5852160"/>
+            <a:ext cx="4980280" cy="457200"/>
+          </a:xfrm>
+          <a:prstGeom prst="rect">
+            <a:avLst/>
+          </a:prstGeom>
+          <a:noFill/>
+          <a:ln/>
+        </p:spPr>
+        <p:txBody>
+          <a:bodyPr wrap="square" lIns="0" tIns="0" rIns="0" bIns="0" rtlCol="0" anchor="t"/>
+          <a:lstStyle/>
+          <a:p>
+            <a:pPr indent="0" marL="0">
+              <a:buNone/>
+            </a:pPr>
+            <a:r>
+              <a:rPr lang="en-US" sz="1050" dirty="0">
+                <a:solidFill>
+                  <a:srgbClr val="EDE7FB"/>
+                </a:solidFill>
+                <a:latin typeface="Calibri" pitchFamily="34" charset="0"/>
+                <a:ea typeface="Calibri" pitchFamily="34" charset="-122"/>
+                <a:cs typeface="Calibri" pitchFamily="34" charset="-120"/>
+              </a:rPr>
+              <a:t>TRADEOFFS.md — every decision: options considered → chosen → why / cost accepted.</a:t>
+            </a:r>
+            <a:endParaRPr lang="en-US" sz="1050" dirty="0"/>
+          </a:p>
+        </p:txBody>
+      </p:sp>
+      <p:sp>
+        <p:nvSpPr>
+          <p:cNvPr id="51" name="Text 41"/>
           <p:cNvSpPr/>
           <p:nvPr/>
         </p:nvSpPr>
@@ -32981,7 +33347,7 @@
       </p:sp>
       <p:sp>
         <p:nvSpPr>
-          <p:cNvPr id="41" name="Text 33"/>
+          <p:cNvPr id="52" name="Text 42"/>
           <p:cNvSpPr/>
           <p:nvPr/>
         </p:nvSpPr>
